--- a/samples/Шаблон_презентации_VK_Education__classic.pptx
+++ b/samples/Шаблон_презентации_VK_Education__classic.pptx
@@ -16,8 +16,6 @@
     <p:sldId id="315" r:id="rId68"/>
     <p:sldId id="316" r:id="rId69"/>
     <p:sldId id="317" r:id="rId70"/>
-    <p:sldId id="318" r:id="rId71"/>
-    <p:sldId id="319" r:id="rId72"/>
   </p:sldIdLst>
   <p:sldSz cy="6858000" cx="12192000"/>
   <p:notesSz cx="6858000" cy="9144000"/>
@@ -258,6 +256,380 @@
     </a:lvl9pPr>
   </p:defaultTextStyle>
 </p:presentation>
+</file>
+
+<file path=ppt/charts/chart1.xml><?xml version="1.0" encoding="utf-8"?>
+<c:chartSpace xmlns:c="http://schemas.openxmlformats.org/drawingml/2006/chart" xmlns:a="http://schemas.openxmlformats.org/drawingml/2006/main" xmlns:r="http://schemas.openxmlformats.org/officeDocument/2006/relationships">
+  <c:date1904 val="0"/>
+  <c:chart>
+    <c:autoTitleDeleted val="1"/>
+    <c:plotArea>
+      <c:barChart>
+        <c:barDir val="col"/>
+        <c:grouping val="clustered"/>
+        <c:ser>
+          <c:idx val="0"/>
+          <c:order val="0"/>
+          <c:tx>
+            <c:strRef>
+              <c:f>Sheet1!$B$1</c:f>
+              <c:strCache>
+                <c:ptCount val="1"/>
+                <c:pt idx="0">
+                  <c:v>Время</c:v>
+                </c:pt>
+              </c:strCache>
+            </c:strRef>
+          </c:tx>
+          <c:spPr>
+            <a:solidFill>
+              <a:srgbClr val="0077FF"/>
+            </a:solidFill>
+            <a:ln>
+              <a:solidFill>
+                <a:srgbClr val="0077FF"/>
+              </a:solidFill>
+            </a:ln>
+          </c:spPr>
+          <c:cat>
+            <c:strRef>
+              <c:f>Sheet1!$A$2:$A$3</c:f>
+              <c:strCache>
+                <c:ptCount val="2"/>
+                <c:pt idx="0">
+                  <c:v>Сборка</c:v>
+                </c:pt>
+                <c:pt idx="1">
+                  <c:v>Правки</c:v>
+                </c:pt>
+              </c:strCache>
+            </c:strRef>
+          </c:cat>
+          <c:val>
+            <c:numRef>
+              <c:f>Sheet1!$B$2:$B$3</c:f>
+              <c:numCache>
+                <c:formatCode>General</c:formatCode>
+                <c:ptCount val="2"/>
+                <c:pt idx="0">
+                  <c:v>186.0</c:v>
+                </c:pt>
+                <c:pt idx="1">
+                  <c:v>74.0</c:v>
+                </c:pt>
+              </c:numCache>
+            </c:numRef>
+          </c:val>
+        </c:ser>
+        <c:gapWidth val="60"/>
+        <c:axId val="-2068027336"/>
+        <c:axId val="-2113994440"/>
+      </c:barChart>
+      <c:catAx>
+        <c:axId val="-2068027336"/>
+        <c:scaling>
+          <c:orientation val="minMax"/>
+        </c:scaling>
+        <c:delete val="0"/>
+        <c:axPos val="b"/>
+        <c:majorTickMark val="out"/>
+        <c:minorTickMark val="none"/>
+        <c:tickLblPos val="nextTo"/>
+        <c:txPr>
+          <a:bodyPr/>
+          <a:lstStyle/>
+          <a:p>
+            <a:pPr>
+              <a:defRPr sz="1100" b="0">
+                <a:solidFill>
+                  <a:srgbClr val="000000"/>
+                </a:solidFill>
+                <a:latin typeface="Arial"/>
+                <a:ea typeface="Arial"/>
+                <a:cs typeface="Arial"/>
+              </a:defRPr>
+            </a:pPr>
+          </a:p>
+        </c:txPr>
+        <c:crossAx val="-2113994440"/>
+        <c:crosses val="autoZero"/>
+        <c:auto val="1"/>
+        <c:lblAlgn val="ctr"/>
+        <c:lblOffset val="100"/>
+        <c:noMultiLvlLbl val="0"/>
+      </c:catAx>
+      <c:valAx>
+        <c:axId val="-2113994440"/>
+        <c:scaling/>
+        <c:delete val="0"/>
+        <c:axPos val="l"/>
+        <c:majorGridlines>
+          <c:spPr>
+            <a:ln w="9525">
+              <a:solidFill>
+                <a:srgbClr val="D1D1D1"/>
+              </a:solidFill>
+            </a:ln>
+          </c:spPr>
+        </c:majorGridlines>
+        <c:title>
+          <c:tx>
+            <c:rich>
+              <a:bodyPr/>
+              <a:lstStyle/>
+              <a:p>
+                <a:pPr>
+                  <a:defRPr sz="1100" b="0">
+                    <a:solidFill>
+                      <a:srgbClr val="000000"/>
+                    </a:solidFill>
+                    <a:latin typeface="Arial"/>
+                    <a:ea typeface="Arial"/>
+                    <a:cs typeface="Arial"/>
+                  </a:defRPr>
+                </a:pPr>
+                <a:r>
+                  <a:t>мин</a:t>
+                </a:r>
+              </a:p>
+            </c:rich>
+          </c:tx>
+          <c:layout/>
+          <c:overlay val="0"/>
+        </c:title>
+        <c:majorTickMark val="out"/>
+        <c:minorTickMark val="none"/>
+        <c:tickLblPos val="nextTo"/>
+        <c:txPr>
+          <a:bodyPr/>
+          <a:lstStyle/>
+          <a:p>
+            <a:pPr>
+              <a:defRPr sz="1100" b="0">
+                <a:solidFill>
+                  <a:srgbClr val="000000"/>
+                </a:solidFill>
+                <a:latin typeface="Arial"/>
+                <a:ea typeface="Arial"/>
+                <a:cs typeface="Arial"/>
+              </a:defRPr>
+            </a:pPr>
+          </a:p>
+        </c:txPr>
+        <c:crossAx val="-2068027336"/>
+        <c:crosses val="autoZero"/>
+      </c:valAx>
+    </c:plotArea>
+    <c:dispBlanksAs val="gap"/>
+  </c:chart>
+  <c:txPr>
+    <a:bodyPr/>
+    <a:lstStyle/>
+    <a:p>
+      <a:pPr>
+        <a:defRPr sz="1200" b="0">
+          <a:solidFill>
+            <a:srgbClr val="000000"/>
+          </a:solidFill>
+          <a:latin typeface="Arial"/>
+          <a:ea typeface="Arial"/>
+          <a:cs typeface="Arial"/>
+        </a:defRPr>
+      </a:pPr>
+      <a:endParaRPr lang="en-US"/>
+    </a:p>
+  </c:txPr>
+  <c:externalData r:id="rId1">
+    <c:autoUpdate val="0"/>
+  </c:externalData>
+</c:chartSpace>
+</file>
+
+<file path=ppt/charts/chart2.xml><?xml version="1.0" encoding="utf-8"?>
+<c:chartSpace xmlns:c="http://schemas.openxmlformats.org/drawingml/2006/chart" xmlns:a="http://schemas.openxmlformats.org/drawingml/2006/main" xmlns:r="http://schemas.openxmlformats.org/officeDocument/2006/relationships">
+  <c:date1904 val="0"/>
+  <c:chart>
+    <c:autoTitleDeleted val="1"/>
+    <c:plotArea>
+      <c:barChart>
+        <c:barDir val="col"/>
+        <c:grouping val="clustered"/>
+        <c:ser>
+          <c:idx val="0"/>
+          <c:order val="0"/>
+          <c:tx>
+            <c:strRef>
+              <c:f>Sheet1!$B$1</c:f>
+              <c:strCache>
+                <c:ptCount val="1"/>
+                <c:pt idx="0">
+                  <c:v>Время</c:v>
+                </c:pt>
+              </c:strCache>
+            </c:strRef>
+          </c:tx>
+          <c:spPr>
+            <a:solidFill>
+              <a:srgbClr val="0077FF"/>
+            </a:solidFill>
+            <a:ln>
+              <a:solidFill>
+                <a:srgbClr val="0077FF"/>
+              </a:solidFill>
+            </a:ln>
+          </c:spPr>
+          <c:cat>
+            <c:strRef>
+              <c:f>Sheet1!$A$2:$A$3</c:f>
+              <c:strCache>
+                <c:ptCount val="2"/>
+                <c:pt idx="0">
+                  <c:v>До пилота</c:v>
+                </c:pt>
+                <c:pt idx="1">
+                  <c:v>После пилота</c:v>
+                </c:pt>
+              </c:strCache>
+            </c:strRef>
+          </c:cat>
+          <c:val>
+            <c:numRef>
+              <c:f>Sheet1!$B$2:$B$3</c:f>
+              <c:numCache>
+                <c:formatCode>General</c:formatCode>
+                <c:ptCount val="2"/>
+                <c:pt idx="0">
+                  <c:v>186.0</c:v>
+                </c:pt>
+                <c:pt idx="1">
+                  <c:v>4.0</c:v>
+                </c:pt>
+              </c:numCache>
+            </c:numRef>
+          </c:val>
+        </c:ser>
+        <c:gapWidth val="60"/>
+        <c:axId val="-2068027336"/>
+        <c:axId val="-2113994440"/>
+      </c:barChart>
+      <c:catAx>
+        <c:axId val="-2068027336"/>
+        <c:scaling>
+          <c:orientation val="minMax"/>
+        </c:scaling>
+        <c:delete val="0"/>
+        <c:axPos val="b"/>
+        <c:majorTickMark val="out"/>
+        <c:minorTickMark val="none"/>
+        <c:tickLblPos val="nextTo"/>
+        <c:txPr>
+          <a:bodyPr/>
+          <a:lstStyle/>
+          <a:p>
+            <a:pPr>
+              <a:defRPr sz="1100" b="0">
+                <a:solidFill>
+                  <a:srgbClr val="000000"/>
+                </a:solidFill>
+                <a:latin typeface="Arial"/>
+                <a:ea typeface="Arial"/>
+                <a:cs typeface="Arial"/>
+              </a:defRPr>
+            </a:pPr>
+          </a:p>
+        </c:txPr>
+        <c:crossAx val="-2113994440"/>
+        <c:crosses val="autoZero"/>
+        <c:auto val="1"/>
+        <c:lblAlgn val="ctr"/>
+        <c:lblOffset val="100"/>
+        <c:noMultiLvlLbl val="0"/>
+      </c:catAx>
+      <c:valAx>
+        <c:axId val="-2113994440"/>
+        <c:scaling/>
+        <c:delete val="0"/>
+        <c:axPos val="l"/>
+        <c:majorGridlines>
+          <c:spPr>
+            <a:ln w="9525">
+              <a:solidFill>
+                <a:srgbClr val="D1D1D1"/>
+              </a:solidFill>
+            </a:ln>
+          </c:spPr>
+        </c:majorGridlines>
+        <c:title>
+          <c:tx>
+            <c:rich>
+              <a:bodyPr/>
+              <a:lstStyle/>
+              <a:p>
+                <a:pPr>
+                  <a:defRPr sz="1100" b="0">
+                    <a:solidFill>
+                      <a:srgbClr val="000000"/>
+                    </a:solidFill>
+                    <a:latin typeface="Arial"/>
+                    <a:ea typeface="Arial"/>
+                    <a:cs typeface="Arial"/>
+                  </a:defRPr>
+                </a:pPr>
+                <a:r>
+                  <a:t>мин</a:t>
+                </a:r>
+              </a:p>
+            </c:rich>
+          </c:tx>
+          <c:layout/>
+          <c:overlay val="0"/>
+        </c:title>
+        <c:majorTickMark val="out"/>
+        <c:minorTickMark val="none"/>
+        <c:tickLblPos val="nextTo"/>
+        <c:txPr>
+          <a:bodyPr/>
+          <a:lstStyle/>
+          <a:p>
+            <a:pPr>
+              <a:defRPr sz="1100" b="0">
+                <a:solidFill>
+                  <a:srgbClr val="000000"/>
+                </a:solidFill>
+                <a:latin typeface="Arial"/>
+                <a:ea typeface="Arial"/>
+                <a:cs typeface="Arial"/>
+              </a:defRPr>
+            </a:pPr>
+          </a:p>
+        </c:txPr>
+        <c:crossAx val="-2068027336"/>
+        <c:crosses val="autoZero"/>
+      </c:valAx>
+    </c:plotArea>
+    <c:dispBlanksAs val="gap"/>
+  </c:chart>
+  <c:txPr>
+    <a:bodyPr/>
+    <a:lstStyle/>
+    <a:p>
+      <a:pPr>
+        <a:defRPr sz="1200" b="0">
+          <a:solidFill>
+            <a:srgbClr val="000000"/>
+          </a:solidFill>
+          <a:latin typeface="Arial"/>
+          <a:ea typeface="Arial"/>
+          <a:cs typeface="Arial"/>
+        </a:defRPr>
+      </a:pPr>
+      <a:endParaRPr lang="en-US"/>
+    </a:p>
+  </c:txPr>
+  <c:externalData r:id="rId1">
+    <c:autoUpdate val="0"/>
+  </c:externalData>
+</c:chartSpace>
 </file>
 
 <file path=ppt/notesMasters/notesMaster1.xml><?xml version="1.0" encoding="utf-8"?>
@@ -1890,1420 +2262,6 @@
 </p:notes>
 </file>
 
-<file path=ppt/notesSlides/notesSlide63.xml><?xml version="1.0" encoding="utf-8"?>
-<p:notes xmlns:a="http://schemas.openxmlformats.org/drawingml/2006/main" xmlns:p="http://schemas.openxmlformats.org/presentationml/2006/main" xmlns:r="http://schemas.openxmlformats.org/officeDocument/2006/relationships">
-  <p:cSld>
-    <p:spTree>
-      <p:nvGrpSpPr>
-        <p:cNvPr id="1" name=""/>
-        <p:cNvGrpSpPr/>
-        <p:nvPr/>
-      </p:nvGrpSpPr>
-      <p:grpSpPr>
-        <a:xfrm>
-          <a:off x="0" y="0"/>
-          <a:ext cx="0" cy="0"/>
-          <a:chOff x="0" y="0"/>
-          <a:chExt cx="0" cy="0"/>
-        </a:xfrm>
-      </p:grpSpPr>
-      <p:sp>
-        <p:nvSpPr>
-          <p:cNvPr id="2" name="Slide Image Placeholder 1"/>
-          <p:cNvSpPr>
-            <a:spLocks noGrp="1"/>
-          </p:cNvSpPr>
-          <p:nvPr>
-            <p:ph type="sldImg" idx="3"/>
-          </p:nvPr>
-        </p:nvSpPr>
-        <p:spPr/>
-      </p:sp>
-      <p:sp>
-        <p:nvSpPr>
-          <p:cNvPr id="3" name="Notes Placeholder 2"/>
-          <p:cNvSpPr>
-            <a:spLocks noGrp="1"/>
-          </p:cNvSpPr>
-          <p:nvPr>
-            <p:ph type="body" idx="1"/>
-          </p:nvPr>
-        </p:nvSpPr>
-        <p:spPr/>
-        <p:txBody>
-          <a:bodyPr/>
-          <a:lstStyle/>
-          <a:p/>
-        </p:txBody>
-      </p:sp>
-      <p:sp>
-        <p:nvSpPr>
-          <p:cNvPr id="4" name="Slide Number Placeholder 3"/>
-          <p:cNvSpPr>
-            <a:spLocks noGrp="1"/>
-          </p:cNvSpPr>
-          <p:nvPr>
-            <p:ph type="sldNum" idx="12"/>
-          </p:nvPr>
-        </p:nvSpPr>
-        <p:spPr/>
-      </p:sp>
-    </p:spTree>
-  </p:cSld>
-  <p:clrMapOvr>
-    <a:masterClrMapping/>
-  </p:clrMapOvr>
-</p:notes>
-</file>
-
-<file path=ppt/notesSlides/notesSlide64.xml><?xml version="1.0" encoding="utf-8"?>
-<p:notes xmlns:a="http://schemas.openxmlformats.org/drawingml/2006/main" xmlns:p="http://schemas.openxmlformats.org/presentationml/2006/main" xmlns:r="http://schemas.openxmlformats.org/officeDocument/2006/relationships">
-  <p:cSld>
-    <p:spTree>
-      <p:nvGrpSpPr>
-        <p:cNvPr id="1" name=""/>
-        <p:cNvGrpSpPr/>
-        <p:nvPr/>
-      </p:nvGrpSpPr>
-      <p:grpSpPr>
-        <a:xfrm>
-          <a:off x="0" y="0"/>
-          <a:ext cx="0" cy="0"/>
-          <a:chOff x="0" y="0"/>
-          <a:chExt cx="0" cy="0"/>
-        </a:xfrm>
-      </p:grpSpPr>
-      <p:sp>
-        <p:nvSpPr>
-          <p:cNvPr id="2" name="Slide Image Placeholder 1"/>
-          <p:cNvSpPr>
-            <a:spLocks noGrp="1"/>
-          </p:cNvSpPr>
-          <p:nvPr>
-            <p:ph type="sldImg" idx="3"/>
-          </p:nvPr>
-        </p:nvSpPr>
-        <p:spPr/>
-      </p:sp>
-      <p:sp>
-        <p:nvSpPr>
-          <p:cNvPr id="3" name="Notes Placeholder 2"/>
-          <p:cNvSpPr>
-            <a:spLocks noGrp="1"/>
-          </p:cNvSpPr>
-          <p:nvPr>
-            <p:ph type="body" idx="1"/>
-          </p:nvPr>
-        </p:nvSpPr>
-        <p:spPr/>
-        <p:txBody>
-          <a:bodyPr/>
-          <a:lstStyle/>
-          <a:p/>
-        </p:txBody>
-      </p:sp>
-      <p:sp>
-        <p:nvSpPr>
-          <p:cNvPr id="4" name="Slide Number Placeholder 3"/>
-          <p:cNvSpPr>
-            <a:spLocks noGrp="1"/>
-          </p:cNvSpPr>
-          <p:nvPr>
-            <p:ph type="sldNum" idx="12"/>
-          </p:nvPr>
-        </p:nvSpPr>
-        <p:spPr/>
-      </p:sp>
-    </p:spTree>
-  </p:cSld>
-  <p:clrMapOvr>
-    <a:masterClrMapping/>
-  </p:clrMapOvr>
-</p:notes>
-</file>
-
-<file path=ppt/slideLayouts/slideLayout10.xml><?xml version="1.0" encoding="utf-8"?>
-<p:sldLayout xmlns:a="http://schemas.openxmlformats.org/drawingml/2006/main" xmlns:r="http://schemas.openxmlformats.org/officeDocument/2006/relationships" xmlns:mc="http://schemas.openxmlformats.org/markup-compatibility/2006" xmlns:mv="urn:schemas-microsoft-com:mac:vml" xmlns:p="http://schemas.openxmlformats.org/presentationml/2006/main" xmlns:c="http://schemas.openxmlformats.org/drawingml/2006/chart" xmlns:dgm="http://schemas.openxmlformats.org/drawingml/2006/diagram" xmlns:o="urn:schemas-microsoft-com:office:office" xmlns:v="urn:schemas-microsoft-com:vml" xmlns:pvml="urn:schemas-microsoft-com:office:powerpoint" xmlns:com="http://schemas.openxmlformats.org/drawingml/2006/compatibility" xmlns:p14="http://schemas.microsoft.com/office/powerpoint/2010/main" xmlns:p15="http://schemas.microsoft.com/office/powerpoint/2012/main" xmlns:ahyp="http://schemas.microsoft.com/office/drawing/2018/hyperlinkcolor" matchingName="2 фактоида + текст">
-  <p:cSld name="2 фактоида + текст">
-    <p:spTree>
-      <p:nvGrpSpPr>
-        <p:cNvPr id="93" name="Shape 93"/>
-        <p:cNvGrpSpPr/>
-        <p:nvPr/>
-      </p:nvGrpSpPr>
-      <p:grpSpPr>
-        <a:xfrm>
-          <a:off x="0" y="0"/>
-          <a:ext cx="0" cy="0"/>
-          <a:chOff x="0" y="0"/>
-          <a:chExt cx="0" cy="0"/>
-        </a:xfrm>
-      </p:grpSpPr>
-      <p:sp>
-        <p:nvSpPr>
-          <p:cNvPr id="94" name="Google Shape;94;p11"/>
-          <p:cNvSpPr txBox="1"/>
-          <p:nvPr>
-            <p:ph idx="1" type="body"/>
-          </p:nvPr>
-        </p:nvSpPr>
-        <p:spPr>
-          <a:xfrm>
-            <a:off x="671514" y="1773238"/>
-            <a:ext cx="5135728" cy="4427537"/>
-          </a:xfrm>
-          <a:prstGeom prst="rect">
-            <a:avLst/>
-          </a:prstGeom>
-          <a:noFill/>
-          <a:ln>
-            <a:noFill/>
-          </a:ln>
-        </p:spPr>
-        <p:txBody>
-          <a:bodyPr anchorCtr="0" anchor="t" bIns="0" lIns="0" spcFirstLastPara="1" rIns="0" wrap="square" tIns="0">
-            <a:normAutofit/>
-          </a:bodyPr>
-          <a:lstStyle>
-            <a:lvl1pPr indent="-228600" lvl="0" marL="457200" algn="l">
-              <a:lnSpc>
-                <a:spcPct val="110000"/>
-              </a:lnSpc>
-              <a:spcBef>
-                <a:spcPts val="1000"/>
-              </a:spcBef>
-              <a:spcAft>
-                <a:spcPts val="0"/>
-              </a:spcAft>
-              <a:buClr>
-                <a:schemeClr val="dk1"/>
-              </a:buClr>
-              <a:buSzPts val="1800"/>
-              <a:buNone/>
-              <a:defRPr/>
-            </a:lvl1pPr>
-            <a:lvl2pPr indent="-342900" lvl="1" marL="914400" algn="l">
-              <a:lnSpc>
-                <a:spcPct val="110000"/>
-              </a:lnSpc>
-              <a:spcBef>
-                <a:spcPts val="500"/>
-              </a:spcBef>
-              <a:spcAft>
-                <a:spcPts val="0"/>
-              </a:spcAft>
-              <a:buSzPts val="1800"/>
-              <a:buChar char="•"/>
-              <a:defRPr/>
-            </a:lvl2pPr>
-            <a:lvl3pPr indent="-342900" lvl="2" marL="1371600" algn="l">
-              <a:lnSpc>
-                <a:spcPct val="110000"/>
-              </a:lnSpc>
-              <a:spcBef>
-                <a:spcPts val="500"/>
-              </a:spcBef>
-              <a:spcAft>
-                <a:spcPts val="0"/>
-              </a:spcAft>
-              <a:buClr>
-                <a:schemeClr val="dk1"/>
-              </a:buClr>
-              <a:buSzPts val="1800"/>
-              <a:buChar char="−"/>
-              <a:defRPr/>
-            </a:lvl3pPr>
-            <a:lvl4pPr indent="-342900" lvl="3" marL="1828800" algn="l">
-              <a:lnSpc>
-                <a:spcPct val="90000"/>
-              </a:lnSpc>
-              <a:spcBef>
-                <a:spcPts val="500"/>
-              </a:spcBef>
-              <a:spcAft>
-                <a:spcPts val="0"/>
-              </a:spcAft>
-              <a:buClr>
-                <a:schemeClr val="dk1"/>
-              </a:buClr>
-              <a:buSzPts val="1800"/>
-              <a:buChar char="•"/>
-              <a:defRPr/>
-            </a:lvl4pPr>
-            <a:lvl5pPr indent="-342900" lvl="4" marL="2286000" algn="l">
-              <a:lnSpc>
-                <a:spcPct val="90000"/>
-              </a:lnSpc>
-              <a:spcBef>
-                <a:spcPts val="500"/>
-              </a:spcBef>
-              <a:spcAft>
-                <a:spcPts val="0"/>
-              </a:spcAft>
-              <a:buClr>
-                <a:schemeClr val="dk1"/>
-              </a:buClr>
-              <a:buSzPts val="1800"/>
-              <a:buChar char="•"/>
-              <a:defRPr/>
-            </a:lvl5pPr>
-            <a:lvl6pPr indent="-342900" lvl="5" marL="2743200" algn="l">
-              <a:lnSpc>
-                <a:spcPct val="90000"/>
-              </a:lnSpc>
-              <a:spcBef>
-                <a:spcPts val="500"/>
-              </a:spcBef>
-              <a:spcAft>
-                <a:spcPts val="0"/>
-              </a:spcAft>
-              <a:buClr>
-                <a:schemeClr val="dk1"/>
-              </a:buClr>
-              <a:buSzPts val="1800"/>
-              <a:buChar char="•"/>
-              <a:defRPr/>
-            </a:lvl6pPr>
-            <a:lvl7pPr indent="-342900" lvl="6" marL="3200400" algn="l">
-              <a:lnSpc>
-                <a:spcPct val="90000"/>
-              </a:lnSpc>
-              <a:spcBef>
-                <a:spcPts val="500"/>
-              </a:spcBef>
-              <a:spcAft>
-                <a:spcPts val="0"/>
-              </a:spcAft>
-              <a:buClr>
-                <a:schemeClr val="dk1"/>
-              </a:buClr>
-              <a:buSzPts val="1800"/>
-              <a:buChar char="•"/>
-              <a:defRPr/>
-            </a:lvl7pPr>
-            <a:lvl8pPr indent="-342900" lvl="7" marL="3657600" algn="l">
-              <a:lnSpc>
-                <a:spcPct val="90000"/>
-              </a:lnSpc>
-              <a:spcBef>
-                <a:spcPts val="500"/>
-              </a:spcBef>
-              <a:spcAft>
-                <a:spcPts val="0"/>
-              </a:spcAft>
-              <a:buClr>
-                <a:schemeClr val="dk1"/>
-              </a:buClr>
-              <a:buSzPts val="1800"/>
-              <a:buChar char="•"/>
-              <a:defRPr/>
-            </a:lvl8pPr>
-            <a:lvl9pPr indent="-342900" lvl="8" marL="4114800" algn="l">
-              <a:lnSpc>
-                <a:spcPct val="90000"/>
-              </a:lnSpc>
-              <a:spcBef>
-                <a:spcPts val="500"/>
-              </a:spcBef>
-              <a:spcAft>
-                <a:spcPts val="0"/>
-              </a:spcAft>
-              <a:buClr>
-                <a:schemeClr val="dk1"/>
-              </a:buClr>
-              <a:buSzPts val="1800"/>
-              <a:buChar char="•"/>
-              <a:defRPr/>
-            </a:lvl9pPr>
-          </a:lstStyle>
-          <a:p/>
-        </p:txBody>
-      </p:sp>
-      <p:sp>
-        <p:nvSpPr>
-          <p:cNvPr id="95" name="Google Shape;95;p11"/>
-          <p:cNvSpPr txBox="1"/>
-          <p:nvPr>
-            <p:ph type="title"/>
-          </p:nvPr>
-        </p:nvSpPr>
-        <p:spPr>
-          <a:xfrm>
-            <a:off x="677334" y="692150"/>
-            <a:ext cx="10855854" cy="644241"/>
-          </a:xfrm>
-          <a:prstGeom prst="rect">
-            <a:avLst/>
-          </a:prstGeom>
-          <a:noFill/>
-          <a:ln>
-            <a:noFill/>
-          </a:ln>
-        </p:spPr>
-        <p:txBody>
-          <a:bodyPr anchorCtr="0" anchor="t" bIns="0" lIns="0" spcFirstLastPara="1" rIns="0" wrap="square" tIns="0">
-            <a:noAutofit/>
-          </a:bodyPr>
-          <a:lstStyle>
-            <a:lvl1pPr lvl="0" algn="l">
-              <a:lnSpc>
-                <a:spcPct val="90000"/>
-              </a:lnSpc>
-              <a:spcBef>
-                <a:spcPts val="0"/>
-              </a:spcBef>
-              <a:spcAft>
-                <a:spcPts val="0"/>
-              </a:spcAft>
-              <a:buClr>
-                <a:schemeClr val="accent1"/>
-              </a:buClr>
-              <a:buSzPts val="3600"/>
-              <a:buFont typeface="Play"/>
-              <a:buNone/>
-              <a:defRPr>
-                <a:solidFill>
-                  <a:schemeClr val="accent1"/>
-                </a:solidFill>
-              </a:defRPr>
-            </a:lvl1pPr>
-            <a:lvl2pPr lvl="1">
-              <a:spcBef>
-                <a:spcPts val="0"/>
-              </a:spcBef>
-              <a:spcAft>
-                <a:spcPts val="0"/>
-              </a:spcAft>
-              <a:buSzPts val="1400"/>
-              <a:buNone/>
-              <a:defRPr/>
-            </a:lvl2pPr>
-            <a:lvl3pPr lvl="2">
-              <a:spcBef>
-                <a:spcPts val="0"/>
-              </a:spcBef>
-              <a:spcAft>
-                <a:spcPts val="0"/>
-              </a:spcAft>
-              <a:buSzPts val="1400"/>
-              <a:buNone/>
-              <a:defRPr/>
-            </a:lvl3pPr>
-            <a:lvl4pPr lvl="3">
-              <a:spcBef>
-                <a:spcPts val="0"/>
-              </a:spcBef>
-              <a:spcAft>
-                <a:spcPts val="0"/>
-              </a:spcAft>
-              <a:buSzPts val="1400"/>
-              <a:buNone/>
-              <a:defRPr/>
-            </a:lvl4pPr>
-            <a:lvl5pPr lvl="4">
-              <a:spcBef>
-                <a:spcPts val="0"/>
-              </a:spcBef>
-              <a:spcAft>
-                <a:spcPts val="0"/>
-              </a:spcAft>
-              <a:buSzPts val="1400"/>
-              <a:buNone/>
-              <a:defRPr/>
-            </a:lvl5pPr>
-            <a:lvl6pPr lvl="5">
-              <a:spcBef>
-                <a:spcPts val="0"/>
-              </a:spcBef>
-              <a:spcAft>
-                <a:spcPts val="0"/>
-              </a:spcAft>
-              <a:buSzPts val="1400"/>
-              <a:buNone/>
-              <a:defRPr/>
-            </a:lvl6pPr>
-            <a:lvl7pPr lvl="6">
-              <a:spcBef>
-                <a:spcPts val="0"/>
-              </a:spcBef>
-              <a:spcAft>
-                <a:spcPts val="0"/>
-              </a:spcAft>
-              <a:buSzPts val="1400"/>
-              <a:buNone/>
-              <a:defRPr/>
-            </a:lvl7pPr>
-            <a:lvl8pPr lvl="7">
-              <a:spcBef>
-                <a:spcPts val="0"/>
-              </a:spcBef>
-              <a:spcAft>
-                <a:spcPts val="0"/>
-              </a:spcAft>
-              <a:buSzPts val="1400"/>
-              <a:buNone/>
-              <a:defRPr/>
-            </a:lvl8pPr>
-            <a:lvl9pPr lvl="8">
-              <a:spcBef>
-                <a:spcPts val="0"/>
-              </a:spcBef>
-              <a:spcAft>
-                <a:spcPts val="0"/>
-              </a:spcAft>
-              <a:buSzPts val="1400"/>
-              <a:buNone/>
-              <a:defRPr/>
-            </a:lvl9pPr>
-          </a:lstStyle>
-          <a:p/>
-        </p:txBody>
-      </p:sp>
-      <p:sp>
-        <p:nvSpPr>
-          <p:cNvPr id="96" name="Google Shape;96;p11"/>
-          <p:cNvSpPr txBox="1"/>
-          <p:nvPr>
-            <p:ph idx="11" type="ftr"/>
-          </p:nvPr>
-        </p:nvSpPr>
-        <p:spPr>
-          <a:xfrm>
-            <a:off x="671513" y="167981"/>
-            <a:ext cx="10874375" cy="241437"/>
-          </a:xfrm>
-          <a:prstGeom prst="rect">
-            <a:avLst/>
-          </a:prstGeom>
-          <a:noFill/>
-          <a:ln>
-            <a:noFill/>
-          </a:ln>
-        </p:spPr>
-        <p:txBody>
-          <a:bodyPr anchorCtr="0" anchor="t" bIns="45700" lIns="0" spcFirstLastPara="1" rIns="91425" wrap="square" tIns="45700">
-            <a:noAutofit/>
-          </a:bodyPr>
-          <a:lstStyle>
-            <a:lvl1pPr lvl="0" marR="0" rtl="0" algn="l">
-              <a:spcBef>
-                <a:spcPts val="0"/>
-              </a:spcBef>
-              <a:spcAft>
-                <a:spcPts val="0"/>
-              </a:spcAft>
-              <a:buSzPts val="1400"/>
-              <a:buNone/>
-              <a:defRPr b="0" i="0" sz="1800" u="none" cap="none" strike="noStrike">
-                <a:solidFill>
-                  <a:schemeClr val="dk1"/>
-                </a:solidFill>
-                <a:latin typeface="Arial"/>
-                <a:ea typeface="Arial"/>
-                <a:cs typeface="Arial"/>
-                <a:sym typeface="Arial"/>
-              </a:defRPr>
-            </a:lvl1pPr>
-            <a:lvl2pPr lvl="1" marR="0" rtl="0" algn="l">
-              <a:spcBef>
-                <a:spcPts val="0"/>
-              </a:spcBef>
-              <a:spcAft>
-                <a:spcPts val="0"/>
-              </a:spcAft>
-              <a:buSzPts val="1400"/>
-              <a:buNone/>
-              <a:defRPr b="0" i="0" sz="1800" u="none" cap="none" strike="noStrike">
-                <a:solidFill>
-                  <a:schemeClr val="dk1"/>
-                </a:solidFill>
-                <a:latin typeface="Arial"/>
-                <a:ea typeface="Arial"/>
-                <a:cs typeface="Arial"/>
-                <a:sym typeface="Arial"/>
-              </a:defRPr>
-            </a:lvl2pPr>
-            <a:lvl3pPr lvl="2" marR="0" rtl="0" algn="l">
-              <a:spcBef>
-                <a:spcPts val="0"/>
-              </a:spcBef>
-              <a:spcAft>
-                <a:spcPts val="0"/>
-              </a:spcAft>
-              <a:buSzPts val="1400"/>
-              <a:buNone/>
-              <a:defRPr b="0" i="0" sz="1800" u="none" cap="none" strike="noStrike">
-                <a:solidFill>
-                  <a:schemeClr val="dk1"/>
-                </a:solidFill>
-                <a:latin typeface="Arial"/>
-                <a:ea typeface="Arial"/>
-                <a:cs typeface="Arial"/>
-                <a:sym typeface="Arial"/>
-              </a:defRPr>
-            </a:lvl3pPr>
-            <a:lvl4pPr lvl="3" marR="0" rtl="0" algn="l">
-              <a:spcBef>
-                <a:spcPts val="0"/>
-              </a:spcBef>
-              <a:spcAft>
-                <a:spcPts val="0"/>
-              </a:spcAft>
-              <a:buSzPts val="1400"/>
-              <a:buNone/>
-              <a:defRPr b="0" i="0" sz="1800" u="none" cap="none" strike="noStrike">
-                <a:solidFill>
-                  <a:schemeClr val="dk1"/>
-                </a:solidFill>
-                <a:latin typeface="Arial"/>
-                <a:ea typeface="Arial"/>
-                <a:cs typeface="Arial"/>
-                <a:sym typeface="Arial"/>
-              </a:defRPr>
-            </a:lvl4pPr>
-            <a:lvl5pPr lvl="4" marR="0" rtl="0" algn="l">
-              <a:spcBef>
-                <a:spcPts val="0"/>
-              </a:spcBef>
-              <a:spcAft>
-                <a:spcPts val="0"/>
-              </a:spcAft>
-              <a:buSzPts val="1400"/>
-              <a:buNone/>
-              <a:defRPr b="0" i="0" sz="1800" u="none" cap="none" strike="noStrike">
-                <a:solidFill>
-                  <a:schemeClr val="dk1"/>
-                </a:solidFill>
-                <a:latin typeface="Arial"/>
-                <a:ea typeface="Arial"/>
-                <a:cs typeface="Arial"/>
-                <a:sym typeface="Arial"/>
-              </a:defRPr>
-            </a:lvl5pPr>
-            <a:lvl6pPr lvl="5" marR="0" rtl="0" algn="l">
-              <a:spcBef>
-                <a:spcPts val="0"/>
-              </a:spcBef>
-              <a:spcAft>
-                <a:spcPts val="0"/>
-              </a:spcAft>
-              <a:buSzPts val="1400"/>
-              <a:buNone/>
-              <a:defRPr b="0" i="0" sz="1800" u="none" cap="none" strike="noStrike">
-                <a:solidFill>
-                  <a:schemeClr val="dk1"/>
-                </a:solidFill>
-                <a:latin typeface="Arial"/>
-                <a:ea typeface="Arial"/>
-                <a:cs typeface="Arial"/>
-                <a:sym typeface="Arial"/>
-              </a:defRPr>
-            </a:lvl6pPr>
-            <a:lvl7pPr lvl="6" marR="0" rtl="0" algn="l">
-              <a:spcBef>
-                <a:spcPts val="0"/>
-              </a:spcBef>
-              <a:spcAft>
-                <a:spcPts val="0"/>
-              </a:spcAft>
-              <a:buSzPts val="1400"/>
-              <a:buNone/>
-              <a:defRPr b="0" i="0" sz="1800" u="none" cap="none" strike="noStrike">
-                <a:solidFill>
-                  <a:schemeClr val="dk1"/>
-                </a:solidFill>
-                <a:latin typeface="Arial"/>
-                <a:ea typeface="Arial"/>
-                <a:cs typeface="Arial"/>
-                <a:sym typeface="Arial"/>
-              </a:defRPr>
-            </a:lvl7pPr>
-            <a:lvl8pPr lvl="7" marR="0" rtl="0" algn="l">
-              <a:spcBef>
-                <a:spcPts val="0"/>
-              </a:spcBef>
-              <a:spcAft>
-                <a:spcPts val="0"/>
-              </a:spcAft>
-              <a:buSzPts val="1400"/>
-              <a:buNone/>
-              <a:defRPr b="0" i="0" sz="1800" u="none" cap="none" strike="noStrike">
-                <a:solidFill>
-                  <a:schemeClr val="dk1"/>
-                </a:solidFill>
-                <a:latin typeface="Arial"/>
-                <a:ea typeface="Arial"/>
-                <a:cs typeface="Arial"/>
-                <a:sym typeface="Arial"/>
-              </a:defRPr>
-            </a:lvl8pPr>
-            <a:lvl9pPr lvl="8" marR="0" rtl="0" algn="l">
-              <a:spcBef>
-                <a:spcPts val="0"/>
-              </a:spcBef>
-              <a:spcAft>
-                <a:spcPts val="0"/>
-              </a:spcAft>
-              <a:buSzPts val="1400"/>
-              <a:buNone/>
-              <a:defRPr b="0" i="0" sz="1800" u="none" cap="none" strike="noStrike">
-                <a:solidFill>
-                  <a:schemeClr val="dk1"/>
-                </a:solidFill>
-                <a:latin typeface="Arial"/>
-                <a:ea typeface="Arial"/>
-                <a:cs typeface="Arial"/>
-                <a:sym typeface="Arial"/>
-              </a:defRPr>
-            </a:lvl9pPr>
-          </a:lstStyle>
-          <a:p/>
-        </p:txBody>
-      </p:sp>
-      <p:sp>
-        <p:nvSpPr>
-          <p:cNvPr id="97" name="Google Shape;97;p11"/>
-          <p:cNvSpPr txBox="1"/>
-          <p:nvPr>
-            <p:ph idx="2" type="body"/>
-          </p:nvPr>
-        </p:nvSpPr>
-        <p:spPr>
-          <a:xfrm>
-            <a:off x="6097339" y="3864033"/>
-            <a:ext cx="5417327" cy="1080000"/>
-          </a:xfrm>
-          <a:prstGeom prst="rect">
-            <a:avLst/>
-          </a:prstGeom>
-          <a:noFill/>
-          <a:ln>
-            <a:noFill/>
-          </a:ln>
-        </p:spPr>
-        <p:txBody>
-          <a:bodyPr anchorCtr="0" anchor="b" bIns="0" lIns="0" spcFirstLastPara="1" rIns="0" wrap="square" tIns="0">
-            <a:noAutofit/>
-          </a:bodyPr>
-          <a:lstStyle>
-            <a:lvl1pPr indent="-228600" lvl="0" marL="457200" algn="l">
-              <a:lnSpc>
-                <a:spcPct val="100000"/>
-              </a:lnSpc>
-              <a:spcBef>
-                <a:spcPts val="1000"/>
-              </a:spcBef>
-              <a:spcAft>
-                <a:spcPts val="0"/>
-              </a:spcAft>
-              <a:buClr>
-                <a:schemeClr val="dk1"/>
-              </a:buClr>
-              <a:buSzPts val="8800"/>
-              <a:buNone/>
-              <a:defRPr b="1" i="0" sz="8800">
-                <a:solidFill>
-                  <a:schemeClr val="dk1"/>
-                </a:solidFill>
-                <a:latin typeface="Play"/>
-                <a:ea typeface="Play"/>
-                <a:cs typeface="Play"/>
-                <a:sym typeface="Play"/>
-              </a:defRPr>
-            </a:lvl1pPr>
-            <a:lvl2pPr indent="-342900" lvl="1" marL="914400" algn="l">
-              <a:lnSpc>
-                <a:spcPct val="110000"/>
-              </a:lnSpc>
-              <a:spcBef>
-                <a:spcPts val="500"/>
-              </a:spcBef>
-              <a:spcAft>
-                <a:spcPts val="0"/>
-              </a:spcAft>
-              <a:buSzPts val="1800"/>
-              <a:buChar char="•"/>
-              <a:defRPr/>
-            </a:lvl2pPr>
-            <a:lvl3pPr indent="-342900" lvl="2" marL="1371600" algn="l">
-              <a:lnSpc>
-                <a:spcPct val="110000"/>
-              </a:lnSpc>
-              <a:spcBef>
-                <a:spcPts val="500"/>
-              </a:spcBef>
-              <a:spcAft>
-                <a:spcPts val="0"/>
-              </a:spcAft>
-              <a:buClr>
-                <a:schemeClr val="dk1"/>
-              </a:buClr>
-              <a:buSzPts val="1800"/>
-              <a:buChar char="−"/>
-              <a:defRPr/>
-            </a:lvl3pPr>
-            <a:lvl4pPr indent="-342900" lvl="3" marL="1828800" algn="l">
-              <a:lnSpc>
-                <a:spcPct val="90000"/>
-              </a:lnSpc>
-              <a:spcBef>
-                <a:spcPts val="500"/>
-              </a:spcBef>
-              <a:spcAft>
-                <a:spcPts val="0"/>
-              </a:spcAft>
-              <a:buClr>
-                <a:schemeClr val="dk1"/>
-              </a:buClr>
-              <a:buSzPts val="1800"/>
-              <a:buChar char="•"/>
-              <a:defRPr/>
-            </a:lvl4pPr>
-            <a:lvl5pPr indent="-342900" lvl="4" marL="2286000" algn="l">
-              <a:lnSpc>
-                <a:spcPct val="90000"/>
-              </a:lnSpc>
-              <a:spcBef>
-                <a:spcPts val="500"/>
-              </a:spcBef>
-              <a:spcAft>
-                <a:spcPts val="0"/>
-              </a:spcAft>
-              <a:buClr>
-                <a:schemeClr val="dk1"/>
-              </a:buClr>
-              <a:buSzPts val="1800"/>
-              <a:buChar char="•"/>
-              <a:defRPr/>
-            </a:lvl5pPr>
-            <a:lvl6pPr indent="-342900" lvl="5" marL="2743200" algn="l">
-              <a:lnSpc>
-                <a:spcPct val="90000"/>
-              </a:lnSpc>
-              <a:spcBef>
-                <a:spcPts val="500"/>
-              </a:spcBef>
-              <a:spcAft>
-                <a:spcPts val="0"/>
-              </a:spcAft>
-              <a:buClr>
-                <a:schemeClr val="dk1"/>
-              </a:buClr>
-              <a:buSzPts val="1800"/>
-              <a:buChar char="•"/>
-              <a:defRPr/>
-            </a:lvl6pPr>
-            <a:lvl7pPr indent="-342900" lvl="6" marL="3200400" algn="l">
-              <a:lnSpc>
-                <a:spcPct val="90000"/>
-              </a:lnSpc>
-              <a:spcBef>
-                <a:spcPts val="500"/>
-              </a:spcBef>
-              <a:spcAft>
-                <a:spcPts val="0"/>
-              </a:spcAft>
-              <a:buClr>
-                <a:schemeClr val="dk1"/>
-              </a:buClr>
-              <a:buSzPts val="1800"/>
-              <a:buChar char="•"/>
-              <a:defRPr/>
-            </a:lvl7pPr>
-            <a:lvl8pPr indent="-342900" lvl="7" marL="3657600" algn="l">
-              <a:lnSpc>
-                <a:spcPct val="90000"/>
-              </a:lnSpc>
-              <a:spcBef>
-                <a:spcPts val="500"/>
-              </a:spcBef>
-              <a:spcAft>
-                <a:spcPts val="0"/>
-              </a:spcAft>
-              <a:buClr>
-                <a:schemeClr val="dk1"/>
-              </a:buClr>
-              <a:buSzPts val="1800"/>
-              <a:buChar char="•"/>
-              <a:defRPr/>
-            </a:lvl8pPr>
-            <a:lvl9pPr indent="-342900" lvl="8" marL="4114800" algn="l">
-              <a:lnSpc>
-                <a:spcPct val="90000"/>
-              </a:lnSpc>
-              <a:spcBef>
-                <a:spcPts val="500"/>
-              </a:spcBef>
-              <a:spcAft>
-                <a:spcPts val="0"/>
-              </a:spcAft>
-              <a:buClr>
-                <a:schemeClr val="dk1"/>
-              </a:buClr>
-              <a:buSzPts val="1800"/>
-              <a:buChar char="•"/>
-              <a:defRPr/>
-            </a:lvl9pPr>
-          </a:lstStyle>
-          <a:p/>
-        </p:txBody>
-      </p:sp>
-      <p:sp>
-        <p:nvSpPr>
-          <p:cNvPr id="98" name="Google Shape;98;p11"/>
-          <p:cNvSpPr txBox="1"/>
-          <p:nvPr>
-            <p:ph idx="3" type="body"/>
-          </p:nvPr>
-        </p:nvSpPr>
-        <p:spPr>
-          <a:xfrm>
-            <a:off x="6097338" y="5058095"/>
-            <a:ext cx="5417327" cy="356617"/>
-          </a:xfrm>
-          <a:prstGeom prst="rect">
-            <a:avLst/>
-          </a:prstGeom>
-          <a:noFill/>
-          <a:ln>
-            <a:noFill/>
-          </a:ln>
-        </p:spPr>
-        <p:txBody>
-          <a:bodyPr anchorCtr="0" anchor="t" bIns="0" lIns="0" spcFirstLastPara="1" rIns="0" wrap="square" tIns="0">
-            <a:normAutofit/>
-          </a:bodyPr>
-          <a:lstStyle>
-            <a:lvl1pPr indent="-228600" lvl="0" marL="457200" algn="l">
-              <a:lnSpc>
-                <a:spcPct val="110000"/>
-              </a:lnSpc>
-              <a:spcBef>
-                <a:spcPts val="1000"/>
-              </a:spcBef>
-              <a:spcAft>
-                <a:spcPts val="0"/>
-              </a:spcAft>
-              <a:buClr>
-                <a:schemeClr val="dk1"/>
-              </a:buClr>
-              <a:buSzPts val="1800"/>
-              <a:buNone/>
-              <a:defRPr sz="1800"/>
-            </a:lvl1pPr>
-            <a:lvl2pPr indent="-342900" lvl="1" marL="914400" algn="l">
-              <a:lnSpc>
-                <a:spcPct val="110000"/>
-              </a:lnSpc>
-              <a:spcBef>
-                <a:spcPts val="500"/>
-              </a:spcBef>
-              <a:spcAft>
-                <a:spcPts val="0"/>
-              </a:spcAft>
-              <a:buSzPts val="1800"/>
-              <a:buChar char="•"/>
-              <a:defRPr/>
-            </a:lvl2pPr>
-            <a:lvl3pPr indent="-342900" lvl="2" marL="1371600" algn="l">
-              <a:lnSpc>
-                <a:spcPct val="110000"/>
-              </a:lnSpc>
-              <a:spcBef>
-                <a:spcPts val="500"/>
-              </a:spcBef>
-              <a:spcAft>
-                <a:spcPts val="0"/>
-              </a:spcAft>
-              <a:buClr>
-                <a:schemeClr val="dk1"/>
-              </a:buClr>
-              <a:buSzPts val="1800"/>
-              <a:buChar char="−"/>
-              <a:defRPr/>
-            </a:lvl3pPr>
-            <a:lvl4pPr indent="-342900" lvl="3" marL="1828800" algn="l">
-              <a:lnSpc>
-                <a:spcPct val="90000"/>
-              </a:lnSpc>
-              <a:spcBef>
-                <a:spcPts val="500"/>
-              </a:spcBef>
-              <a:spcAft>
-                <a:spcPts val="0"/>
-              </a:spcAft>
-              <a:buClr>
-                <a:schemeClr val="dk1"/>
-              </a:buClr>
-              <a:buSzPts val="1800"/>
-              <a:buChar char="•"/>
-              <a:defRPr/>
-            </a:lvl4pPr>
-            <a:lvl5pPr indent="-342900" lvl="4" marL="2286000" algn="l">
-              <a:lnSpc>
-                <a:spcPct val="90000"/>
-              </a:lnSpc>
-              <a:spcBef>
-                <a:spcPts val="500"/>
-              </a:spcBef>
-              <a:spcAft>
-                <a:spcPts val="0"/>
-              </a:spcAft>
-              <a:buClr>
-                <a:schemeClr val="dk1"/>
-              </a:buClr>
-              <a:buSzPts val="1800"/>
-              <a:buChar char="•"/>
-              <a:defRPr/>
-            </a:lvl5pPr>
-            <a:lvl6pPr indent="-342900" lvl="5" marL="2743200" algn="l">
-              <a:lnSpc>
-                <a:spcPct val="90000"/>
-              </a:lnSpc>
-              <a:spcBef>
-                <a:spcPts val="500"/>
-              </a:spcBef>
-              <a:spcAft>
-                <a:spcPts val="0"/>
-              </a:spcAft>
-              <a:buClr>
-                <a:schemeClr val="dk1"/>
-              </a:buClr>
-              <a:buSzPts val="1800"/>
-              <a:buChar char="•"/>
-              <a:defRPr/>
-            </a:lvl6pPr>
-            <a:lvl7pPr indent="-342900" lvl="6" marL="3200400" algn="l">
-              <a:lnSpc>
-                <a:spcPct val="90000"/>
-              </a:lnSpc>
-              <a:spcBef>
-                <a:spcPts val="500"/>
-              </a:spcBef>
-              <a:spcAft>
-                <a:spcPts val="0"/>
-              </a:spcAft>
-              <a:buClr>
-                <a:schemeClr val="dk1"/>
-              </a:buClr>
-              <a:buSzPts val="1800"/>
-              <a:buChar char="•"/>
-              <a:defRPr/>
-            </a:lvl7pPr>
-            <a:lvl8pPr indent="-342900" lvl="7" marL="3657600" algn="l">
-              <a:lnSpc>
-                <a:spcPct val="90000"/>
-              </a:lnSpc>
-              <a:spcBef>
-                <a:spcPts val="500"/>
-              </a:spcBef>
-              <a:spcAft>
-                <a:spcPts val="0"/>
-              </a:spcAft>
-              <a:buClr>
-                <a:schemeClr val="dk1"/>
-              </a:buClr>
-              <a:buSzPts val="1800"/>
-              <a:buChar char="•"/>
-              <a:defRPr/>
-            </a:lvl8pPr>
-            <a:lvl9pPr indent="-342900" lvl="8" marL="4114800" algn="l">
-              <a:lnSpc>
-                <a:spcPct val="90000"/>
-              </a:lnSpc>
-              <a:spcBef>
-                <a:spcPts val="500"/>
-              </a:spcBef>
-              <a:spcAft>
-                <a:spcPts val="0"/>
-              </a:spcAft>
-              <a:buClr>
-                <a:schemeClr val="dk1"/>
-              </a:buClr>
-              <a:buSzPts val="1800"/>
-              <a:buChar char="•"/>
-              <a:defRPr/>
-            </a:lvl9pPr>
-          </a:lstStyle>
-          <a:p/>
-        </p:txBody>
-      </p:sp>
-      <p:sp>
-        <p:nvSpPr>
-          <p:cNvPr id="99" name="Google Shape;99;p11"/>
-          <p:cNvSpPr txBox="1"/>
-          <p:nvPr>
-            <p:ph idx="4" type="body"/>
-          </p:nvPr>
-        </p:nvSpPr>
-        <p:spPr>
-          <a:xfrm>
-            <a:off x="6096000" y="1773238"/>
-            <a:ext cx="5417327" cy="1080000"/>
-          </a:xfrm>
-          <a:prstGeom prst="rect">
-            <a:avLst/>
-          </a:prstGeom>
-          <a:noFill/>
-          <a:ln>
-            <a:noFill/>
-          </a:ln>
-        </p:spPr>
-        <p:txBody>
-          <a:bodyPr anchorCtr="0" anchor="b" bIns="0" lIns="0" spcFirstLastPara="1" rIns="0" wrap="square" tIns="0">
-            <a:noAutofit/>
-          </a:bodyPr>
-          <a:lstStyle>
-            <a:lvl1pPr indent="-228600" lvl="0" marL="457200" algn="l">
-              <a:lnSpc>
-                <a:spcPct val="100000"/>
-              </a:lnSpc>
-              <a:spcBef>
-                <a:spcPts val="1000"/>
-              </a:spcBef>
-              <a:spcAft>
-                <a:spcPts val="0"/>
-              </a:spcAft>
-              <a:buClr>
-                <a:schemeClr val="dk1"/>
-              </a:buClr>
-              <a:buSzPts val="8800"/>
-              <a:buNone/>
-              <a:defRPr b="1" i="0" sz="8800">
-                <a:solidFill>
-                  <a:schemeClr val="dk1"/>
-                </a:solidFill>
-                <a:latin typeface="Play"/>
-                <a:ea typeface="Play"/>
-                <a:cs typeface="Play"/>
-                <a:sym typeface="Play"/>
-              </a:defRPr>
-            </a:lvl1pPr>
-            <a:lvl2pPr indent="-342900" lvl="1" marL="914400" algn="l">
-              <a:lnSpc>
-                <a:spcPct val="110000"/>
-              </a:lnSpc>
-              <a:spcBef>
-                <a:spcPts val="500"/>
-              </a:spcBef>
-              <a:spcAft>
-                <a:spcPts val="0"/>
-              </a:spcAft>
-              <a:buSzPts val="1800"/>
-              <a:buChar char="•"/>
-              <a:defRPr/>
-            </a:lvl2pPr>
-            <a:lvl3pPr indent="-342900" lvl="2" marL="1371600" algn="l">
-              <a:lnSpc>
-                <a:spcPct val="110000"/>
-              </a:lnSpc>
-              <a:spcBef>
-                <a:spcPts val="500"/>
-              </a:spcBef>
-              <a:spcAft>
-                <a:spcPts val="0"/>
-              </a:spcAft>
-              <a:buClr>
-                <a:schemeClr val="dk1"/>
-              </a:buClr>
-              <a:buSzPts val="1800"/>
-              <a:buChar char="−"/>
-              <a:defRPr/>
-            </a:lvl3pPr>
-            <a:lvl4pPr indent="-342900" lvl="3" marL="1828800" algn="l">
-              <a:lnSpc>
-                <a:spcPct val="90000"/>
-              </a:lnSpc>
-              <a:spcBef>
-                <a:spcPts val="500"/>
-              </a:spcBef>
-              <a:spcAft>
-                <a:spcPts val="0"/>
-              </a:spcAft>
-              <a:buClr>
-                <a:schemeClr val="dk1"/>
-              </a:buClr>
-              <a:buSzPts val="1800"/>
-              <a:buChar char="•"/>
-              <a:defRPr/>
-            </a:lvl4pPr>
-            <a:lvl5pPr indent="-342900" lvl="4" marL="2286000" algn="l">
-              <a:lnSpc>
-                <a:spcPct val="90000"/>
-              </a:lnSpc>
-              <a:spcBef>
-                <a:spcPts val="500"/>
-              </a:spcBef>
-              <a:spcAft>
-                <a:spcPts val="0"/>
-              </a:spcAft>
-              <a:buClr>
-                <a:schemeClr val="dk1"/>
-              </a:buClr>
-              <a:buSzPts val="1800"/>
-              <a:buChar char="•"/>
-              <a:defRPr/>
-            </a:lvl5pPr>
-            <a:lvl6pPr indent="-342900" lvl="5" marL="2743200" algn="l">
-              <a:lnSpc>
-                <a:spcPct val="90000"/>
-              </a:lnSpc>
-              <a:spcBef>
-                <a:spcPts val="500"/>
-              </a:spcBef>
-              <a:spcAft>
-                <a:spcPts val="0"/>
-              </a:spcAft>
-              <a:buClr>
-                <a:schemeClr val="dk1"/>
-              </a:buClr>
-              <a:buSzPts val="1800"/>
-              <a:buChar char="•"/>
-              <a:defRPr/>
-            </a:lvl6pPr>
-            <a:lvl7pPr indent="-342900" lvl="6" marL="3200400" algn="l">
-              <a:lnSpc>
-                <a:spcPct val="90000"/>
-              </a:lnSpc>
-              <a:spcBef>
-                <a:spcPts val="500"/>
-              </a:spcBef>
-              <a:spcAft>
-                <a:spcPts val="0"/>
-              </a:spcAft>
-              <a:buClr>
-                <a:schemeClr val="dk1"/>
-              </a:buClr>
-              <a:buSzPts val="1800"/>
-              <a:buChar char="•"/>
-              <a:defRPr/>
-            </a:lvl7pPr>
-            <a:lvl8pPr indent="-342900" lvl="7" marL="3657600" algn="l">
-              <a:lnSpc>
-                <a:spcPct val="90000"/>
-              </a:lnSpc>
-              <a:spcBef>
-                <a:spcPts val="500"/>
-              </a:spcBef>
-              <a:spcAft>
-                <a:spcPts val="0"/>
-              </a:spcAft>
-              <a:buClr>
-                <a:schemeClr val="dk1"/>
-              </a:buClr>
-              <a:buSzPts val="1800"/>
-              <a:buChar char="•"/>
-              <a:defRPr/>
-            </a:lvl8pPr>
-            <a:lvl9pPr indent="-342900" lvl="8" marL="4114800" algn="l">
-              <a:lnSpc>
-                <a:spcPct val="90000"/>
-              </a:lnSpc>
-              <a:spcBef>
-                <a:spcPts val="500"/>
-              </a:spcBef>
-              <a:spcAft>
-                <a:spcPts val="0"/>
-              </a:spcAft>
-              <a:buClr>
-                <a:schemeClr val="dk1"/>
-              </a:buClr>
-              <a:buSzPts val="1800"/>
-              <a:buChar char="•"/>
-              <a:defRPr/>
-            </a:lvl9pPr>
-          </a:lstStyle>
-          <a:p/>
-        </p:txBody>
-      </p:sp>
-      <p:sp>
-        <p:nvSpPr>
-          <p:cNvPr id="100" name="Google Shape;100;p11"/>
-          <p:cNvSpPr txBox="1"/>
-          <p:nvPr>
-            <p:ph idx="5" type="body"/>
-          </p:nvPr>
-        </p:nvSpPr>
-        <p:spPr>
-          <a:xfrm>
-            <a:off x="6096000" y="2967300"/>
-            <a:ext cx="5417327" cy="356617"/>
-          </a:xfrm>
-          <a:prstGeom prst="rect">
-            <a:avLst/>
-          </a:prstGeom>
-          <a:noFill/>
-          <a:ln>
-            <a:noFill/>
-          </a:ln>
-        </p:spPr>
-        <p:txBody>
-          <a:bodyPr anchorCtr="0" anchor="t" bIns="0" lIns="0" spcFirstLastPara="1" rIns="0" wrap="square" tIns="0">
-            <a:normAutofit/>
-          </a:bodyPr>
-          <a:lstStyle>
-            <a:lvl1pPr indent="-228600" lvl="0" marL="457200" algn="l">
-              <a:lnSpc>
-                <a:spcPct val="110000"/>
-              </a:lnSpc>
-              <a:spcBef>
-                <a:spcPts val="1000"/>
-              </a:spcBef>
-              <a:spcAft>
-                <a:spcPts val="0"/>
-              </a:spcAft>
-              <a:buClr>
-                <a:schemeClr val="dk1"/>
-              </a:buClr>
-              <a:buSzPts val="1800"/>
-              <a:buNone/>
-              <a:defRPr sz="1800"/>
-            </a:lvl1pPr>
-            <a:lvl2pPr indent="-342900" lvl="1" marL="914400" algn="l">
-              <a:lnSpc>
-                <a:spcPct val="110000"/>
-              </a:lnSpc>
-              <a:spcBef>
-                <a:spcPts val="500"/>
-              </a:spcBef>
-              <a:spcAft>
-                <a:spcPts val="0"/>
-              </a:spcAft>
-              <a:buSzPts val="1800"/>
-              <a:buChar char="•"/>
-              <a:defRPr/>
-            </a:lvl2pPr>
-            <a:lvl3pPr indent="-342900" lvl="2" marL="1371600" algn="l">
-              <a:lnSpc>
-                <a:spcPct val="110000"/>
-              </a:lnSpc>
-              <a:spcBef>
-                <a:spcPts val="500"/>
-              </a:spcBef>
-              <a:spcAft>
-                <a:spcPts val="0"/>
-              </a:spcAft>
-              <a:buClr>
-                <a:schemeClr val="dk1"/>
-              </a:buClr>
-              <a:buSzPts val="1800"/>
-              <a:buChar char="−"/>
-              <a:defRPr/>
-            </a:lvl3pPr>
-            <a:lvl4pPr indent="-342900" lvl="3" marL="1828800" algn="l">
-              <a:lnSpc>
-                <a:spcPct val="90000"/>
-              </a:lnSpc>
-              <a:spcBef>
-                <a:spcPts val="500"/>
-              </a:spcBef>
-              <a:spcAft>
-                <a:spcPts val="0"/>
-              </a:spcAft>
-              <a:buClr>
-                <a:schemeClr val="dk1"/>
-              </a:buClr>
-              <a:buSzPts val="1800"/>
-              <a:buChar char="•"/>
-              <a:defRPr/>
-            </a:lvl4pPr>
-            <a:lvl5pPr indent="-342900" lvl="4" marL="2286000" algn="l">
-              <a:lnSpc>
-                <a:spcPct val="90000"/>
-              </a:lnSpc>
-              <a:spcBef>
-                <a:spcPts val="500"/>
-              </a:spcBef>
-              <a:spcAft>
-                <a:spcPts val="0"/>
-              </a:spcAft>
-              <a:buClr>
-                <a:schemeClr val="dk1"/>
-              </a:buClr>
-              <a:buSzPts val="1800"/>
-              <a:buChar char="•"/>
-              <a:defRPr/>
-            </a:lvl5pPr>
-            <a:lvl6pPr indent="-342900" lvl="5" marL="2743200" algn="l">
-              <a:lnSpc>
-                <a:spcPct val="90000"/>
-              </a:lnSpc>
-              <a:spcBef>
-                <a:spcPts val="500"/>
-              </a:spcBef>
-              <a:spcAft>
-                <a:spcPts val="0"/>
-              </a:spcAft>
-              <a:buClr>
-                <a:schemeClr val="dk1"/>
-              </a:buClr>
-              <a:buSzPts val="1800"/>
-              <a:buChar char="•"/>
-              <a:defRPr/>
-            </a:lvl6pPr>
-            <a:lvl7pPr indent="-342900" lvl="6" marL="3200400" algn="l">
-              <a:lnSpc>
-                <a:spcPct val="90000"/>
-              </a:lnSpc>
-              <a:spcBef>
-                <a:spcPts val="500"/>
-              </a:spcBef>
-              <a:spcAft>
-                <a:spcPts val="0"/>
-              </a:spcAft>
-              <a:buClr>
-                <a:schemeClr val="dk1"/>
-              </a:buClr>
-              <a:buSzPts val="1800"/>
-              <a:buChar char="•"/>
-              <a:defRPr/>
-            </a:lvl7pPr>
-            <a:lvl8pPr indent="-342900" lvl="7" marL="3657600" algn="l">
-              <a:lnSpc>
-                <a:spcPct val="90000"/>
-              </a:lnSpc>
-              <a:spcBef>
-                <a:spcPts val="500"/>
-              </a:spcBef>
-              <a:spcAft>
-                <a:spcPts val="0"/>
-              </a:spcAft>
-              <a:buClr>
-                <a:schemeClr val="dk1"/>
-              </a:buClr>
-              <a:buSzPts val="1800"/>
-              <a:buChar char="•"/>
-              <a:defRPr/>
-            </a:lvl8pPr>
-            <a:lvl9pPr indent="-342900" lvl="8" marL="4114800" algn="l">
-              <a:lnSpc>
-                <a:spcPct val="90000"/>
-              </a:lnSpc>
-              <a:spcBef>
-                <a:spcPts val="500"/>
-              </a:spcBef>
-              <a:spcAft>
-                <a:spcPts val="0"/>
-              </a:spcAft>
-              <a:buClr>
-                <a:schemeClr val="dk1"/>
-              </a:buClr>
-              <a:buSzPts val="1800"/>
-              <a:buChar char="•"/>
-              <a:defRPr/>
-            </a:lvl9pPr>
-          </a:lstStyle>
-          <a:p/>
-        </p:txBody>
-      </p:sp>
-    </p:spTree>
-  </p:cSld>
-  <p:clrMapOvr>
-    <a:masterClrMapping/>
-  </p:clrMapOvr>
-</p:sldLayout>
-</file>
-
 <file path=ppt/slideLayouts/slideLayout12.xml><?xml version="1.0" encoding="utf-8"?>
 <p:sldLayout xmlns:a="http://schemas.openxmlformats.org/drawingml/2006/main" xmlns:r="http://schemas.openxmlformats.org/officeDocument/2006/relationships" xmlns:mc="http://schemas.openxmlformats.org/markup-compatibility/2006" xmlns:mv="urn:schemas-microsoft-com:mac:vml" xmlns:p="http://schemas.openxmlformats.org/presentationml/2006/main" xmlns:c="http://schemas.openxmlformats.org/drawingml/2006/chart" xmlns:dgm="http://schemas.openxmlformats.org/drawingml/2006/diagram" xmlns:o="urn:schemas-microsoft-com:office:office" xmlns:v="urn:schemas-microsoft-com:vml" xmlns:pvml="urn:schemas-microsoft-com:office:powerpoint" xmlns:com="http://schemas.openxmlformats.org/drawingml/2006/compatibility" xmlns:p14="http://schemas.microsoft.com/office/powerpoint/2010/main" xmlns:p15="http://schemas.microsoft.com/office/powerpoint/2012/main" xmlns:ahyp="http://schemas.microsoft.com/office/drawing/2018/hyperlinkcolor" matchingName="2_Заголовок + текст в две колонки">
   <p:cSld name="2_Заголовок + текст в две колонки">
@@ -5493,7 +4451,6 @@
   <p:clrMap accent1="accent1" accent2="accent2" accent3="accent3" accent4="accent4" accent5="accent5" accent6="accent6" bg1="lt1" bg2="dk2" tx1="dk1" tx2="lt2" folHlink="folHlink" hlink="hlink"/>
   <p:sldLayoutIdLst>
     <p:sldLayoutId id="2147483653" r:id="rId6"/>
-    <p:sldLayoutId id="2147483657" r:id="rId10"/>
     <p:sldLayoutId id="2147483659" r:id="rId12"/>
   </p:sldLayoutIdLst>
   <p:hf dt="0" ftr="0" hdr="0" sldNum="0"/>
@@ -8427,6 +7384,975 @@
       <p:grpSpPr/>
       <p:sp>
         <p:nvSpPr>
+          <p:cNvPr id="2" name="title"/>
+          <p:cNvSpPr txBox="1"/>
+          <p:nvPr/>
+        </p:nvSpPr>
+        <p:spPr>
+          <a:xfrm>
+            <a:off x="677387" y="692177"/>
+            <a:ext cx="10855878" cy="822960"/>
+          </a:xfrm>
+          <a:prstGeom prst="rect">
+            <a:avLst/>
+          </a:prstGeom>
+          <a:noFill/>
+        </p:spPr>
+        <p:txBody>
+          <a:bodyPr wrap="square" lIns="76200" rIns="76200" tIns="50800" bIns="50800">
+            <a:spAutoFit/>
+          </a:bodyPr>
+          <a:lstStyle/>
+          <a:p>
+            <a:pPr algn="l">
+              <a:spcAft>
+                <a:spcPts val="300"/>
+              </a:spcAft>
+              <a:defRPr sz="4000">
+                <a:solidFill>
+                  <a:srgbClr val="000000"/>
+                </a:solidFill>
+                <a:latin typeface="Arial"/>
+                <a:ea typeface="Arial"/>
+                <a:cs typeface="Arial"/>
+              </a:defRPr>
+            </a:pPr>
+            <a:r>
+              <a:rPr sz="4000">
+                <a:solidFill>
+                  <a:srgbClr val="000000"/>
+                </a:solidFill>
+                <a:latin typeface="Arial"/>
+                <a:ea typeface="Arial"/>
+                <a:cs typeface="Arial"/>
+              </a:rPr>
+              <a:t>Автоматическая вёрстка презентаций</a:t>
+            </a:r>
+          </a:p>
+        </p:txBody>
+      </p:sp>
+    </p:spTree>
+  </p:cSld>
+  <p:clrMapOvr>
+    <a:masterClrMapping/>
+  </p:clrMapOvr>
+</p:sld>
+</file>
+
+<file path=ppt/slides/slide57.xml><?xml version="1.0" encoding="utf-8"?>
+<p:sld xmlns:a="http://schemas.openxmlformats.org/drawingml/2006/main" xmlns:p="http://schemas.openxmlformats.org/presentationml/2006/main" xmlns:r="http://schemas.openxmlformats.org/officeDocument/2006/relationships">
+  <p:cSld>
+    <p:spTree>
+      <p:nvGrpSpPr>
+        <p:cNvPr id="1" name=""/>
+        <p:cNvGrpSpPr/>
+        <p:nvPr/>
+      </p:nvGrpSpPr>
+      <p:grpSpPr/>
+      <p:cxnSp>
+        <p:nvCxnSpPr>
+          <p:cNvPr id="986" name="Google Shape;986;p76"/>
+          <p:cNvCxnSpPr/>
+          <p:nvPr/>
+        </p:nvCxnSpPr>
+        <p:spPr>
+          <a:xfrm rot="10800000">
+            <a:off x="-42658" y="3591512"/>
+            <a:ext cx="12234658" cy="0"/>
+          </a:xfrm>
+          <a:prstGeom prst="straightConnector1">
+            <a:avLst/>
+          </a:prstGeom>
+          <a:noFill/>
+          <a:ln cap="flat" cmpd="sng" w="12700">
+            <a:solidFill>
+              <a:srgbClr val="E1E1E2"/>
+            </a:solidFill>
+            <a:prstDash val="solid"/>
+            <a:miter lim="8000"/>
+            <a:headEnd len="sm" w="sm" type="none"/>
+            <a:tailEnd len="sm" w="sm" type="none"/>
+          </a:ln>
+        </p:spPr>
+      </p:cxnSp>
+      <p:sp>
+        <p:nvSpPr>
+          <p:cNvPr id="987" name="title"/>
+          <p:cNvSpPr txBox="1"/>
+          <p:nvPr/>
+        </p:nvSpPr>
+        <p:spPr>
+          <a:xfrm>
+            <a:off x="677387" y="692177"/>
+            <a:ext cx="10855878" cy="1447800"/>
+          </a:xfrm>
+          <a:prstGeom prst="rect">
+            <a:avLst/>
+          </a:prstGeom>
+          <a:noFill/>
+        </p:spPr>
+        <p:txBody>
+          <a:bodyPr wrap="square" lIns="76200" rIns="76200" tIns="50800" bIns="50800">
+            <a:spAutoFit/>
+          </a:bodyPr>
+          <a:lstStyle/>
+          <a:p>
+            <a:pPr algn="l">
+              <a:spcAft>
+                <a:spcPts val="300"/>
+              </a:spcAft>
+              <a:defRPr sz="4000">
+                <a:solidFill>
+                  <a:srgbClr val="000000"/>
+                </a:solidFill>
+                <a:latin typeface="Arial"/>
+                <a:ea typeface="Arial"/>
+                <a:cs typeface="Arial"/>
+              </a:defRPr>
+            </a:pPr>
+            <a:r>
+              <a:rPr sz="4000">
+                <a:solidFill>
+                  <a:srgbClr val="000000"/>
+                </a:solidFill>
+                <a:latin typeface="Arial"/>
+                <a:ea typeface="Arial"/>
+                <a:cs typeface="Arial"/>
+              </a:rPr>
+              <a:t>Сейчас сборка презентаций занимает 186 минут</a:t>
+            </a:r>
+          </a:p>
+        </p:txBody>
+      </p:sp>
+      <p:sp>
+        <p:nvSpPr>
+          <p:cNvPr id="988" name="body"/>
+          <p:cNvSpPr txBox="1"/>
+          <p:nvPr/>
+        </p:nvSpPr>
+        <p:spPr>
+          <a:xfrm>
+            <a:off x="677387" y="3591534"/>
+            <a:ext cx="10855878" cy="501978"/>
+          </a:xfrm>
+          <a:prstGeom prst="rect">
+            <a:avLst/>
+          </a:prstGeom>
+          <a:noFill/>
+        </p:spPr>
+        <p:txBody>
+          <a:bodyPr wrap="square" lIns="76200" rIns="76200" tIns="50800" bIns="50800">
+            <a:spAutoFit/>
+          </a:bodyPr>
+          <a:lstStyle/>
+          <a:p>
+            <a:pPr algn="l">
+              <a:spcAft>
+                <a:spcPts val="300"/>
+              </a:spcAft>
+              <a:defRPr sz="1200">
+                <a:solidFill>
+                  <a:srgbClr val="000000"/>
+                </a:solidFill>
+                <a:latin typeface="Arial"/>
+                <a:ea typeface="Arial"/>
+                <a:cs typeface="Arial"/>
+              </a:defRPr>
+            </a:pPr>
+            <a:r>
+              <a:rPr sz="1200">
+                <a:solidFill>
+                  <a:srgbClr val="000000"/>
+                </a:solidFill>
+                <a:latin typeface="Arial"/>
+                <a:ea typeface="Arial"/>
+                <a:cs typeface="Arial"/>
+              </a:rPr>
+              <a:t>• Отдел маркетинга вручную собирает 42 колоды за квартал</a:t>
+            </a:r>
+          </a:p>
+          <a:p>
+            <a:pPr algn="l">
+              <a:spcAft>
+                <a:spcPts val="300"/>
+              </a:spcAft>
+              <a:defRPr sz="1200">
+                <a:solidFill>
+                  <a:srgbClr val="000000"/>
+                </a:solidFill>
+                <a:latin typeface="Arial"/>
+                <a:ea typeface="Arial"/>
+                <a:cs typeface="Arial"/>
+              </a:defRPr>
+            </a:pPr>
+            <a:r>
+              <a:rPr sz="1200">
+                <a:solidFill>
+                  <a:srgbClr val="000000"/>
+                </a:solidFill>
+                <a:latin typeface="Arial"/>
+                <a:ea typeface="Arial"/>
+                <a:cs typeface="Arial"/>
+              </a:rPr>
+              <a:t>• 74 минуты уходит на правки после ревью дизайнера</a:t>
+            </a:r>
+          </a:p>
+          <a:p>
+            <a:pPr algn="l">
+              <a:spcAft>
+                <a:spcPts val="300"/>
+              </a:spcAft>
+              <a:defRPr sz="1200">
+                <a:solidFill>
+                  <a:srgbClr val="000000"/>
+                </a:solidFill>
+                <a:latin typeface="Arial"/>
+                <a:ea typeface="Arial"/>
+                <a:cs typeface="Arial"/>
+              </a:defRPr>
+            </a:pPr>
+            <a:r>
+              <a:rPr sz="1200">
+                <a:solidFill>
+                  <a:srgbClr val="000000"/>
+                </a:solidFill>
+                <a:latin typeface="Arial"/>
+                <a:ea typeface="Arial"/>
+                <a:cs typeface="Arial"/>
+              </a:rPr>
+              <a:t>• 19 колод нарушают фирменный стиль</a:t>
+            </a:r>
+          </a:p>
+        </p:txBody>
+      </p:sp>
+      <p:graphicFrame>
+        <p:nvGraphicFramePr>
+          <p:cNvPr id="989" name="Chart 988"/>
+          <p:cNvGraphicFramePr>
+            <a:graphicFrameLocks noGrp="1"/>
+          </p:cNvGraphicFramePr>
+          <p:nvPr/>
+        </p:nvGraphicFramePr>
+        <p:xfrm>
+          <a:off x="677387" y="4264962"/>
+          <a:ext cx="10855878" cy="581517"/>
+        </p:xfrm>
+        <a:graphic>
+          <a:graphicData uri="http://schemas.openxmlformats.org/drawingml/2006/chart">
+            <c:chart xmlns:c="http://schemas.openxmlformats.org/drawingml/2006/chart" r:id="rId2"/>
+          </a:graphicData>
+        </a:graphic>
+      </p:graphicFrame>
+    </p:spTree>
+  </p:cSld>
+  <p:clrMapOvr>
+    <a:masterClrMapping/>
+  </p:clrMapOvr>
+</p:sld>
+</file>
+
+<file path=ppt/slides/slide58.xml><?xml version="1.0" encoding="utf-8"?>
+<p:sld xmlns:a="http://schemas.openxmlformats.org/drawingml/2006/main" xmlns:p="http://schemas.openxmlformats.org/presentationml/2006/main" xmlns:r="http://schemas.openxmlformats.org/officeDocument/2006/relationships">
+  <p:cSld>
+    <p:bg>
+      <p:bgPr>
+        <a:solidFill>
+          <a:schemeClr val="lt2"/>
+        </a:solidFill>
+      </p:bgPr>
+    </p:bg>
+    <p:spTree>
+      <p:nvGrpSpPr>
+        <p:cNvPr id="1" name=""/>
+        <p:cNvGrpSpPr/>
+        <p:nvPr/>
+      </p:nvGrpSpPr>
+      <p:grpSpPr/>
+      <p:sp>
+        <p:nvSpPr>
+          <p:cNvPr id="2" name="title"/>
+          <p:cNvSpPr txBox="1"/>
+          <p:nvPr/>
+        </p:nvSpPr>
+        <p:spPr>
+          <a:xfrm>
+            <a:off x="677387" y="692177"/>
+            <a:ext cx="10855878" cy="1447800"/>
+          </a:xfrm>
+          <a:prstGeom prst="rect">
+            <a:avLst/>
+          </a:prstGeom>
+          <a:noFill/>
+        </p:spPr>
+        <p:txBody>
+          <a:bodyPr wrap="square" lIns="76200" rIns="76200" tIns="50800" bIns="50800">
+            <a:spAutoFit/>
+          </a:bodyPr>
+          <a:lstStyle/>
+          <a:p>
+            <a:pPr algn="l">
+              <a:spcAft>
+                <a:spcPts val="300"/>
+              </a:spcAft>
+              <a:defRPr sz="4000">
+                <a:solidFill>
+                  <a:srgbClr val="000000"/>
+                </a:solidFill>
+                <a:latin typeface="Arial"/>
+                <a:ea typeface="Arial"/>
+                <a:cs typeface="Arial"/>
+              </a:defRPr>
+            </a:pPr>
+            <a:r>
+              <a:rPr sz="4000">
+                <a:solidFill>
+                  <a:srgbClr val="000000"/>
+                </a:solidFill>
+                <a:latin typeface="Arial"/>
+                <a:ea typeface="Arial"/>
+                <a:cs typeface="Arial"/>
+              </a:rPr>
+              <a:t>Сервис автоматически вёрстит презентации за 4 минуты</a:t>
+            </a:r>
+          </a:p>
+        </p:txBody>
+      </p:sp>
+      <p:sp>
+        <p:nvSpPr>
+          <p:cNvPr id="3" name="body"/>
+          <p:cNvSpPr txBox="1"/>
+          <p:nvPr/>
+        </p:nvSpPr>
+        <p:spPr>
+          <a:xfrm>
+            <a:off x="677387" y="2277137"/>
+            <a:ext cx="10855878" cy="1341120"/>
+          </a:xfrm>
+          <a:prstGeom prst="rect">
+            <a:avLst/>
+          </a:prstGeom>
+          <a:noFill/>
+        </p:spPr>
+        <p:txBody>
+          <a:bodyPr wrap="square" lIns="76200" rIns="76200" tIns="50800" bIns="50800">
+            <a:spAutoFit/>
+          </a:bodyPr>
+          <a:lstStyle/>
+          <a:p>
+            <a:pPr algn="l">
+              <a:spcAft>
+                <a:spcPts val="300"/>
+              </a:spcAft>
+              <a:defRPr sz="1800">
+                <a:solidFill>
+                  <a:srgbClr val="000000"/>
+                </a:solidFill>
+                <a:latin typeface="Arial"/>
+                <a:ea typeface="Arial"/>
+                <a:cs typeface="Arial"/>
+              </a:defRPr>
+            </a:pPr>
+            <a:r>
+              <a:rPr sz="1800">
+                <a:solidFill>
+                  <a:srgbClr val="000000"/>
+                </a:solidFill>
+                <a:latin typeface="Arial"/>
+                <a:ea typeface="Arial"/>
+                <a:cs typeface="Arial"/>
+              </a:rPr>
+              <a:t>• Принимает шаблон pptx и материалы</a:t>
+            </a:r>
+          </a:p>
+          <a:p>
+            <a:pPr algn="l">
+              <a:spcAft>
+                <a:spcPts val="300"/>
+              </a:spcAft>
+              <a:defRPr sz="1800">
+                <a:solidFill>
+                  <a:srgbClr val="000000"/>
+                </a:solidFill>
+                <a:latin typeface="Arial"/>
+                <a:ea typeface="Arial"/>
+                <a:cs typeface="Arial"/>
+              </a:defRPr>
+            </a:pPr>
+            <a:r>
+              <a:rPr sz="1800">
+                <a:solidFill>
+                  <a:srgbClr val="000000"/>
+                </a:solidFill>
+                <a:latin typeface="Arial"/>
+                <a:ea typeface="Arial"/>
+                <a:cs typeface="Arial"/>
+              </a:rPr>
+              <a:t>• Автоматически формирует план колоды</a:t>
+            </a:r>
+          </a:p>
+          <a:p>
+            <a:pPr algn="l">
+              <a:spcAft>
+                <a:spcPts val="300"/>
+              </a:spcAft>
+              <a:defRPr sz="1800">
+                <a:solidFill>
+                  <a:srgbClr val="000000"/>
+                </a:solidFill>
+                <a:latin typeface="Arial"/>
+                <a:ea typeface="Arial"/>
+                <a:cs typeface="Arial"/>
+              </a:defRPr>
+            </a:pPr>
+            <a:r>
+              <a:rPr sz="1800">
+                <a:solidFill>
+                  <a:srgbClr val="000000"/>
+                </a:solidFill>
+                <a:latin typeface="Arial"/>
+                <a:ea typeface="Arial"/>
+                <a:cs typeface="Arial"/>
+              </a:rPr>
+              <a:t>• Экспорт в pptx, pdf, html</a:t>
+            </a:r>
+          </a:p>
+        </p:txBody>
+      </p:sp>
+      <p:sp>
+        <p:nvSpPr>
+          <p:cNvPr id="4" name="Pentagon 3"/>
+          <p:cNvSpPr/>
+          <p:nvPr/>
+        </p:nvSpPr>
+        <p:spPr>
+          <a:xfrm>
+            <a:off x="677387" y="4354494"/>
+            <a:ext cx="2066959" cy="1281514"/>
+          </a:xfrm>
+          <a:prstGeom prst="homePlate">
+            <a:avLst/>
+          </a:prstGeom>
+          <a:solidFill>
+            <a:srgbClr val="0077FF"/>
+          </a:solidFill>
+          <a:ln>
+            <a:noFill/>
+          </a:ln>
+        </p:spPr>
+        <p:style>
+          <a:lnRef idx="1">
+            <a:schemeClr val="accent1"/>
+          </a:lnRef>
+          <a:fillRef idx="3">
+            <a:schemeClr val="accent1"/>
+          </a:fillRef>
+          <a:effectRef idx="2">
+            <a:schemeClr val="accent1"/>
+          </a:effectRef>
+          <a:fontRef idx="minor">
+            <a:schemeClr val="lt1"/>
+          </a:fontRef>
+        </p:style>
+        <p:txBody>
+          <a:bodyPr rtlCol="0" anchor="ctr" wrap="square" lIns="12700" rIns="12700" tIns="12700" bIns="12700"/>
+          <a:lstStyle/>
+          <a:p>
+            <a:pPr algn="ctr">
+              <a:defRPr sz="1300" b="0">
+                <a:solidFill>
+                  <a:srgbClr val="FFFFFF"/>
+                </a:solidFill>
+                <a:latin typeface="Arial"/>
+                <a:ea typeface="Arial"/>
+                <a:cs typeface="Arial"/>
+              </a:defRPr>
+            </a:pPr>
+            <a:r>
+              <a:rPr sz="1300" b="0">
+                <a:solidFill>
+                  <a:srgbClr val="FFFFFF"/>
+                </a:solidFill>
+                <a:latin typeface="Arial"/>
+                <a:ea typeface="Arial"/>
+                <a:cs typeface="Arial"/>
+              </a:rPr>
+              <a:t>Шаблон</a:t>
+            </a:r>
+          </a:p>
+        </p:txBody>
+      </p:sp>
+      <p:sp>
+        <p:nvSpPr>
+          <p:cNvPr id="5" name="Chevron 4"/>
+          <p:cNvSpPr/>
+          <p:nvPr/>
+        </p:nvSpPr>
+        <p:spPr>
+          <a:xfrm>
+            <a:off x="2874616" y="4354494"/>
+            <a:ext cx="2066959" cy="1281514"/>
+          </a:xfrm>
+          <a:prstGeom prst="chevron">
+            <a:avLst/>
+          </a:prstGeom>
+          <a:solidFill>
+            <a:srgbClr val="0077FF"/>
+          </a:solidFill>
+          <a:ln>
+            <a:noFill/>
+          </a:ln>
+        </p:spPr>
+        <p:style>
+          <a:lnRef idx="1">
+            <a:schemeClr val="accent1"/>
+          </a:lnRef>
+          <a:fillRef idx="3">
+            <a:schemeClr val="accent1"/>
+          </a:fillRef>
+          <a:effectRef idx="2">
+            <a:schemeClr val="accent1"/>
+          </a:effectRef>
+          <a:fontRef idx="minor">
+            <a:schemeClr val="lt1"/>
+          </a:fontRef>
+        </p:style>
+        <p:txBody>
+          <a:bodyPr rtlCol="0" anchor="ctr" wrap="square" lIns="12700" rIns="12700" tIns="12700" bIns="12700"/>
+          <a:lstStyle/>
+          <a:p>
+            <a:pPr algn="ctr">
+              <a:defRPr sz="1300" b="0">
+                <a:solidFill>
+                  <a:srgbClr val="FFFFFF"/>
+                </a:solidFill>
+                <a:latin typeface="Arial"/>
+                <a:ea typeface="Arial"/>
+                <a:cs typeface="Arial"/>
+              </a:defRPr>
+            </a:pPr>
+            <a:r>
+              <a:rPr sz="1300" b="0">
+                <a:solidFill>
+                  <a:srgbClr val="FFFFFF"/>
+                </a:solidFill>
+                <a:latin typeface="Arial"/>
+                <a:ea typeface="Arial"/>
+                <a:cs typeface="Arial"/>
+              </a:rPr>
+              <a:t>План</a:t>
+            </a:r>
+          </a:p>
+        </p:txBody>
+      </p:sp>
+      <p:sp>
+        <p:nvSpPr>
+          <p:cNvPr id="6" name="Chevron 5"/>
+          <p:cNvSpPr/>
+          <p:nvPr/>
+        </p:nvSpPr>
+        <p:spPr>
+          <a:xfrm>
+            <a:off x="5071846" y="4354494"/>
+            <a:ext cx="2066959" cy="1281514"/>
+          </a:xfrm>
+          <a:prstGeom prst="chevron">
+            <a:avLst/>
+          </a:prstGeom>
+          <a:solidFill>
+            <a:srgbClr val="0077FF"/>
+          </a:solidFill>
+          <a:ln>
+            <a:noFill/>
+          </a:ln>
+        </p:spPr>
+        <p:style>
+          <a:lnRef idx="1">
+            <a:schemeClr val="accent1"/>
+          </a:lnRef>
+          <a:fillRef idx="3">
+            <a:schemeClr val="accent1"/>
+          </a:fillRef>
+          <a:effectRef idx="2">
+            <a:schemeClr val="accent1"/>
+          </a:effectRef>
+          <a:fontRef idx="minor">
+            <a:schemeClr val="lt1"/>
+          </a:fontRef>
+        </p:style>
+        <p:txBody>
+          <a:bodyPr rtlCol="0" anchor="ctr" wrap="square" lIns="12700" rIns="12700" tIns="12700" bIns="12700"/>
+          <a:lstStyle/>
+          <a:p>
+            <a:pPr algn="ctr">
+              <a:defRPr sz="1165" b="0">
+                <a:solidFill>
+                  <a:srgbClr val="FFFFFF"/>
+                </a:solidFill>
+                <a:latin typeface="Arial"/>
+                <a:ea typeface="Arial"/>
+                <a:cs typeface="Arial"/>
+              </a:defRPr>
+            </a:pPr>
+            <a:r>
+              <a:rPr sz="1165" b="0">
+                <a:solidFill>
+                  <a:srgbClr val="FFFFFF"/>
+                </a:solidFill>
+                <a:latin typeface="Arial"/>
+                <a:ea typeface="Arial"/>
+                <a:cs typeface="Arial"/>
+              </a:rPr>
+              <a:t>Вёрстка</a:t>
+            </a:r>
+          </a:p>
+        </p:txBody>
+      </p:sp>
+      <p:sp>
+        <p:nvSpPr>
+          <p:cNvPr id="7" name="Chevron 6"/>
+          <p:cNvSpPr/>
+          <p:nvPr/>
+        </p:nvSpPr>
+        <p:spPr>
+          <a:xfrm>
+            <a:off x="7269076" y="4354494"/>
+            <a:ext cx="2066959" cy="1281514"/>
+          </a:xfrm>
+          <a:prstGeom prst="chevron">
+            <a:avLst/>
+          </a:prstGeom>
+          <a:solidFill>
+            <a:srgbClr val="0077FF"/>
+          </a:solidFill>
+          <a:ln>
+            <a:noFill/>
+          </a:ln>
+        </p:spPr>
+        <p:style>
+          <a:lnRef idx="1">
+            <a:schemeClr val="accent1"/>
+          </a:lnRef>
+          <a:fillRef idx="3">
+            <a:schemeClr val="accent1"/>
+          </a:fillRef>
+          <a:effectRef idx="2">
+            <a:schemeClr val="accent1"/>
+          </a:effectRef>
+          <a:fontRef idx="minor">
+            <a:schemeClr val="lt1"/>
+          </a:fontRef>
+        </p:style>
+        <p:txBody>
+          <a:bodyPr rtlCol="0" anchor="ctr" wrap="square" lIns="12700" rIns="12700" tIns="12700" bIns="12700"/>
+          <a:lstStyle/>
+          <a:p>
+            <a:pPr algn="ctr">
+              <a:defRPr sz="1300" b="0">
+                <a:solidFill>
+                  <a:srgbClr val="FFFFFF"/>
+                </a:solidFill>
+                <a:latin typeface="Arial"/>
+                <a:ea typeface="Arial"/>
+                <a:cs typeface="Arial"/>
+              </a:defRPr>
+            </a:pPr>
+            <a:r>
+              <a:rPr sz="1300" b="0">
+                <a:solidFill>
+                  <a:srgbClr val="FFFFFF"/>
+                </a:solidFill>
+                <a:latin typeface="Arial"/>
+                <a:ea typeface="Arial"/>
+                <a:cs typeface="Arial"/>
+              </a:rPr>
+              <a:t>Аудит</a:t>
+            </a:r>
+          </a:p>
+        </p:txBody>
+      </p:sp>
+      <p:sp>
+        <p:nvSpPr>
+          <p:cNvPr id="8" name="Chevron 7"/>
+          <p:cNvSpPr/>
+          <p:nvPr/>
+        </p:nvSpPr>
+        <p:spPr>
+          <a:xfrm>
+            <a:off x="9466305" y="4354494"/>
+            <a:ext cx="2066959" cy="1281514"/>
+          </a:xfrm>
+          <a:prstGeom prst="chevron">
+            <a:avLst/>
+          </a:prstGeom>
+          <a:solidFill>
+            <a:srgbClr val="0077FF"/>
+          </a:solidFill>
+          <a:ln>
+            <a:noFill/>
+          </a:ln>
+        </p:spPr>
+        <p:style>
+          <a:lnRef idx="1">
+            <a:schemeClr val="accent1"/>
+          </a:lnRef>
+          <a:fillRef idx="3">
+            <a:schemeClr val="accent1"/>
+          </a:fillRef>
+          <a:effectRef idx="2">
+            <a:schemeClr val="accent1"/>
+          </a:effectRef>
+          <a:fontRef idx="minor">
+            <a:schemeClr val="lt1"/>
+          </a:fontRef>
+        </p:style>
+        <p:txBody>
+          <a:bodyPr rtlCol="0" anchor="ctr" wrap="square" lIns="12700" rIns="12700" tIns="12700" bIns="12700"/>
+          <a:lstStyle/>
+          <a:p>
+            <a:pPr algn="ctr">
+              <a:defRPr sz="1165" b="0">
+                <a:solidFill>
+                  <a:srgbClr val="FFFFFF"/>
+                </a:solidFill>
+                <a:latin typeface="Arial"/>
+                <a:ea typeface="Arial"/>
+                <a:cs typeface="Arial"/>
+              </a:defRPr>
+            </a:pPr>
+            <a:r>
+              <a:rPr sz="1165" b="0">
+                <a:solidFill>
+                  <a:srgbClr val="FFFFFF"/>
+                </a:solidFill>
+                <a:latin typeface="Arial"/>
+                <a:ea typeface="Arial"/>
+                <a:cs typeface="Arial"/>
+              </a:rPr>
+              <a:t>Экспорт</a:t>
+            </a:r>
+          </a:p>
+        </p:txBody>
+      </p:sp>
+    </p:spTree>
+  </p:cSld>
+  <p:clrMapOvr>
+    <a:masterClrMapping/>
+  </p:clrMapOvr>
+</p:sld>
+</file>
+
+<file path=ppt/slides/slide59.xml><?xml version="1.0" encoding="utf-8"?>
+<p:sld xmlns:a="http://schemas.openxmlformats.org/drawingml/2006/main" xmlns:p="http://schemas.openxmlformats.org/presentationml/2006/main" xmlns:r="http://schemas.openxmlformats.org/officeDocument/2006/relationships">
+  <p:cSld>
+    <p:bg>
+      <p:bgPr>
+        <a:solidFill>
+          <a:schemeClr val="lt2"/>
+        </a:solidFill>
+      </p:bgPr>
+    </p:bg>
+    <p:spTree>
+      <p:nvGrpSpPr>
+        <p:cNvPr id="1" name=""/>
+        <p:cNvGrpSpPr/>
+        <p:nvPr/>
+      </p:nvGrpSpPr>
+      <p:grpSpPr/>
+      <p:sp>
+        <p:nvSpPr>
+          <p:cNvPr id="2" name="title"/>
+          <p:cNvSpPr txBox="1"/>
+          <p:nvPr/>
+        </p:nvSpPr>
+        <p:spPr>
+          <a:xfrm>
+            <a:off x="677387" y="692177"/>
+            <a:ext cx="10855878" cy="1447800"/>
+          </a:xfrm>
+          <a:prstGeom prst="rect">
+            <a:avLst/>
+          </a:prstGeom>
+          <a:noFill/>
+        </p:spPr>
+        <p:txBody>
+          <a:bodyPr wrap="square" lIns="76200" rIns="76200" tIns="50800" bIns="50800">
+            <a:spAutoFit/>
+          </a:bodyPr>
+          <a:lstStyle/>
+          <a:p>
+            <a:pPr algn="l">
+              <a:spcAft>
+                <a:spcPts val="300"/>
+              </a:spcAft>
+              <a:defRPr sz="4000">
+                <a:solidFill>
+                  <a:srgbClr val="000000"/>
+                </a:solidFill>
+                <a:latin typeface="Arial"/>
+                <a:ea typeface="Arial"/>
+                <a:cs typeface="Arial"/>
+              </a:defRPr>
+            </a:pPr>
+            <a:r>
+              <a:rPr sz="4000">
+                <a:solidFill>
+                  <a:srgbClr val="000000"/>
+                </a:solidFill>
+                <a:latin typeface="Arial"/>
+                <a:ea typeface="Arial"/>
+                <a:cs typeface="Arial"/>
+              </a:rPr>
+              <a:t>Пилот сократил время сборки до 4 минут</a:t>
+            </a:r>
+          </a:p>
+        </p:txBody>
+      </p:sp>
+      <p:sp>
+        <p:nvSpPr>
+          <p:cNvPr id="3" name="body"/>
+          <p:cNvSpPr txBox="1"/>
+          <p:nvPr/>
+        </p:nvSpPr>
+        <p:spPr>
+          <a:xfrm>
+            <a:off x="677387" y="2277137"/>
+            <a:ext cx="10855878" cy="1341120"/>
+          </a:xfrm>
+          <a:prstGeom prst="rect">
+            <a:avLst/>
+          </a:prstGeom>
+          <a:noFill/>
+        </p:spPr>
+        <p:txBody>
+          <a:bodyPr wrap="square" lIns="76200" rIns="76200" tIns="50800" bIns="50800">
+            <a:spAutoFit/>
+          </a:bodyPr>
+          <a:lstStyle/>
+          <a:p>
+            <a:pPr algn="l">
+              <a:spcAft>
+                <a:spcPts val="300"/>
+              </a:spcAft>
+              <a:defRPr sz="1600">
+                <a:solidFill>
+                  <a:srgbClr val="000000"/>
+                </a:solidFill>
+                <a:latin typeface="Arial"/>
+                <a:ea typeface="Arial"/>
+                <a:cs typeface="Arial"/>
+              </a:defRPr>
+            </a:pPr>
+            <a:r>
+              <a:rPr sz="1600">
+                <a:solidFill>
+                  <a:srgbClr val="000000"/>
+                </a:solidFill>
+                <a:latin typeface="Arial"/>
+                <a:ea typeface="Arial"/>
+                <a:cs typeface="Arial"/>
+              </a:rPr>
+              <a:t>• Среднее время 4 минуты вместо 186</a:t>
+            </a:r>
+          </a:p>
+          <a:p>
+            <a:pPr algn="l">
+              <a:spcAft>
+                <a:spcPts val="300"/>
+              </a:spcAft>
+              <a:defRPr sz="1600">
+                <a:solidFill>
+                  <a:srgbClr val="000000"/>
+                </a:solidFill>
+                <a:latin typeface="Arial"/>
+                <a:ea typeface="Arial"/>
+                <a:cs typeface="Arial"/>
+              </a:defRPr>
+            </a:pPr>
+            <a:r>
+              <a:rPr sz="1600">
+                <a:solidFill>
+                  <a:srgbClr val="000000"/>
+                </a:solidFill>
+                <a:latin typeface="Arial"/>
+                <a:ea typeface="Arial"/>
+                <a:cs typeface="Arial"/>
+              </a:rPr>
+              <a:t>• Срок до первой версии сократился с 6 дней до 1</a:t>
+            </a:r>
+          </a:p>
+          <a:p>
+            <a:pPr algn="l">
+              <a:spcAft>
+                <a:spcPts val="300"/>
+              </a:spcAft>
+              <a:defRPr sz="1600">
+                <a:solidFill>
+                  <a:srgbClr val="000000"/>
+                </a:solidFill>
+                <a:latin typeface="Arial"/>
+                <a:ea typeface="Arial"/>
+                <a:cs typeface="Arial"/>
+              </a:defRPr>
+            </a:pPr>
+            <a:r>
+              <a:rPr sz="1600">
+                <a:solidFill>
+                  <a:srgbClr val="000000"/>
+                </a:solidFill>
+                <a:latin typeface="Arial"/>
+                <a:ea typeface="Arial"/>
+                <a:cs typeface="Arial"/>
+              </a:rPr>
+              <a:t>• Нарушений стиля 2 из 68</a:t>
+            </a:r>
+          </a:p>
+        </p:txBody>
+      </p:sp>
+      <p:graphicFrame>
+        <p:nvGraphicFramePr>
+          <p:cNvPr id="4" name="Chart 3"/>
+          <p:cNvGraphicFramePr>
+            <a:graphicFrameLocks noGrp="1"/>
+          </p:cNvGraphicFramePr>
+          <p:nvPr/>
+        </p:nvGraphicFramePr>
+        <p:xfrm>
+          <a:off x="677387" y="3789707"/>
+          <a:ext cx="10855878" cy="2411089"/>
+        </p:xfrm>
+        <a:graphic>
+          <a:graphicData uri="http://schemas.openxmlformats.org/drawingml/2006/chart">
+            <c:chart xmlns:c="http://schemas.openxmlformats.org/drawingml/2006/chart" r:id="rId2"/>
+          </a:graphicData>
+        </a:graphic>
+      </p:graphicFrame>
+    </p:spTree>
+  </p:cSld>
+  <p:clrMapOvr>
+    <a:masterClrMapping/>
+  </p:clrMapOvr>
+</p:sld>
+</file>
+
+<file path=ppt/slides/slide60.xml><?xml version="1.0" encoding="utf-8"?>
+<p:sld xmlns:a="http://schemas.openxmlformats.org/drawingml/2006/main" xmlns:p="http://schemas.openxmlformats.org/presentationml/2006/main" xmlns:r="http://schemas.openxmlformats.org/officeDocument/2006/relationships">
+  <p:cSld>
+    <p:bg>
+      <p:bgPr>
+        <a:solidFill>
+          <a:schemeClr val="lt2"/>
+        </a:solidFill>
+      </p:bgPr>
+    </p:bg>
+    <p:spTree>
+      <p:nvGrpSpPr>
+        <p:cNvPr id="1" name=""/>
+        <p:cNvGrpSpPr/>
+        <p:nvPr/>
+      </p:nvGrpSpPr>
+      <p:grpSpPr/>
+      <p:sp>
+        <p:nvSpPr>
           <p:cNvPr id="795" name="Google Shape;795;p60"/>
           <p:cNvSpPr txBox="1"/>
           <p:nvPr/>
@@ -8607,7 +8533,7 @@
                 <a:ea typeface="Arial"/>
                 <a:cs typeface="Arial"/>
               </a:rPr>
-              <a:t>Текущее состояние: ручная сборка презентаций</a:t>
+              <a:t>Для запуска требуется 2 vCPU, 2 ГБ RAM и 1 400 руб. за инференс</a:t>
             </a:r>
           </a:p>
         </p:txBody>
@@ -8638,7 +8564,7 @@
               <a:spcAft>
                 <a:spcPts val="300"/>
               </a:spcAft>
-              <a:defRPr sz="1600" b="0">
+              <a:defRPr sz="2000" b="0">
                 <a:solidFill>
                   <a:srgbClr val="000000"/>
                 </a:solidFill>
@@ -8648,7 +8574,7 @@
               </a:defRPr>
             </a:pPr>
             <a:r>
-              <a:rPr sz="1600" b="0">
+              <a:rPr sz="2000" b="0">
                 <a:solidFill>
                   <a:srgbClr val="000000"/>
                 </a:solidFill>
@@ -8656,7 +8582,7 @@
                 <a:ea typeface="Arial"/>
                 <a:cs typeface="Arial"/>
               </a:rPr>
-              <a:t>Сборка одной колоды 12 слайдов занимает 186 минут</a:t>
+              <a:t>Сервис работает на одной машине</a:t>
             </a:r>
           </a:p>
         </p:txBody>
@@ -8687,7 +8613,7 @@
               <a:spcAft>
                 <a:spcPts val="300"/>
               </a:spcAft>
-              <a:defRPr sz="1800" b="0">
+              <a:defRPr sz="1600" b="0">
                 <a:solidFill>
                   <a:srgbClr val="000000"/>
                 </a:solidFill>
@@ -8697,7 +8623,7 @@
               </a:defRPr>
             </a:pPr>
             <a:r>
-              <a:rPr sz="1800" b="0">
+              <a:rPr sz="1600" b="0">
                 <a:solidFill>
                   <a:srgbClr val="000000"/>
                 </a:solidFill>
@@ -8705,7 +8631,7 @@
                 <a:ea typeface="Arial"/>
                 <a:cs typeface="Arial"/>
               </a:rPr>
-              <a:t>Правки после ревью дизайнера 74 минуты</a:t>
+              <a:t>Модель gpt-oss-20b подключается по OpenAI</a:t>
             </a:r>
           </a:p>
         </p:txBody>
@@ -8754,7 +8680,7 @@
                 <a:ea typeface="Arial"/>
                 <a:cs typeface="Arial"/>
               </a:rPr>
-              <a:t>19 из 42 колод нарушают фирменный стиль</a:t>
+              <a:t>План запуска: Q3 2026 подключить 4 команды</a:t>
             </a:r>
           </a:p>
         </p:txBody>
@@ -8767,179 +8693,7 @@
 </p:sld>
 </file>
 
-<file path=ppt/slides/slide57.xml><?xml version="1.0" encoding="utf-8"?>
-<p:sld xmlns:a="http://schemas.openxmlformats.org/drawingml/2006/main" xmlns:p="http://schemas.openxmlformats.org/presentationml/2006/main" xmlns:r="http://schemas.openxmlformats.org/officeDocument/2006/relationships">
-  <p:cSld>
-    <p:bg>
-      <p:bgPr>
-        <a:solidFill>
-          <a:schemeClr val="lt2"/>
-        </a:solidFill>
-      </p:bgPr>
-    </p:bg>
-    <p:spTree>
-      <p:nvGrpSpPr>
-        <p:cNvPr id="1" name=""/>
-        <p:cNvGrpSpPr/>
-        <p:nvPr/>
-      </p:nvGrpSpPr>
-      <p:grpSpPr/>
-      <p:sp>
-        <p:nvSpPr>
-          <p:cNvPr id="2" name="title"/>
-          <p:cNvSpPr txBox="1"/>
-          <p:nvPr/>
-        </p:nvSpPr>
-        <p:spPr>
-          <a:xfrm>
-            <a:off x="677387" y="692177"/>
-            <a:ext cx="10855878" cy="822960"/>
-          </a:xfrm>
-          <a:prstGeom prst="rect">
-            <a:avLst/>
-          </a:prstGeom>
-          <a:noFill/>
-        </p:spPr>
-        <p:txBody>
-          <a:bodyPr wrap="square" lIns="76200" rIns="76200" tIns="50800" bIns="50800">
-            <a:spAutoFit/>
-          </a:bodyPr>
-          <a:lstStyle/>
-          <a:p>
-            <a:pPr algn="l">
-              <a:spcAft>
-                <a:spcPts val="300"/>
-              </a:spcAft>
-              <a:defRPr sz="4000">
-                <a:solidFill>
-                  <a:srgbClr val="000000"/>
-                </a:solidFill>
-                <a:latin typeface="Arial"/>
-                <a:ea typeface="Arial"/>
-                <a:cs typeface="Arial"/>
-              </a:defRPr>
-            </a:pPr>
-            <a:r>
-              <a:rPr sz="4000">
-                <a:solidFill>
-                  <a:srgbClr val="000000"/>
-                </a:solidFill>
-                <a:latin typeface="Arial"/>
-                <a:ea typeface="Arial"/>
-                <a:cs typeface="Arial"/>
-              </a:rPr>
-              <a:t>Ограничения команды дизайна</a:t>
-            </a:r>
-          </a:p>
-        </p:txBody>
-      </p:sp>
-      <p:sp>
-        <p:nvSpPr>
-          <p:cNvPr id="3" name="card_0"/>
-          <p:cNvSpPr txBox="1"/>
-          <p:nvPr/>
-        </p:nvSpPr>
-        <p:spPr>
-          <a:xfrm>
-            <a:off x="829787" y="2755902"/>
-            <a:ext cx="4999573" cy="3292495"/>
-          </a:xfrm>
-          <a:prstGeom prst="rect">
-            <a:avLst/>
-          </a:prstGeom>
-          <a:noFill/>
-        </p:spPr>
-        <p:txBody>
-          <a:bodyPr wrap="square" lIns="76200" rIns="76200" tIns="50800" bIns="50800">
-            <a:spAutoFit/>
-          </a:bodyPr>
-          <a:lstStyle/>
-          <a:p>
-            <a:pPr algn="l">
-              <a:spcAft>
-                <a:spcPts val="300"/>
-              </a:spcAft>
-              <a:defRPr sz="2400" b="0">
-                <a:solidFill>
-                  <a:srgbClr val="000000"/>
-                </a:solidFill>
-                <a:latin typeface="Arial"/>
-                <a:ea typeface="Arial"/>
-                <a:cs typeface="Arial"/>
-              </a:defRPr>
-            </a:pPr>
-            <a:r>
-              <a:rPr sz="2400" b="0">
-                <a:solidFill>
-                  <a:srgbClr val="000000"/>
-                </a:solidFill>
-                <a:latin typeface="Arial"/>
-                <a:ea typeface="Arial"/>
-                <a:cs typeface="Arial"/>
-              </a:rPr>
-              <a:t>4 дизайнера закрывают 11 запросов в неделю из 27</a:t>
-            </a:r>
-          </a:p>
-        </p:txBody>
-      </p:sp>
-      <p:sp>
-        <p:nvSpPr>
-          <p:cNvPr id="4" name="card_1"/>
-          <p:cNvSpPr txBox="1"/>
-          <p:nvPr/>
-        </p:nvSpPr>
-        <p:spPr>
-          <a:xfrm>
-            <a:off x="6381170" y="2755902"/>
-            <a:ext cx="4999573" cy="3292495"/>
-          </a:xfrm>
-          <a:prstGeom prst="rect">
-            <a:avLst/>
-          </a:prstGeom>
-          <a:noFill/>
-        </p:spPr>
-        <p:txBody>
-          <a:bodyPr wrap="square" lIns="76200" rIns="76200" tIns="50800" bIns="50800">
-            <a:spAutoFit/>
-          </a:bodyPr>
-          <a:lstStyle/>
-          <a:p>
-            <a:pPr algn="l">
-              <a:spcAft>
-                <a:spcPts val="300"/>
-              </a:spcAft>
-              <a:defRPr sz="2400" b="0">
-                <a:solidFill>
-                  <a:srgbClr val="000000"/>
-                </a:solidFill>
-                <a:latin typeface="Arial"/>
-                <a:ea typeface="Arial"/>
-                <a:cs typeface="Arial"/>
-              </a:defRPr>
-            </a:pPr>
-            <a:r>
-              <a:rPr sz="2400" b="0">
-                <a:solidFill>
-                  <a:srgbClr val="000000"/>
-                </a:solidFill>
-                <a:latin typeface="Arial"/>
-                <a:ea typeface="Arial"/>
-                <a:cs typeface="Arial"/>
-              </a:rPr>
-              <a:t>Средний срок ожидания 6 рабочих дней</a:t>
-            </a:r>
-          </a:p>
-        </p:txBody>
-      </p:sp>
-    </p:spTree>
-  </p:cSld>
-  <p:clrMapOvr>
-    <a:masterClrMapping/>
-  </p:clrMapOvr>
-</p:sld>
-</file>
-
-<file path=ppt/slides/slide58.xml><?xml version="1.0" encoding="utf-8"?>
+<file path=ppt/slides/slide61.xml><?xml version="1.0" encoding="utf-8"?>
 <p:sld xmlns:a="http://schemas.openxmlformats.org/drawingml/2006/main" xmlns:p="http://schemas.openxmlformats.org/presentationml/2006/main" xmlns:r="http://schemas.openxmlformats.org/officeDocument/2006/relationships">
   <p:cSld>
     <p:bg>
@@ -9243,7 +8997,7 @@
                 <a:ea typeface="Arial"/>
                 <a:cs typeface="Arial"/>
               </a:rPr>
-              <a:t>Предлагаемый сервис: автоматическая вёрстка</a:t>
+              <a:t>Пилот собрал 68 презентаций за 6 недель</a:t>
             </a:r>
           </a:p>
         </p:txBody>
@@ -9274,7 +9028,7 @@
               <a:spcAft>
                 <a:spcPts val="300"/>
               </a:spcAft>
-              <a:defRPr sz="1600" b="0">
+              <a:defRPr sz="1700" b="0">
                 <a:solidFill>
                   <a:srgbClr val="000000"/>
                 </a:solidFill>
@@ -9284,7 +9038,7 @@
               </a:defRPr>
             </a:pPr>
             <a:r>
-              <a:rPr sz="1600" b="0">
+              <a:rPr sz="1700" b="0">
                 <a:solidFill>
                   <a:srgbClr val="000000"/>
                 </a:solidFill>
@@ -9292,7 +9046,7 @@
                 <a:ea typeface="Arial"/>
                 <a:cs typeface="Arial"/>
               </a:rPr>
-              <a:t>Принимает шаблон pptx и материалы: документы, таблицы, заметки</a:t>
+              <a:t>Дизайнеры закрыли 38 запросов вместо 11</a:t>
             </a:r>
           </a:p>
         </p:txBody>
@@ -9323,7 +9077,7 @@
               <a:spcAft>
                 <a:spcPts val="300"/>
               </a:spcAft>
-              <a:defRPr sz="1600" b="0">
+              <a:defRPr sz="2400" b="0">
                 <a:solidFill>
                   <a:srgbClr val="000000"/>
                 </a:solidFill>
@@ -9333,7 +9087,7 @@
               </a:defRPr>
             </a:pPr>
             <a:r>
-              <a:rPr sz="1600" b="0">
+              <a:rPr sz="2400" b="0">
                 <a:solidFill>
                   <a:srgbClr val="000000"/>
                 </a:solidFill>
@@ -9341,7 +9095,7 @@
                 <a:ea typeface="Arial"/>
                 <a:cs typeface="Arial"/>
               </a:rPr>
-              <a:t>Генерирует колоду по дизайн-системе и аудит качества</a:t>
+              <a:t>Рутина вёрстки ушла в сервис</a:t>
             </a:r>
           </a:p>
         </p:txBody>
@@ -9390,1041 +9144,7 @@
                 <a:ea typeface="Arial"/>
                 <a:cs typeface="Arial"/>
               </a:rPr>
-              <a:t>Экспорт в pptx, pdf, html, слайды редактируемы</a:t>
-            </a:r>
-          </a:p>
-        </p:txBody>
-      </p:sp>
-    </p:spTree>
-  </p:cSld>
-  <p:clrMapOvr>
-    <a:masterClrMapping/>
-  </p:clrMapOvr>
-</p:sld>
-</file>
-
-<file path=ppt/slides/slide59.xml><?xml version="1.0" encoding="utf-8"?>
-<p:sld xmlns:a="http://schemas.openxmlformats.org/drawingml/2006/main" xmlns:p="http://schemas.openxmlformats.org/presentationml/2006/main" xmlns:r="http://schemas.openxmlformats.org/officeDocument/2006/relationships">
-  <p:cSld>
-    <p:spTree>
-      <p:nvGrpSpPr>
-        <p:cNvPr id="1" name=""/>
-        <p:cNvGrpSpPr/>
-        <p:nvPr/>
-      </p:nvGrpSpPr>
-      <p:grpSpPr/>
-      <p:cxnSp>
-        <p:nvCxnSpPr>
-          <p:cNvPr id="986" name="Google Shape;986;p76"/>
-          <p:cNvCxnSpPr/>
-          <p:nvPr/>
-        </p:nvCxnSpPr>
-        <p:spPr>
-          <a:xfrm rot="10800000">
-            <a:off x="-42658" y="3591512"/>
-            <a:ext cx="12234658" cy="0"/>
-          </a:xfrm>
-          <a:prstGeom prst="straightConnector1">
-            <a:avLst/>
-          </a:prstGeom>
-          <a:noFill/>
-          <a:ln cap="flat" cmpd="sng" w="12700">
-            <a:solidFill>
-              <a:srgbClr val="E1E1E2"/>
-            </a:solidFill>
-            <a:prstDash val="solid"/>
-            <a:miter lim="8000"/>
-            <a:headEnd len="sm" w="sm" type="none"/>
-            <a:tailEnd len="sm" w="sm" type="none"/>
-          </a:ln>
-        </p:spPr>
-      </p:cxnSp>
-      <p:sp>
-        <p:nvSpPr>
-          <p:cNvPr id="987" name="title"/>
-          <p:cNvSpPr txBox="1"/>
-          <p:nvPr/>
-        </p:nvSpPr>
-        <p:spPr>
-          <a:xfrm>
-            <a:off x="677387" y="692177"/>
-            <a:ext cx="10855878" cy="822960"/>
-          </a:xfrm>
-          <a:prstGeom prst="rect">
-            <a:avLst/>
-          </a:prstGeom>
-          <a:noFill/>
-        </p:spPr>
-        <p:txBody>
-          <a:bodyPr wrap="square" lIns="76200" rIns="76200" tIns="50800" bIns="50800">
-            <a:spAutoFit/>
-          </a:bodyPr>
-          <a:lstStyle/>
-          <a:p>
-            <a:pPr algn="l">
-              <a:spcAft>
-                <a:spcPts val="300"/>
-              </a:spcAft>
-              <a:defRPr sz="4000">
-                <a:solidFill>
-                  <a:srgbClr val="000000"/>
-                </a:solidFill>
-                <a:latin typeface="Arial"/>
-                <a:ea typeface="Arial"/>
-                <a:cs typeface="Arial"/>
-              </a:defRPr>
-            </a:pPr>
-            <a:r>
-              <a:rPr sz="4000">
-                <a:solidFill>
-                  <a:srgbClr val="000000"/>
-                </a:solidFill>
-                <a:latin typeface="Arial"/>
-                <a:ea typeface="Arial"/>
-                <a:cs typeface="Arial"/>
-              </a:rPr>
-              <a:t>Ключевые возможности сервиса</a:t>
-            </a:r>
-          </a:p>
-        </p:txBody>
-      </p:sp>
-      <p:sp>
-        <p:nvSpPr>
-          <p:cNvPr id="988" name="Document 987"/>
-          <p:cNvSpPr/>
-          <p:nvPr/>
-        </p:nvSpPr>
-        <p:spPr>
-          <a:xfrm>
-            <a:off x="1437601" y="2262123"/>
-            <a:ext cx="581269" cy="642455"/>
-          </a:xfrm>
-          <a:prstGeom prst="flowChartDocument">
-            <a:avLst/>
-          </a:prstGeom>
-          <a:solidFill>
-            <a:srgbClr val="0077FF"/>
-          </a:solidFill>
-          <a:ln>
-            <a:noFill/>
-          </a:ln>
-        </p:spPr>
-        <p:style>
-          <a:lnRef idx="1">
-            <a:schemeClr val="accent1"/>
-          </a:lnRef>
-          <a:fillRef idx="3">
-            <a:schemeClr val="accent1"/>
-          </a:fillRef>
-          <a:effectRef idx="2">
-            <a:schemeClr val="accent1"/>
-          </a:effectRef>
-          <a:fontRef idx="minor">
-            <a:schemeClr val="lt1"/>
-          </a:fontRef>
-        </p:style>
-        <p:txBody>
-          <a:bodyPr rtlCol="0" anchor="ctr"/>
-          <a:lstStyle/>
-          <a:p>
-            <a:pPr algn="ctr"/>
-          </a:p>
-        </p:txBody>
-      </p:sp>
-      <p:sp>
-        <p:nvSpPr>
-          <p:cNvPr id="989" name="TextBox 988"/>
-          <p:cNvSpPr txBox="1"/>
-          <p:nvPr/>
-        </p:nvSpPr>
-        <p:spPr>
-          <a:xfrm>
-            <a:off x="677387" y="3049200"/>
-            <a:ext cx="2101697" cy="542332"/>
-          </a:xfrm>
-          <a:prstGeom prst="rect">
-            <a:avLst/>
-          </a:prstGeom>
-          <a:noFill/>
-        </p:spPr>
-        <p:txBody>
-          <a:bodyPr wrap="square">
-            <a:spAutoFit/>
-          </a:bodyPr>
-          <a:lstStyle/>
-          <a:p>
-            <a:pPr algn="ctr">
-              <a:defRPr sz="1200" b="0">
-                <a:solidFill>
-                  <a:srgbClr val="000000"/>
-                </a:solidFill>
-                <a:latin typeface="Arial"/>
-                <a:ea typeface="Arial"/>
-                <a:cs typeface="Arial"/>
-              </a:defRPr>
-            </a:pPr>
-            <a:r>
-              <a:rPr sz="1200" b="0">
-                <a:solidFill>
-                  <a:srgbClr val="000000"/>
-                </a:solidFill>
-                <a:latin typeface="Arial"/>
-                <a:ea typeface="Arial"/>
-                <a:cs typeface="Arial"/>
-              </a:rPr>
-              <a:t>Шаблон</a:t>
-            </a:r>
-          </a:p>
-        </p:txBody>
-      </p:sp>
-      <p:sp>
-        <p:nvSpPr>
-          <p:cNvPr id="990" name="Document 989"/>
-          <p:cNvSpPr/>
-          <p:nvPr/>
-        </p:nvSpPr>
-        <p:spPr>
-          <a:xfrm>
-            <a:off x="3626146" y="2262123"/>
-            <a:ext cx="581269" cy="642455"/>
-          </a:xfrm>
-          <a:prstGeom prst="flowChartDocument">
-            <a:avLst/>
-          </a:prstGeom>
-          <a:solidFill>
-            <a:srgbClr val="0077FF"/>
-          </a:solidFill>
-          <a:ln>
-            <a:noFill/>
-          </a:ln>
-        </p:spPr>
-        <p:style>
-          <a:lnRef idx="1">
-            <a:schemeClr val="accent1"/>
-          </a:lnRef>
-          <a:fillRef idx="3">
-            <a:schemeClr val="accent1"/>
-          </a:fillRef>
-          <a:effectRef idx="2">
-            <a:schemeClr val="accent1"/>
-          </a:effectRef>
-          <a:fontRef idx="minor">
-            <a:schemeClr val="lt1"/>
-          </a:fontRef>
-        </p:style>
-        <p:txBody>
-          <a:bodyPr rtlCol="0" anchor="ctr"/>
-          <a:lstStyle/>
-          <a:p>
-            <a:pPr algn="ctr"/>
-          </a:p>
-        </p:txBody>
-      </p:sp>
-      <p:sp>
-        <p:nvSpPr>
-          <p:cNvPr id="991" name="TextBox 990"/>
-          <p:cNvSpPr txBox="1"/>
-          <p:nvPr/>
-        </p:nvSpPr>
-        <p:spPr>
-          <a:xfrm>
-            <a:off x="2865932" y="3049200"/>
-            <a:ext cx="2101697" cy="542332"/>
-          </a:xfrm>
-          <a:prstGeom prst="rect">
-            <a:avLst/>
-          </a:prstGeom>
-          <a:noFill/>
-        </p:spPr>
-        <p:txBody>
-          <a:bodyPr wrap="square">
-            <a:spAutoFit/>
-          </a:bodyPr>
-          <a:lstStyle/>
-          <a:p>
-            <a:pPr algn="ctr">
-              <a:defRPr sz="1200" b="0">
-                <a:solidFill>
-                  <a:srgbClr val="000000"/>
-                </a:solidFill>
-                <a:latin typeface="Arial"/>
-                <a:ea typeface="Arial"/>
-                <a:cs typeface="Arial"/>
-              </a:defRPr>
-            </a:pPr>
-            <a:r>
-              <a:rPr sz="1200" b="0">
-                <a:solidFill>
-                  <a:srgbClr val="000000"/>
-                </a:solidFill>
-                <a:latin typeface="Arial"/>
-                <a:ea typeface="Arial"/>
-                <a:cs typeface="Arial"/>
-              </a:rPr>
-              <a:t>Материалы</a:t>
-            </a:r>
-          </a:p>
-        </p:txBody>
-      </p:sp>
-      <p:sp>
-        <p:nvSpPr>
-          <p:cNvPr id="992" name="Gear 6 991"/>
-          <p:cNvSpPr/>
-          <p:nvPr/>
-        </p:nvSpPr>
-        <p:spPr>
-          <a:xfrm>
-            <a:off x="5753505" y="2231530"/>
-            <a:ext cx="474193" cy="474193"/>
-          </a:xfrm>
-          <a:prstGeom prst="gear6">
-            <a:avLst/>
-          </a:prstGeom>
-          <a:solidFill>
-            <a:srgbClr val="0077FF"/>
-          </a:solidFill>
-          <a:ln>
-            <a:noFill/>
-          </a:ln>
-        </p:spPr>
-        <p:style>
-          <a:lnRef idx="1">
-            <a:schemeClr val="accent1"/>
-          </a:lnRef>
-          <a:fillRef idx="3">
-            <a:schemeClr val="accent1"/>
-          </a:fillRef>
-          <a:effectRef idx="2">
-            <a:schemeClr val="accent1"/>
-          </a:effectRef>
-          <a:fontRef idx="minor">
-            <a:schemeClr val="lt1"/>
-          </a:fontRef>
-        </p:style>
-        <p:txBody>
-          <a:bodyPr rtlCol="0" anchor="ctr"/>
-          <a:lstStyle/>
-          <a:p>
-            <a:pPr algn="ctr"/>
-          </a:p>
-        </p:txBody>
-      </p:sp>
-      <p:sp>
-        <p:nvSpPr>
-          <p:cNvPr id="993" name="Gear 6 992"/>
-          <p:cNvSpPr/>
-          <p:nvPr/>
-        </p:nvSpPr>
-        <p:spPr>
-          <a:xfrm>
-            <a:off x="6074732" y="2522164"/>
-            <a:ext cx="382413" cy="382413"/>
-          </a:xfrm>
-          <a:prstGeom prst="gear6">
-            <a:avLst/>
-          </a:prstGeom>
-          <a:solidFill>
-            <a:srgbClr val="0077FF"/>
-          </a:solidFill>
-          <a:ln>
-            <a:noFill/>
-          </a:ln>
-        </p:spPr>
-        <p:style>
-          <a:lnRef idx="1">
-            <a:schemeClr val="accent1"/>
-          </a:lnRef>
-          <a:fillRef idx="3">
-            <a:schemeClr val="accent1"/>
-          </a:fillRef>
-          <a:effectRef idx="2">
-            <a:schemeClr val="accent1"/>
-          </a:effectRef>
-          <a:fontRef idx="minor">
-            <a:schemeClr val="lt1"/>
-          </a:fontRef>
-        </p:style>
-        <p:txBody>
-          <a:bodyPr rtlCol="0" anchor="ctr"/>
-          <a:lstStyle/>
-          <a:p>
-            <a:pPr algn="ctr"/>
-          </a:p>
-        </p:txBody>
-      </p:sp>
-      <p:sp>
-        <p:nvSpPr>
-          <p:cNvPr id="994" name="TextBox 993"/>
-          <p:cNvSpPr txBox="1"/>
-          <p:nvPr/>
-        </p:nvSpPr>
-        <p:spPr>
-          <a:xfrm>
-            <a:off x="5054477" y="3049200"/>
-            <a:ext cx="2101697" cy="542332"/>
-          </a:xfrm>
-          <a:prstGeom prst="rect">
-            <a:avLst/>
-          </a:prstGeom>
-          <a:noFill/>
-        </p:spPr>
-        <p:txBody>
-          <a:bodyPr wrap="square">
-            <a:spAutoFit/>
-          </a:bodyPr>
-          <a:lstStyle/>
-          <a:p>
-            <a:pPr algn="ctr">
-              <a:defRPr sz="1200" b="0">
-                <a:solidFill>
-                  <a:srgbClr val="000000"/>
-                </a:solidFill>
-                <a:latin typeface="Arial"/>
-                <a:ea typeface="Arial"/>
-                <a:cs typeface="Arial"/>
-              </a:defRPr>
-            </a:pPr>
-            <a:r>
-              <a:rPr sz="1200" b="0">
-                <a:solidFill>
-                  <a:srgbClr val="000000"/>
-                </a:solidFill>
-                <a:latin typeface="Arial"/>
-                <a:ea typeface="Arial"/>
-                <a:cs typeface="Arial"/>
-              </a:rPr>
-              <a:t>Генерация</a:t>
-            </a:r>
-          </a:p>
-        </p:txBody>
-      </p:sp>
-      <p:sp>
-        <p:nvSpPr>
-          <p:cNvPr id="995" name="Document 994"/>
-          <p:cNvSpPr/>
-          <p:nvPr/>
-        </p:nvSpPr>
-        <p:spPr>
-          <a:xfrm>
-            <a:off x="8003236" y="2262123"/>
-            <a:ext cx="581269" cy="642455"/>
-          </a:xfrm>
-          <a:prstGeom prst="flowChartDocument">
-            <a:avLst/>
-          </a:prstGeom>
-          <a:solidFill>
-            <a:srgbClr val="0077FF"/>
-          </a:solidFill>
-          <a:ln>
-            <a:noFill/>
-          </a:ln>
-        </p:spPr>
-        <p:style>
-          <a:lnRef idx="1">
-            <a:schemeClr val="accent1"/>
-          </a:lnRef>
-          <a:fillRef idx="3">
-            <a:schemeClr val="accent1"/>
-          </a:fillRef>
-          <a:effectRef idx="2">
-            <a:schemeClr val="accent1"/>
-          </a:effectRef>
-          <a:fontRef idx="minor">
-            <a:schemeClr val="lt1"/>
-          </a:fontRef>
-        </p:style>
-        <p:txBody>
-          <a:bodyPr rtlCol="0" anchor="ctr"/>
-          <a:lstStyle/>
-          <a:p>
-            <a:pPr algn="ctr"/>
-          </a:p>
-        </p:txBody>
-      </p:sp>
-      <p:sp>
-        <p:nvSpPr>
-          <p:cNvPr id="996" name="TextBox 995"/>
-          <p:cNvSpPr txBox="1"/>
-          <p:nvPr/>
-        </p:nvSpPr>
-        <p:spPr>
-          <a:xfrm>
-            <a:off x="7243022" y="3049200"/>
-            <a:ext cx="2101697" cy="542332"/>
-          </a:xfrm>
-          <a:prstGeom prst="rect">
-            <a:avLst/>
-          </a:prstGeom>
-          <a:noFill/>
-        </p:spPr>
-        <p:txBody>
-          <a:bodyPr wrap="square">
-            <a:spAutoFit/>
-          </a:bodyPr>
-          <a:lstStyle/>
-          <a:p>
-            <a:pPr algn="ctr">
-              <a:defRPr sz="1200" b="0">
-                <a:solidFill>
-                  <a:srgbClr val="000000"/>
-                </a:solidFill>
-                <a:latin typeface="Arial"/>
-                <a:ea typeface="Arial"/>
-                <a:cs typeface="Arial"/>
-              </a:defRPr>
-            </a:pPr>
-            <a:r>
-              <a:rPr sz="1200" b="0">
-                <a:solidFill>
-                  <a:srgbClr val="000000"/>
-                </a:solidFill>
-                <a:latin typeface="Arial"/>
-                <a:ea typeface="Arial"/>
-                <a:cs typeface="Arial"/>
-              </a:rPr>
-              <a:t>Экспорт</a:t>
-            </a:r>
-          </a:p>
-        </p:txBody>
-      </p:sp>
-      <p:sp>
-        <p:nvSpPr>
-          <p:cNvPr id="997" name="Oval 996"/>
-          <p:cNvSpPr/>
-          <p:nvPr/>
-        </p:nvSpPr>
-        <p:spPr>
-          <a:xfrm>
-            <a:off x="10176484" y="2277419"/>
-            <a:ext cx="611862" cy="611862"/>
-          </a:xfrm>
-          <a:prstGeom prst="ellipse">
-            <a:avLst/>
-          </a:prstGeom>
-          <a:solidFill>
-            <a:srgbClr val="0077FF"/>
-          </a:solidFill>
-          <a:ln>
-            <a:noFill/>
-          </a:ln>
-        </p:spPr>
-        <p:style>
-          <a:lnRef idx="1">
-            <a:schemeClr val="accent1"/>
-          </a:lnRef>
-          <a:fillRef idx="3">
-            <a:schemeClr val="accent1"/>
-          </a:fillRef>
-          <a:effectRef idx="2">
-            <a:schemeClr val="accent1"/>
-          </a:effectRef>
-          <a:fontRef idx="minor">
-            <a:schemeClr val="lt1"/>
-          </a:fontRef>
-        </p:style>
-        <p:txBody>
-          <a:bodyPr rtlCol="0" anchor="ctr"/>
-          <a:lstStyle/>
-          <a:p>
-            <a:pPr algn="ctr"/>
-          </a:p>
-        </p:txBody>
-      </p:sp>
-      <p:sp>
-        <p:nvSpPr>
-          <p:cNvPr id="998" name="TextBox 997"/>
-          <p:cNvSpPr txBox="1"/>
-          <p:nvPr/>
-        </p:nvSpPr>
-        <p:spPr>
-          <a:xfrm>
-            <a:off x="9431567" y="3049200"/>
-            <a:ext cx="2101697" cy="542332"/>
-          </a:xfrm>
-          <a:prstGeom prst="rect">
-            <a:avLst/>
-          </a:prstGeom>
-          <a:noFill/>
-        </p:spPr>
-        <p:txBody>
-          <a:bodyPr wrap="square">
-            <a:spAutoFit/>
-          </a:bodyPr>
-          <a:lstStyle/>
-          <a:p>
-            <a:pPr algn="ctr">
-              <a:defRPr sz="1200" b="0">
-                <a:solidFill>
-                  <a:srgbClr val="000000"/>
-                </a:solidFill>
-                <a:latin typeface="Arial"/>
-                <a:ea typeface="Arial"/>
-                <a:cs typeface="Arial"/>
-              </a:defRPr>
-            </a:pPr>
-            <a:r>
-              <a:rPr sz="1200" b="0">
-                <a:solidFill>
-                  <a:srgbClr val="000000"/>
-                </a:solidFill>
-                <a:latin typeface="Arial"/>
-                <a:ea typeface="Arial"/>
-                <a:cs typeface="Arial"/>
-              </a:rPr>
-              <a:t>Редактируемость</a:t>
-            </a:r>
-          </a:p>
-        </p:txBody>
-      </p:sp>
-    </p:spTree>
-  </p:cSld>
-  <p:clrMapOvr>
-    <a:masterClrMapping/>
-  </p:clrMapOvr>
-</p:sld>
-</file>
-
-<file path=ppt/slides/slide60.xml><?xml version="1.0" encoding="utf-8"?>
-<p:sld xmlns:a="http://schemas.openxmlformats.org/drawingml/2006/main" xmlns:p="http://schemas.openxmlformats.org/presentationml/2006/main" xmlns:r="http://schemas.openxmlformats.org/officeDocument/2006/relationships">
-  <p:cSld>
-    <p:spTree>
-      <p:nvGrpSpPr>
-        <p:cNvPr id="1" name=""/>
-        <p:cNvGrpSpPr/>
-        <p:nvPr/>
-      </p:nvGrpSpPr>
-      <p:grpSpPr/>
-      <p:sp>
-        <p:nvSpPr>
-          <p:cNvPr id="443" name="Google Shape;443;p50"/>
-          <p:cNvSpPr/>
-          <p:nvPr/>
-        </p:nvSpPr>
-        <p:spPr>
-          <a:xfrm>
-            <a:off x="658813" y="1794065"/>
-            <a:ext cx="6130294" cy="4406709"/>
-          </a:xfrm>
-          <a:prstGeom prst="roundRect">
-            <a:avLst>
-              <a:gd fmla="val 4444" name="adj"/>
-            </a:avLst>
-          </a:prstGeom>
-          <a:solidFill>
-            <a:schemeClr val="lt2"/>
-          </a:solidFill>
-          <a:ln cap="flat" cmpd="sng" w="19050">
-            <a:solidFill>
-              <a:schemeClr val="dk2"/>
-            </a:solidFill>
-            <a:prstDash val="solid"/>
-            <a:miter lim="8000"/>
-            <a:headEnd len="sm" w="sm" type="none"/>
-            <a:tailEnd len="sm" w="sm" type="none"/>
-          </a:ln>
-        </p:spPr>
-        <p:txBody>
-          <a:bodyPr anchorCtr="0" anchor="ctr" bIns="45700" lIns="91425" spcFirstLastPara="1" rIns="91425" wrap="square" tIns="45700">
-            <a:noAutofit/>
-          </a:bodyPr>
-          <a:lstStyle/>
-          <a:p>
-            <a:pPr indent="0" lvl="0" marL="0" marR="0" rtl="0" algn="ctr">
-              <a:spcBef>
-                <a:spcPts val="0"/>
-              </a:spcBef>
-              <a:spcAft>
-                <a:spcPts val="0"/>
-              </a:spcAft>
-              <a:buNone/>
-            </a:pPr>
-            <a:r>
-              <a:t/>
-            </a:r>
-            <a:endParaRPr b="0" i="0" sz="1800" u="none" cap="none" strike="noStrike">
-              <a:solidFill>
-                <a:schemeClr val="lt1"/>
-              </a:solidFill>
-              <a:latin typeface="Arial"/>
-              <a:ea typeface="Arial"/>
-              <a:cs typeface="Arial"/>
-              <a:sym typeface="Arial"/>
-            </a:endParaRPr>
-          </a:p>
-        </p:txBody>
-      </p:sp>
-      <p:sp>
-        <p:nvSpPr>
-          <p:cNvPr id="449" name="Google Shape;449;p50"/>
-          <p:cNvSpPr txBox="1"/>
-          <p:nvPr/>
-        </p:nvSpPr>
-        <p:spPr>
-          <a:xfrm>
-            <a:off x="18692059" y="4674436"/>
-            <a:ext cx="4304330" cy="678198"/>
-          </a:xfrm>
-          <a:prstGeom prst="rect">
-            <a:avLst/>
-          </a:prstGeom>
-          <a:noFill/>
-          <a:ln>
-            <a:noFill/>
-          </a:ln>
-        </p:spPr>
-        <p:txBody>
-          <a:bodyPr anchorCtr="0" anchor="t" bIns="45700" lIns="91425" spcFirstLastPara="1" rIns="91425" wrap="square" tIns="45700">
-            <a:noAutofit/>
-          </a:bodyPr>
-          <a:lstStyle/>
-          <a:p>
-            <a:pPr indent="0" lvl="0" marL="0" marR="0" rtl="0" algn="l">
-              <a:lnSpc>
-                <a:spcPct val="110000"/>
-              </a:lnSpc>
-              <a:spcBef>
-                <a:spcPts val="0"/>
-              </a:spcBef>
-              <a:spcAft>
-                <a:spcPts val="0"/>
-              </a:spcAft>
-              <a:buClr>
-                <a:schemeClr val="dk1"/>
-              </a:buClr>
-              <a:buSzPts val="1600"/>
-              <a:buFont typeface="Arial"/>
-              <a:buNone/>
-            </a:pPr>
-            <a:r>
-              <a:t/>
-            </a:r>
-            <a:endParaRPr b="0" i="0" sz="1600" u="none" cap="none" strike="noStrike">
-              <a:solidFill>
-                <a:schemeClr val="dk1"/>
-              </a:solidFill>
-              <a:latin typeface="Arial"/>
-              <a:ea typeface="Arial"/>
-              <a:cs typeface="Arial"/>
-              <a:sym typeface="Arial"/>
-            </a:endParaRPr>
-          </a:p>
-        </p:txBody>
-      </p:sp>
-      <p:sp>
-        <p:nvSpPr>
-          <p:cNvPr id="450" name="title"/>
-          <p:cNvSpPr txBox="1"/>
-          <p:nvPr/>
-        </p:nvSpPr>
-        <p:spPr>
-          <a:xfrm>
-            <a:off x="677387" y="692177"/>
-            <a:ext cx="10855878" cy="822960"/>
-          </a:xfrm>
-          <a:prstGeom prst="rect">
-            <a:avLst/>
-          </a:prstGeom>
-          <a:noFill/>
-        </p:spPr>
-        <p:txBody>
-          <a:bodyPr wrap="square" lIns="76200" rIns="76200" tIns="50800" bIns="50800">
-            <a:spAutoFit/>
-          </a:bodyPr>
-          <a:lstStyle/>
-          <a:p>
-            <a:pPr algn="l">
-              <a:spcAft>
-                <a:spcPts val="300"/>
-              </a:spcAft>
-              <a:defRPr sz="4000">
-                <a:solidFill>
-                  <a:srgbClr val="000000"/>
-                </a:solidFill>
-                <a:latin typeface="Arial"/>
-                <a:ea typeface="Arial"/>
-                <a:cs typeface="Arial"/>
-              </a:defRPr>
-            </a:pPr>
-            <a:r>
-              <a:rPr sz="4000">
-                <a:solidFill>
-                  <a:srgbClr val="000000"/>
-                </a:solidFill>
-                <a:latin typeface="Arial"/>
-                <a:ea typeface="Arial"/>
-                <a:cs typeface="Arial"/>
-              </a:rPr>
-              <a:t>Сокращение времени сборки</a:t>
-            </a:r>
-          </a:p>
-        </p:txBody>
-      </p:sp>
-      <p:sp>
-        <p:nvSpPr>
-          <p:cNvPr id="451" name="card_0"/>
-          <p:cNvSpPr txBox="1"/>
-          <p:nvPr/>
-        </p:nvSpPr>
-        <p:spPr>
-          <a:xfrm>
-            <a:off x="1174699" y="2893336"/>
-            <a:ext cx="5112471" cy="2132807"/>
-          </a:xfrm>
-          <a:prstGeom prst="rect">
-            <a:avLst/>
-          </a:prstGeom>
-          <a:noFill/>
-        </p:spPr>
-        <p:txBody>
-          <a:bodyPr wrap="square" lIns="76200" rIns="76200" tIns="50800" bIns="50800">
-            <a:spAutoFit/>
-          </a:bodyPr>
-          <a:lstStyle/>
-          <a:p>
-            <a:pPr algn="l">
-              <a:spcAft>
-                <a:spcPts val="300"/>
-              </a:spcAft>
-              <a:defRPr sz="2800" b="1">
-                <a:solidFill>
-                  <a:srgbClr val="000000"/>
-                </a:solidFill>
-                <a:latin typeface="Arial"/>
-                <a:ea typeface="Arial"/>
-                <a:cs typeface="Arial"/>
-              </a:defRPr>
-            </a:pPr>
-            <a:r>
-              <a:rPr sz="2800" b="1">
-                <a:solidFill>
-                  <a:srgbClr val="000000"/>
-                </a:solidFill>
-                <a:latin typeface="Arial"/>
-                <a:ea typeface="Arial"/>
-                <a:cs typeface="Arial"/>
-              </a:rPr>
-              <a:t>Средняя сборка колоды 12 слайдов 4 минуты вместо 186</a:t>
-            </a:r>
-          </a:p>
-        </p:txBody>
-      </p:sp>
-      <p:sp>
-        <p:nvSpPr>
-          <p:cNvPr id="452" name="card_1"/>
-          <p:cNvSpPr txBox="1"/>
-          <p:nvPr/>
-        </p:nvSpPr>
-        <p:spPr>
-          <a:xfrm>
-            <a:off x="1272751" y="5351097"/>
-            <a:ext cx="5141431" cy="873492"/>
-          </a:xfrm>
-          <a:prstGeom prst="rect">
-            <a:avLst/>
-          </a:prstGeom>
-          <a:noFill/>
-        </p:spPr>
-        <p:txBody>
-          <a:bodyPr wrap="square" lIns="76200" rIns="76200" tIns="50800" bIns="50800">
-            <a:spAutoFit/>
-          </a:bodyPr>
-          <a:lstStyle/>
-          <a:p>
-            <a:pPr algn="l">
-              <a:spcAft>
-                <a:spcPts val="300"/>
-              </a:spcAft>
-              <a:defRPr sz="2000" b="1">
-                <a:solidFill>
-                  <a:srgbClr val="000000"/>
-                </a:solidFill>
-                <a:latin typeface="Arial"/>
-                <a:ea typeface="Arial"/>
-                <a:cs typeface="Arial"/>
-              </a:defRPr>
-            </a:pPr>
-            <a:r>
-              <a:rPr sz="2000" b="1">
-                <a:solidFill>
-                  <a:srgbClr val="000000"/>
-                </a:solidFill>
-                <a:latin typeface="Arial"/>
-                <a:ea typeface="Arial"/>
-                <a:cs typeface="Arial"/>
-              </a:rPr>
-              <a:t>Время до первой версии сократилось с 6 дней до 1</a:t>
-            </a:r>
-          </a:p>
-        </p:txBody>
-      </p:sp>
-    </p:spTree>
-  </p:cSld>
-  <p:clrMapOvr>
-    <a:masterClrMapping/>
-  </p:clrMapOvr>
-</p:sld>
-</file>
-
-<file path=ppt/slides/slide61.xml><?xml version="1.0" encoding="utf-8"?>
-<p:sld xmlns:a="http://schemas.openxmlformats.org/drawingml/2006/main" xmlns:p="http://schemas.openxmlformats.org/presentationml/2006/main" xmlns:r="http://schemas.openxmlformats.org/officeDocument/2006/relationships">
-  <p:cSld>
-    <p:bg>
-      <p:bgPr>
-        <a:solidFill>
-          <a:schemeClr val="lt2"/>
-        </a:solidFill>
-      </p:bgPr>
-    </p:bg>
-    <p:spTree>
-      <p:nvGrpSpPr>
-        <p:cNvPr id="1" name=""/>
-        <p:cNvGrpSpPr/>
-        <p:nvPr/>
-      </p:nvGrpSpPr>
-      <p:grpSpPr/>
-      <p:sp>
-        <p:nvSpPr>
-          <p:cNvPr id="2" name="title"/>
-          <p:cNvSpPr txBox="1"/>
-          <p:nvPr/>
-        </p:nvSpPr>
-        <p:spPr>
-          <a:xfrm>
-            <a:off x="677387" y="692177"/>
-            <a:ext cx="10855878" cy="822960"/>
-          </a:xfrm>
-          <a:prstGeom prst="rect">
-            <a:avLst/>
-          </a:prstGeom>
-          <a:noFill/>
-        </p:spPr>
-        <p:txBody>
-          <a:bodyPr wrap="square" lIns="76200" rIns="76200" tIns="50800" bIns="50800">
-            <a:spAutoFit/>
-          </a:bodyPr>
-          <a:lstStyle/>
-          <a:p>
-            <a:pPr algn="l">
-              <a:spcAft>
-                <a:spcPts val="300"/>
-              </a:spcAft>
-              <a:defRPr sz="4000">
-                <a:solidFill>
-                  <a:srgbClr val="000000"/>
-                </a:solidFill>
-                <a:latin typeface="Arial"/>
-                <a:ea typeface="Arial"/>
-                <a:cs typeface="Arial"/>
-              </a:defRPr>
-            </a:pPr>
-            <a:r>
-              <a:rPr sz="4000">
-                <a:solidFill>
-                  <a:srgbClr val="000000"/>
-                </a:solidFill>
-                <a:latin typeface="Arial"/>
-                <a:ea typeface="Arial"/>
-                <a:cs typeface="Arial"/>
-              </a:rPr>
-              <a:t>Улучшение качества и стиля</a:t>
-            </a:r>
-          </a:p>
-        </p:txBody>
-      </p:sp>
-      <p:sp>
-        <p:nvSpPr>
-          <p:cNvPr id="3" name="card_0"/>
-          <p:cNvSpPr txBox="1"/>
-          <p:nvPr/>
-        </p:nvSpPr>
-        <p:spPr>
-          <a:xfrm>
-            <a:off x="829787" y="2755902"/>
-            <a:ext cx="4999573" cy="3292495"/>
-          </a:xfrm>
-          <a:prstGeom prst="rect">
-            <a:avLst/>
-          </a:prstGeom>
-          <a:noFill/>
-        </p:spPr>
-        <p:txBody>
-          <a:bodyPr wrap="square" lIns="76200" rIns="76200" tIns="50800" bIns="50800">
-            <a:spAutoFit/>
-          </a:bodyPr>
-          <a:lstStyle/>
-          <a:p>
-            <a:pPr algn="l">
-              <a:spcAft>
-                <a:spcPts val="300"/>
-              </a:spcAft>
-              <a:defRPr sz="2400" b="0">
-                <a:solidFill>
-                  <a:srgbClr val="000000"/>
-                </a:solidFill>
-                <a:latin typeface="Arial"/>
-                <a:ea typeface="Arial"/>
-                <a:cs typeface="Arial"/>
-              </a:defRPr>
-            </a:pPr>
-            <a:r>
-              <a:rPr sz="2400" b="0">
-                <a:solidFill>
-                  <a:srgbClr val="000000"/>
-                </a:solidFill>
-                <a:latin typeface="Arial"/>
-                <a:ea typeface="Arial"/>
-                <a:cs typeface="Arial"/>
-              </a:rPr>
-              <a:t>Нарушений фирменного стиля в пилоте 2 из 68, исправлены автоматически</a:t>
-            </a:r>
-          </a:p>
-        </p:txBody>
-      </p:sp>
-      <p:sp>
-        <p:nvSpPr>
-          <p:cNvPr id="4" name="card_1"/>
-          <p:cNvSpPr txBox="1"/>
-          <p:nvPr/>
-        </p:nvSpPr>
-        <p:spPr>
-          <a:xfrm>
-            <a:off x="6381170" y="2755902"/>
-            <a:ext cx="4999573" cy="3292495"/>
-          </a:xfrm>
-          <a:prstGeom prst="rect">
-            <a:avLst/>
-          </a:prstGeom>
-          <a:noFill/>
-        </p:spPr>
-        <p:txBody>
-          <a:bodyPr wrap="square" lIns="76200" rIns="76200" tIns="50800" bIns="50800">
-            <a:spAutoFit/>
-          </a:bodyPr>
-          <a:lstStyle/>
-          <a:p>
-            <a:pPr algn="l">
-              <a:spcAft>
-                <a:spcPts val="300"/>
-              </a:spcAft>
-              <a:defRPr sz="2400" b="0">
-                <a:solidFill>
-                  <a:srgbClr val="000000"/>
-                </a:solidFill>
-                <a:latin typeface="Arial"/>
-                <a:ea typeface="Arial"/>
-                <a:cs typeface="Arial"/>
-              </a:defRPr>
-            </a:pPr>
-            <a:r>
-              <a:rPr sz="2400" b="0">
-                <a:solidFill>
-                  <a:srgbClr val="000000"/>
-                </a:solidFill>
-                <a:latin typeface="Arial"/>
-                <a:ea typeface="Arial"/>
-                <a:cs typeface="Arial"/>
-              </a:rPr>
-              <a:t>Дизайнеры закрыли 38 запросов вместо 11 за 6 недель</a:t>
+              <a:t>Нагрузка выше 20 задач требует внешней очереди</a:t>
             </a:r>
           </a:p>
         </p:txBody>
@@ -10438,891 +9158,6 @@
 </file>
 
 <file path=ppt/slides/slide62.xml><?xml version="1.0" encoding="utf-8"?>
-<p:sld xmlns:a="http://schemas.openxmlformats.org/drawingml/2006/main" xmlns:p="http://schemas.openxmlformats.org/presentationml/2006/main" xmlns:r="http://schemas.openxmlformats.org/officeDocument/2006/relationships">
-  <p:cSld>
-    <p:bg>
-      <p:bgPr>
-        <a:solidFill>
-          <a:schemeClr val="lt2"/>
-        </a:solidFill>
-      </p:bgPr>
-    </p:bg>
-    <p:spTree>
-      <p:nvGrpSpPr>
-        <p:cNvPr id="1" name=""/>
-        <p:cNvGrpSpPr/>
-        <p:nvPr/>
-      </p:nvGrpSpPr>
-      <p:grpSpPr/>
-      <p:sp>
-        <p:nvSpPr>
-          <p:cNvPr id="2" name="title"/>
-          <p:cNvSpPr txBox="1"/>
-          <p:nvPr/>
-        </p:nvSpPr>
-        <p:spPr>
-          <a:xfrm>
-            <a:off x="677387" y="692177"/>
-            <a:ext cx="10855878" cy="822960"/>
-          </a:xfrm>
-          <a:prstGeom prst="rect">
-            <a:avLst/>
-          </a:prstGeom>
-          <a:noFill/>
-        </p:spPr>
-        <p:txBody>
-          <a:bodyPr wrap="square" lIns="76200" rIns="76200" tIns="50800" bIns="50800">
-            <a:spAutoFit/>
-          </a:bodyPr>
-          <a:lstStyle/>
-          <a:p>
-            <a:pPr algn="l">
-              <a:spcAft>
-                <a:spcPts val="300"/>
-              </a:spcAft>
-              <a:defRPr sz="4000">
-                <a:solidFill>
-                  <a:srgbClr val="000000"/>
-                </a:solidFill>
-                <a:latin typeface="Arial"/>
-                <a:ea typeface="Arial"/>
-                <a:cs typeface="Arial"/>
-              </a:defRPr>
-            </a:pPr>
-            <a:r>
-              <a:rPr sz="4000">
-                <a:solidFill>
-                  <a:srgbClr val="000000"/>
-                </a:solidFill>
-                <a:latin typeface="Arial"/>
-                <a:ea typeface="Arial"/>
-                <a:cs typeface="Arial"/>
-              </a:rPr>
-              <a:t>Ресурсы и сроки запуска</a:t>
-            </a:r>
-          </a:p>
-        </p:txBody>
-      </p:sp>
-      <p:sp>
-        <p:nvSpPr>
-          <p:cNvPr id="3" name="Rectangle 2"/>
-          <p:cNvSpPr/>
-          <p:nvPr/>
-        </p:nvSpPr>
-        <p:spPr>
-          <a:xfrm>
-            <a:off x="677387" y="3809896"/>
-            <a:ext cx="10855878" cy="132827"/>
-          </a:xfrm>
-          <a:prstGeom prst="rect">
-            <a:avLst/>
-          </a:prstGeom>
-          <a:solidFill>
-            <a:srgbClr val="0077FF"/>
-          </a:solidFill>
-          <a:ln>
-            <a:noFill/>
-          </a:ln>
-        </p:spPr>
-        <p:style>
-          <a:lnRef idx="1">
-            <a:schemeClr val="accent1"/>
-          </a:lnRef>
-          <a:fillRef idx="3">
-            <a:schemeClr val="accent1"/>
-          </a:fillRef>
-          <a:effectRef idx="2">
-            <a:schemeClr val="accent1"/>
-          </a:effectRef>
-          <a:fontRef idx="minor">
-            <a:schemeClr val="lt1"/>
-          </a:fontRef>
-        </p:style>
-        <p:txBody>
-          <a:bodyPr rtlCol="0" anchor="ctr"/>
-          <a:lstStyle/>
-          <a:p>
-            <a:pPr algn="ctr"/>
-          </a:p>
-        </p:txBody>
-      </p:sp>
-      <p:sp>
-        <p:nvSpPr>
-          <p:cNvPr id="4" name="Oval 3"/>
-          <p:cNvSpPr/>
-          <p:nvPr/>
-        </p:nvSpPr>
-        <p:spPr>
-          <a:xfrm>
-            <a:off x="1999664" y="3389275"/>
-            <a:ext cx="974070" cy="974070"/>
-          </a:xfrm>
-          <a:prstGeom prst="ellipse">
-            <a:avLst/>
-          </a:prstGeom>
-          <a:solidFill>
-            <a:srgbClr val="0077FF"/>
-          </a:solidFill>
-          <a:ln>
-            <a:noFill/>
-          </a:ln>
-        </p:spPr>
-        <p:style>
-          <a:lnRef idx="1">
-            <a:schemeClr val="accent1"/>
-          </a:lnRef>
-          <a:fillRef idx="3">
-            <a:schemeClr val="accent1"/>
-          </a:fillRef>
-          <a:effectRef idx="2">
-            <a:schemeClr val="accent1"/>
-          </a:effectRef>
-          <a:fontRef idx="minor">
-            <a:schemeClr val="lt1"/>
-          </a:fontRef>
-        </p:style>
-        <p:txBody>
-          <a:bodyPr rtlCol="0" anchor="ctr"/>
-          <a:lstStyle/>
-          <a:p>
-            <a:pPr algn="ctr"/>
-          </a:p>
-        </p:txBody>
-      </p:sp>
-      <p:sp>
-        <p:nvSpPr>
-          <p:cNvPr id="5" name="TextBox 4"/>
-          <p:cNvSpPr txBox="1"/>
-          <p:nvPr/>
-        </p:nvSpPr>
-        <p:spPr>
-          <a:xfrm>
-            <a:off x="677387" y="1773204"/>
-            <a:ext cx="3618626" cy="1682485"/>
-          </a:xfrm>
-          <a:prstGeom prst="rect">
-            <a:avLst/>
-          </a:prstGeom>
-          <a:noFill/>
-        </p:spPr>
-        <p:txBody>
-          <a:bodyPr wrap="square">
-            <a:spAutoFit/>
-          </a:bodyPr>
-          <a:lstStyle/>
-          <a:p>
-            <a:pPr algn="ctr">
-              <a:defRPr sz="1200" b="0">
-                <a:solidFill>
-                  <a:srgbClr val="000000"/>
-                </a:solidFill>
-                <a:latin typeface="Arial"/>
-                <a:ea typeface="Arial"/>
-                <a:cs typeface="Arial"/>
-              </a:defRPr>
-            </a:pPr>
-            <a:r>
-              <a:rPr sz="1200" b="0">
-                <a:solidFill>
-                  <a:srgbClr val="000000"/>
-                </a:solidFill>
-                <a:latin typeface="Arial"/>
-                <a:ea typeface="Arial"/>
-                <a:cs typeface="Arial"/>
-              </a:rPr>
-              <a:t>Подключение 4 команд</a:t>
-            </a:r>
-          </a:p>
-        </p:txBody>
-      </p:sp>
-      <p:sp>
-        <p:nvSpPr>
-          <p:cNvPr id="6" name="Oval 5"/>
-          <p:cNvSpPr/>
-          <p:nvPr/>
-        </p:nvSpPr>
-        <p:spPr>
-          <a:xfrm>
-            <a:off x="5618290" y="3389275"/>
-            <a:ext cx="974070" cy="974070"/>
-          </a:xfrm>
-          <a:prstGeom prst="ellipse">
-            <a:avLst/>
-          </a:prstGeom>
-          <a:solidFill>
-            <a:srgbClr val="0077FF"/>
-          </a:solidFill>
-          <a:ln>
-            <a:noFill/>
-          </a:ln>
-        </p:spPr>
-        <p:style>
-          <a:lnRef idx="1">
-            <a:schemeClr val="accent1"/>
-          </a:lnRef>
-          <a:fillRef idx="3">
-            <a:schemeClr val="accent1"/>
-          </a:fillRef>
-          <a:effectRef idx="2">
-            <a:schemeClr val="accent1"/>
-          </a:effectRef>
-          <a:fontRef idx="minor">
-            <a:schemeClr val="lt1"/>
-          </a:fontRef>
-        </p:style>
-        <p:txBody>
-          <a:bodyPr rtlCol="0" anchor="ctr"/>
-          <a:lstStyle/>
-          <a:p>
-            <a:pPr algn="ctr"/>
-          </a:p>
-        </p:txBody>
-      </p:sp>
-      <p:sp>
-        <p:nvSpPr>
-          <p:cNvPr id="7" name="TextBox 6"/>
-          <p:cNvSpPr txBox="1"/>
-          <p:nvPr/>
-        </p:nvSpPr>
-        <p:spPr>
-          <a:xfrm>
-            <a:off x="4296013" y="4783967"/>
-            <a:ext cx="3618626" cy="1682485"/>
-          </a:xfrm>
-          <a:prstGeom prst="rect">
-            <a:avLst/>
-          </a:prstGeom>
-          <a:noFill/>
-        </p:spPr>
-        <p:txBody>
-          <a:bodyPr wrap="square">
-            <a:spAutoFit/>
-          </a:bodyPr>
-          <a:lstStyle/>
-          <a:p>
-            <a:pPr algn="ctr">
-              <a:defRPr sz="1200" b="0">
-                <a:solidFill>
-                  <a:srgbClr val="000000"/>
-                </a:solidFill>
-                <a:latin typeface="Arial"/>
-                <a:ea typeface="Arial"/>
-                <a:cs typeface="Arial"/>
-              </a:defRPr>
-            </a:pPr>
-            <a:r>
-              <a:rPr sz="1200" b="0">
-                <a:solidFill>
-                  <a:srgbClr val="000000"/>
-                </a:solidFill>
-                <a:latin typeface="Arial"/>
-                <a:ea typeface="Arial"/>
-                <a:cs typeface="Arial"/>
-              </a:rPr>
-              <a:t>Доступ всей компании</a:t>
-            </a:r>
-          </a:p>
-        </p:txBody>
-      </p:sp>
-      <p:sp>
-        <p:nvSpPr>
-          <p:cNvPr id="8" name="Oval 7"/>
-          <p:cNvSpPr/>
-          <p:nvPr/>
-        </p:nvSpPr>
-        <p:spPr>
-          <a:xfrm>
-            <a:off x="9236916" y="3389275"/>
-            <a:ext cx="974070" cy="974070"/>
-          </a:xfrm>
-          <a:prstGeom prst="ellipse">
-            <a:avLst/>
-          </a:prstGeom>
-          <a:solidFill>
-            <a:srgbClr val="0077FF"/>
-          </a:solidFill>
-          <a:ln>
-            <a:noFill/>
-          </a:ln>
-        </p:spPr>
-        <p:style>
-          <a:lnRef idx="1">
-            <a:schemeClr val="accent1"/>
-          </a:lnRef>
-          <a:fillRef idx="3">
-            <a:schemeClr val="accent1"/>
-          </a:fillRef>
-          <a:effectRef idx="2">
-            <a:schemeClr val="accent1"/>
-          </a:effectRef>
-          <a:fontRef idx="minor">
-            <a:schemeClr val="lt1"/>
-          </a:fontRef>
-        </p:style>
-        <p:txBody>
-          <a:bodyPr rtlCol="0" anchor="ctr"/>
-          <a:lstStyle/>
-          <a:p>
-            <a:pPr algn="ctr"/>
-          </a:p>
-        </p:txBody>
-      </p:sp>
-      <p:sp>
-        <p:nvSpPr>
-          <p:cNvPr id="9" name="TextBox 8"/>
-          <p:cNvSpPr txBox="1"/>
-          <p:nvPr/>
-        </p:nvSpPr>
-        <p:spPr>
-          <a:xfrm>
-            <a:off x="7914639" y="1773204"/>
-            <a:ext cx="3618626" cy="1682485"/>
-          </a:xfrm>
-          <a:prstGeom prst="rect">
-            <a:avLst/>
-          </a:prstGeom>
-          <a:noFill/>
-        </p:spPr>
-        <p:txBody>
-          <a:bodyPr wrap="square">
-            <a:spAutoFit/>
-          </a:bodyPr>
-          <a:lstStyle/>
-          <a:p>
-            <a:pPr algn="ctr">
-              <a:defRPr sz="1200" b="0">
-                <a:solidFill>
-                  <a:srgbClr val="000000"/>
-                </a:solidFill>
-                <a:latin typeface="Arial"/>
-                <a:ea typeface="Arial"/>
-                <a:cs typeface="Arial"/>
-              </a:defRPr>
-            </a:pPr>
-            <a:r>
-              <a:rPr sz="1200" b="0">
-                <a:solidFill>
-                  <a:srgbClr val="000000"/>
-                </a:solidFill>
-                <a:latin typeface="Arial"/>
-                <a:ea typeface="Arial"/>
-                <a:cs typeface="Arial"/>
-              </a:rPr>
-              <a:t>Генерация иллюстраций</a:t>
-            </a:r>
-          </a:p>
-        </p:txBody>
-      </p:sp>
-    </p:spTree>
-  </p:cSld>
-  <p:clrMapOvr>
-    <a:masterClrMapping/>
-  </p:clrMapOvr>
-</p:sld>
-</file>
-
-<file path=ppt/slides/slide63.xml><?xml version="1.0" encoding="utf-8"?>
-<p:sld xmlns:a="http://schemas.openxmlformats.org/drawingml/2006/main" xmlns:p="http://schemas.openxmlformats.org/presentationml/2006/main" xmlns:r="http://schemas.openxmlformats.org/officeDocument/2006/relationships">
-  <p:cSld>
-    <p:bg>
-      <p:bgPr>
-        <a:solidFill>
-          <a:schemeClr val="lt2"/>
-        </a:solidFill>
-      </p:bgPr>
-    </p:bg>
-    <p:spTree>
-      <p:nvGrpSpPr>
-        <p:cNvPr id="1" name=""/>
-        <p:cNvGrpSpPr/>
-        <p:nvPr/>
-      </p:nvGrpSpPr>
-      <p:grpSpPr/>
-      <p:sp>
-        <p:nvSpPr>
-          <p:cNvPr id="2" name="title"/>
-          <p:cNvSpPr txBox="1"/>
-          <p:nvPr/>
-        </p:nvSpPr>
-        <p:spPr>
-          <a:xfrm>
-            <a:off x="677387" y="692177"/>
-            <a:ext cx="10855878" cy="822960"/>
-          </a:xfrm>
-          <a:prstGeom prst="rect">
-            <a:avLst/>
-          </a:prstGeom>
-          <a:noFill/>
-        </p:spPr>
-        <p:txBody>
-          <a:bodyPr wrap="square" lIns="76200" rIns="76200" tIns="50800" bIns="50800">
-            <a:spAutoFit/>
-          </a:bodyPr>
-          <a:lstStyle/>
-          <a:p>
-            <a:pPr algn="l">
-              <a:spcAft>
-                <a:spcPts val="300"/>
-              </a:spcAft>
-              <a:defRPr sz="4000">
-                <a:solidFill>
-                  <a:srgbClr val="000000"/>
-                </a:solidFill>
-                <a:latin typeface="Arial"/>
-                <a:ea typeface="Arial"/>
-                <a:cs typeface="Arial"/>
-              </a:defRPr>
-            </a:pPr>
-            <a:r>
-              <a:rPr sz="4000">
-                <a:solidFill>
-                  <a:srgbClr val="000000"/>
-                </a:solidFill>
-                <a:latin typeface="Arial"/>
-                <a:ea typeface="Arial"/>
-                <a:cs typeface="Arial"/>
-              </a:rPr>
-              <a:t>Пилотные результаты</a:t>
-            </a:r>
-          </a:p>
-        </p:txBody>
-      </p:sp>
-      <p:graphicFrame>
-        <p:nvGraphicFramePr>
-          <p:cNvPr id="3" name="Table 2"/>
-          <p:cNvGraphicFramePr>
-            <a:graphicFrameLocks noGrp="1"/>
-          </p:cNvGraphicFramePr>
-          <p:nvPr/>
-        </p:nvGraphicFramePr>
-        <p:xfrm>
-          <a:off x="677387" y="1773204"/>
-          <a:ext cx="10855878" cy="4427593"/>
-        </p:xfrm>
-        <a:graphic>
-          <a:graphicData uri="http://schemas.openxmlformats.org/drawingml/2006/table">
-            <a:tbl>
-              <a:tblPr firstRow="1" bandRow="1">
-                <a:tableStyleId>{5C22544A-7EE6-4342-B048-85BDC9FD1C3A}</a:tableStyleId>
-              </a:tblPr>
-              <a:tblGrid>
-                <a:gridCol w="3618626"/>
-                <a:gridCol w="3618626"/>
-                <a:gridCol w="3618626"/>
-              </a:tblGrid>
-              <a:tr h="885518">
-                <a:tc>
-                  <a:txBody>
-                    <a:bodyPr/>
-                    <a:lstStyle/>
-                    <a:p>
-                      <a:pPr>
-                        <a:defRPr sz="1300" b="1">
-                          <a:solidFill>
-                            <a:srgbClr val="FFFFFF"/>
-                          </a:solidFill>
-                          <a:latin typeface="Arial"/>
-                          <a:ea typeface="Arial"/>
-                          <a:cs typeface="Arial"/>
-                        </a:defRPr>
-                      </a:pPr>
-                      <a:r>
-                        <a:t>Метрика</a:t>
-                      </a:r>
-                    </a:p>
-                  </a:txBody>
-                  <a:tcPr>
-                    <a:solidFill>
-                      <a:srgbClr val="0077FF"/>
-                    </a:solidFill>
-                  </a:tcPr>
-                </a:tc>
-                <a:tc>
-                  <a:txBody>
-                    <a:bodyPr/>
-                    <a:lstStyle/>
-                    <a:p>
-                      <a:pPr>
-                        <a:defRPr sz="1300" b="1">
-                          <a:solidFill>
-                            <a:srgbClr val="FFFFFF"/>
-                          </a:solidFill>
-                          <a:latin typeface="Arial"/>
-                          <a:ea typeface="Arial"/>
-                          <a:cs typeface="Arial"/>
-                        </a:defRPr>
-                      </a:pPr>
-                      <a:r>
-                        <a:t>До</a:t>
-                      </a:r>
-                    </a:p>
-                  </a:txBody>
-                  <a:tcPr>
-                    <a:solidFill>
-                      <a:srgbClr val="0077FF"/>
-                    </a:solidFill>
-                  </a:tcPr>
-                </a:tc>
-                <a:tc>
-                  <a:txBody>
-                    <a:bodyPr/>
-                    <a:lstStyle/>
-                    <a:p>
-                      <a:pPr>
-                        <a:defRPr sz="1300" b="1">
-                          <a:solidFill>
-                            <a:srgbClr val="FFFFFF"/>
-                          </a:solidFill>
-                          <a:latin typeface="Arial"/>
-                          <a:ea typeface="Arial"/>
-                          <a:cs typeface="Arial"/>
-                        </a:defRPr>
-                      </a:pPr>
-                      <a:r>
-                        <a:t>После</a:t>
-                      </a:r>
-                    </a:p>
-                  </a:txBody>
-                  <a:tcPr>
-                    <a:solidFill>
-                      <a:srgbClr val="0077FF"/>
-                    </a:solidFill>
-                  </a:tcPr>
-                </a:tc>
-              </a:tr>
-              <a:tr h="885518">
-                <a:tc>
-                  <a:txBody>
-                    <a:bodyPr/>
-                    <a:lstStyle/>
-                    <a:p>
-                      <a:pPr>
-                        <a:defRPr sz="1300" b="0">
-                          <a:solidFill>
-                            <a:srgbClr val="000000"/>
-                          </a:solidFill>
-                          <a:latin typeface="Arial"/>
-                          <a:ea typeface="Arial"/>
-                          <a:cs typeface="Arial"/>
-                        </a:defRPr>
-                      </a:pPr>
-                      <a:r>
-                        <a:t>Сборка (мин)</a:t>
-                      </a:r>
-                    </a:p>
-                  </a:txBody>
-                  <a:tcPr>
-                    <a:solidFill>
-                      <a:srgbClr val="FFFFFF"/>
-                    </a:solidFill>
-                  </a:tcPr>
-                </a:tc>
-                <a:tc>
-                  <a:txBody>
-                    <a:bodyPr/>
-                    <a:lstStyle/>
-                    <a:p>
-                      <a:pPr>
-                        <a:defRPr sz="1300" b="0">
-                          <a:solidFill>
-                            <a:srgbClr val="000000"/>
-                          </a:solidFill>
-                          <a:latin typeface="Arial"/>
-                          <a:ea typeface="Arial"/>
-                          <a:cs typeface="Arial"/>
-                        </a:defRPr>
-                      </a:pPr>
-                      <a:r>
-                        <a:t>186</a:t>
-                      </a:r>
-                    </a:p>
-                  </a:txBody>
-                  <a:tcPr>
-                    <a:solidFill>
-                      <a:srgbClr val="FFFFFF"/>
-                    </a:solidFill>
-                  </a:tcPr>
-                </a:tc>
-                <a:tc>
-                  <a:txBody>
-                    <a:bodyPr/>
-                    <a:lstStyle/>
-                    <a:p>
-                      <a:pPr>
-                        <a:defRPr sz="1300" b="0">
-                          <a:solidFill>
-                            <a:srgbClr val="000000"/>
-                          </a:solidFill>
-                          <a:latin typeface="Arial"/>
-                          <a:ea typeface="Arial"/>
-                          <a:cs typeface="Arial"/>
-                        </a:defRPr>
-                      </a:pPr>
-                      <a:r>
-                        <a:t>4</a:t>
-                      </a:r>
-                    </a:p>
-                  </a:txBody>
-                  <a:tcPr>
-                    <a:solidFill>
-                      <a:srgbClr val="FFFFFF"/>
-                    </a:solidFill>
-                  </a:tcPr>
-                </a:tc>
-              </a:tr>
-              <a:tr h="885518">
-                <a:tc>
-                  <a:txBody>
-                    <a:bodyPr/>
-                    <a:lstStyle/>
-                    <a:p>
-                      <a:pPr>
-                        <a:defRPr sz="1300" b="0">
-                          <a:solidFill>
-                            <a:srgbClr val="000000"/>
-                          </a:solidFill>
-                          <a:latin typeface="Arial"/>
-                          <a:ea typeface="Arial"/>
-                          <a:cs typeface="Arial"/>
-                        </a:defRPr>
-                      </a:pPr>
-                      <a:r>
-                        <a:t>Время до первой версии (дней)</a:t>
-                      </a:r>
-                    </a:p>
-                  </a:txBody>
-                  <a:tcPr>
-                    <a:solidFill>
-                      <a:srgbClr val="FFFFFF"/>
-                    </a:solidFill>
-                  </a:tcPr>
-                </a:tc>
-                <a:tc>
-                  <a:txBody>
-                    <a:bodyPr/>
-                    <a:lstStyle/>
-                    <a:p>
-                      <a:pPr>
-                        <a:defRPr sz="1300" b="0">
-                          <a:solidFill>
-                            <a:srgbClr val="000000"/>
-                          </a:solidFill>
-                          <a:latin typeface="Arial"/>
-                          <a:ea typeface="Arial"/>
-                          <a:cs typeface="Arial"/>
-                        </a:defRPr>
-                      </a:pPr>
-                      <a:r>
-                        <a:t>6</a:t>
-                      </a:r>
-                    </a:p>
-                  </a:txBody>
-                  <a:tcPr>
-                    <a:solidFill>
-                      <a:srgbClr val="FFFFFF"/>
-                    </a:solidFill>
-                  </a:tcPr>
-                </a:tc>
-                <a:tc>
-                  <a:txBody>
-                    <a:bodyPr/>
-                    <a:lstStyle/>
-                    <a:p>
-                      <a:pPr>
-                        <a:defRPr sz="1300" b="0">
-                          <a:solidFill>
-                            <a:srgbClr val="000000"/>
-                          </a:solidFill>
-                          <a:latin typeface="Arial"/>
-                          <a:ea typeface="Arial"/>
-                          <a:cs typeface="Arial"/>
-                        </a:defRPr>
-                      </a:pPr>
-                      <a:r>
-                        <a:t>1</a:t>
-                      </a:r>
-                    </a:p>
-                  </a:txBody>
-                  <a:tcPr>
-                    <a:solidFill>
-                      <a:srgbClr val="FFFFFF"/>
-                    </a:solidFill>
-                  </a:tcPr>
-                </a:tc>
-              </a:tr>
-              <a:tr h="885518">
-                <a:tc>
-                  <a:txBody>
-                    <a:bodyPr/>
-                    <a:lstStyle/>
-                    <a:p>
-                      <a:pPr>
-                        <a:defRPr sz="1300" b="0">
-                          <a:solidFill>
-                            <a:srgbClr val="000000"/>
-                          </a:solidFill>
-                          <a:latin typeface="Arial"/>
-                          <a:ea typeface="Arial"/>
-                          <a:cs typeface="Arial"/>
-                        </a:defRPr>
-                      </a:pPr>
-                      <a:r>
-                        <a:t>Нарушения</a:t>
-                      </a:r>
-                    </a:p>
-                  </a:txBody>
-                  <a:tcPr>
-                    <a:solidFill>
-                      <a:srgbClr val="FFFFFF"/>
-                    </a:solidFill>
-                  </a:tcPr>
-                </a:tc>
-                <a:tc>
-                  <a:txBody>
-                    <a:bodyPr/>
-                    <a:lstStyle/>
-                    <a:p>
-                      <a:pPr>
-                        <a:defRPr sz="1300" b="0">
-                          <a:solidFill>
-                            <a:srgbClr val="000000"/>
-                          </a:solidFill>
-                          <a:latin typeface="Arial"/>
-                          <a:ea typeface="Arial"/>
-                          <a:cs typeface="Arial"/>
-                        </a:defRPr>
-                      </a:pPr>
-                      <a:r>
-                        <a:t>19</a:t>
-                      </a:r>
-                    </a:p>
-                  </a:txBody>
-                  <a:tcPr>
-                    <a:solidFill>
-                      <a:srgbClr val="FFFFFF"/>
-                    </a:solidFill>
-                  </a:tcPr>
-                </a:tc>
-                <a:tc>
-                  <a:txBody>
-                    <a:bodyPr/>
-                    <a:lstStyle/>
-                    <a:p>
-                      <a:pPr>
-                        <a:defRPr sz="1300" b="0">
-                          <a:solidFill>
-                            <a:srgbClr val="000000"/>
-                          </a:solidFill>
-                          <a:latin typeface="Arial"/>
-                          <a:ea typeface="Arial"/>
-                          <a:cs typeface="Arial"/>
-                        </a:defRPr>
-                      </a:pPr>
-                      <a:r>
-                        <a:t>2</a:t>
-                      </a:r>
-                    </a:p>
-                  </a:txBody>
-                  <a:tcPr>
-                    <a:solidFill>
-                      <a:srgbClr val="FFFFFF"/>
-                    </a:solidFill>
-                  </a:tcPr>
-                </a:tc>
-              </a:tr>
-              <a:tr h="885521">
-                <a:tc>
-                  <a:txBody>
-                    <a:bodyPr/>
-                    <a:lstStyle/>
-                    <a:p>
-                      <a:pPr>
-                        <a:defRPr sz="1300" b="0">
-                          <a:solidFill>
-                            <a:srgbClr val="000000"/>
-                          </a:solidFill>
-                          <a:latin typeface="Arial"/>
-                          <a:ea typeface="Arial"/>
-                          <a:cs typeface="Arial"/>
-                        </a:defRPr>
-                      </a:pPr>
-                      <a:r>
-                        <a:t>Запросы дизайнеров</a:t>
-                      </a:r>
-                    </a:p>
-                  </a:txBody>
-                  <a:tcPr>
-                    <a:solidFill>
-                      <a:srgbClr val="FFFFFF"/>
-                    </a:solidFill>
-                  </a:tcPr>
-                </a:tc>
-                <a:tc>
-                  <a:txBody>
-                    <a:bodyPr/>
-                    <a:lstStyle/>
-                    <a:p>
-                      <a:pPr>
-                        <a:defRPr sz="1300" b="0">
-                          <a:solidFill>
-                            <a:srgbClr val="000000"/>
-                          </a:solidFill>
-                          <a:latin typeface="Arial"/>
-                          <a:ea typeface="Arial"/>
-                          <a:cs typeface="Arial"/>
-                        </a:defRPr>
-                      </a:pPr>
-                      <a:r>
-                        <a:t>11</a:t>
-                      </a:r>
-                    </a:p>
-                  </a:txBody>
-                  <a:tcPr>
-                    <a:solidFill>
-                      <a:srgbClr val="FFFFFF"/>
-                    </a:solidFill>
-                  </a:tcPr>
-                </a:tc>
-                <a:tc>
-                  <a:txBody>
-                    <a:bodyPr/>
-                    <a:lstStyle/>
-                    <a:p>
-                      <a:pPr>
-                        <a:defRPr sz="1300" b="0">
-                          <a:solidFill>
-                            <a:srgbClr val="000000"/>
-                          </a:solidFill>
-                          <a:latin typeface="Arial"/>
-                          <a:ea typeface="Arial"/>
-                          <a:cs typeface="Arial"/>
-                        </a:defRPr>
-                      </a:pPr>
-                      <a:r>
-                        <a:t>38</a:t>
-                      </a:r>
-                    </a:p>
-                  </a:txBody>
-                  <a:tcPr>
-                    <a:solidFill>
-                      <a:srgbClr val="FFFFFF"/>
-                    </a:solidFill>
-                  </a:tcPr>
-                </a:tc>
-              </a:tr>
-            </a:tbl>
-          </a:graphicData>
-        </a:graphic>
-      </p:graphicFrame>
-    </p:spTree>
-  </p:cSld>
-  <p:clrMapOvr>
-    <a:masterClrMapping/>
-  </p:clrMapOvr>
-</p:sld>
-</file>
-
-<file path=ppt/slides/slide64.xml><?xml version="1.0" encoding="utf-8"?>
 <p:sld xmlns:a="http://schemas.openxmlformats.org/drawingml/2006/main" xmlns:p="http://schemas.openxmlformats.org/presentationml/2006/main" xmlns:r="http://schemas.openxmlformats.org/officeDocument/2006/relationships">
   <p:cSld>
     <p:bg>
@@ -11567,7 +9402,7 @@
         <p:spPr>
           <a:xfrm>
             <a:off x="677387" y="692177"/>
-            <a:ext cx="10855878" cy="822960"/>
+            <a:ext cx="10855878" cy="1447800"/>
           </a:xfrm>
           <a:prstGeom prst="rect">
             <a:avLst/>
@@ -11602,7 +9437,7 @@
                 <a:ea typeface="Arial"/>
                 <a:cs typeface="Arial"/>
               </a:rPr>
-              <a:t>Запрос решения руководства</a:t>
+              <a:t>Решение о запуске сервиса на всю компанию</a:t>
             </a:r>
           </a:p>
         </p:txBody>
@@ -11633,7 +9468,7 @@
               <a:spcAft>
                 <a:spcPts val="300"/>
               </a:spcAft>
-              <a:defRPr sz="1700" b="0">
+              <a:defRPr sz="1800" b="0">
                 <a:solidFill>
                   <a:srgbClr val="000000"/>
                 </a:solidFill>
@@ -11643,7 +9478,7 @@
               </a:defRPr>
             </a:pPr>
             <a:r>
-              <a:rPr sz="1700" b="0">
+              <a:rPr sz="1800" b="0">
                 <a:solidFill>
                   <a:srgbClr val="000000"/>
                 </a:solidFill>
@@ -11651,7 +9486,7 @@
                 <a:ea typeface="Arial"/>
                 <a:cs typeface="Arial"/>
               </a:rPr>
-              <a:t>Одобрить запуск сервиса на всю компанию</a:t>
+              <a:t>Запрос одобрения на масштабирование</a:t>
             </a:r>
           </a:p>
         </p:txBody>
@@ -11682,7 +9517,7 @@
               <a:spcAft>
                 <a:spcPts val="300"/>
               </a:spcAft>
-              <a:defRPr sz="1600" b="0">
+              <a:defRPr sz="1800" b="0">
                 <a:solidFill>
                   <a:srgbClr val="000000"/>
                 </a:solidFill>
@@ -11692,7 +9527,7 @@
               </a:defRPr>
             </a:pPr>
             <a:r>
-              <a:rPr sz="1600" b="0">
+              <a:rPr sz="1800" b="0">
                 <a:solidFill>
                   <a:srgbClr val="000000"/>
                 </a:solidFill>
@@ -11700,7 +9535,7 @@
                 <a:ea typeface="Arial"/>
                 <a:cs typeface="Arial"/>
               </a:rPr>
-              <a:t>Выделить ресурсы для интеграции с хранилищем</a:t>
+              <a:t>Подключение к корпоративному хранилищу</a:t>
             </a:r>
           </a:p>
         </p:txBody>
@@ -11731,7 +9566,7 @@
               <a:spcAft>
                 <a:spcPts val="300"/>
               </a:spcAft>
-              <a:defRPr sz="2000" b="0">
+              <a:defRPr sz="2400" b="0">
                 <a:solidFill>
                   <a:srgbClr val="000000"/>
                 </a:solidFill>
@@ -11741,7 +9576,7 @@
               </a:defRPr>
             </a:pPr>
             <a:r>
-              <a:rPr sz="2000" b="0">
+              <a:rPr sz="2400" b="0">
                 <a:solidFill>
                   <a:srgbClr val="000000"/>
                 </a:solidFill>
@@ -11749,7 +9584,7 @@
                 <a:ea typeface="Arial"/>
                 <a:cs typeface="Arial"/>
               </a:rPr>
-              <a:t>Поддержка модели и масштабирование</a:t>
+              <a:t>Интеграция с доменом и HTTPS</a:t>
             </a:r>
           </a:p>
         </p:txBody>

--- a/samples/Шаблон_презентации_VK_Education__classic.pptx
+++ b/samples/Шаблон_презентации_VK_Education__classic.pptx
@@ -276,7 +276,7 @@
               <c:strCache>
                 <c:ptCount val="1"/>
                 <c:pt idx="0">
-                  <c:v>Время</c:v>
+                  <c:v>До</c:v>
                 </c:pt>
               </c:strCache>
             </c:strRef>
@@ -293,34 +293,127 @@
           </c:spPr>
           <c:cat>
             <c:strRef>
-              <c:f>Sheet1!$A$2:$A$3</c:f>
+              <c:f>Sheet1!$A$2:$A$4</c:f>
               <c:strCache>
-                <c:ptCount val="2"/>
+                <c:ptCount val="3"/>
                 <c:pt idx="0">
-                  <c:v>Сборка</c:v>
+                  <c:v>Сборка колоды</c:v>
                 </c:pt>
                 <c:pt idx="1">
-                  <c:v>Правки</c:v>
+                  <c:v>Время до первой версии</c:v>
+                </c:pt>
+                <c:pt idx="2">
+                  <c:v>Запросы/неделя</c:v>
                 </c:pt>
               </c:strCache>
             </c:strRef>
           </c:cat>
           <c:val>
             <c:numRef>
-              <c:f>Sheet1!$B$2:$B$3</c:f>
+              <c:f>Sheet1!$B$2:$B$4</c:f>
               <c:numCache>
                 <c:formatCode>General</c:formatCode>
-                <c:ptCount val="2"/>
+                <c:ptCount val="3"/>
                 <c:pt idx="0">
                   <c:v>186.0</c:v>
                 </c:pt>
                 <c:pt idx="1">
-                  <c:v>74.0</c:v>
+                  <c:v>6.0</c:v>
+                </c:pt>
+                <c:pt idx="2">
+                  <c:v>11.0</c:v>
                 </c:pt>
               </c:numCache>
             </c:numRef>
           </c:val>
         </c:ser>
+        <c:ser>
+          <c:idx val="1"/>
+          <c:order val="1"/>
+          <c:tx>
+            <c:strRef>
+              <c:f>Sheet1!$C$1</c:f>
+              <c:strCache>
+                <c:ptCount val="1"/>
+                <c:pt idx="0">
+                  <c:v>После</c:v>
+                </c:pt>
+              </c:strCache>
+            </c:strRef>
+          </c:tx>
+          <c:spPr>
+            <a:solidFill>
+              <a:srgbClr val="FF3885"/>
+            </a:solidFill>
+            <a:ln>
+              <a:solidFill>
+                <a:srgbClr val="FF3885"/>
+              </a:solidFill>
+            </a:ln>
+          </c:spPr>
+          <c:cat>
+            <c:strRef>
+              <c:f>Sheet1!$A$2:$A$4</c:f>
+              <c:strCache>
+                <c:ptCount val="3"/>
+                <c:pt idx="0">
+                  <c:v>Сборка колоды</c:v>
+                </c:pt>
+                <c:pt idx="1">
+                  <c:v>Время до первой версии</c:v>
+                </c:pt>
+                <c:pt idx="2">
+                  <c:v>Запросы/неделя</c:v>
+                </c:pt>
+              </c:strCache>
+            </c:strRef>
+          </c:cat>
+          <c:val>
+            <c:numRef>
+              <c:f>Sheet1!$C$2:$C$4</c:f>
+              <c:numCache>
+                <c:formatCode>General</c:formatCode>
+                <c:ptCount val="3"/>
+                <c:pt idx="0">
+                  <c:v>4.0</c:v>
+                </c:pt>
+                <c:pt idx="1">
+                  <c:v>1.0</c:v>
+                </c:pt>
+                <c:pt idx="2">
+                  <c:v>38.0</c:v>
+                </c:pt>
+              </c:numCache>
+            </c:numRef>
+          </c:val>
+        </c:ser>
+        <c:dLbls>
+          <c:numFmt formatCode="0&quot; единицы&quot;" sourceLinked="0"/>
+          <c:txPr>
+            <a:bodyPr wrap="none"/>
+            <a:lstStyle/>
+            <a:p>
+              <a:pPr>
+                <a:defRPr sz="1100" b="0">
+                  <a:solidFill>
+                    <a:srgbClr val="000000"/>
+                  </a:solidFill>
+                  <a:latin typeface="Play"/>
+                  <a:ea typeface="Play"/>
+                  <a:cs typeface="Play"/>
+                </a:defRPr>
+              </a:pPr>
+            </a:p>
+          </c:txPr>
+          <c:dLblPos val="outEnd"/>
+          <c:showLegendKey val="0"/>
+          <c:showVal val="1"/>
+          <c:showCatName val="0"/>
+          <c:showSerName val="0"/>
+          <c:showPercent val="0"/>
+          <c:showBubbleSize val="0"/>
+          <c:showLeaderLines val="1"/>
+        </c:dLbls>
         <c:gapWidth val="60"/>
         <c:axId val="-2068027336"/>
         <c:axId val="-2113994440"/>
@@ -344,9 +437,9 @@
                 <a:solidFill>
                   <a:srgbClr val="000000"/>
                 </a:solidFill>
-                <a:latin typeface="Arial"/>
-                <a:ea typeface="Arial"/>
-                <a:cs typeface="Arial"/>
+                <a:latin typeface="Play"/>
+                <a:ea typeface="Play"/>
+                <a:cs typeface="Play"/>
               </a:defRPr>
             </a:pPr>
           </a:p>
@@ -375,7 +468,7 @@
         <c:title>
           <c:tx>
             <c:rich>
-              <a:bodyPr/>
+              <a:bodyPr rot="0" vert="horz"/>
               <a:lstStyle/>
               <a:p>
                 <a:pPr>
@@ -383,13 +476,13 @@
                     <a:solidFill>
                       <a:srgbClr val="000000"/>
                     </a:solidFill>
-                    <a:latin typeface="Arial"/>
-                    <a:ea typeface="Arial"/>
-                    <a:cs typeface="Arial"/>
+                    <a:latin typeface="Play"/>
+                    <a:ea typeface="Play"/>
+                    <a:cs typeface="Play"/>
                   </a:defRPr>
                 </a:pPr>
                 <a:r>
-                  <a:t>мин</a:t>
+                  <a:t>единицы</a:t>
                 </a:r>
               </a:p>
             </c:rich>
@@ -409,9 +502,9 @@
                 <a:solidFill>
                   <a:srgbClr val="000000"/>
                 </a:solidFill>
-                <a:latin typeface="Arial"/>
-                <a:ea typeface="Arial"/>
-                <a:cs typeface="Arial"/>
+                <a:latin typeface="Play"/>
+                <a:ea typeface="Play"/>
+                <a:cs typeface="Play"/>
               </a:defRPr>
             </a:pPr>
           </a:p>
@@ -420,6 +513,10 @@
         <c:crosses val="autoZero"/>
       </c:valAx>
     </c:plotArea>
+    <c:legend>
+      <c:legendPos val="b"/>
+      <c:overlay val="0"/>
+    </c:legend>
     <c:dispBlanksAs val="gap"/>
   </c:chart>
   <c:txPr>
@@ -431,196 +528,9 @@
           <a:solidFill>
             <a:srgbClr val="000000"/>
           </a:solidFill>
-          <a:latin typeface="Arial"/>
-          <a:ea typeface="Arial"/>
-          <a:cs typeface="Arial"/>
-        </a:defRPr>
-      </a:pPr>
-      <a:endParaRPr lang="en-US"/>
-    </a:p>
-  </c:txPr>
-  <c:externalData r:id="rId1">
-    <c:autoUpdate val="0"/>
-  </c:externalData>
-</c:chartSpace>
-</file>
-
-<file path=ppt/charts/chart2.xml><?xml version="1.0" encoding="utf-8"?>
-<c:chartSpace xmlns:c="http://schemas.openxmlformats.org/drawingml/2006/chart" xmlns:a="http://schemas.openxmlformats.org/drawingml/2006/main" xmlns:r="http://schemas.openxmlformats.org/officeDocument/2006/relationships">
-  <c:date1904 val="0"/>
-  <c:chart>
-    <c:autoTitleDeleted val="1"/>
-    <c:plotArea>
-      <c:barChart>
-        <c:barDir val="col"/>
-        <c:grouping val="clustered"/>
-        <c:ser>
-          <c:idx val="0"/>
-          <c:order val="0"/>
-          <c:tx>
-            <c:strRef>
-              <c:f>Sheet1!$B$1</c:f>
-              <c:strCache>
-                <c:ptCount val="1"/>
-                <c:pt idx="0">
-                  <c:v>Время</c:v>
-                </c:pt>
-              </c:strCache>
-            </c:strRef>
-          </c:tx>
-          <c:spPr>
-            <a:solidFill>
-              <a:srgbClr val="0077FF"/>
-            </a:solidFill>
-            <a:ln>
-              <a:solidFill>
-                <a:srgbClr val="0077FF"/>
-              </a:solidFill>
-            </a:ln>
-          </c:spPr>
-          <c:cat>
-            <c:strRef>
-              <c:f>Sheet1!$A$2:$A$3</c:f>
-              <c:strCache>
-                <c:ptCount val="2"/>
-                <c:pt idx="0">
-                  <c:v>До пилота</c:v>
-                </c:pt>
-                <c:pt idx="1">
-                  <c:v>После пилота</c:v>
-                </c:pt>
-              </c:strCache>
-            </c:strRef>
-          </c:cat>
-          <c:val>
-            <c:numRef>
-              <c:f>Sheet1!$B$2:$B$3</c:f>
-              <c:numCache>
-                <c:formatCode>General</c:formatCode>
-                <c:ptCount val="2"/>
-                <c:pt idx="0">
-                  <c:v>186.0</c:v>
-                </c:pt>
-                <c:pt idx="1">
-                  <c:v>4.0</c:v>
-                </c:pt>
-              </c:numCache>
-            </c:numRef>
-          </c:val>
-        </c:ser>
-        <c:gapWidth val="60"/>
-        <c:axId val="-2068027336"/>
-        <c:axId val="-2113994440"/>
-      </c:barChart>
-      <c:catAx>
-        <c:axId val="-2068027336"/>
-        <c:scaling>
-          <c:orientation val="minMax"/>
-        </c:scaling>
-        <c:delete val="0"/>
-        <c:axPos val="b"/>
-        <c:majorTickMark val="out"/>
-        <c:minorTickMark val="none"/>
-        <c:tickLblPos val="nextTo"/>
-        <c:txPr>
-          <a:bodyPr/>
-          <a:lstStyle/>
-          <a:p>
-            <a:pPr>
-              <a:defRPr sz="1100" b="0">
-                <a:solidFill>
-                  <a:srgbClr val="000000"/>
-                </a:solidFill>
-                <a:latin typeface="Arial"/>
-                <a:ea typeface="Arial"/>
-                <a:cs typeface="Arial"/>
-              </a:defRPr>
-            </a:pPr>
-          </a:p>
-        </c:txPr>
-        <c:crossAx val="-2113994440"/>
-        <c:crosses val="autoZero"/>
-        <c:auto val="1"/>
-        <c:lblAlgn val="ctr"/>
-        <c:lblOffset val="100"/>
-        <c:noMultiLvlLbl val="0"/>
-      </c:catAx>
-      <c:valAx>
-        <c:axId val="-2113994440"/>
-        <c:scaling/>
-        <c:delete val="0"/>
-        <c:axPos val="l"/>
-        <c:majorGridlines>
-          <c:spPr>
-            <a:ln w="9525">
-              <a:solidFill>
-                <a:srgbClr val="D1D1D1"/>
-              </a:solidFill>
-            </a:ln>
-          </c:spPr>
-        </c:majorGridlines>
-        <c:title>
-          <c:tx>
-            <c:rich>
-              <a:bodyPr/>
-              <a:lstStyle/>
-              <a:p>
-                <a:pPr>
-                  <a:defRPr sz="1100" b="0">
-                    <a:solidFill>
-                      <a:srgbClr val="000000"/>
-                    </a:solidFill>
-                    <a:latin typeface="Arial"/>
-                    <a:ea typeface="Arial"/>
-                    <a:cs typeface="Arial"/>
-                  </a:defRPr>
-                </a:pPr>
-                <a:r>
-                  <a:t>мин</a:t>
-                </a:r>
-              </a:p>
-            </c:rich>
-          </c:tx>
-          <c:layout/>
-          <c:overlay val="0"/>
-        </c:title>
-        <c:majorTickMark val="out"/>
-        <c:minorTickMark val="none"/>
-        <c:tickLblPos val="nextTo"/>
-        <c:txPr>
-          <a:bodyPr/>
-          <a:lstStyle/>
-          <a:p>
-            <a:pPr>
-              <a:defRPr sz="1100" b="0">
-                <a:solidFill>
-                  <a:srgbClr val="000000"/>
-                </a:solidFill>
-                <a:latin typeface="Arial"/>
-                <a:ea typeface="Arial"/>
-                <a:cs typeface="Arial"/>
-              </a:defRPr>
-            </a:pPr>
-          </a:p>
-        </c:txPr>
-        <c:crossAx val="-2068027336"/>
-        <c:crosses val="autoZero"/>
-      </c:valAx>
-    </c:plotArea>
-    <c:dispBlanksAs val="gap"/>
-  </c:chart>
-  <c:txPr>
-    <a:bodyPr/>
-    <a:lstStyle/>
-    <a:p>
-      <a:pPr>
-        <a:defRPr sz="1200" b="0">
-          <a:solidFill>
-            <a:srgbClr val="000000"/>
-          </a:solidFill>
-          <a:latin typeface="Arial"/>
-          <a:ea typeface="Arial"/>
-          <a:cs typeface="Arial"/>
+          <a:latin typeface="Play"/>
+          <a:ea typeface="Play"/>
+          <a:cs typeface="Play"/>
         </a:defRPr>
       </a:pPr>
       <a:endParaRPr lang="en-US"/>
@@ -7391,7 +7301,7 @@
         <p:spPr>
           <a:xfrm>
             <a:off x="677387" y="692177"/>
-            <a:ext cx="10855878" cy="822960"/>
+            <a:ext cx="10855878" cy="1447800"/>
           </a:xfrm>
           <a:prstGeom prst="rect">
             <a:avLst/>
@@ -7426,7 +7336,7 @@
                 <a:ea typeface="Arial"/>
                 <a:cs typeface="Arial"/>
               </a:rPr>
-              <a:t>Автоматическая вёрстка презентаций</a:t>
+              <a:t>Защита инициативы: сервис автоматической вёрстки презентаций</a:t>
             </a:r>
           </a:p>
         </p:txBody>
@@ -7484,7 +7394,7 @@
         <p:spPr>
           <a:xfrm>
             <a:off x="677387" y="692177"/>
-            <a:ext cx="10855878" cy="1447800"/>
+            <a:ext cx="10855878" cy="822960"/>
           </a:xfrm>
           <a:prstGeom prst="rect">
             <a:avLst/>
@@ -7519,7 +7429,7 @@
                 <a:ea typeface="Arial"/>
                 <a:cs typeface="Arial"/>
               </a:rPr>
-              <a:t>Сейчас сборка презентаций занимает 186 минут</a:t>
+              <a:t>Контекст и возможность</a:t>
             </a:r>
           </a:p>
         </p:txBody>
@@ -7532,8 +7442,8 @@
         </p:nvSpPr>
         <p:spPr>
           <a:xfrm>
-            <a:off x="677387" y="3591534"/>
-            <a:ext cx="10855878" cy="501978"/>
+            <a:off x="677387" y="2200937"/>
+            <a:ext cx="10855878" cy="1098550"/>
           </a:xfrm>
           <a:prstGeom prst="rect">
             <a:avLst/>
@@ -7554,9 +7464,9 @@
                 <a:solidFill>
                   <a:srgbClr val="000000"/>
                 </a:solidFill>
-                <a:latin typeface="Arial"/>
-                <a:ea typeface="Arial"/>
-                <a:cs typeface="Arial"/>
+                <a:latin typeface="Play"/>
+                <a:ea typeface="Play"/>
+                <a:cs typeface="Play"/>
               </a:defRPr>
             </a:pPr>
             <a:r>
@@ -7564,11 +7474,11 @@
                 <a:solidFill>
                   <a:srgbClr val="000000"/>
                 </a:solidFill>
-                <a:latin typeface="Arial"/>
-                <a:ea typeface="Arial"/>
-                <a:cs typeface="Arial"/>
+                <a:latin typeface="Play"/>
+                <a:ea typeface="Play"/>
+                <a:cs typeface="Play"/>
               </a:rPr>
-              <a:t>• Отдел маркетинга вручную собирает 42 колоды за квартал</a:t>
+              <a:t>• 42 колоды собраны вручную 2026</a:t>
             </a:r>
           </a:p>
           <a:p>
@@ -7580,9 +7490,9 @@
                 <a:solidFill>
                   <a:srgbClr val="000000"/>
                 </a:solidFill>
-                <a:latin typeface="Arial"/>
-                <a:ea typeface="Arial"/>
-                <a:cs typeface="Arial"/>
+                <a:latin typeface="Play"/>
+                <a:ea typeface="Play"/>
+                <a:cs typeface="Play"/>
               </a:defRPr>
             </a:pPr>
             <a:r>
@@ -7590,11 +7500,11 @@
                 <a:solidFill>
                   <a:srgbClr val="000000"/>
                 </a:solidFill>
-                <a:latin typeface="Arial"/>
-                <a:ea typeface="Arial"/>
-                <a:cs typeface="Arial"/>
+                <a:latin typeface="Play"/>
+                <a:ea typeface="Play"/>
+                <a:cs typeface="Play"/>
               </a:rPr>
-              <a:t>• 74 минуты уходит на правки после ревью дизайнера</a:t>
+              <a:t>• Сборка колоды занимает 186 мин</a:t>
             </a:r>
           </a:p>
           <a:p>
@@ -7606,9 +7516,9 @@
                 <a:solidFill>
                   <a:srgbClr val="000000"/>
                 </a:solidFill>
-                <a:latin typeface="Arial"/>
-                <a:ea typeface="Arial"/>
-                <a:cs typeface="Arial"/>
+                <a:latin typeface="Play"/>
+                <a:ea typeface="Play"/>
+                <a:cs typeface="Play"/>
               </a:defRPr>
             </a:pPr>
             <a:r>
@@ -7616,30 +7526,468 @@
                 <a:solidFill>
                   <a:srgbClr val="000000"/>
                 </a:solidFill>
-                <a:latin typeface="Arial"/>
-                <a:ea typeface="Arial"/>
-                <a:cs typeface="Arial"/>
+                <a:latin typeface="Play"/>
+                <a:ea typeface="Play"/>
+                <a:cs typeface="Play"/>
               </a:rPr>
-              <a:t>• 19 колод нарушают фирменный стиль</a:t>
+              <a:t>• Правки ревью добавляют 74 мин</a:t>
+            </a:r>
+          </a:p>
+          <a:p>
+            <a:pPr algn="l">
+              <a:spcAft>
+                <a:spcPts val="300"/>
+              </a:spcAft>
+              <a:defRPr sz="1200">
+                <a:solidFill>
+                  <a:srgbClr val="000000"/>
+                </a:solidFill>
+                <a:latin typeface="Play"/>
+                <a:ea typeface="Play"/>
+                <a:cs typeface="Play"/>
+              </a:defRPr>
+            </a:pPr>
+            <a:r>
+              <a:rPr sz="1200">
+                <a:solidFill>
+                  <a:srgbClr val="000000"/>
+                </a:solidFill>
+                <a:latin typeface="Play"/>
+                <a:ea typeface="Play"/>
+                <a:cs typeface="Play"/>
+              </a:rPr>
+              <a:t>• 19/42 колод нарушают стиль</a:t>
+            </a:r>
+          </a:p>
+          <a:p>
+            <a:pPr algn="l">
+              <a:spcAft>
+                <a:spcPts val="300"/>
+              </a:spcAft>
+              <a:defRPr sz="1200">
+                <a:solidFill>
+                  <a:srgbClr val="000000"/>
+                </a:solidFill>
+                <a:latin typeface="Play"/>
+                <a:ea typeface="Play"/>
+                <a:cs typeface="Play"/>
+              </a:defRPr>
+            </a:pPr>
+            <a:r>
+              <a:rPr sz="1200">
+                <a:solidFill>
+                  <a:srgbClr val="000000"/>
+                </a:solidFill>
+                <a:latin typeface="Play"/>
+                <a:ea typeface="Play"/>
+                <a:cs typeface="Play"/>
+              </a:rPr>
+              <a:t>• Дизайн‑отдел 4 закрывает 11 запросов/нед.</a:t>
             </a:r>
           </a:p>
         </p:txBody>
       </p:sp>
       <p:graphicFrame>
         <p:nvGraphicFramePr>
-          <p:cNvPr id="989" name="Chart 988"/>
+          <p:cNvPr id="989" name="Table 988"/>
           <p:cNvGraphicFramePr>
             <a:graphicFrameLocks noGrp="1"/>
           </p:cNvGraphicFramePr>
           <p:nvPr/>
         </p:nvGraphicFramePr>
         <p:xfrm>
-          <a:off x="677387" y="4264962"/>
-          <a:ext cx="10855878" cy="581517"/>
+          <a:off x="677387" y="2928626"/>
+          <a:ext cx="10855878" cy="662907"/>
         </p:xfrm>
         <a:graphic>
-          <a:graphicData uri="http://schemas.openxmlformats.org/drawingml/2006/chart">
-            <c:chart xmlns:c="http://schemas.openxmlformats.org/drawingml/2006/chart" r:id="rId2"/>
+          <a:graphicData uri="http://schemas.openxmlformats.org/drawingml/2006/table">
+            <a:tbl>
+              <a:tblPr firstRow="1" bandRow="1">
+                <a:tableStyleId>{5C22544A-7EE6-4342-B048-85BDC9FD1C3A}</a:tableStyleId>
+              </a:tblPr>
+              <a:tblGrid>
+                <a:gridCol w="5427939"/>
+                <a:gridCol w="5427939"/>
+              </a:tblGrid>
+              <a:tr h="94701">
+                <a:tc>
+                  <a:txBody>
+                    <a:bodyPr/>
+                    <a:lstStyle/>
+                    <a:p>
+                      <a:pPr>
+                        <a:defRPr sz="1300" b="1">
+                          <a:solidFill>
+                            <a:srgbClr val="FFFFFF"/>
+                          </a:solidFill>
+                          <a:latin typeface="Play"/>
+                          <a:ea typeface="Play"/>
+                          <a:cs typeface="Play"/>
+                        </a:defRPr>
+                      </a:pPr>
+                      <a:r>
+                        <a:t>Показатель</a:t>
+                      </a:r>
+                    </a:p>
+                  </a:txBody>
+                  <a:tcPr>
+                    <a:solidFill>
+                      <a:srgbClr val="0077FF"/>
+                    </a:solidFill>
+                  </a:tcPr>
+                </a:tc>
+                <a:tc>
+                  <a:txBody>
+                    <a:bodyPr/>
+                    <a:lstStyle/>
+                    <a:p>
+                      <a:pPr>
+                        <a:defRPr sz="1300" b="1">
+                          <a:solidFill>
+                            <a:srgbClr val="FFFFFF"/>
+                          </a:solidFill>
+                          <a:latin typeface="Play"/>
+                          <a:ea typeface="Play"/>
+                          <a:cs typeface="Play"/>
+                        </a:defRPr>
+                      </a:pPr>
+                      <a:r>
+                        <a:t>Значение</a:t>
+                      </a:r>
+                    </a:p>
+                  </a:txBody>
+                  <a:tcPr>
+                    <a:solidFill>
+                      <a:srgbClr val="0077FF"/>
+                    </a:solidFill>
+                  </a:tcPr>
+                </a:tc>
+              </a:tr>
+              <a:tr h="94701">
+                <a:tc>
+                  <a:txBody>
+                    <a:bodyPr/>
+                    <a:lstStyle/>
+                    <a:p>
+                      <a:pPr>
+                        <a:defRPr sz="1300" b="0">
+                          <a:solidFill>
+                            <a:srgbClr val="000000"/>
+                          </a:solidFill>
+                          <a:latin typeface="Play"/>
+                          <a:ea typeface="Play"/>
+                          <a:cs typeface="Play"/>
+                        </a:defRPr>
+                      </a:pPr>
+                      <a:r>
+                        <a:t>Колоды</a:t>
+                      </a:r>
+                    </a:p>
+                  </a:txBody>
+                  <a:tcPr>
+                    <a:solidFill>
+                      <a:srgbClr val="FFFFFF"/>
+                    </a:solidFill>
+                  </a:tcPr>
+                </a:tc>
+                <a:tc>
+                  <a:txBody>
+                    <a:bodyPr/>
+                    <a:lstStyle/>
+                    <a:p>
+                      <a:pPr>
+                        <a:defRPr sz="1300" b="0">
+                          <a:solidFill>
+                            <a:srgbClr val="000000"/>
+                          </a:solidFill>
+                          <a:latin typeface="Play"/>
+                          <a:ea typeface="Play"/>
+                          <a:cs typeface="Play"/>
+                        </a:defRPr>
+                      </a:pPr>
+                      <a:r>
+                        <a:t>42</a:t>
+                      </a:r>
+                    </a:p>
+                  </a:txBody>
+                  <a:tcPr>
+                    <a:solidFill>
+                      <a:srgbClr val="FFFFFF"/>
+                    </a:solidFill>
+                  </a:tcPr>
+                </a:tc>
+              </a:tr>
+              <a:tr h="94701">
+                <a:tc>
+                  <a:txBody>
+                    <a:bodyPr/>
+                    <a:lstStyle/>
+                    <a:p>
+                      <a:pPr>
+                        <a:defRPr sz="1300" b="0">
+                          <a:solidFill>
+                            <a:srgbClr val="000000"/>
+                          </a:solidFill>
+                          <a:latin typeface="Play"/>
+                          <a:ea typeface="Play"/>
+                          <a:cs typeface="Play"/>
+                        </a:defRPr>
+                      </a:pPr>
+                      <a:r>
+                        <a:t>Сборка колоды</a:t>
+                      </a:r>
+                    </a:p>
+                  </a:txBody>
+                  <a:tcPr>
+                    <a:solidFill>
+                      <a:srgbClr val="FFFFFF"/>
+                    </a:solidFill>
+                  </a:tcPr>
+                </a:tc>
+                <a:tc>
+                  <a:txBody>
+                    <a:bodyPr/>
+                    <a:lstStyle/>
+                    <a:p>
+                      <a:pPr>
+                        <a:defRPr sz="1300" b="0">
+                          <a:solidFill>
+                            <a:srgbClr val="000000"/>
+                          </a:solidFill>
+                          <a:latin typeface="Play"/>
+                          <a:ea typeface="Play"/>
+                          <a:cs typeface="Play"/>
+                        </a:defRPr>
+                      </a:pPr>
+                      <a:r>
+                        <a:t>186 мин</a:t>
+                      </a:r>
+                    </a:p>
+                  </a:txBody>
+                  <a:tcPr>
+                    <a:solidFill>
+                      <a:srgbClr val="FFFFFF"/>
+                    </a:solidFill>
+                  </a:tcPr>
+                </a:tc>
+              </a:tr>
+              <a:tr h="94701">
+                <a:tc>
+                  <a:txBody>
+                    <a:bodyPr/>
+                    <a:lstStyle/>
+                    <a:p>
+                      <a:pPr>
+                        <a:defRPr sz="1300" b="0">
+                          <a:solidFill>
+                            <a:srgbClr val="000000"/>
+                          </a:solidFill>
+                          <a:latin typeface="Play"/>
+                          <a:ea typeface="Play"/>
+                          <a:cs typeface="Play"/>
+                        </a:defRPr>
+                      </a:pPr>
+                      <a:r>
+                        <a:t>Правки</a:t>
+                      </a:r>
+                    </a:p>
+                  </a:txBody>
+                  <a:tcPr>
+                    <a:solidFill>
+                      <a:srgbClr val="FFFFFF"/>
+                    </a:solidFill>
+                  </a:tcPr>
+                </a:tc>
+                <a:tc>
+                  <a:txBody>
+                    <a:bodyPr/>
+                    <a:lstStyle/>
+                    <a:p>
+                      <a:pPr>
+                        <a:defRPr sz="1300" b="0">
+                          <a:solidFill>
+                            <a:srgbClr val="000000"/>
+                          </a:solidFill>
+                          <a:latin typeface="Play"/>
+                          <a:ea typeface="Play"/>
+                          <a:cs typeface="Play"/>
+                        </a:defRPr>
+                      </a:pPr>
+                      <a:r>
+                        <a:t>74 мин</a:t>
+                      </a:r>
+                    </a:p>
+                  </a:txBody>
+                  <a:tcPr>
+                    <a:solidFill>
+                      <a:srgbClr val="FFFFFF"/>
+                    </a:solidFill>
+                  </a:tcPr>
+                </a:tc>
+              </a:tr>
+              <a:tr h="94701">
+                <a:tc>
+                  <a:txBody>
+                    <a:bodyPr/>
+                    <a:lstStyle/>
+                    <a:p>
+                      <a:pPr>
+                        <a:defRPr sz="1300" b="0">
+                          <a:solidFill>
+                            <a:srgbClr val="000000"/>
+                          </a:solidFill>
+                          <a:latin typeface="Play"/>
+                          <a:ea typeface="Play"/>
+                          <a:cs typeface="Play"/>
+                        </a:defRPr>
+                      </a:pPr>
+                      <a:r>
+                        <a:t>Нарушения стиля</a:t>
+                      </a:r>
+                    </a:p>
+                  </a:txBody>
+                  <a:tcPr>
+                    <a:solidFill>
+                      <a:srgbClr val="FFFFFF"/>
+                    </a:solidFill>
+                  </a:tcPr>
+                </a:tc>
+                <a:tc>
+                  <a:txBody>
+                    <a:bodyPr/>
+                    <a:lstStyle/>
+                    <a:p>
+                      <a:pPr>
+                        <a:defRPr sz="1300" b="0">
+                          <a:solidFill>
+                            <a:srgbClr val="000000"/>
+                          </a:solidFill>
+                          <a:latin typeface="Play"/>
+                          <a:ea typeface="Play"/>
+                          <a:cs typeface="Play"/>
+                        </a:defRPr>
+                      </a:pPr>
+                      <a:r>
+                        <a:t>19/42</a:t>
+                      </a:r>
+                    </a:p>
+                  </a:txBody>
+                  <a:tcPr>
+                    <a:solidFill>
+                      <a:srgbClr val="FFFFFF"/>
+                    </a:solidFill>
+                  </a:tcPr>
+                </a:tc>
+              </a:tr>
+              <a:tr h="94701">
+                <a:tc>
+                  <a:txBody>
+                    <a:bodyPr/>
+                    <a:lstStyle/>
+                    <a:p>
+                      <a:pPr>
+                        <a:defRPr sz="1300" b="0">
+                          <a:solidFill>
+                            <a:srgbClr val="000000"/>
+                          </a:solidFill>
+                          <a:latin typeface="Play"/>
+                          <a:ea typeface="Play"/>
+                          <a:cs typeface="Play"/>
+                        </a:defRPr>
+                      </a:pPr>
+                      <a:r>
+                        <a:t>Запросы/неделя</a:t>
+                      </a:r>
+                    </a:p>
+                  </a:txBody>
+                  <a:tcPr>
+                    <a:solidFill>
+                      <a:srgbClr val="FFFFFF"/>
+                    </a:solidFill>
+                  </a:tcPr>
+                </a:tc>
+                <a:tc>
+                  <a:txBody>
+                    <a:bodyPr/>
+                    <a:lstStyle/>
+                    <a:p>
+                      <a:pPr>
+                        <a:defRPr sz="1300" b="0">
+                          <a:solidFill>
+                            <a:srgbClr val="000000"/>
+                          </a:solidFill>
+                          <a:latin typeface="Play"/>
+                          <a:ea typeface="Play"/>
+                          <a:cs typeface="Play"/>
+                        </a:defRPr>
+                      </a:pPr>
+                      <a:r>
+                        <a:t>11/27</a:t>
+                      </a:r>
+                    </a:p>
+                  </a:txBody>
+                  <a:tcPr>
+                    <a:solidFill>
+                      <a:srgbClr val="FFFFFF"/>
+                    </a:solidFill>
+                  </a:tcPr>
+                </a:tc>
+              </a:tr>
+              <a:tr h="94701">
+                <a:tc>
+                  <a:txBody>
+                    <a:bodyPr/>
+                    <a:lstStyle/>
+                    <a:p>
+                      <a:pPr>
+                        <a:defRPr sz="1300" b="0">
+                          <a:solidFill>
+                            <a:srgbClr val="000000"/>
+                          </a:solidFill>
+                          <a:latin typeface="Play"/>
+                          <a:ea typeface="Play"/>
+                          <a:cs typeface="Play"/>
+                        </a:defRPr>
+                      </a:pPr>
+                      <a:r>
+                        <a:t>Время ожидания</a:t>
+                      </a:r>
+                    </a:p>
+                  </a:txBody>
+                  <a:tcPr>
+                    <a:solidFill>
+                      <a:srgbClr val="FFFFFF"/>
+                    </a:solidFill>
+                  </a:tcPr>
+                </a:tc>
+                <a:tc>
+                  <a:txBody>
+                    <a:bodyPr/>
+                    <a:lstStyle/>
+                    <a:p>
+                      <a:pPr>
+                        <a:defRPr sz="1300" b="0">
+                          <a:solidFill>
+                            <a:srgbClr val="000000"/>
+                          </a:solidFill>
+                          <a:latin typeface="Play"/>
+                          <a:ea typeface="Play"/>
+                          <a:cs typeface="Play"/>
+                        </a:defRPr>
+                      </a:pPr>
+                      <a:r>
+                        <a:t>6 дней</a:t>
+                      </a:r>
+                    </a:p>
+                  </a:txBody>
+                  <a:tcPr>
+                    <a:solidFill>
+                      <a:srgbClr val="FFFFFF"/>
+                    </a:solidFill>
+                  </a:tcPr>
+                </a:tc>
+              </a:tr>
+            </a:tbl>
           </a:graphicData>
         </a:graphic>
       </p:graphicFrame>
@@ -7677,7 +8025,7 @@
         <p:spPr>
           <a:xfrm>
             <a:off x="677387" y="692177"/>
-            <a:ext cx="10855878" cy="1447800"/>
+            <a:ext cx="10855878" cy="822960"/>
           </a:xfrm>
           <a:prstGeom prst="rect">
             <a:avLst/>
@@ -7712,7 +8060,7 @@
                 <a:ea typeface="Arial"/>
                 <a:cs typeface="Arial"/>
               </a:rPr>
-              <a:t>Сервис автоматически вёрстит презентации за 4 минуты</a:t>
+              <a:t>Предложение</a:t>
             </a:r>
           </a:p>
         </p:txBody>
@@ -7725,8 +8073,8 @@
         </p:nvSpPr>
         <p:spPr>
           <a:xfrm>
-            <a:off x="677387" y="2277137"/>
-            <a:ext cx="10855878" cy="1341120"/>
+            <a:off x="677387" y="1773204"/>
+            <a:ext cx="10855878" cy="1737360"/>
           </a:xfrm>
           <a:prstGeom prst="rect">
             <a:avLst/>
@@ -7747,9 +8095,9 @@
                 <a:solidFill>
                   <a:srgbClr val="000000"/>
                 </a:solidFill>
-                <a:latin typeface="Arial"/>
-                <a:ea typeface="Arial"/>
-                <a:cs typeface="Arial"/>
+                <a:latin typeface="Play"/>
+                <a:ea typeface="Play"/>
+                <a:cs typeface="Play"/>
               </a:defRPr>
             </a:pPr>
             <a:r>
@@ -7757,11 +8105,11 @@
                 <a:solidFill>
                   <a:srgbClr val="000000"/>
                 </a:solidFill>
-                <a:latin typeface="Arial"/>
-                <a:ea typeface="Arial"/>
-                <a:cs typeface="Arial"/>
+                <a:latin typeface="Play"/>
+                <a:ea typeface="Play"/>
+                <a:cs typeface="Play"/>
               </a:rPr>
-              <a:t>• Принимает шаблон pptx и материалы</a:t>
+              <a:t>• Сервис принимает шаблон pptx и материалы</a:t>
             </a:r>
           </a:p>
           <a:p>
@@ -7773,9 +8121,9 @@
                 <a:solidFill>
                   <a:srgbClr val="000000"/>
                 </a:solidFill>
-                <a:latin typeface="Arial"/>
-                <a:ea typeface="Arial"/>
-                <a:cs typeface="Arial"/>
+                <a:latin typeface="Play"/>
+                <a:ea typeface="Play"/>
+                <a:cs typeface="Play"/>
               </a:defRPr>
             </a:pPr>
             <a:r>
@@ -7783,11 +8131,11 @@
                 <a:solidFill>
                   <a:srgbClr val="000000"/>
                 </a:solidFill>
-                <a:latin typeface="Arial"/>
-                <a:ea typeface="Arial"/>
-                <a:cs typeface="Arial"/>
+                <a:latin typeface="Play"/>
+                <a:ea typeface="Play"/>
+                <a:cs typeface="Play"/>
               </a:rPr>
-              <a:t>• Автоматически формирует план колоды</a:t>
+              <a:t>• Автоматически строит план колоды и вёрстку по дизайн‑системе</a:t>
             </a:r>
           </a:p>
           <a:p>
@@ -7799,9 +8147,9 @@
                 <a:solidFill>
                   <a:srgbClr val="000000"/>
                 </a:solidFill>
-                <a:latin typeface="Arial"/>
-                <a:ea typeface="Arial"/>
-                <a:cs typeface="Arial"/>
+                <a:latin typeface="Play"/>
+                <a:ea typeface="Play"/>
+                <a:cs typeface="Play"/>
               </a:defRPr>
             </a:pPr>
             <a:r>
@@ -7809,11 +8157,37 @@
                 <a:solidFill>
                   <a:srgbClr val="000000"/>
                 </a:solidFill>
-                <a:latin typeface="Arial"/>
-                <a:ea typeface="Arial"/>
-                <a:cs typeface="Arial"/>
+                <a:latin typeface="Play"/>
+                <a:ea typeface="Play"/>
+                <a:cs typeface="Play"/>
               </a:rPr>
-              <a:t>• Экспорт в pptx, pdf, html</a:t>
+              <a:t>• Аудит качества проверяет все цифры и стили</a:t>
+            </a:r>
+          </a:p>
+          <a:p>
+            <a:pPr algn="l">
+              <a:spcAft>
+                <a:spcPts val="300"/>
+              </a:spcAft>
+              <a:defRPr sz="1800">
+                <a:solidFill>
+                  <a:srgbClr val="000000"/>
+                </a:solidFill>
+                <a:latin typeface="Play"/>
+                <a:ea typeface="Play"/>
+                <a:cs typeface="Play"/>
+              </a:defRPr>
+            </a:pPr>
+            <a:r>
+              <a:rPr sz="1800">
+                <a:solidFill>
+                  <a:srgbClr val="000000"/>
+                </a:solidFill>
+                <a:latin typeface="Play"/>
+                <a:ea typeface="Play"/>
+                <a:cs typeface="Play"/>
+              </a:rPr>
+              <a:t>• Экспорт в pptx, pdf и html без картинок</a:t>
             </a:r>
           </a:p>
         </p:txBody>
@@ -7826,8 +8200,8 @@
         </p:nvSpPr>
         <p:spPr>
           <a:xfrm>
-            <a:off x="677387" y="4354494"/>
-            <a:ext cx="2066959" cy="1281514"/>
+            <a:off x="677387" y="3711399"/>
+            <a:ext cx="10855878" cy="361025"/>
           </a:xfrm>
           <a:prstGeom prst="homePlate">
             <a:avLst/>
@@ -7858,25 +8232,25 @@
           <a:lstStyle/>
           <a:p>
             <a:pPr algn="ctr">
-              <a:defRPr sz="1300" b="0">
+              <a:defRPr sz="1400" b="0">
                 <a:solidFill>
                   <a:srgbClr val="FFFFFF"/>
                 </a:solidFill>
-                <a:latin typeface="Arial"/>
-                <a:ea typeface="Arial"/>
-                <a:cs typeface="Arial"/>
+                <a:latin typeface="Play"/>
+                <a:ea typeface="Play"/>
+                <a:cs typeface="Play"/>
               </a:defRPr>
             </a:pPr>
             <a:r>
-              <a:rPr sz="1300" b="0">
+              <a:rPr sz="1400" b="0">
                 <a:solidFill>
                   <a:srgbClr val="FFFFFF"/>
                 </a:solidFill>
-                <a:latin typeface="Arial"/>
-                <a:ea typeface="Arial"/>
-                <a:cs typeface="Arial"/>
+                <a:latin typeface="Play"/>
+                <a:ea typeface="Play"/>
+                <a:cs typeface="Play"/>
               </a:rPr>
-              <a:t>Шаблон</a:t>
+              <a:t>Ввод шаблона</a:t>
             </a:r>
           </a:p>
         </p:txBody>
@@ -7889,8 +8263,8 @@
         </p:nvSpPr>
         <p:spPr>
           <a:xfrm>
-            <a:off x="2874616" y="4354494"/>
-            <a:ext cx="2066959" cy="1281514"/>
+            <a:off x="677387" y="4131196"/>
+            <a:ext cx="10855878" cy="361025"/>
           </a:xfrm>
           <a:prstGeom prst="chevron">
             <a:avLst/>
@@ -7921,25 +8295,25 @@
           <a:lstStyle/>
           <a:p>
             <a:pPr algn="ctr">
-              <a:defRPr sz="1300" b="0">
+              <a:defRPr sz="1400" b="0">
                 <a:solidFill>
                   <a:srgbClr val="FFFFFF"/>
                 </a:solidFill>
-                <a:latin typeface="Arial"/>
-                <a:ea typeface="Arial"/>
-                <a:cs typeface="Arial"/>
+                <a:latin typeface="Play"/>
+                <a:ea typeface="Play"/>
+                <a:cs typeface="Play"/>
               </a:defRPr>
             </a:pPr>
             <a:r>
-              <a:rPr sz="1300" b="0">
+              <a:rPr sz="1400" b="0">
                 <a:solidFill>
                   <a:srgbClr val="FFFFFF"/>
                 </a:solidFill>
-                <a:latin typeface="Arial"/>
-                <a:ea typeface="Arial"/>
-                <a:cs typeface="Arial"/>
+                <a:latin typeface="Play"/>
+                <a:ea typeface="Play"/>
+                <a:cs typeface="Play"/>
               </a:rPr>
-              <a:t>План</a:t>
+              <a:t>Анализ</a:t>
             </a:r>
           </a:p>
         </p:txBody>
@@ -7952,8 +8326,8 @@
         </p:nvSpPr>
         <p:spPr>
           <a:xfrm>
-            <a:off x="5071846" y="4354494"/>
-            <a:ext cx="2066959" cy="1281514"/>
+            <a:off x="677387" y="4550994"/>
+            <a:ext cx="10855878" cy="361025"/>
           </a:xfrm>
           <a:prstGeom prst="chevron">
             <a:avLst/>
@@ -7984,25 +8358,25 @@
           <a:lstStyle/>
           <a:p>
             <a:pPr algn="ctr">
-              <a:defRPr sz="1165" b="0">
+              <a:defRPr sz="1400" b="0">
                 <a:solidFill>
                   <a:srgbClr val="FFFFFF"/>
                 </a:solidFill>
-                <a:latin typeface="Arial"/>
-                <a:ea typeface="Arial"/>
-                <a:cs typeface="Arial"/>
+                <a:latin typeface="Play"/>
+                <a:ea typeface="Play"/>
+                <a:cs typeface="Play"/>
               </a:defRPr>
             </a:pPr>
             <a:r>
-              <a:rPr sz="1165" b="0">
+              <a:rPr sz="1400" b="0">
                 <a:solidFill>
                   <a:srgbClr val="FFFFFF"/>
                 </a:solidFill>
-                <a:latin typeface="Arial"/>
-                <a:ea typeface="Arial"/>
-                <a:cs typeface="Arial"/>
+                <a:latin typeface="Play"/>
+                <a:ea typeface="Play"/>
+                <a:cs typeface="Play"/>
               </a:rPr>
-              <a:t>Вёрстка</a:t>
+              <a:t>План колоды</a:t>
             </a:r>
           </a:p>
         </p:txBody>
@@ -8015,8 +8389,8 @@
         </p:nvSpPr>
         <p:spPr>
           <a:xfrm>
-            <a:off x="7269076" y="4354494"/>
-            <a:ext cx="2066959" cy="1281514"/>
+            <a:off x="677387" y="4970791"/>
+            <a:ext cx="10855878" cy="361025"/>
           </a:xfrm>
           <a:prstGeom prst="chevron">
             <a:avLst/>
@@ -8047,25 +8421,25 @@
           <a:lstStyle/>
           <a:p>
             <a:pPr algn="ctr">
-              <a:defRPr sz="1300" b="0">
+              <a:defRPr sz="1400" b="0">
                 <a:solidFill>
                   <a:srgbClr val="FFFFFF"/>
                 </a:solidFill>
-                <a:latin typeface="Arial"/>
-                <a:ea typeface="Arial"/>
-                <a:cs typeface="Arial"/>
+                <a:latin typeface="Play"/>
+                <a:ea typeface="Play"/>
+                <a:cs typeface="Play"/>
               </a:defRPr>
             </a:pPr>
             <a:r>
-              <a:rPr sz="1300" b="0">
+              <a:rPr sz="1400" b="0">
                 <a:solidFill>
                   <a:srgbClr val="FFFFFF"/>
                 </a:solidFill>
-                <a:latin typeface="Arial"/>
-                <a:ea typeface="Arial"/>
-                <a:cs typeface="Arial"/>
+                <a:latin typeface="Play"/>
+                <a:ea typeface="Play"/>
+                <a:cs typeface="Play"/>
               </a:rPr>
-              <a:t>Аудит</a:t>
+              <a:t>Вёрстка</a:t>
             </a:r>
           </a:p>
         </p:txBody>
@@ -8078,8 +8452,8 @@
         </p:nvSpPr>
         <p:spPr>
           <a:xfrm>
-            <a:off x="9466305" y="4354494"/>
-            <a:ext cx="2066959" cy="1281514"/>
+            <a:off x="677387" y="5390588"/>
+            <a:ext cx="10855878" cy="361025"/>
           </a:xfrm>
           <a:prstGeom prst="chevron">
             <a:avLst/>
@@ -8110,23 +8484,86 @@
           <a:lstStyle/>
           <a:p>
             <a:pPr algn="ctr">
-              <a:defRPr sz="1165" b="0">
+              <a:defRPr sz="1400" b="0">
                 <a:solidFill>
                   <a:srgbClr val="FFFFFF"/>
                 </a:solidFill>
-                <a:latin typeface="Arial"/>
-                <a:ea typeface="Arial"/>
-                <a:cs typeface="Arial"/>
+                <a:latin typeface="Play"/>
+                <a:ea typeface="Play"/>
+                <a:cs typeface="Play"/>
               </a:defRPr>
             </a:pPr>
             <a:r>
-              <a:rPr sz="1165" b="0">
+              <a:rPr sz="1400" b="0">
                 <a:solidFill>
                   <a:srgbClr val="FFFFFF"/>
                 </a:solidFill>
-                <a:latin typeface="Arial"/>
-                <a:ea typeface="Arial"/>
-                <a:cs typeface="Arial"/>
+                <a:latin typeface="Play"/>
+                <a:ea typeface="Play"/>
+                <a:cs typeface="Play"/>
+              </a:rPr>
+              <a:t>Аудит</a:t>
+            </a:r>
+          </a:p>
+        </p:txBody>
+      </p:sp>
+      <p:sp>
+        <p:nvSpPr>
+          <p:cNvPr id="9" name="Chevron 8"/>
+          <p:cNvSpPr/>
+          <p:nvPr/>
+        </p:nvSpPr>
+        <p:spPr>
+          <a:xfrm>
+            <a:off x="677387" y="5810385"/>
+            <a:ext cx="10855878" cy="361025"/>
+          </a:xfrm>
+          <a:prstGeom prst="chevron">
+            <a:avLst/>
+          </a:prstGeom>
+          <a:solidFill>
+            <a:srgbClr val="0077FF"/>
+          </a:solidFill>
+          <a:ln>
+            <a:noFill/>
+          </a:ln>
+        </p:spPr>
+        <p:style>
+          <a:lnRef idx="1">
+            <a:schemeClr val="accent1"/>
+          </a:lnRef>
+          <a:fillRef idx="3">
+            <a:schemeClr val="accent1"/>
+          </a:fillRef>
+          <a:effectRef idx="2">
+            <a:schemeClr val="accent1"/>
+          </a:effectRef>
+          <a:fontRef idx="minor">
+            <a:schemeClr val="lt1"/>
+          </a:fontRef>
+        </p:style>
+        <p:txBody>
+          <a:bodyPr rtlCol="0" anchor="ctr" wrap="square" lIns="12700" rIns="12700" tIns="12700" bIns="12700"/>
+          <a:lstStyle/>
+          <a:p>
+            <a:pPr algn="ctr">
+              <a:defRPr sz="1400" b="0">
+                <a:solidFill>
+                  <a:srgbClr val="FFFFFF"/>
+                </a:solidFill>
+                <a:latin typeface="Play"/>
+                <a:ea typeface="Play"/>
+                <a:cs typeface="Play"/>
+              </a:defRPr>
+            </a:pPr>
+            <a:r>
+              <a:rPr sz="1400" b="0">
+                <a:solidFill>
+                  <a:srgbClr val="FFFFFF"/>
+                </a:solidFill>
+                <a:latin typeface="Play"/>
+                <a:ea typeface="Play"/>
+                <a:cs typeface="Play"/>
               </a:rPr>
               <a:t>Экспорт</a:t>
             </a:r>
@@ -8167,7 +8604,7 @@
         <p:spPr>
           <a:xfrm>
             <a:off x="677387" y="692177"/>
-            <a:ext cx="10855878" cy="1447800"/>
+            <a:ext cx="10855878" cy="822960"/>
           </a:xfrm>
           <a:prstGeom prst="rect">
             <a:avLst/>
@@ -8202,7 +8639,7 @@
                 <a:ea typeface="Arial"/>
                 <a:cs typeface="Arial"/>
               </a:rPr>
-              <a:t>Пилот сократил время сборки до 4 минут</a:t>
+              <a:t>Ожидаемый эффект</a:t>
             </a:r>
           </a:p>
         </p:txBody>
@@ -8215,8 +8652,8 @@
         </p:nvSpPr>
         <p:spPr>
           <a:xfrm>
-            <a:off x="677387" y="2277137"/>
-            <a:ext cx="10855878" cy="1341120"/>
+            <a:off x="677387" y="1773204"/>
+            <a:ext cx="10855878" cy="1737360"/>
           </a:xfrm>
           <a:prstGeom prst="rect">
             <a:avLst/>
@@ -8237,9 +8674,9 @@
                 <a:solidFill>
                   <a:srgbClr val="000000"/>
                 </a:solidFill>
-                <a:latin typeface="Arial"/>
-                <a:ea typeface="Arial"/>
-                <a:cs typeface="Arial"/>
+                <a:latin typeface="Play"/>
+                <a:ea typeface="Play"/>
+                <a:cs typeface="Play"/>
               </a:defRPr>
             </a:pPr>
             <a:r>
@@ -8247,11 +8684,11 @@
                 <a:solidFill>
                   <a:srgbClr val="000000"/>
                 </a:solidFill>
-                <a:latin typeface="Arial"/>
-                <a:ea typeface="Arial"/>
-                <a:cs typeface="Arial"/>
+                <a:latin typeface="Play"/>
+                <a:ea typeface="Play"/>
+                <a:cs typeface="Play"/>
               </a:rPr>
-              <a:t>• Среднее время 4 минуты вместо 186</a:t>
+              <a:t>• Средняя сборка колоды 4 минуты вместо 186</a:t>
             </a:r>
           </a:p>
           <a:p>
@@ -8263,9 +8700,9 @@
                 <a:solidFill>
                   <a:srgbClr val="000000"/>
                 </a:solidFill>
-                <a:latin typeface="Arial"/>
-                <a:ea typeface="Arial"/>
-                <a:cs typeface="Arial"/>
+                <a:latin typeface="Play"/>
+                <a:ea typeface="Play"/>
+                <a:cs typeface="Play"/>
               </a:defRPr>
             </a:pPr>
             <a:r>
@@ -8273,11 +8710,11 @@
                 <a:solidFill>
                   <a:srgbClr val="000000"/>
                 </a:solidFill>
-                <a:latin typeface="Arial"/>
-                <a:ea typeface="Arial"/>
-                <a:cs typeface="Arial"/>
+                <a:latin typeface="Play"/>
+                <a:ea typeface="Play"/>
+                <a:cs typeface="Play"/>
               </a:rPr>
-              <a:t>• Срок до первой версии сократился с 6 дней до 1</a:t>
+              <a:t>• Время до первой версии сократилось с 6 дней до 1</a:t>
             </a:r>
           </a:p>
           <a:p>
@@ -8289,9 +8726,9 @@
                 <a:solidFill>
                   <a:srgbClr val="000000"/>
                 </a:solidFill>
-                <a:latin typeface="Arial"/>
-                <a:ea typeface="Arial"/>
-                <a:cs typeface="Arial"/>
+                <a:latin typeface="Play"/>
+                <a:ea typeface="Play"/>
+                <a:cs typeface="Play"/>
               </a:defRPr>
             </a:pPr>
             <a:r>
@@ -8299,11 +8736,37 @@
                 <a:solidFill>
                   <a:srgbClr val="000000"/>
                 </a:solidFill>
-                <a:latin typeface="Arial"/>
-                <a:ea typeface="Arial"/>
-                <a:cs typeface="Arial"/>
+                <a:latin typeface="Play"/>
+                <a:ea typeface="Play"/>
+                <a:cs typeface="Play"/>
               </a:rPr>
-              <a:t>• Нарушений стиля 2 из 68</a:t>
+              <a:t>• Нарушения фирменного стиля снизились до 2 из 68</a:t>
+            </a:r>
+          </a:p>
+          <a:p>
+            <a:pPr algn="l">
+              <a:spcAft>
+                <a:spcPts val="300"/>
+              </a:spcAft>
+              <a:defRPr sz="1600">
+                <a:solidFill>
+                  <a:srgbClr val="000000"/>
+                </a:solidFill>
+                <a:latin typeface="Play"/>
+                <a:ea typeface="Play"/>
+                <a:cs typeface="Play"/>
+              </a:defRPr>
+            </a:pPr>
+            <a:r>
+              <a:rPr sz="1600">
+                <a:solidFill>
+                  <a:srgbClr val="000000"/>
+                </a:solidFill>
+                <a:latin typeface="Play"/>
+                <a:ea typeface="Play"/>
+                <a:cs typeface="Play"/>
+              </a:rPr>
+              <a:t>• Дизайнеры закрыли 38 запросов вместо 11 в неделю</a:t>
             </a:r>
           </a:p>
         </p:txBody>
@@ -8317,8 +8780,8 @@
           <p:nvPr/>
         </p:nvGraphicFramePr>
         <p:xfrm>
-          <a:off x="677387" y="3789707"/>
-          <a:ext cx="10855878" cy="2411089"/>
+          <a:off x="677387" y="3682014"/>
+          <a:ext cx="10855878" cy="2518783"/>
         </p:xfrm>
         <a:graphic>
           <a:graphicData uri="http://schemas.openxmlformats.org/drawingml/2006/chart">
@@ -8335,6 +8798,614 @@
 </file>
 
 <file path=ppt/slides/slide60.xml><?xml version="1.0" encoding="utf-8"?>
+<p:sld xmlns:a="http://schemas.openxmlformats.org/drawingml/2006/main" xmlns:p="http://schemas.openxmlformats.org/presentationml/2006/main" xmlns:r="http://schemas.openxmlformats.org/officeDocument/2006/relationships">
+  <p:cSld>
+    <p:spTree>
+      <p:nvGrpSpPr>
+        <p:cNvPr id="1" name=""/>
+        <p:cNvGrpSpPr/>
+        <p:nvPr/>
+      </p:nvGrpSpPr>
+      <p:grpSpPr/>
+      <p:cxnSp>
+        <p:nvCxnSpPr>
+          <p:cNvPr id="918" name="Google Shape;918;p74"/>
+          <p:cNvCxnSpPr/>
+          <p:nvPr/>
+        </p:nvCxnSpPr>
+        <p:spPr>
+          <a:xfrm rot="10800000">
+            <a:off x="658813" y="2199500"/>
+            <a:ext cx="11533187" cy="0"/>
+          </a:xfrm>
+          <a:prstGeom prst="straightConnector1">
+            <a:avLst/>
+          </a:prstGeom>
+          <a:noFill/>
+          <a:ln cap="flat" cmpd="sng" w="19050">
+            <a:solidFill>
+              <a:schemeClr val="accent4"/>
+            </a:solidFill>
+            <a:prstDash val="solid"/>
+            <a:miter lim="8000"/>
+            <a:headEnd len="sm" w="sm" type="none"/>
+            <a:tailEnd len="sm" w="sm" type="none"/>
+          </a:ln>
+        </p:spPr>
+      </p:cxnSp>
+      <p:cxnSp>
+        <p:nvCxnSpPr>
+          <p:cNvPr id="919" name="Google Shape;919;p74"/>
+          <p:cNvCxnSpPr/>
+          <p:nvPr/>
+        </p:nvCxnSpPr>
+        <p:spPr>
+          <a:xfrm flipH="1">
+            <a:off x="1" y="4351265"/>
+            <a:ext cx="8112124" cy="42098"/>
+          </a:xfrm>
+          <a:prstGeom prst="straightConnector1">
+            <a:avLst/>
+          </a:prstGeom>
+          <a:noFill/>
+          <a:ln cap="flat" cmpd="sng" w="19050">
+            <a:solidFill>
+              <a:schemeClr val="accent4"/>
+            </a:solidFill>
+            <a:prstDash val="solid"/>
+            <a:miter lim="8000"/>
+            <a:headEnd len="lg" w="lg" type="stealth"/>
+            <a:tailEnd len="sm" w="sm" type="none"/>
+          </a:ln>
+        </p:spPr>
+      </p:cxnSp>
+      <p:sp>
+        <p:nvSpPr>
+          <p:cNvPr id="920" name="title"/>
+          <p:cNvSpPr txBox="1"/>
+          <p:nvPr/>
+        </p:nvSpPr>
+        <p:spPr>
+          <a:xfrm>
+            <a:off x="677387" y="692177"/>
+            <a:ext cx="10855878" cy="822960"/>
+          </a:xfrm>
+          <a:prstGeom prst="rect">
+            <a:avLst/>
+          </a:prstGeom>
+          <a:noFill/>
+        </p:spPr>
+        <p:txBody>
+          <a:bodyPr wrap="square" lIns="76200" rIns="76200" tIns="50800" bIns="50800">
+            <a:spAutoFit/>
+          </a:bodyPr>
+          <a:lstStyle/>
+          <a:p>
+            <a:pPr algn="l">
+              <a:spcAft>
+                <a:spcPts val="300"/>
+              </a:spcAft>
+              <a:defRPr sz="4000">
+                <a:solidFill>
+                  <a:srgbClr val="000000"/>
+                </a:solidFill>
+                <a:latin typeface="Arial"/>
+                <a:ea typeface="Arial"/>
+                <a:cs typeface="Arial"/>
+              </a:defRPr>
+            </a:pPr>
+            <a:r>
+              <a:rPr sz="4000">
+                <a:solidFill>
+                  <a:srgbClr val="000000"/>
+                </a:solidFill>
+                <a:latin typeface="Arial"/>
+                <a:ea typeface="Arial"/>
+                <a:cs typeface="Arial"/>
+              </a:rPr>
+              <a:t>Ресурсы и сроки</a:t>
+            </a:r>
+          </a:p>
+        </p:txBody>
+      </p:sp>
+      <p:sp>
+        <p:nvSpPr>
+          <p:cNvPr id="921" name="body"/>
+          <p:cNvSpPr txBox="1"/>
+          <p:nvPr/>
+        </p:nvSpPr>
+        <p:spPr>
+          <a:xfrm>
+            <a:off x="677387" y="2200937"/>
+            <a:ext cx="10855878" cy="1296670"/>
+          </a:xfrm>
+          <a:prstGeom prst="rect">
+            <a:avLst/>
+          </a:prstGeom>
+          <a:noFill/>
+        </p:spPr>
+        <p:txBody>
+          <a:bodyPr wrap="square" lIns="76200" rIns="76200" tIns="50800" bIns="50800">
+            <a:spAutoFit/>
+          </a:bodyPr>
+          <a:lstStyle/>
+          <a:p>
+            <a:pPr algn="l">
+              <a:spcAft>
+                <a:spcPts val="300"/>
+              </a:spcAft>
+              <a:defRPr sz="1200">
+                <a:solidFill>
+                  <a:srgbClr val="000000"/>
+                </a:solidFill>
+                <a:latin typeface="Play"/>
+                <a:ea typeface="Play"/>
+                <a:cs typeface="Play"/>
+              </a:defRPr>
+            </a:pPr>
+            <a:r>
+              <a:rPr sz="1200">
+                <a:solidFill>
+                  <a:srgbClr val="000000"/>
+                </a:solidFill>
+                <a:latin typeface="Play"/>
+                <a:ea typeface="Play"/>
+                <a:cs typeface="Play"/>
+              </a:rPr>
+              <a:t>• 2 vCPU / 2 ГБ RAM</a:t>
+            </a:r>
+          </a:p>
+          <a:p>
+            <a:pPr algn="l">
+              <a:spcAft>
+                <a:spcPts val="300"/>
+              </a:spcAft>
+              <a:defRPr sz="1200">
+                <a:solidFill>
+                  <a:srgbClr val="000000"/>
+                </a:solidFill>
+                <a:latin typeface="Play"/>
+                <a:ea typeface="Play"/>
+                <a:cs typeface="Play"/>
+              </a:defRPr>
+            </a:pPr>
+            <a:r>
+              <a:rPr sz="1200">
+                <a:solidFill>
+                  <a:srgbClr val="000000"/>
+                </a:solidFill>
+                <a:latin typeface="Play"/>
+                <a:ea typeface="Play"/>
+                <a:cs typeface="Play"/>
+              </a:rPr>
+              <a:t>• gpt-oss-20b подключен протоколу</a:t>
+            </a:r>
+          </a:p>
+          <a:p>
+            <a:pPr algn="l">
+              <a:spcAft>
+                <a:spcPts val="300"/>
+              </a:spcAft>
+              <a:defRPr sz="1200">
+                <a:solidFill>
+                  <a:srgbClr val="000000"/>
+                </a:solidFill>
+                <a:latin typeface="Play"/>
+                <a:ea typeface="Play"/>
+                <a:cs typeface="Play"/>
+              </a:defRPr>
+            </a:pPr>
+            <a:r>
+              <a:rPr sz="1200">
+                <a:solidFill>
+                  <a:srgbClr val="000000"/>
+                </a:solidFill>
+                <a:latin typeface="Play"/>
+                <a:ea typeface="Play"/>
+                <a:cs typeface="Play"/>
+              </a:rPr>
+              <a:t>• Инференс 6 недель 1 400 руб.</a:t>
+            </a:r>
+          </a:p>
+          <a:p>
+            <a:pPr algn="l">
+              <a:spcAft>
+                <a:spcPts val="300"/>
+              </a:spcAft>
+              <a:defRPr sz="1200">
+                <a:solidFill>
+                  <a:srgbClr val="000000"/>
+                </a:solidFill>
+                <a:latin typeface="Play"/>
+                <a:ea typeface="Play"/>
+                <a:cs typeface="Play"/>
+              </a:defRPr>
+            </a:pPr>
+            <a:r>
+              <a:rPr sz="1200">
+                <a:solidFill>
+                  <a:srgbClr val="000000"/>
+                </a:solidFill>
+                <a:latin typeface="Play"/>
+                <a:ea typeface="Play"/>
+                <a:cs typeface="Play"/>
+              </a:rPr>
+              <a:t>• Квартал 2026: 4 команды, домен, HTTPS</a:t>
+            </a:r>
+          </a:p>
+          <a:p>
+            <a:pPr algn="l">
+              <a:spcAft>
+                <a:spcPts val="300"/>
+              </a:spcAft>
+              <a:defRPr sz="1200">
+                <a:solidFill>
+                  <a:srgbClr val="000000"/>
+                </a:solidFill>
+                <a:latin typeface="Play"/>
+                <a:ea typeface="Play"/>
+                <a:cs typeface="Play"/>
+              </a:defRPr>
+            </a:pPr>
+            <a:r>
+              <a:rPr sz="1200">
+                <a:solidFill>
+                  <a:srgbClr val="000000"/>
+                </a:solidFill>
+                <a:latin typeface="Play"/>
+                <a:ea typeface="Play"/>
+                <a:cs typeface="Play"/>
+              </a:rPr>
+              <a:t>• Квартал 2026: доступ, интеграция хранилища</a:t>
+            </a:r>
+          </a:p>
+          <a:p>
+            <a:pPr algn="l">
+              <a:spcAft>
+                <a:spcPts val="300"/>
+              </a:spcAft>
+              <a:defRPr sz="1200">
+                <a:solidFill>
+                  <a:srgbClr val="000000"/>
+                </a:solidFill>
+                <a:latin typeface="Play"/>
+                <a:ea typeface="Play"/>
+                <a:cs typeface="Play"/>
+              </a:defRPr>
+            </a:pPr>
+            <a:r>
+              <a:rPr sz="1200">
+                <a:solidFill>
+                  <a:srgbClr val="000000"/>
+                </a:solidFill>
+                <a:latin typeface="Play"/>
+                <a:ea typeface="Play"/>
+                <a:cs typeface="Play"/>
+              </a:rPr>
+              <a:t>• 2027: генерация иллюстраций в стиле шаблона</a:t>
+            </a:r>
+          </a:p>
+        </p:txBody>
+      </p:sp>
+      <p:sp>
+        <p:nvSpPr>
+          <p:cNvPr id="922" name="Rectangle 921"/>
+          <p:cNvSpPr/>
+          <p:nvPr/>
+        </p:nvSpPr>
+        <p:spPr>
+          <a:xfrm>
+            <a:off x="677387" y="3747140"/>
+            <a:ext cx="10855878" cy="33562"/>
+          </a:xfrm>
+          <a:prstGeom prst="rect">
+            <a:avLst/>
+          </a:prstGeom>
+          <a:solidFill>
+            <a:srgbClr val="0077FF"/>
+          </a:solidFill>
+          <a:ln>
+            <a:noFill/>
+          </a:ln>
+        </p:spPr>
+        <p:style>
+          <a:lnRef idx="1">
+            <a:schemeClr val="accent1"/>
+          </a:lnRef>
+          <a:fillRef idx="3">
+            <a:schemeClr val="accent1"/>
+          </a:fillRef>
+          <a:effectRef idx="2">
+            <a:schemeClr val="accent1"/>
+          </a:effectRef>
+          <a:fontRef idx="minor">
+            <a:schemeClr val="lt1"/>
+          </a:fontRef>
+        </p:style>
+        <p:txBody>
+          <a:bodyPr rtlCol="0" anchor="ctr"/>
+          <a:lstStyle/>
+          <a:p>
+            <a:pPr algn="ctr"/>
+          </a:p>
+        </p:txBody>
+      </p:sp>
+      <p:sp>
+        <p:nvSpPr>
+          <p:cNvPr id="923" name="Oval 922"/>
+          <p:cNvSpPr/>
+          <p:nvPr/>
+        </p:nvSpPr>
+        <p:spPr>
+          <a:xfrm>
+            <a:off x="2363638" y="3640859"/>
+            <a:ext cx="246123" cy="246123"/>
+          </a:xfrm>
+          <a:prstGeom prst="ellipse">
+            <a:avLst/>
+          </a:prstGeom>
+          <a:solidFill>
+            <a:srgbClr val="0077FF"/>
+          </a:solidFill>
+          <a:ln>
+            <a:noFill/>
+          </a:ln>
+        </p:spPr>
+        <p:style>
+          <a:lnRef idx="1">
+            <a:schemeClr val="accent1"/>
+          </a:lnRef>
+          <a:fillRef idx="3">
+            <a:schemeClr val="accent1"/>
+          </a:fillRef>
+          <a:effectRef idx="2">
+            <a:schemeClr val="accent1"/>
+          </a:effectRef>
+          <a:fontRef idx="minor">
+            <a:schemeClr val="lt1"/>
+          </a:fontRef>
+        </p:style>
+        <p:txBody>
+          <a:bodyPr rtlCol="0" anchor="ctr"/>
+          <a:lstStyle/>
+          <a:p>
+            <a:pPr algn="ctr"/>
+          </a:p>
+        </p:txBody>
+      </p:sp>
+      <p:sp>
+        <p:nvSpPr>
+          <p:cNvPr id="924" name="TextBox 923"/>
+          <p:cNvSpPr txBox="1"/>
+          <p:nvPr/>
+        </p:nvSpPr>
+        <p:spPr>
+          <a:xfrm>
+            <a:off x="677387" y="3232518"/>
+            <a:ext cx="5427939" cy="425123"/>
+          </a:xfrm>
+          <a:prstGeom prst="rect">
+            <a:avLst/>
+          </a:prstGeom>
+          <a:noFill/>
+        </p:spPr>
+        <p:txBody>
+          <a:bodyPr wrap="square" lIns="12700" rIns="12700" tIns="12700" bIns="12700">
+            <a:spAutoFit/>
+          </a:bodyPr>
+          <a:lstStyle/>
+          <a:p>
+            <a:pPr algn="ctr">
+              <a:defRPr sz="1400" b="0">
+                <a:solidFill>
+                  <a:srgbClr val="000000"/>
+                </a:solidFill>
+                <a:latin typeface="Play"/>
+                <a:ea typeface="Play"/>
+                <a:cs typeface="Play"/>
+              </a:defRPr>
+            </a:pPr>
+            <a:r>
+              <a:rPr sz="1400" b="0">
+                <a:solidFill>
+                  <a:srgbClr val="000000"/>
+                </a:solidFill>
+                <a:latin typeface="Play"/>
+                <a:ea typeface="Play"/>
+                <a:cs typeface="Play"/>
+              </a:rPr>
+              <a:t>Третий квартал 2026</a:t>
+            </a:r>
+          </a:p>
+        </p:txBody>
+      </p:sp>
+      <p:sp>
+        <p:nvSpPr>
+          <p:cNvPr id="925" name="Oval 924"/>
+          <p:cNvSpPr/>
+          <p:nvPr/>
+        </p:nvSpPr>
+        <p:spPr>
+          <a:xfrm>
+            <a:off x="5982264" y="3640859"/>
+            <a:ext cx="246123" cy="246123"/>
+          </a:xfrm>
+          <a:prstGeom prst="ellipse">
+            <a:avLst/>
+          </a:prstGeom>
+          <a:solidFill>
+            <a:srgbClr val="0077FF"/>
+          </a:solidFill>
+          <a:ln>
+            <a:noFill/>
+          </a:ln>
+        </p:spPr>
+        <p:style>
+          <a:lnRef idx="1">
+            <a:schemeClr val="accent1"/>
+          </a:lnRef>
+          <a:fillRef idx="3">
+            <a:schemeClr val="accent1"/>
+          </a:fillRef>
+          <a:effectRef idx="2">
+            <a:schemeClr val="accent1"/>
+          </a:effectRef>
+          <a:fontRef idx="minor">
+            <a:schemeClr val="lt1"/>
+          </a:fontRef>
+        </p:style>
+        <p:txBody>
+          <a:bodyPr rtlCol="0" anchor="ctr"/>
+          <a:lstStyle/>
+          <a:p>
+            <a:pPr algn="ctr"/>
+          </a:p>
+        </p:txBody>
+      </p:sp>
+      <p:sp>
+        <p:nvSpPr>
+          <p:cNvPr id="926" name="TextBox 925"/>
+          <p:cNvSpPr txBox="1"/>
+          <p:nvPr/>
+        </p:nvSpPr>
+        <p:spPr>
+          <a:xfrm>
+            <a:off x="3391356" y="3993264"/>
+            <a:ext cx="5427939" cy="425123"/>
+          </a:xfrm>
+          <a:prstGeom prst="rect">
+            <a:avLst/>
+          </a:prstGeom>
+          <a:noFill/>
+        </p:spPr>
+        <p:txBody>
+          <a:bodyPr wrap="square" lIns="12700" rIns="12700" tIns="12700" bIns="12700">
+            <a:spAutoFit/>
+          </a:bodyPr>
+          <a:lstStyle/>
+          <a:p>
+            <a:pPr algn="ctr">
+              <a:defRPr sz="1400" b="0">
+                <a:solidFill>
+                  <a:srgbClr val="000000"/>
+                </a:solidFill>
+                <a:latin typeface="Play"/>
+                <a:ea typeface="Play"/>
+                <a:cs typeface="Play"/>
+              </a:defRPr>
+            </a:pPr>
+            <a:r>
+              <a:rPr sz="1400" b="0">
+                <a:solidFill>
+                  <a:srgbClr val="000000"/>
+                </a:solidFill>
+                <a:latin typeface="Play"/>
+                <a:ea typeface="Play"/>
+                <a:cs typeface="Play"/>
+              </a:rPr>
+              <a:t>Четвёртый квартал 2026</a:t>
+            </a:r>
+          </a:p>
+        </p:txBody>
+      </p:sp>
+      <p:sp>
+        <p:nvSpPr>
+          <p:cNvPr id="927" name="Oval 926"/>
+          <p:cNvSpPr/>
+          <p:nvPr/>
+        </p:nvSpPr>
+        <p:spPr>
+          <a:xfrm>
+            <a:off x="9600890" y="3640859"/>
+            <a:ext cx="246123" cy="246123"/>
+          </a:xfrm>
+          <a:prstGeom prst="ellipse">
+            <a:avLst/>
+          </a:prstGeom>
+          <a:solidFill>
+            <a:srgbClr val="0077FF"/>
+          </a:solidFill>
+          <a:ln>
+            <a:noFill/>
+          </a:ln>
+        </p:spPr>
+        <p:style>
+          <a:lnRef idx="1">
+            <a:schemeClr val="accent1"/>
+          </a:lnRef>
+          <a:fillRef idx="3">
+            <a:schemeClr val="accent1"/>
+          </a:fillRef>
+          <a:effectRef idx="2">
+            <a:schemeClr val="accent1"/>
+          </a:effectRef>
+          <a:fontRef idx="minor">
+            <a:schemeClr val="lt1"/>
+          </a:fontRef>
+        </p:style>
+        <p:txBody>
+          <a:bodyPr rtlCol="0" anchor="ctr"/>
+          <a:lstStyle/>
+          <a:p>
+            <a:pPr algn="ctr"/>
+          </a:p>
+        </p:txBody>
+      </p:sp>
+      <p:sp>
+        <p:nvSpPr>
+          <p:cNvPr id="928" name="TextBox 927"/>
+          <p:cNvSpPr txBox="1"/>
+          <p:nvPr/>
+        </p:nvSpPr>
+        <p:spPr>
+          <a:xfrm>
+            <a:off x="6105326" y="3232518"/>
+            <a:ext cx="5427939" cy="425123"/>
+          </a:xfrm>
+          <a:prstGeom prst="rect">
+            <a:avLst/>
+          </a:prstGeom>
+          <a:noFill/>
+        </p:spPr>
+        <p:txBody>
+          <a:bodyPr wrap="square" lIns="12700" rIns="12700" tIns="12700" bIns="12700">
+            <a:spAutoFit/>
+          </a:bodyPr>
+          <a:lstStyle/>
+          <a:p>
+            <a:pPr algn="ctr">
+              <a:defRPr sz="1400" b="0">
+                <a:solidFill>
+                  <a:srgbClr val="000000"/>
+                </a:solidFill>
+                <a:latin typeface="Play"/>
+                <a:ea typeface="Play"/>
+                <a:cs typeface="Play"/>
+              </a:defRPr>
+            </a:pPr>
+            <a:r>
+              <a:rPr sz="1400" b="0">
+                <a:solidFill>
+                  <a:srgbClr val="000000"/>
+                </a:solidFill>
+                <a:latin typeface="Play"/>
+                <a:ea typeface="Play"/>
+                <a:cs typeface="Play"/>
+              </a:rPr>
+              <a:t>Первый квартал 2027</a:t>
+            </a:r>
+          </a:p>
+        </p:txBody>
+      </p:sp>
+    </p:spTree>
+  </p:cSld>
+  <p:clrMapOvr>
+    <a:masterClrMapping/>
+  </p:clrMapOvr>
+</p:sld>
+</file>
+
+<file path=ppt/slides/slide61.xml><?xml version="1.0" encoding="utf-8"?>
 <p:sld xmlns:a="http://schemas.openxmlformats.org/drawingml/2006/main" xmlns:p="http://schemas.openxmlformats.org/presentationml/2006/main" xmlns:r="http://schemas.openxmlformats.org/officeDocument/2006/relationships">
   <p:cSld>
     <p:bg>
@@ -8498,7 +9569,7 @@
         <p:spPr>
           <a:xfrm>
             <a:off x="677387" y="692177"/>
-            <a:ext cx="10855878" cy="1447800"/>
+            <a:ext cx="10855878" cy="822960"/>
           </a:xfrm>
           <a:prstGeom prst="rect">
             <a:avLst/>
@@ -8533,7 +9604,7 @@
                 <a:ea typeface="Arial"/>
                 <a:cs typeface="Arial"/>
               </a:rPr>
-              <a:t>Для запуска требуется 2 vCPU, 2 ГБ RAM и 1 400 руб. за инференс</a:t>
+              <a:t>План пилота</a:t>
             </a:r>
           </a:p>
         </p:txBody>
@@ -8564,25 +9635,25 @@
               <a:spcAft>
                 <a:spcPts val="300"/>
               </a:spcAft>
-              <a:defRPr sz="2000" b="0">
+              <a:defRPr sz="1800" b="0">
                 <a:solidFill>
                   <a:srgbClr val="000000"/>
                 </a:solidFill>
-                <a:latin typeface="Arial"/>
-                <a:ea typeface="Arial"/>
-                <a:cs typeface="Arial"/>
+                <a:latin typeface="Play"/>
+                <a:ea typeface="Play"/>
+                <a:cs typeface="Play"/>
               </a:defRPr>
             </a:pPr>
             <a:r>
-              <a:rPr sz="2000" b="0">
+              <a:rPr sz="1800" b="0">
                 <a:solidFill>
                   <a:srgbClr val="000000"/>
                 </a:solidFill>
-                <a:latin typeface="Arial"/>
-                <a:ea typeface="Arial"/>
-                <a:cs typeface="Arial"/>
+                <a:latin typeface="Play"/>
+                <a:ea typeface="Play"/>
+                <a:cs typeface="Play"/>
               </a:rPr>
-              <a:t>Сервис работает на одной машине</a:t>
+              <a:t>Пилот шёл 6 недель на двух командах</a:t>
             </a:r>
           </a:p>
         </p:txBody>
@@ -8613,25 +9684,25 @@
               <a:spcAft>
                 <a:spcPts val="300"/>
               </a:spcAft>
-              <a:defRPr sz="1600" b="0">
+              <a:defRPr sz="2400" b="0">
                 <a:solidFill>
                   <a:srgbClr val="000000"/>
                 </a:solidFill>
-                <a:latin typeface="Arial"/>
-                <a:ea typeface="Arial"/>
-                <a:cs typeface="Arial"/>
+                <a:latin typeface="Play"/>
+                <a:ea typeface="Play"/>
+                <a:cs typeface="Play"/>
               </a:defRPr>
             </a:pPr>
             <a:r>
-              <a:rPr sz="1600" b="0">
+              <a:rPr sz="2400" b="0">
                 <a:solidFill>
                   <a:srgbClr val="000000"/>
                 </a:solidFill>
-                <a:latin typeface="Arial"/>
-                <a:ea typeface="Arial"/>
-                <a:cs typeface="Arial"/>
+                <a:latin typeface="Play"/>
+                <a:ea typeface="Play"/>
+                <a:cs typeface="Play"/>
               </a:rPr>
-              <a:t>Модель gpt-oss-20b подключается по OpenAI</a:t>
+              <a:t>Собрано 68 презентаций</a:t>
             </a:r>
           </a:p>
         </p:txBody>
@@ -8662,489 +9733,25 @@
               <a:spcAft>
                 <a:spcPts val="300"/>
               </a:spcAft>
-              <a:defRPr sz="2000" b="0">
+              <a:defRPr sz="1800" b="0">
                 <a:solidFill>
                   <a:srgbClr val="000000"/>
                 </a:solidFill>
-                <a:latin typeface="Arial"/>
-                <a:ea typeface="Arial"/>
-                <a:cs typeface="Arial"/>
+                <a:latin typeface="Play"/>
+                <a:ea typeface="Play"/>
+                <a:cs typeface="Play"/>
               </a:defRPr>
             </a:pPr>
             <a:r>
-              <a:rPr sz="2000" b="0">
+              <a:rPr sz="1800" b="0">
                 <a:solidFill>
                   <a:srgbClr val="000000"/>
                 </a:solidFill>
-                <a:latin typeface="Arial"/>
-                <a:ea typeface="Arial"/>
-                <a:cs typeface="Arial"/>
+                <a:latin typeface="Play"/>
+                <a:ea typeface="Play"/>
+                <a:cs typeface="Play"/>
               </a:rPr>
-              <a:t>План запуска: Q3 2026 подключить 4 команды</a:t>
-            </a:r>
-          </a:p>
-        </p:txBody>
-      </p:sp>
-    </p:spTree>
-  </p:cSld>
-  <p:clrMapOvr>
-    <a:masterClrMapping/>
-  </p:clrMapOvr>
-</p:sld>
-</file>
-
-<file path=ppt/slides/slide61.xml><?xml version="1.0" encoding="utf-8"?>
-<p:sld xmlns:a="http://schemas.openxmlformats.org/drawingml/2006/main" xmlns:p="http://schemas.openxmlformats.org/presentationml/2006/main" xmlns:r="http://schemas.openxmlformats.org/officeDocument/2006/relationships">
-  <p:cSld>
-    <p:bg>
-      <p:bgPr>
-        <a:solidFill>
-          <a:schemeClr val="lt2"/>
-        </a:solidFill>
-      </p:bgPr>
-    </p:bg>
-    <p:spTree>
-      <p:nvGrpSpPr>
-        <p:cNvPr id="1" name=""/>
-        <p:cNvGrpSpPr/>
-        <p:nvPr/>
-      </p:nvGrpSpPr>
-      <p:grpSpPr/>
-      <p:pic>
-        <p:nvPicPr>
-          <p:cNvPr id="762" name="Google Shape;762;p58"/>
-          <p:cNvPicPr preferRelativeResize="0"/>
-          <p:nvPr/>
-        </p:nvPicPr>
-        <p:blipFill rotWithShape="1">
-          <a:blip r:embed="rId2">
-            <a:alphaModFix/>
-          </a:blip>
-          <a:srcRect b="0" l="0" r="0" t="0"/>
-          <a:stretch/>
-        </p:blipFill>
-        <p:spPr>
-          <a:xfrm>
-            <a:off x="8105070" y="2562300"/>
-            <a:ext cx="866700" cy="866700"/>
-          </a:xfrm>
-          <a:prstGeom prst="rect">
-            <a:avLst/>
-          </a:prstGeom>
-          <a:noFill/>
-          <a:ln>
-            <a:noFill/>
-          </a:ln>
-        </p:spPr>
-      </p:pic>
-      <p:sp>
-        <p:nvSpPr>
-          <p:cNvPr id="764" name="Google Shape;764;p58"/>
-          <p:cNvSpPr txBox="1"/>
-          <p:nvPr/>
-        </p:nvSpPr>
-        <p:spPr>
-          <a:xfrm>
-            <a:off x="18692059" y="4674436"/>
-            <a:ext cx="4304330" cy="678198"/>
-          </a:xfrm>
-          <a:prstGeom prst="rect">
-            <a:avLst/>
-          </a:prstGeom>
-          <a:noFill/>
-          <a:ln>
-            <a:noFill/>
-          </a:ln>
-        </p:spPr>
-        <p:txBody>
-          <a:bodyPr anchorCtr="0" anchor="t" bIns="45700" lIns="91425" spcFirstLastPara="1" rIns="91425" wrap="square" tIns="45700">
-            <a:noAutofit/>
-          </a:bodyPr>
-          <a:lstStyle/>
-          <a:p>
-            <a:pPr indent="0" lvl="0" marL="0" marR="0" rtl="0" algn="l">
-              <a:lnSpc>
-                <a:spcPct val="110000"/>
-              </a:lnSpc>
-              <a:spcBef>
-                <a:spcPts val="0"/>
-              </a:spcBef>
-              <a:spcAft>
-                <a:spcPts val="0"/>
-              </a:spcAft>
-              <a:buClr>
-                <a:schemeClr val="dk1"/>
-              </a:buClr>
-              <a:buSzPts val="1600"/>
-              <a:buFont typeface="Arial"/>
-              <a:buNone/>
-            </a:pPr>
-            <a:r>
-              <a:t/>
-            </a:r>
-            <a:endParaRPr sz="1600">
-              <a:solidFill>
-                <a:schemeClr val="dk1"/>
-              </a:solidFill>
-              <a:latin typeface="Arial"/>
-              <a:ea typeface="Arial"/>
-              <a:cs typeface="Arial"/>
-              <a:sym typeface="Arial"/>
-            </a:endParaRPr>
-          </a:p>
-        </p:txBody>
-      </p:sp>
-      <p:sp>
-        <p:nvSpPr>
-          <p:cNvPr id="768" name="Google Shape;768;p58"/>
-          <p:cNvSpPr/>
-          <p:nvPr/>
-        </p:nvSpPr>
-        <p:spPr>
-          <a:xfrm>
-            <a:off x="671513" y="2562300"/>
-            <a:ext cx="866700" cy="866700"/>
-          </a:xfrm>
-          <a:prstGeom prst="ellipse">
-            <a:avLst/>
-          </a:prstGeom>
-          <a:solidFill>
-            <a:schemeClr val="accent1"/>
-          </a:solidFill>
-          <a:ln>
-            <a:noFill/>
-          </a:ln>
-        </p:spPr>
-        <p:txBody>
-          <a:bodyPr anchorCtr="0" anchor="ctr" bIns="45700" lIns="91425" spcFirstLastPara="1" rIns="91425" wrap="square" tIns="45700">
-            <a:noAutofit/>
-          </a:bodyPr>
-          <a:lstStyle/>
-          <a:p>
-            <a:pPr indent="0" lvl="0" marL="0" marR="0" rtl="0" algn="ctr">
-              <a:spcBef>
-                <a:spcPts val="0"/>
-              </a:spcBef>
-              <a:spcAft>
-                <a:spcPts val="0"/>
-              </a:spcAft>
-              <a:buNone/>
-            </a:pPr>
-            <a:r>
-              <a:t/>
-            </a:r>
-            <a:endParaRPr sz="3200">
-              <a:solidFill>
-                <a:schemeClr val="lt1"/>
-              </a:solidFill>
-              <a:latin typeface="Play"/>
-              <a:ea typeface="Play"/>
-              <a:cs typeface="Play"/>
-              <a:sym typeface="Play"/>
-            </a:endParaRPr>
-          </a:p>
-        </p:txBody>
-      </p:sp>
-      <p:pic>
-        <p:nvPicPr>
-          <p:cNvPr id="769" name="Google Shape;769;p58"/>
-          <p:cNvPicPr preferRelativeResize="0"/>
-          <p:nvPr/>
-        </p:nvPicPr>
-        <p:blipFill rotWithShape="1">
-          <a:blip r:embed="rId3">
-            <a:alphaModFix/>
-          </a:blip>
-          <a:srcRect b="0" l="0" r="0" t="0"/>
-          <a:stretch/>
-        </p:blipFill>
-        <p:spPr>
-          <a:xfrm>
-            <a:off x="879438" y="2770225"/>
-            <a:ext cx="450850" cy="450850"/>
-          </a:xfrm>
-          <a:prstGeom prst="rect">
-            <a:avLst/>
-          </a:prstGeom>
-          <a:noFill/>
-          <a:ln>
-            <a:noFill/>
-          </a:ln>
-        </p:spPr>
-      </p:pic>
-      <p:pic>
-        <p:nvPicPr>
-          <p:cNvPr id="770" name="Google Shape;770;p58"/>
-          <p:cNvPicPr preferRelativeResize="0"/>
-          <p:nvPr/>
-        </p:nvPicPr>
-        <p:blipFill rotWithShape="1">
-          <a:blip r:embed="rId4">
-            <a:alphaModFix/>
-          </a:blip>
-          <a:srcRect b="0" l="0" r="0" t="0"/>
-          <a:stretch/>
-        </p:blipFill>
-        <p:spPr>
-          <a:xfrm>
-            <a:off x="8307349" y="2772418"/>
-            <a:ext cx="450851" cy="450851"/>
-          </a:xfrm>
-          <a:prstGeom prst="rect">
-            <a:avLst/>
-          </a:prstGeom>
-          <a:noFill/>
-          <a:ln>
-            <a:noFill/>
-          </a:ln>
-        </p:spPr>
-      </p:pic>
-      <p:pic>
-        <p:nvPicPr>
-          <p:cNvPr id="771" name="Google Shape;771;p58"/>
-          <p:cNvPicPr preferRelativeResize="0"/>
-          <p:nvPr/>
-        </p:nvPicPr>
-        <p:blipFill rotWithShape="1">
-          <a:blip r:embed="rId5">
-            <a:alphaModFix/>
-          </a:blip>
-          <a:srcRect b="0" l="0" r="0" t="0"/>
-          <a:stretch/>
-        </p:blipFill>
-        <p:spPr>
-          <a:xfrm>
-            <a:off x="4385469" y="2562300"/>
-            <a:ext cx="866700" cy="866700"/>
-          </a:xfrm>
-          <a:prstGeom prst="rect">
-            <a:avLst/>
-          </a:prstGeom>
-          <a:noFill/>
-          <a:ln>
-            <a:noFill/>
-          </a:ln>
-        </p:spPr>
-      </p:pic>
-      <p:pic>
-        <p:nvPicPr>
-          <p:cNvPr id="772" name="Google Shape;772;p58"/>
-          <p:cNvPicPr preferRelativeResize="0"/>
-          <p:nvPr/>
-        </p:nvPicPr>
-        <p:blipFill rotWithShape="1">
-          <a:blip r:embed="rId6">
-            <a:alphaModFix/>
-          </a:blip>
-          <a:srcRect b="0" l="0" r="0" t="0"/>
-          <a:stretch/>
-        </p:blipFill>
-        <p:spPr>
-          <a:xfrm>
-            <a:off x="4593394" y="2770225"/>
-            <a:ext cx="450850" cy="450850"/>
-          </a:xfrm>
-          <a:prstGeom prst="rect">
-            <a:avLst/>
-          </a:prstGeom>
-          <a:noFill/>
-          <a:ln>
-            <a:noFill/>
-          </a:ln>
-        </p:spPr>
-      </p:pic>
-      <p:sp>
-        <p:nvSpPr>
-          <p:cNvPr id="773" name="title"/>
-          <p:cNvSpPr txBox="1"/>
-          <p:nvPr/>
-        </p:nvSpPr>
-        <p:spPr>
-          <a:xfrm>
-            <a:off x="677387" y="692177"/>
-            <a:ext cx="10855878" cy="1447800"/>
-          </a:xfrm>
-          <a:prstGeom prst="rect">
-            <a:avLst/>
-          </a:prstGeom>
-          <a:noFill/>
-        </p:spPr>
-        <p:txBody>
-          <a:bodyPr wrap="square" lIns="76200" rIns="76200" tIns="50800" bIns="50800">
-            <a:spAutoFit/>
-          </a:bodyPr>
-          <a:lstStyle/>
-          <a:p>
-            <a:pPr algn="l">
-              <a:spcAft>
-                <a:spcPts val="300"/>
-              </a:spcAft>
-              <a:defRPr sz="4000">
-                <a:solidFill>
-                  <a:srgbClr val="000000"/>
-                </a:solidFill>
-                <a:latin typeface="Arial"/>
-                <a:ea typeface="Arial"/>
-                <a:cs typeface="Arial"/>
-              </a:defRPr>
-            </a:pPr>
-            <a:r>
-              <a:rPr sz="4000">
-                <a:solidFill>
-                  <a:srgbClr val="000000"/>
-                </a:solidFill>
-                <a:latin typeface="Arial"/>
-                <a:ea typeface="Arial"/>
-                <a:cs typeface="Arial"/>
-              </a:rPr>
-              <a:t>Пилот собрал 68 презентаций за 6 недель</a:t>
-            </a:r>
-          </a:p>
-        </p:txBody>
-      </p:sp>
-      <p:sp>
-        <p:nvSpPr>
-          <p:cNvPr id="774" name="card_0"/>
-          <p:cNvSpPr txBox="1"/>
-          <p:nvPr/>
-        </p:nvSpPr>
-        <p:spPr>
-          <a:xfrm>
-            <a:off x="806889" y="3928712"/>
-            <a:ext cx="2583926" cy="937548"/>
-          </a:xfrm>
-          <a:prstGeom prst="rect">
-            <a:avLst/>
-          </a:prstGeom>
-          <a:noFill/>
-        </p:spPr>
-        <p:txBody>
-          <a:bodyPr wrap="square" lIns="76200" rIns="76200" tIns="50800" bIns="50800">
-            <a:spAutoFit/>
-          </a:bodyPr>
-          <a:lstStyle/>
-          <a:p>
-            <a:pPr algn="l">
-              <a:spcAft>
-                <a:spcPts val="300"/>
-              </a:spcAft>
-              <a:defRPr sz="1700" b="0">
-                <a:solidFill>
-                  <a:srgbClr val="000000"/>
-                </a:solidFill>
-                <a:latin typeface="Arial"/>
-                <a:ea typeface="Arial"/>
-                <a:cs typeface="Arial"/>
-              </a:defRPr>
-            </a:pPr>
-            <a:r>
-              <a:rPr sz="1700" b="0">
-                <a:solidFill>
-                  <a:srgbClr val="000000"/>
-                </a:solidFill>
-                <a:latin typeface="Arial"/>
-                <a:ea typeface="Arial"/>
-                <a:cs typeface="Arial"/>
-              </a:rPr>
-              <a:t>Дизайнеры закрыли 38 запросов вместо 11</a:t>
-            </a:r>
-          </a:p>
-        </p:txBody>
-      </p:sp>
-      <p:sp>
-        <p:nvSpPr>
-          <p:cNvPr id="775" name="card_1"/>
-          <p:cNvSpPr txBox="1"/>
-          <p:nvPr/>
-        </p:nvSpPr>
-        <p:spPr>
-          <a:xfrm>
-            <a:off x="4533496" y="3922334"/>
-            <a:ext cx="2583926" cy="937548"/>
-          </a:xfrm>
-          <a:prstGeom prst="rect">
-            <a:avLst/>
-          </a:prstGeom>
-          <a:noFill/>
-        </p:spPr>
-        <p:txBody>
-          <a:bodyPr wrap="square" lIns="76200" rIns="76200" tIns="50800" bIns="50800">
-            <a:spAutoFit/>
-          </a:bodyPr>
-          <a:lstStyle/>
-          <a:p>
-            <a:pPr algn="l">
-              <a:spcAft>
-                <a:spcPts val="300"/>
-              </a:spcAft>
-              <a:defRPr sz="2400" b="0">
-                <a:solidFill>
-                  <a:srgbClr val="000000"/>
-                </a:solidFill>
-                <a:latin typeface="Arial"/>
-                <a:ea typeface="Arial"/>
-                <a:cs typeface="Arial"/>
-              </a:defRPr>
-            </a:pPr>
-            <a:r>
-              <a:rPr sz="2400" b="0">
-                <a:solidFill>
-                  <a:srgbClr val="000000"/>
-                </a:solidFill>
-                <a:latin typeface="Arial"/>
-                <a:ea typeface="Arial"/>
-                <a:cs typeface="Arial"/>
-              </a:rPr>
-              <a:t>Рутина вёрстки ушла в сервис</a:t>
-            </a:r>
-          </a:p>
-        </p:txBody>
-      </p:sp>
-      <p:sp>
-        <p:nvSpPr>
-          <p:cNvPr id="776" name="card_2"/>
-          <p:cNvSpPr txBox="1"/>
-          <p:nvPr/>
-        </p:nvSpPr>
-        <p:spPr>
-          <a:xfrm>
-            <a:off x="8264469" y="3926700"/>
-            <a:ext cx="2575194" cy="1160137"/>
-          </a:xfrm>
-          <a:prstGeom prst="rect">
-            <a:avLst/>
-          </a:prstGeom>
-          <a:noFill/>
-        </p:spPr>
-        <p:txBody>
-          <a:bodyPr wrap="square" lIns="76200" rIns="76200" tIns="50800" bIns="50800">
-            <a:spAutoFit/>
-          </a:bodyPr>
-          <a:lstStyle/>
-          <a:p>
-            <a:pPr algn="l">
-              <a:spcAft>
-                <a:spcPts val="300"/>
-              </a:spcAft>
-              <a:defRPr sz="2000" b="0">
-                <a:solidFill>
-                  <a:srgbClr val="000000"/>
-                </a:solidFill>
-                <a:latin typeface="Arial"/>
-                <a:ea typeface="Arial"/>
-                <a:cs typeface="Arial"/>
-              </a:defRPr>
-            </a:pPr>
-            <a:r>
-              <a:rPr sz="2000" b="0">
-                <a:solidFill>
-                  <a:srgbClr val="000000"/>
-                </a:solidFill>
-                <a:latin typeface="Arial"/>
-                <a:ea typeface="Arial"/>
-                <a:cs typeface="Arial"/>
-              </a:rPr>
-              <a:t>Нагрузка выше 20 задач требует внешней очереди</a:t>
+              <a:t>Средняя сборка колоды 4 минуты вместо 186</a:t>
             </a:r>
           </a:p>
         </p:txBody>
@@ -9174,235 +9781,16 @@
         <p:nvPr/>
       </p:nvGrpSpPr>
       <p:grpSpPr/>
-      <p:pic>
-        <p:nvPicPr>
-          <p:cNvPr id="778" name="Google Shape;778;p59"/>
-          <p:cNvPicPr preferRelativeResize="0"/>
-          <p:nvPr/>
-        </p:nvPicPr>
-        <p:blipFill rotWithShape="1">
-          <a:blip r:embed="rId2">
-            <a:alphaModFix/>
-          </a:blip>
-          <a:srcRect b="0" l="0" r="0" t="0"/>
-          <a:stretch/>
-        </p:blipFill>
-        <p:spPr>
-          <a:xfrm>
-            <a:off x="8099424" y="2562300"/>
-            <a:ext cx="866700" cy="866700"/>
-          </a:xfrm>
-          <a:prstGeom prst="rect">
-            <a:avLst/>
-          </a:prstGeom>
-          <a:noFill/>
-          <a:ln>
-            <a:noFill/>
-          </a:ln>
-        </p:spPr>
-      </p:pic>
-      <p:pic>
-        <p:nvPicPr>
-          <p:cNvPr id="779" name="Google Shape;779;p59"/>
-          <p:cNvPicPr preferRelativeResize="0"/>
-          <p:nvPr/>
-        </p:nvPicPr>
-        <p:blipFill rotWithShape="1">
-          <a:blip r:embed="rId3">
-            <a:alphaModFix/>
-          </a:blip>
-          <a:srcRect b="0" l="0" r="0" t="0"/>
-          <a:stretch/>
-        </p:blipFill>
-        <p:spPr>
-          <a:xfrm>
-            <a:off x="4385469" y="2562300"/>
-            <a:ext cx="866700" cy="866700"/>
-          </a:xfrm>
-          <a:prstGeom prst="rect">
-            <a:avLst/>
-          </a:prstGeom>
-          <a:noFill/>
-          <a:ln>
-            <a:noFill/>
-          </a:ln>
-        </p:spPr>
-      </p:pic>
-      <p:pic>
-        <p:nvPicPr>
-          <p:cNvPr id="780" name="Google Shape;780;p59"/>
-          <p:cNvPicPr preferRelativeResize="0"/>
-          <p:nvPr/>
-        </p:nvPicPr>
-        <p:blipFill rotWithShape="1">
-          <a:blip r:embed="rId5">
-            <a:alphaModFix/>
-          </a:blip>
-          <a:srcRect b="0" l="0" r="0" t="0"/>
-          <a:stretch/>
-        </p:blipFill>
-        <p:spPr>
-          <a:xfrm>
-            <a:off x="671513" y="2562300"/>
-            <a:ext cx="866700" cy="866700"/>
-          </a:xfrm>
-          <a:prstGeom prst="rect">
-            <a:avLst/>
-          </a:prstGeom>
-          <a:noFill/>
-          <a:ln>
-            <a:noFill/>
-          </a:ln>
-        </p:spPr>
-      </p:pic>
       <p:sp>
         <p:nvSpPr>
-          <p:cNvPr id="782" name="Google Shape;782;p59"/>
+          <p:cNvPr id="2" name="title"/>
           <p:cNvSpPr txBox="1"/>
           <p:nvPr/>
         </p:nvSpPr>
         <p:spPr>
           <a:xfrm>
-            <a:off x="18692059" y="4674436"/>
-            <a:ext cx="4304330" cy="678198"/>
-          </a:xfrm>
-          <a:prstGeom prst="rect">
-            <a:avLst/>
-          </a:prstGeom>
-          <a:noFill/>
-          <a:ln>
-            <a:noFill/>
-          </a:ln>
-        </p:spPr>
-        <p:txBody>
-          <a:bodyPr anchorCtr="0" anchor="t" bIns="45700" lIns="91425" spcFirstLastPara="1" rIns="91425" wrap="square" tIns="45700">
-            <a:noAutofit/>
-          </a:bodyPr>
-          <a:lstStyle/>
-          <a:p>
-            <a:pPr indent="0" lvl="0" marL="0" marR="0" rtl="0" algn="l">
-              <a:lnSpc>
-                <a:spcPct val="110000"/>
-              </a:lnSpc>
-              <a:spcBef>
-                <a:spcPts val="0"/>
-              </a:spcBef>
-              <a:spcAft>
-                <a:spcPts val="0"/>
-              </a:spcAft>
-              <a:buClr>
-                <a:schemeClr val="dk1"/>
-              </a:buClr>
-              <a:buSzPts val="1600"/>
-              <a:buFont typeface="Arial"/>
-              <a:buNone/>
-            </a:pPr>
-            <a:r>
-              <a:t/>
-            </a:r>
-            <a:endParaRPr sz="1600">
-              <a:solidFill>
-                <a:schemeClr val="dk1"/>
-              </a:solidFill>
-              <a:latin typeface="Arial"/>
-              <a:ea typeface="Arial"/>
-              <a:cs typeface="Arial"/>
-              <a:sym typeface="Arial"/>
-            </a:endParaRPr>
-          </a:p>
-        </p:txBody>
-      </p:sp>
-      <p:pic>
-        <p:nvPicPr>
-          <p:cNvPr id="783" name="Google Shape;783;p59"/>
-          <p:cNvPicPr preferRelativeResize="0"/>
-          <p:nvPr/>
-        </p:nvPicPr>
-        <p:blipFill rotWithShape="1">
-          <a:blip r:embed="rId6">
-            <a:alphaModFix/>
-          </a:blip>
-          <a:srcRect b="0" l="0" r="0" t="0"/>
-          <a:stretch/>
-        </p:blipFill>
-        <p:spPr>
-          <a:xfrm>
-            <a:off x="879438" y="2770225"/>
-            <a:ext cx="450850" cy="450850"/>
-          </a:xfrm>
-          <a:prstGeom prst="rect">
-            <a:avLst/>
-          </a:prstGeom>
-          <a:noFill/>
-          <a:ln>
-            <a:noFill/>
-          </a:ln>
-        </p:spPr>
-      </p:pic>
-      <p:pic>
-        <p:nvPicPr>
-          <p:cNvPr id="784" name="Google Shape;784;p59"/>
-          <p:cNvPicPr preferRelativeResize="0"/>
-          <p:nvPr/>
-        </p:nvPicPr>
-        <p:blipFill rotWithShape="1">
-          <a:blip r:embed="rId7">
-            <a:alphaModFix/>
-          </a:blip>
-          <a:srcRect b="0" l="0" r="0" t="0"/>
-          <a:stretch/>
-        </p:blipFill>
-        <p:spPr>
-          <a:xfrm>
-            <a:off x="8316973" y="2791669"/>
-            <a:ext cx="450851" cy="450851"/>
-          </a:xfrm>
-          <a:prstGeom prst="rect">
-            <a:avLst/>
-          </a:prstGeom>
-          <a:noFill/>
-          <a:ln>
-            <a:noFill/>
-          </a:ln>
-        </p:spPr>
-      </p:pic>
-      <p:pic>
-        <p:nvPicPr>
-          <p:cNvPr id="785" name="Google Shape;785;p59"/>
-          <p:cNvPicPr preferRelativeResize="0"/>
-          <p:nvPr/>
-        </p:nvPicPr>
-        <p:blipFill rotWithShape="1">
-          <a:blip r:embed="rId8">
-            <a:alphaModFix/>
-          </a:blip>
-          <a:srcRect b="0" l="0" r="0" t="0"/>
-          <a:stretch/>
-        </p:blipFill>
-        <p:spPr>
-          <a:xfrm>
-            <a:off x="4574144" y="2770225"/>
-            <a:ext cx="450850" cy="450850"/>
-          </a:xfrm>
-          <a:prstGeom prst="rect">
-            <a:avLst/>
-          </a:prstGeom>
-          <a:noFill/>
-          <a:ln>
-            <a:noFill/>
-          </a:ln>
-        </p:spPr>
-      </p:pic>
-      <p:sp>
-        <p:nvSpPr>
-          <p:cNvPr id="786" name="title"/>
-          <p:cNvSpPr txBox="1"/>
-          <p:nvPr/>
-        </p:nvSpPr>
-        <p:spPr>
-          <a:xfrm>
-            <a:off x="677387" y="692177"/>
-            <a:ext cx="10855878" cy="1447800"/>
+            <a:off x="677875" y="692177"/>
+            <a:ext cx="10855391" cy="822960"/>
           </a:xfrm>
           <a:prstGeom prst="rect">
             <a:avLst/>
@@ -9437,21 +9825,21 @@
                 <a:ea typeface="Arial"/>
                 <a:cs typeface="Arial"/>
               </a:rPr>
-              <a:t>Решение о запуске сервиса на всю компанию</a:t>
+              <a:t>Что мы просим решить</a:t>
             </a:r>
           </a:p>
         </p:txBody>
       </p:sp>
       <p:sp>
         <p:nvSpPr>
-          <p:cNvPr id="787" name="card_0"/>
+          <p:cNvPr id="3" name="body"/>
           <p:cNvSpPr txBox="1"/>
           <p:nvPr/>
         </p:nvSpPr>
         <p:spPr>
           <a:xfrm>
-            <a:off x="806889" y="3928712"/>
-            <a:ext cx="2583926" cy="937548"/>
+            <a:off x="677875" y="2804310"/>
+            <a:ext cx="10855391" cy="1422400"/>
           </a:xfrm>
           <a:prstGeom prst="rect">
             <a:avLst/>
@@ -9464,127 +9852,29 @@
           </a:bodyPr>
           <a:lstStyle/>
           <a:p>
-            <a:pPr algn="l">
+            <a:pPr algn="ctr">
               <a:spcAft>
                 <a:spcPts val="300"/>
               </a:spcAft>
-              <a:defRPr sz="1800" b="0">
+              <a:defRPr sz="4000">
                 <a:solidFill>
                   <a:srgbClr val="000000"/>
                 </a:solidFill>
-                <a:latin typeface="Arial"/>
-                <a:ea typeface="Arial"/>
-                <a:cs typeface="Arial"/>
+                <a:latin typeface="Play"/>
+                <a:ea typeface="Play"/>
+                <a:cs typeface="Play"/>
               </a:defRPr>
             </a:pPr>
             <a:r>
-              <a:rPr sz="1800" b="0">
+              <a:rPr sz="4000">
                 <a:solidFill>
                   <a:srgbClr val="000000"/>
                 </a:solidFill>
-                <a:latin typeface="Arial"/>
-                <a:ea typeface="Arial"/>
-                <a:cs typeface="Arial"/>
+                <a:latin typeface="Play"/>
+                <a:ea typeface="Play"/>
+                <a:cs typeface="Play"/>
               </a:rPr>
-              <a:t>Запрос одобрения на масштабирование</a:t>
-            </a:r>
-          </a:p>
-        </p:txBody>
-      </p:sp>
-      <p:sp>
-        <p:nvSpPr>
-          <p:cNvPr id="788" name="card_1"/>
-          <p:cNvSpPr txBox="1"/>
-          <p:nvPr/>
-        </p:nvSpPr>
-        <p:spPr>
-          <a:xfrm>
-            <a:off x="4533496" y="3922334"/>
-            <a:ext cx="2583926" cy="937548"/>
-          </a:xfrm>
-          <a:prstGeom prst="rect">
-            <a:avLst/>
-          </a:prstGeom>
-          <a:noFill/>
-        </p:spPr>
-        <p:txBody>
-          <a:bodyPr wrap="square" lIns="76200" rIns="76200" tIns="50800" bIns="50800">
-            <a:spAutoFit/>
-          </a:bodyPr>
-          <a:lstStyle/>
-          <a:p>
-            <a:pPr algn="l">
-              <a:spcAft>
-                <a:spcPts val="300"/>
-              </a:spcAft>
-              <a:defRPr sz="1800" b="0">
-                <a:solidFill>
-                  <a:srgbClr val="000000"/>
-                </a:solidFill>
-                <a:latin typeface="Arial"/>
-                <a:ea typeface="Arial"/>
-                <a:cs typeface="Arial"/>
-              </a:defRPr>
-            </a:pPr>
-            <a:r>
-              <a:rPr sz="1800" b="0">
-                <a:solidFill>
-                  <a:srgbClr val="000000"/>
-                </a:solidFill>
-                <a:latin typeface="Arial"/>
-                <a:ea typeface="Arial"/>
-                <a:cs typeface="Arial"/>
-              </a:rPr>
-              <a:t>Подключение к корпоративному хранилищу</a:t>
-            </a:r>
-          </a:p>
-        </p:txBody>
-      </p:sp>
-      <p:sp>
-        <p:nvSpPr>
-          <p:cNvPr id="789" name="card_2"/>
-          <p:cNvSpPr txBox="1"/>
-          <p:nvPr/>
-        </p:nvSpPr>
-        <p:spPr>
-          <a:xfrm>
-            <a:off x="8264469" y="3926700"/>
-            <a:ext cx="2575194" cy="1160137"/>
-          </a:xfrm>
-          <a:prstGeom prst="rect">
-            <a:avLst/>
-          </a:prstGeom>
-          <a:noFill/>
-        </p:spPr>
-        <p:txBody>
-          <a:bodyPr wrap="square" lIns="76200" rIns="76200" tIns="50800" bIns="50800">
-            <a:spAutoFit/>
-          </a:bodyPr>
-          <a:lstStyle/>
-          <a:p>
-            <a:pPr algn="l">
-              <a:spcAft>
-                <a:spcPts val="300"/>
-              </a:spcAft>
-              <a:defRPr sz="2400" b="0">
-                <a:solidFill>
-                  <a:srgbClr val="000000"/>
-                </a:solidFill>
-                <a:latin typeface="Arial"/>
-                <a:ea typeface="Arial"/>
-                <a:cs typeface="Arial"/>
-              </a:defRPr>
-            </a:pPr>
-            <a:r>
-              <a:rPr sz="2400" b="0">
-                <a:solidFill>
-                  <a:srgbClr val="000000"/>
-                </a:solidFill>
-                <a:latin typeface="Arial"/>
-                <a:ea typeface="Arial"/>
-                <a:cs typeface="Arial"/>
-              </a:rPr>
-              <a:t>Интеграция с доменом и HTTPS</a:t>
+              <a:t>Принять решение о запуске сервиса на всю компанию</a:t>
             </a:r>
           </a:p>
         </p:txBody>

--- a/samples/Шаблон_презентации_VK_Education__classic.pptx
+++ b/samples/Шаблон_презентации_VK_Education__classic.pptx
@@ -16,6 +16,9 @@
     <p:sldId id="315" r:id="rId68"/>
     <p:sldId id="316" r:id="rId69"/>
     <p:sldId id="317" r:id="rId70"/>
+    <p:sldId id="318" r:id="rId71"/>
+    <p:sldId id="319" r:id="rId72"/>
+    <p:sldId id="320" r:id="rId73"/>
   </p:sldIdLst>
   <p:sldSz cy="6858000" cx="12192000"/>
   <p:notesSz cx="6858000" cy="9144000"/>
@@ -276,7 +279,7 @@
               <c:strCache>
                 <c:ptCount val="1"/>
                 <c:pt idx="0">
-                  <c:v>До</c:v>
+                  <c:v>Время</c:v>
                 </c:pt>
               </c:strCache>
             </c:strRef>
@@ -293,102 +296,36 @@
           </c:spPr>
           <c:cat>
             <c:strRef>
-              <c:f>Sheet1!$A$2:$A$4</c:f>
+              <c:f>Sheet1!$A$2:$A$3</c:f>
               <c:strCache>
-                <c:ptCount val="3"/>
+                <c:ptCount val="2"/>
                 <c:pt idx="0">
-                  <c:v>Сборка колоды</c:v>
+                  <c:v>Сборка</c:v>
                 </c:pt>
                 <c:pt idx="1">
-                  <c:v>Время до первой версии</c:v>
-                </c:pt>
-                <c:pt idx="2">
-                  <c:v>Запросы/неделя</c:v>
+                  <c:v>Правки</c:v>
                 </c:pt>
               </c:strCache>
             </c:strRef>
           </c:cat>
           <c:val>
             <c:numRef>
-              <c:f>Sheet1!$B$2:$B$4</c:f>
+              <c:f>Sheet1!$B$2:$B$3</c:f>
               <c:numCache>
                 <c:formatCode>General</c:formatCode>
-                <c:ptCount val="3"/>
+                <c:ptCount val="2"/>
                 <c:pt idx="0">
                   <c:v>186.0</c:v>
                 </c:pt>
                 <c:pt idx="1">
-                  <c:v>6.0</c:v>
-                </c:pt>
-                <c:pt idx="2">
-                  <c:v>11.0</c:v>
-                </c:pt>
-              </c:numCache>
-            </c:numRef>
-          </c:val>
-        </c:ser>
-        <c:ser>
-          <c:idx val="1"/>
-          <c:order val="1"/>
-          <c:tx>
-            <c:strRef>
-              <c:f>Sheet1!$C$1</c:f>
-              <c:strCache>
-                <c:ptCount val="1"/>
-                <c:pt idx="0">
-                  <c:v>После</c:v>
-                </c:pt>
-              </c:strCache>
-            </c:strRef>
-          </c:tx>
-          <c:spPr>
-            <a:solidFill>
-              <a:srgbClr val="FF3885"/>
-            </a:solidFill>
-            <a:ln>
-              <a:solidFill>
-                <a:srgbClr val="FF3885"/>
-              </a:solidFill>
-            </a:ln>
-          </c:spPr>
-          <c:cat>
-            <c:strRef>
-              <c:f>Sheet1!$A$2:$A$4</c:f>
-              <c:strCache>
-                <c:ptCount val="3"/>
-                <c:pt idx="0">
-                  <c:v>Сборка колоды</c:v>
-                </c:pt>
-                <c:pt idx="1">
-                  <c:v>Время до первой версии</c:v>
-                </c:pt>
-                <c:pt idx="2">
-                  <c:v>Запросы/неделя</c:v>
-                </c:pt>
-              </c:strCache>
-            </c:strRef>
-          </c:cat>
-          <c:val>
-            <c:numRef>
-              <c:f>Sheet1!$C$2:$C$4</c:f>
-              <c:numCache>
-                <c:formatCode>General</c:formatCode>
-                <c:ptCount val="3"/>
-                <c:pt idx="0">
-                  <c:v>4.0</c:v>
-                </c:pt>
-                <c:pt idx="1">
-                  <c:v>1.0</c:v>
-                </c:pt>
-                <c:pt idx="2">
-                  <c:v>38.0</c:v>
+                  <c:v>74.0</c:v>
                 </c:pt>
               </c:numCache>
             </c:numRef>
           </c:val>
         </c:ser>
         <c:dLbls>
-          <c:numFmt formatCode="0&quot; единицы&quot;" sourceLinked="0"/>
+          <c:numFmt formatCode="0&quot; мин&quot;" sourceLinked="0"/>
           <c:txPr>
             <a:bodyPr wrap="none"/>
             <a:lstStyle/>
@@ -482,7 +419,7 @@
                   </a:defRPr>
                 </a:pPr>
                 <a:r>
-                  <a:t>единицы</a:t>
+                  <a:t>Время, мин</a:t>
                 </a:r>
               </a:p>
             </c:rich>
@@ -513,10 +450,220 @@
         <c:crosses val="autoZero"/>
       </c:valAx>
     </c:plotArea>
-    <c:legend>
-      <c:legendPos val="b"/>
-      <c:overlay val="0"/>
-    </c:legend>
+    <c:dispBlanksAs val="gap"/>
+  </c:chart>
+  <c:txPr>
+    <a:bodyPr/>
+    <a:lstStyle/>
+    <a:p>
+      <a:pPr>
+        <a:defRPr sz="1200" b="0">
+          <a:solidFill>
+            <a:srgbClr val="000000"/>
+          </a:solidFill>
+          <a:latin typeface="Play"/>
+          <a:ea typeface="Play"/>
+          <a:cs typeface="Play"/>
+        </a:defRPr>
+      </a:pPr>
+      <a:endParaRPr lang="en-US"/>
+    </a:p>
+  </c:txPr>
+  <c:externalData r:id="rId1">
+    <c:autoUpdate val="0"/>
+  </c:externalData>
+</c:chartSpace>
+</file>
+
+<file path=ppt/charts/chart2.xml><?xml version="1.0" encoding="utf-8"?>
+<c:chartSpace xmlns:c="http://schemas.openxmlformats.org/drawingml/2006/chart" xmlns:a="http://schemas.openxmlformats.org/drawingml/2006/main" xmlns:r="http://schemas.openxmlformats.org/officeDocument/2006/relationships">
+  <c:date1904 val="0"/>
+  <c:chart>
+    <c:autoTitleDeleted val="1"/>
+    <c:plotArea>
+      <c:barChart>
+        <c:barDir val="col"/>
+        <c:grouping val="clustered"/>
+        <c:ser>
+          <c:idx val="0"/>
+          <c:order val="0"/>
+          <c:tx>
+            <c:strRef>
+              <c:f>Sheet1!$B$1</c:f>
+              <c:strCache>
+                <c:ptCount val="1"/>
+                <c:pt idx="0">
+                  <c:v>Значения</c:v>
+                </c:pt>
+              </c:strCache>
+            </c:strRef>
+          </c:tx>
+          <c:spPr>
+            <a:solidFill>
+              <a:srgbClr val="0077FF"/>
+            </a:solidFill>
+            <a:ln>
+              <a:solidFill>
+                <a:srgbClr val="0077FF"/>
+              </a:solidFill>
+            </a:ln>
+          </c:spPr>
+          <c:cat>
+            <c:strRef>
+              <c:f>Sheet1!$A$2:$A$3</c:f>
+              <c:strCache>
+                <c:ptCount val="2"/>
+                <c:pt idx="0">
+                  <c:v>Сборка</c:v>
+                </c:pt>
+                <c:pt idx="1">
+                  <c:v>Запросы дизайнеров</c:v>
+                </c:pt>
+              </c:strCache>
+            </c:strRef>
+          </c:cat>
+          <c:val>
+            <c:numRef>
+              <c:f>Sheet1!$B$2:$B$3</c:f>
+              <c:numCache>
+                <c:formatCode>General</c:formatCode>
+                <c:ptCount val="2"/>
+                <c:pt idx="0">
+                  <c:v>4.0</c:v>
+                </c:pt>
+                <c:pt idx="1">
+                  <c:v>38.0</c:v>
+                </c:pt>
+              </c:numCache>
+            </c:numRef>
+          </c:val>
+        </c:ser>
+        <c:dLbls>
+          <c:numFmt formatCode="0&quot; значений&quot;" sourceLinked="0"/>
+          <c:txPr>
+            <a:bodyPr wrap="none"/>
+            <a:lstStyle/>
+            <a:p>
+              <a:pPr>
+                <a:defRPr sz="1100" b="0">
+                  <a:solidFill>
+                    <a:srgbClr val="000000"/>
+                  </a:solidFill>
+                  <a:latin typeface="Play"/>
+                  <a:ea typeface="Play"/>
+                  <a:cs typeface="Play"/>
+                </a:defRPr>
+              </a:pPr>
+            </a:p>
+          </c:txPr>
+          <c:dLblPos val="outEnd"/>
+          <c:showLegendKey val="0"/>
+          <c:showVal val="1"/>
+          <c:showCatName val="0"/>
+          <c:showSerName val="0"/>
+          <c:showPercent val="0"/>
+          <c:showBubbleSize val="0"/>
+          <c:showLeaderLines val="1"/>
+        </c:dLbls>
+        <c:gapWidth val="60"/>
+        <c:axId val="-2068027336"/>
+        <c:axId val="-2113994440"/>
+      </c:barChart>
+      <c:catAx>
+        <c:axId val="-2068027336"/>
+        <c:scaling>
+          <c:orientation val="minMax"/>
+        </c:scaling>
+        <c:delete val="0"/>
+        <c:axPos val="b"/>
+        <c:majorTickMark val="out"/>
+        <c:minorTickMark val="none"/>
+        <c:tickLblPos val="nextTo"/>
+        <c:txPr>
+          <a:bodyPr/>
+          <a:lstStyle/>
+          <a:p>
+            <a:pPr>
+              <a:defRPr sz="1100" b="0">
+                <a:solidFill>
+                  <a:srgbClr val="000000"/>
+                </a:solidFill>
+                <a:latin typeface="Play"/>
+                <a:ea typeface="Play"/>
+                <a:cs typeface="Play"/>
+              </a:defRPr>
+            </a:pPr>
+          </a:p>
+        </c:txPr>
+        <c:crossAx val="-2113994440"/>
+        <c:crosses val="autoZero"/>
+        <c:auto val="1"/>
+        <c:lblAlgn val="ctr"/>
+        <c:lblOffset val="100"/>
+        <c:noMultiLvlLbl val="0"/>
+      </c:catAx>
+      <c:valAx>
+        <c:axId val="-2113994440"/>
+        <c:scaling/>
+        <c:delete val="0"/>
+        <c:axPos val="l"/>
+        <c:majorGridlines>
+          <c:spPr>
+            <a:ln w="9525">
+              <a:solidFill>
+                <a:srgbClr val="D1D1D1"/>
+              </a:solidFill>
+            </a:ln>
+          </c:spPr>
+        </c:majorGridlines>
+        <c:title>
+          <c:tx>
+            <c:rich>
+              <a:bodyPr rot="0" vert="horz"/>
+              <a:lstStyle/>
+              <a:p>
+                <a:pPr>
+                  <a:defRPr sz="1100" b="0">
+                    <a:solidFill>
+                      <a:srgbClr val="000000"/>
+                    </a:solidFill>
+                    <a:latin typeface="Play"/>
+                    <a:ea typeface="Play"/>
+                    <a:cs typeface="Play"/>
+                  </a:defRPr>
+                </a:pPr>
+                <a:r>
+                  <a:t>Значения, значений</a:t>
+                </a:r>
+              </a:p>
+            </c:rich>
+          </c:tx>
+          <c:layout/>
+          <c:overlay val="0"/>
+        </c:title>
+        <c:majorTickMark val="out"/>
+        <c:minorTickMark val="none"/>
+        <c:tickLblPos val="nextTo"/>
+        <c:txPr>
+          <a:bodyPr/>
+          <a:lstStyle/>
+          <a:p>
+            <a:pPr>
+              <a:defRPr sz="1100" b="0">
+                <a:solidFill>
+                  <a:srgbClr val="000000"/>
+                </a:solidFill>
+                <a:latin typeface="Play"/>
+                <a:ea typeface="Play"/>
+                <a:cs typeface="Play"/>
+              </a:defRPr>
+            </a:pPr>
+          </a:p>
+        </c:txPr>
+        <c:crossAx val="-2068027336"/>
+        <c:crosses val="autoZero"/>
+      </c:valAx>
+    </c:plotArea>
     <c:dispBlanksAs val="gap"/>
   </c:chart>
   <c:txPr>
@@ -2172,6 +2319,204 @@
 </p:notes>
 </file>
 
+<file path=ppt/notesSlides/notesSlide63.xml><?xml version="1.0" encoding="utf-8"?>
+<p:notes xmlns:a="http://schemas.openxmlformats.org/drawingml/2006/main" xmlns:p="http://schemas.openxmlformats.org/presentationml/2006/main" xmlns:r="http://schemas.openxmlformats.org/officeDocument/2006/relationships">
+  <p:cSld>
+    <p:spTree>
+      <p:nvGrpSpPr>
+        <p:cNvPr id="1" name=""/>
+        <p:cNvGrpSpPr/>
+        <p:nvPr/>
+      </p:nvGrpSpPr>
+      <p:grpSpPr>
+        <a:xfrm>
+          <a:off x="0" y="0"/>
+          <a:ext cx="0" cy="0"/>
+          <a:chOff x="0" y="0"/>
+          <a:chExt cx="0" cy="0"/>
+        </a:xfrm>
+      </p:grpSpPr>
+      <p:sp>
+        <p:nvSpPr>
+          <p:cNvPr id="2" name="Slide Image Placeholder 1"/>
+          <p:cNvSpPr>
+            <a:spLocks noGrp="1"/>
+          </p:cNvSpPr>
+          <p:nvPr>
+            <p:ph type="sldImg" idx="3"/>
+          </p:nvPr>
+        </p:nvSpPr>
+        <p:spPr/>
+      </p:sp>
+      <p:sp>
+        <p:nvSpPr>
+          <p:cNvPr id="3" name="Notes Placeholder 2"/>
+          <p:cNvSpPr>
+            <a:spLocks noGrp="1"/>
+          </p:cNvSpPr>
+          <p:nvPr>
+            <p:ph type="body" idx="1"/>
+          </p:nvPr>
+        </p:nvSpPr>
+        <p:spPr/>
+        <p:txBody>
+          <a:bodyPr/>
+          <a:lstStyle/>
+          <a:p/>
+        </p:txBody>
+      </p:sp>
+      <p:sp>
+        <p:nvSpPr>
+          <p:cNvPr id="4" name="Slide Number Placeholder 3"/>
+          <p:cNvSpPr>
+            <a:spLocks noGrp="1"/>
+          </p:cNvSpPr>
+          <p:nvPr>
+            <p:ph type="sldNum" idx="12"/>
+          </p:nvPr>
+        </p:nvSpPr>
+        <p:spPr/>
+      </p:sp>
+    </p:spTree>
+  </p:cSld>
+  <p:clrMapOvr>
+    <a:masterClrMapping/>
+  </p:clrMapOvr>
+</p:notes>
+</file>
+
+<file path=ppt/notesSlides/notesSlide64.xml><?xml version="1.0" encoding="utf-8"?>
+<p:notes xmlns:a="http://schemas.openxmlformats.org/drawingml/2006/main" xmlns:p="http://schemas.openxmlformats.org/presentationml/2006/main" xmlns:r="http://schemas.openxmlformats.org/officeDocument/2006/relationships">
+  <p:cSld>
+    <p:spTree>
+      <p:nvGrpSpPr>
+        <p:cNvPr id="1" name=""/>
+        <p:cNvGrpSpPr/>
+        <p:nvPr/>
+      </p:nvGrpSpPr>
+      <p:grpSpPr>
+        <a:xfrm>
+          <a:off x="0" y="0"/>
+          <a:ext cx="0" cy="0"/>
+          <a:chOff x="0" y="0"/>
+          <a:chExt cx="0" cy="0"/>
+        </a:xfrm>
+      </p:grpSpPr>
+      <p:sp>
+        <p:nvSpPr>
+          <p:cNvPr id="2" name="Slide Image Placeholder 1"/>
+          <p:cNvSpPr>
+            <a:spLocks noGrp="1"/>
+          </p:cNvSpPr>
+          <p:nvPr>
+            <p:ph type="sldImg" idx="3"/>
+          </p:nvPr>
+        </p:nvSpPr>
+        <p:spPr/>
+      </p:sp>
+      <p:sp>
+        <p:nvSpPr>
+          <p:cNvPr id="3" name="Notes Placeholder 2"/>
+          <p:cNvSpPr>
+            <a:spLocks noGrp="1"/>
+          </p:cNvSpPr>
+          <p:nvPr>
+            <p:ph type="body" idx="1"/>
+          </p:nvPr>
+        </p:nvSpPr>
+        <p:spPr/>
+        <p:txBody>
+          <a:bodyPr/>
+          <a:lstStyle/>
+          <a:p/>
+        </p:txBody>
+      </p:sp>
+      <p:sp>
+        <p:nvSpPr>
+          <p:cNvPr id="4" name="Slide Number Placeholder 3"/>
+          <p:cNvSpPr>
+            <a:spLocks noGrp="1"/>
+          </p:cNvSpPr>
+          <p:nvPr>
+            <p:ph type="sldNum" idx="12"/>
+          </p:nvPr>
+        </p:nvSpPr>
+        <p:spPr/>
+      </p:sp>
+    </p:spTree>
+  </p:cSld>
+  <p:clrMapOvr>
+    <a:masterClrMapping/>
+  </p:clrMapOvr>
+</p:notes>
+</file>
+
+<file path=ppt/notesSlides/notesSlide65.xml><?xml version="1.0" encoding="utf-8"?>
+<p:notes xmlns:a="http://schemas.openxmlformats.org/drawingml/2006/main" xmlns:p="http://schemas.openxmlformats.org/presentationml/2006/main" xmlns:r="http://schemas.openxmlformats.org/officeDocument/2006/relationships">
+  <p:cSld>
+    <p:spTree>
+      <p:nvGrpSpPr>
+        <p:cNvPr id="1" name=""/>
+        <p:cNvGrpSpPr/>
+        <p:nvPr/>
+      </p:nvGrpSpPr>
+      <p:grpSpPr>
+        <a:xfrm>
+          <a:off x="0" y="0"/>
+          <a:ext cx="0" cy="0"/>
+          <a:chOff x="0" y="0"/>
+          <a:chExt cx="0" cy="0"/>
+        </a:xfrm>
+      </p:grpSpPr>
+      <p:sp>
+        <p:nvSpPr>
+          <p:cNvPr id="2" name="Slide Image Placeholder 1"/>
+          <p:cNvSpPr>
+            <a:spLocks noGrp="1"/>
+          </p:cNvSpPr>
+          <p:nvPr>
+            <p:ph type="sldImg" idx="3"/>
+          </p:nvPr>
+        </p:nvSpPr>
+        <p:spPr/>
+      </p:sp>
+      <p:sp>
+        <p:nvSpPr>
+          <p:cNvPr id="3" name="Notes Placeholder 2"/>
+          <p:cNvSpPr>
+            <a:spLocks noGrp="1"/>
+          </p:cNvSpPr>
+          <p:nvPr>
+            <p:ph type="body" idx="1"/>
+          </p:nvPr>
+        </p:nvSpPr>
+        <p:spPr/>
+        <p:txBody>
+          <a:bodyPr/>
+          <a:lstStyle/>
+          <a:p/>
+        </p:txBody>
+      </p:sp>
+      <p:sp>
+        <p:nvSpPr>
+          <p:cNvPr id="4" name="Slide Number Placeholder 3"/>
+          <p:cNvSpPr>
+            <a:spLocks noGrp="1"/>
+          </p:cNvSpPr>
+          <p:nvPr>
+            <p:ph type="sldNum" idx="12"/>
+          </p:nvPr>
+        </p:nvSpPr>
+        <p:spPr/>
+      </p:sp>
+    </p:spTree>
+  </p:cSld>
+  <p:clrMapOvr>
+    <a:masterClrMapping/>
+  </p:clrMapOvr>
+</p:notes>
+</file>
+
 <file path=ppt/slideLayouts/slideLayout12.xml><?xml version="1.0" encoding="utf-8"?>
 <p:sldLayout xmlns:a="http://schemas.openxmlformats.org/drawingml/2006/main" xmlns:r="http://schemas.openxmlformats.org/officeDocument/2006/relationships" xmlns:mc="http://schemas.openxmlformats.org/markup-compatibility/2006" xmlns:mv="urn:schemas-microsoft-com:mac:vml" xmlns:p="http://schemas.openxmlformats.org/presentationml/2006/main" xmlns:c="http://schemas.openxmlformats.org/drawingml/2006/chart" xmlns:dgm="http://schemas.openxmlformats.org/drawingml/2006/diagram" xmlns:o="urn:schemas-microsoft-com:office:office" xmlns:v="urn:schemas-microsoft-com:vml" xmlns:pvml="urn:schemas-microsoft-com:office:powerpoint" xmlns:com="http://schemas.openxmlformats.org/drawingml/2006/compatibility" xmlns:p14="http://schemas.microsoft.com/office/powerpoint/2010/main" xmlns:p15="http://schemas.microsoft.com/office/powerpoint/2012/main" xmlns:ahyp="http://schemas.microsoft.com/office/drawing/2018/hyperlinkcolor" matchingName="2_Заголовок + текст в две колонки">
   <p:cSld name="2_Заголовок + текст в две колонки">
@@ -7336,7 +7681,7 @@
                 <a:ea typeface="Arial"/>
                 <a:cs typeface="Arial"/>
               </a:rPr>
-              <a:t>Защита инициативы: сервис автоматической вёрстки презентаций</a:t>
+              <a:t>Автоматическая вёрстка презентаций: пилот и запуск</a:t>
             </a:r>
           </a:p>
         </p:txBody>
@@ -7350,6 +7695,1628 @@
 </file>
 
 <file path=ppt/slides/slide57.xml><?xml version="1.0" encoding="utf-8"?>
+<p:sld xmlns:a="http://schemas.openxmlformats.org/drawingml/2006/main" xmlns:p="http://schemas.openxmlformats.org/presentationml/2006/main" xmlns:r="http://schemas.openxmlformats.org/officeDocument/2006/relationships">
+  <p:cSld>
+    <p:bg>
+      <p:bgPr>
+        <a:solidFill>
+          <a:schemeClr val="lt2"/>
+        </a:solidFill>
+      </p:bgPr>
+    </p:bg>
+    <p:spTree>
+      <p:nvGrpSpPr>
+        <p:cNvPr id="1" name=""/>
+        <p:cNvGrpSpPr/>
+        <p:nvPr/>
+      </p:nvGrpSpPr>
+      <p:grpSpPr/>
+      <p:sp>
+        <p:nvSpPr>
+          <p:cNvPr id="795" name="Google Shape;795;p60"/>
+          <p:cNvSpPr txBox="1"/>
+          <p:nvPr/>
+        </p:nvSpPr>
+        <p:spPr>
+          <a:xfrm>
+            <a:off x="18692059" y="4674436"/>
+            <a:ext cx="4304330" cy="678198"/>
+          </a:xfrm>
+          <a:prstGeom prst="rect">
+            <a:avLst/>
+          </a:prstGeom>
+          <a:noFill/>
+          <a:ln>
+            <a:noFill/>
+          </a:ln>
+        </p:spPr>
+        <p:txBody>
+          <a:bodyPr anchorCtr="0" anchor="t" bIns="45700" lIns="91425" spcFirstLastPara="1" rIns="91425" wrap="square" tIns="45700">
+            <a:noAutofit/>
+          </a:bodyPr>
+          <a:lstStyle/>
+          <a:p>
+            <a:pPr indent="0" lvl="0" marL="0" marR="0" rtl="0" algn="l">
+              <a:lnSpc>
+                <a:spcPct val="110000"/>
+              </a:lnSpc>
+              <a:spcBef>
+                <a:spcPts val="0"/>
+              </a:spcBef>
+              <a:spcAft>
+                <a:spcPts val="0"/>
+              </a:spcAft>
+              <a:buClr>
+                <a:schemeClr val="dk1"/>
+              </a:buClr>
+              <a:buSzPts val="1600"/>
+              <a:buFont typeface="Arial"/>
+              <a:buNone/>
+            </a:pPr>
+            <a:r>
+              <a:t/>
+            </a:r>
+            <a:endParaRPr sz="1600">
+              <a:solidFill>
+                <a:schemeClr val="dk1"/>
+              </a:solidFill>
+              <a:latin typeface="Arial"/>
+              <a:ea typeface="Arial"/>
+              <a:cs typeface="Arial"/>
+              <a:sym typeface="Arial"/>
+            </a:endParaRPr>
+          </a:p>
+        </p:txBody>
+      </p:sp>
+      <p:pic>
+        <p:nvPicPr>
+          <p:cNvPr id="797" name="Google Shape;797;p60"/>
+          <p:cNvPicPr preferRelativeResize="0"/>
+          <p:nvPr/>
+        </p:nvPicPr>
+        <p:blipFill rotWithShape="1">
+          <a:blip r:embed="rId3">
+            <a:alphaModFix/>
+          </a:blip>
+          <a:srcRect b="0" l="0" r="0" t="0"/>
+          <a:stretch/>
+        </p:blipFill>
+        <p:spPr>
+          <a:xfrm>
+            <a:off x="669096" y="2601017"/>
+            <a:ext cx="450850" cy="450850"/>
+          </a:xfrm>
+          <a:prstGeom prst="rect">
+            <a:avLst/>
+          </a:prstGeom>
+          <a:noFill/>
+          <a:ln>
+            <a:noFill/>
+          </a:ln>
+        </p:spPr>
+      </p:pic>
+      <p:pic>
+        <p:nvPicPr>
+          <p:cNvPr id="798" name="Google Shape;798;p60"/>
+          <p:cNvPicPr preferRelativeResize="0"/>
+          <p:nvPr/>
+        </p:nvPicPr>
+        <p:blipFill rotWithShape="1">
+          <a:blip r:embed="rId4">
+            <a:alphaModFix/>
+          </a:blip>
+          <a:srcRect b="0" l="0" r="0" t="0"/>
+          <a:stretch/>
+        </p:blipFill>
+        <p:spPr>
+          <a:xfrm>
+            <a:off x="8097007" y="2603210"/>
+            <a:ext cx="450851" cy="450851"/>
+          </a:xfrm>
+          <a:prstGeom prst="rect">
+            <a:avLst/>
+          </a:prstGeom>
+          <a:noFill/>
+          <a:ln>
+            <a:noFill/>
+          </a:ln>
+        </p:spPr>
+      </p:pic>
+      <p:pic>
+        <p:nvPicPr>
+          <p:cNvPr id="799" name="Google Shape;799;p60"/>
+          <p:cNvPicPr preferRelativeResize="0"/>
+          <p:nvPr/>
+        </p:nvPicPr>
+        <p:blipFill rotWithShape="1">
+          <a:blip r:embed="rId5">
+            <a:alphaModFix/>
+          </a:blip>
+          <a:srcRect b="0" l="0" r="0" t="0"/>
+          <a:stretch/>
+        </p:blipFill>
+        <p:spPr>
+          <a:xfrm>
+            <a:off x="4383052" y="2601017"/>
+            <a:ext cx="450850" cy="450850"/>
+          </a:xfrm>
+          <a:prstGeom prst="rect">
+            <a:avLst/>
+          </a:prstGeom>
+          <a:noFill/>
+          <a:ln>
+            <a:noFill/>
+          </a:ln>
+        </p:spPr>
+      </p:pic>
+      <p:sp>
+        <p:nvSpPr>
+          <p:cNvPr id="800" name="title"/>
+          <p:cNvSpPr txBox="1"/>
+          <p:nvPr/>
+        </p:nvSpPr>
+        <p:spPr>
+          <a:xfrm>
+            <a:off x="677387" y="692177"/>
+            <a:ext cx="10855878" cy="1447800"/>
+          </a:xfrm>
+          <a:prstGeom prst="rect">
+            <a:avLst/>
+          </a:prstGeom>
+          <a:noFill/>
+        </p:spPr>
+        <p:txBody>
+          <a:bodyPr wrap="square" lIns="76200" rIns="76200" tIns="50800" bIns="50800">
+            <a:spAutoFit/>
+          </a:bodyPr>
+          <a:lstStyle/>
+          <a:p>
+            <a:pPr algn="l">
+              <a:spcAft>
+                <a:spcPts val="300"/>
+              </a:spcAft>
+              <a:defRPr sz="4000">
+                <a:solidFill>
+                  <a:srgbClr val="000000"/>
+                </a:solidFill>
+                <a:latin typeface="Arial"/>
+                <a:ea typeface="Arial"/>
+                <a:cs typeface="Arial"/>
+              </a:defRPr>
+            </a:pPr>
+            <a:r>
+              <a:rPr sz="4000">
+                <a:solidFill>
+                  <a:srgbClr val="000000"/>
+                </a:solidFill>
+                <a:latin typeface="Arial"/>
+                <a:ea typeface="Arial"/>
+                <a:cs typeface="Arial"/>
+              </a:rPr>
+              <a:t>Текущее состояние: ручная сборка и проблемы</a:t>
+            </a:r>
+          </a:p>
+        </p:txBody>
+      </p:sp>
+      <p:sp>
+        <p:nvSpPr>
+          <p:cNvPr id="801" name="card_0"/>
+          <p:cNvSpPr txBox="1"/>
+          <p:nvPr/>
+        </p:nvSpPr>
+        <p:spPr>
+          <a:xfrm>
+            <a:off x="806889" y="3427872"/>
+            <a:ext cx="2583926" cy="937548"/>
+          </a:xfrm>
+          <a:prstGeom prst="rect">
+            <a:avLst/>
+          </a:prstGeom>
+          <a:noFill/>
+        </p:spPr>
+        <p:txBody>
+          <a:bodyPr wrap="square" lIns="76200" rIns="76200" tIns="50800" bIns="50800">
+            <a:spAutoFit/>
+          </a:bodyPr>
+          <a:lstStyle/>
+          <a:p>
+            <a:pPr algn="l">
+              <a:spcAft>
+                <a:spcPts val="300"/>
+              </a:spcAft>
+              <a:defRPr sz="1800" b="0">
+                <a:solidFill>
+                  <a:srgbClr val="000000"/>
+                </a:solidFill>
+                <a:latin typeface="Play"/>
+                <a:ea typeface="Play"/>
+                <a:cs typeface="Play"/>
+              </a:defRPr>
+            </a:pPr>
+            <a:r>
+              <a:rPr sz="1800" b="0">
+                <a:solidFill>
+                  <a:srgbClr val="000000"/>
+                </a:solidFill>
+                <a:latin typeface="Play"/>
+                <a:ea typeface="Play"/>
+                <a:cs typeface="Play"/>
+              </a:rPr>
+              <a:t>12-слайдовая колода занимает 186 мин</a:t>
+            </a:r>
+          </a:p>
+        </p:txBody>
+      </p:sp>
+      <p:sp>
+        <p:nvSpPr>
+          <p:cNvPr id="802" name="card_1"/>
+          <p:cNvSpPr txBox="1"/>
+          <p:nvPr/>
+        </p:nvSpPr>
+        <p:spPr>
+          <a:xfrm>
+            <a:off x="4533496" y="3421494"/>
+            <a:ext cx="2583926" cy="937548"/>
+          </a:xfrm>
+          <a:prstGeom prst="rect">
+            <a:avLst/>
+          </a:prstGeom>
+          <a:noFill/>
+        </p:spPr>
+        <p:txBody>
+          <a:bodyPr wrap="square" lIns="76200" rIns="76200" tIns="50800" bIns="50800">
+            <a:spAutoFit/>
+          </a:bodyPr>
+          <a:lstStyle/>
+          <a:p>
+            <a:pPr algn="l">
+              <a:spcAft>
+                <a:spcPts val="300"/>
+              </a:spcAft>
+              <a:defRPr sz="1800" b="0">
+                <a:solidFill>
+                  <a:srgbClr val="000000"/>
+                </a:solidFill>
+                <a:latin typeface="Play"/>
+                <a:ea typeface="Play"/>
+                <a:cs typeface="Play"/>
+              </a:defRPr>
+            </a:pPr>
+            <a:r>
+              <a:rPr sz="1800" b="0">
+                <a:solidFill>
+                  <a:srgbClr val="000000"/>
+                </a:solidFill>
+                <a:latin typeface="Play"/>
+                <a:ea typeface="Play"/>
+                <a:cs typeface="Play"/>
+              </a:rPr>
+              <a:t>Правки после ревью добавляют 74 мин</a:t>
+            </a:r>
+          </a:p>
+        </p:txBody>
+      </p:sp>
+      <p:sp>
+        <p:nvSpPr>
+          <p:cNvPr id="803" name="card_2"/>
+          <p:cNvSpPr txBox="1"/>
+          <p:nvPr/>
+        </p:nvSpPr>
+        <p:spPr>
+          <a:xfrm>
+            <a:off x="8264469" y="3425860"/>
+            <a:ext cx="2575194" cy="1160137"/>
+          </a:xfrm>
+          <a:prstGeom prst="rect">
+            <a:avLst/>
+          </a:prstGeom>
+          <a:noFill/>
+        </p:spPr>
+        <p:txBody>
+          <a:bodyPr wrap="square" lIns="76200" rIns="76200" tIns="50800" bIns="50800">
+            <a:spAutoFit/>
+          </a:bodyPr>
+          <a:lstStyle/>
+          <a:p>
+            <a:pPr algn="l">
+              <a:spcAft>
+                <a:spcPts val="300"/>
+              </a:spcAft>
+              <a:defRPr sz="1800" b="0">
+                <a:solidFill>
+                  <a:srgbClr val="000000"/>
+                </a:solidFill>
+                <a:latin typeface="Play"/>
+                <a:ea typeface="Play"/>
+                <a:cs typeface="Play"/>
+              </a:defRPr>
+            </a:pPr>
+            <a:r>
+              <a:rPr sz="1800" b="0">
+                <a:solidFill>
+                  <a:srgbClr val="000000"/>
+                </a:solidFill>
+                <a:latin typeface="Play"/>
+                <a:ea typeface="Play"/>
+                <a:cs typeface="Play"/>
+              </a:rPr>
+              <a:t>19 из 42 колод нарушают фирменный стиль</a:t>
+            </a:r>
+          </a:p>
+        </p:txBody>
+      </p:sp>
+    </p:spTree>
+  </p:cSld>
+  <p:clrMapOvr>
+    <a:masterClrMapping/>
+  </p:clrMapOvr>
+</p:sld>
+</file>
+
+<file path=ppt/slides/slide58.xml><?xml version="1.0" encoding="utf-8"?>
+<p:sld xmlns:a="http://schemas.openxmlformats.org/drawingml/2006/main" xmlns:p="http://schemas.openxmlformats.org/presentationml/2006/main" xmlns:r="http://schemas.openxmlformats.org/officeDocument/2006/relationships">
+  <p:cSld>
+    <p:bg>
+      <p:bgPr>
+        <a:solidFill>
+          <a:schemeClr val="lt2"/>
+        </a:solidFill>
+      </p:bgPr>
+    </p:bg>
+    <p:spTree>
+      <p:nvGrpSpPr>
+        <p:cNvPr id="1" name=""/>
+        <p:cNvGrpSpPr/>
+        <p:nvPr/>
+      </p:nvGrpSpPr>
+      <p:grpSpPr/>
+      <p:pic>
+        <p:nvPicPr>
+          <p:cNvPr id="762" name="Google Shape;762;p58"/>
+          <p:cNvPicPr preferRelativeResize="0"/>
+          <p:nvPr/>
+        </p:nvPicPr>
+        <p:blipFill rotWithShape="1">
+          <a:blip r:embed="rId2">
+            <a:alphaModFix/>
+          </a:blip>
+          <a:srcRect b="0" l="0" r="0" t="0"/>
+          <a:stretch/>
+        </p:blipFill>
+        <p:spPr>
+          <a:xfrm>
+            <a:off x="8105070" y="2562300"/>
+            <a:ext cx="866700" cy="866700"/>
+          </a:xfrm>
+          <a:prstGeom prst="rect">
+            <a:avLst/>
+          </a:prstGeom>
+          <a:noFill/>
+          <a:ln>
+            <a:noFill/>
+          </a:ln>
+        </p:spPr>
+      </p:pic>
+      <p:sp>
+        <p:nvSpPr>
+          <p:cNvPr id="764" name="Google Shape;764;p58"/>
+          <p:cNvSpPr txBox="1"/>
+          <p:nvPr/>
+        </p:nvSpPr>
+        <p:spPr>
+          <a:xfrm>
+            <a:off x="18692059" y="4674436"/>
+            <a:ext cx="4304330" cy="678198"/>
+          </a:xfrm>
+          <a:prstGeom prst="rect">
+            <a:avLst/>
+          </a:prstGeom>
+          <a:noFill/>
+          <a:ln>
+            <a:noFill/>
+          </a:ln>
+        </p:spPr>
+        <p:txBody>
+          <a:bodyPr anchorCtr="0" anchor="t" bIns="45700" lIns="91425" spcFirstLastPara="1" rIns="91425" wrap="square" tIns="45700">
+            <a:noAutofit/>
+          </a:bodyPr>
+          <a:lstStyle/>
+          <a:p>
+            <a:pPr indent="0" lvl="0" marL="0" marR="0" rtl="0" algn="l">
+              <a:lnSpc>
+                <a:spcPct val="110000"/>
+              </a:lnSpc>
+              <a:spcBef>
+                <a:spcPts val="0"/>
+              </a:spcBef>
+              <a:spcAft>
+                <a:spcPts val="0"/>
+              </a:spcAft>
+              <a:buClr>
+                <a:schemeClr val="dk1"/>
+              </a:buClr>
+              <a:buSzPts val="1600"/>
+              <a:buFont typeface="Arial"/>
+              <a:buNone/>
+            </a:pPr>
+            <a:r>
+              <a:t/>
+            </a:r>
+            <a:endParaRPr sz="1600">
+              <a:solidFill>
+                <a:schemeClr val="dk1"/>
+              </a:solidFill>
+              <a:latin typeface="Arial"/>
+              <a:ea typeface="Arial"/>
+              <a:cs typeface="Arial"/>
+              <a:sym typeface="Arial"/>
+            </a:endParaRPr>
+          </a:p>
+        </p:txBody>
+      </p:sp>
+      <p:sp>
+        <p:nvSpPr>
+          <p:cNvPr id="768" name="Google Shape;768;p58"/>
+          <p:cNvSpPr/>
+          <p:nvPr/>
+        </p:nvSpPr>
+        <p:spPr>
+          <a:xfrm>
+            <a:off x="671513" y="2562300"/>
+            <a:ext cx="866700" cy="866700"/>
+          </a:xfrm>
+          <a:prstGeom prst="ellipse">
+            <a:avLst/>
+          </a:prstGeom>
+          <a:solidFill>
+            <a:schemeClr val="accent1"/>
+          </a:solidFill>
+          <a:ln>
+            <a:noFill/>
+          </a:ln>
+        </p:spPr>
+        <p:txBody>
+          <a:bodyPr anchorCtr="0" anchor="ctr" bIns="45700" lIns="91425" spcFirstLastPara="1" rIns="91425" wrap="square" tIns="45700">
+            <a:noAutofit/>
+          </a:bodyPr>
+          <a:lstStyle/>
+          <a:p>
+            <a:pPr indent="0" lvl="0" marL="0" marR="0" rtl="0" algn="ctr">
+              <a:spcBef>
+                <a:spcPts val="0"/>
+              </a:spcBef>
+              <a:spcAft>
+                <a:spcPts val="0"/>
+              </a:spcAft>
+              <a:buNone/>
+            </a:pPr>
+            <a:r>
+              <a:t/>
+            </a:r>
+            <a:endParaRPr sz="3200">
+              <a:solidFill>
+                <a:schemeClr val="lt1"/>
+              </a:solidFill>
+              <a:latin typeface="Play"/>
+              <a:ea typeface="Play"/>
+              <a:cs typeface="Play"/>
+              <a:sym typeface="Play"/>
+            </a:endParaRPr>
+          </a:p>
+        </p:txBody>
+      </p:sp>
+      <p:pic>
+        <p:nvPicPr>
+          <p:cNvPr id="769" name="Google Shape;769;p58"/>
+          <p:cNvPicPr preferRelativeResize="0"/>
+          <p:nvPr/>
+        </p:nvPicPr>
+        <p:blipFill rotWithShape="1">
+          <a:blip r:embed="rId3">
+            <a:alphaModFix/>
+          </a:blip>
+          <a:srcRect b="0" l="0" r="0" t="0"/>
+          <a:stretch/>
+        </p:blipFill>
+        <p:spPr>
+          <a:xfrm>
+            <a:off x="879438" y="2770225"/>
+            <a:ext cx="450850" cy="450850"/>
+          </a:xfrm>
+          <a:prstGeom prst="rect">
+            <a:avLst/>
+          </a:prstGeom>
+          <a:noFill/>
+          <a:ln>
+            <a:noFill/>
+          </a:ln>
+        </p:spPr>
+      </p:pic>
+      <p:pic>
+        <p:nvPicPr>
+          <p:cNvPr id="770" name="Google Shape;770;p58"/>
+          <p:cNvPicPr preferRelativeResize="0"/>
+          <p:nvPr/>
+        </p:nvPicPr>
+        <p:blipFill rotWithShape="1">
+          <a:blip r:embed="rId4">
+            <a:alphaModFix/>
+          </a:blip>
+          <a:srcRect b="0" l="0" r="0" t="0"/>
+          <a:stretch/>
+        </p:blipFill>
+        <p:spPr>
+          <a:xfrm>
+            <a:off x="8307349" y="2772418"/>
+            <a:ext cx="450851" cy="450851"/>
+          </a:xfrm>
+          <a:prstGeom prst="rect">
+            <a:avLst/>
+          </a:prstGeom>
+          <a:noFill/>
+          <a:ln>
+            <a:noFill/>
+          </a:ln>
+        </p:spPr>
+      </p:pic>
+      <p:pic>
+        <p:nvPicPr>
+          <p:cNvPr id="771" name="Google Shape;771;p58"/>
+          <p:cNvPicPr preferRelativeResize="0"/>
+          <p:nvPr/>
+        </p:nvPicPr>
+        <p:blipFill rotWithShape="1">
+          <a:blip r:embed="rId5">
+            <a:alphaModFix/>
+          </a:blip>
+          <a:srcRect b="0" l="0" r="0" t="0"/>
+          <a:stretch/>
+        </p:blipFill>
+        <p:spPr>
+          <a:xfrm>
+            <a:off x="4385469" y="2562300"/>
+            <a:ext cx="866700" cy="866700"/>
+          </a:xfrm>
+          <a:prstGeom prst="rect">
+            <a:avLst/>
+          </a:prstGeom>
+          <a:noFill/>
+          <a:ln>
+            <a:noFill/>
+          </a:ln>
+        </p:spPr>
+      </p:pic>
+      <p:pic>
+        <p:nvPicPr>
+          <p:cNvPr id="772" name="Google Shape;772;p58"/>
+          <p:cNvPicPr preferRelativeResize="0"/>
+          <p:nvPr/>
+        </p:nvPicPr>
+        <p:blipFill rotWithShape="1">
+          <a:blip r:embed="rId6">
+            <a:alphaModFix/>
+          </a:blip>
+          <a:srcRect b="0" l="0" r="0" t="0"/>
+          <a:stretch/>
+        </p:blipFill>
+        <p:spPr>
+          <a:xfrm>
+            <a:off x="4593394" y="2770225"/>
+            <a:ext cx="450850" cy="450850"/>
+          </a:xfrm>
+          <a:prstGeom prst="rect">
+            <a:avLst/>
+          </a:prstGeom>
+          <a:noFill/>
+          <a:ln>
+            <a:noFill/>
+          </a:ln>
+        </p:spPr>
+      </p:pic>
+      <p:sp>
+        <p:nvSpPr>
+          <p:cNvPr id="773" name="title"/>
+          <p:cNvSpPr txBox="1"/>
+          <p:nvPr/>
+        </p:nvSpPr>
+        <p:spPr>
+          <a:xfrm>
+            <a:off x="677387" y="692177"/>
+            <a:ext cx="10855878" cy="1447800"/>
+          </a:xfrm>
+          <a:prstGeom prst="rect">
+            <a:avLst/>
+          </a:prstGeom>
+          <a:noFill/>
+        </p:spPr>
+        <p:txBody>
+          <a:bodyPr wrap="square" lIns="76200" rIns="76200" tIns="50800" bIns="50800">
+            <a:spAutoFit/>
+          </a:bodyPr>
+          <a:lstStyle/>
+          <a:p>
+            <a:pPr algn="l">
+              <a:spcAft>
+                <a:spcPts val="300"/>
+              </a:spcAft>
+              <a:defRPr sz="4000">
+                <a:solidFill>
+                  <a:srgbClr val="000000"/>
+                </a:solidFill>
+                <a:latin typeface="Arial"/>
+                <a:ea typeface="Arial"/>
+                <a:cs typeface="Arial"/>
+              </a:defRPr>
+            </a:pPr>
+            <a:r>
+              <a:rPr sz="4000">
+                <a:solidFill>
+                  <a:srgbClr val="000000"/>
+                </a:solidFill>
+                <a:latin typeface="Arial"/>
+                <a:ea typeface="Arial"/>
+                <a:cs typeface="Arial"/>
+              </a:rPr>
+              <a:t>Предлагаемый сервис: автоматизация от шаблона до аудита</a:t>
+            </a:r>
+          </a:p>
+        </p:txBody>
+      </p:sp>
+      <p:sp>
+        <p:nvSpPr>
+          <p:cNvPr id="774" name="card_0"/>
+          <p:cNvSpPr txBox="1"/>
+          <p:nvPr/>
+        </p:nvSpPr>
+        <p:spPr>
+          <a:xfrm>
+            <a:off x="806889" y="3928712"/>
+            <a:ext cx="2583926" cy="937548"/>
+          </a:xfrm>
+          <a:prstGeom prst="rect">
+            <a:avLst/>
+          </a:prstGeom>
+          <a:noFill/>
+        </p:spPr>
+        <p:txBody>
+          <a:bodyPr wrap="square" lIns="76200" rIns="76200" tIns="50800" bIns="50800">
+            <a:spAutoFit/>
+          </a:bodyPr>
+          <a:lstStyle/>
+          <a:p>
+            <a:pPr algn="l">
+              <a:spcAft>
+                <a:spcPts val="300"/>
+              </a:spcAft>
+              <a:defRPr sz="1600" b="0">
+                <a:solidFill>
+                  <a:srgbClr val="000000"/>
+                </a:solidFill>
+                <a:latin typeface="Play"/>
+                <a:ea typeface="Play"/>
+                <a:cs typeface="Play"/>
+              </a:defRPr>
+            </a:pPr>
+            <a:r>
+              <a:rPr sz="1600" b="0">
+                <a:solidFill>
+                  <a:srgbClr val="000000"/>
+                </a:solidFill>
+                <a:latin typeface="Play"/>
+                <a:ea typeface="Play"/>
+                <a:cs typeface="Play"/>
+              </a:rPr>
+              <a:t>Сервис принимает pptx шаблон и материалы</a:t>
+            </a:r>
+          </a:p>
+        </p:txBody>
+      </p:sp>
+      <p:sp>
+        <p:nvSpPr>
+          <p:cNvPr id="775" name="card_1"/>
+          <p:cNvSpPr txBox="1"/>
+          <p:nvPr/>
+        </p:nvSpPr>
+        <p:spPr>
+          <a:xfrm>
+            <a:off x="4533496" y="3922334"/>
+            <a:ext cx="2583926" cy="937548"/>
+          </a:xfrm>
+          <a:prstGeom prst="rect">
+            <a:avLst/>
+          </a:prstGeom>
+          <a:noFill/>
+        </p:spPr>
+        <p:txBody>
+          <a:bodyPr wrap="square" lIns="76200" rIns="76200" tIns="50800" bIns="50800">
+            <a:spAutoFit/>
+          </a:bodyPr>
+          <a:lstStyle/>
+          <a:p>
+            <a:pPr algn="l">
+              <a:spcAft>
+                <a:spcPts val="300"/>
+              </a:spcAft>
+              <a:defRPr sz="1600" b="0">
+                <a:solidFill>
+                  <a:srgbClr val="000000"/>
+                </a:solidFill>
+                <a:latin typeface="Play"/>
+                <a:ea typeface="Play"/>
+                <a:cs typeface="Play"/>
+              </a:defRPr>
+            </a:pPr>
+            <a:r>
+              <a:rPr sz="1600" b="0">
+                <a:solidFill>
+                  <a:srgbClr val="000000"/>
+                </a:solidFill>
+                <a:latin typeface="Play"/>
+                <a:ea typeface="Play"/>
+                <a:cs typeface="Play"/>
+              </a:rPr>
+              <a:t>Автоматически формирует дизайн-систему и план колоды</a:t>
+            </a:r>
+          </a:p>
+        </p:txBody>
+      </p:sp>
+      <p:sp>
+        <p:nvSpPr>
+          <p:cNvPr id="776" name="card_2"/>
+          <p:cNvSpPr txBox="1"/>
+          <p:nvPr/>
+        </p:nvSpPr>
+        <p:spPr>
+          <a:xfrm>
+            <a:off x="8264469" y="3926700"/>
+            <a:ext cx="2575194" cy="1160137"/>
+          </a:xfrm>
+          <a:prstGeom prst="rect">
+            <a:avLst/>
+          </a:prstGeom>
+          <a:noFill/>
+        </p:spPr>
+        <p:txBody>
+          <a:bodyPr wrap="square" lIns="76200" rIns="76200" tIns="50800" bIns="50800">
+            <a:spAutoFit/>
+          </a:bodyPr>
+          <a:lstStyle/>
+          <a:p>
+            <a:pPr algn="l">
+              <a:spcAft>
+                <a:spcPts val="300"/>
+              </a:spcAft>
+              <a:defRPr sz="1800" b="0">
+                <a:solidFill>
+                  <a:srgbClr val="000000"/>
+                </a:solidFill>
+                <a:latin typeface="Play"/>
+                <a:ea typeface="Play"/>
+                <a:cs typeface="Play"/>
+              </a:defRPr>
+            </a:pPr>
+            <a:r>
+              <a:rPr sz="1800" b="0">
+                <a:solidFill>
+                  <a:srgbClr val="000000"/>
+                </a:solidFill>
+                <a:latin typeface="Play"/>
+                <a:ea typeface="Play"/>
+                <a:cs typeface="Play"/>
+              </a:rPr>
+              <a:t>Результат – редактируемый pptx, pdf и html</a:t>
+            </a:r>
+          </a:p>
+        </p:txBody>
+      </p:sp>
+    </p:spTree>
+  </p:cSld>
+  <p:clrMapOvr>
+    <a:masterClrMapping/>
+  </p:clrMapOvr>
+</p:sld>
+</file>
+
+<file path=ppt/slides/slide59.xml><?xml version="1.0" encoding="utf-8"?>
+<p:sld xmlns:a="http://schemas.openxmlformats.org/drawingml/2006/main" xmlns:p="http://schemas.openxmlformats.org/presentationml/2006/main" xmlns:r="http://schemas.openxmlformats.org/officeDocument/2006/relationships">
+  <p:cSld>
+    <p:bg>
+      <p:bgPr>
+        <a:solidFill>
+          <a:schemeClr val="lt2"/>
+        </a:solidFill>
+      </p:bgPr>
+    </p:bg>
+    <p:spTree>
+      <p:nvGrpSpPr>
+        <p:cNvPr id="1" name=""/>
+        <p:cNvGrpSpPr/>
+        <p:nvPr/>
+      </p:nvGrpSpPr>
+      <p:grpSpPr/>
+      <p:pic>
+        <p:nvPicPr>
+          <p:cNvPr id="778" name="Google Shape;778;p59"/>
+          <p:cNvPicPr preferRelativeResize="0"/>
+          <p:nvPr/>
+        </p:nvPicPr>
+        <p:blipFill rotWithShape="1">
+          <a:blip r:embed="rId2">
+            <a:alphaModFix/>
+          </a:blip>
+          <a:srcRect b="0" l="0" r="0" t="0"/>
+          <a:stretch/>
+        </p:blipFill>
+        <p:spPr>
+          <a:xfrm>
+            <a:off x="8099424" y="2562300"/>
+            <a:ext cx="866700" cy="866700"/>
+          </a:xfrm>
+          <a:prstGeom prst="rect">
+            <a:avLst/>
+          </a:prstGeom>
+          <a:noFill/>
+          <a:ln>
+            <a:noFill/>
+          </a:ln>
+        </p:spPr>
+      </p:pic>
+      <p:pic>
+        <p:nvPicPr>
+          <p:cNvPr id="779" name="Google Shape;779;p59"/>
+          <p:cNvPicPr preferRelativeResize="0"/>
+          <p:nvPr/>
+        </p:nvPicPr>
+        <p:blipFill rotWithShape="1">
+          <a:blip r:embed="rId3">
+            <a:alphaModFix/>
+          </a:blip>
+          <a:srcRect b="0" l="0" r="0" t="0"/>
+          <a:stretch/>
+        </p:blipFill>
+        <p:spPr>
+          <a:xfrm>
+            <a:off x="4385469" y="2562300"/>
+            <a:ext cx="866700" cy="866700"/>
+          </a:xfrm>
+          <a:prstGeom prst="rect">
+            <a:avLst/>
+          </a:prstGeom>
+          <a:noFill/>
+          <a:ln>
+            <a:noFill/>
+          </a:ln>
+        </p:spPr>
+      </p:pic>
+      <p:pic>
+        <p:nvPicPr>
+          <p:cNvPr id="780" name="Google Shape;780;p59"/>
+          <p:cNvPicPr preferRelativeResize="0"/>
+          <p:nvPr/>
+        </p:nvPicPr>
+        <p:blipFill rotWithShape="1">
+          <a:blip r:embed="rId5">
+            <a:alphaModFix/>
+          </a:blip>
+          <a:srcRect b="0" l="0" r="0" t="0"/>
+          <a:stretch/>
+        </p:blipFill>
+        <p:spPr>
+          <a:xfrm>
+            <a:off x="671513" y="2562300"/>
+            <a:ext cx="866700" cy="866700"/>
+          </a:xfrm>
+          <a:prstGeom prst="rect">
+            <a:avLst/>
+          </a:prstGeom>
+          <a:noFill/>
+          <a:ln>
+            <a:noFill/>
+          </a:ln>
+        </p:spPr>
+      </p:pic>
+      <p:sp>
+        <p:nvSpPr>
+          <p:cNvPr id="782" name="Google Shape;782;p59"/>
+          <p:cNvSpPr txBox="1"/>
+          <p:nvPr/>
+        </p:nvSpPr>
+        <p:spPr>
+          <a:xfrm>
+            <a:off x="18692059" y="4674436"/>
+            <a:ext cx="4304330" cy="678198"/>
+          </a:xfrm>
+          <a:prstGeom prst="rect">
+            <a:avLst/>
+          </a:prstGeom>
+          <a:noFill/>
+          <a:ln>
+            <a:noFill/>
+          </a:ln>
+        </p:spPr>
+        <p:txBody>
+          <a:bodyPr anchorCtr="0" anchor="t" bIns="45700" lIns="91425" spcFirstLastPara="1" rIns="91425" wrap="square" tIns="45700">
+            <a:noAutofit/>
+          </a:bodyPr>
+          <a:lstStyle/>
+          <a:p>
+            <a:pPr indent="0" lvl="0" marL="0" marR="0" rtl="0" algn="l">
+              <a:lnSpc>
+                <a:spcPct val="110000"/>
+              </a:lnSpc>
+              <a:spcBef>
+                <a:spcPts val="0"/>
+              </a:spcBef>
+              <a:spcAft>
+                <a:spcPts val="0"/>
+              </a:spcAft>
+              <a:buClr>
+                <a:schemeClr val="dk1"/>
+              </a:buClr>
+              <a:buSzPts val="1600"/>
+              <a:buFont typeface="Arial"/>
+              <a:buNone/>
+            </a:pPr>
+            <a:r>
+              <a:t/>
+            </a:r>
+            <a:endParaRPr sz="1600">
+              <a:solidFill>
+                <a:schemeClr val="dk1"/>
+              </a:solidFill>
+              <a:latin typeface="Arial"/>
+              <a:ea typeface="Arial"/>
+              <a:cs typeface="Arial"/>
+              <a:sym typeface="Arial"/>
+            </a:endParaRPr>
+          </a:p>
+        </p:txBody>
+      </p:sp>
+      <p:pic>
+        <p:nvPicPr>
+          <p:cNvPr id="783" name="Google Shape;783;p59"/>
+          <p:cNvPicPr preferRelativeResize="0"/>
+          <p:nvPr/>
+        </p:nvPicPr>
+        <p:blipFill rotWithShape="1">
+          <a:blip r:embed="rId6">
+            <a:alphaModFix/>
+          </a:blip>
+          <a:srcRect b="0" l="0" r="0" t="0"/>
+          <a:stretch/>
+        </p:blipFill>
+        <p:spPr>
+          <a:xfrm>
+            <a:off x="879438" y="2770225"/>
+            <a:ext cx="450850" cy="450850"/>
+          </a:xfrm>
+          <a:prstGeom prst="rect">
+            <a:avLst/>
+          </a:prstGeom>
+          <a:noFill/>
+          <a:ln>
+            <a:noFill/>
+          </a:ln>
+        </p:spPr>
+      </p:pic>
+      <p:pic>
+        <p:nvPicPr>
+          <p:cNvPr id="784" name="Google Shape;784;p59"/>
+          <p:cNvPicPr preferRelativeResize="0"/>
+          <p:nvPr/>
+        </p:nvPicPr>
+        <p:blipFill rotWithShape="1">
+          <a:blip r:embed="rId7">
+            <a:alphaModFix/>
+          </a:blip>
+          <a:srcRect b="0" l="0" r="0" t="0"/>
+          <a:stretch/>
+        </p:blipFill>
+        <p:spPr>
+          <a:xfrm>
+            <a:off x="8316973" y="2791669"/>
+            <a:ext cx="450851" cy="450851"/>
+          </a:xfrm>
+          <a:prstGeom prst="rect">
+            <a:avLst/>
+          </a:prstGeom>
+          <a:noFill/>
+          <a:ln>
+            <a:noFill/>
+          </a:ln>
+        </p:spPr>
+      </p:pic>
+      <p:pic>
+        <p:nvPicPr>
+          <p:cNvPr id="785" name="Google Shape;785;p59"/>
+          <p:cNvPicPr preferRelativeResize="0"/>
+          <p:nvPr/>
+        </p:nvPicPr>
+        <p:blipFill rotWithShape="1">
+          <a:blip r:embed="rId8">
+            <a:alphaModFix/>
+          </a:blip>
+          <a:srcRect b="0" l="0" r="0" t="0"/>
+          <a:stretch/>
+        </p:blipFill>
+        <p:spPr>
+          <a:xfrm>
+            <a:off x="4574144" y="2770225"/>
+            <a:ext cx="450850" cy="450850"/>
+          </a:xfrm>
+          <a:prstGeom prst="rect">
+            <a:avLst/>
+          </a:prstGeom>
+          <a:noFill/>
+          <a:ln>
+            <a:noFill/>
+          </a:ln>
+        </p:spPr>
+      </p:pic>
+      <p:sp>
+        <p:nvSpPr>
+          <p:cNvPr id="786" name="title"/>
+          <p:cNvSpPr txBox="1"/>
+          <p:nvPr/>
+        </p:nvSpPr>
+        <p:spPr>
+          <a:xfrm>
+            <a:off x="677387" y="692177"/>
+            <a:ext cx="10855878" cy="1447800"/>
+          </a:xfrm>
+          <a:prstGeom prst="rect">
+            <a:avLst/>
+          </a:prstGeom>
+          <a:noFill/>
+        </p:spPr>
+        <p:txBody>
+          <a:bodyPr wrap="square" lIns="76200" rIns="76200" tIns="50800" bIns="50800">
+            <a:spAutoFit/>
+          </a:bodyPr>
+          <a:lstStyle/>
+          <a:p>
+            <a:pPr algn="l">
+              <a:spcAft>
+                <a:spcPts val="300"/>
+              </a:spcAft>
+              <a:defRPr sz="4000">
+                <a:solidFill>
+                  <a:srgbClr val="000000"/>
+                </a:solidFill>
+                <a:latin typeface="Arial"/>
+                <a:ea typeface="Arial"/>
+                <a:cs typeface="Arial"/>
+              </a:defRPr>
+            </a:pPr>
+            <a:r>
+              <a:rPr sz="4000">
+                <a:solidFill>
+                  <a:srgbClr val="000000"/>
+                </a:solidFill>
+                <a:latin typeface="Arial"/>
+                <a:ea typeface="Arial"/>
+                <a:cs typeface="Arial"/>
+              </a:rPr>
+              <a:t>Ожидаемый эффект: ускорение и качество</a:t>
+            </a:r>
+          </a:p>
+        </p:txBody>
+      </p:sp>
+      <p:sp>
+        <p:nvSpPr>
+          <p:cNvPr id="787" name="card_0"/>
+          <p:cNvSpPr txBox="1"/>
+          <p:nvPr/>
+        </p:nvSpPr>
+        <p:spPr>
+          <a:xfrm>
+            <a:off x="806889" y="3928712"/>
+            <a:ext cx="2583926" cy="937548"/>
+          </a:xfrm>
+          <a:prstGeom prst="rect">
+            <a:avLst/>
+          </a:prstGeom>
+          <a:noFill/>
+        </p:spPr>
+        <p:txBody>
+          <a:bodyPr wrap="square" lIns="76200" rIns="76200" tIns="50800" bIns="50800">
+            <a:spAutoFit/>
+          </a:bodyPr>
+          <a:lstStyle/>
+          <a:p>
+            <a:pPr algn="l">
+              <a:spcAft>
+                <a:spcPts val="300"/>
+              </a:spcAft>
+              <a:defRPr sz="1800" b="0">
+                <a:solidFill>
+                  <a:srgbClr val="000000"/>
+                </a:solidFill>
+                <a:latin typeface="Play"/>
+                <a:ea typeface="Play"/>
+                <a:cs typeface="Play"/>
+              </a:defRPr>
+            </a:pPr>
+            <a:r>
+              <a:rPr sz="1800" b="0">
+                <a:solidFill>
+                  <a:srgbClr val="000000"/>
+                </a:solidFill>
+                <a:latin typeface="Play"/>
+                <a:ea typeface="Play"/>
+                <a:cs typeface="Play"/>
+              </a:rPr>
+              <a:t>Время сборки сократилось до 4 мин</a:t>
+            </a:r>
+          </a:p>
+        </p:txBody>
+      </p:sp>
+      <p:sp>
+        <p:nvSpPr>
+          <p:cNvPr id="788" name="card_1"/>
+          <p:cNvSpPr txBox="1"/>
+          <p:nvPr/>
+        </p:nvSpPr>
+        <p:spPr>
+          <a:xfrm>
+            <a:off x="4533496" y="3922334"/>
+            <a:ext cx="2583926" cy="937548"/>
+          </a:xfrm>
+          <a:prstGeom prst="rect">
+            <a:avLst/>
+          </a:prstGeom>
+          <a:noFill/>
+        </p:spPr>
+        <p:txBody>
+          <a:bodyPr wrap="square" lIns="76200" rIns="76200" tIns="50800" bIns="50800">
+            <a:spAutoFit/>
+          </a:bodyPr>
+          <a:lstStyle/>
+          <a:p>
+            <a:pPr algn="l">
+              <a:spcAft>
+                <a:spcPts val="300"/>
+              </a:spcAft>
+              <a:defRPr sz="1800" b="0">
+                <a:solidFill>
+                  <a:srgbClr val="000000"/>
+                </a:solidFill>
+                <a:latin typeface="Play"/>
+                <a:ea typeface="Play"/>
+                <a:cs typeface="Play"/>
+              </a:defRPr>
+            </a:pPr>
+            <a:r>
+              <a:rPr sz="1800" b="0">
+                <a:solidFill>
+                  <a:srgbClr val="000000"/>
+                </a:solidFill>
+                <a:latin typeface="Play"/>
+                <a:ea typeface="Play"/>
+                <a:cs typeface="Play"/>
+              </a:rPr>
+              <a:t>Первый вариант готов за 1 день</a:t>
+            </a:r>
+          </a:p>
+        </p:txBody>
+      </p:sp>
+      <p:sp>
+        <p:nvSpPr>
+          <p:cNvPr id="789" name="card_2"/>
+          <p:cNvSpPr txBox="1"/>
+          <p:nvPr/>
+        </p:nvSpPr>
+        <p:spPr>
+          <a:xfrm>
+            <a:off x="8264469" y="3926700"/>
+            <a:ext cx="2575194" cy="1160137"/>
+          </a:xfrm>
+          <a:prstGeom prst="rect">
+            <a:avLst/>
+          </a:prstGeom>
+          <a:noFill/>
+        </p:spPr>
+        <p:txBody>
+          <a:bodyPr wrap="square" lIns="76200" rIns="76200" tIns="50800" bIns="50800">
+            <a:spAutoFit/>
+          </a:bodyPr>
+          <a:lstStyle/>
+          <a:p>
+            <a:pPr algn="l">
+              <a:spcAft>
+                <a:spcPts val="300"/>
+              </a:spcAft>
+              <a:defRPr sz="1800" b="0">
+                <a:solidFill>
+                  <a:srgbClr val="000000"/>
+                </a:solidFill>
+                <a:latin typeface="Play"/>
+                <a:ea typeface="Play"/>
+                <a:cs typeface="Play"/>
+              </a:defRPr>
+            </a:pPr>
+            <a:r>
+              <a:rPr sz="1800" b="0">
+                <a:solidFill>
+                  <a:srgbClr val="000000"/>
+                </a:solidFill>
+                <a:latin typeface="Play"/>
+                <a:ea typeface="Play"/>
+                <a:cs typeface="Play"/>
+              </a:rPr>
+              <a:t>Стиль-нарушения упали до 2 из 68</a:t>
+            </a:r>
+          </a:p>
+        </p:txBody>
+      </p:sp>
+    </p:spTree>
+  </p:cSld>
+  <p:clrMapOvr>
+    <a:masterClrMapping/>
+  </p:clrMapOvr>
+</p:sld>
+</file>
+
+<file path=ppt/slides/slide60.xml><?xml version="1.0" encoding="utf-8"?>
+<p:sld xmlns:a="http://schemas.openxmlformats.org/drawingml/2006/main" xmlns:p="http://schemas.openxmlformats.org/presentationml/2006/main" xmlns:r="http://schemas.openxmlformats.org/officeDocument/2006/relationships">
+  <p:cSld>
+    <p:bg>
+      <p:bgPr>
+        <a:solidFill>
+          <a:schemeClr val="lt2"/>
+        </a:solidFill>
+      </p:bgPr>
+    </p:bg>
+    <p:spTree>
+      <p:nvGrpSpPr>
+        <p:cNvPr id="1" name=""/>
+        <p:cNvGrpSpPr/>
+        <p:nvPr/>
+      </p:nvGrpSpPr>
+      <p:grpSpPr/>
+      <p:sp>
+        <p:nvSpPr>
+          <p:cNvPr id="795" name="Google Shape;795;p60"/>
+          <p:cNvSpPr txBox="1"/>
+          <p:nvPr/>
+        </p:nvSpPr>
+        <p:spPr>
+          <a:xfrm>
+            <a:off x="18692059" y="4674436"/>
+            <a:ext cx="4304330" cy="678198"/>
+          </a:xfrm>
+          <a:prstGeom prst="rect">
+            <a:avLst/>
+          </a:prstGeom>
+          <a:noFill/>
+          <a:ln>
+            <a:noFill/>
+          </a:ln>
+        </p:spPr>
+        <p:txBody>
+          <a:bodyPr anchorCtr="0" anchor="t" bIns="45700" lIns="91425" spcFirstLastPara="1" rIns="91425" wrap="square" tIns="45700">
+            <a:noAutofit/>
+          </a:bodyPr>
+          <a:lstStyle/>
+          <a:p>
+            <a:pPr indent="0" lvl="0" marL="0" marR="0" rtl="0" algn="l">
+              <a:lnSpc>
+                <a:spcPct val="110000"/>
+              </a:lnSpc>
+              <a:spcBef>
+                <a:spcPts val="0"/>
+              </a:spcBef>
+              <a:spcAft>
+                <a:spcPts val="0"/>
+              </a:spcAft>
+              <a:buClr>
+                <a:schemeClr val="dk1"/>
+              </a:buClr>
+              <a:buSzPts val="1600"/>
+              <a:buFont typeface="Arial"/>
+              <a:buNone/>
+            </a:pPr>
+            <a:r>
+              <a:t/>
+            </a:r>
+            <a:endParaRPr sz="1600">
+              <a:solidFill>
+                <a:schemeClr val="dk1"/>
+              </a:solidFill>
+              <a:latin typeface="Arial"/>
+              <a:ea typeface="Arial"/>
+              <a:cs typeface="Arial"/>
+              <a:sym typeface="Arial"/>
+            </a:endParaRPr>
+          </a:p>
+        </p:txBody>
+      </p:sp>
+      <p:pic>
+        <p:nvPicPr>
+          <p:cNvPr id="797" name="Google Shape;797;p60"/>
+          <p:cNvPicPr preferRelativeResize="0"/>
+          <p:nvPr/>
+        </p:nvPicPr>
+        <p:blipFill rotWithShape="1">
+          <a:blip r:embed="rId3">
+            <a:alphaModFix/>
+          </a:blip>
+          <a:srcRect b="0" l="0" r="0" t="0"/>
+          <a:stretch/>
+        </p:blipFill>
+        <p:spPr>
+          <a:xfrm>
+            <a:off x="669096" y="2601017"/>
+            <a:ext cx="450850" cy="450850"/>
+          </a:xfrm>
+          <a:prstGeom prst="rect">
+            <a:avLst/>
+          </a:prstGeom>
+          <a:noFill/>
+          <a:ln>
+            <a:noFill/>
+          </a:ln>
+        </p:spPr>
+      </p:pic>
+      <p:pic>
+        <p:nvPicPr>
+          <p:cNvPr id="798" name="Google Shape;798;p60"/>
+          <p:cNvPicPr preferRelativeResize="0"/>
+          <p:nvPr/>
+        </p:nvPicPr>
+        <p:blipFill rotWithShape="1">
+          <a:blip r:embed="rId4">
+            <a:alphaModFix/>
+          </a:blip>
+          <a:srcRect b="0" l="0" r="0" t="0"/>
+          <a:stretch/>
+        </p:blipFill>
+        <p:spPr>
+          <a:xfrm>
+            <a:off x="8097007" y="2603210"/>
+            <a:ext cx="450851" cy="450851"/>
+          </a:xfrm>
+          <a:prstGeom prst="rect">
+            <a:avLst/>
+          </a:prstGeom>
+          <a:noFill/>
+          <a:ln>
+            <a:noFill/>
+          </a:ln>
+        </p:spPr>
+      </p:pic>
+      <p:pic>
+        <p:nvPicPr>
+          <p:cNvPr id="799" name="Google Shape;799;p60"/>
+          <p:cNvPicPr preferRelativeResize="0"/>
+          <p:nvPr/>
+        </p:nvPicPr>
+        <p:blipFill rotWithShape="1">
+          <a:blip r:embed="rId5">
+            <a:alphaModFix/>
+          </a:blip>
+          <a:srcRect b="0" l="0" r="0" t="0"/>
+          <a:stretch/>
+        </p:blipFill>
+        <p:spPr>
+          <a:xfrm>
+            <a:off x="4383052" y="2601017"/>
+            <a:ext cx="450850" cy="450850"/>
+          </a:xfrm>
+          <a:prstGeom prst="rect">
+            <a:avLst/>
+          </a:prstGeom>
+          <a:noFill/>
+          <a:ln>
+            <a:noFill/>
+          </a:ln>
+        </p:spPr>
+      </p:pic>
+      <p:sp>
+        <p:nvSpPr>
+          <p:cNvPr id="800" name="title"/>
+          <p:cNvSpPr txBox="1"/>
+          <p:nvPr/>
+        </p:nvSpPr>
+        <p:spPr>
+          <a:xfrm>
+            <a:off x="677387" y="692177"/>
+            <a:ext cx="10855878" cy="1447800"/>
+          </a:xfrm>
+          <a:prstGeom prst="rect">
+            <a:avLst/>
+          </a:prstGeom>
+          <a:noFill/>
+        </p:spPr>
+        <p:txBody>
+          <a:bodyPr wrap="square" lIns="76200" rIns="76200" tIns="50800" bIns="50800">
+            <a:spAutoFit/>
+          </a:bodyPr>
+          <a:lstStyle/>
+          <a:p>
+            <a:pPr algn="l">
+              <a:spcAft>
+                <a:spcPts val="300"/>
+              </a:spcAft>
+              <a:defRPr sz="4000">
+                <a:solidFill>
+                  <a:srgbClr val="000000"/>
+                </a:solidFill>
+                <a:latin typeface="Arial"/>
+                <a:ea typeface="Arial"/>
+                <a:cs typeface="Arial"/>
+              </a:defRPr>
+            </a:pPr>
+            <a:r>
+              <a:rPr sz="4000">
+                <a:solidFill>
+                  <a:srgbClr val="000000"/>
+                </a:solidFill>
+                <a:latin typeface="Arial"/>
+                <a:ea typeface="Arial"/>
+                <a:cs typeface="Arial"/>
+              </a:rPr>
+              <a:t>Ресурсы и сроки: инфраструктура и стоимость</a:t>
+            </a:r>
+          </a:p>
+        </p:txBody>
+      </p:sp>
+      <p:sp>
+        <p:nvSpPr>
+          <p:cNvPr id="801" name="card_0"/>
+          <p:cNvSpPr txBox="1"/>
+          <p:nvPr/>
+        </p:nvSpPr>
+        <p:spPr>
+          <a:xfrm>
+            <a:off x="806889" y="3427872"/>
+            <a:ext cx="2583926" cy="937548"/>
+          </a:xfrm>
+          <a:prstGeom prst="rect">
+            <a:avLst/>
+          </a:prstGeom>
+          <a:noFill/>
+        </p:spPr>
+        <p:txBody>
+          <a:bodyPr wrap="square" lIns="76200" rIns="76200" tIns="50800" bIns="50800">
+            <a:spAutoFit/>
+          </a:bodyPr>
+          <a:lstStyle/>
+          <a:p>
+            <a:pPr algn="l">
+              <a:spcAft>
+                <a:spcPts val="300"/>
+              </a:spcAft>
+              <a:defRPr sz="1800" b="0">
+                <a:solidFill>
+                  <a:srgbClr val="000000"/>
+                </a:solidFill>
+                <a:latin typeface="Play"/>
+                <a:ea typeface="Play"/>
+                <a:cs typeface="Play"/>
+              </a:defRPr>
+            </a:pPr>
+            <a:r>
+              <a:rPr sz="1800" b="0">
+                <a:solidFill>
+                  <a:srgbClr val="000000"/>
+                </a:solidFill>
+                <a:latin typeface="Play"/>
+                <a:ea typeface="Play"/>
+                <a:cs typeface="Play"/>
+              </a:rPr>
+              <a:t>Сервис работает на 2 vCPU / 2 GB RAM</a:t>
+            </a:r>
+          </a:p>
+        </p:txBody>
+      </p:sp>
+      <p:sp>
+        <p:nvSpPr>
+          <p:cNvPr id="802" name="card_1"/>
+          <p:cNvSpPr txBox="1"/>
+          <p:nvPr/>
+        </p:nvSpPr>
+        <p:spPr>
+          <a:xfrm>
+            <a:off x="4533496" y="3421494"/>
+            <a:ext cx="2583926" cy="937548"/>
+          </a:xfrm>
+          <a:prstGeom prst="rect">
+            <a:avLst/>
+          </a:prstGeom>
+          <a:noFill/>
+        </p:spPr>
+        <p:txBody>
+          <a:bodyPr wrap="square" lIns="76200" rIns="76200" tIns="50800" bIns="50800">
+            <a:spAutoFit/>
+          </a:bodyPr>
+          <a:lstStyle/>
+          <a:p>
+            <a:pPr algn="l">
+              <a:spcAft>
+                <a:spcPts val="300"/>
+              </a:spcAft>
+              <a:defRPr sz="1600" b="0">
+                <a:solidFill>
+                  <a:srgbClr val="000000"/>
+                </a:solidFill>
+                <a:latin typeface="Play"/>
+                <a:ea typeface="Play"/>
+                <a:cs typeface="Play"/>
+              </a:defRPr>
+            </a:pPr>
+            <a:r>
+              <a:rPr sz="1600" b="0">
+                <a:solidFill>
+                  <a:srgbClr val="000000"/>
+                </a:solidFill>
+                <a:latin typeface="Play"/>
+                <a:ea typeface="Play"/>
+                <a:cs typeface="Play"/>
+              </a:rPr>
+              <a:t>Модель gpt-oss-20b, инференс 1400 руб за 6 недель</a:t>
+            </a:r>
+          </a:p>
+        </p:txBody>
+      </p:sp>
+      <p:sp>
+        <p:nvSpPr>
+          <p:cNvPr id="803" name="card_2"/>
+          <p:cNvSpPr txBox="1"/>
+          <p:nvPr/>
+        </p:nvSpPr>
+        <p:spPr>
+          <a:xfrm>
+            <a:off x="8264469" y="3425860"/>
+            <a:ext cx="2575194" cy="1160137"/>
+          </a:xfrm>
+          <a:prstGeom prst="rect">
+            <a:avLst/>
+          </a:prstGeom>
+          <a:noFill/>
+        </p:spPr>
+        <p:txBody>
+          <a:bodyPr wrap="square" lIns="76200" rIns="76200" tIns="50800" bIns="50800">
+            <a:spAutoFit/>
+          </a:bodyPr>
+          <a:lstStyle/>
+          <a:p>
+            <a:pPr algn="l">
+              <a:spcAft>
+                <a:spcPts val="300"/>
+              </a:spcAft>
+              <a:defRPr sz="1800" b="0">
+                <a:solidFill>
+                  <a:srgbClr val="000000"/>
+                </a:solidFill>
+                <a:latin typeface="Play"/>
+                <a:ea typeface="Play"/>
+                <a:cs typeface="Play"/>
+              </a:defRPr>
+            </a:pPr>
+            <a:r>
+              <a:rPr sz="1800" b="0">
+                <a:solidFill>
+                  <a:srgbClr val="000000"/>
+                </a:solidFill>
+                <a:latin typeface="Play"/>
+                <a:ea typeface="Play"/>
+                <a:cs typeface="Play"/>
+              </a:rPr>
+              <a:t>Параллельность до 20 задач без очереди</a:t>
+            </a:r>
+          </a:p>
+        </p:txBody>
+      </p:sp>
+    </p:spTree>
+  </p:cSld>
+  <p:clrMapOvr>
+    <a:masterClrMapping/>
+  </p:clrMapOvr>
+</p:sld>
+</file>
+
+<file path=ppt/slides/slide61.xml><?xml version="1.0" encoding="utf-8"?>
 <p:sld xmlns:a="http://schemas.openxmlformats.org/drawingml/2006/main" xmlns:p="http://schemas.openxmlformats.org/presentationml/2006/main" xmlns:r="http://schemas.openxmlformats.org/officeDocument/2006/relationships">
   <p:cSld>
     <p:spTree>
@@ -7394,7 +9361,7 @@
         <p:spPr>
           <a:xfrm>
             <a:off x="677387" y="692177"/>
-            <a:ext cx="10855878" cy="822960"/>
+            <a:ext cx="10855878" cy="1447800"/>
           </a:xfrm>
           <a:prstGeom prst="rect">
             <a:avLst/>
@@ -7429,7 +9396,7 @@
                 <a:ea typeface="Arial"/>
                 <a:cs typeface="Arial"/>
               </a:rPr>
-              <a:t>Контекст и возможность</a:t>
+              <a:t>Пилотный план: 6 недель, 2 команды, 68 колод</a:t>
             </a:r>
           </a:p>
         </p:txBody>
@@ -7442,8 +9409,8 @@
         </p:nvSpPr>
         <p:spPr>
           <a:xfrm>
-            <a:off x="677387" y="2200937"/>
-            <a:ext cx="10855878" cy="1098550"/>
+            <a:off x="677387" y="3591534"/>
+            <a:ext cx="10855878" cy="702310"/>
           </a:xfrm>
           <a:prstGeom prst="rect">
             <a:avLst/>
@@ -7478,7 +9445,7 @@
                 <a:ea typeface="Play"/>
                 <a:cs typeface="Play"/>
               </a:rPr>
-              <a:t>• 42 колоды собраны вручную 2026</a:t>
+              <a:t>• Пилот 6 недель, 2 команды, 68 презентаций</a:t>
             </a:r>
           </a:p>
           <a:p>
@@ -7504,7 +9471,7 @@
                 <a:ea typeface="Play"/>
                 <a:cs typeface="Play"/>
               </a:rPr>
-              <a:t>• Сборка колоды занимает 186 мин</a:t>
+              <a:t>• Дизайнеры закрыли 38 запросов вместо 11</a:t>
             </a:r>
           </a:p>
           <a:p>
@@ -7530,15 +9497,121 @@
                 <a:ea typeface="Play"/>
                 <a:cs typeface="Play"/>
               </a:rPr>
-              <a:t>• Правки ревью добавляют 74 мин</a:t>
+              <a:t>• План расширения: 4 команды в 3-м квартале</a:t>
             </a:r>
           </a:p>
+        </p:txBody>
+      </p:sp>
+      <p:sp>
+        <p:nvSpPr>
+          <p:cNvPr id="989" name="Rectangle 988"/>
+          <p:cNvSpPr/>
+          <p:nvPr/>
+        </p:nvSpPr>
+        <p:spPr>
+          <a:xfrm>
+            <a:off x="677387" y="4532459"/>
+            <a:ext cx="10855878" cy="17445"/>
+          </a:xfrm>
+          <a:prstGeom prst="rect">
+            <a:avLst/>
+          </a:prstGeom>
+          <a:solidFill>
+            <a:srgbClr val="0077FF"/>
+          </a:solidFill>
+          <a:ln>
+            <a:noFill/>
+          </a:ln>
+        </p:spPr>
+        <p:style>
+          <a:lnRef idx="1">
+            <a:schemeClr val="accent1"/>
+          </a:lnRef>
+          <a:fillRef idx="3">
+            <a:schemeClr val="accent1"/>
+          </a:fillRef>
+          <a:effectRef idx="2">
+            <a:schemeClr val="accent1"/>
+          </a:effectRef>
+          <a:fontRef idx="minor">
+            <a:schemeClr val="lt1"/>
+          </a:fontRef>
+        </p:style>
+        <p:txBody>
+          <a:bodyPr rtlCol="0" anchor="ctr"/>
+          <a:lstStyle/>
           <a:p>
-            <a:pPr algn="l">
-              <a:spcAft>
-                <a:spcPts val="300"/>
-              </a:spcAft>
-              <a:defRPr sz="1200">
+            <a:pPr algn="ctr"/>
+          </a:p>
+        </p:txBody>
+      </p:sp>
+      <p:sp>
+        <p:nvSpPr>
+          <p:cNvPr id="990" name="Oval 989"/>
+          <p:cNvSpPr/>
+          <p:nvPr/>
+        </p:nvSpPr>
+        <p:spPr>
+          <a:xfrm>
+            <a:off x="2422733" y="4477215"/>
+            <a:ext cx="127933" cy="127933"/>
+          </a:xfrm>
+          <a:prstGeom prst="ellipse">
+            <a:avLst/>
+          </a:prstGeom>
+          <a:solidFill>
+            <a:srgbClr val="0077FF"/>
+          </a:solidFill>
+          <a:ln>
+            <a:noFill/>
+          </a:ln>
+        </p:spPr>
+        <p:style>
+          <a:lnRef idx="1">
+            <a:schemeClr val="accent1"/>
+          </a:lnRef>
+          <a:fillRef idx="3">
+            <a:schemeClr val="accent1"/>
+          </a:fillRef>
+          <a:effectRef idx="2">
+            <a:schemeClr val="accent1"/>
+          </a:effectRef>
+          <a:fontRef idx="minor">
+            <a:schemeClr val="lt1"/>
+          </a:fontRef>
+        </p:style>
+        <p:txBody>
+          <a:bodyPr rtlCol="0" anchor="ctr"/>
+          <a:lstStyle/>
+          <a:p>
+            <a:pPr algn="ctr"/>
+          </a:p>
+        </p:txBody>
+      </p:sp>
+      <p:sp>
+        <p:nvSpPr>
+          <p:cNvPr id="991" name="TextBox 990"/>
+          <p:cNvSpPr txBox="1"/>
+          <p:nvPr/>
+        </p:nvSpPr>
+        <p:spPr>
+          <a:xfrm>
+            <a:off x="677387" y="4264962"/>
+            <a:ext cx="5427939" cy="220976"/>
+          </a:xfrm>
+          <a:prstGeom prst="rect">
+            <a:avLst/>
+          </a:prstGeom>
+          <a:noFill/>
+        </p:spPr>
+        <p:txBody>
+          <a:bodyPr wrap="square" lIns="12700" rIns="12700" tIns="12700" bIns="12700">
+            <a:spAutoFit/>
+          </a:bodyPr>
+          <a:lstStyle/>
+          <a:p>
+            <a:pPr algn="ctr">
+              <a:defRPr sz="1400" b="0">
                 <a:solidFill>
                   <a:srgbClr val="000000"/>
                 </a:solidFill>
@@ -7548,7 +9621,7 @@
               </a:defRPr>
             </a:pPr>
             <a:r>
-              <a:rPr sz="1200">
+              <a:rPr sz="1400" b="0">
                 <a:solidFill>
                   <a:srgbClr val="000000"/>
                 </a:solidFill>
@@ -7556,15 +9629,78 @@
                 <a:ea typeface="Play"/>
                 <a:cs typeface="Play"/>
               </a:rPr>
-              <a:t>• 19/42 колод нарушают стиль</a:t>
+              <a:t>Третий квартал 2026</a:t>
             </a:r>
           </a:p>
+        </p:txBody>
+      </p:sp>
+      <p:sp>
+        <p:nvSpPr>
+          <p:cNvPr id="992" name="Oval 991"/>
+          <p:cNvSpPr/>
+          <p:nvPr/>
+        </p:nvSpPr>
+        <p:spPr>
+          <a:xfrm>
+            <a:off x="6041359" y="4477215"/>
+            <a:ext cx="127933" cy="127933"/>
+          </a:xfrm>
+          <a:prstGeom prst="ellipse">
+            <a:avLst/>
+          </a:prstGeom>
+          <a:solidFill>
+            <a:srgbClr val="0077FF"/>
+          </a:solidFill>
+          <a:ln>
+            <a:noFill/>
+          </a:ln>
+        </p:spPr>
+        <p:style>
+          <a:lnRef idx="1">
+            <a:schemeClr val="accent1"/>
+          </a:lnRef>
+          <a:fillRef idx="3">
+            <a:schemeClr val="accent1"/>
+          </a:fillRef>
+          <a:effectRef idx="2">
+            <a:schemeClr val="accent1"/>
+          </a:effectRef>
+          <a:fontRef idx="minor">
+            <a:schemeClr val="lt1"/>
+          </a:fontRef>
+        </p:style>
+        <p:txBody>
+          <a:bodyPr rtlCol="0" anchor="ctr"/>
+          <a:lstStyle/>
           <a:p>
-            <a:pPr algn="l">
-              <a:spcAft>
-                <a:spcPts val="300"/>
-              </a:spcAft>
-              <a:defRPr sz="1200">
+            <a:pPr algn="ctr"/>
+          </a:p>
+        </p:txBody>
+      </p:sp>
+      <p:sp>
+        <p:nvSpPr>
+          <p:cNvPr id="993" name="TextBox 992"/>
+          <p:cNvSpPr txBox="1"/>
+          <p:nvPr/>
+        </p:nvSpPr>
+        <p:spPr>
+          <a:xfrm>
+            <a:off x="3391356" y="4660393"/>
+            <a:ext cx="5427939" cy="220976"/>
+          </a:xfrm>
+          <a:prstGeom prst="rect">
+            <a:avLst/>
+          </a:prstGeom>
+          <a:noFill/>
+        </p:spPr>
+        <p:txBody>
+          <a:bodyPr wrap="square" lIns="12700" rIns="12700" tIns="12700" bIns="12700">
+            <a:spAutoFit/>
+          </a:bodyPr>
+          <a:lstStyle/>
+          <a:p>
+            <a:pPr algn="ctr">
+              <a:defRPr sz="1400" b="0">
                 <a:solidFill>
                   <a:srgbClr val="000000"/>
                 </a:solidFill>
@@ -7574,7 +9710,7 @@
               </a:defRPr>
             </a:pPr>
             <a:r>
-              <a:rPr sz="1200">
+              <a:rPr sz="1400" b="0">
                 <a:solidFill>
                   <a:srgbClr val="000000"/>
                 </a:solidFill>
@@ -7582,415 +9718,100 @@
                 <a:ea typeface="Play"/>
                 <a:cs typeface="Play"/>
               </a:rPr>
-              <a:t>• Дизайн‑отдел 4 закрывает 11 запросов/нед.</a:t>
+              <a:t>Четвёртый квартал 2026</a:t>
             </a:r>
           </a:p>
         </p:txBody>
       </p:sp>
-      <p:graphicFrame>
-        <p:nvGraphicFramePr>
-          <p:cNvPr id="989" name="Table 988"/>
-          <p:cNvGraphicFramePr>
-            <a:graphicFrameLocks noGrp="1"/>
-          </p:cNvGraphicFramePr>
+      <p:sp>
+        <p:nvSpPr>
+          <p:cNvPr id="994" name="Oval 993"/>
+          <p:cNvSpPr/>
           <p:nvPr/>
-        </p:nvGraphicFramePr>
-        <p:xfrm>
-          <a:off x="677387" y="2928626"/>
-          <a:ext cx="10855878" cy="662907"/>
-        </p:xfrm>
-        <a:graphic>
-          <a:graphicData uri="http://schemas.openxmlformats.org/drawingml/2006/table">
-            <a:tbl>
-              <a:tblPr firstRow="1" bandRow="1">
-                <a:tableStyleId>{5C22544A-7EE6-4342-B048-85BDC9FD1C3A}</a:tableStyleId>
-              </a:tblPr>
-              <a:tblGrid>
-                <a:gridCol w="5427939"/>
-                <a:gridCol w="5427939"/>
-              </a:tblGrid>
-              <a:tr h="94701">
-                <a:tc>
-                  <a:txBody>
-                    <a:bodyPr/>
-                    <a:lstStyle/>
-                    <a:p>
-                      <a:pPr>
-                        <a:defRPr sz="1300" b="1">
-                          <a:solidFill>
-                            <a:srgbClr val="FFFFFF"/>
-                          </a:solidFill>
-                          <a:latin typeface="Play"/>
-                          <a:ea typeface="Play"/>
-                          <a:cs typeface="Play"/>
-                        </a:defRPr>
-                      </a:pPr>
-                      <a:r>
-                        <a:t>Показатель</a:t>
-                      </a:r>
-                    </a:p>
-                  </a:txBody>
-                  <a:tcPr>
-                    <a:solidFill>
-                      <a:srgbClr val="0077FF"/>
-                    </a:solidFill>
-                  </a:tcPr>
-                </a:tc>
-                <a:tc>
-                  <a:txBody>
-                    <a:bodyPr/>
-                    <a:lstStyle/>
-                    <a:p>
-                      <a:pPr>
-                        <a:defRPr sz="1300" b="1">
-                          <a:solidFill>
-                            <a:srgbClr val="FFFFFF"/>
-                          </a:solidFill>
-                          <a:latin typeface="Play"/>
-                          <a:ea typeface="Play"/>
-                          <a:cs typeface="Play"/>
-                        </a:defRPr>
-                      </a:pPr>
-                      <a:r>
-                        <a:t>Значение</a:t>
-                      </a:r>
-                    </a:p>
-                  </a:txBody>
-                  <a:tcPr>
-                    <a:solidFill>
-                      <a:srgbClr val="0077FF"/>
-                    </a:solidFill>
-                  </a:tcPr>
-                </a:tc>
-              </a:tr>
-              <a:tr h="94701">
-                <a:tc>
-                  <a:txBody>
-                    <a:bodyPr/>
-                    <a:lstStyle/>
-                    <a:p>
-                      <a:pPr>
-                        <a:defRPr sz="1300" b="0">
-                          <a:solidFill>
-                            <a:srgbClr val="000000"/>
-                          </a:solidFill>
-                          <a:latin typeface="Play"/>
-                          <a:ea typeface="Play"/>
-                          <a:cs typeface="Play"/>
-                        </a:defRPr>
-                      </a:pPr>
-                      <a:r>
-                        <a:t>Колоды</a:t>
-                      </a:r>
-                    </a:p>
-                  </a:txBody>
-                  <a:tcPr>
-                    <a:solidFill>
-                      <a:srgbClr val="FFFFFF"/>
-                    </a:solidFill>
-                  </a:tcPr>
-                </a:tc>
-                <a:tc>
-                  <a:txBody>
-                    <a:bodyPr/>
-                    <a:lstStyle/>
-                    <a:p>
-                      <a:pPr>
-                        <a:defRPr sz="1300" b="0">
-                          <a:solidFill>
-                            <a:srgbClr val="000000"/>
-                          </a:solidFill>
-                          <a:latin typeface="Play"/>
-                          <a:ea typeface="Play"/>
-                          <a:cs typeface="Play"/>
-                        </a:defRPr>
-                      </a:pPr>
-                      <a:r>
-                        <a:t>42</a:t>
-                      </a:r>
-                    </a:p>
-                  </a:txBody>
-                  <a:tcPr>
-                    <a:solidFill>
-                      <a:srgbClr val="FFFFFF"/>
-                    </a:solidFill>
-                  </a:tcPr>
-                </a:tc>
-              </a:tr>
-              <a:tr h="94701">
-                <a:tc>
-                  <a:txBody>
-                    <a:bodyPr/>
-                    <a:lstStyle/>
-                    <a:p>
-                      <a:pPr>
-                        <a:defRPr sz="1300" b="0">
-                          <a:solidFill>
-                            <a:srgbClr val="000000"/>
-                          </a:solidFill>
-                          <a:latin typeface="Play"/>
-                          <a:ea typeface="Play"/>
-                          <a:cs typeface="Play"/>
-                        </a:defRPr>
-                      </a:pPr>
-                      <a:r>
-                        <a:t>Сборка колоды</a:t>
-                      </a:r>
-                    </a:p>
-                  </a:txBody>
-                  <a:tcPr>
-                    <a:solidFill>
-                      <a:srgbClr val="FFFFFF"/>
-                    </a:solidFill>
-                  </a:tcPr>
-                </a:tc>
-                <a:tc>
-                  <a:txBody>
-                    <a:bodyPr/>
-                    <a:lstStyle/>
-                    <a:p>
-                      <a:pPr>
-                        <a:defRPr sz="1300" b="0">
-                          <a:solidFill>
-                            <a:srgbClr val="000000"/>
-                          </a:solidFill>
-                          <a:latin typeface="Play"/>
-                          <a:ea typeface="Play"/>
-                          <a:cs typeface="Play"/>
-                        </a:defRPr>
-                      </a:pPr>
-                      <a:r>
-                        <a:t>186 мин</a:t>
-                      </a:r>
-                    </a:p>
-                  </a:txBody>
-                  <a:tcPr>
-                    <a:solidFill>
-                      <a:srgbClr val="FFFFFF"/>
-                    </a:solidFill>
-                  </a:tcPr>
-                </a:tc>
-              </a:tr>
-              <a:tr h="94701">
-                <a:tc>
-                  <a:txBody>
-                    <a:bodyPr/>
-                    <a:lstStyle/>
-                    <a:p>
-                      <a:pPr>
-                        <a:defRPr sz="1300" b="0">
-                          <a:solidFill>
-                            <a:srgbClr val="000000"/>
-                          </a:solidFill>
-                          <a:latin typeface="Play"/>
-                          <a:ea typeface="Play"/>
-                          <a:cs typeface="Play"/>
-                        </a:defRPr>
-                      </a:pPr>
-                      <a:r>
-                        <a:t>Правки</a:t>
-                      </a:r>
-                    </a:p>
-                  </a:txBody>
-                  <a:tcPr>
-                    <a:solidFill>
-                      <a:srgbClr val="FFFFFF"/>
-                    </a:solidFill>
-                  </a:tcPr>
-                </a:tc>
-                <a:tc>
-                  <a:txBody>
-                    <a:bodyPr/>
-                    <a:lstStyle/>
-                    <a:p>
-                      <a:pPr>
-                        <a:defRPr sz="1300" b="0">
-                          <a:solidFill>
-                            <a:srgbClr val="000000"/>
-                          </a:solidFill>
-                          <a:latin typeface="Play"/>
-                          <a:ea typeface="Play"/>
-                          <a:cs typeface="Play"/>
-                        </a:defRPr>
-                      </a:pPr>
-                      <a:r>
-                        <a:t>74 мин</a:t>
-                      </a:r>
-                    </a:p>
-                  </a:txBody>
-                  <a:tcPr>
-                    <a:solidFill>
-                      <a:srgbClr val="FFFFFF"/>
-                    </a:solidFill>
-                  </a:tcPr>
-                </a:tc>
-              </a:tr>
-              <a:tr h="94701">
-                <a:tc>
-                  <a:txBody>
-                    <a:bodyPr/>
-                    <a:lstStyle/>
-                    <a:p>
-                      <a:pPr>
-                        <a:defRPr sz="1300" b="0">
-                          <a:solidFill>
-                            <a:srgbClr val="000000"/>
-                          </a:solidFill>
-                          <a:latin typeface="Play"/>
-                          <a:ea typeface="Play"/>
-                          <a:cs typeface="Play"/>
-                        </a:defRPr>
-                      </a:pPr>
-                      <a:r>
-                        <a:t>Нарушения стиля</a:t>
-                      </a:r>
-                    </a:p>
-                  </a:txBody>
-                  <a:tcPr>
-                    <a:solidFill>
-                      <a:srgbClr val="FFFFFF"/>
-                    </a:solidFill>
-                  </a:tcPr>
-                </a:tc>
-                <a:tc>
-                  <a:txBody>
-                    <a:bodyPr/>
-                    <a:lstStyle/>
-                    <a:p>
-                      <a:pPr>
-                        <a:defRPr sz="1300" b="0">
-                          <a:solidFill>
-                            <a:srgbClr val="000000"/>
-                          </a:solidFill>
-                          <a:latin typeface="Play"/>
-                          <a:ea typeface="Play"/>
-                          <a:cs typeface="Play"/>
-                        </a:defRPr>
-                      </a:pPr>
-                      <a:r>
-                        <a:t>19/42</a:t>
-                      </a:r>
-                    </a:p>
-                  </a:txBody>
-                  <a:tcPr>
-                    <a:solidFill>
-                      <a:srgbClr val="FFFFFF"/>
-                    </a:solidFill>
-                  </a:tcPr>
-                </a:tc>
-              </a:tr>
-              <a:tr h="94701">
-                <a:tc>
-                  <a:txBody>
-                    <a:bodyPr/>
-                    <a:lstStyle/>
-                    <a:p>
-                      <a:pPr>
-                        <a:defRPr sz="1300" b="0">
-                          <a:solidFill>
-                            <a:srgbClr val="000000"/>
-                          </a:solidFill>
-                          <a:latin typeface="Play"/>
-                          <a:ea typeface="Play"/>
-                          <a:cs typeface="Play"/>
-                        </a:defRPr>
-                      </a:pPr>
-                      <a:r>
-                        <a:t>Запросы/неделя</a:t>
-                      </a:r>
-                    </a:p>
-                  </a:txBody>
-                  <a:tcPr>
-                    <a:solidFill>
-                      <a:srgbClr val="FFFFFF"/>
-                    </a:solidFill>
-                  </a:tcPr>
-                </a:tc>
-                <a:tc>
-                  <a:txBody>
-                    <a:bodyPr/>
-                    <a:lstStyle/>
-                    <a:p>
-                      <a:pPr>
-                        <a:defRPr sz="1300" b="0">
-                          <a:solidFill>
-                            <a:srgbClr val="000000"/>
-                          </a:solidFill>
-                          <a:latin typeface="Play"/>
-                          <a:ea typeface="Play"/>
-                          <a:cs typeface="Play"/>
-                        </a:defRPr>
-                      </a:pPr>
-                      <a:r>
-                        <a:t>11/27</a:t>
-                      </a:r>
-                    </a:p>
-                  </a:txBody>
-                  <a:tcPr>
-                    <a:solidFill>
-                      <a:srgbClr val="FFFFFF"/>
-                    </a:solidFill>
-                  </a:tcPr>
-                </a:tc>
-              </a:tr>
-              <a:tr h="94701">
-                <a:tc>
-                  <a:txBody>
-                    <a:bodyPr/>
-                    <a:lstStyle/>
-                    <a:p>
-                      <a:pPr>
-                        <a:defRPr sz="1300" b="0">
-                          <a:solidFill>
-                            <a:srgbClr val="000000"/>
-                          </a:solidFill>
-                          <a:latin typeface="Play"/>
-                          <a:ea typeface="Play"/>
-                          <a:cs typeface="Play"/>
-                        </a:defRPr>
-                      </a:pPr>
-                      <a:r>
-                        <a:t>Время ожидания</a:t>
-                      </a:r>
-                    </a:p>
-                  </a:txBody>
-                  <a:tcPr>
-                    <a:solidFill>
-                      <a:srgbClr val="FFFFFF"/>
-                    </a:solidFill>
-                  </a:tcPr>
-                </a:tc>
-                <a:tc>
-                  <a:txBody>
-                    <a:bodyPr/>
-                    <a:lstStyle/>
-                    <a:p>
-                      <a:pPr>
-                        <a:defRPr sz="1300" b="0">
-                          <a:solidFill>
-                            <a:srgbClr val="000000"/>
-                          </a:solidFill>
-                          <a:latin typeface="Play"/>
-                          <a:ea typeface="Play"/>
-                          <a:cs typeface="Play"/>
-                        </a:defRPr>
-                      </a:pPr>
-                      <a:r>
-                        <a:t>6 дней</a:t>
-                      </a:r>
-                    </a:p>
-                  </a:txBody>
-                  <a:tcPr>
-                    <a:solidFill>
-                      <a:srgbClr val="FFFFFF"/>
-                    </a:solidFill>
-                  </a:tcPr>
-                </a:tc>
-              </a:tr>
-            </a:tbl>
-          </a:graphicData>
-        </a:graphic>
-      </p:graphicFrame>
+        </p:nvSpPr>
+        <p:spPr>
+          <a:xfrm>
+            <a:off x="9659985" y="4477215"/>
+            <a:ext cx="127933" cy="127933"/>
+          </a:xfrm>
+          <a:prstGeom prst="ellipse">
+            <a:avLst/>
+          </a:prstGeom>
+          <a:solidFill>
+            <a:srgbClr val="0077FF"/>
+          </a:solidFill>
+          <a:ln>
+            <a:noFill/>
+          </a:ln>
+        </p:spPr>
+        <p:style>
+          <a:lnRef idx="1">
+            <a:schemeClr val="accent1"/>
+          </a:lnRef>
+          <a:fillRef idx="3">
+            <a:schemeClr val="accent1"/>
+          </a:fillRef>
+          <a:effectRef idx="2">
+            <a:schemeClr val="accent1"/>
+          </a:effectRef>
+          <a:fontRef idx="minor">
+            <a:schemeClr val="lt1"/>
+          </a:fontRef>
+        </p:style>
+        <p:txBody>
+          <a:bodyPr rtlCol="0" anchor="ctr"/>
+          <a:lstStyle/>
+          <a:p>
+            <a:pPr algn="ctr"/>
+          </a:p>
+        </p:txBody>
+      </p:sp>
+      <p:sp>
+        <p:nvSpPr>
+          <p:cNvPr id="995" name="TextBox 994"/>
+          <p:cNvSpPr txBox="1"/>
+          <p:nvPr/>
+        </p:nvSpPr>
+        <p:spPr>
+          <a:xfrm>
+            <a:off x="6105326" y="4264962"/>
+            <a:ext cx="5427939" cy="220976"/>
+          </a:xfrm>
+          <a:prstGeom prst="rect">
+            <a:avLst/>
+          </a:prstGeom>
+          <a:noFill/>
+        </p:spPr>
+        <p:txBody>
+          <a:bodyPr wrap="square" lIns="12700" rIns="12700" tIns="12700" bIns="12700">
+            <a:spAutoFit/>
+          </a:bodyPr>
+          <a:lstStyle/>
+          <a:p>
+            <a:pPr algn="ctr">
+              <a:defRPr sz="1400" b="0">
+                <a:solidFill>
+                  <a:srgbClr val="000000"/>
+                </a:solidFill>
+                <a:latin typeface="Play"/>
+                <a:ea typeface="Play"/>
+                <a:cs typeface="Play"/>
+              </a:defRPr>
+            </a:pPr>
+            <a:r>
+              <a:rPr sz="1400" b="0">
+                <a:solidFill>
+                  <a:srgbClr val="000000"/>
+                </a:solidFill>
+                <a:latin typeface="Play"/>
+                <a:ea typeface="Play"/>
+                <a:cs typeface="Play"/>
+              </a:rPr>
+              <a:t>Первый квартал 2027</a:t>
+            </a:r>
+          </a:p>
+        </p:txBody>
+      </p:sp>
     </p:spTree>
   </p:cSld>
   <p:clrMapOvr>
@@ -7999,7 +9820,471 @@
 </p:sld>
 </file>
 
-<file path=ppt/slides/slide58.xml><?xml version="1.0" encoding="utf-8"?>
+<file path=ppt/slides/slide62.xml><?xml version="1.0" encoding="utf-8"?>
+<p:sld xmlns:a="http://schemas.openxmlformats.org/drawingml/2006/main" xmlns:p="http://schemas.openxmlformats.org/presentationml/2006/main" xmlns:r="http://schemas.openxmlformats.org/officeDocument/2006/relationships">
+  <p:cSld>
+    <p:bg>
+      <p:bgPr>
+        <a:solidFill>
+          <a:schemeClr val="lt2"/>
+        </a:solidFill>
+      </p:bgPr>
+    </p:bg>
+    <p:spTree>
+      <p:nvGrpSpPr>
+        <p:cNvPr id="1" name=""/>
+        <p:cNvGrpSpPr/>
+        <p:nvPr/>
+      </p:nvGrpSpPr>
+      <p:grpSpPr/>
+      <p:pic>
+        <p:nvPicPr>
+          <p:cNvPr id="762" name="Google Shape;762;p58"/>
+          <p:cNvPicPr preferRelativeResize="0"/>
+          <p:nvPr/>
+        </p:nvPicPr>
+        <p:blipFill rotWithShape="1">
+          <a:blip r:embed="rId2">
+            <a:alphaModFix/>
+          </a:blip>
+          <a:srcRect b="0" l="0" r="0" t="0"/>
+          <a:stretch/>
+        </p:blipFill>
+        <p:spPr>
+          <a:xfrm>
+            <a:off x="8105070" y="2562300"/>
+            <a:ext cx="866700" cy="866700"/>
+          </a:xfrm>
+          <a:prstGeom prst="rect">
+            <a:avLst/>
+          </a:prstGeom>
+          <a:noFill/>
+          <a:ln>
+            <a:noFill/>
+          </a:ln>
+        </p:spPr>
+      </p:pic>
+      <p:sp>
+        <p:nvSpPr>
+          <p:cNvPr id="764" name="Google Shape;764;p58"/>
+          <p:cNvSpPr txBox="1"/>
+          <p:nvPr/>
+        </p:nvSpPr>
+        <p:spPr>
+          <a:xfrm>
+            <a:off x="18692059" y="4674436"/>
+            <a:ext cx="4304330" cy="678198"/>
+          </a:xfrm>
+          <a:prstGeom prst="rect">
+            <a:avLst/>
+          </a:prstGeom>
+          <a:noFill/>
+          <a:ln>
+            <a:noFill/>
+          </a:ln>
+        </p:spPr>
+        <p:txBody>
+          <a:bodyPr anchorCtr="0" anchor="t" bIns="45700" lIns="91425" spcFirstLastPara="1" rIns="91425" wrap="square" tIns="45700">
+            <a:noAutofit/>
+          </a:bodyPr>
+          <a:lstStyle/>
+          <a:p>
+            <a:pPr indent="0" lvl="0" marL="0" marR="0" rtl="0" algn="l">
+              <a:lnSpc>
+                <a:spcPct val="110000"/>
+              </a:lnSpc>
+              <a:spcBef>
+                <a:spcPts val="0"/>
+              </a:spcBef>
+              <a:spcAft>
+                <a:spcPts val="0"/>
+              </a:spcAft>
+              <a:buClr>
+                <a:schemeClr val="dk1"/>
+              </a:buClr>
+              <a:buSzPts val="1600"/>
+              <a:buFont typeface="Arial"/>
+              <a:buNone/>
+            </a:pPr>
+            <a:r>
+              <a:t/>
+            </a:r>
+            <a:endParaRPr sz="1600">
+              <a:solidFill>
+                <a:schemeClr val="dk1"/>
+              </a:solidFill>
+              <a:latin typeface="Arial"/>
+              <a:ea typeface="Arial"/>
+              <a:cs typeface="Arial"/>
+              <a:sym typeface="Arial"/>
+            </a:endParaRPr>
+          </a:p>
+        </p:txBody>
+      </p:sp>
+      <p:sp>
+        <p:nvSpPr>
+          <p:cNvPr id="768" name="Google Shape;768;p58"/>
+          <p:cNvSpPr/>
+          <p:nvPr/>
+        </p:nvSpPr>
+        <p:spPr>
+          <a:xfrm>
+            <a:off x="671513" y="2562300"/>
+            <a:ext cx="866700" cy="866700"/>
+          </a:xfrm>
+          <a:prstGeom prst="ellipse">
+            <a:avLst/>
+          </a:prstGeom>
+          <a:solidFill>
+            <a:schemeClr val="accent1"/>
+          </a:solidFill>
+          <a:ln>
+            <a:noFill/>
+          </a:ln>
+        </p:spPr>
+        <p:txBody>
+          <a:bodyPr anchorCtr="0" anchor="ctr" bIns="45700" lIns="91425" spcFirstLastPara="1" rIns="91425" wrap="square" tIns="45700">
+            <a:noAutofit/>
+          </a:bodyPr>
+          <a:lstStyle/>
+          <a:p>
+            <a:pPr indent="0" lvl="0" marL="0" marR="0" rtl="0" algn="ctr">
+              <a:spcBef>
+                <a:spcPts val="0"/>
+              </a:spcBef>
+              <a:spcAft>
+                <a:spcPts val="0"/>
+              </a:spcAft>
+              <a:buNone/>
+            </a:pPr>
+            <a:r>
+              <a:t/>
+            </a:r>
+            <a:endParaRPr sz="3200">
+              <a:solidFill>
+                <a:schemeClr val="lt1"/>
+              </a:solidFill>
+              <a:latin typeface="Play"/>
+              <a:ea typeface="Play"/>
+              <a:cs typeface="Play"/>
+              <a:sym typeface="Play"/>
+            </a:endParaRPr>
+          </a:p>
+        </p:txBody>
+      </p:sp>
+      <p:pic>
+        <p:nvPicPr>
+          <p:cNvPr id="769" name="Google Shape;769;p58"/>
+          <p:cNvPicPr preferRelativeResize="0"/>
+          <p:nvPr/>
+        </p:nvPicPr>
+        <p:blipFill rotWithShape="1">
+          <a:blip r:embed="rId3">
+            <a:alphaModFix/>
+          </a:blip>
+          <a:srcRect b="0" l="0" r="0" t="0"/>
+          <a:stretch/>
+        </p:blipFill>
+        <p:spPr>
+          <a:xfrm>
+            <a:off x="879438" y="2770225"/>
+            <a:ext cx="450850" cy="450850"/>
+          </a:xfrm>
+          <a:prstGeom prst="rect">
+            <a:avLst/>
+          </a:prstGeom>
+          <a:noFill/>
+          <a:ln>
+            <a:noFill/>
+          </a:ln>
+        </p:spPr>
+      </p:pic>
+      <p:pic>
+        <p:nvPicPr>
+          <p:cNvPr id="770" name="Google Shape;770;p58"/>
+          <p:cNvPicPr preferRelativeResize="0"/>
+          <p:nvPr/>
+        </p:nvPicPr>
+        <p:blipFill rotWithShape="1">
+          <a:blip r:embed="rId4">
+            <a:alphaModFix/>
+          </a:blip>
+          <a:srcRect b="0" l="0" r="0" t="0"/>
+          <a:stretch/>
+        </p:blipFill>
+        <p:spPr>
+          <a:xfrm>
+            <a:off x="8307349" y="2772418"/>
+            <a:ext cx="450851" cy="450851"/>
+          </a:xfrm>
+          <a:prstGeom prst="rect">
+            <a:avLst/>
+          </a:prstGeom>
+          <a:noFill/>
+          <a:ln>
+            <a:noFill/>
+          </a:ln>
+        </p:spPr>
+      </p:pic>
+      <p:pic>
+        <p:nvPicPr>
+          <p:cNvPr id="771" name="Google Shape;771;p58"/>
+          <p:cNvPicPr preferRelativeResize="0"/>
+          <p:nvPr/>
+        </p:nvPicPr>
+        <p:blipFill rotWithShape="1">
+          <a:blip r:embed="rId5">
+            <a:alphaModFix/>
+          </a:blip>
+          <a:srcRect b="0" l="0" r="0" t="0"/>
+          <a:stretch/>
+        </p:blipFill>
+        <p:spPr>
+          <a:xfrm>
+            <a:off x="4385469" y="2562300"/>
+            <a:ext cx="866700" cy="866700"/>
+          </a:xfrm>
+          <a:prstGeom prst="rect">
+            <a:avLst/>
+          </a:prstGeom>
+          <a:noFill/>
+          <a:ln>
+            <a:noFill/>
+          </a:ln>
+        </p:spPr>
+      </p:pic>
+      <p:pic>
+        <p:nvPicPr>
+          <p:cNvPr id="772" name="Google Shape;772;p58"/>
+          <p:cNvPicPr preferRelativeResize="0"/>
+          <p:nvPr/>
+        </p:nvPicPr>
+        <p:blipFill rotWithShape="1">
+          <a:blip r:embed="rId6">
+            <a:alphaModFix/>
+          </a:blip>
+          <a:srcRect b="0" l="0" r="0" t="0"/>
+          <a:stretch/>
+        </p:blipFill>
+        <p:spPr>
+          <a:xfrm>
+            <a:off x="4593394" y="2770225"/>
+            <a:ext cx="450850" cy="450850"/>
+          </a:xfrm>
+          <a:prstGeom prst="rect">
+            <a:avLst/>
+          </a:prstGeom>
+          <a:noFill/>
+          <a:ln>
+            <a:noFill/>
+          </a:ln>
+        </p:spPr>
+      </p:pic>
+      <p:sp>
+        <p:nvSpPr>
+          <p:cNvPr id="773" name="title"/>
+          <p:cNvSpPr txBox="1"/>
+          <p:nvPr/>
+        </p:nvSpPr>
+        <p:spPr>
+          <a:xfrm>
+            <a:off x="677387" y="692177"/>
+            <a:ext cx="10855878" cy="1447800"/>
+          </a:xfrm>
+          <a:prstGeom prst="rect">
+            <a:avLst/>
+          </a:prstGeom>
+          <a:noFill/>
+        </p:spPr>
+        <p:txBody>
+          <a:bodyPr wrap="square" lIns="76200" rIns="76200" tIns="50800" bIns="50800">
+            <a:spAutoFit/>
+          </a:bodyPr>
+          <a:lstStyle/>
+          <a:p>
+            <a:pPr algn="l">
+              <a:spcAft>
+                <a:spcPts val="300"/>
+              </a:spcAft>
+              <a:defRPr sz="4000">
+                <a:solidFill>
+                  <a:srgbClr val="000000"/>
+                </a:solidFill>
+                <a:latin typeface="Arial"/>
+                <a:ea typeface="Arial"/>
+                <a:cs typeface="Arial"/>
+              </a:defRPr>
+            </a:pPr>
+            <a:r>
+              <a:rPr sz="4000">
+                <a:solidFill>
+                  <a:srgbClr val="000000"/>
+                </a:solidFill>
+                <a:latin typeface="Arial"/>
+                <a:ea typeface="Arial"/>
+                <a:cs typeface="Arial"/>
+              </a:rPr>
+              <a:t>Запрос к руководству: одобрение и интеграцию</a:t>
+            </a:r>
+          </a:p>
+        </p:txBody>
+      </p:sp>
+      <p:sp>
+        <p:nvSpPr>
+          <p:cNvPr id="774" name="card_0"/>
+          <p:cNvSpPr txBox="1"/>
+          <p:nvPr/>
+        </p:nvSpPr>
+        <p:spPr>
+          <a:xfrm>
+            <a:off x="806889" y="3928712"/>
+            <a:ext cx="2583926" cy="937548"/>
+          </a:xfrm>
+          <a:prstGeom prst="rect">
+            <a:avLst/>
+          </a:prstGeom>
+          <a:noFill/>
+        </p:spPr>
+        <p:txBody>
+          <a:bodyPr wrap="square" lIns="76200" rIns="76200" tIns="50800" bIns="50800">
+            <a:spAutoFit/>
+          </a:bodyPr>
+          <a:lstStyle/>
+          <a:p>
+            <a:pPr algn="l">
+              <a:spcAft>
+                <a:spcPts val="300"/>
+              </a:spcAft>
+              <a:defRPr sz="1800" b="0">
+                <a:solidFill>
+                  <a:srgbClr val="000000"/>
+                </a:solidFill>
+                <a:latin typeface="Play"/>
+                <a:ea typeface="Play"/>
+                <a:cs typeface="Play"/>
+              </a:defRPr>
+            </a:pPr>
+            <a:r>
+              <a:rPr sz="1800" b="0">
+                <a:solidFill>
+                  <a:srgbClr val="000000"/>
+                </a:solidFill>
+                <a:latin typeface="Play"/>
+                <a:ea typeface="Play"/>
+                <a:cs typeface="Play"/>
+              </a:rPr>
+              <a:t>Одобрить запуск на всю компанию</a:t>
+            </a:r>
+          </a:p>
+        </p:txBody>
+      </p:sp>
+      <p:sp>
+        <p:nvSpPr>
+          <p:cNvPr id="775" name="card_1"/>
+          <p:cNvSpPr txBox="1"/>
+          <p:nvPr/>
+        </p:nvSpPr>
+        <p:spPr>
+          <a:xfrm>
+            <a:off x="4533496" y="3922334"/>
+            <a:ext cx="2583926" cy="937548"/>
+          </a:xfrm>
+          <a:prstGeom prst="rect">
+            <a:avLst/>
+          </a:prstGeom>
+          <a:noFill/>
+        </p:spPr>
+        <p:txBody>
+          <a:bodyPr wrap="square" lIns="76200" rIns="76200" tIns="50800" bIns="50800">
+            <a:spAutoFit/>
+          </a:bodyPr>
+          <a:lstStyle/>
+          <a:p>
+            <a:pPr algn="l">
+              <a:spcAft>
+                <a:spcPts val="300"/>
+              </a:spcAft>
+              <a:defRPr sz="1800" b="0">
+                <a:solidFill>
+                  <a:srgbClr val="000000"/>
+                </a:solidFill>
+                <a:latin typeface="Play"/>
+                <a:ea typeface="Play"/>
+                <a:cs typeface="Play"/>
+              </a:defRPr>
+            </a:pPr>
+            <a:r>
+              <a:rPr sz="1800" b="0">
+                <a:solidFill>
+                  <a:srgbClr val="000000"/>
+                </a:solidFill>
+                <a:latin typeface="Play"/>
+                <a:ea typeface="Play"/>
+                <a:cs typeface="Play"/>
+              </a:rPr>
+              <a:t>Интеграцию с хранилищем документов</a:t>
+            </a:r>
+          </a:p>
+        </p:txBody>
+      </p:sp>
+      <p:sp>
+        <p:nvSpPr>
+          <p:cNvPr id="776" name="card_2"/>
+          <p:cNvSpPr txBox="1"/>
+          <p:nvPr/>
+        </p:nvSpPr>
+        <p:spPr>
+          <a:xfrm>
+            <a:off x="8264469" y="3926700"/>
+            <a:ext cx="2575194" cy="1160137"/>
+          </a:xfrm>
+          <a:prstGeom prst="rect">
+            <a:avLst/>
+          </a:prstGeom>
+          <a:noFill/>
+        </p:spPr>
+        <p:txBody>
+          <a:bodyPr wrap="square" lIns="76200" rIns="76200" tIns="50800" bIns="50800">
+            <a:spAutoFit/>
+          </a:bodyPr>
+          <a:lstStyle/>
+          <a:p>
+            <a:pPr algn="l">
+              <a:spcAft>
+                <a:spcPts val="300"/>
+              </a:spcAft>
+              <a:defRPr sz="1800" b="0">
+                <a:solidFill>
+                  <a:srgbClr val="000000"/>
+                </a:solidFill>
+                <a:latin typeface="Play"/>
+                <a:ea typeface="Play"/>
+                <a:cs typeface="Play"/>
+              </a:defRPr>
+            </a:pPr>
+            <a:r>
+              <a:rPr sz="1800" b="0">
+                <a:solidFill>
+                  <a:srgbClr val="000000"/>
+                </a:solidFill>
+                <a:latin typeface="Play"/>
+                <a:ea typeface="Play"/>
+                <a:cs typeface="Play"/>
+              </a:rPr>
+              <a:t>Финансирование дальнейшего развития</a:t>
+            </a:r>
+          </a:p>
+        </p:txBody>
+      </p:sp>
+    </p:spTree>
+  </p:cSld>
+  <p:clrMapOvr>
+    <a:masterClrMapping/>
+  </p:clrMapOvr>
+</p:sld>
+</file>
+
+<file path=ppt/slides/slide63.xml><?xml version="1.0" encoding="utf-8"?>
 <p:sld xmlns:a="http://schemas.openxmlformats.org/drawingml/2006/main" xmlns:p="http://schemas.openxmlformats.org/presentationml/2006/main" xmlns:r="http://schemas.openxmlformats.org/officeDocument/2006/relationships">
   <p:cSld>
     <p:bg>
@@ -8025,7 +10310,7 @@
         <p:spPr>
           <a:xfrm>
             <a:off x="677387" y="692177"/>
-            <a:ext cx="10855878" cy="822960"/>
+            <a:ext cx="10855878" cy="1447800"/>
           </a:xfrm>
           <a:prstGeom prst="rect">
             <a:avLst/>
@@ -8060,516 +10345,29 @@
                 <a:ea typeface="Arial"/>
                 <a:cs typeface="Arial"/>
               </a:rPr>
-              <a:t>Предложение</a:t>
+              <a:t>Текущее время сборки: 186 мин + 74 мин правок</a:t>
             </a:r>
           </a:p>
         </p:txBody>
       </p:sp>
-      <p:sp>
-        <p:nvSpPr>
-          <p:cNvPr id="3" name="body"/>
-          <p:cNvSpPr txBox="1"/>
+      <p:graphicFrame>
+        <p:nvGraphicFramePr>
+          <p:cNvPr id="3" name="Chart 2"/>
+          <p:cNvGraphicFramePr>
+            <a:graphicFrameLocks noGrp="1"/>
+          </p:cNvGraphicFramePr>
           <p:nvPr/>
-        </p:nvSpPr>
-        <p:spPr>
-          <a:xfrm>
-            <a:off x="677387" y="1773204"/>
-            <a:ext cx="10855878" cy="1737360"/>
-          </a:xfrm>
-          <a:prstGeom prst="rect">
-            <a:avLst/>
-          </a:prstGeom>
-          <a:noFill/>
-        </p:spPr>
-        <p:txBody>
-          <a:bodyPr wrap="square" lIns="76200" rIns="76200" tIns="50800" bIns="50800">
-            <a:spAutoFit/>
-          </a:bodyPr>
-          <a:lstStyle/>
-          <a:p>
-            <a:pPr algn="l">
-              <a:spcAft>
-                <a:spcPts val="300"/>
-              </a:spcAft>
-              <a:defRPr sz="1800">
-                <a:solidFill>
-                  <a:srgbClr val="000000"/>
-                </a:solidFill>
-                <a:latin typeface="Play"/>
-                <a:ea typeface="Play"/>
-                <a:cs typeface="Play"/>
-              </a:defRPr>
-            </a:pPr>
-            <a:r>
-              <a:rPr sz="1800">
-                <a:solidFill>
-                  <a:srgbClr val="000000"/>
-                </a:solidFill>
-                <a:latin typeface="Play"/>
-                <a:ea typeface="Play"/>
-                <a:cs typeface="Play"/>
-              </a:rPr>
-              <a:t>• Сервис принимает шаблон pptx и материалы</a:t>
-            </a:r>
-          </a:p>
-          <a:p>
-            <a:pPr algn="l">
-              <a:spcAft>
-                <a:spcPts val="300"/>
-              </a:spcAft>
-              <a:defRPr sz="1800">
-                <a:solidFill>
-                  <a:srgbClr val="000000"/>
-                </a:solidFill>
-                <a:latin typeface="Play"/>
-                <a:ea typeface="Play"/>
-                <a:cs typeface="Play"/>
-              </a:defRPr>
-            </a:pPr>
-            <a:r>
-              <a:rPr sz="1800">
-                <a:solidFill>
-                  <a:srgbClr val="000000"/>
-                </a:solidFill>
-                <a:latin typeface="Play"/>
-                <a:ea typeface="Play"/>
-                <a:cs typeface="Play"/>
-              </a:rPr>
-              <a:t>• Автоматически строит план колоды и вёрстку по дизайн‑системе</a:t>
-            </a:r>
-          </a:p>
-          <a:p>
-            <a:pPr algn="l">
-              <a:spcAft>
-                <a:spcPts val="300"/>
-              </a:spcAft>
-              <a:defRPr sz="1800">
-                <a:solidFill>
-                  <a:srgbClr val="000000"/>
-                </a:solidFill>
-                <a:latin typeface="Play"/>
-                <a:ea typeface="Play"/>
-                <a:cs typeface="Play"/>
-              </a:defRPr>
-            </a:pPr>
-            <a:r>
-              <a:rPr sz="1800">
-                <a:solidFill>
-                  <a:srgbClr val="000000"/>
-                </a:solidFill>
-                <a:latin typeface="Play"/>
-                <a:ea typeface="Play"/>
-                <a:cs typeface="Play"/>
-              </a:rPr>
-              <a:t>• Аудит качества проверяет все цифры и стили</a:t>
-            </a:r>
-          </a:p>
-          <a:p>
-            <a:pPr algn="l">
-              <a:spcAft>
-                <a:spcPts val="300"/>
-              </a:spcAft>
-              <a:defRPr sz="1800">
-                <a:solidFill>
-                  <a:srgbClr val="000000"/>
-                </a:solidFill>
-                <a:latin typeface="Play"/>
-                <a:ea typeface="Play"/>
-                <a:cs typeface="Play"/>
-              </a:defRPr>
-            </a:pPr>
-            <a:r>
-              <a:rPr sz="1800">
-                <a:solidFill>
-                  <a:srgbClr val="000000"/>
-                </a:solidFill>
-                <a:latin typeface="Play"/>
-                <a:ea typeface="Play"/>
-                <a:cs typeface="Play"/>
-              </a:rPr>
-              <a:t>• Экспорт в pptx, pdf и html без картинок</a:t>
-            </a:r>
-          </a:p>
-        </p:txBody>
-      </p:sp>
-      <p:sp>
-        <p:nvSpPr>
-          <p:cNvPr id="4" name="Pentagon 3"/>
-          <p:cNvSpPr/>
-          <p:nvPr/>
-        </p:nvSpPr>
-        <p:spPr>
-          <a:xfrm>
-            <a:off x="677387" y="3711399"/>
-            <a:ext cx="10855878" cy="361025"/>
-          </a:xfrm>
-          <a:prstGeom prst="homePlate">
-            <a:avLst/>
-          </a:prstGeom>
-          <a:solidFill>
-            <a:srgbClr val="0077FF"/>
-          </a:solidFill>
-          <a:ln>
-            <a:noFill/>
-          </a:ln>
-        </p:spPr>
-        <p:style>
-          <a:lnRef idx="1">
-            <a:schemeClr val="accent1"/>
-          </a:lnRef>
-          <a:fillRef idx="3">
-            <a:schemeClr val="accent1"/>
-          </a:fillRef>
-          <a:effectRef idx="2">
-            <a:schemeClr val="accent1"/>
-          </a:effectRef>
-          <a:fontRef idx="minor">
-            <a:schemeClr val="lt1"/>
-          </a:fontRef>
-        </p:style>
-        <p:txBody>
-          <a:bodyPr rtlCol="0" anchor="ctr" wrap="square" lIns="12700" rIns="12700" tIns="12700" bIns="12700"/>
-          <a:lstStyle/>
-          <a:p>
-            <a:pPr algn="ctr">
-              <a:defRPr sz="1400" b="0">
-                <a:solidFill>
-                  <a:srgbClr val="FFFFFF"/>
-                </a:solidFill>
-                <a:latin typeface="Play"/>
-                <a:ea typeface="Play"/>
-                <a:cs typeface="Play"/>
-              </a:defRPr>
-            </a:pPr>
-            <a:r>
-              <a:rPr sz="1400" b="0">
-                <a:solidFill>
-                  <a:srgbClr val="FFFFFF"/>
-                </a:solidFill>
-                <a:latin typeface="Play"/>
-                <a:ea typeface="Play"/>
-                <a:cs typeface="Play"/>
-              </a:rPr>
-              <a:t>Ввод шаблона</a:t>
-            </a:r>
-          </a:p>
-        </p:txBody>
-      </p:sp>
-      <p:sp>
-        <p:nvSpPr>
-          <p:cNvPr id="5" name="Chevron 4"/>
-          <p:cNvSpPr/>
-          <p:nvPr/>
-        </p:nvSpPr>
-        <p:spPr>
-          <a:xfrm>
-            <a:off x="677387" y="4131196"/>
-            <a:ext cx="10855878" cy="361025"/>
-          </a:xfrm>
-          <a:prstGeom prst="chevron">
-            <a:avLst/>
-          </a:prstGeom>
-          <a:solidFill>
-            <a:srgbClr val="0077FF"/>
-          </a:solidFill>
-          <a:ln>
-            <a:noFill/>
-          </a:ln>
-        </p:spPr>
-        <p:style>
-          <a:lnRef idx="1">
-            <a:schemeClr val="accent1"/>
-          </a:lnRef>
-          <a:fillRef idx="3">
-            <a:schemeClr val="accent1"/>
-          </a:fillRef>
-          <a:effectRef idx="2">
-            <a:schemeClr val="accent1"/>
-          </a:effectRef>
-          <a:fontRef idx="minor">
-            <a:schemeClr val="lt1"/>
-          </a:fontRef>
-        </p:style>
-        <p:txBody>
-          <a:bodyPr rtlCol="0" anchor="ctr" wrap="square" lIns="12700" rIns="12700" tIns="12700" bIns="12700"/>
-          <a:lstStyle/>
-          <a:p>
-            <a:pPr algn="ctr">
-              <a:defRPr sz="1400" b="0">
-                <a:solidFill>
-                  <a:srgbClr val="FFFFFF"/>
-                </a:solidFill>
-                <a:latin typeface="Play"/>
-                <a:ea typeface="Play"/>
-                <a:cs typeface="Play"/>
-              </a:defRPr>
-            </a:pPr>
-            <a:r>
-              <a:rPr sz="1400" b="0">
-                <a:solidFill>
-                  <a:srgbClr val="FFFFFF"/>
-                </a:solidFill>
-                <a:latin typeface="Play"/>
-                <a:ea typeface="Play"/>
-                <a:cs typeface="Play"/>
-              </a:rPr>
-              <a:t>Анализ</a:t>
-            </a:r>
-          </a:p>
-        </p:txBody>
-      </p:sp>
-      <p:sp>
-        <p:nvSpPr>
-          <p:cNvPr id="6" name="Chevron 5"/>
-          <p:cNvSpPr/>
-          <p:nvPr/>
-        </p:nvSpPr>
-        <p:spPr>
-          <a:xfrm>
-            <a:off x="677387" y="4550994"/>
-            <a:ext cx="10855878" cy="361025"/>
-          </a:xfrm>
-          <a:prstGeom prst="chevron">
-            <a:avLst/>
-          </a:prstGeom>
-          <a:solidFill>
-            <a:srgbClr val="0077FF"/>
-          </a:solidFill>
-          <a:ln>
-            <a:noFill/>
-          </a:ln>
-        </p:spPr>
-        <p:style>
-          <a:lnRef idx="1">
-            <a:schemeClr val="accent1"/>
-          </a:lnRef>
-          <a:fillRef idx="3">
-            <a:schemeClr val="accent1"/>
-          </a:fillRef>
-          <a:effectRef idx="2">
-            <a:schemeClr val="accent1"/>
-          </a:effectRef>
-          <a:fontRef idx="minor">
-            <a:schemeClr val="lt1"/>
-          </a:fontRef>
-        </p:style>
-        <p:txBody>
-          <a:bodyPr rtlCol="0" anchor="ctr" wrap="square" lIns="12700" rIns="12700" tIns="12700" bIns="12700"/>
-          <a:lstStyle/>
-          <a:p>
-            <a:pPr algn="ctr">
-              <a:defRPr sz="1400" b="0">
-                <a:solidFill>
-                  <a:srgbClr val="FFFFFF"/>
-                </a:solidFill>
-                <a:latin typeface="Play"/>
-                <a:ea typeface="Play"/>
-                <a:cs typeface="Play"/>
-              </a:defRPr>
-            </a:pPr>
-            <a:r>
-              <a:rPr sz="1400" b="0">
-                <a:solidFill>
-                  <a:srgbClr val="FFFFFF"/>
-                </a:solidFill>
-                <a:latin typeface="Play"/>
-                <a:ea typeface="Play"/>
-                <a:cs typeface="Play"/>
-              </a:rPr>
-              <a:t>План колоды</a:t>
-            </a:r>
-          </a:p>
-        </p:txBody>
-      </p:sp>
-      <p:sp>
-        <p:nvSpPr>
-          <p:cNvPr id="7" name="Chevron 6"/>
-          <p:cNvSpPr/>
-          <p:nvPr/>
-        </p:nvSpPr>
-        <p:spPr>
-          <a:xfrm>
-            <a:off x="677387" y="4970791"/>
-            <a:ext cx="10855878" cy="361025"/>
-          </a:xfrm>
-          <a:prstGeom prst="chevron">
-            <a:avLst/>
-          </a:prstGeom>
-          <a:solidFill>
-            <a:srgbClr val="0077FF"/>
-          </a:solidFill>
-          <a:ln>
-            <a:noFill/>
-          </a:ln>
-        </p:spPr>
-        <p:style>
-          <a:lnRef idx="1">
-            <a:schemeClr val="accent1"/>
-          </a:lnRef>
-          <a:fillRef idx="3">
-            <a:schemeClr val="accent1"/>
-          </a:fillRef>
-          <a:effectRef idx="2">
-            <a:schemeClr val="accent1"/>
-          </a:effectRef>
-          <a:fontRef idx="minor">
-            <a:schemeClr val="lt1"/>
-          </a:fontRef>
-        </p:style>
-        <p:txBody>
-          <a:bodyPr rtlCol="0" anchor="ctr" wrap="square" lIns="12700" rIns="12700" tIns="12700" bIns="12700"/>
-          <a:lstStyle/>
-          <a:p>
-            <a:pPr algn="ctr">
-              <a:defRPr sz="1400" b="0">
-                <a:solidFill>
-                  <a:srgbClr val="FFFFFF"/>
-                </a:solidFill>
-                <a:latin typeface="Play"/>
-                <a:ea typeface="Play"/>
-                <a:cs typeface="Play"/>
-              </a:defRPr>
-            </a:pPr>
-            <a:r>
-              <a:rPr sz="1400" b="0">
-                <a:solidFill>
-                  <a:srgbClr val="FFFFFF"/>
-                </a:solidFill>
-                <a:latin typeface="Play"/>
-                <a:ea typeface="Play"/>
-                <a:cs typeface="Play"/>
-              </a:rPr>
-              <a:t>Вёрстка</a:t>
-            </a:r>
-          </a:p>
-        </p:txBody>
-      </p:sp>
-      <p:sp>
-        <p:nvSpPr>
-          <p:cNvPr id="8" name="Chevron 7"/>
-          <p:cNvSpPr/>
-          <p:nvPr/>
-        </p:nvSpPr>
-        <p:spPr>
-          <a:xfrm>
-            <a:off x="677387" y="5390588"/>
-            <a:ext cx="10855878" cy="361025"/>
-          </a:xfrm>
-          <a:prstGeom prst="chevron">
-            <a:avLst/>
-          </a:prstGeom>
-          <a:solidFill>
-            <a:srgbClr val="0077FF"/>
-          </a:solidFill>
-          <a:ln>
-            <a:noFill/>
-          </a:ln>
-        </p:spPr>
-        <p:style>
-          <a:lnRef idx="1">
-            <a:schemeClr val="accent1"/>
-          </a:lnRef>
-          <a:fillRef idx="3">
-            <a:schemeClr val="accent1"/>
-          </a:fillRef>
-          <a:effectRef idx="2">
-            <a:schemeClr val="accent1"/>
-          </a:effectRef>
-          <a:fontRef idx="minor">
-            <a:schemeClr val="lt1"/>
-          </a:fontRef>
-        </p:style>
-        <p:txBody>
-          <a:bodyPr rtlCol="0" anchor="ctr" wrap="square" lIns="12700" rIns="12700" tIns="12700" bIns="12700"/>
-          <a:lstStyle/>
-          <a:p>
-            <a:pPr algn="ctr">
-              <a:defRPr sz="1400" b="0">
-                <a:solidFill>
-                  <a:srgbClr val="FFFFFF"/>
-                </a:solidFill>
-                <a:latin typeface="Play"/>
-                <a:ea typeface="Play"/>
-                <a:cs typeface="Play"/>
-              </a:defRPr>
-            </a:pPr>
-            <a:r>
-              <a:rPr sz="1400" b="0">
-                <a:solidFill>
-                  <a:srgbClr val="FFFFFF"/>
-                </a:solidFill>
-                <a:latin typeface="Play"/>
-                <a:ea typeface="Play"/>
-                <a:cs typeface="Play"/>
-              </a:rPr>
-              <a:t>Аудит</a:t>
-            </a:r>
-          </a:p>
-        </p:txBody>
-      </p:sp>
-      <p:sp>
-        <p:nvSpPr>
-          <p:cNvPr id="9" name="Chevron 8"/>
-          <p:cNvSpPr/>
-          <p:nvPr/>
-        </p:nvSpPr>
-        <p:spPr>
-          <a:xfrm>
-            <a:off x="677387" y="5810385"/>
-            <a:ext cx="10855878" cy="361025"/>
-          </a:xfrm>
-          <a:prstGeom prst="chevron">
-            <a:avLst/>
-          </a:prstGeom>
-          <a:solidFill>
-            <a:srgbClr val="0077FF"/>
-          </a:solidFill>
-          <a:ln>
-            <a:noFill/>
-          </a:ln>
-        </p:spPr>
-        <p:style>
-          <a:lnRef idx="1">
-            <a:schemeClr val="accent1"/>
-          </a:lnRef>
-          <a:fillRef idx="3">
-            <a:schemeClr val="accent1"/>
-          </a:fillRef>
-          <a:effectRef idx="2">
-            <a:schemeClr val="accent1"/>
-          </a:effectRef>
-          <a:fontRef idx="minor">
-            <a:schemeClr val="lt1"/>
-          </a:fontRef>
-        </p:style>
-        <p:txBody>
-          <a:bodyPr rtlCol="0" anchor="ctr" wrap="square" lIns="12700" rIns="12700" tIns="12700" bIns="12700"/>
-          <a:lstStyle/>
-          <a:p>
-            <a:pPr algn="ctr">
-              <a:defRPr sz="1400" b="0">
-                <a:solidFill>
-                  <a:srgbClr val="FFFFFF"/>
-                </a:solidFill>
-                <a:latin typeface="Play"/>
-                <a:ea typeface="Play"/>
-                <a:cs typeface="Play"/>
-              </a:defRPr>
-            </a:pPr>
-            <a:r>
-              <a:rPr sz="1400" b="0">
-                <a:solidFill>
-                  <a:srgbClr val="FFFFFF"/>
-                </a:solidFill>
-                <a:latin typeface="Play"/>
-                <a:ea typeface="Play"/>
-                <a:cs typeface="Play"/>
-              </a:rPr>
-              <a:t>Экспорт</a:t>
-            </a:r>
-          </a:p>
-        </p:txBody>
-      </p:sp>
+        </p:nvGraphicFramePr>
+        <p:xfrm>
+          <a:off x="677387" y="2277137"/>
+          <a:ext cx="10855878" cy="3923659"/>
+        </p:xfrm>
+        <a:graphic>
+          <a:graphicData uri="http://schemas.openxmlformats.org/drawingml/2006/chart">
+            <c:chart xmlns:c="http://schemas.openxmlformats.org/drawingml/2006/chart" r:id="rId2"/>
+          </a:graphicData>
+        </a:graphic>
+      </p:graphicFrame>
     </p:spTree>
   </p:cSld>
   <p:clrMapOvr>
@@ -8578,7 +10376,7 @@
 </p:sld>
 </file>
 
-<file path=ppt/slides/slide59.xml><?xml version="1.0" encoding="utf-8"?>
+<file path=ppt/slides/slide64.xml><?xml version="1.0" encoding="utf-8"?>
 <p:sld xmlns:a="http://schemas.openxmlformats.org/drawingml/2006/main" xmlns:p="http://schemas.openxmlformats.org/presentationml/2006/main" xmlns:r="http://schemas.openxmlformats.org/officeDocument/2006/relationships">
   <p:cSld>
     <p:bg>
@@ -8604,7 +10402,7 @@
         <p:spPr>
           <a:xfrm>
             <a:off x="677387" y="692177"/>
-            <a:ext cx="10855878" cy="822960"/>
+            <a:ext cx="10855878" cy="1447800"/>
           </a:xfrm>
           <a:prstGeom prst="rect">
             <a:avLst/>
@@ -8639,149 +10437,22 @@
                 <a:ea typeface="Arial"/>
                 <a:cs typeface="Arial"/>
               </a:rPr>
-              <a:t>Ожидаемый эффект</a:t>
-            </a:r>
-          </a:p>
-        </p:txBody>
-      </p:sp>
-      <p:sp>
-        <p:nvSpPr>
-          <p:cNvPr id="3" name="body"/>
-          <p:cNvSpPr txBox="1"/>
-          <p:nvPr/>
-        </p:nvSpPr>
-        <p:spPr>
-          <a:xfrm>
-            <a:off x="677387" y="1773204"/>
-            <a:ext cx="10855878" cy="1737360"/>
-          </a:xfrm>
-          <a:prstGeom prst="rect">
-            <a:avLst/>
-          </a:prstGeom>
-          <a:noFill/>
-        </p:spPr>
-        <p:txBody>
-          <a:bodyPr wrap="square" lIns="76200" rIns="76200" tIns="50800" bIns="50800">
-            <a:spAutoFit/>
-          </a:bodyPr>
-          <a:lstStyle/>
-          <a:p>
-            <a:pPr algn="l">
-              <a:spcAft>
-                <a:spcPts val="300"/>
-              </a:spcAft>
-              <a:defRPr sz="1600">
-                <a:solidFill>
-                  <a:srgbClr val="000000"/>
-                </a:solidFill>
-                <a:latin typeface="Play"/>
-                <a:ea typeface="Play"/>
-                <a:cs typeface="Play"/>
-              </a:defRPr>
-            </a:pPr>
-            <a:r>
-              <a:rPr sz="1600">
-                <a:solidFill>
-                  <a:srgbClr val="000000"/>
-                </a:solidFill>
-                <a:latin typeface="Play"/>
-                <a:ea typeface="Play"/>
-                <a:cs typeface="Play"/>
-              </a:rPr>
-              <a:t>• Средняя сборка колоды 4 минуты вместо 186</a:t>
-            </a:r>
-          </a:p>
-          <a:p>
-            <a:pPr algn="l">
-              <a:spcAft>
-                <a:spcPts val="300"/>
-              </a:spcAft>
-              <a:defRPr sz="1600">
-                <a:solidFill>
-                  <a:srgbClr val="000000"/>
-                </a:solidFill>
-                <a:latin typeface="Play"/>
-                <a:ea typeface="Play"/>
-                <a:cs typeface="Play"/>
-              </a:defRPr>
-            </a:pPr>
-            <a:r>
-              <a:rPr sz="1600">
-                <a:solidFill>
-                  <a:srgbClr val="000000"/>
-                </a:solidFill>
-                <a:latin typeface="Play"/>
-                <a:ea typeface="Play"/>
-                <a:cs typeface="Play"/>
-              </a:rPr>
-              <a:t>• Время до первой версии сократилось с 6 дней до 1</a:t>
-            </a:r>
-          </a:p>
-          <a:p>
-            <a:pPr algn="l">
-              <a:spcAft>
-                <a:spcPts val="300"/>
-              </a:spcAft>
-              <a:defRPr sz="1600">
-                <a:solidFill>
-                  <a:srgbClr val="000000"/>
-                </a:solidFill>
-                <a:latin typeface="Play"/>
-                <a:ea typeface="Play"/>
-                <a:cs typeface="Play"/>
-              </a:defRPr>
-            </a:pPr>
-            <a:r>
-              <a:rPr sz="1600">
-                <a:solidFill>
-                  <a:srgbClr val="000000"/>
-                </a:solidFill>
-                <a:latin typeface="Play"/>
-                <a:ea typeface="Play"/>
-                <a:cs typeface="Play"/>
-              </a:rPr>
-              <a:t>• Нарушения фирменного стиля снизились до 2 из 68</a:t>
-            </a:r>
-          </a:p>
-          <a:p>
-            <a:pPr algn="l">
-              <a:spcAft>
-                <a:spcPts val="300"/>
-              </a:spcAft>
-              <a:defRPr sz="1600">
-                <a:solidFill>
-                  <a:srgbClr val="000000"/>
-                </a:solidFill>
-                <a:latin typeface="Play"/>
-                <a:ea typeface="Play"/>
-                <a:cs typeface="Play"/>
-              </a:defRPr>
-            </a:pPr>
-            <a:r>
-              <a:rPr sz="1600">
-                <a:solidFill>
-                  <a:srgbClr val="000000"/>
-                </a:solidFill>
-                <a:latin typeface="Play"/>
-                <a:ea typeface="Play"/>
-                <a:cs typeface="Play"/>
-              </a:rPr>
-              <a:t>• Дизайнеры закрыли 38 запросов вместо 11 в неделю</a:t>
+              <a:t>Улучшения в пилоте: 4 мин сборки, 38 запросов</a:t>
             </a:r>
           </a:p>
         </p:txBody>
       </p:sp>
       <p:graphicFrame>
         <p:nvGraphicFramePr>
-          <p:cNvPr id="4" name="Chart 3"/>
+          <p:cNvPr id="3" name="Chart 2"/>
           <p:cNvGraphicFramePr>
             <a:graphicFrameLocks noGrp="1"/>
           </p:cNvGraphicFramePr>
           <p:nvPr/>
         </p:nvGraphicFramePr>
         <p:xfrm>
-          <a:off x="677387" y="3682014"/>
-          <a:ext cx="10855878" cy="2518783"/>
+          <a:off x="677387" y="2277137"/>
+          <a:ext cx="10855878" cy="3923659"/>
         </p:xfrm>
         <a:graphic>
           <a:graphicData uri="http://schemas.openxmlformats.org/drawingml/2006/chart">
@@ -8797,7 +10468,7 @@
 </p:sld>
 </file>
 
-<file path=ppt/slides/slide60.xml><?xml version="1.0" encoding="utf-8"?>
+<file path=ppt/slides/slide65.xml><?xml version="1.0" encoding="utf-8"?>
 <p:sld xmlns:a="http://schemas.openxmlformats.org/drawingml/2006/main" xmlns:p="http://schemas.openxmlformats.org/presentationml/2006/main" xmlns:r="http://schemas.openxmlformats.org/officeDocument/2006/relationships">
   <p:cSld>
     <p:spTree>
@@ -8868,7 +10539,7 @@
         <p:spPr>
           <a:xfrm>
             <a:off x="677387" y="692177"/>
-            <a:ext cx="10855878" cy="822960"/>
+            <a:ext cx="10855878" cy="1447800"/>
           </a:xfrm>
           <a:prstGeom prst="rect">
             <a:avLst/>
@@ -8903,978 +10574,7 @@
                 <a:ea typeface="Arial"/>
                 <a:cs typeface="Arial"/>
               </a:rPr>
-              <a:t>Ресурсы и сроки</a:t>
-            </a:r>
-          </a:p>
-        </p:txBody>
-      </p:sp>
-      <p:sp>
-        <p:nvSpPr>
-          <p:cNvPr id="921" name="body"/>
-          <p:cNvSpPr txBox="1"/>
-          <p:nvPr/>
-        </p:nvSpPr>
-        <p:spPr>
-          <a:xfrm>
-            <a:off x="677387" y="2200937"/>
-            <a:ext cx="10855878" cy="1296670"/>
-          </a:xfrm>
-          <a:prstGeom prst="rect">
-            <a:avLst/>
-          </a:prstGeom>
-          <a:noFill/>
-        </p:spPr>
-        <p:txBody>
-          <a:bodyPr wrap="square" lIns="76200" rIns="76200" tIns="50800" bIns="50800">
-            <a:spAutoFit/>
-          </a:bodyPr>
-          <a:lstStyle/>
-          <a:p>
-            <a:pPr algn="l">
-              <a:spcAft>
-                <a:spcPts val="300"/>
-              </a:spcAft>
-              <a:defRPr sz="1200">
-                <a:solidFill>
-                  <a:srgbClr val="000000"/>
-                </a:solidFill>
-                <a:latin typeface="Play"/>
-                <a:ea typeface="Play"/>
-                <a:cs typeface="Play"/>
-              </a:defRPr>
-            </a:pPr>
-            <a:r>
-              <a:rPr sz="1200">
-                <a:solidFill>
-                  <a:srgbClr val="000000"/>
-                </a:solidFill>
-                <a:latin typeface="Play"/>
-                <a:ea typeface="Play"/>
-                <a:cs typeface="Play"/>
-              </a:rPr>
-              <a:t>• 2 vCPU / 2 ГБ RAM</a:t>
-            </a:r>
-          </a:p>
-          <a:p>
-            <a:pPr algn="l">
-              <a:spcAft>
-                <a:spcPts val="300"/>
-              </a:spcAft>
-              <a:defRPr sz="1200">
-                <a:solidFill>
-                  <a:srgbClr val="000000"/>
-                </a:solidFill>
-                <a:latin typeface="Play"/>
-                <a:ea typeface="Play"/>
-                <a:cs typeface="Play"/>
-              </a:defRPr>
-            </a:pPr>
-            <a:r>
-              <a:rPr sz="1200">
-                <a:solidFill>
-                  <a:srgbClr val="000000"/>
-                </a:solidFill>
-                <a:latin typeface="Play"/>
-                <a:ea typeface="Play"/>
-                <a:cs typeface="Play"/>
-              </a:rPr>
-              <a:t>• gpt-oss-20b подключен протоколу</a:t>
-            </a:r>
-          </a:p>
-          <a:p>
-            <a:pPr algn="l">
-              <a:spcAft>
-                <a:spcPts val="300"/>
-              </a:spcAft>
-              <a:defRPr sz="1200">
-                <a:solidFill>
-                  <a:srgbClr val="000000"/>
-                </a:solidFill>
-                <a:latin typeface="Play"/>
-                <a:ea typeface="Play"/>
-                <a:cs typeface="Play"/>
-              </a:defRPr>
-            </a:pPr>
-            <a:r>
-              <a:rPr sz="1200">
-                <a:solidFill>
-                  <a:srgbClr val="000000"/>
-                </a:solidFill>
-                <a:latin typeface="Play"/>
-                <a:ea typeface="Play"/>
-                <a:cs typeface="Play"/>
-              </a:rPr>
-              <a:t>• Инференс 6 недель 1 400 руб.</a:t>
-            </a:r>
-          </a:p>
-          <a:p>
-            <a:pPr algn="l">
-              <a:spcAft>
-                <a:spcPts val="300"/>
-              </a:spcAft>
-              <a:defRPr sz="1200">
-                <a:solidFill>
-                  <a:srgbClr val="000000"/>
-                </a:solidFill>
-                <a:latin typeface="Play"/>
-                <a:ea typeface="Play"/>
-                <a:cs typeface="Play"/>
-              </a:defRPr>
-            </a:pPr>
-            <a:r>
-              <a:rPr sz="1200">
-                <a:solidFill>
-                  <a:srgbClr val="000000"/>
-                </a:solidFill>
-                <a:latin typeface="Play"/>
-                <a:ea typeface="Play"/>
-                <a:cs typeface="Play"/>
-              </a:rPr>
-              <a:t>• Квартал 2026: 4 команды, домен, HTTPS</a:t>
-            </a:r>
-          </a:p>
-          <a:p>
-            <a:pPr algn="l">
-              <a:spcAft>
-                <a:spcPts val="300"/>
-              </a:spcAft>
-              <a:defRPr sz="1200">
-                <a:solidFill>
-                  <a:srgbClr val="000000"/>
-                </a:solidFill>
-                <a:latin typeface="Play"/>
-                <a:ea typeface="Play"/>
-                <a:cs typeface="Play"/>
-              </a:defRPr>
-            </a:pPr>
-            <a:r>
-              <a:rPr sz="1200">
-                <a:solidFill>
-                  <a:srgbClr val="000000"/>
-                </a:solidFill>
-                <a:latin typeface="Play"/>
-                <a:ea typeface="Play"/>
-                <a:cs typeface="Play"/>
-              </a:rPr>
-              <a:t>• Квартал 2026: доступ, интеграция хранилища</a:t>
-            </a:r>
-          </a:p>
-          <a:p>
-            <a:pPr algn="l">
-              <a:spcAft>
-                <a:spcPts val="300"/>
-              </a:spcAft>
-              <a:defRPr sz="1200">
-                <a:solidFill>
-                  <a:srgbClr val="000000"/>
-                </a:solidFill>
-                <a:latin typeface="Play"/>
-                <a:ea typeface="Play"/>
-                <a:cs typeface="Play"/>
-              </a:defRPr>
-            </a:pPr>
-            <a:r>
-              <a:rPr sz="1200">
-                <a:solidFill>
-                  <a:srgbClr val="000000"/>
-                </a:solidFill>
-                <a:latin typeface="Play"/>
-                <a:ea typeface="Play"/>
-                <a:cs typeface="Play"/>
-              </a:rPr>
-              <a:t>• 2027: генерация иллюстраций в стиле шаблона</a:t>
-            </a:r>
-          </a:p>
-        </p:txBody>
-      </p:sp>
-      <p:sp>
-        <p:nvSpPr>
-          <p:cNvPr id="922" name="Rectangle 921"/>
-          <p:cNvSpPr/>
-          <p:nvPr/>
-        </p:nvSpPr>
-        <p:spPr>
-          <a:xfrm>
-            <a:off x="677387" y="3747140"/>
-            <a:ext cx="10855878" cy="33562"/>
-          </a:xfrm>
-          <a:prstGeom prst="rect">
-            <a:avLst/>
-          </a:prstGeom>
-          <a:solidFill>
-            <a:srgbClr val="0077FF"/>
-          </a:solidFill>
-          <a:ln>
-            <a:noFill/>
-          </a:ln>
-        </p:spPr>
-        <p:style>
-          <a:lnRef idx="1">
-            <a:schemeClr val="accent1"/>
-          </a:lnRef>
-          <a:fillRef idx="3">
-            <a:schemeClr val="accent1"/>
-          </a:fillRef>
-          <a:effectRef idx="2">
-            <a:schemeClr val="accent1"/>
-          </a:effectRef>
-          <a:fontRef idx="minor">
-            <a:schemeClr val="lt1"/>
-          </a:fontRef>
-        </p:style>
-        <p:txBody>
-          <a:bodyPr rtlCol="0" anchor="ctr"/>
-          <a:lstStyle/>
-          <a:p>
-            <a:pPr algn="ctr"/>
-          </a:p>
-        </p:txBody>
-      </p:sp>
-      <p:sp>
-        <p:nvSpPr>
-          <p:cNvPr id="923" name="Oval 922"/>
-          <p:cNvSpPr/>
-          <p:nvPr/>
-        </p:nvSpPr>
-        <p:spPr>
-          <a:xfrm>
-            <a:off x="2363638" y="3640859"/>
-            <a:ext cx="246123" cy="246123"/>
-          </a:xfrm>
-          <a:prstGeom prst="ellipse">
-            <a:avLst/>
-          </a:prstGeom>
-          <a:solidFill>
-            <a:srgbClr val="0077FF"/>
-          </a:solidFill>
-          <a:ln>
-            <a:noFill/>
-          </a:ln>
-        </p:spPr>
-        <p:style>
-          <a:lnRef idx="1">
-            <a:schemeClr val="accent1"/>
-          </a:lnRef>
-          <a:fillRef idx="3">
-            <a:schemeClr val="accent1"/>
-          </a:fillRef>
-          <a:effectRef idx="2">
-            <a:schemeClr val="accent1"/>
-          </a:effectRef>
-          <a:fontRef idx="minor">
-            <a:schemeClr val="lt1"/>
-          </a:fontRef>
-        </p:style>
-        <p:txBody>
-          <a:bodyPr rtlCol="0" anchor="ctr"/>
-          <a:lstStyle/>
-          <a:p>
-            <a:pPr algn="ctr"/>
-          </a:p>
-        </p:txBody>
-      </p:sp>
-      <p:sp>
-        <p:nvSpPr>
-          <p:cNvPr id="924" name="TextBox 923"/>
-          <p:cNvSpPr txBox="1"/>
-          <p:nvPr/>
-        </p:nvSpPr>
-        <p:spPr>
-          <a:xfrm>
-            <a:off x="677387" y="3232518"/>
-            <a:ext cx="5427939" cy="425123"/>
-          </a:xfrm>
-          <a:prstGeom prst="rect">
-            <a:avLst/>
-          </a:prstGeom>
-          <a:noFill/>
-        </p:spPr>
-        <p:txBody>
-          <a:bodyPr wrap="square" lIns="12700" rIns="12700" tIns="12700" bIns="12700">
-            <a:spAutoFit/>
-          </a:bodyPr>
-          <a:lstStyle/>
-          <a:p>
-            <a:pPr algn="ctr">
-              <a:defRPr sz="1400" b="0">
-                <a:solidFill>
-                  <a:srgbClr val="000000"/>
-                </a:solidFill>
-                <a:latin typeface="Play"/>
-                <a:ea typeface="Play"/>
-                <a:cs typeface="Play"/>
-              </a:defRPr>
-            </a:pPr>
-            <a:r>
-              <a:rPr sz="1400" b="0">
-                <a:solidFill>
-                  <a:srgbClr val="000000"/>
-                </a:solidFill>
-                <a:latin typeface="Play"/>
-                <a:ea typeface="Play"/>
-                <a:cs typeface="Play"/>
-              </a:rPr>
-              <a:t>Третий квартал 2026</a:t>
-            </a:r>
-          </a:p>
-        </p:txBody>
-      </p:sp>
-      <p:sp>
-        <p:nvSpPr>
-          <p:cNvPr id="925" name="Oval 924"/>
-          <p:cNvSpPr/>
-          <p:nvPr/>
-        </p:nvSpPr>
-        <p:spPr>
-          <a:xfrm>
-            <a:off x="5982264" y="3640859"/>
-            <a:ext cx="246123" cy="246123"/>
-          </a:xfrm>
-          <a:prstGeom prst="ellipse">
-            <a:avLst/>
-          </a:prstGeom>
-          <a:solidFill>
-            <a:srgbClr val="0077FF"/>
-          </a:solidFill>
-          <a:ln>
-            <a:noFill/>
-          </a:ln>
-        </p:spPr>
-        <p:style>
-          <a:lnRef idx="1">
-            <a:schemeClr val="accent1"/>
-          </a:lnRef>
-          <a:fillRef idx="3">
-            <a:schemeClr val="accent1"/>
-          </a:fillRef>
-          <a:effectRef idx="2">
-            <a:schemeClr val="accent1"/>
-          </a:effectRef>
-          <a:fontRef idx="minor">
-            <a:schemeClr val="lt1"/>
-          </a:fontRef>
-        </p:style>
-        <p:txBody>
-          <a:bodyPr rtlCol="0" anchor="ctr"/>
-          <a:lstStyle/>
-          <a:p>
-            <a:pPr algn="ctr"/>
-          </a:p>
-        </p:txBody>
-      </p:sp>
-      <p:sp>
-        <p:nvSpPr>
-          <p:cNvPr id="926" name="TextBox 925"/>
-          <p:cNvSpPr txBox="1"/>
-          <p:nvPr/>
-        </p:nvSpPr>
-        <p:spPr>
-          <a:xfrm>
-            <a:off x="3391356" y="3993264"/>
-            <a:ext cx="5427939" cy="425123"/>
-          </a:xfrm>
-          <a:prstGeom prst="rect">
-            <a:avLst/>
-          </a:prstGeom>
-          <a:noFill/>
-        </p:spPr>
-        <p:txBody>
-          <a:bodyPr wrap="square" lIns="12700" rIns="12700" tIns="12700" bIns="12700">
-            <a:spAutoFit/>
-          </a:bodyPr>
-          <a:lstStyle/>
-          <a:p>
-            <a:pPr algn="ctr">
-              <a:defRPr sz="1400" b="0">
-                <a:solidFill>
-                  <a:srgbClr val="000000"/>
-                </a:solidFill>
-                <a:latin typeface="Play"/>
-                <a:ea typeface="Play"/>
-                <a:cs typeface="Play"/>
-              </a:defRPr>
-            </a:pPr>
-            <a:r>
-              <a:rPr sz="1400" b="0">
-                <a:solidFill>
-                  <a:srgbClr val="000000"/>
-                </a:solidFill>
-                <a:latin typeface="Play"/>
-                <a:ea typeface="Play"/>
-                <a:cs typeface="Play"/>
-              </a:rPr>
-              <a:t>Четвёртый квартал 2026</a:t>
-            </a:r>
-          </a:p>
-        </p:txBody>
-      </p:sp>
-      <p:sp>
-        <p:nvSpPr>
-          <p:cNvPr id="927" name="Oval 926"/>
-          <p:cNvSpPr/>
-          <p:nvPr/>
-        </p:nvSpPr>
-        <p:spPr>
-          <a:xfrm>
-            <a:off x="9600890" y="3640859"/>
-            <a:ext cx="246123" cy="246123"/>
-          </a:xfrm>
-          <a:prstGeom prst="ellipse">
-            <a:avLst/>
-          </a:prstGeom>
-          <a:solidFill>
-            <a:srgbClr val="0077FF"/>
-          </a:solidFill>
-          <a:ln>
-            <a:noFill/>
-          </a:ln>
-        </p:spPr>
-        <p:style>
-          <a:lnRef idx="1">
-            <a:schemeClr val="accent1"/>
-          </a:lnRef>
-          <a:fillRef idx="3">
-            <a:schemeClr val="accent1"/>
-          </a:fillRef>
-          <a:effectRef idx="2">
-            <a:schemeClr val="accent1"/>
-          </a:effectRef>
-          <a:fontRef idx="minor">
-            <a:schemeClr val="lt1"/>
-          </a:fontRef>
-        </p:style>
-        <p:txBody>
-          <a:bodyPr rtlCol="0" anchor="ctr"/>
-          <a:lstStyle/>
-          <a:p>
-            <a:pPr algn="ctr"/>
-          </a:p>
-        </p:txBody>
-      </p:sp>
-      <p:sp>
-        <p:nvSpPr>
-          <p:cNvPr id="928" name="TextBox 927"/>
-          <p:cNvSpPr txBox="1"/>
-          <p:nvPr/>
-        </p:nvSpPr>
-        <p:spPr>
-          <a:xfrm>
-            <a:off x="6105326" y="3232518"/>
-            <a:ext cx="5427939" cy="425123"/>
-          </a:xfrm>
-          <a:prstGeom prst="rect">
-            <a:avLst/>
-          </a:prstGeom>
-          <a:noFill/>
-        </p:spPr>
-        <p:txBody>
-          <a:bodyPr wrap="square" lIns="12700" rIns="12700" tIns="12700" bIns="12700">
-            <a:spAutoFit/>
-          </a:bodyPr>
-          <a:lstStyle/>
-          <a:p>
-            <a:pPr algn="ctr">
-              <a:defRPr sz="1400" b="0">
-                <a:solidFill>
-                  <a:srgbClr val="000000"/>
-                </a:solidFill>
-                <a:latin typeface="Play"/>
-                <a:ea typeface="Play"/>
-                <a:cs typeface="Play"/>
-              </a:defRPr>
-            </a:pPr>
-            <a:r>
-              <a:rPr sz="1400" b="0">
-                <a:solidFill>
-                  <a:srgbClr val="000000"/>
-                </a:solidFill>
-                <a:latin typeface="Play"/>
-                <a:ea typeface="Play"/>
-                <a:cs typeface="Play"/>
-              </a:rPr>
-              <a:t>Первый квартал 2027</a:t>
-            </a:r>
-          </a:p>
-        </p:txBody>
-      </p:sp>
-    </p:spTree>
-  </p:cSld>
-  <p:clrMapOvr>
-    <a:masterClrMapping/>
-  </p:clrMapOvr>
-</p:sld>
-</file>
-
-<file path=ppt/slides/slide61.xml><?xml version="1.0" encoding="utf-8"?>
-<p:sld xmlns:a="http://schemas.openxmlformats.org/drawingml/2006/main" xmlns:p="http://schemas.openxmlformats.org/presentationml/2006/main" xmlns:r="http://schemas.openxmlformats.org/officeDocument/2006/relationships">
-  <p:cSld>
-    <p:bg>
-      <p:bgPr>
-        <a:solidFill>
-          <a:schemeClr val="lt2"/>
-        </a:solidFill>
-      </p:bgPr>
-    </p:bg>
-    <p:spTree>
-      <p:nvGrpSpPr>
-        <p:cNvPr id="1" name=""/>
-        <p:cNvGrpSpPr/>
-        <p:nvPr/>
-      </p:nvGrpSpPr>
-      <p:grpSpPr/>
-      <p:sp>
-        <p:nvSpPr>
-          <p:cNvPr id="795" name="Google Shape;795;p60"/>
-          <p:cNvSpPr txBox="1"/>
-          <p:nvPr/>
-        </p:nvSpPr>
-        <p:spPr>
-          <a:xfrm>
-            <a:off x="18692059" y="4674436"/>
-            <a:ext cx="4304330" cy="678198"/>
-          </a:xfrm>
-          <a:prstGeom prst="rect">
-            <a:avLst/>
-          </a:prstGeom>
-          <a:noFill/>
-          <a:ln>
-            <a:noFill/>
-          </a:ln>
-        </p:spPr>
-        <p:txBody>
-          <a:bodyPr anchorCtr="0" anchor="t" bIns="45700" lIns="91425" spcFirstLastPara="1" rIns="91425" wrap="square" tIns="45700">
-            <a:noAutofit/>
-          </a:bodyPr>
-          <a:lstStyle/>
-          <a:p>
-            <a:pPr indent="0" lvl="0" marL="0" marR="0" rtl="0" algn="l">
-              <a:lnSpc>
-                <a:spcPct val="110000"/>
-              </a:lnSpc>
-              <a:spcBef>
-                <a:spcPts val="0"/>
-              </a:spcBef>
-              <a:spcAft>
-                <a:spcPts val="0"/>
-              </a:spcAft>
-              <a:buClr>
-                <a:schemeClr val="dk1"/>
-              </a:buClr>
-              <a:buSzPts val="1600"/>
-              <a:buFont typeface="Arial"/>
-              <a:buNone/>
-            </a:pPr>
-            <a:r>
-              <a:t/>
-            </a:r>
-            <a:endParaRPr sz="1600">
-              <a:solidFill>
-                <a:schemeClr val="dk1"/>
-              </a:solidFill>
-              <a:latin typeface="Arial"/>
-              <a:ea typeface="Arial"/>
-              <a:cs typeface="Arial"/>
-              <a:sym typeface="Arial"/>
-            </a:endParaRPr>
-          </a:p>
-        </p:txBody>
-      </p:sp>
-      <p:pic>
-        <p:nvPicPr>
-          <p:cNvPr id="797" name="Google Shape;797;p60"/>
-          <p:cNvPicPr preferRelativeResize="0"/>
-          <p:nvPr/>
-        </p:nvPicPr>
-        <p:blipFill rotWithShape="1">
-          <a:blip r:embed="rId3">
-            <a:alphaModFix/>
-          </a:blip>
-          <a:srcRect b="0" l="0" r="0" t="0"/>
-          <a:stretch/>
-        </p:blipFill>
-        <p:spPr>
-          <a:xfrm>
-            <a:off x="669096" y="2601017"/>
-            <a:ext cx="450850" cy="450850"/>
-          </a:xfrm>
-          <a:prstGeom prst="rect">
-            <a:avLst/>
-          </a:prstGeom>
-          <a:noFill/>
-          <a:ln>
-            <a:noFill/>
-          </a:ln>
-        </p:spPr>
-      </p:pic>
-      <p:pic>
-        <p:nvPicPr>
-          <p:cNvPr id="798" name="Google Shape;798;p60"/>
-          <p:cNvPicPr preferRelativeResize="0"/>
-          <p:nvPr/>
-        </p:nvPicPr>
-        <p:blipFill rotWithShape="1">
-          <a:blip r:embed="rId4">
-            <a:alphaModFix/>
-          </a:blip>
-          <a:srcRect b="0" l="0" r="0" t="0"/>
-          <a:stretch/>
-        </p:blipFill>
-        <p:spPr>
-          <a:xfrm>
-            <a:off x="8097007" y="2603210"/>
-            <a:ext cx="450851" cy="450851"/>
-          </a:xfrm>
-          <a:prstGeom prst="rect">
-            <a:avLst/>
-          </a:prstGeom>
-          <a:noFill/>
-          <a:ln>
-            <a:noFill/>
-          </a:ln>
-        </p:spPr>
-      </p:pic>
-      <p:pic>
-        <p:nvPicPr>
-          <p:cNvPr id="799" name="Google Shape;799;p60"/>
-          <p:cNvPicPr preferRelativeResize="0"/>
-          <p:nvPr/>
-        </p:nvPicPr>
-        <p:blipFill rotWithShape="1">
-          <a:blip r:embed="rId5">
-            <a:alphaModFix/>
-          </a:blip>
-          <a:srcRect b="0" l="0" r="0" t="0"/>
-          <a:stretch/>
-        </p:blipFill>
-        <p:spPr>
-          <a:xfrm>
-            <a:off x="4383052" y="2601017"/>
-            <a:ext cx="450850" cy="450850"/>
-          </a:xfrm>
-          <a:prstGeom prst="rect">
-            <a:avLst/>
-          </a:prstGeom>
-          <a:noFill/>
-          <a:ln>
-            <a:noFill/>
-          </a:ln>
-        </p:spPr>
-      </p:pic>
-      <p:sp>
-        <p:nvSpPr>
-          <p:cNvPr id="800" name="title"/>
-          <p:cNvSpPr txBox="1"/>
-          <p:nvPr/>
-        </p:nvSpPr>
-        <p:spPr>
-          <a:xfrm>
-            <a:off x="677387" y="692177"/>
-            <a:ext cx="10855878" cy="822960"/>
-          </a:xfrm>
-          <a:prstGeom prst="rect">
-            <a:avLst/>
-          </a:prstGeom>
-          <a:noFill/>
-        </p:spPr>
-        <p:txBody>
-          <a:bodyPr wrap="square" lIns="76200" rIns="76200" tIns="50800" bIns="50800">
-            <a:spAutoFit/>
-          </a:bodyPr>
-          <a:lstStyle/>
-          <a:p>
-            <a:pPr algn="l">
-              <a:spcAft>
-                <a:spcPts val="300"/>
-              </a:spcAft>
-              <a:defRPr sz="4000">
-                <a:solidFill>
-                  <a:srgbClr val="000000"/>
-                </a:solidFill>
-                <a:latin typeface="Arial"/>
-                <a:ea typeface="Arial"/>
-                <a:cs typeface="Arial"/>
-              </a:defRPr>
-            </a:pPr>
-            <a:r>
-              <a:rPr sz="4000">
-                <a:solidFill>
-                  <a:srgbClr val="000000"/>
-                </a:solidFill>
-                <a:latin typeface="Arial"/>
-                <a:ea typeface="Arial"/>
-                <a:cs typeface="Arial"/>
-              </a:rPr>
-              <a:t>План пилота</a:t>
-            </a:r>
-          </a:p>
-        </p:txBody>
-      </p:sp>
-      <p:sp>
-        <p:nvSpPr>
-          <p:cNvPr id="801" name="card_0"/>
-          <p:cNvSpPr txBox="1"/>
-          <p:nvPr/>
-        </p:nvSpPr>
-        <p:spPr>
-          <a:xfrm>
-            <a:off x="806889" y="3427872"/>
-            <a:ext cx="2583926" cy="937548"/>
-          </a:xfrm>
-          <a:prstGeom prst="rect">
-            <a:avLst/>
-          </a:prstGeom>
-          <a:noFill/>
-        </p:spPr>
-        <p:txBody>
-          <a:bodyPr wrap="square" lIns="76200" rIns="76200" tIns="50800" bIns="50800">
-            <a:spAutoFit/>
-          </a:bodyPr>
-          <a:lstStyle/>
-          <a:p>
-            <a:pPr algn="l">
-              <a:spcAft>
-                <a:spcPts val="300"/>
-              </a:spcAft>
-              <a:defRPr sz="1800" b="0">
-                <a:solidFill>
-                  <a:srgbClr val="000000"/>
-                </a:solidFill>
-                <a:latin typeface="Play"/>
-                <a:ea typeface="Play"/>
-                <a:cs typeface="Play"/>
-              </a:defRPr>
-            </a:pPr>
-            <a:r>
-              <a:rPr sz="1800" b="0">
-                <a:solidFill>
-                  <a:srgbClr val="000000"/>
-                </a:solidFill>
-                <a:latin typeface="Play"/>
-                <a:ea typeface="Play"/>
-                <a:cs typeface="Play"/>
-              </a:rPr>
-              <a:t>Пилот шёл 6 недель на двух командах</a:t>
-            </a:r>
-          </a:p>
-        </p:txBody>
-      </p:sp>
-      <p:sp>
-        <p:nvSpPr>
-          <p:cNvPr id="802" name="card_1"/>
-          <p:cNvSpPr txBox="1"/>
-          <p:nvPr/>
-        </p:nvSpPr>
-        <p:spPr>
-          <a:xfrm>
-            <a:off x="4533496" y="3421494"/>
-            <a:ext cx="2583926" cy="937548"/>
-          </a:xfrm>
-          <a:prstGeom prst="rect">
-            <a:avLst/>
-          </a:prstGeom>
-          <a:noFill/>
-        </p:spPr>
-        <p:txBody>
-          <a:bodyPr wrap="square" lIns="76200" rIns="76200" tIns="50800" bIns="50800">
-            <a:spAutoFit/>
-          </a:bodyPr>
-          <a:lstStyle/>
-          <a:p>
-            <a:pPr algn="l">
-              <a:spcAft>
-                <a:spcPts val="300"/>
-              </a:spcAft>
-              <a:defRPr sz="2400" b="0">
-                <a:solidFill>
-                  <a:srgbClr val="000000"/>
-                </a:solidFill>
-                <a:latin typeface="Play"/>
-                <a:ea typeface="Play"/>
-                <a:cs typeface="Play"/>
-              </a:defRPr>
-            </a:pPr>
-            <a:r>
-              <a:rPr sz="2400" b="0">
-                <a:solidFill>
-                  <a:srgbClr val="000000"/>
-                </a:solidFill>
-                <a:latin typeface="Play"/>
-                <a:ea typeface="Play"/>
-                <a:cs typeface="Play"/>
-              </a:rPr>
-              <a:t>Собрано 68 презентаций</a:t>
-            </a:r>
-          </a:p>
-        </p:txBody>
-      </p:sp>
-      <p:sp>
-        <p:nvSpPr>
-          <p:cNvPr id="803" name="card_2"/>
-          <p:cNvSpPr txBox="1"/>
-          <p:nvPr/>
-        </p:nvSpPr>
-        <p:spPr>
-          <a:xfrm>
-            <a:off x="8264469" y="3425860"/>
-            <a:ext cx="2575194" cy="1160137"/>
-          </a:xfrm>
-          <a:prstGeom prst="rect">
-            <a:avLst/>
-          </a:prstGeom>
-          <a:noFill/>
-        </p:spPr>
-        <p:txBody>
-          <a:bodyPr wrap="square" lIns="76200" rIns="76200" tIns="50800" bIns="50800">
-            <a:spAutoFit/>
-          </a:bodyPr>
-          <a:lstStyle/>
-          <a:p>
-            <a:pPr algn="l">
-              <a:spcAft>
-                <a:spcPts val="300"/>
-              </a:spcAft>
-              <a:defRPr sz="1800" b="0">
-                <a:solidFill>
-                  <a:srgbClr val="000000"/>
-                </a:solidFill>
-                <a:latin typeface="Play"/>
-                <a:ea typeface="Play"/>
-                <a:cs typeface="Play"/>
-              </a:defRPr>
-            </a:pPr>
-            <a:r>
-              <a:rPr sz="1800" b="0">
-                <a:solidFill>
-                  <a:srgbClr val="000000"/>
-                </a:solidFill>
-                <a:latin typeface="Play"/>
-                <a:ea typeface="Play"/>
-                <a:cs typeface="Play"/>
-              </a:rPr>
-              <a:t>Средняя сборка колоды 4 минуты вместо 186</a:t>
-            </a:r>
-          </a:p>
-        </p:txBody>
-      </p:sp>
-    </p:spTree>
-  </p:cSld>
-  <p:clrMapOvr>
-    <a:masterClrMapping/>
-  </p:clrMapOvr>
-</p:sld>
-</file>
-
-<file path=ppt/slides/slide62.xml><?xml version="1.0" encoding="utf-8"?>
-<p:sld xmlns:a="http://schemas.openxmlformats.org/drawingml/2006/main" xmlns:p="http://schemas.openxmlformats.org/presentationml/2006/main" xmlns:r="http://schemas.openxmlformats.org/officeDocument/2006/relationships">
-  <p:cSld>
-    <p:bg>
-      <p:bgPr>
-        <a:solidFill>
-          <a:schemeClr val="lt2"/>
-        </a:solidFill>
-      </p:bgPr>
-    </p:bg>
-    <p:spTree>
-      <p:nvGrpSpPr>
-        <p:cNvPr id="1" name=""/>
-        <p:cNvGrpSpPr/>
-        <p:nvPr/>
-      </p:nvGrpSpPr>
-      <p:grpSpPr/>
-      <p:sp>
-        <p:nvSpPr>
-          <p:cNvPr id="2" name="title"/>
-          <p:cNvSpPr txBox="1"/>
-          <p:nvPr/>
-        </p:nvSpPr>
-        <p:spPr>
-          <a:xfrm>
-            <a:off x="677875" y="692177"/>
-            <a:ext cx="10855391" cy="822960"/>
-          </a:xfrm>
-          <a:prstGeom prst="rect">
-            <a:avLst/>
-          </a:prstGeom>
-          <a:noFill/>
-        </p:spPr>
-        <p:txBody>
-          <a:bodyPr wrap="square" lIns="76200" rIns="76200" tIns="50800" bIns="50800">
-            <a:spAutoFit/>
-          </a:bodyPr>
-          <a:lstStyle/>
-          <a:p>
-            <a:pPr algn="l">
-              <a:spcAft>
-                <a:spcPts val="300"/>
-              </a:spcAft>
-              <a:defRPr sz="4000">
-                <a:solidFill>
-                  <a:srgbClr val="000000"/>
-                </a:solidFill>
-                <a:latin typeface="Arial"/>
-                <a:ea typeface="Arial"/>
-                <a:cs typeface="Arial"/>
-              </a:defRPr>
-            </a:pPr>
-            <a:r>
-              <a:rPr sz="4000">
-                <a:solidFill>
-                  <a:srgbClr val="000000"/>
-                </a:solidFill>
-                <a:latin typeface="Arial"/>
-                <a:ea typeface="Arial"/>
-                <a:cs typeface="Arial"/>
-              </a:rPr>
-              <a:t>Что мы просим решить</a:t>
-            </a:r>
-          </a:p>
-        </p:txBody>
-      </p:sp>
-      <p:sp>
-        <p:nvSpPr>
-          <p:cNvPr id="3" name="body"/>
-          <p:cNvSpPr txBox="1"/>
-          <p:nvPr/>
-        </p:nvSpPr>
-        <p:spPr>
-          <a:xfrm>
-            <a:off x="677875" y="2804310"/>
-            <a:ext cx="10855391" cy="1422400"/>
-          </a:xfrm>
-          <a:prstGeom prst="rect">
-            <a:avLst/>
-          </a:prstGeom>
-          <a:noFill/>
-        </p:spPr>
-        <p:txBody>
-          <a:bodyPr wrap="square" lIns="76200" rIns="76200" tIns="50800" bIns="50800">
-            <a:spAutoFit/>
-          </a:bodyPr>
-          <a:lstStyle/>
-          <a:p>
-            <a:pPr algn="ctr">
-              <a:spcAft>
-                <a:spcPts val="300"/>
-              </a:spcAft>
-              <a:defRPr sz="4000">
-                <a:solidFill>
-                  <a:srgbClr val="000000"/>
-                </a:solidFill>
-                <a:latin typeface="Play"/>
-                <a:ea typeface="Play"/>
-                <a:cs typeface="Play"/>
-              </a:defRPr>
-            </a:pPr>
-            <a:r>
-              <a:rPr sz="4000">
-                <a:solidFill>
-                  <a:srgbClr val="000000"/>
-                </a:solidFill>
-                <a:latin typeface="Play"/>
-                <a:ea typeface="Play"/>
-                <a:cs typeface="Play"/>
-              </a:rPr>
-              <a:t>Принять решение о запуске сервиса на всю компанию</a:t>
+              <a:t>Риски и меры: модель, шаблон, нагрузка</a:t>
             </a:r>
           </a:p>
         </p:txBody>

--- a/samples/Шаблон_презентации_VK_Education__classic.pptx
+++ b/samples/Шаблон_презентации_VK_Education__classic.pptx
@@ -259,434 +259,6 @@
     </a:lvl9pPr>
   </p:defaultTextStyle>
 </p:presentation>
-</file>
-
-<file path=ppt/charts/chart1.xml><?xml version="1.0" encoding="utf-8"?>
-<c:chartSpace xmlns:c="http://schemas.openxmlformats.org/drawingml/2006/chart" xmlns:a="http://schemas.openxmlformats.org/drawingml/2006/main" xmlns:r="http://schemas.openxmlformats.org/officeDocument/2006/relationships">
-  <c:date1904 val="0"/>
-  <c:chart>
-    <c:autoTitleDeleted val="1"/>
-    <c:plotArea>
-      <c:barChart>
-        <c:barDir val="col"/>
-        <c:grouping val="clustered"/>
-        <c:ser>
-          <c:idx val="0"/>
-          <c:order val="0"/>
-          <c:tx>
-            <c:strRef>
-              <c:f>Sheet1!$B$1</c:f>
-              <c:strCache>
-                <c:ptCount val="1"/>
-                <c:pt idx="0">
-                  <c:v>Время</c:v>
-                </c:pt>
-              </c:strCache>
-            </c:strRef>
-          </c:tx>
-          <c:spPr>
-            <a:solidFill>
-              <a:srgbClr val="0077FF"/>
-            </a:solidFill>
-            <a:ln>
-              <a:solidFill>
-                <a:srgbClr val="0077FF"/>
-              </a:solidFill>
-            </a:ln>
-          </c:spPr>
-          <c:cat>
-            <c:strRef>
-              <c:f>Sheet1!$A$2:$A$3</c:f>
-              <c:strCache>
-                <c:ptCount val="2"/>
-                <c:pt idx="0">
-                  <c:v>Сборка</c:v>
-                </c:pt>
-                <c:pt idx="1">
-                  <c:v>Правки</c:v>
-                </c:pt>
-              </c:strCache>
-            </c:strRef>
-          </c:cat>
-          <c:val>
-            <c:numRef>
-              <c:f>Sheet1!$B$2:$B$3</c:f>
-              <c:numCache>
-                <c:formatCode>General</c:formatCode>
-                <c:ptCount val="2"/>
-                <c:pt idx="0">
-                  <c:v>186.0</c:v>
-                </c:pt>
-                <c:pt idx="1">
-                  <c:v>74.0</c:v>
-                </c:pt>
-              </c:numCache>
-            </c:numRef>
-          </c:val>
-        </c:ser>
-        <c:dLbls>
-          <c:numFmt formatCode="0&quot; мин&quot;" sourceLinked="0"/>
-          <c:txPr>
-            <a:bodyPr wrap="none"/>
-            <a:lstStyle/>
-            <a:p>
-              <a:pPr>
-                <a:defRPr sz="1100" b="0">
-                  <a:solidFill>
-                    <a:srgbClr val="000000"/>
-                  </a:solidFill>
-                  <a:latin typeface="Play"/>
-                  <a:ea typeface="Play"/>
-                  <a:cs typeface="Play"/>
-                </a:defRPr>
-              </a:pPr>
-            </a:p>
-          </c:txPr>
-          <c:dLblPos val="outEnd"/>
-          <c:showLegendKey val="0"/>
-          <c:showVal val="1"/>
-          <c:showCatName val="0"/>
-          <c:showSerName val="0"/>
-          <c:showPercent val="0"/>
-          <c:showBubbleSize val="0"/>
-          <c:showLeaderLines val="1"/>
-        </c:dLbls>
-        <c:gapWidth val="60"/>
-        <c:axId val="-2068027336"/>
-        <c:axId val="-2113994440"/>
-      </c:barChart>
-      <c:catAx>
-        <c:axId val="-2068027336"/>
-        <c:scaling>
-          <c:orientation val="minMax"/>
-        </c:scaling>
-        <c:delete val="0"/>
-        <c:axPos val="b"/>
-        <c:majorTickMark val="out"/>
-        <c:minorTickMark val="none"/>
-        <c:tickLblPos val="nextTo"/>
-        <c:txPr>
-          <a:bodyPr/>
-          <a:lstStyle/>
-          <a:p>
-            <a:pPr>
-              <a:defRPr sz="1100" b="0">
-                <a:solidFill>
-                  <a:srgbClr val="000000"/>
-                </a:solidFill>
-                <a:latin typeface="Play"/>
-                <a:ea typeface="Play"/>
-                <a:cs typeface="Play"/>
-              </a:defRPr>
-            </a:pPr>
-          </a:p>
-        </c:txPr>
-        <c:crossAx val="-2113994440"/>
-        <c:crosses val="autoZero"/>
-        <c:auto val="1"/>
-        <c:lblAlgn val="ctr"/>
-        <c:lblOffset val="100"/>
-        <c:noMultiLvlLbl val="0"/>
-      </c:catAx>
-      <c:valAx>
-        <c:axId val="-2113994440"/>
-        <c:scaling/>
-        <c:delete val="0"/>
-        <c:axPos val="l"/>
-        <c:majorGridlines>
-          <c:spPr>
-            <a:ln w="9525">
-              <a:solidFill>
-                <a:srgbClr val="D1D1D1"/>
-              </a:solidFill>
-            </a:ln>
-          </c:spPr>
-        </c:majorGridlines>
-        <c:title>
-          <c:tx>
-            <c:rich>
-              <a:bodyPr rot="0" vert="horz"/>
-              <a:lstStyle/>
-              <a:p>
-                <a:pPr>
-                  <a:defRPr sz="1100" b="0">
-                    <a:solidFill>
-                      <a:srgbClr val="000000"/>
-                    </a:solidFill>
-                    <a:latin typeface="Play"/>
-                    <a:ea typeface="Play"/>
-                    <a:cs typeface="Play"/>
-                  </a:defRPr>
-                </a:pPr>
-                <a:r>
-                  <a:t>Время, мин</a:t>
-                </a:r>
-              </a:p>
-            </c:rich>
-          </c:tx>
-          <c:layout/>
-          <c:overlay val="0"/>
-        </c:title>
-        <c:majorTickMark val="out"/>
-        <c:minorTickMark val="none"/>
-        <c:tickLblPos val="nextTo"/>
-        <c:txPr>
-          <a:bodyPr/>
-          <a:lstStyle/>
-          <a:p>
-            <a:pPr>
-              <a:defRPr sz="1100" b="0">
-                <a:solidFill>
-                  <a:srgbClr val="000000"/>
-                </a:solidFill>
-                <a:latin typeface="Play"/>
-                <a:ea typeface="Play"/>
-                <a:cs typeface="Play"/>
-              </a:defRPr>
-            </a:pPr>
-          </a:p>
-        </c:txPr>
-        <c:crossAx val="-2068027336"/>
-        <c:crosses val="autoZero"/>
-      </c:valAx>
-    </c:plotArea>
-    <c:dispBlanksAs val="gap"/>
-  </c:chart>
-  <c:txPr>
-    <a:bodyPr/>
-    <a:lstStyle/>
-    <a:p>
-      <a:pPr>
-        <a:defRPr sz="1200" b="0">
-          <a:solidFill>
-            <a:srgbClr val="000000"/>
-          </a:solidFill>
-          <a:latin typeface="Play"/>
-          <a:ea typeface="Play"/>
-          <a:cs typeface="Play"/>
-        </a:defRPr>
-      </a:pPr>
-      <a:endParaRPr lang="en-US"/>
-    </a:p>
-  </c:txPr>
-  <c:externalData r:id="rId1">
-    <c:autoUpdate val="0"/>
-  </c:externalData>
-</c:chartSpace>
-</file>
-
-<file path=ppt/charts/chart2.xml><?xml version="1.0" encoding="utf-8"?>
-<c:chartSpace xmlns:c="http://schemas.openxmlformats.org/drawingml/2006/chart" xmlns:a="http://schemas.openxmlformats.org/drawingml/2006/main" xmlns:r="http://schemas.openxmlformats.org/officeDocument/2006/relationships">
-  <c:date1904 val="0"/>
-  <c:chart>
-    <c:autoTitleDeleted val="1"/>
-    <c:plotArea>
-      <c:barChart>
-        <c:barDir val="col"/>
-        <c:grouping val="clustered"/>
-        <c:ser>
-          <c:idx val="0"/>
-          <c:order val="0"/>
-          <c:tx>
-            <c:strRef>
-              <c:f>Sheet1!$B$1</c:f>
-              <c:strCache>
-                <c:ptCount val="1"/>
-                <c:pt idx="0">
-                  <c:v>Значения</c:v>
-                </c:pt>
-              </c:strCache>
-            </c:strRef>
-          </c:tx>
-          <c:spPr>
-            <a:solidFill>
-              <a:srgbClr val="0077FF"/>
-            </a:solidFill>
-            <a:ln>
-              <a:solidFill>
-                <a:srgbClr val="0077FF"/>
-              </a:solidFill>
-            </a:ln>
-          </c:spPr>
-          <c:cat>
-            <c:strRef>
-              <c:f>Sheet1!$A$2:$A$3</c:f>
-              <c:strCache>
-                <c:ptCount val="2"/>
-                <c:pt idx="0">
-                  <c:v>Сборка</c:v>
-                </c:pt>
-                <c:pt idx="1">
-                  <c:v>Запросы дизайнеров</c:v>
-                </c:pt>
-              </c:strCache>
-            </c:strRef>
-          </c:cat>
-          <c:val>
-            <c:numRef>
-              <c:f>Sheet1!$B$2:$B$3</c:f>
-              <c:numCache>
-                <c:formatCode>General</c:formatCode>
-                <c:ptCount val="2"/>
-                <c:pt idx="0">
-                  <c:v>4.0</c:v>
-                </c:pt>
-                <c:pt idx="1">
-                  <c:v>38.0</c:v>
-                </c:pt>
-              </c:numCache>
-            </c:numRef>
-          </c:val>
-        </c:ser>
-        <c:dLbls>
-          <c:numFmt formatCode="0&quot; значений&quot;" sourceLinked="0"/>
-          <c:txPr>
-            <a:bodyPr wrap="none"/>
-            <a:lstStyle/>
-            <a:p>
-              <a:pPr>
-                <a:defRPr sz="1100" b="0">
-                  <a:solidFill>
-                    <a:srgbClr val="000000"/>
-                  </a:solidFill>
-                  <a:latin typeface="Play"/>
-                  <a:ea typeface="Play"/>
-                  <a:cs typeface="Play"/>
-                </a:defRPr>
-              </a:pPr>
-            </a:p>
-          </c:txPr>
-          <c:dLblPos val="outEnd"/>
-          <c:showLegendKey val="0"/>
-          <c:showVal val="1"/>
-          <c:showCatName val="0"/>
-          <c:showSerName val="0"/>
-          <c:showPercent val="0"/>
-          <c:showBubbleSize val="0"/>
-          <c:showLeaderLines val="1"/>
-        </c:dLbls>
-        <c:gapWidth val="60"/>
-        <c:axId val="-2068027336"/>
-        <c:axId val="-2113994440"/>
-      </c:barChart>
-      <c:catAx>
-        <c:axId val="-2068027336"/>
-        <c:scaling>
-          <c:orientation val="minMax"/>
-        </c:scaling>
-        <c:delete val="0"/>
-        <c:axPos val="b"/>
-        <c:majorTickMark val="out"/>
-        <c:minorTickMark val="none"/>
-        <c:tickLblPos val="nextTo"/>
-        <c:txPr>
-          <a:bodyPr/>
-          <a:lstStyle/>
-          <a:p>
-            <a:pPr>
-              <a:defRPr sz="1100" b="0">
-                <a:solidFill>
-                  <a:srgbClr val="000000"/>
-                </a:solidFill>
-                <a:latin typeface="Play"/>
-                <a:ea typeface="Play"/>
-                <a:cs typeface="Play"/>
-              </a:defRPr>
-            </a:pPr>
-          </a:p>
-        </c:txPr>
-        <c:crossAx val="-2113994440"/>
-        <c:crosses val="autoZero"/>
-        <c:auto val="1"/>
-        <c:lblAlgn val="ctr"/>
-        <c:lblOffset val="100"/>
-        <c:noMultiLvlLbl val="0"/>
-      </c:catAx>
-      <c:valAx>
-        <c:axId val="-2113994440"/>
-        <c:scaling/>
-        <c:delete val="0"/>
-        <c:axPos val="l"/>
-        <c:majorGridlines>
-          <c:spPr>
-            <a:ln w="9525">
-              <a:solidFill>
-                <a:srgbClr val="D1D1D1"/>
-              </a:solidFill>
-            </a:ln>
-          </c:spPr>
-        </c:majorGridlines>
-        <c:title>
-          <c:tx>
-            <c:rich>
-              <a:bodyPr rot="0" vert="horz"/>
-              <a:lstStyle/>
-              <a:p>
-                <a:pPr>
-                  <a:defRPr sz="1100" b="0">
-                    <a:solidFill>
-                      <a:srgbClr val="000000"/>
-                    </a:solidFill>
-                    <a:latin typeface="Play"/>
-                    <a:ea typeface="Play"/>
-                    <a:cs typeface="Play"/>
-                  </a:defRPr>
-                </a:pPr>
-                <a:r>
-                  <a:t>Значения, значений</a:t>
-                </a:r>
-              </a:p>
-            </c:rich>
-          </c:tx>
-          <c:layout/>
-          <c:overlay val="0"/>
-        </c:title>
-        <c:majorTickMark val="out"/>
-        <c:minorTickMark val="none"/>
-        <c:tickLblPos val="nextTo"/>
-        <c:txPr>
-          <a:bodyPr/>
-          <a:lstStyle/>
-          <a:p>
-            <a:pPr>
-              <a:defRPr sz="1100" b="0">
-                <a:solidFill>
-                  <a:srgbClr val="000000"/>
-                </a:solidFill>
-                <a:latin typeface="Play"/>
-                <a:ea typeface="Play"/>
-                <a:cs typeface="Play"/>
-              </a:defRPr>
-            </a:pPr>
-          </a:p>
-        </c:txPr>
-        <c:crossAx val="-2068027336"/>
-        <c:crosses val="autoZero"/>
-      </c:valAx>
-    </c:plotArea>
-    <c:dispBlanksAs val="gap"/>
-  </c:chart>
-  <c:txPr>
-    <a:bodyPr/>
-    <a:lstStyle/>
-    <a:p>
-      <a:pPr>
-        <a:defRPr sz="1200" b="0">
-          <a:solidFill>
-            <a:srgbClr val="000000"/>
-          </a:solidFill>
-          <a:latin typeface="Play"/>
-          <a:ea typeface="Play"/>
-          <a:cs typeface="Play"/>
-        </a:defRPr>
-      </a:pPr>
-      <a:endParaRPr lang="en-US"/>
-    </a:p>
-  </c:txPr>
-  <c:externalData r:id="rId1">
-    <c:autoUpdate val="0"/>
-  </c:externalData>
-</c:chartSpace>
 </file>
 
 <file path=ppt/notesMasters/notesMaster1.xml><?xml version="1.0" encoding="utf-8"?>
@@ -2517,19 +2089,455 @@
 </p:notes>
 </file>
 
-<file path=ppt/slideLayouts/slideLayout12.xml><?xml version="1.0" encoding="utf-8"?>
-<p:sldLayout xmlns:a="http://schemas.openxmlformats.org/drawingml/2006/main" xmlns:r="http://schemas.openxmlformats.org/officeDocument/2006/relationships" xmlns:mc="http://schemas.openxmlformats.org/markup-compatibility/2006" xmlns:mv="urn:schemas-microsoft-com:mac:vml" xmlns:p="http://schemas.openxmlformats.org/presentationml/2006/main" xmlns:c="http://schemas.openxmlformats.org/drawingml/2006/chart" xmlns:dgm="http://schemas.openxmlformats.org/drawingml/2006/diagram" xmlns:o="urn:schemas-microsoft-com:office:office" xmlns:v="urn:schemas-microsoft-com:vml" xmlns:pvml="urn:schemas-microsoft-com:office:powerpoint" xmlns:com="http://schemas.openxmlformats.org/drawingml/2006/compatibility" xmlns:p14="http://schemas.microsoft.com/office/powerpoint/2010/main" xmlns:p15="http://schemas.microsoft.com/office/powerpoint/2012/main" xmlns:ahyp="http://schemas.microsoft.com/office/drawing/2018/hyperlinkcolor" matchingName="2_Заголовок + текст в две колонки">
-  <p:cSld name="2_Заголовок + текст в две колонки">
+<file path=ppt/slideLayouts/slideLayout18.xml><?xml version="1.0" encoding="utf-8"?>
+<p:sldLayout xmlns:a="http://schemas.openxmlformats.org/drawingml/2006/main" xmlns:r="http://schemas.openxmlformats.org/officeDocument/2006/relationships" xmlns:mc="http://schemas.openxmlformats.org/markup-compatibility/2006" xmlns:mv="urn:schemas-microsoft-com:mac:vml" xmlns:p="http://schemas.openxmlformats.org/presentationml/2006/main" xmlns:c="http://schemas.openxmlformats.org/drawingml/2006/chart" xmlns:dgm="http://schemas.openxmlformats.org/drawingml/2006/diagram" xmlns:o="urn:schemas-microsoft-com:office:office" xmlns:v="urn:schemas-microsoft-com:vml" xmlns:pvml="urn:schemas-microsoft-com:office:powerpoint" xmlns:com="http://schemas.openxmlformats.org/drawingml/2006/compatibility" xmlns:p14="http://schemas.microsoft.com/office/powerpoint/2010/main" xmlns:p15="http://schemas.microsoft.com/office/powerpoint/2012/main" xmlns:ahyp="http://schemas.microsoft.com/office/drawing/2018/hyperlinkcolor" matchingName="Финальный с QR + подпись">
+  <p:cSld name="Финальный с QR + подпись">
     <p:bg>
       <p:bgPr>
         <a:solidFill>
-          <a:schemeClr val="lt2"/>
+          <a:schemeClr val="accent1"/>
         </a:solidFill>
       </p:bgPr>
     </p:bg>
     <p:spTree>
       <p:nvGrpSpPr>
-        <p:cNvPr id="107" name="Shape 107"/>
+        <p:cNvPr id="132" name="Shape 132"/>
+        <p:cNvGrpSpPr/>
+        <p:nvPr/>
+      </p:nvGrpSpPr>
+      <p:grpSpPr>
+        <a:xfrm>
+          <a:off x="0" y="0"/>
+          <a:ext cx="0" cy="0"/>
+          <a:chOff x="0" y="0"/>
+          <a:chExt cx="0" cy="0"/>
+        </a:xfrm>
+      </p:grpSpPr>
+      <p:pic>
+        <p:nvPicPr>
+          <p:cNvPr id="133" name="Google Shape;133;p19"/>
+          <p:cNvPicPr preferRelativeResize="0"/>
+          <p:nvPr/>
+        </p:nvPicPr>
+        <p:blipFill rotWithShape="1">
+          <a:blip r:embed="rId2">
+            <a:alphaModFix/>
+          </a:blip>
+          <a:srcRect b="0" l="0" r="0" t="0"/>
+          <a:stretch/>
+        </p:blipFill>
+        <p:spPr>
+          <a:xfrm>
+            <a:off x="6023251" y="692149"/>
+            <a:ext cx="6168749" cy="6168749"/>
+          </a:xfrm>
+          <a:prstGeom prst="rect">
+            <a:avLst/>
+          </a:prstGeom>
+          <a:noFill/>
+          <a:ln>
+            <a:noFill/>
+          </a:ln>
+        </p:spPr>
+      </p:pic>
+      <p:sp>
+        <p:nvSpPr>
+          <p:cNvPr id="134" name="Google Shape;134;p19"/>
+          <p:cNvSpPr txBox="1"/>
+          <p:nvPr>
+            <p:ph type="title"/>
+          </p:nvPr>
+        </p:nvSpPr>
+        <p:spPr>
+          <a:xfrm>
+            <a:off x="620713" y="2483712"/>
+            <a:ext cx="5475287" cy="1477328"/>
+          </a:xfrm>
+          <a:prstGeom prst="rect">
+            <a:avLst/>
+          </a:prstGeom>
+          <a:noFill/>
+          <a:ln>
+            <a:noFill/>
+          </a:ln>
+        </p:spPr>
+        <p:txBody>
+          <a:bodyPr anchorCtr="0" anchor="b" bIns="0" lIns="0" spcFirstLastPara="1" rIns="0" wrap="square" tIns="0">
+            <a:spAutoFit/>
+          </a:bodyPr>
+          <a:lstStyle>
+            <a:lvl1pPr lvl="0" algn="l">
+              <a:lnSpc>
+                <a:spcPct val="80000"/>
+              </a:lnSpc>
+              <a:spcBef>
+                <a:spcPts val="0"/>
+              </a:spcBef>
+              <a:spcAft>
+                <a:spcPts val="0"/>
+              </a:spcAft>
+              <a:buClr>
+                <a:schemeClr val="lt2"/>
+              </a:buClr>
+              <a:buSzPts val="6000"/>
+              <a:buFont typeface="Play"/>
+              <a:buNone/>
+              <a:defRPr sz="6000">
+                <a:solidFill>
+                  <a:schemeClr val="lt2"/>
+                </a:solidFill>
+              </a:defRPr>
+            </a:lvl1pPr>
+            <a:lvl2pPr lvl="1">
+              <a:spcBef>
+                <a:spcPts val="0"/>
+              </a:spcBef>
+              <a:spcAft>
+                <a:spcPts val="0"/>
+              </a:spcAft>
+              <a:buSzPts val="1400"/>
+              <a:buNone/>
+              <a:defRPr/>
+            </a:lvl2pPr>
+            <a:lvl3pPr lvl="2">
+              <a:spcBef>
+                <a:spcPts val="0"/>
+              </a:spcBef>
+              <a:spcAft>
+                <a:spcPts val="0"/>
+              </a:spcAft>
+              <a:buSzPts val="1400"/>
+              <a:buNone/>
+              <a:defRPr/>
+            </a:lvl3pPr>
+            <a:lvl4pPr lvl="3">
+              <a:spcBef>
+                <a:spcPts val="0"/>
+              </a:spcBef>
+              <a:spcAft>
+                <a:spcPts val="0"/>
+              </a:spcAft>
+              <a:buSzPts val="1400"/>
+              <a:buNone/>
+              <a:defRPr/>
+            </a:lvl4pPr>
+            <a:lvl5pPr lvl="4">
+              <a:spcBef>
+                <a:spcPts val="0"/>
+              </a:spcBef>
+              <a:spcAft>
+                <a:spcPts val="0"/>
+              </a:spcAft>
+              <a:buSzPts val="1400"/>
+              <a:buNone/>
+              <a:defRPr/>
+            </a:lvl5pPr>
+            <a:lvl6pPr lvl="5">
+              <a:spcBef>
+                <a:spcPts val="0"/>
+              </a:spcBef>
+              <a:spcAft>
+                <a:spcPts val="0"/>
+              </a:spcAft>
+              <a:buSzPts val="1400"/>
+              <a:buNone/>
+              <a:defRPr/>
+            </a:lvl6pPr>
+            <a:lvl7pPr lvl="6">
+              <a:spcBef>
+                <a:spcPts val="0"/>
+              </a:spcBef>
+              <a:spcAft>
+                <a:spcPts val="0"/>
+              </a:spcAft>
+              <a:buSzPts val="1400"/>
+              <a:buNone/>
+              <a:defRPr/>
+            </a:lvl7pPr>
+            <a:lvl8pPr lvl="7">
+              <a:spcBef>
+                <a:spcPts val="0"/>
+              </a:spcBef>
+              <a:spcAft>
+                <a:spcPts val="0"/>
+              </a:spcAft>
+              <a:buSzPts val="1400"/>
+              <a:buNone/>
+              <a:defRPr/>
+            </a:lvl8pPr>
+            <a:lvl9pPr lvl="8">
+              <a:spcBef>
+                <a:spcPts val="0"/>
+              </a:spcBef>
+              <a:spcAft>
+                <a:spcPts val="0"/>
+              </a:spcAft>
+              <a:buSzPts val="1400"/>
+              <a:buNone/>
+              <a:defRPr/>
+            </a:lvl9pPr>
+          </a:lstStyle>
+          <a:p/>
+        </p:txBody>
+      </p:sp>
+      <p:sp>
+        <p:nvSpPr>
+          <p:cNvPr id="135" name="Google Shape;135;p19"/>
+          <p:cNvSpPr/>
+          <p:nvPr>
+            <p:ph idx="2" type="pic"/>
+          </p:nvPr>
+        </p:nvSpPr>
+        <p:spPr>
+          <a:xfrm>
+            <a:off x="658813" y="692150"/>
+            <a:ext cx="1081088" cy="1081088"/>
+          </a:xfrm>
+          <a:prstGeom prst="rect">
+            <a:avLst/>
+          </a:prstGeom>
+          <a:noFill/>
+          <a:ln>
+            <a:noFill/>
+          </a:ln>
+        </p:spPr>
+      </p:sp>
+      <p:sp>
+        <p:nvSpPr>
+          <p:cNvPr id="136" name="Google Shape;136;p19"/>
+          <p:cNvSpPr txBox="1"/>
+          <p:nvPr>
+            <p:ph idx="1" type="body"/>
+          </p:nvPr>
+        </p:nvSpPr>
+        <p:spPr>
+          <a:xfrm>
+            <a:off x="658813" y="4161565"/>
+            <a:ext cx="5437187" cy="355600"/>
+          </a:xfrm>
+          <a:prstGeom prst="rect">
+            <a:avLst/>
+          </a:prstGeom>
+          <a:noFill/>
+          <a:ln>
+            <a:noFill/>
+          </a:ln>
+        </p:spPr>
+        <p:txBody>
+          <a:bodyPr anchorCtr="0" anchor="t" bIns="0" lIns="0" spcFirstLastPara="1" rIns="0" wrap="square" tIns="0">
+            <a:normAutofit/>
+          </a:bodyPr>
+          <a:lstStyle>
+            <a:lvl1pPr indent="-228600" lvl="0" marL="457200" algn="l">
+              <a:lnSpc>
+                <a:spcPct val="110000"/>
+              </a:lnSpc>
+              <a:spcBef>
+                <a:spcPts val="1000"/>
+              </a:spcBef>
+              <a:spcAft>
+                <a:spcPts val="0"/>
+              </a:spcAft>
+              <a:buClr>
+                <a:schemeClr val="lt2"/>
+              </a:buClr>
+              <a:buSzPts val="1600"/>
+              <a:buNone/>
+              <a:defRPr b="0" i="0">
+                <a:solidFill>
+                  <a:schemeClr val="lt2"/>
+                </a:solidFill>
+                <a:latin typeface="Play"/>
+                <a:ea typeface="Play"/>
+                <a:cs typeface="Play"/>
+                <a:sym typeface="Play"/>
+              </a:defRPr>
+            </a:lvl1pPr>
+            <a:lvl2pPr indent="-342900" lvl="1" marL="914400" algn="l">
+              <a:lnSpc>
+                <a:spcPct val="110000"/>
+              </a:lnSpc>
+              <a:spcBef>
+                <a:spcPts val="500"/>
+              </a:spcBef>
+              <a:spcAft>
+                <a:spcPts val="0"/>
+              </a:spcAft>
+              <a:buSzPts val="1800"/>
+              <a:buChar char="•"/>
+              <a:defRPr/>
+            </a:lvl2pPr>
+            <a:lvl3pPr indent="-342900" lvl="2" marL="1371600" algn="l">
+              <a:lnSpc>
+                <a:spcPct val="110000"/>
+              </a:lnSpc>
+              <a:spcBef>
+                <a:spcPts val="500"/>
+              </a:spcBef>
+              <a:spcAft>
+                <a:spcPts val="0"/>
+              </a:spcAft>
+              <a:buClr>
+                <a:schemeClr val="dk1"/>
+              </a:buClr>
+              <a:buSzPts val="1800"/>
+              <a:buChar char="−"/>
+              <a:defRPr/>
+            </a:lvl3pPr>
+            <a:lvl4pPr indent="-342900" lvl="3" marL="1828800" algn="l">
+              <a:lnSpc>
+                <a:spcPct val="90000"/>
+              </a:lnSpc>
+              <a:spcBef>
+                <a:spcPts val="500"/>
+              </a:spcBef>
+              <a:spcAft>
+                <a:spcPts val="0"/>
+              </a:spcAft>
+              <a:buClr>
+                <a:schemeClr val="dk1"/>
+              </a:buClr>
+              <a:buSzPts val="1800"/>
+              <a:buChar char="•"/>
+              <a:defRPr/>
+            </a:lvl4pPr>
+            <a:lvl5pPr indent="-342900" lvl="4" marL="2286000" algn="l">
+              <a:lnSpc>
+                <a:spcPct val="90000"/>
+              </a:lnSpc>
+              <a:spcBef>
+                <a:spcPts val="500"/>
+              </a:spcBef>
+              <a:spcAft>
+                <a:spcPts val="0"/>
+              </a:spcAft>
+              <a:buClr>
+                <a:schemeClr val="dk1"/>
+              </a:buClr>
+              <a:buSzPts val="1800"/>
+              <a:buChar char="•"/>
+              <a:defRPr/>
+            </a:lvl5pPr>
+            <a:lvl6pPr indent="-342900" lvl="5" marL="2743200" algn="l">
+              <a:lnSpc>
+                <a:spcPct val="90000"/>
+              </a:lnSpc>
+              <a:spcBef>
+                <a:spcPts val="500"/>
+              </a:spcBef>
+              <a:spcAft>
+                <a:spcPts val="0"/>
+              </a:spcAft>
+              <a:buClr>
+                <a:schemeClr val="dk1"/>
+              </a:buClr>
+              <a:buSzPts val="1800"/>
+              <a:buChar char="•"/>
+              <a:defRPr/>
+            </a:lvl6pPr>
+            <a:lvl7pPr indent="-342900" lvl="6" marL="3200400" algn="l">
+              <a:lnSpc>
+                <a:spcPct val="90000"/>
+              </a:lnSpc>
+              <a:spcBef>
+                <a:spcPts val="500"/>
+              </a:spcBef>
+              <a:spcAft>
+                <a:spcPts val="0"/>
+              </a:spcAft>
+              <a:buClr>
+                <a:schemeClr val="dk1"/>
+              </a:buClr>
+              <a:buSzPts val="1800"/>
+              <a:buChar char="•"/>
+              <a:defRPr/>
+            </a:lvl7pPr>
+            <a:lvl8pPr indent="-342900" lvl="7" marL="3657600" algn="l">
+              <a:lnSpc>
+                <a:spcPct val="90000"/>
+              </a:lnSpc>
+              <a:spcBef>
+                <a:spcPts val="500"/>
+              </a:spcBef>
+              <a:spcAft>
+                <a:spcPts val="0"/>
+              </a:spcAft>
+              <a:buClr>
+                <a:schemeClr val="dk1"/>
+              </a:buClr>
+              <a:buSzPts val="1800"/>
+              <a:buChar char="•"/>
+              <a:defRPr/>
+            </a:lvl8pPr>
+            <a:lvl9pPr indent="-342900" lvl="8" marL="4114800" algn="l">
+              <a:lnSpc>
+                <a:spcPct val="90000"/>
+              </a:lnSpc>
+              <a:spcBef>
+                <a:spcPts val="500"/>
+              </a:spcBef>
+              <a:spcAft>
+                <a:spcPts val="0"/>
+              </a:spcAft>
+              <a:buClr>
+                <a:schemeClr val="dk1"/>
+              </a:buClr>
+              <a:buSzPts val="1800"/>
+              <a:buChar char="•"/>
+              <a:defRPr/>
+            </a:lvl9pPr>
+          </a:lstStyle>
+          <a:p/>
+        </p:txBody>
+      </p:sp>
+      <p:pic>
+        <p:nvPicPr>
+          <p:cNvPr id="137" name="Google Shape;137;p19"/>
+          <p:cNvPicPr preferRelativeResize="0"/>
+          <p:nvPr/>
+        </p:nvPicPr>
+        <p:blipFill rotWithShape="1">
+          <a:blip r:embed="rId3">
+            <a:alphaModFix/>
+          </a:blip>
+          <a:srcRect b="0" l="0" r="0" t="0"/>
+          <a:stretch/>
+        </p:blipFill>
+        <p:spPr>
+          <a:xfrm>
+            <a:off x="658813" y="5711140"/>
+            <a:ext cx="2772297" cy="489635"/>
+          </a:xfrm>
+          <a:prstGeom prst="rect">
+            <a:avLst/>
+          </a:prstGeom>
+          <a:noFill/>
+          <a:ln>
+            <a:noFill/>
+          </a:ln>
+        </p:spPr>
+      </p:pic>
+    </p:spTree>
+  </p:cSld>
+  <p:clrMapOvr>
+    <a:masterClrMapping/>
+  </p:clrMapOvr>
+</p:sldLayout>
+</file>
+
+<file path=ppt/slideLayouts/slideLayout2.xml><?xml version="1.0" encoding="utf-8"?>
+<p:sldLayout xmlns:a="http://schemas.openxmlformats.org/drawingml/2006/main" xmlns:r="http://schemas.openxmlformats.org/officeDocument/2006/relationships" xmlns:mc="http://schemas.openxmlformats.org/markup-compatibility/2006" xmlns:mv="urn:schemas-microsoft-com:mac:vml" xmlns:p="http://schemas.openxmlformats.org/presentationml/2006/main" xmlns:c="http://schemas.openxmlformats.org/drawingml/2006/chart" xmlns:dgm="http://schemas.openxmlformats.org/drawingml/2006/diagram" xmlns:o="urn:schemas-microsoft-com:office:office" xmlns:v="urn:schemas-microsoft-com:vml" xmlns:pvml="urn:schemas-microsoft-com:office:powerpoint" xmlns:com="http://schemas.openxmlformats.org/drawingml/2006/compatibility" xmlns:p14="http://schemas.microsoft.com/office/powerpoint/2010/main" xmlns:p15="http://schemas.microsoft.com/office/powerpoint/2012/main" xmlns:ahyp="http://schemas.microsoft.com/office/drawing/2018/hyperlinkcolor" matchingName="3_Титульный слайд">
+  <p:cSld name="3_Титульный слайд">
+    <p:bg>
+      <p:bgPr>
+        <a:solidFill>
+          <a:schemeClr val="accent1"/>
+        </a:solidFill>
+      </p:bgPr>
+    </p:bg>
+    <p:spTree>
+      <p:nvGrpSpPr>
+        <p:cNvPr id="58" name="Shape 58"/>
         <p:cNvGrpSpPr/>
         <p:nvPr/>
       </p:nvGrpSpPr>
@@ -2543,7 +2551,7 @@
       </p:grpSpPr>
       <p:sp>
         <p:nvSpPr>
-          <p:cNvPr id="108" name="Google Shape;108;p13"/>
+          <p:cNvPr id="59" name="Google Shape;59;p3"/>
           <p:cNvSpPr txBox="1"/>
           <p:nvPr>
             <p:ph idx="1" type="body"/>
@@ -2551,8 +2559,8 @@
         </p:nvSpPr>
         <p:spPr>
           <a:xfrm>
-            <a:off x="677334" y="1773238"/>
-            <a:ext cx="5304365" cy="4427537"/>
+            <a:off x="658813" y="4728001"/>
+            <a:ext cx="5012644" cy="553998"/>
           </a:xfrm>
           <a:prstGeom prst="rect">
             <a:avLst/>
@@ -2564,15 +2572,51 @@
         </p:spPr>
         <p:txBody>
           <a:bodyPr anchorCtr="0" anchor="t" bIns="0" lIns="0" spcFirstLastPara="1" rIns="0" wrap="square" tIns="0">
-            <a:normAutofit/>
+            <a:spAutoFit/>
           </a:bodyPr>
           <a:lstStyle>
-            <a:lvl1pPr indent="-228600" lvl="0" marL="457200" algn="l">
+            <a:lvl1pPr indent="-228600" lvl="0" marL="457200" marR="0" algn="l">
+              <a:lnSpc>
+                <a:spcPct val="100000"/>
+              </a:lnSpc>
+              <a:spcBef>
+                <a:spcPts val="0"/>
+              </a:spcBef>
+              <a:spcAft>
+                <a:spcPts val="0"/>
+              </a:spcAft>
+              <a:buClr>
+                <a:schemeClr val="lt2"/>
+              </a:buClr>
+              <a:buSzPts val="2000"/>
+              <a:buFont typeface="Arial"/>
+              <a:buNone/>
+              <a:defRPr sz="2000">
+                <a:solidFill>
+                  <a:schemeClr val="lt2"/>
+                </a:solidFill>
+              </a:defRPr>
+            </a:lvl1pPr>
+            <a:lvl2pPr indent="-342900" lvl="1" marL="914400" algn="l">
               <a:lnSpc>
                 <a:spcPct val="110000"/>
               </a:lnSpc>
               <a:spcBef>
-                <a:spcPts val="1000"/>
+                <a:spcPts val="500"/>
+              </a:spcBef>
+              <a:spcAft>
+                <a:spcPts val="0"/>
+              </a:spcAft>
+              <a:buSzPts val="1800"/>
+              <a:buChar char="•"/>
+              <a:defRPr/>
+            </a:lvl2pPr>
+            <a:lvl3pPr indent="-342900" lvl="2" marL="1371600" algn="l">
+              <a:lnSpc>
+                <a:spcPct val="110000"/>
+              </a:lnSpc>
+              <a:spcBef>
+                <a:spcPts val="500"/>
               </a:spcBef>
               <a:spcAft>
                 <a:spcPts val="0"/>
@@ -2580,55 +2624,9 @@
               <a:buClr>
                 <a:schemeClr val="dk1"/>
               </a:buClr>
-              <a:buSzPts val="1600"/>
-              <a:buNone/>
-              <a:defRPr b="0" i="0">
-                <a:latin typeface="Play"/>
-                <a:ea typeface="Play"/>
-                <a:cs typeface="Play"/>
-                <a:sym typeface="Play"/>
-              </a:defRPr>
-            </a:lvl1pPr>
-            <a:lvl2pPr indent="-317500" lvl="1" marL="914400" algn="l">
-              <a:lnSpc>
-                <a:spcPct val="110000"/>
-              </a:lnSpc>
-              <a:spcBef>
-                <a:spcPts val="500"/>
-              </a:spcBef>
-              <a:spcAft>
-                <a:spcPts val="0"/>
-              </a:spcAft>
-              <a:buSzPts val="1400"/>
-              <a:buChar char="•"/>
-              <a:defRPr b="0" i="0">
-                <a:latin typeface="Play"/>
-                <a:ea typeface="Play"/>
-                <a:cs typeface="Play"/>
-                <a:sym typeface="Play"/>
-              </a:defRPr>
-            </a:lvl2pPr>
-            <a:lvl3pPr indent="-304800" lvl="2" marL="1371600" algn="l">
-              <a:lnSpc>
-                <a:spcPct val="110000"/>
-              </a:lnSpc>
-              <a:spcBef>
-                <a:spcPts val="500"/>
-              </a:spcBef>
-              <a:spcAft>
-                <a:spcPts val="0"/>
-              </a:spcAft>
-              <a:buClr>
-                <a:schemeClr val="dk1"/>
-              </a:buClr>
-              <a:buSzPts val="1200"/>
+              <a:buSzPts val="1800"/>
               <a:buChar char="−"/>
-              <a:defRPr b="0" i="0">
-                <a:latin typeface="Play"/>
-                <a:ea typeface="Play"/>
-                <a:cs typeface="Play"/>
-                <a:sym typeface="Play"/>
-              </a:defRPr>
+              <a:defRPr/>
             </a:lvl3pPr>
             <a:lvl4pPr indent="-342900" lvl="3" marL="1828800" algn="l">
               <a:lnSpc>
@@ -2738,16 +2736,16 @@
       </p:sp>
       <p:sp>
         <p:nvSpPr>
-          <p:cNvPr id="109" name="Google Shape;109;p13"/>
+          <p:cNvPr id="60" name="Google Shape;60;p3"/>
           <p:cNvSpPr txBox="1"/>
           <p:nvPr>
-            <p:ph idx="2" type="body"/>
+            <p:ph type="title"/>
           </p:nvPr>
         </p:nvSpPr>
         <p:spPr>
           <a:xfrm>
-            <a:off x="6228824" y="1773239"/>
-            <a:ext cx="5304364" cy="4427537"/>
+            <a:off x="622261" y="2598003"/>
+            <a:ext cx="10220325" cy="1661993"/>
           </a:xfrm>
           <a:prstGeom prst="rect">
             <a:avLst/>
@@ -2758,173 +2756,118 @@
           </a:ln>
         </p:spPr>
         <p:txBody>
-          <a:bodyPr anchorCtr="0" anchor="t" bIns="0" lIns="0" spcFirstLastPara="1" rIns="0" wrap="square" tIns="0">
-            <a:normAutofit/>
+          <a:bodyPr anchorCtr="0" anchor="b" bIns="0" lIns="0" spcFirstLastPara="1" rIns="0" wrap="square" tIns="0">
+            <a:spAutoFit/>
           </a:bodyPr>
           <a:lstStyle>
-            <a:lvl1pPr indent="-228600" lvl="0" marL="457200" algn="l">
-              <a:lnSpc>
-                <a:spcPct val="110000"/>
-              </a:lnSpc>
-              <a:spcBef>
-                <a:spcPts val="1000"/>
-              </a:spcBef>
-              <a:spcAft>
-                <a:spcPts val="0"/>
-              </a:spcAft>
-              <a:buClr>
-                <a:schemeClr val="dk1"/>
-              </a:buClr>
-              <a:buSzPts val="1600"/>
-              <a:buNone/>
-              <a:defRPr b="0" i="0">
-                <a:latin typeface="Play"/>
-                <a:ea typeface="Play"/>
-                <a:cs typeface="Play"/>
-                <a:sym typeface="Play"/>
-              </a:defRPr>
-            </a:lvl1pPr>
-            <a:lvl2pPr indent="-317500" lvl="1" marL="914400" algn="l">
-              <a:lnSpc>
-                <a:spcPct val="110000"/>
-              </a:lnSpc>
-              <a:spcBef>
-                <a:spcPts val="500"/>
-              </a:spcBef>
-              <a:spcAft>
-                <a:spcPts val="0"/>
-              </a:spcAft>
-              <a:buSzPts val="1400"/>
-              <a:buChar char="•"/>
-              <a:defRPr b="0" i="0">
-                <a:latin typeface="Play"/>
-                <a:ea typeface="Play"/>
-                <a:cs typeface="Play"/>
-                <a:sym typeface="Play"/>
-              </a:defRPr>
-            </a:lvl2pPr>
-            <a:lvl3pPr indent="-304800" lvl="2" marL="1371600" algn="l">
-              <a:lnSpc>
-                <a:spcPct val="110000"/>
-              </a:lnSpc>
-              <a:spcBef>
-                <a:spcPts val="500"/>
-              </a:spcBef>
-              <a:spcAft>
-                <a:spcPts val="0"/>
-              </a:spcAft>
-              <a:buClr>
-                <a:schemeClr val="dk1"/>
-              </a:buClr>
-              <a:buSzPts val="1200"/>
-              <a:buChar char="−"/>
-              <a:defRPr b="0" i="0">
-                <a:latin typeface="Play"/>
-                <a:ea typeface="Play"/>
-                <a:cs typeface="Play"/>
-                <a:sym typeface="Play"/>
-              </a:defRPr>
-            </a:lvl3pPr>
-            <a:lvl4pPr indent="-342900" lvl="3" marL="1828800" algn="l">
+            <a:lvl1pPr lvl="0" algn="l">
               <a:lnSpc>
                 <a:spcPct val="90000"/>
               </a:lnSpc>
               <a:spcBef>
-                <a:spcPts val="500"/>
+                <a:spcPts val="0"/>
               </a:spcBef>
               <a:spcAft>
                 <a:spcPts val="0"/>
               </a:spcAft>
               <a:buClr>
-                <a:schemeClr val="dk1"/>
+                <a:schemeClr val="lt2"/>
               </a:buClr>
-              <a:buSzPts val="1800"/>
-              <a:buChar char="•"/>
+              <a:buSzPts val="6000"/>
+              <a:buFont typeface="Play"/>
+              <a:buNone/>
+              <a:defRPr sz="6000">
+                <a:solidFill>
+                  <a:schemeClr val="lt2"/>
+                </a:solidFill>
+              </a:defRPr>
+            </a:lvl1pPr>
+            <a:lvl2pPr lvl="1">
+              <a:spcBef>
+                <a:spcPts val="0"/>
+              </a:spcBef>
+              <a:spcAft>
+                <a:spcPts val="0"/>
+              </a:spcAft>
+              <a:buSzPts val="1400"/>
+              <a:buNone/>
+              <a:defRPr/>
+            </a:lvl2pPr>
+            <a:lvl3pPr lvl="2">
+              <a:spcBef>
+                <a:spcPts val="0"/>
+              </a:spcBef>
+              <a:spcAft>
+                <a:spcPts val="0"/>
+              </a:spcAft>
+              <a:buSzPts val="1400"/>
+              <a:buNone/>
+              <a:defRPr/>
+            </a:lvl3pPr>
+            <a:lvl4pPr lvl="3">
+              <a:spcBef>
+                <a:spcPts val="0"/>
+              </a:spcBef>
+              <a:spcAft>
+                <a:spcPts val="0"/>
+              </a:spcAft>
+              <a:buSzPts val="1400"/>
+              <a:buNone/>
               <a:defRPr/>
             </a:lvl4pPr>
-            <a:lvl5pPr indent="-342900" lvl="4" marL="2286000" algn="l">
-              <a:lnSpc>
-                <a:spcPct val="90000"/>
-              </a:lnSpc>
-              <a:spcBef>
-                <a:spcPts val="500"/>
-              </a:spcBef>
-              <a:spcAft>
-                <a:spcPts val="0"/>
-              </a:spcAft>
-              <a:buClr>
-                <a:schemeClr val="dk1"/>
-              </a:buClr>
-              <a:buSzPts val="1800"/>
-              <a:buChar char="•"/>
+            <a:lvl5pPr lvl="4">
+              <a:spcBef>
+                <a:spcPts val="0"/>
+              </a:spcBef>
+              <a:spcAft>
+                <a:spcPts val="0"/>
+              </a:spcAft>
+              <a:buSzPts val="1400"/>
+              <a:buNone/>
               <a:defRPr/>
             </a:lvl5pPr>
-            <a:lvl6pPr indent="-342900" lvl="5" marL="2743200" algn="l">
-              <a:lnSpc>
-                <a:spcPct val="90000"/>
-              </a:lnSpc>
-              <a:spcBef>
-                <a:spcPts val="500"/>
-              </a:spcBef>
-              <a:spcAft>
-                <a:spcPts val="0"/>
-              </a:spcAft>
-              <a:buClr>
-                <a:schemeClr val="dk1"/>
-              </a:buClr>
-              <a:buSzPts val="1800"/>
-              <a:buChar char="•"/>
+            <a:lvl6pPr lvl="5">
+              <a:spcBef>
+                <a:spcPts val="0"/>
+              </a:spcBef>
+              <a:spcAft>
+                <a:spcPts val="0"/>
+              </a:spcAft>
+              <a:buSzPts val="1400"/>
+              <a:buNone/>
               <a:defRPr/>
             </a:lvl6pPr>
-            <a:lvl7pPr indent="-342900" lvl="6" marL="3200400" algn="l">
-              <a:lnSpc>
-                <a:spcPct val="90000"/>
-              </a:lnSpc>
-              <a:spcBef>
-                <a:spcPts val="500"/>
-              </a:spcBef>
-              <a:spcAft>
-                <a:spcPts val="0"/>
-              </a:spcAft>
-              <a:buClr>
-                <a:schemeClr val="dk1"/>
-              </a:buClr>
-              <a:buSzPts val="1800"/>
-              <a:buChar char="•"/>
+            <a:lvl7pPr lvl="6">
+              <a:spcBef>
+                <a:spcPts val="0"/>
+              </a:spcBef>
+              <a:spcAft>
+                <a:spcPts val="0"/>
+              </a:spcAft>
+              <a:buSzPts val="1400"/>
+              <a:buNone/>
               <a:defRPr/>
             </a:lvl7pPr>
-            <a:lvl8pPr indent="-342900" lvl="7" marL="3657600" algn="l">
-              <a:lnSpc>
-                <a:spcPct val="90000"/>
-              </a:lnSpc>
-              <a:spcBef>
-                <a:spcPts val="500"/>
-              </a:spcBef>
-              <a:spcAft>
-                <a:spcPts val="0"/>
-              </a:spcAft>
-              <a:buClr>
-                <a:schemeClr val="dk1"/>
-              </a:buClr>
-              <a:buSzPts val="1800"/>
-              <a:buChar char="•"/>
+            <a:lvl8pPr lvl="7">
+              <a:spcBef>
+                <a:spcPts val="0"/>
+              </a:spcBef>
+              <a:spcAft>
+                <a:spcPts val="0"/>
+              </a:spcAft>
+              <a:buSzPts val="1400"/>
+              <a:buNone/>
               <a:defRPr/>
             </a:lvl8pPr>
-            <a:lvl9pPr indent="-342900" lvl="8" marL="4114800" algn="l">
-              <a:lnSpc>
-                <a:spcPct val="90000"/>
-              </a:lnSpc>
-              <a:spcBef>
-                <a:spcPts val="500"/>
-              </a:spcBef>
-              <a:spcAft>
-                <a:spcPts val="0"/>
-              </a:spcAft>
-              <a:buClr>
-                <a:schemeClr val="dk1"/>
-              </a:buClr>
-              <a:buSzPts val="1800"/>
-              <a:buChar char="•"/>
+            <a:lvl9pPr lvl="8">
+              <a:spcBef>
+                <a:spcPts val="0"/>
+              </a:spcBef>
+              <a:spcAft>
+                <a:spcPts val="0"/>
+              </a:spcAft>
+              <a:buSzPts val="1400"/>
+              <a:buNone/>
               <a:defRPr/>
             </a:lvl9pPr>
           </a:lstStyle>
@@ -2933,16 +2876,14 @@
       </p:sp>
       <p:sp>
         <p:nvSpPr>
-          <p:cNvPr id="110" name="Google Shape;110;p13"/>
+          <p:cNvPr id="61" name="Google Shape;61;p3"/>
           <p:cNvSpPr txBox="1"/>
-          <p:nvPr>
-            <p:ph type="title"/>
-          </p:nvPr>
+          <p:nvPr/>
         </p:nvSpPr>
         <p:spPr>
           <a:xfrm>
-            <a:off x="677334" y="692150"/>
-            <a:ext cx="10855854" cy="644241"/>
+            <a:off x="3358342" y="482138"/>
+            <a:ext cx="72768" cy="362141"/>
           </a:xfrm>
           <a:prstGeom prst="rect">
             <a:avLst/>
@@ -2953,13 +2894,14 @@
           </a:ln>
         </p:spPr>
         <p:txBody>
-          <a:bodyPr anchorCtr="0" anchor="t" bIns="0" lIns="0" spcFirstLastPara="1" rIns="0" wrap="square" tIns="0">
-            <a:noAutofit/>
+          <a:bodyPr anchorCtr="0" anchor="t" bIns="36000" lIns="36000" spcFirstLastPara="1" rIns="36000" wrap="square" tIns="36000">
+            <a:spAutoFit/>
           </a:bodyPr>
-          <a:lstStyle>
-            <a:lvl1pPr lvl="0" algn="l">
+          <a:lstStyle/>
+          <a:p>
+            <a:pPr indent="0" lvl="0" marL="0" marR="0" rtl="0" algn="l">
               <a:lnSpc>
-                <a:spcPct val="90000"/>
+                <a:spcPct val="110000"/>
               </a:lnSpc>
               <a:spcBef>
                 <a:spcPts val="0"/>
@@ -2967,110 +2909,77 @@
               <a:spcAft>
                 <a:spcPts val="0"/>
               </a:spcAft>
-              <a:buClr>
-                <a:schemeClr val="accent1"/>
-              </a:buClr>
-              <a:buSzPts val="3600"/>
-              <a:buFont typeface="Play"/>
               <a:buNone/>
-              <a:defRPr>
-                <a:solidFill>
-                  <a:schemeClr val="accent1"/>
-                </a:solidFill>
-              </a:defRPr>
-            </a:lvl1pPr>
-            <a:lvl2pPr lvl="1">
-              <a:spcBef>
-                <a:spcPts val="0"/>
-              </a:spcBef>
-              <a:spcAft>
-                <a:spcPts val="0"/>
-              </a:spcAft>
-              <a:buSzPts val="1400"/>
-              <a:buNone/>
-              <a:defRPr/>
-            </a:lvl2pPr>
-            <a:lvl3pPr lvl="2">
-              <a:spcBef>
-                <a:spcPts val="0"/>
-              </a:spcBef>
-              <a:spcAft>
-                <a:spcPts val="0"/>
-              </a:spcAft>
-              <a:buSzPts val="1400"/>
-              <a:buNone/>
-              <a:defRPr/>
-            </a:lvl3pPr>
-            <a:lvl4pPr lvl="3">
-              <a:spcBef>
-                <a:spcPts val="0"/>
-              </a:spcBef>
-              <a:spcAft>
-                <a:spcPts val="0"/>
-              </a:spcAft>
-              <a:buSzPts val="1400"/>
-              <a:buNone/>
-              <a:defRPr/>
-            </a:lvl4pPr>
-            <a:lvl5pPr lvl="4">
-              <a:spcBef>
-                <a:spcPts val="0"/>
-              </a:spcBef>
-              <a:spcAft>
-                <a:spcPts val="0"/>
-              </a:spcAft>
-              <a:buSzPts val="1400"/>
-              <a:buNone/>
-              <a:defRPr/>
-            </a:lvl5pPr>
-            <a:lvl6pPr lvl="5">
-              <a:spcBef>
-                <a:spcPts val="0"/>
-              </a:spcBef>
-              <a:spcAft>
-                <a:spcPts val="0"/>
-              </a:spcAft>
-              <a:buSzPts val="1400"/>
-              <a:buNone/>
-              <a:defRPr/>
-            </a:lvl6pPr>
-            <a:lvl7pPr lvl="6">
-              <a:spcBef>
-                <a:spcPts val="0"/>
-              </a:spcBef>
-              <a:spcAft>
-                <a:spcPts val="0"/>
-              </a:spcAft>
-              <a:buSzPts val="1400"/>
-              <a:buNone/>
-              <a:defRPr/>
-            </a:lvl7pPr>
-            <a:lvl8pPr lvl="7">
-              <a:spcBef>
-                <a:spcPts val="0"/>
-              </a:spcBef>
-              <a:spcAft>
-                <a:spcPts val="0"/>
-              </a:spcAft>
-              <a:buSzPts val="1400"/>
-              <a:buNone/>
-              <a:defRPr/>
-            </a:lvl8pPr>
-            <a:lvl9pPr lvl="8">
-              <a:spcBef>
-                <a:spcPts val="0"/>
-              </a:spcBef>
-              <a:spcAft>
-                <a:spcPts val="0"/>
-              </a:spcAft>
-              <a:buSzPts val="1400"/>
-              <a:buNone/>
-              <a:defRPr/>
-            </a:lvl9pPr>
-          </a:lstStyle>
-          <a:p/>
+            </a:pPr>
+            <a:r>
+              <a:t/>
+            </a:r>
+            <a:endParaRPr b="0" i="0" sz="1800" u="none" cap="none" strike="noStrike">
+              <a:solidFill>
+                <a:schemeClr val="dk1"/>
+              </a:solidFill>
+              <a:latin typeface="Arial"/>
+              <a:ea typeface="Arial"/>
+              <a:cs typeface="Arial"/>
+              <a:sym typeface="Arial"/>
+            </a:endParaRPr>
+          </a:p>
         </p:txBody>
       </p:sp>
+      <p:pic>
+        <p:nvPicPr>
+          <p:cNvPr id="62" name="Google Shape;62;p3"/>
+          <p:cNvPicPr preferRelativeResize="0"/>
+          <p:nvPr/>
+        </p:nvPicPr>
+        <p:blipFill rotWithShape="1">
+          <a:blip r:embed="rId2">
+            <a:alphaModFix/>
+          </a:blip>
+          <a:srcRect b="0" l="0" r="0" t="0"/>
+          <a:stretch/>
+        </p:blipFill>
+        <p:spPr>
+          <a:xfrm>
+            <a:off x="658813" y="692150"/>
+            <a:ext cx="2772297" cy="489635"/>
+          </a:xfrm>
+          <a:prstGeom prst="rect">
+            <a:avLst/>
+          </a:prstGeom>
+          <a:noFill/>
+          <a:ln>
+            <a:noFill/>
+          </a:ln>
+        </p:spPr>
+      </p:pic>
+      <p:pic>
+        <p:nvPicPr>
+          <p:cNvPr id="63" name="Google Shape;63;p3"/>
+          <p:cNvPicPr preferRelativeResize="0"/>
+          <p:nvPr/>
+        </p:nvPicPr>
+        <p:blipFill rotWithShape="1">
+          <a:blip r:embed="rId3">
+            <a:alphaModFix/>
+          </a:blip>
+          <a:srcRect b="0" l="0" r="0" t="0"/>
+          <a:stretch/>
+        </p:blipFill>
+        <p:spPr>
+          <a:xfrm>
+            <a:off x="8803845" y="0"/>
+            <a:ext cx="3397780" cy="6858000"/>
+          </a:xfrm>
+          <a:prstGeom prst="rect">
+            <a:avLst/>
+          </a:prstGeom>
+          <a:noFill/>
+          <a:ln>
+            <a:noFill/>
+          </a:ln>
+        </p:spPr>
+      </p:pic>
     </p:spTree>
   </p:cSld>
   <p:clrMapOvr>
@@ -4705,8 +4614,9 @@
   </p:cSld>
   <p:clrMap accent1="accent1" accent2="accent2" accent3="accent3" accent4="accent4" accent5="accent5" accent6="accent6" bg1="lt1" bg2="dk2" tx1="dk1" tx2="lt2" folHlink="folHlink" hlink="hlink"/>
   <p:sldLayoutIdLst>
+    <p:sldLayoutId id="2147483649" r:id="rId2"/>
     <p:sldLayoutId id="2147483653" r:id="rId6"/>
-    <p:sldLayoutId id="2147483659" r:id="rId12"/>
+    <p:sldLayoutId id="2147483665" r:id="rId18"/>
   </p:sldLayoutIdLst>
   <p:hf dt="0" ftr="0" hdr="0" sldNum="0"/>
   <p:txStyles>
@@ -7623,6 +7533,319 @@
 <file path=ppt/slides/slide56.xml><?xml version="1.0" encoding="utf-8"?>
 <p:sld xmlns:a="http://schemas.openxmlformats.org/drawingml/2006/main" xmlns:p="http://schemas.openxmlformats.org/presentationml/2006/main" xmlns:r="http://schemas.openxmlformats.org/officeDocument/2006/relationships">
   <p:cSld>
+    <p:spTree>
+      <p:nvGrpSpPr>
+        <p:cNvPr id="1" name=""/>
+        <p:cNvGrpSpPr/>
+        <p:nvPr/>
+      </p:nvGrpSpPr>
+      <p:grpSpPr/>
+      <p:sp>
+        <p:nvSpPr>
+          <p:cNvPr id="2" name="title"/>
+          <p:cNvSpPr txBox="1"/>
+          <p:nvPr/>
+        </p:nvSpPr>
+        <p:spPr>
+          <a:xfrm>
+            <a:off x="622279" y="2598016"/>
+            <a:ext cx="7535387" cy="1661967"/>
+          </a:xfrm>
+          <a:prstGeom prst="rect">
+            <a:avLst/>
+          </a:prstGeom>
+          <a:noFill/>
+        </p:spPr>
+        <p:txBody>
+          <a:bodyPr wrap="square" lIns="76200" rIns="76200" tIns="50800" bIns="50800">
+            <a:spAutoFit/>
+          </a:bodyPr>
+          <a:lstStyle/>
+          <a:p>
+            <a:pPr algn="l">
+              <a:spcAft>
+                <a:spcPts val="300"/>
+              </a:spcAft>
+              <a:defRPr sz="3200" b="0">
+                <a:solidFill>
+                  <a:srgbClr val="000000"/>
+                </a:solidFill>
+                <a:latin typeface="Arial"/>
+                <a:ea typeface="Arial"/>
+                <a:cs typeface="Arial"/>
+              </a:defRPr>
+            </a:pPr>
+            <a:r>
+              <a:rPr sz="3200" b="0">
+                <a:solidFill>
+                  <a:srgbClr val="000000"/>
+                </a:solidFill>
+                <a:latin typeface="Arial"/>
+                <a:ea typeface="Arial"/>
+                <a:cs typeface="Arial"/>
+              </a:rPr>
+              <a:t>Защита инициативы: сервис автоматической вёрстки презентаций</a:t>
+            </a:r>
+          </a:p>
+        </p:txBody>
+      </p:sp>
+    </p:spTree>
+  </p:cSld>
+  <p:clrMapOvr>
+    <a:masterClrMapping/>
+  </p:clrMapOvr>
+</p:sld>
+</file>
+
+<file path=ppt/slides/slide57.xml><?xml version="1.0" encoding="utf-8"?>
+<p:sld xmlns:a="http://schemas.openxmlformats.org/drawingml/2006/main" xmlns:p="http://schemas.openxmlformats.org/presentationml/2006/main" xmlns:r="http://schemas.openxmlformats.org/officeDocument/2006/relationships">
+  <p:cSld>
+    <p:spTree>
+      <p:nvGrpSpPr>
+        <p:cNvPr id="1" name=""/>
+        <p:cNvGrpSpPr/>
+        <p:nvPr/>
+      </p:nvGrpSpPr>
+      <p:grpSpPr/>
+      <p:cxnSp>
+        <p:nvCxnSpPr>
+          <p:cNvPr id="986" name="Google Shape;986;p76"/>
+          <p:cNvCxnSpPr/>
+          <p:nvPr/>
+        </p:nvCxnSpPr>
+        <p:spPr>
+          <a:xfrm rot="10800000">
+            <a:off x="-42658" y="3591512"/>
+            <a:ext cx="12234658" cy="0"/>
+          </a:xfrm>
+          <a:prstGeom prst="straightConnector1">
+            <a:avLst/>
+          </a:prstGeom>
+          <a:noFill/>
+          <a:ln cap="flat" cmpd="sng" w="12700">
+            <a:solidFill>
+              <a:srgbClr val="E1E1E2"/>
+            </a:solidFill>
+            <a:prstDash val="solid"/>
+            <a:miter lim="8000"/>
+            <a:headEnd len="sm" w="sm" type="none"/>
+            <a:tailEnd len="sm" w="sm" type="none"/>
+          </a:ln>
+        </p:spPr>
+      </p:cxnSp>
+      <p:sp>
+        <p:nvSpPr>
+          <p:cNvPr id="987" name="title"/>
+          <p:cNvSpPr txBox="1"/>
+          <p:nvPr/>
+        </p:nvSpPr>
+        <p:spPr>
+          <a:xfrm>
+            <a:off x="677387" y="692177"/>
+            <a:ext cx="10855878" cy="822960"/>
+          </a:xfrm>
+          <a:prstGeom prst="rect">
+            <a:avLst/>
+          </a:prstGeom>
+          <a:noFill/>
+        </p:spPr>
+        <p:txBody>
+          <a:bodyPr wrap="square" lIns="76200" rIns="76200" tIns="50800" bIns="50800">
+            <a:spAutoFit/>
+          </a:bodyPr>
+          <a:lstStyle/>
+          <a:p>
+            <a:pPr algn="l">
+              <a:spcAft>
+                <a:spcPts val="300"/>
+              </a:spcAft>
+              <a:defRPr sz="4000">
+                <a:solidFill>
+                  <a:srgbClr val="000000"/>
+                </a:solidFill>
+                <a:latin typeface="Arial"/>
+                <a:ea typeface="Arial"/>
+                <a:cs typeface="Arial"/>
+              </a:defRPr>
+            </a:pPr>
+            <a:r>
+              <a:rPr sz="4000">
+                <a:solidFill>
+                  <a:srgbClr val="000000"/>
+                </a:solidFill>
+                <a:latin typeface="Arial"/>
+                <a:ea typeface="Arial"/>
+                <a:cs typeface="Arial"/>
+              </a:rPr>
+              <a:t>Контекст и возможность</a:t>
+            </a:r>
+          </a:p>
+        </p:txBody>
+      </p:sp>
+      <p:sp>
+        <p:nvSpPr>
+          <p:cNvPr id="988" name="body"/>
+          <p:cNvSpPr txBox="1"/>
+          <p:nvPr/>
+        </p:nvSpPr>
+        <p:spPr>
+          <a:xfrm>
+            <a:off x="677387" y="2200937"/>
+            <a:ext cx="10855878" cy="2645542"/>
+          </a:xfrm>
+          <a:prstGeom prst="rect">
+            <a:avLst/>
+          </a:prstGeom>
+          <a:noFill/>
+        </p:spPr>
+        <p:txBody>
+          <a:bodyPr wrap="square" lIns="76200" rIns="76200" tIns="50800" bIns="50800">
+            <a:spAutoFit/>
+          </a:bodyPr>
+          <a:lstStyle/>
+          <a:p>
+            <a:pPr algn="l">
+              <a:spcAft>
+                <a:spcPts val="300"/>
+              </a:spcAft>
+              <a:defRPr sz="1800">
+                <a:solidFill>
+                  <a:srgbClr val="000000"/>
+                </a:solidFill>
+                <a:latin typeface="Play"/>
+                <a:ea typeface="Play"/>
+                <a:cs typeface="Play"/>
+              </a:defRPr>
+            </a:pPr>
+            <a:r>
+              <a:rPr sz="1800">
+                <a:solidFill>
+                  <a:srgbClr val="000000"/>
+                </a:solidFill>
+                <a:latin typeface="Play"/>
+                <a:ea typeface="Play"/>
+                <a:cs typeface="Play"/>
+              </a:rPr>
+              <a:t>• Отделы собирают презентации вручную, затрачивая 186 минут на 12-слайдовую колоду</a:t>
+            </a:r>
+          </a:p>
+          <a:p>
+            <a:pPr algn="l">
+              <a:spcAft>
+                <a:spcPts val="300"/>
+              </a:spcAft>
+              <a:defRPr sz="1800">
+                <a:solidFill>
+                  <a:srgbClr val="000000"/>
+                </a:solidFill>
+                <a:latin typeface="Play"/>
+                <a:ea typeface="Play"/>
+                <a:cs typeface="Play"/>
+              </a:defRPr>
+            </a:pPr>
+            <a:r>
+              <a:rPr sz="1800">
+                <a:solidFill>
+                  <a:srgbClr val="000000"/>
+                </a:solidFill>
+                <a:latin typeface="Play"/>
+                <a:ea typeface="Play"/>
+                <a:cs typeface="Play"/>
+              </a:rPr>
+              <a:t>• После ревью дизайнеров добавляется 74 минуты правок</a:t>
+            </a:r>
+          </a:p>
+          <a:p>
+            <a:pPr algn="l">
+              <a:spcAft>
+                <a:spcPts val="300"/>
+              </a:spcAft>
+              <a:defRPr sz="1800">
+                <a:solidFill>
+                  <a:srgbClr val="000000"/>
+                </a:solidFill>
+                <a:latin typeface="Play"/>
+                <a:ea typeface="Play"/>
+                <a:cs typeface="Play"/>
+              </a:defRPr>
+            </a:pPr>
+            <a:r>
+              <a:rPr sz="1800">
+                <a:solidFill>
+                  <a:srgbClr val="000000"/>
+                </a:solidFill>
+                <a:latin typeface="Play"/>
+                <a:ea typeface="Play"/>
+                <a:cs typeface="Play"/>
+              </a:rPr>
+              <a:t>• 19 из 42 колод нарушают фирменный стиль: чужие гарнитуры и цвета</a:t>
+            </a:r>
+          </a:p>
+          <a:p>
+            <a:pPr algn="l">
+              <a:spcAft>
+                <a:spcPts val="300"/>
+              </a:spcAft>
+              <a:defRPr sz="1800">
+                <a:solidFill>
+                  <a:srgbClr val="000000"/>
+                </a:solidFill>
+                <a:latin typeface="Play"/>
+                <a:ea typeface="Play"/>
+                <a:cs typeface="Play"/>
+              </a:defRPr>
+            </a:pPr>
+            <a:r>
+              <a:rPr sz="1800">
+                <a:solidFill>
+                  <a:srgbClr val="000000"/>
+                </a:solidFill>
+                <a:latin typeface="Play"/>
+                <a:ea typeface="Play"/>
+                <a:cs typeface="Play"/>
+              </a:rPr>
+              <a:t>• Дизайнеры закрывают 11 запросов в неделю из 27 поступающих, ожидание 6 дней</a:t>
+            </a:r>
+          </a:p>
+          <a:p>
+            <a:pPr algn="l">
+              <a:spcAft>
+                <a:spcPts val="300"/>
+              </a:spcAft>
+              <a:defRPr sz="1800">
+                <a:solidFill>
+                  <a:srgbClr val="000000"/>
+                </a:solidFill>
+                <a:latin typeface="Play"/>
+                <a:ea typeface="Play"/>
+                <a:cs typeface="Play"/>
+              </a:defRPr>
+            </a:pPr>
+            <a:r>
+              <a:rPr sz="1800">
+                <a:solidFill>
+                  <a:srgbClr val="000000"/>
+                </a:solidFill>
+                <a:latin typeface="Play"/>
+                <a:ea typeface="Play"/>
+                <a:cs typeface="Play"/>
+              </a:rPr>
+              <a:t>• Время до первой версии колоды составляет 6 рабочих дней</a:t>
+            </a:r>
+          </a:p>
+        </p:txBody>
+      </p:sp>
+    </p:spTree>
+  </p:cSld>
+  <p:clrMapOvr>
+    <a:masterClrMapping/>
+  </p:clrMapOvr>
+</p:sld>
+</file>
+
+<file path=ppt/slides/slide58.xml><?xml version="1.0" encoding="utf-8"?>
+<p:sld xmlns:a="http://schemas.openxmlformats.org/drawingml/2006/main" xmlns:p="http://schemas.openxmlformats.org/presentationml/2006/main" xmlns:r="http://schemas.openxmlformats.org/officeDocument/2006/relationships">
+  <p:cSld>
     <p:bg>
       <p:bgPr>
         <a:solidFill>
@@ -7646,7 +7869,7 @@
         <p:spPr>
           <a:xfrm>
             <a:off x="677387" y="692177"/>
-            <a:ext cx="10855878" cy="1447800"/>
+            <a:ext cx="10855878" cy="822960"/>
           </a:xfrm>
           <a:prstGeom prst="rect">
             <a:avLst/>
@@ -7681,7 +7904,449 @@
                 <a:ea typeface="Arial"/>
                 <a:cs typeface="Arial"/>
               </a:rPr>
-              <a:t>Автоматическая вёрстка презентаций: пилот и запуск</a:t>
+              <a:t>Предложение</a:t>
+            </a:r>
+          </a:p>
+        </p:txBody>
+      </p:sp>
+      <p:sp>
+        <p:nvSpPr>
+          <p:cNvPr id="3" name="body"/>
+          <p:cNvSpPr txBox="1"/>
+          <p:nvPr/>
+        </p:nvSpPr>
+        <p:spPr>
+          <a:xfrm>
+            <a:off x="677387" y="1773204"/>
+            <a:ext cx="10855878" cy="1737360"/>
+          </a:xfrm>
+          <a:prstGeom prst="rect">
+            <a:avLst/>
+          </a:prstGeom>
+          <a:noFill/>
+        </p:spPr>
+        <p:txBody>
+          <a:bodyPr wrap="square" lIns="76200" rIns="76200" tIns="50800" bIns="50800">
+            <a:spAutoFit/>
+          </a:bodyPr>
+          <a:lstStyle/>
+          <a:p>
+            <a:pPr algn="l">
+              <a:spcAft>
+                <a:spcPts val="300"/>
+              </a:spcAft>
+              <a:defRPr sz="1800">
+                <a:solidFill>
+                  <a:srgbClr val="000000"/>
+                </a:solidFill>
+                <a:latin typeface="Play"/>
+                <a:ea typeface="Play"/>
+                <a:cs typeface="Play"/>
+              </a:defRPr>
+            </a:pPr>
+            <a:r>
+              <a:rPr sz="1800">
+                <a:solidFill>
+                  <a:srgbClr val="000000"/>
+                </a:solidFill>
+                <a:latin typeface="Play"/>
+                <a:ea typeface="Play"/>
+                <a:cs typeface="Play"/>
+              </a:rPr>
+              <a:t>• Сервис принимает pptx-шаблон, документы, таблицы, заметки.</a:t>
+            </a:r>
+          </a:p>
+          <a:p>
+            <a:pPr algn="l">
+              <a:spcAft>
+                <a:spcPts val="300"/>
+              </a:spcAft>
+              <a:defRPr sz="1800">
+                <a:solidFill>
+                  <a:srgbClr val="000000"/>
+                </a:solidFill>
+                <a:latin typeface="Play"/>
+                <a:ea typeface="Play"/>
+                <a:cs typeface="Play"/>
+              </a:defRPr>
+            </a:pPr>
+            <a:r>
+              <a:rPr sz="1800">
+                <a:solidFill>
+                  <a:srgbClr val="000000"/>
+                </a:solidFill>
+                <a:latin typeface="Play"/>
+                <a:ea typeface="Play"/>
+                <a:cs typeface="Play"/>
+              </a:rPr>
+              <a:t>• Шабл превращается:гарнитуры, шкала кеглей, палитра</a:t>
+            </a:r>
+          </a:p>
+          <a:p>
+            <a:pPr algn="l">
+              <a:spcAft>
+                <a:spcPts val="300"/>
+              </a:spcAft>
+              <a:defRPr sz="1800">
+                <a:solidFill>
+                  <a:srgbClr val="000000"/>
+                </a:solidFill>
+                <a:latin typeface="Play"/>
+                <a:ea typeface="Play"/>
+                <a:cs typeface="Play"/>
+              </a:defRPr>
+            </a:pPr>
+            <a:r>
+              <a:rPr sz="1800">
+                <a:solidFill>
+                  <a:srgbClr val="000000"/>
+                </a:solidFill>
+                <a:latin typeface="Play"/>
+                <a:ea typeface="Play"/>
+                <a:cs typeface="Play"/>
+              </a:rPr>
+              <a:t>• Бриф генерирует колоду, автоматическая вёрстка</a:t>
+            </a:r>
+          </a:p>
+          <a:p>
+            <a:pPr algn="l">
+              <a:spcAft>
+                <a:spcPts val="300"/>
+              </a:spcAft>
+              <a:defRPr sz="1800">
+                <a:solidFill>
+                  <a:srgbClr val="000000"/>
+                </a:solidFill>
+                <a:latin typeface="Play"/>
+                <a:ea typeface="Play"/>
+                <a:cs typeface="Play"/>
+              </a:defRPr>
+            </a:pPr>
+            <a:r>
+              <a:rPr sz="1800">
+                <a:solidFill>
+                  <a:srgbClr val="000000"/>
+                </a:solidFill>
+                <a:latin typeface="Play"/>
+                <a:ea typeface="Play"/>
+                <a:cs typeface="Play"/>
+              </a:rPr>
+              <a:t>• Экспорт в pptx, pdf, html; слайды редактируемы.</a:t>
+            </a:r>
+          </a:p>
+        </p:txBody>
+      </p:sp>
+      <p:sp>
+        <p:nvSpPr>
+          <p:cNvPr id="4" name="Pentagon 3"/>
+          <p:cNvSpPr/>
+          <p:nvPr/>
+        </p:nvSpPr>
+        <p:spPr>
+          <a:xfrm>
+            <a:off x="677387" y="4300648"/>
+            <a:ext cx="2066959" cy="1281514"/>
+          </a:xfrm>
+          <a:prstGeom prst="homePlate">
+            <a:avLst/>
+          </a:prstGeom>
+          <a:solidFill>
+            <a:srgbClr val="0077FF"/>
+          </a:solidFill>
+          <a:ln>
+            <a:noFill/>
+          </a:ln>
+        </p:spPr>
+        <p:style>
+          <a:lnRef idx="1">
+            <a:schemeClr val="accent1"/>
+          </a:lnRef>
+          <a:fillRef idx="3">
+            <a:schemeClr val="accent1"/>
+          </a:fillRef>
+          <a:effectRef idx="2">
+            <a:schemeClr val="accent1"/>
+          </a:effectRef>
+          <a:fontRef idx="minor">
+            <a:schemeClr val="lt1"/>
+          </a:fontRef>
+        </p:style>
+        <p:txBody>
+          <a:bodyPr rtlCol="0" anchor="ctr" wrap="square" lIns="12700" rIns="12700" tIns="12700" bIns="12700"/>
+          <a:lstStyle/>
+          <a:p>
+            <a:pPr algn="ctr">
+              <a:defRPr sz="1096" b="0">
+                <a:solidFill>
+                  <a:srgbClr val="FFFFFF"/>
+                </a:solidFill>
+                <a:latin typeface="Play"/>
+                <a:ea typeface="Play"/>
+                <a:cs typeface="Play"/>
+              </a:defRPr>
+            </a:pPr>
+            <a:r>
+              <a:rPr sz="1096" b="0">
+                <a:solidFill>
+                  <a:srgbClr val="FFFFFF"/>
+                </a:solidFill>
+                <a:latin typeface="Play"/>
+                <a:ea typeface="Play"/>
+                <a:cs typeface="Play"/>
+              </a:rPr>
+              <a:t>Шаблон</a:t>
+            </a:r>
+          </a:p>
+        </p:txBody>
+      </p:sp>
+      <p:sp>
+        <p:nvSpPr>
+          <p:cNvPr id="5" name="Chevron 4"/>
+          <p:cNvSpPr/>
+          <p:nvPr/>
+        </p:nvSpPr>
+        <p:spPr>
+          <a:xfrm>
+            <a:off x="2874616" y="4300648"/>
+            <a:ext cx="2066959" cy="1281514"/>
+          </a:xfrm>
+          <a:prstGeom prst="chevron">
+            <a:avLst/>
+          </a:prstGeom>
+          <a:solidFill>
+            <a:srgbClr val="0077FF"/>
+          </a:solidFill>
+          <a:ln>
+            <a:noFill/>
+          </a:ln>
+        </p:spPr>
+        <p:style>
+          <a:lnRef idx="1">
+            <a:schemeClr val="accent1"/>
+          </a:lnRef>
+          <a:fillRef idx="3">
+            <a:schemeClr val="accent1"/>
+          </a:fillRef>
+          <a:effectRef idx="2">
+            <a:schemeClr val="accent1"/>
+          </a:effectRef>
+          <a:fontRef idx="minor">
+            <a:schemeClr val="lt1"/>
+          </a:fontRef>
+        </p:style>
+        <p:txBody>
+          <a:bodyPr rtlCol="0" anchor="ctr" wrap="square" lIns="12700" rIns="12700" tIns="12700" bIns="12700"/>
+          <a:lstStyle/>
+          <a:p>
+            <a:pPr algn="ctr">
+              <a:defRPr sz="1096" b="0">
+                <a:solidFill>
+                  <a:srgbClr val="FFFFFF"/>
+                </a:solidFill>
+                <a:latin typeface="Play"/>
+                <a:ea typeface="Play"/>
+                <a:cs typeface="Play"/>
+              </a:defRPr>
+            </a:pPr>
+            <a:r>
+              <a:rPr sz="1096" b="0">
+                <a:solidFill>
+                  <a:srgbClr val="FFFFFF"/>
+                </a:solidFill>
+                <a:latin typeface="Play"/>
+                <a:ea typeface="Play"/>
+                <a:cs typeface="Play"/>
+              </a:rPr>
+              <a:t>План</a:t>
+            </a:r>
+          </a:p>
+        </p:txBody>
+      </p:sp>
+      <p:sp>
+        <p:nvSpPr>
+          <p:cNvPr id="6" name="Chevron 5"/>
+          <p:cNvSpPr/>
+          <p:nvPr/>
+        </p:nvSpPr>
+        <p:spPr>
+          <a:xfrm>
+            <a:off x="5071846" y="4300648"/>
+            <a:ext cx="2066959" cy="1281514"/>
+          </a:xfrm>
+          <a:prstGeom prst="chevron">
+            <a:avLst/>
+          </a:prstGeom>
+          <a:solidFill>
+            <a:srgbClr val="0077FF"/>
+          </a:solidFill>
+          <a:ln>
+            <a:noFill/>
+          </a:ln>
+        </p:spPr>
+        <p:style>
+          <a:lnRef idx="1">
+            <a:schemeClr val="accent1"/>
+          </a:lnRef>
+          <a:fillRef idx="3">
+            <a:schemeClr val="accent1"/>
+          </a:fillRef>
+          <a:effectRef idx="2">
+            <a:schemeClr val="accent1"/>
+          </a:effectRef>
+          <a:fontRef idx="minor">
+            <a:schemeClr val="lt1"/>
+          </a:fontRef>
+        </p:style>
+        <p:txBody>
+          <a:bodyPr rtlCol="0" anchor="ctr" wrap="square" lIns="12700" rIns="12700" tIns="12700" bIns="12700"/>
+          <a:lstStyle/>
+          <a:p>
+            <a:pPr algn="ctr">
+              <a:defRPr sz="1096" b="0">
+                <a:solidFill>
+                  <a:srgbClr val="FFFFFF"/>
+                </a:solidFill>
+                <a:latin typeface="Play"/>
+                <a:ea typeface="Play"/>
+                <a:cs typeface="Play"/>
+              </a:defRPr>
+            </a:pPr>
+            <a:r>
+              <a:rPr sz="1096" b="0">
+                <a:solidFill>
+                  <a:srgbClr val="FFFFFF"/>
+                </a:solidFill>
+                <a:latin typeface="Play"/>
+                <a:ea typeface="Play"/>
+                <a:cs typeface="Play"/>
+              </a:rPr>
+              <a:t>Вёрстка</a:t>
+            </a:r>
+          </a:p>
+        </p:txBody>
+      </p:sp>
+      <p:sp>
+        <p:nvSpPr>
+          <p:cNvPr id="7" name="Chevron 6"/>
+          <p:cNvSpPr/>
+          <p:nvPr/>
+        </p:nvSpPr>
+        <p:spPr>
+          <a:xfrm>
+            <a:off x="7269076" y="4300648"/>
+            <a:ext cx="2066959" cy="1281514"/>
+          </a:xfrm>
+          <a:prstGeom prst="chevron">
+            <a:avLst/>
+          </a:prstGeom>
+          <a:solidFill>
+            <a:srgbClr val="0077FF"/>
+          </a:solidFill>
+          <a:ln>
+            <a:noFill/>
+          </a:ln>
+        </p:spPr>
+        <p:style>
+          <a:lnRef idx="1">
+            <a:schemeClr val="accent1"/>
+          </a:lnRef>
+          <a:fillRef idx="3">
+            <a:schemeClr val="accent1"/>
+          </a:fillRef>
+          <a:effectRef idx="2">
+            <a:schemeClr val="accent1"/>
+          </a:effectRef>
+          <a:fontRef idx="minor">
+            <a:schemeClr val="lt1"/>
+          </a:fontRef>
+        </p:style>
+        <p:txBody>
+          <a:bodyPr rtlCol="0" anchor="ctr" wrap="square" lIns="12700" rIns="12700" tIns="12700" bIns="12700"/>
+          <a:lstStyle/>
+          <a:p>
+            <a:pPr algn="ctr">
+              <a:defRPr sz="1096" b="0">
+                <a:solidFill>
+                  <a:srgbClr val="FFFFFF"/>
+                </a:solidFill>
+                <a:latin typeface="Play"/>
+                <a:ea typeface="Play"/>
+                <a:cs typeface="Play"/>
+              </a:defRPr>
+            </a:pPr>
+            <a:r>
+              <a:rPr sz="1096" b="0">
+                <a:solidFill>
+                  <a:srgbClr val="FFFFFF"/>
+                </a:solidFill>
+                <a:latin typeface="Play"/>
+                <a:ea typeface="Play"/>
+                <a:cs typeface="Play"/>
+              </a:rPr>
+              <a:t>Аудит</a:t>
+            </a:r>
+          </a:p>
+        </p:txBody>
+      </p:sp>
+      <p:sp>
+        <p:nvSpPr>
+          <p:cNvPr id="8" name="Chevron 7"/>
+          <p:cNvSpPr/>
+          <p:nvPr/>
+        </p:nvSpPr>
+        <p:spPr>
+          <a:xfrm>
+            <a:off x="9466305" y="4300648"/>
+            <a:ext cx="2066959" cy="1281514"/>
+          </a:xfrm>
+          <a:prstGeom prst="chevron">
+            <a:avLst/>
+          </a:prstGeom>
+          <a:solidFill>
+            <a:srgbClr val="0077FF"/>
+          </a:solidFill>
+          <a:ln>
+            <a:noFill/>
+          </a:ln>
+        </p:spPr>
+        <p:style>
+          <a:lnRef idx="1">
+            <a:schemeClr val="accent1"/>
+          </a:lnRef>
+          <a:fillRef idx="3">
+            <a:schemeClr val="accent1"/>
+          </a:fillRef>
+          <a:effectRef idx="2">
+            <a:schemeClr val="accent1"/>
+          </a:effectRef>
+          <a:fontRef idx="minor">
+            <a:schemeClr val="lt1"/>
+          </a:fontRef>
+        </p:style>
+        <p:txBody>
+          <a:bodyPr rtlCol="0" anchor="ctr" wrap="square" lIns="12700" rIns="12700" tIns="12700" bIns="12700"/>
+          <a:lstStyle/>
+          <a:p>
+            <a:pPr algn="ctr">
+              <a:defRPr sz="1096" b="0">
+                <a:solidFill>
+                  <a:srgbClr val="FFFFFF"/>
+                </a:solidFill>
+                <a:latin typeface="Play"/>
+                <a:ea typeface="Play"/>
+                <a:cs typeface="Play"/>
+              </a:defRPr>
+            </a:pPr>
+            <a:r>
+              <a:rPr sz="1096" b="0">
+                <a:solidFill>
+                  <a:srgbClr val="FFFFFF"/>
+                </a:solidFill>
+                <a:latin typeface="Play"/>
+                <a:ea typeface="Play"/>
+                <a:cs typeface="Play"/>
+              </a:rPr>
+              <a:t>Экспорт</a:t>
             </a:r>
           </a:p>
         </p:txBody>
@@ -7694,7 +8359,1097 @@
 </p:sld>
 </file>
 
-<file path=ppt/slides/slide57.xml><?xml version="1.0" encoding="utf-8"?>
+<file path=ppt/slides/slide59.xml><?xml version="1.0" encoding="utf-8"?>
+<p:sld xmlns:a="http://schemas.openxmlformats.org/drawingml/2006/main" xmlns:p="http://schemas.openxmlformats.org/presentationml/2006/main" xmlns:r="http://schemas.openxmlformats.org/officeDocument/2006/relationships">
+  <p:cSld>
+    <p:spTree>
+      <p:nvGrpSpPr>
+        <p:cNvPr id="1" name=""/>
+        <p:cNvGrpSpPr/>
+        <p:nvPr/>
+      </p:nvGrpSpPr>
+      <p:grpSpPr/>
+      <p:cxnSp>
+        <p:nvCxnSpPr>
+          <p:cNvPr id="918" name="Google Shape;918;p74"/>
+          <p:cNvCxnSpPr/>
+          <p:nvPr/>
+        </p:nvCxnSpPr>
+        <p:spPr>
+          <a:xfrm rot="10800000">
+            <a:off x="658813" y="2199500"/>
+            <a:ext cx="11533187" cy="0"/>
+          </a:xfrm>
+          <a:prstGeom prst="straightConnector1">
+            <a:avLst/>
+          </a:prstGeom>
+          <a:noFill/>
+          <a:ln cap="flat" cmpd="sng" w="19050">
+            <a:solidFill>
+              <a:schemeClr val="accent4"/>
+            </a:solidFill>
+            <a:prstDash val="solid"/>
+            <a:miter lim="8000"/>
+            <a:headEnd len="sm" w="sm" type="none"/>
+            <a:tailEnd len="sm" w="sm" type="none"/>
+          </a:ln>
+        </p:spPr>
+      </p:cxnSp>
+      <p:sp>
+        <p:nvSpPr>
+          <p:cNvPr id="919" name="title"/>
+          <p:cNvSpPr txBox="1"/>
+          <p:nvPr/>
+        </p:nvSpPr>
+        <p:spPr>
+          <a:xfrm>
+            <a:off x="677387" y="692177"/>
+            <a:ext cx="10855878" cy="822960"/>
+          </a:xfrm>
+          <a:prstGeom prst="rect">
+            <a:avLst/>
+          </a:prstGeom>
+          <a:noFill/>
+        </p:spPr>
+        <p:txBody>
+          <a:bodyPr wrap="square" lIns="76200" rIns="76200" tIns="50800" bIns="50800">
+            <a:spAutoFit/>
+          </a:bodyPr>
+          <a:lstStyle/>
+          <a:p>
+            <a:pPr algn="l">
+              <a:spcAft>
+                <a:spcPts val="300"/>
+              </a:spcAft>
+              <a:defRPr sz="4000">
+                <a:solidFill>
+                  <a:srgbClr val="000000"/>
+                </a:solidFill>
+                <a:latin typeface="Arial"/>
+                <a:ea typeface="Arial"/>
+                <a:cs typeface="Arial"/>
+              </a:defRPr>
+            </a:pPr>
+            <a:r>
+              <a:rPr sz="4000">
+                <a:solidFill>
+                  <a:srgbClr val="000000"/>
+                </a:solidFill>
+                <a:latin typeface="Arial"/>
+                <a:ea typeface="Arial"/>
+                <a:cs typeface="Arial"/>
+              </a:rPr>
+              <a:t>Ожидаемый эффект</a:t>
+            </a:r>
+          </a:p>
+        </p:txBody>
+      </p:sp>
+      <p:sp>
+        <p:nvSpPr>
+          <p:cNvPr id="920" name="body"/>
+          <p:cNvSpPr txBox="1"/>
+          <p:nvPr/>
+        </p:nvSpPr>
+        <p:spPr>
+          <a:xfrm>
+            <a:off x="677387" y="2200937"/>
+            <a:ext cx="10855878" cy="3748651"/>
+          </a:xfrm>
+          <a:prstGeom prst="rect">
+            <a:avLst/>
+          </a:prstGeom>
+          <a:noFill/>
+        </p:spPr>
+        <p:txBody>
+          <a:bodyPr wrap="square" lIns="76200" rIns="76200" tIns="50800" bIns="50800">
+            <a:spAutoFit/>
+          </a:bodyPr>
+          <a:lstStyle/>
+          <a:p>
+            <a:pPr algn="l">
+              <a:spcAft>
+                <a:spcPts val="300"/>
+              </a:spcAft>
+              <a:defRPr sz="2800">
+                <a:solidFill>
+                  <a:srgbClr val="000000"/>
+                </a:solidFill>
+                <a:latin typeface="Play"/>
+                <a:ea typeface="Play"/>
+                <a:cs typeface="Play"/>
+              </a:defRPr>
+            </a:pPr>
+            <a:r>
+              <a:rPr sz="2800">
+                <a:solidFill>
+                  <a:srgbClr val="000000"/>
+                </a:solidFill>
+                <a:latin typeface="Play"/>
+                <a:ea typeface="Play"/>
+                <a:cs typeface="Play"/>
+              </a:rPr>
+              <a:t>• Время сборки колоды сократилось с 186 до 4 минут</a:t>
+            </a:r>
+          </a:p>
+          <a:p>
+            <a:pPr algn="l">
+              <a:spcAft>
+                <a:spcPts val="300"/>
+              </a:spcAft>
+              <a:defRPr sz="2800">
+                <a:solidFill>
+                  <a:srgbClr val="000000"/>
+                </a:solidFill>
+                <a:latin typeface="Play"/>
+                <a:ea typeface="Play"/>
+                <a:cs typeface="Play"/>
+              </a:defRPr>
+            </a:pPr>
+            <a:r>
+              <a:rPr sz="2800">
+                <a:solidFill>
+                  <a:srgbClr val="000000"/>
+                </a:solidFill>
+                <a:latin typeface="Play"/>
+                <a:ea typeface="Play"/>
+                <a:cs typeface="Play"/>
+              </a:rPr>
+              <a:t>• Первая версия готова за 1 день вместо 6 рабочих дней</a:t>
+            </a:r>
+          </a:p>
+          <a:p>
+            <a:pPr algn="l">
+              <a:spcAft>
+                <a:spcPts val="300"/>
+              </a:spcAft>
+              <a:defRPr sz="2800">
+                <a:solidFill>
+                  <a:srgbClr val="000000"/>
+                </a:solidFill>
+                <a:latin typeface="Play"/>
+                <a:ea typeface="Play"/>
+                <a:cs typeface="Play"/>
+              </a:defRPr>
+            </a:pPr>
+            <a:r>
+              <a:rPr sz="2800">
+                <a:solidFill>
+                  <a:srgbClr val="000000"/>
+                </a:solidFill>
+                <a:latin typeface="Play"/>
+                <a:ea typeface="Play"/>
+                <a:cs typeface="Play"/>
+              </a:rPr>
+              <a:t>• Нарушений фирменного стиля в пилоте 2 из 68 колод, исправлены автоматически</a:t>
+            </a:r>
+          </a:p>
+          <a:p>
+            <a:pPr algn="l">
+              <a:spcAft>
+                <a:spcPts val="300"/>
+              </a:spcAft>
+              <a:defRPr sz="2800">
+                <a:solidFill>
+                  <a:srgbClr val="000000"/>
+                </a:solidFill>
+                <a:latin typeface="Play"/>
+                <a:ea typeface="Play"/>
+                <a:cs typeface="Play"/>
+              </a:defRPr>
+            </a:pPr>
+            <a:r>
+              <a:rPr sz="2800">
+                <a:solidFill>
+                  <a:srgbClr val="000000"/>
+                </a:solidFill>
+                <a:latin typeface="Play"/>
+                <a:ea typeface="Play"/>
+                <a:cs typeface="Play"/>
+              </a:rPr>
+              <a:t>• Дизайнеры закрыли 38 запросов вместо 11 в неделю, рутина ушла в сервис</a:t>
+            </a:r>
+          </a:p>
+        </p:txBody>
+      </p:sp>
+    </p:spTree>
+  </p:cSld>
+  <p:clrMapOvr>
+    <a:masterClrMapping/>
+  </p:clrMapOvr>
+</p:sld>
+</file>
+
+<file path=ppt/slides/slide60.xml><?xml version="1.0" encoding="utf-8"?>
+<p:sld xmlns:a="http://schemas.openxmlformats.org/drawingml/2006/main" xmlns:p="http://schemas.openxmlformats.org/presentationml/2006/main" xmlns:r="http://schemas.openxmlformats.org/officeDocument/2006/relationships">
+  <p:cSld>
+    <p:bg>
+      <p:bgPr>
+        <a:solidFill>
+          <a:schemeClr val="lt2"/>
+        </a:solidFill>
+      </p:bgPr>
+    </p:bg>
+    <p:spTree>
+      <p:nvGrpSpPr>
+        <p:cNvPr id="1" name=""/>
+        <p:cNvGrpSpPr/>
+        <p:nvPr/>
+      </p:nvGrpSpPr>
+      <p:grpSpPr/>
+      <p:sp>
+        <p:nvSpPr>
+          <p:cNvPr id="2" name="title"/>
+          <p:cNvSpPr txBox="1"/>
+          <p:nvPr/>
+        </p:nvSpPr>
+        <p:spPr>
+          <a:xfrm>
+            <a:off x="677387" y="692177"/>
+            <a:ext cx="10855878" cy="822960"/>
+          </a:xfrm>
+          <a:prstGeom prst="rect">
+            <a:avLst/>
+          </a:prstGeom>
+          <a:noFill/>
+        </p:spPr>
+        <p:txBody>
+          <a:bodyPr wrap="square" lIns="76200" rIns="76200" tIns="50800" bIns="50800">
+            <a:spAutoFit/>
+          </a:bodyPr>
+          <a:lstStyle/>
+          <a:p>
+            <a:pPr algn="l">
+              <a:spcAft>
+                <a:spcPts val="300"/>
+              </a:spcAft>
+              <a:defRPr sz="4000">
+                <a:solidFill>
+                  <a:srgbClr val="000000"/>
+                </a:solidFill>
+                <a:latin typeface="Arial"/>
+                <a:ea typeface="Arial"/>
+                <a:cs typeface="Arial"/>
+              </a:defRPr>
+            </a:pPr>
+            <a:r>
+              <a:rPr sz="4000">
+                <a:solidFill>
+                  <a:srgbClr val="000000"/>
+                </a:solidFill>
+                <a:latin typeface="Arial"/>
+                <a:ea typeface="Arial"/>
+                <a:cs typeface="Arial"/>
+              </a:rPr>
+              <a:t>Что потребуется: ресурсы и сроки</a:t>
+            </a:r>
+          </a:p>
+        </p:txBody>
+      </p:sp>
+      <p:sp>
+        <p:nvSpPr>
+          <p:cNvPr id="3" name="body"/>
+          <p:cNvSpPr txBox="1"/>
+          <p:nvPr/>
+        </p:nvSpPr>
+        <p:spPr>
+          <a:xfrm>
+            <a:off x="677387" y="1773204"/>
+            <a:ext cx="10855878" cy="1737360"/>
+          </a:xfrm>
+          <a:prstGeom prst="rect">
+            <a:avLst/>
+          </a:prstGeom>
+          <a:noFill/>
+        </p:spPr>
+        <p:txBody>
+          <a:bodyPr wrap="square" lIns="76200" rIns="76200" tIns="50800" bIns="50800">
+            <a:spAutoFit/>
+          </a:bodyPr>
+          <a:lstStyle/>
+          <a:p>
+            <a:pPr algn="l">
+              <a:spcAft>
+                <a:spcPts val="300"/>
+              </a:spcAft>
+              <a:defRPr sz="1600">
+                <a:solidFill>
+                  <a:srgbClr val="000000"/>
+                </a:solidFill>
+                <a:latin typeface="Play"/>
+                <a:ea typeface="Play"/>
+                <a:cs typeface="Play"/>
+              </a:defRPr>
+            </a:pPr>
+            <a:r>
+              <a:rPr sz="1600">
+                <a:solidFill>
+                  <a:srgbClr val="000000"/>
+                </a:solidFill>
+                <a:latin typeface="Play"/>
+                <a:ea typeface="Play"/>
+                <a:cs typeface="Play"/>
+              </a:rPr>
+              <a:t>• Сервис на машине 2 vCPU / 2 ГБ RAM</a:t>
+            </a:r>
+          </a:p>
+          <a:p>
+            <a:pPr algn="l">
+              <a:spcAft>
+                <a:spcPts val="300"/>
+              </a:spcAft>
+              <a:defRPr sz="1600">
+                <a:solidFill>
+                  <a:srgbClr val="000000"/>
+                </a:solidFill>
+                <a:latin typeface="Play"/>
+                <a:ea typeface="Play"/>
+                <a:cs typeface="Play"/>
+              </a:defRPr>
+            </a:pPr>
+            <a:r>
+              <a:rPr sz="1600">
+                <a:solidFill>
+                  <a:srgbClr val="000000"/>
+                </a:solidFill>
+                <a:latin typeface="Play"/>
+                <a:ea typeface="Play"/>
+                <a:cs typeface="Play"/>
+              </a:rPr>
+              <a:t>• Модель gpt-oss-20b подключена через OpenAI-протокол</a:t>
+            </a:r>
+          </a:p>
+          <a:p>
+            <a:pPr algn="l">
+              <a:spcAft>
+                <a:spcPts val="300"/>
+              </a:spcAft>
+              <a:defRPr sz="1600">
+                <a:solidFill>
+                  <a:srgbClr val="000000"/>
+                </a:solidFill>
+                <a:latin typeface="Play"/>
+                <a:ea typeface="Play"/>
+                <a:cs typeface="Play"/>
+              </a:defRPr>
+            </a:pPr>
+            <a:r>
+              <a:rPr sz="1600">
+                <a:solidFill>
+                  <a:srgbClr val="000000"/>
+                </a:solidFill>
+                <a:latin typeface="Play"/>
+                <a:ea typeface="Play"/>
+                <a:cs typeface="Play"/>
+              </a:rPr>
+              <a:t>• Стоимость инференса за 6 недель 1 400 руб.</a:t>
+            </a:r>
+          </a:p>
+          <a:p>
+            <a:pPr algn="l">
+              <a:spcAft>
+                <a:spcPts val="300"/>
+              </a:spcAft>
+              <a:defRPr sz="1600">
+                <a:solidFill>
+                  <a:srgbClr val="000000"/>
+                </a:solidFill>
+                <a:latin typeface="Play"/>
+                <a:ea typeface="Play"/>
+                <a:cs typeface="Play"/>
+              </a:defRPr>
+            </a:pPr>
+            <a:r>
+              <a:rPr sz="1600">
+                <a:solidFill>
+                  <a:srgbClr val="000000"/>
+                </a:solidFill>
+                <a:latin typeface="Play"/>
+                <a:ea typeface="Play"/>
+                <a:cs typeface="Play"/>
+              </a:rPr>
+              <a:t>• Нагрузка выше 20 задач требует внешней очереди.</a:t>
+            </a:r>
+          </a:p>
+        </p:txBody>
+      </p:sp>
+      <p:sp>
+        <p:nvSpPr>
+          <p:cNvPr id="4" name="Rectangle 3"/>
+          <p:cNvSpPr/>
+          <p:nvPr/>
+        </p:nvSpPr>
+        <p:spPr>
+          <a:xfrm>
+            <a:off x="677387" y="4840654"/>
+            <a:ext cx="10855878" cy="75563"/>
+          </a:xfrm>
+          <a:prstGeom prst="rect">
+            <a:avLst/>
+          </a:prstGeom>
+          <a:solidFill>
+            <a:srgbClr val="0077FF"/>
+          </a:solidFill>
+          <a:ln>
+            <a:noFill/>
+          </a:ln>
+        </p:spPr>
+        <p:style>
+          <a:lnRef idx="1">
+            <a:schemeClr val="accent1"/>
+          </a:lnRef>
+          <a:fillRef idx="3">
+            <a:schemeClr val="accent1"/>
+          </a:fillRef>
+          <a:effectRef idx="2">
+            <a:schemeClr val="accent1"/>
+          </a:effectRef>
+          <a:fontRef idx="minor">
+            <a:schemeClr val="lt1"/>
+          </a:fontRef>
+        </p:style>
+        <p:txBody>
+          <a:bodyPr rtlCol="0" anchor="ctr"/>
+          <a:lstStyle/>
+          <a:p>
+            <a:pPr algn="ctr"/>
+          </a:p>
+        </p:txBody>
+      </p:sp>
+      <p:sp>
+        <p:nvSpPr>
+          <p:cNvPr id="5" name="Oval 4"/>
+          <p:cNvSpPr/>
+          <p:nvPr/>
+        </p:nvSpPr>
+        <p:spPr>
+          <a:xfrm>
+            <a:off x="1757305" y="4601369"/>
+            <a:ext cx="554132" cy="554132"/>
+          </a:xfrm>
+          <a:prstGeom prst="ellipse">
+            <a:avLst/>
+          </a:prstGeom>
+          <a:solidFill>
+            <a:srgbClr val="0077FF"/>
+          </a:solidFill>
+          <a:ln>
+            <a:noFill/>
+          </a:ln>
+        </p:spPr>
+        <p:style>
+          <a:lnRef idx="1">
+            <a:schemeClr val="accent1"/>
+          </a:lnRef>
+          <a:fillRef idx="3">
+            <a:schemeClr val="accent1"/>
+          </a:fillRef>
+          <a:effectRef idx="2">
+            <a:schemeClr val="accent1"/>
+          </a:effectRef>
+          <a:fontRef idx="minor">
+            <a:schemeClr val="lt1"/>
+          </a:fontRef>
+        </p:style>
+        <p:txBody>
+          <a:bodyPr rtlCol="0" anchor="ctr"/>
+          <a:lstStyle/>
+          <a:p>
+            <a:pPr algn="ctr"/>
+          </a:p>
+        </p:txBody>
+      </p:sp>
+      <p:sp>
+        <p:nvSpPr>
+          <p:cNvPr id="6" name="TextBox 5"/>
+          <p:cNvSpPr txBox="1"/>
+          <p:nvPr/>
+        </p:nvSpPr>
+        <p:spPr>
+          <a:xfrm>
+            <a:off x="677387" y="3682014"/>
+            <a:ext cx="4070954" cy="957137"/>
+          </a:xfrm>
+          <a:prstGeom prst="rect">
+            <a:avLst/>
+          </a:prstGeom>
+          <a:noFill/>
+        </p:spPr>
+        <p:txBody>
+          <a:bodyPr wrap="square" lIns="12700" rIns="12700" tIns="12700" bIns="12700">
+            <a:spAutoFit/>
+          </a:bodyPr>
+          <a:lstStyle/>
+          <a:p>
+            <a:pPr algn="ctr">
+              <a:defRPr sz="1400" b="0">
+                <a:solidFill>
+                  <a:srgbClr val="000000"/>
+                </a:solidFill>
+                <a:latin typeface="Play"/>
+                <a:ea typeface="Play"/>
+                <a:cs typeface="Play"/>
+              </a:defRPr>
+            </a:pPr>
+            <a:r>
+              <a:rPr sz="1400" b="0">
+                <a:solidFill>
+                  <a:srgbClr val="000000"/>
+                </a:solidFill>
+                <a:latin typeface="Play"/>
+                <a:ea typeface="Play"/>
+                <a:cs typeface="Play"/>
+              </a:rPr>
+              <a:t>Подключение 4 команд</a:t>
+            </a:r>
+          </a:p>
+        </p:txBody>
+      </p:sp>
+      <p:sp>
+        <p:nvSpPr>
+          <p:cNvPr id="7" name="Oval 6"/>
+          <p:cNvSpPr/>
+          <p:nvPr/>
+        </p:nvSpPr>
+        <p:spPr>
+          <a:xfrm>
+            <a:off x="4471275" y="4601369"/>
+            <a:ext cx="554132" cy="554132"/>
+          </a:xfrm>
+          <a:prstGeom prst="ellipse">
+            <a:avLst/>
+          </a:prstGeom>
+          <a:solidFill>
+            <a:srgbClr val="0077FF"/>
+          </a:solidFill>
+          <a:ln>
+            <a:noFill/>
+          </a:ln>
+        </p:spPr>
+        <p:style>
+          <a:lnRef idx="1">
+            <a:schemeClr val="accent1"/>
+          </a:lnRef>
+          <a:fillRef idx="3">
+            <a:schemeClr val="accent1"/>
+          </a:fillRef>
+          <a:effectRef idx="2">
+            <a:schemeClr val="accent1"/>
+          </a:effectRef>
+          <a:fontRef idx="minor">
+            <a:schemeClr val="lt1"/>
+          </a:fontRef>
+        </p:style>
+        <p:txBody>
+          <a:bodyPr rtlCol="0" anchor="ctr"/>
+          <a:lstStyle/>
+          <a:p>
+            <a:pPr algn="ctr"/>
+          </a:p>
+        </p:txBody>
+      </p:sp>
+      <p:sp>
+        <p:nvSpPr>
+          <p:cNvPr id="8" name="TextBox 7"/>
+          <p:cNvSpPr txBox="1"/>
+          <p:nvPr/>
+        </p:nvSpPr>
+        <p:spPr>
+          <a:xfrm>
+            <a:off x="2712864" y="5394786"/>
+            <a:ext cx="4070954" cy="957137"/>
+          </a:xfrm>
+          <a:prstGeom prst="rect">
+            <a:avLst/>
+          </a:prstGeom>
+          <a:noFill/>
+        </p:spPr>
+        <p:txBody>
+          <a:bodyPr wrap="square" lIns="12700" rIns="12700" tIns="12700" bIns="12700">
+            <a:spAutoFit/>
+          </a:bodyPr>
+          <a:lstStyle/>
+          <a:p>
+            <a:pPr algn="ctr">
+              <a:defRPr sz="1400" b="0">
+                <a:solidFill>
+                  <a:srgbClr val="000000"/>
+                </a:solidFill>
+                <a:latin typeface="Play"/>
+                <a:ea typeface="Play"/>
+                <a:cs typeface="Play"/>
+              </a:defRPr>
+            </a:pPr>
+            <a:r>
+              <a:rPr sz="1400" b="0">
+                <a:solidFill>
+                  <a:srgbClr val="000000"/>
+                </a:solidFill>
+                <a:latin typeface="Play"/>
+                <a:ea typeface="Play"/>
+                <a:cs typeface="Play"/>
+              </a:rPr>
+              <a:t>Домен и HTTPS</a:t>
+            </a:r>
+          </a:p>
+        </p:txBody>
+      </p:sp>
+      <p:sp>
+        <p:nvSpPr>
+          <p:cNvPr id="9" name="Oval 8"/>
+          <p:cNvSpPr/>
+          <p:nvPr/>
+        </p:nvSpPr>
+        <p:spPr>
+          <a:xfrm>
+            <a:off x="7185244" y="4601369"/>
+            <a:ext cx="554132" cy="554132"/>
+          </a:xfrm>
+          <a:prstGeom prst="ellipse">
+            <a:avLst/>
+          </a:prstGeom>
+          <a:solidFill>
+            <a:srgbClr val="0077FF"/>
+          </a:solidFill>
+          <a:ln>
+            <a:noFill/>
+          </a:ln>
+        </p:spPr>
+        <p:style>
+          <a:lnRef idx="1">
+            <a:schemeClr val="accent1"/>
+          </a:lnRef>
+          <a:fillRef idx="3">
+            <a:schemeClr val="accent1"/>
+          </a:fillRef>
+          <a:effectRef idx="2">
+            <a:schemeClr val="accent1"/>
+          </a:effectRef>
+          <a:fontRef idx="minor">
+            <a:schemeClr val="lt1"/>
+          </a:fontRef>
+        </p:style>
+        <p:txBody>
+          <a:bodyPr rtlCol="0" anchor="ctr"/>
+          <a:lstStyle/>
+          <a:p>
+            <a:pPr algn="ctr"/>
+          </a:p>
+        </p:txBody>
+      </p:sp>
+      <p:sp>
+        <p:nvSpPr>
+          <p:cNvPr id="10" name="TextBox 9"/>
+          <p:cNvSpPr txBox="1"/>
+          <p:nvPr/>
+        </p:nvSpPr>
+        <p:spPr>
+          <a:xfrm>
+            <a:off x="5426833" y="3682014"/>
+            <a:ext cx="4070954" cy="957137"/>
+          </a:xfrm>
+          <a:prstGeom prst="rect">
+            <a:avLst/>
+          </a:prstGeom>
+          <a:noFill/>
+        </p:spPr>
+        <p:txBody>
+          <a:bodyPr wrap="square" lIns="12700" rIns="12700" tIns="12700" bIns="12700">
+            <a:spAutoFit/>
+          </a:bodyPr>
+          <a:lstStyle/>
+          <a:p>
+            <a:pPr algn="ctr">
+              <a:defRPr sz="1400" b="0">
+                <a:solidFill>
+                  <a:srgbClr val="000000"/>
+                </a:solidFill>
+                <a:latin typeface="Play"/>
+                <a:ea typeface="Play"/>
+                <a:cs typeface="Play"/>
+              </a:defRPr>
+            </a:pPr>
+            <a:r>
+              <a:rPr sz="1400" b="0">
+                <a:solidFill>
+                  <a:srgbClr val="000000"/>
+                </a:solidFill>
+                <a:latin typeface="Play"/>
+                <a:ea typeface="Play"/>
+                <a:cs typeface="Play"/>
+              </a:rPr>
+              <a:t>Доступ для всей компании</a:t>
+            </a:r>
+          </a:p>
+        </p:txBody>
+      </p:sp>
+      <p:sp>
+        <p:nvSpPr>
+          <p:cNvPr id="11" name="Oval 10"/>
+          <p:cNvSpPr/>
+          <p:nvPr/>
+        </p:nvSpPr>
+        <p:spPr>
+          <a:xfrm>
+            <a:off x="9899214" y="4601369"/>
+            <a:ext cx="554132" cy="554132"/>
+          </a:xfrm>
+          <a:prstGeom prst="ellipse">
+            <a:avLst/>
+          </a:prstGeom>
+          <a:solidFill>
+            <a:srgbClr val="0077FF"/>
+          </a:solidFill>
+          <a:ln>
+            <a:noFill/>
+          </a:ln>
+        </p:spPr>
+        <p:style>
+          <a:lnRef idx="1">
+            <a:schemeClr val="accent1"/>
+          </a:lnRef>
+          <a:fillRef idx="3">
+            <a:schemeClr val="accent1"/>
+          </a:fillRef>
+          <a:effectRef idx="2">
+            <a:schemeClr val="accent1"/>
+          </a:effectRef>
+          <a:fontRef idx="minor">
+            <a:schemeClr val="lt1"/>
+          </a:fontRef>
+        </p:style>
+        <p:txBody>
+          <a:bodyPr rtlCol="0" anchor="ctr"/>
+          <a:lstStyle/>
+          <a:p>
+            <a:pPr algn="ctr"/>
+          </a:p>
+        </p:txBody>
+      </p:sp>
+      <p:sp>
+        <p:nvSpPr>
+          <p:cNvPr id="12" name="TextBox 11"/>
+          <p:cNvSpPr txBox="1"/>
+          <p:nvPr/>
+        </p:nvSpPr>
+        <p:spPr>
+          <a:xfrm>
+            <a:off x="7462310" y="5394786"/>
+            <a:ext cx="4070954" cy="957137"/>
+          </a:xfrm>
+          <a:prstGeom prst="rect">
+            <a:avLst/>
+          </a:prstGeom>
+          <a:noFill/>
+        </p:spPr>
+        <p:txBody>
+          <a:bodyPr wrap="square" lIns="12700" rIns="12700" tIns="12700" bIns="12700">
+            <a:spAutoFit/>
+          </a:bodyPr>
+          <a:lstStyle/>
+          <a:p>
+            <a:pPr algn="ctr">
+              <a:defRPr sz="1400" b="0">
+                <a:solidFill>
+                  <a:srgbClr val="000000"/>
+                </a:solidFill>
+                <a:latin typeface="Play"/>
+                <a:ea typeface="Play"/>
+                <a:cs typeface="Play"/>
+              </a:defRPr>
+            </a:pPr>
+            <a:r>
+              <a:rPr sz="1400" b="0">
+                <a:solidFill>
+                  <a:srgbClr val="000000"/>
+                </a:solidFill>
+                <a:latin typeface="Play"/>
+                <a:ea typeface="Play"/>
+                <a:cs typeface="Play"/>
+              </a:rPr>
+              <a:t>Генерация иллюстраций</a:t>
+            </a:r>
+          </a:p>
+        </p:txBody>
+      </p:sp>
+    </p:spTree>
+  </p:cSld>
+  <p:clrMapOvr>
+    <a:masterClrMapping/>
+  </p:clrMapOvr>
+</p:sld>
+</file>
+
+<file path=ppt/slides/slide61.xml><?xml version="1.0" encoding="utf-8"?>
+<p:sld xmlns:a="http://schemas.openxmlformats.org/drawingml/2006/main" xmlns:p="http://schemas.openxmlformats.org/presentationml/2006/main" xmlns:r="http://schemas.openxmlformats.org/officeDocument/2006/relationships">
+  <p:cSld>
+    <p:bg>
+      <p:bgPr>
+        <a:solidFill>
+          <a:schemeClr val="lt2"/>
+        </a:solidFill>
+      </p:bgPr>
+    </p:bg>
+    <p:spTree>
+      <p:nvGrpSpPr>
+        <p:cNvPr id="1" name=""/>
+        <p:cNvGrpSpPr/>
+        <p:nvPr/>
+      </p:nvGrpSpPr>
+      <p:grpSpPr/>
+      <p:sp>
+        <p:nvSpPr>
+          <p:cNvPr id="2" name="title"/>
+          <p:cNvSpPr txBox="1"/>
+          <p:nvPr/>
+        </p:nvSpPr>
+        <p:spPr>
+          <a:xfrm>
+            <a:off x="677387" y="692177"/>
+            <a:ext cx="10855878" cy="822960"/>
+          </a:xfrm>
+          <a:prstGeom prst="rect">
+            <a:avLst/>
+          </a:prstGeom>
+          <a:noFill/>
+        </p:spPr>
+        <p:txBody>
+          <a:bodyPr wrap="square" lIns="76200" rIns="76200" tIns="50800" bIns="50800">
+            <a:spAutoFit/>
+          </a:bodyPr>
+          <a:lstStyle/>
+          <a:p>
+            <a:pPr algn="l">
+              <a:spcAft>
+                <a:spcPts val="300"/>
+              </a:spcAft>
+              <a:defRPr sz="4000">
+                <a:solidFill>
+                  <a:srgbClr val="000000"/>
+                </a:solidFill>
+                <a:latin typeface="Arial"/>
+                <a:ea typeface="Arial"/>
+                <a:cs typeface="Arial"/>
+              </a:defRPr>
+            </a:pPr>
+            <a:r>
+              <a:rPr sz="4000">
+                <a:solidFill>
+                  <a:srgbClr val="000000"/>
+                </a:solidFill>
+                <a:latin typeface="Arial"/>
+                <a:ea typeface="Arial"/>
+                <a:cs typeface="Arial"/>
+              </a:rPr>
+              <a:t>План пилота</a:t>
+            </a:r>
+          </a:p>
+        </p:txBody>
+      </p:sp>
+      <p:sp>
+        <p:nvSpPr>
+          <p:cNvPr id="3" name="card_0"/>
+          <p:cNvSpPr txBox="1"/>
+          <p:nvPr/>
+        </p:nvSpPr>
+        <p:spPr>
+          <a:xfrm>
+            <a:off x="823935" y="1925604"/>
+            <a:ext cx="5060899" cy="1851698"/>
+          </a:xfrm>
+          <a:prstGeom prst="rect">
+            <a:avLst/>
+          </a:prstGeom>
+          <a:noFill/>
+        </p:spPr>
+        <p:txBody>
+          <a:bodyPr wrap="square" lIns="76200" rIns="76200" tIns="50800" bIns="50800">
+            <a:spAutoFit/>
+          </a:bodyPr>
+          <a:lstStyle/>
+          <a:p>
+            <a:pPr algn="l">
+              <a:spcAft>
+                <a:spcPts val="300"/>
+              </a:spcAft>
+              <a:defRPr sz="2400" b="0">
+                <a:solidFill>
+                  <a:srgbClr val="000000"/>
+                </a:solidFill>
+                <a:latin typeface="Play"/>
+                <a:ea typeface="Play"/>
+                <a:cs typeface="Play"/>
+              </a:defRPr>
+            </a:pPr>
+            <a:r>
+              <a:rPr sz="2400" b="0">
+                <a:solidFill>
+                  <a:srgbClr val="000000"/>
+                </a:solidFill>
+                <a:latin typeface="Play"/>
+                <a:ea typeface="Play"/>
+                <a:cs typeface="Play"/>
+              </a:rPr>
+              <a:t>Пилот длился 6 недель, включал 2 команды и 68 презентаций</a:t>
+            </a:r>
+          </a:p>
+        </p:txBody>
+      </p:sp>
+      <p:sp>
+        <p:nvSpPr>
+          <p:cNvPr id="4" name="card_1"/>
+          <p:cNvSpPr txBox="1"/>
+          <p:nvPr/>
+        </p:nvSpPr>
+        <p:spPr>
+          <a:xfrm>
+            <a:off x="6307165" y="1927936"/>
+            <a:ext cx="5086380" cy="1851698"/>
+          </a:xfrm>
+          <a:prstGeom prst="rect">
+            <a:avLst/>
+          </a:prstGeom>
+          <a:noFill/>
+        </p:spPr>
+        <p:txBody>
+          <a:bodyPr wrap="square" lIns="76200" rIns="76200" tIns="50800" bIns="50800">
+            <a:spAutoFit/>
+          </a:bodyPr>
+          <a:lstStyle/>
+          <a:p>
+            <a:pPr algn="l">
+              <a:spcAft>
+                <a:spcPts val="300"/>
+              </a:spcAft>
+              <a:defRPr sz="2400" b="0">
+                <a:solidFill>
+                  <a:srgbClr val="000000"/>
+                </a:solidFill>
+                <a:latin typeface="Play"/>
+                <a:ea typeface="Play"/>
+                <a:cs typeface="Play"/>
+              </a:defRPr>
+            </a:pPr>
+            <a:r>
+              <a:rPr sz="2400" b="0">
+                <a:solidFill>
+                  <a:srgbClr val="000000"/>
+                </a:solidFill>
+                <a:latin typeface="Play"/>
+                <a:ea typeface="Play"/>
+                <a:cs typeface="Play"/>
+              </a:rPr>
+              <a:t>Средняя сборка колоды 4 минуты вместо 186, первая версия 1 день вместо 6</a:t>
+            </a:r>
+          </a:p>
+        </p:txBody>
+      </p:sp>
+      <p:sp>
+        <p:nvSpPr>
+          <p:cNvPr id="5" name="card_2"/>
+          <p:cNvSpPr txBox="1"/>
+          <p:nvPr/>
+        </p:nvSpPr>
+        <p:spPr>
+          <a:xfrm>
+            <a:off x="823935" y="4196699"/>
+            <a:ext cx="5060899" cy="1851698"/>
+          </a:xfrm>
+          <a:prstGeom prst="rect">
+            <a:avLst/>
+          </a:prstGeom>
+          <a:noFill/>
+        </p:spPr>
+        <p:txBody>
+          <a:bodyPr wrap="square" lIns="76200" rIns="76200" tIns="50800" bIns="50800">
+            <a:spAutoFit/>
+          </a:bodyPr>
+          <a:lstStyle/>
+          <a:p>
+            <a:pPr algn="l">
+              <a:spcAft>
+                <a:spcPts val="300"/>
+              </a:spcAft>
+              <a:defRPr sz="2400" b="0">
+                <a:solidFill>
+                  <a:srgbClr val="000000"/>
+                </a:solidFill>
+                <a:latin typeface="Play"/>
+                <a:ea typeface="Play"/>
+                <a:cs typeface="Play"/>
+              </a:defRPr>
+            </a:pPr>
+            <a:r>
+              <a:rPr sz="2400" b="0">
+                <a:solidFill>
+                  <a:srgbClr val="000000"/>
+                </a:solidFill>
+                <a:latin typeface="Play"/>
+                <a:ea typeface="Play"/>
+                <a:cs typeface="Play"/>
+              </a:rPr>
+              <a:t>Нарушений стиля 2 из 68 колод, обе исправлены автоматическими правками</a:t>
+            </a:r>
+          </a:p>
+        </p:txBody>
+      </p:sp>
+      <p:sp>
+        <p:nvSpPr>
+          <p:cNvPr id="6" name="card_3"/>
+          <p:cNvSpPr txBox="1"/>
+          <p:nvPr/>
+        </p:nvSpPr>
+        <p:spPr>
+          <a:xfrm>
+            <a:off x="6307165" y="4196699"/>
+            <a:ext cx="5086380" cy="1851698"/>
+          </a:xfrm>
+          <a:prstGeom prst="rect">
+            <a:avLst/>
+          </a:prstGeom>
+          <a:noFill/>
+        </p:spPr>
+        <p:txBody>
+          <a:bodyPr wrap="square" lIns="76200" rIns="76200" tIns="50800" bIns="50800">
+            <a:spAutoFit/>
+          </a:bodyPr>
+          <a:lstStyle/>
+          <a:p>
+            <a:pPr algn="l">
+              <a:spcAft>
+                <a:spcPts val="300"/>
+              </a:spcAft>
+              <a:defRPr sz="2400" b="0">
+                <a:solidFill>
+                  <a:srgbClr val="000000"/>
+                </a:solidFill>
+                <a:latin typeface="Play"/>
+                <a:ea typeface="Play"/>
+                <a:cs typeface="Play"/>
+              </a:defRPr>
+            </a:pPr>
+            <a:r>
+              <a:rPr sz="2400" b="0">
+                <a:solidFill>
+                  <a:srgbClr val="000000"/>
+                </a:solidFill>
+                <a:latin typeface="Play"/>
+                <a:ea typeface="Play"/>
+                <a:cs typeface="Play"/>
+              </a:rPr>
+              <a:t>Дизайнеры закрыли 38 запросов вместо 11 в неделю, рутина ушла в сервис</a:t>
+            </a:r>
+          </a:p>
+        </p:txBody>
+      </p:sp>
+    </p:spTree>
+  </p:cSld>
+  <p:clrMapOvr>
+    <a:masterClrMapping/>
+  </p:clrMapOvr>
+</p:sld>
+</file>
+
+<file path=ppt/slides/slide62.xml><?xml version="1.0" encoding="utf-8"?>
 <p:sld xmlns:a="http://schemas.openxmlformats.org/drawingml/2006/main" xmlns:p="http://schemas.openxmlformats.org/presentationml/2006/main" xmlns:r="http://schemas.openxmlformats.org/officeDocument/2006/relationships">
   <p:cSld>
     <p:bg>
@@ -7858,7 +9613,7 @@
         <p:spPr>
           <a:xfrm>
             <a:off x="677387" y="692177"/>
-            <a:ext cx="10855878" cy="1447800"/>
+            <a:ext cx="10855878" cy="822960"/>
           </a:xfrm>
           <a:prstGeom prst="rect">
             <a:avLst/>
@@ -7893,7 +9648,7 @@
                 <a:ea typeface="Arial"/>
                 <a:cs typeface="Arial"/>
               </a:rPr>
-              <a:t>Текущее состояние: ручная сборка и проблемы</a:t>
+              <a:t>Что мы просим решить</a:t>
             </a:r>
           </a:p>
         </p:txBody>
@@ -7924,7 +9679,7 @@
               <a:spcAft>
                 <a:spcPts val="300"/>
               </a:spcAft>
-              <a:defRPr sz="1800" b="0">
+              <a:defRPr sz="1600" b="0">
                 <a:solidFill>
                   <a:srgbClr val="000000"/>
                 </a:solidFill>
@@ -7934,7 +9689,7 @@
               </a:defRPr>
             </a:pPr>
             <a:r>
-              <a:rPr sz="1800" b="0">
+              <a:rPr sz="1600" b="0">
                 <a:solidFill>
                   <a:srgbClr val="000000"/>
                 </a:solidFill>
@@ -7942,7 +9697,7 @@
                 <a:ea typeface="Play"/>
                 <a:cs typeface="Play"/>
               </a:rPr>
-              <a:t>12-слайдовая колода занимает 186 мин</a:t>
+              <a:t>Одобрить запуск сервиса на всю компанию</a:t>
             </a:r>
           </a:p>
         </p:txBody>
@@ -7973,7 +9728,7 @@
               <a:spcAft>
                 <a:spcPts val="300"/>
               </a:spcAft>
-              <a:defRPr sz="1800" b="0">
+              <a:defRPr sz="1600" b="0">
                 <a:solidFill>
                   <a:srgbClr val="000000"/>
                 </a:solidFill>
@@ -7983,7 +9738,7 @@
               </a:defRPr>
             </a:pPr>
             <a:r>
-              <a:rPr sz="1800" b="0">
+              <a:rPr sz="1600" b="0">
                 <a:solidFill>
                   <a:srgbClr val="000000"/>
                 </a:solidFill>
@@ -7991,7 +9746,7 @@
                 <a:ea typeface="Play"/>
                 <a:cs typeface="Play"/>
               </a:rPr>
-              <a:t>Правки после ревью добавляют 74 мин</a:t>
+              <a:t>Интеграция с корпоративным хранилищем документов</a:t>
             </a:r>
           </a:p>
         </p:txBody>
@@ -8040,7 +9795,7 @@
                 <a:ea typeface="Play"/>
                 <a:cs typeface="Play"/>
               </a:rPr>
-              <a:t>19 из 42 колод нарушают фирменный стиль</a:t>
+              <a:t>Обеспечить поддержку очереди для нагрузки более 20 задач</a:t>
             </a:r>
           </a:p>
         </p:txBody>
@@ -8053,7 +9808,7 @@
 </p:sld>
 </file>
 
-<file path=ppt/slides/slide58.xml><?xml version="1.0" encoding="utf-8"?>
+<file path=ppt/slides/slide63.xml><?xml version="1.0" encoding="utf-8"?>
 <p:sld xmlns:a="http://schemas.openxmlformats.org/drawingml/2006/main" xmlns:p="http://schemas.openxmlformats.org/presentationml/2006/main" xmlns:r="http://schemas.openxmlformats.org/officeDocument/2006/relationships">
   <p:cSld>
     <p:bg>
@@ -8322,7 +10077,7 @@
         <p:spPr>
           <a:xfrm>
             <a:off x="677387" y="692177"/>
-            <a:ext cx="10855878" cy="1447800"/>
+            <a:ext cx="10855878" cy="822960"/>
           </a:xfrm>
           <a:prstGeom prst="rect">
             <a:avLst/>
@@ -8357,7 +10112,7 @@
                 <a:ea typeface="Arial"/>
                 <a:cs typeface="Arial"/>
               </a:rPr>
-              <a:t>Предлагаемый сервис: автоматизация от шаблона до аудита</a:t>
+              <a:t>Риски</a:t>
             </a:r>
           </a:p>
         </p:txBody>
@@ -8406,7 +10161,7 @@
                 <a:ea typeface="Play"/>
                 <a:cs typeface="Play"/>
               </a:rPr>
-              <a:t>Сервис принимает pptx шаблон и материалы</a:t>
+              <a:t>Модель может выдумать цифры, которые отсутствуют в материалах</a:t>
             </a:r>
           </a:p>
         </p:txBody>
@@ -8437,7 +10192,7 @@
               <a:spcAft>
                 <a:spcPts val="300"/>
               </a:spcAft>
-              <a:defRPr sz="1600" b="0">
+              <a:defRPr sz="1400" b="0">
                 <a:solidFill>
                   <a:srgbClr val="000000"/>
                 </a:solidFill>
@@ -8447,7 +10202,7 @@
               </a:defRPr>
             </a:pPr>
             <a:r>
-              <a:rPr sz="1600" b="0">
+              <a:rPr sz="1400" b="0">
                 <a:solidFill>
                   <a:srgbClr val="000000"/>
                 </a:solidFill>
@@ -8455,7 +10210,7 @@
                 <a:ea typeface="Play"/>
                 <a:cs typeface="Play"/>
               </a:rPr>
-              <a:t>Автоматически формирует дизайн-систему и план колоды</a:t>
+              <a:t>Неполный шаблон приводит к ошибкам, сервис использует рабочую область</a:t>
             </a:r>
           </a:p>
         </p:txBody>
@@ -8504,7 +10259,7 @@
                 <a:ea typeface="Play"/>
                 <a:cs typeface="Play"/>
               </a:rPr>
-              <a:t>Результат – редактируемый pptx, pdf и html</a:t>
+              <a:t>Нагрузка выше 20 задач требует внешней очереди</a:t>
             </a:r>
           </a:p>
         </p:txBody>
@@ -8517,7 +10272,7 @@
 </p:sld>
 </file>
 
-<file path=ppt/slides/slide59.xml><?xml version="1.0" encoding="utf-8"?>
+<file path=ppt/slides/slide64.xml><?xml version="1.0" encoding="utf-8"?>
 <p:sld xmlns:a="http://schemas.openxmlformats.org/drawingml/2006/main" xmlns:p="http://schemas.openxmlformats.org/presentationml/2006/main" xmlns:r="http://schemas.openxmlformats.org/officeDocument/2006/relationships">
   <p:cSld>
     <p:bg>
@@ -8762,7 +10517,7 @@
         <p:spPr>
           <a:xfrm>
             <a:off x="677387" y="692177"/>
-            <a:ext cx="10855878" cy="1447800"/>
+            <a:ext cx="10855878" cy="822960"/>
           </a:xfrm>
           <a:prstGeom prst="rect">
             <a:avLst/>
@@ -8797,7 +10552,7 @@
                 <a:ea typeface="Arial"/>
                 <a:cs typeface="Arial"/>
               </a:rPr>
-              <a:t>Ожидаемый эффект: ускорение и качество</a:t>
+              <a:t>Вопросы к руководству</a:t>
             </a:r>
           </a:p>
         </p:txBody>
@@ -8828,7 +10583,7 @@
               <a:spcAft>
                 <a:spcPts val="300"/>
               </a:spcAft>
-              <a:defRPr sz="1800" b="0">
+              <a:defRPr sz="1600" b="0">
                 <a:solidFill>
                   <a:srgbClr val="000000"/>
                 </a:solidFill>
@@ -8838,7 +10593,7 @@
               </a:defRPr>
             </a:pPr>
             <a:r>
-              <a:rPr sz="1800" b="0">
+              <a:rPr sz="1600" b="0">
                 <a:solidFill>
                   <a:srgbClr val="000000"/>
                 </a:solidFill>
@@ -8846,7 +10601,7 @@
                 <a:ea typeface="Play"/>
                 <a:cs typeface="Play"/>
               </a:rPr>
-              <a:t>Время сборки сократилось до 4 мин</a:t>
+              <a:t>Какие ресурсы нужны для масштабирования сервиса</a:t>
             </a:r>
           </a:p>
         </p:txBody>
@@ -8877,7 +10632,7 @@
               <a:spcAft>
                 <a:spcPts val="300"/>
               </a:spcAft>
-              <a:defRPr sz="1800" b="0">
+              <a:defRPr sz="1600" b="0">
                 <a:solidFill>
                   <a:srgbClr val="000000"/>
                 </a:solidFill>
@@ -8887,7 +10642,7 @@
               </a:defRPr>
             </a:pPr>
             <a:r>
-              <a:rPr sz="1800" b="0">
+              <a:rPr sz="1600" b="0">
                 <a:solidFill>
                   <a:srgbClr val="000000"/>
                 </a:solidFill>
@@ -8895,7 +10650,7 @@
                 <a:ea typeface="Play"/>
                 <a:cs typeface="Play"/>
               </a:rPr>
-              <a:t>Первый вариант готов за 1 день</a:t>
+              <a:t>Как обеспечить качество и проверку данных</a:t>
             </a:r>
           </a:p>
         </p:txBody>
@@ -8944,1522 +10699,11 @@
                 <a:ea typeface="Play"/>
                 <a:cs typeface="Play"/>
               </a:rPr>
-              <a:t>Стиль-нарушения упали до 2 из 68</a:t>
+              <a:t>Как быстро интегрировать сервис в существующие процессы</a:t>
             </a:r>
           </a:p>
         </p:txBody>
       </p:sp>
-    </p:spTree>
-  </p:cSld>
-  <p:clrMapOvr>
-    <a:masterClrMapping/>
-  </p:clrMapOvr>
-</p:sld>
-</file>
-
-<file path=ppt/slides/slide60.xml><?xml version="1.0" encoding="utf-8"?>
-<p:sld xmlns:a="http://schemas.openxmlformats.org/drawingml/2006/main" xmlns:p="http://schemas.openxmlformats.org/presentationml/2006/main" xmlns:r="http://schemas.openxmlformats.org/officeDocument/2006/relationships">
-  <p:cSld>
-    <p:bg>
-      <p:bgPr>
-        <a:solidFill>
-          <a:schemeClr val="lt2"/>
-        </a:solidFill>
-      </p:bgPr>
-    </p:bg>
-    <p:spTree>
-      <p:nvGrpSpPr>
-        <p:cNvPr id="1" name=""/>
-        <p:cNvGrpSpPr/>
-        <p:nvPr/>
-      </p:nvGrpSpPr>
-      <p:grpSpPr/>
-      <p:sp>
-        <p:nvSpPr>
-          <p:cNvPr id="795" name="Google Shape;795;p60"/>
-          <p:cNvSpPr txBox="1"/>
-          <p:nvPr/>
-        </p:nvSpPr>
-        <p:spPr>
-          <a:xfrm>
-            <a:off x="18692059" y="4674436"/>
-            <a:ext cx="4304330" cy="678198"/>
-          </a:xfrm>
-          <a:prstGeom prst="rect">
-            <a:avLst/>
-          </a:prstGeom>
-          <a:noFill/>
-          <a:ln>
-            <a:noFill/>
-          </a:ln>
-        </p:spPr>
-        <p:txBody>
-          <a:bodyPr anchorCtr="0" anchor="t" bIns="45700" lIns="91425" spcFirstLastPara="1" rIns="91425" wrap="square" tIns="45700">
-            <a:noAutofit/>
-          </a:bodyPr>
-          <a:lstStyle/>
-          <a:p>
-            <a:pPr indent="0" lvl="0" marL="0" marR="0" rtl="0" algn="l">
-              <a:lnSpc>
-                <a:spcPct val="110000"/>
-              </a:lnSpc>
-              <a:spcBef>
-                <a:spcPts val="0"/>
-              </a:spcBef>
-              <a:spcAft>
-                <a:spcPts val="0"/>
-              </a:spcAft>
-              <a:buClr>
-                <a:schemeClr val="dk1"/>
-              </a:buClr>
-              <a:buSzPts val="1600"/>
-              <a:buFont typeface="Arial"/>
-              <a:buNone/>
-            </a:pPr>
-            <a:r>
-              <a:t/>
-            </a:r>
-            <a:endParaRPr sz="1600">
-              <a:solidFill>
-                <a:schemeClr val="dk1"/>
-              </a:solidFill>
-              <a:latin typeface="Arial"/>
-              <a:ea typeface="Arial"/>
-              <a:cs typeface="Arial"/>
-              <a:sym typeface="Arial"/>
-            </a:endParaRPr>
-          </a:p>
-        </p:txBody>
-      </p:sp>
-      <p:pic>
-        <p:nvPicPr>
-          <p:cNvPr id="797" name="Google Shape;797;p60"/>
-          <p:cNvPicPr preferRelativeResize="0"/>
-          <p:nvPr/>
-        </p:nvPicPr>
-        <p:blipFill rotWithShape="1">
-          <a:blip r:embed="rId3">
-            <a:alphaModFix/>
-          </a:blip>
-          <a:srcRect b="0" l="0" r="0" t="0"/>
-          <a:stretch/>
-        </p:blipFill>
-        <p:spPr>
-          <a:xfrm>
-            <a:off x="669096" y="2601017"/>
-            <a:ext cx="450850" cy="450850"/>
-          </a:xfrm>
-          <a:prstGeom prst="rect">
-            <a:avLst/>
-          </a:prstGeom>
-          <a:noFill/>
-          <a:ln>
-            <a:noFill/>
-          </a:ln>
-        </p:spPr>
-      </p:pic>
-      <p:pic>
-        <p:nvPicPr>
-          <p:cNvPr id="798" name="Google Shape;798;p60"/>
-          <p:cNvPicPr preferRelativeResize="0"/>
-          <p:nvPr/>
-        </p:nvPicPr>
-        <p:blipFill rotWithShape="1">
-          <a:blip r:embed="rId4">
-            <a:alphaModFix/>
-          </a:blip>
-          <a:srcRect b="0" l="0" r="0" t="0"/>
-          <a:stretch/>
-        </p:blipFill>
-        <p:spPr>
-          <a:xfrm>
-            <a:off x="8097007" y="2603210"/>
-            <a:ext cx="450851" cy="450851"/>
-          </a:xfrm>
-          <a:prstGeom prst="rect">
-            <a:avLst/>
-          </a:prstGeom>
-          <a:noFill/>
-          <a:ln>
-            <a:noFill/>
-          </a:ln>
-        </p:spPr>
-      </p:pic>
-      <p:pic>
-        <p:nvPicPr>
-          <p:cNvPr id="799" name="Google Shape;799;p60"/>
-          <p:cNvPicPr preferRelativeResize="0"/>
-          <p:nvPr/>
-        </p:nvPicPr>
-        <p:blipFill rotWithShape="1">
-          <a:blip r:embed="rId5">
-            <a:alphaModFix/>
-          </a:blip>
-          <a:srcRect b="0" l="0" r="0" t="0"/>
-          <a:stretch/>
-        </p:blipFill>
-        <p:spPr>
-          <a:xfrm>
-            <a:off x="4383052" y="2601017"/>
-            <a:ext cx="450850" cy="450850"/>
-          </a:xfrm>
-          <a:prstGeom prst="rect">
-            <a:avLst/>
-          </a:prstGeom>
-          <a:noFill/>
-          <a:ln>
-            <a:noFill/>
-          </a:ln>
-        </p:spPr>
-      </p:pic>
-      <p:sp>
-        <p:nvSpPr>
-          <p:cNvPr id="800" name="title"/>
-          <p:cNvSpPr txBox="1"/>
-          <p:nvPr/>
-        </p:nvSpPr>
-        <p:spPr>
-          <a:xfrm>
-            <a:off x="677387" y="692177"/>
-            <a:ext cx="10855878" cy="1447800"/>
-          </a:xfrm>
-          <a:prstGeom prst="rect">
-            <a:avLst/>
-          </a:prstGeom>
-          <a:noFill/>
-        </p:spPr>
-        <p:txBody>
-          <a:bodyPr wrap="square" lIns="76200" rIns="76200" tIns="50800" bIns="50800">
-            <a:spAutoFit/>
-          </a:bodyPr>
-          <a:lstStyle/>
-          <a:p>
-            <a:pPr algn="l">
-              <a:spcAft>
-                <a:spcPts val="300"/>
-              </a:spcAft>
-              <a:defRPr sz="4000">
-                <a:solidFill>
-                  <a:srgbClr val="000000"/>
-                </a:solidFill>
-                <a:latin typeface="Arial"/>
-                <a:ea typeface="Arial"/>
-                <a:cs typeface="Arial"/>
-              </a:defRPr>
-            </a:pPr>
-            <a:r>
-              <a:rPr sz="4000">
-                <a:solidFill>
-                  <a:srgbClr val="000000"/>
-                </a:solidFill>
-                <a:latin typeface="Arial"/>
-                <a:ea typeface="Arial"/>
-                <a:cs typeface="Arial"/>
-              </a:rPr>
-              <a:t>Ресурсы и сроки: инфраструктура и стоимость</a:t>
-            </a:r>
-          </a:p>
-        </p:txBody>
-      </p:sp>
-      <p:sp>
-        <p:nvSpPr>
-          <p:cNvPr id="801" name="card_0"/>
-          <p:cNvSpPr txBox="1"/>
-          <p:nvPr/>
-        </p:nvSpPr>
-        <p:spPr>
-          <a:xfrm>
-            <a:off x="806889" y="3427872"/>
-            <a:ext cx="2583926" cy="937548"/>
-          </a:xfrm>
-          <a:prstGeom prst="rect">
-            <a:avLst/>
-          </a:prstGeom>
-          <a:noFill/>
-        </p:spPr>
-        <p:txBody>
-          <a:bodyPr wrap="square" lIns="76200" rIns="76200" tIns="50800" bIns="50800">
-            <a:spAutoFit/>
-          </a:bodyPr>
-          <a:lstStyle/>
-          <a:p>
-            <a:pPr algn="l">
-              <a:spcAft>
-                <a:spcPts val="300"/>
-              </a:spcAft>
-              <a:defRPr sz="1800" b="0">
-                <a:solidFill>
-                  <a:srgbClr val="000000"/>
-                </a:solidFill>
-                <a:latin typeface="Play"/>
-                <a:ea typeface="Play"/>
-                <a:cs typeface="Play"/>
-              </a:defRPr>
-            </a:pPr>
-            <a:r>
-              <a:rPr sz="1800" b="0">
-                <a:solidFill>
-                  <a:srgbClr val="000000"/>
-                </a:solidFill>
-                <a:latin typeface="Play"/>
-                <a:ea typeface="Play"/>
-                <a:cs typeface="Play"/>
-              </a:rPr>
-              <a:t>Сервис работает на 2 vCPU / 2 GB RAM</a:t>
-            </a:r>
-          </a:p>
-        </p:txBody>
-      </p:sp>
-      <p:sp>
-        <p:nvSpPr>
-          <p:cNvPr id="802" name="card_1"/>
-          <p:cNvSpPr txBox="1"/>
-          <p:nvPr/>
-        </p:nvSpPr>
-        <p:spPr>
-          <a:xfrm>
-            <a:off x="4533496" y="3421494"/>
-            <a:ext cx="2583926" cy="937548"/>
-          </a:xfrm>
-          <a:prstGeom prst="rect">
-            <a:avLst/>
-          </a:prstGeom>
-          <a:noFill/>
-        </p:spPr>
-        <p:txBody>
-          <a:bodyPr wrap="square" lIns="76200" rIns="76200" tIns="50800" bIns="50800">
-            <a:spAutoFit/>
-          </a:bodyPr>
-          <a:lstStyle/>
-          <a:p>
-            <a:pPr algn="l">
-              <a:spcAft>
-                <a:spcPts val="300"/>
-              </a:spcAft>
-              <a:defRPr sz="1600" b="0">
-                <a:solidFill>
-                  <a:srgbClr val="000000"/>
-                </a:solidFill>
-                <a:latin typeface="Play"/>
-                <a:ea typeface="Play"/>
-                <a:cs typeface="Play"/>
-              </a:defRPr>
-            </a:pPr>
-            <a:r>
-              <a:rPr sz="1600" b="0">
-                <a:solidFill>
-                  <a:srgbClr val="000000"/>
-                </a:solidFill>
-                <a:latin typeface="Play"/>
-                <a:ea typeface="Play"/>
-                <a:cs typeface="Play"/>
-              </a:rPr>
-              <a:t>Модель gpt-oss-20b, инференс 1400 руб за 6 недель</a:t>
-            </a:r>
-          </a:p>
-        </p:txBody>
-      </p:sp>
-      <p:sp>
-        <p:nvSpPr>
-          <p:cNvPr id="803" name="card_2"/>
-          <p:cNvSpPr txBox="1"/>
-          <p:nvPr/>
-        </p:nvSpPr>
-        <p:spPr>
-          <a:xfrm>
-            <a:off x="8264469" y="3425860"/>
-            <a:ext cx="2575194" cy="1160137"/>
-          </a:xfrm>
-          <a:prstGeom prst="rect">
-            <a:avLst/>
-          </a:prstGeom>
-          <a:noFill/>
-        </p:spPr>
-        <p:txBody>
-          <a:bodyPr wrap="square" lIns="76200" rIns="76200" tIns="50800" bIns="50800">
-            <a:spAutoFit/>
-          </a:bodyPr>
-          <a:lstStyle/>
-          <a:p>
-            <a:pPr algn="l">
-              <a:spcAft>
-                <a:spcPts val="300"/>
-              </a:spcAft>
-              <a:defRPr sz="1800" b="0">
-                <a:solidFill>
-                  <a:srgbClr val="000000"/>
-                </a:solidFill>
-                <a:latin typeface="Play"/>
-                <a:ea typeface="Play"/>
-                <a:cs typeface="Play"/>
-              </a:defRPr>
-            </a:pPr>
-            <a:r>
-              <a:rPr sz="1800" b="0">
-                <a:solidFill>
-                  <a:srgbClr val="000000"/>
-                </a:solidFill>
-                <a:latin typeface="Play"/>
-                <a:ea typeface="Play"/>
-                <a:cs typeface="Play"/>
-              </a:rPr>
-              <a:t>Параллельность до 20 задач без очереди</a:t>
-            </a:r>
-          </a:p>
-        </p:txBody>
-      </p:sp>
-    </p:spTree>
-  </p:cSld>
-  <p:clrMapOvr>
-    <a:masterClrMapping/>
-  </p:clrMapOvr>
-</p:sld>
-</file>
-
-<file path=ppt/slides/slide61.xml><?xml version="1.0" encoding="utf-8"?>
-<p:sld xmlns:a="http://schemas.openxmlformats.org/drawingml/2006/main" xmlns:p="http://schemas.openxmlformats.org/presentationml/2006/main" xmlns:r="http://schemas.openxmlformats.org/officeDocument/2006/relationships">
-  <p:cSld>
-    <p:spTree>
-      <p:nvGrpSpPr>
-        <p:cNvPr id="1" name=""/>
-        <p:cNvGrpSpPr/>
-        <p:nvPr/>
-      </p:nvGrpSpPr>
-      <p:grpSpPr/>
-      <p:cxnSp>
-        <p:nvCxnSpPr>
-          <p:cNvPr id="986" name="Google Shape;986;p76"/>
-          <p:cNvCxnSpPr/>
-          <p:nvPr/>
-        </p:nvCxnSpPr>
-        <p:spPr>
-          <a:xfrm rot="10800000">
-            <a:off x="-42658" y="3591512"/>
-            <a:ext cx="12234658" cy="0"/>
-          </a:xfrm>
-          <a:prstGeom prst="straightConnector1">
-            <a:avLst/>
-          </a:prstGeom>
-          <a:noFill/>
-          <a:ln cap="flat" cmpd="sng" w="12700">
-            <a:solidFill>
-              <a:srgbClr val="E1E1E2"/>
-            </a:solidFill>
-            <a:prstDash val="solid"/>
-            <a:miter lim="8000"/>
-            <a:headEnd len="sm" w="sm" type="none"/>
-            <a:tailEnd len="sm" w="sm" type="none"/>
-          </a:ln>
-        </p:spPr>
-      </p:cxnSp>
-      <p:sp>
-        <p:nvSpPr>
-          <p:cNvPr id="987" name="title"/>
-          <p:cNvSpPr txBox="1"/>
-          <p:nvPr/>
-        </p:nvSpPr>
-        <p:spPr>
-          <a:xfrm>
-            <a:off x="677387" y="692177"/>
-            <a:ext cx="10855878" cy="1447800"/>
-          </a:xfrm>
-          <a:prstGeom prst="rect">
-            <a:avLst/>
-          </a:prstGeom>
-          <a:noFill/>
-        </p:spPr>
-        <p:txBody>
-          <a:bodyPr wrap="square" lIns="76200" rIns="76200" tIns="50800" bIns="50800">
-            <a:spAutoFit/>
-          </a:bodyPr>
-          <a:lstStyle/>
-          <a:p>
-            <a:pPr algn="l">
-              <a:spcAft>
-                <a:spcPts val="300"/>
-              </a:spcAft>
-              <a:defRPr sz="4000">
-                <a:solidFill>
-                  <a:srgbClr val="000000"/>
-                </a:solidFill>
-                <a:latin typeface="Arial"/>
-                <a:ea typeface="Arial"/>
-                <a:cs typeface="Arial"/>
-              </a:defRPr>
-            </a:pPr>
-            <a:r>
-              <a:rPr sz="4000">
-                <a:solidFill>
-                  <a:srgbClr val="000000"/>
-                </a:solidFill>
-                <a:latin typeface="Arial"/>
-                <a:ea typeface="Arial"/>
-                <a:cs typeface="Arial"/>
-              </a:rPr>
-              <a:t>Пилотный план: 6 недель, 2 команды, 68 колод</a:t>
-            </a:r>
-          </a:p>
-        </p:txBody>
-      </p:sp>
-      <p:sp>
-        <p:nvSpPr>
-          <p:cNvPr id="988" name="body"/>
-          <p:cNvSpPr txBox="1"/>
-          <p:nvPr/>
-        </p:nvSpPr>
-        <p:spPr>
-          <a:xfrm>
-            <a:off x="677387" y="3591534"/>
-            <a:ext cx="10855878" cy="702310"/>
-          </a:xfrm>
-          <a:prstGeom prst="rect">
-            <a:avLst/>
-          </a:prstGeom>
-          <a:noFill/>
-        </p:spPr>
-        <p:txBody>
-          <a:bodyPr wrap="square" lIns="76200" rIns="76200" tIns="50800" bIns="50800">
-            <a:spAutoFit/>
-          </a:bodyPr>
-          <a:lstStyle/>
-          <a:p>
-            <a:pPr algn="l">
-              <a:spcAft>
-                <a:spcPts val="300"/>
-              </a:spcAft>
-              <a:defRPr sz="1200">
-                <a:solidFill>
-                  <a:srgbClr val="000000"/>
-                </a:solidFill>
-                <a:latin typeface="Play"/>
-                <a:ea typeface="Play"/>
-                <a:cs typeface="Play"/>
-              </a:defRPr>
-            </a:pPr>
-            <a:r>
-              <a:rPr sz="1200">
-                <a:solidFill>
-                  <a:srgbClr val="000000"/>
-                </a:solidFill>
-                <a:latin typeface="Play"/>
-                <a:ea typeface="Play"/>
-                <a:cs typeface="Play"/>
-              </a:rPr>
-              <a:t>• Пилот 6 недель, 2 команды, 68 презентаций</a:t>
-            </a:r>
-          </a:p>
-          <a:p>
-            <a:pPr algn="l">
-              <a:spcAft>
-                <a:spcPts val="300"/>
-              </a:spcAft>
-              <a:defRPr sz="1200">
-                <a:solidFill>
-                  <a:srgbClr val="000000"/>
-                </a:solidFill>
-                <a:latin typeface="Play"/>
-                <a:ea typeface="Play"/>
-                <a:cs typeface="Play"/>
-              </a:defRPr>
-            </a:pPr>
-            <a:r>
-              <a:rPr sz="1200">
-                <a:solidFill>
-                  <a:srgbClr val="000000"/>
-                </a:solidFill>
-                <a:latin typeface="Play"/>
-                <a:ea typeface="Play"/>
-                <a:cs typeface="Play"/>
-              </a:rPr>
-              <a:t>• Дизайнеры закрыли 38 запросов вместо 11</a:t>
-            </a:r>
-          </a:p>
-          <a:p>
-            <a:pPr algn="l">
-              <a:spcAft>
-                <a:spcPts val="300"/>
-              </a:spcAft>
-              <a:defRPr sz="1200">
-                <a:solidFill>
-                  <a:srgbClr val="000000"/>
-                </a:solidFill>
-                <a:latin typeface="Play"/>
-                <a:ea typeface="Play"/>
-                <a:cs typeface="Play"/>
-              </a:defRPr>
-            </a:pPr>
-            <a:r>
-              <a:rPr sz="1200">
-                <a:solidFill>
-                  <a:srgbClr val="000000"/>
-                </a:solidFill>
-                <a:latin typeface="Play"/>
-                <a:ea typeface="Play"/>
-                <a:cs typeface="Play"/>
-              </a:rPr>
-              <a:t>• План расширения: 4 команды в 3-м квартале</a:t>
-            </a:r>
-          </a:p>
-        </p:txBody>
-      </p:sp>
-      <p:sp>
-        <p:nvSpPr>
-          <p:cNvPr id="989" name="Rectangle 988"/>
-          <p:cNvSpPr/>
-          <p:nvPr/>
-        </p:nvSpPr>
-        <p:spPr>
-          <a:xfrm>
-            <a:off x="677387" y="4532459"/>
-            <a:ext cx="10855878" cy="17445"/>
-          </a:xfrm>
-          <a:prstGeom prst="rect">
-            <a:avLst/>
-          </a:prstGeom>
-          <a:solidFill>
-            <a:srgbClr val="0077FF"/>
-          </a:solidFill>
-          <a:ln>
-            <a:noFill/>
-          </a:ln>
-        </p:spPr>
-        <p:style>
-          <a:lnRef idx="1">
-            <a:schemeClr val="accent1"/>
-          </a:lnRef>
-          <a:fillRef idx="3">
-            <a:schemeClr val="accent1"/>
-          </a:fillRef>
-          <a:effectRef idx="2">
-            <a:schemeClr val="accent1"/>
-          </a:effectRef>
-          <a:fontRef idx="minor">
-            <a:schemeClr val="lt1"/>
-          </a:fontRef>
-        </p:style>
-        <p:txBody>
-          <a:bodyPr rtlCol="0" anchor="ctr"/>
-          <a:lstStyle/>
-          <a:p>
-            <a:pPr algn="ctr"/>
-          </a:p>
-        </p:txBody>
-      </p:sp>
-      <p:sp>
-        <p:nvSpPr>
-          <p:cNvPr id="990" name="Oval 989"/>
-          <p:cNvSpPr/>
-          <p:nvPr/>
-        </p:nvSpPr>
-        <p:spPr>
-          <a:xfrm>
-            <a:off x="2422733" y="4477215"/>
-            <a:ext cx="127933" cy="127933"/>
-          </a:xfrm>
-          <a:prstGeom prst="ellipse">
-            <a:avLst/>
-          </a:prstGeom>
-          <a:solidFill>
-            <a:srgbClr val="0077FF"/>
-          </a:solidFill>
-          <a:ln>
-            <a:noFill/>
-          </a:ln>
-        </p:spPr>
-        <p:style>
-          <a:lnRef idx="1">
-            <a:schemeClr val="accent1"/>
-          </a:lnRef>
-          <a:fillRef idx="3">
-            <a:schemeClr val="accent1"/>
-          </a:fillRef>
-          <a:effectRef idx="2">
-            <a:schemeClr val="accent1"/>
-          </a:effectRef>
-          <a:fontRef idx="minor">
-            <a:schemeClr val="lt1"/>
-          </a:fontRef>
-        </p:style>
-        <p:txBody>
-          <a:bodyPr rtlCol="0" anchor="ctr"/>
-          <a:lstStyle/>
-          <a:p>
-            <a:pPr algn="ctr"/>
-          </a:p>
-        </p:txBody>
-      </p:sp>
-      <p:sp>
-        <p:nvSpPr>
-          <p:cNvPr id="991" name="TextBox 990"/>
-          <p:cNvSpPr txBox="1"/>
-          <p:nvPr/>
-        </p:nvSpPr>
-        <p:spPr>
-          <a:xfrm>
-            <a:off x="677387" y="4264962"/>
-            <a:ext cx="5427939" cy="220976"/>
-          </a:xfrm>
-          <a:prstGeom prst="rect">
-            <a:avLst/>
-          </a:prstGeom>
-          <a:noFill/>
-        </p:spPr>
-        <p:txBody>
-          <a:bodyPr wrap="square" lIns="12700" rIns="12700" tIns="12700" bIns="12700">
-            <a:spAutoFit/>
-          </a:bodyPr>
-          <a:lstStyle/>
-          <a:p>
-            <a:pPr algn="ctr">
-              <a:defRPr sz="1400" b="0">
-                <a:solidFill>
-                  <a:srgbClr val="000000"/>
-                </a:solidFill>
-                <a:latin typeface="Play"/>
-                <a:ea typeface="Play"/>
-                <a:cs typeface="Play"/>
-              </a:defRPr>
-            </a:pPr>
-            <a:r>
-              <a:rPr sz="1400" b="0">
-                <a:solidFill>
-                  <a:srgbClr val="000000"/>
-                </a:solidFill>
-                <a:latin typeface="Play"/>
-                <a:ea typeface="Play"/>
-                <a:cs typeface="Play"/>
-              </a:rPr>
-              <a:t>Третий квартал 2026</a:t>
-            </a:r>
-          </a:p>
-        </p:txBody>
-      </p:sp>
-      <p:sp>
-        <p:nvSpPr>
-          <p:cNvPr id="992" name="Oval 991"/>
-          <p:cNvSpPr/>
-          <p:nvPr/>
-        </p:nvSpPr>
-        <p:spPr>
-          <a:xfrm>
-            <a:off x="6041359" y="4477215"/>
-            <a:ext cx="127933" cy="127933"/>
-          </a:xfrm>
-          <a:prstGeom prst="ellipse">
-            <a:avLst/>
-          </a:prstGeom>
-          <a:solidFill>
-            <a:srgbClr val="0077FF"/>
-          </a:solidFill>
-          <a:ln>
-            <a:noFill/>
-          </a:ln>
-        </p:spPr>
-        <p:style>
-          <a:lnRef idx="1">
-            <a:schemeClr val="accent1"/>
-          </a:lnRef>
-          <a:fillRef idx="3">
-            <a:schemeClr val="accent1"/>
-          </a:fillRef>
-          <a:effectRef idx="2">
-            <a:schemeClr val="accent1"/>
-          </a:effectRef>
-          <a:fontRef idx="minor">
-            <a:schemeClr val="lt1"/>
-          </a:fontRef>
-        </p:style>
-        <p:txBody>
-          <a:bodyPr rtlCol="0" anchor="ctr"/>
-          <a:lstStyle/>
-          <a:p>
-            <a:pPr algn="ctr"/>
-          </a:p>
-        </p:txBody>
-      </p:sp>
-      <p:sp>
-        <p:nvSpPr>
-          <p:cNvPr id="993" name="TextBox 992"/>
-          <p:cNvSpPr txBox="1"/>
-          <p:nvPr/>
-        </p:nvSpPr>
-        <p:spPr>
-          <a:xfrm>
-            <a:off x="3391356" y="4660393"/>
-            <a:ext cx="5427939" cy="220976"/>
-          </a:xfrm>
-          <a:prstGeom prst="rect">
-            <a:avLst/>
-          </a:prstGeom>
-          <a:noFill/>
-        </p:spPr>
-        <p:txBody>
-          <a:bodyPr wrap="square" lIns="12700" rIns="12700" tIns="12700" bIns="12700">
-            <a:spAutoFit/>
-          </a:bodyPr>
-          <a:lstStyle/>
-          <a:p>
-            <a:pPr algn="ctr">
-              <a:defRPr sz="1400" b="0">
-                <a:solidFill>
-                  <a:srgbClr val="000000"/>
-                </a:solidFill>
-                <a:latin typeface="Play"/>
-                <a:ea typeface="Play"/>
-                <a:cs typeface="Play"/>
-              </a:defRPr>
-            </a:pPr>
-            <a:r>
-              <a:rPr sz="1400" b="0">
-                <a:solidFill>
-                  <a:srgbClr val="000000"/>
-                </a:solidFill>
-                <a:latin typeface="Play"/>
-                <a:ea typeface="Play"/>
-                <a:cs typeface="Play"/>
-              </a:rPr>
-              <a:t>Четвёртый квартал 2026</a:t>
-            </a:r>
-          </a:p>
-        </p:txBody>
-      </p:sp>
-      <p:sp>
-        <p:nvSpPr>
-          <p:cNvPr id="994" name="Oval 993"/>
-          <p:cNvSpPr/>
-          <p:nvPr/>
-        </p:nvSpPr>
-        <p:spPr>
-          <a:xfrm>
-            <a:off x="9659985" y="4477215"/>
-            <a:ext cx="127933" cy="127933"/>
-          </a:xfrm>
-          <a:prstGeom prst="ellipse">
-            <a:avLst/>
-          </a:prstGeom>
-          <a:solidFill>
-            <a:srgbClr val="0077FF"/>
-          </a:solidFill>
-          <a:ln>
-            <a:noFill/>
-          </a:ln>
-        </p:spPr>
-        <p:style>
-          <a:lnRef idx="1">
-            <a:schemeClr val="accent1"/>
-          </a:lnRef>
-          <a:fillRef idx="3">
-            <a:schemeClr val="accent1"/>
-          </a:fillRef>
-          <a:effectRef idx="2">
-            <a:schemeClr val="accent1"/>
-          </a:effectRef>
-          <a:fontRef idx="minor">
-            <a:schemeClr val="lt1"/>
-          </a:fontRef>
-        </p:style>
-        <p:txBody>
-          <a:bodyPr rtlCol="0" anchor="ctr"/>
-          <a:lstStyle/>
-          <a:p>
-            <a:pPr algn="ctr"/>
-          </a:p>
-        </p:txBody>
-      </p:sp>
-      <p:sp>
-        <p:nvSpPr>
-          <p:cNvPr id="995" name="TextBox 994"/>
-          <p:cNvSpPr txBox="1"/>
-          <p:nvPr/>
-        </p:nvSpPr>
-        <p:spPr>
-          <a:xfrm>
-            <a:off x="6105326" y="4264962"/>
-            <a:ext cx="5427939" cy="220976"/>
-          </a:xfrm>
-          <a:prstGeom prst="rect">
-            <a:avLst/>
-          </a:prstGeom>
-          <a:noFill/>
-        </p:spPr>
-        <p:txBody>
-          <a:bodyPr wrap="square" lIns="12700" rIns="12700" tIns="12700" bIns="12700">
-            <a:spAutoFit/>
-          </a:bodyPr>
-          <a:lstStyle/>
-          <a:p>
-            <a:pPr algn="ctr">
-              <a:defRPr sz="1400" b="0">
-                <a:solidFill>
-                  <a:srgbClr val="000000"/>
-                </a:solidFill>
-                <a:latin typeface="Play"/>
-                <a:ea typeface="Play"/>
-                <a:cs typeface="Play"/>
-              </a:defRPr>
-            </a:pPr>
-            <a:r>
-              <a:rPr sz="1400" b="0">
-                <a:solidFill>
-                  <a:srgbClr val="000000"/>
-                </a:solidFill>
-                <a:latin typeface="Play"/>
-                <a:ea typeface="Play"/>
-                <a:cs typeface="Play"/>
-              </a:rPr>
-              <a:t>Первый квартал 2027</a:t>
-            </a:r>
-          </a:p>
-        </p:txBody>
-      </p:sp>
-    </p:spTree>
-  </p:cSld>
-  <p:clrMapOvr>
-    <a:masterClrMapping/>
-  </p:clrMapOvr>
-</p:sld>
-</file>
-
-<file path=ppt/slides/slide62.xml><?xml version="1.0" encoding="utf-8"?>
-<p:sld xmlns:a="http://schemas.openxmlformats.org/drawingml/2006/main" xmlns:p="http://schemas.openxmlformats.org/presentationml/2006/main" xmlns:r="http://schemas.openxmlformats.org/officeDocument/2006/relationships">
-  <p:cSld>
-    <p:bg>
-      <p:bgPr>
-        <a:solidFill>
-          <a:schemeClr val="lt2"/>
-        </a:solidFill>
-      </p:bgPr>
-    </p:bg>
-    <p:spTree>
-      <p:nvGrpSpPr>
-        <p:cNvPr id="1" name=""/>
-        <p:cNvGrpSpPr/>
-        <p:nvPr/>
-      </p:nvGrpSpPr>
-      <p:grpSpPr/>
-      <p:pic>
-        <p:nvPicPr>
-          <p:cNvPr id="762" name="Google Shape;762;p58"/>
-          <p:cNvPicPr preferRelativeResize="0"/>
-          <p:nvPr/>
-        </p:nvPicPr>
-        <p:blipFill rotWithShape="1">
-          <a:blip r:embed="rId2">
-            <a:alphaModFix/>
-          </a:blip>
-          <a:srcRect b="0" l="0" r="0" t="0"/>
-          <a:stretch/>
-        </p:blipFill>
-        <p:spPr>
-          <a:xfrm>
-            <a:off x="8105070" y="2562300"/>
-            <a:ext cx="866700" cy="866700"/>
-          </a:xfrm>
-          <a:prstGeom prst="rect">
-            <a:avLst/>
-          </a:prstGeom>
-          <a:noFill/>
-          <a:ln>
-            <a:noFill/>
-          </a:ln>
-        </p:spPr>
-      </p:pic>
-      <p:sp>
-        <p:nvSpPr>
-          <p:cNvPr id="764" name="Google Shape;764;p58"/>
-          <p:cNvSpPr txBox="1"/>
-          <p:nvPr/>
-        </p:nvSpPr>
-        <p:spPr>
-          <a:xfrm>
-            <a:off x="18692059" y="4674436"/>
-            <a:ext cx="4304330" cy="678198"/>
-          </a:xfrm>
-          <a:prstGeom prst="rect">
-            <a:avLst/>
-          </a:prstGeom>
-          <a:noFill/>
-          <a:ln>
-            <a:noFill/>
-          </a:ln>
-        </p:spPr>
-        <p:txBody>
-          <a:bodyPr anchorCtr="0" anchor="t" bIns="45700" lIns="91425" spcFirstLastPara="1" rIns="91425" wrap="square" tIns="45700">
-            <a:noAutofit/>
-          </a:bodyPr>
-          <a:lstStyle/>
-          <a:p>
-            <a:pPr indent="0" lvl="0" marL="0" marR="0" rtl="0" algn="l">
-              <a:lnSpc>
-                <a:spcPct val="110000"/>
-              </a:lnSpc>
-              <a:spcBef>
-                <a:spcPts val="0"/>
-              </a:spcBef>
-              <a:spcAft>
-                <a:spcPts val="0"/>
-              </a:spcAft>
-              <a:buClr>
-                <a:schemeClr val="dk1"/>
-              </a:buClr>
-              <a:buSzPts val="1600"/>
-              <a:buFont typeface="Arial"/>
-              <a:buNone/>
-            </a:pPr>
-            <a:r>
-              <a:t/>
-            </a:r>
-            <a:endParaRPr sz="1600">
-              <a:solidFill>
-                <a:schemeClr val="dk1"/>
-              </a:solidFill>
-              <a:latin typeface="Arial"/>
-              <a:ea typeface="Arial"/>
-              <a:cs typeface="Arial"/>
-              <a:sym typeface="Arial"/>
-            </a:endParaRPr>
-          </a:p>
-        </p:txBody>
-      </p:sp>
-      <p:sp>
-        <p:nvSpPr>
-          <p:cNvPr id="768" name="Google Shape;768;p58"/>
-          <p:cNvSpPr/>
-          <p:nvPr/>
-        </p:nvSpPr>
-        <p:spPr>
-          <a:xfrm>
-            <a:off x="671513" y="2562300"/>
-            <a:ext cx="866700" cy="866700"/>
-          </a:xfrm>
-          <a:prstGeom prst="ellipse">
-            <a:avLst/>
-          </a:prstGeom>
-          <a:solidFill>
-            <a:schemeClr val="accent1"/>
-          </a:solidFill>
-          <a:ln>
-            <a:noFill/>
-          </a:ln>
-        </p:spPr>
-        <p:txBody>
-          <a:bodyPr anchorCtr="0" anchor="ctr" bIns="45700" lIns="91425" spcFirstLastPara="1" rIns="91425" wrap="square" tIns="45700">
-            <a:noAutofit/>
-          </a:bodyPr>
-          <a:lstStyle/>
-          <a:p>
-            <a:pPr indent="0" lvl="0" marL="0" marR="0" rtl="0" algn="ctr">
-              <a:spcBef>
-                <a:spcPts val="0"/>
-              </a:spcBef>
-              <a:spcAft>
-                <a:spcPts val="0"/>
-              </a:spcAft>
-              <a:buNone/>
-            </a:pPr>
-            <a:r>
-              <a:t/>
-            </a:r>
-            <a:endParaRPr sz="3200">
-              <a:solidFill>
-                <a:schemeClr val="lt1"/>
-              </a:solidFill>
-              <a:latin typeface="Play"/>
-              <a:ea typeface="Play"/>
-              <a:cs typeface="Play"/>
-              <a:sym typeface="Play"/>
-            </a:endParaRPr>
-          </a:p>
-        </p:txBody>
-      </p:sp>
-      <p:pic>
-        <p:nvPicPr>
-          <p:cNvPr id="769" name="Google Shape;769;p58"/>
-          <p:cNvPicPr preferRelativeResize="0"/>
-          <p:nvPr/>
-        </p:nvPicPr>
-        <p:blipFill rotWithShape="1">
-          <a:blip r:embed="rId3">
-            <a:alphaModFix/>
-          </a:blip>
-          <a:srcRect b="0" l="0" r="0" t="0"/>
-          <a:stretch/>
-        </p:blipFill>
-        <p:spPr>
-          <a:xfrm>
-            <a:off x="879438" y="2770225"/>
-            <a:ext cx="450850" cy="450850"/>
-          </a:xfrm>
-          <a:prstGeom prst="rect">
-            <a:avLst/>
-          </a:prstGeom>
-          <a:noFill/>
-          <a:ln>
-            <a:noFill/>
-          </a:ln>
-        </p:spPr>
-      </p:pic>
-      <p:pic>
-        <p:nvPicPr>
-          <p:cNvPr id="770" name="Google Shape;770;p58"/>
-          <p:cNvPicPr preferRelativeResize="0"/>
-          <p:nvPr/>
-        </p:nvPicPr>
-        <p:blipFill rotWithShape="1">
-          <a:blip r:embed="rId4">
-            <a:alphaModFix/>
-          </a:blip>
-          <a:srcRect b="0" l="0" r="0" t="0"/>
-          <a:stretch/>
-        </p:blipFill>
-        <p:spPr>
-          <a:xfrm>
-            <a:off x="8307349" y="2772418"/>
-            <a:ext cx="450851" cy="450851"/>
-          </a:xfrm>
-          <a:prstGeom prst="rect">
-            <a:avLst/>
-          </a:prstGeom>
-          <a:noFill/>
-          <a:ln>
-            <a:noFill/>
-          </a:ln>
-        </p:spPr>
-      </p:pic>
-      <p:pic>
-        <p:nvPicPr>
-          <p:cNvPr id="771" name="Google Shape;771;p58"/>
-          <p:cNvPicPr preferRelativeResize="0"/>
-          <p:nvPr/>
-        </p:nvPicPr>
-        <p:blipFill rotWithShape="1">
-          <a:blip r:embed="rId5">
-            <a:alphaModFix/>
-          </a:blip>
-          <a:srcRect b="0" l="0" r="0" t="0"/>
-          <a:stretch/>
-        </p:blipFill>
-        <p:spPr>
-          <a:xfrm>
-            <a:off x="4385469" y="2562300"/>
-            <a:ext cx="866700" cy="866700"/>
-          </a:xfrm>
-          <a:prstGeom prst="rect">
-            <a:avLst/>
-          </a:prstGeom>
-          <a:noFill/>
-          <a:ln>
-            <a:noFill/>
-          </a:ln>
-        </p:spPr>
-      </p:pic>
-      <p:pic>
-        <p:nvPicPr>
-          <p:cNvPr id="772" name="Google Shape;772;p58"/>
-          <p:cNvPicPr preferRelativeResize="0"/>
-          <p:nvPr/>
-        </p:nvPicPr>
-        <p:blipFill rotWithShape="1">
-          <a:blip r:embed="rId6">
-            <a:alphaModFix/>
-          </a:blip>
-          <a:srcRect b="0" l="0" r="0" t="0"/>
-          <a:stretch/>
-        </p:blipFill>
-        <p:spPr>
-          <a:xfrm>
-            <a:off x="4593394" y="2770225"/>
-            <a:ext cx="450850" cy="450850"/>
-          </a:xfrm>
-          <a:prstGeom prst="rect">
-            <a:avLst/>
-          </a:prstGeom>
-          <a:noFill/>
-          <a:ln>
-            <a:noFill/>
-          </a:ln>
-        </p:spPr>
-      </p:pic>
-      <p:sp>
-        <p:nvSpPr>
-          <p:cNvPr id="773" name="title"/>
-          <p:cNvSpPr txBox="1"/>
-          <p:nvPr/>
-        </p:nvSpPr>
-        <p:spPr>
-          <a:xfrm>
-            <a:off x="677387" y="692177"/>
-            <a:ext cx="10855878" cy="1447800"/>
-          </a:xfrm>
-          <a:prstGeom prst="rect">
-            <a:avLst/>
-          </a:prstGeom>
-          <a:noFill/>
-        </p:spPr>
-        <p:txBody>
-          <a:bodyPr wrap="square" lIns="76200" rIns="76200" tIns="50800" bIns="50800">
-            <a:spAutoFit/>
-          </a:bodyPr>
-          <a:lstStyle/>
-          <a:p>
-            <a:pPr algn="l">
-              <a:spcAft>
-                <a:spcPts val="300"/>
-              </a:spcAft>
-              <a:defRPr sz="4000">
-                <a:solidFill>
-                  <a:srgbClr val="000000"/>
-                </a:solidFill>
-                <a:latin typeface="Arial"/>
-                <a:ea typeface="Arial"/>
-                <a:cs typeface="Arial"/>
-              </a:defRPr>
-            </a:pPr>
-            <a:r>
-              <a:rPr sz="4000">
-                <a:solidFill>
-                  <a:srgbClr val="000000"/>
-                </a:solidFill>
-                <a:latin typeface="Arial"/>
-                <a:ea typeface="Arial"/>
-                <a:cs typeface="Arial"/>
-              </a:rPr>
-              <a:t>Запрос к руководству: одобрение и интеграцию</a:t>
-            </a:r>
-          </a:p>
-        </p:txBody>
-      </p:sp>
-      <p:sp>
-        <p:nvSpPr>
-          <p:cNvPr id="774" name="card_0"/>
-          <p:cNvSpPr txBox="1"/>
-          <p:nvPr/>
-        </p:nvSpPr>
-        <p:spPr>
-          <a:xfrm>
-            <a:off x="806889" y="3928712"/>
-            <a:ext cx="2583926" cy="937548"/>
-          </a:xfrm>
-          <a:prstGeom prst="rect">
-            <a:avLst/>
-          </a:prstGeom>
-          <a:noFill/>
-        </p:spPr>
-        <p:txBody>
-          <a:bodyPr wrap="square" lIns="76200" rIns="76200" tIns="50800" bIns="50800">
-            <a:spAutoFit/>
-          </a:bodyPr>
-          <a:lstStyle/>
-          <a:p>
-            <a:pPr algn="l">
-              <a:spcAft>
-                <a:spcPts val="300"/>
-              </a:spcAft>
-              <a:defRPr sz="1800" b="0">
-                <a:solidFill>
-                  <a:srgbClr val="000000"/>
-                </a:solidFill>
-                <a:latin typeface="Play"/>
-                <a:ea typeface="Play"/>
-                <a:cs typeface="Play"/>
-              </a:defRPr>
-            </a:pPr>
-            <a:r>
-              <a:rPr sz="1800" b="0">
-                <a:solidFill>
-                  <a:srgbClr val="000000"/>
-                </a:solidFill>
-                <a:latin typeface="Play"/>
-                <a:ea typeface="Play"/>
-                <a:cs typeface="Play"/>
-              </a:rPr>
-              <a:t>Одобрить запуск на всю компанию</a:t>
-            </a:r>
-          </a:p>
-        </p:txBody>
-      </p:sp>
-      <p:sp>
-        <p:nvSpPr>
-          <p:cNvPr id="775" name="card_1"/>
-          <p:cNvSpPr txBox="1"/>
-          <p:nvPr/>
-        </p:nvSpPr>
-        <p:spPr>
-          <a:xfrm>
-            <a:off x="4533496" y="3922334"/>
-            <a:ext cx="2583926" cy="937548"/>
-          </a:xfrm>
-          <a:prstGeom prst="rect">
-            <a:avLst/>
-          </a:prstGeom>
-          <a:noFill/>
-        </p:spPr>
-        <p:txBody>
-          <a:bodyPr wrap="square" lIns="76200" rIns="76200" tIns="50800" bIns="50800">
-            <a:spAutoFit/>
-          </a:bodyPr>
-          <a:lstStyle/>
-          <a:p>
-            <a:pPr algn="l">
-              <a:spcAft>
-                <a:spcPts val="300"/>
-              </a:spcAft>
-              <a:defRPr sz="1800" b="0">
-                <a:solidFill>
-                  <a:srgbClr val="000000"/>
-                </a:solidFill>
-                <a:latin typeface="Play"/>
-                <a:ea typeface="Play"/>
-                <a:cs typeface="Play"/>
-              </a:defRPr>
-            </a:pPr>
-            <a:r>
-              <a:rPr sz="1800" b="0">
-                <a:solidFill>
-                  <a:srgbClr val="000000"/>
-                </a:solidFill>
-                <a:latin typeface="Play"/>
-                <a:ea typeface="Play"/>
-                <a:cs typeface="Play"/>
-              </a:rPr>
-              <a:t>Интеграцию с хранилищем документов</a:t>
-            </a:r>
-          </a:p>
-        </p:txBody>
-      </p:sp>
-      <p:sp>
-        <p:nvSpPr>
-          <p:cNvPr id="776" name="card_2"/>
-          <p:cNvSpPr txBox="1"/>
-          <p:nvPr/>
-        </p:nvSpPr>
-        <p:spPr>
-          <a:xfrm>
-            <a:off x="8264469" y="3926700"/>
-            <a:ext cx="2575194" cy="1160137"/>
-          </a:xfrm>
-          <a:prstGeom prst="rect">
-            <a:avLst/>
-          </a:prstGeom>
-          <a:noFill/>
-        </p:spPr>
-        <p:txBody>
-          <a:bodyPr wrap="square" lIns="76200" rIns="76200" tIns="50800" bIns="50800">
-            <a:spAutoFit/>
-          </a:bodyPr>
-          <a:lstStyle/>
-          <a:p>
-            <a:pPr algn="l">
-              <a:spcAft>
-                <a:spcPts val="300"/>
-              </a:spcAft>
-              <a:defRPr sz="1800" b="0">
-                <a:solidFill>
-                  <a:srgbClr val="000000"/>
-                </a:solidFill>
-                <a:latin typeface="Play"/>
-                <a:ea typeface="Play"/>
-                <a:cs typeface="Play"/>
-              </a:defRPr>
-            </a:pPr>
-            <a:r>
-              <a:rPr sz="1800" b="0">
-                <a:solidFill>
-                  <a:srgbClr val="000000"/>
-                </a:solidFill>
-                <a:latin typeface="Play"/>
-                <a:ea typeface="Play"/>
-                <a:cs typeface="Play"/>
-              </a:rPr>
-              <a:t>Финансирование дальнейшего развития</a:t>
-            </a:r>
-          </a:p>
-        </p:txBody>
-      </p:sp>
-    </p:spTree>
-  </p:cSld>
-  <p:clrMapOvr>
-    <a:masterClrMapping/>
-  </p:clrMapOvr>
-</p:sld>
-</file>
-
-<file path=ppt/slides/slide63.xml><?xml version="1.0" encoding="utf-8"?>
-<p:sld xmlns:a="http://schemas.openxmlformats.org/drawingml/2006/main" xmlns:p="http://schemas.openxmlformats.org/presentationml/2006/main" xmlns:r="http://schemas.openxmlformats.org/officeDocument/2006/relationships">
-  <p:cSld>
-    <p:bg>
-      <p:bgPr>
-        <a:solidFill>
-          <a:schemeClr val="lt2"/>
-        </a:solidFill>
-      </p:bgPr>
-    </p:bg>
-    <p:spTree>
-      <p:nvGrpSpPr>
-        <p:cNvPr id="1" name=""/>
-        <p:cNvGrpSpPr/>
-        <p:nvPr/>
-      </p:nvGrpSpPr>
-      <p:grpSpPr/>
-      <p:sp>
-        <p:nvSpPr>
-          <p:cNvPr id="2" name="title"/>
-          <p:cNvSpPr txBox="1"/>
-          <p:nvPr/>
-        </p:nvSpPr>
-        <p:spPr>
-          <a:xfrm>
-            <a:off x="677387" y="692177"/>
-            <a:ext cx="10855878" cy="1447800"/>
-          </a:xfrm>
-          <a:prstGeom prst="rect">
-            <a:avLst/>
-          </a:prstGeom>
-          <a:noFill/>
-        </p:spPr>
-        <p:txBody>
-          <a:bodyPr wrap="square" lIns="76200" rIns="76200" tIns="50800" bIns="50800">
-            <a:spAutoFit/>
-          </a:bodyPr>
-          <a:lstStyle/>
-          <a:p>
-            <a:pPr algn="l">
-              <a:spcAft>
-                <a:spcPts val="300"/>
-              </a:spcAft>
-              <a:defRPr sz="4000">
-                <a:solidFill>
-                  <a:srgbClr val="000000"/>
-                </a:solidFill>
-                <a:latin typeface="Arial"/>
-                <a:ea typeface="Arial"/>
-                <a:cs typeface="Arial"/>
-              </a:defRPr>
-            </a:pPr>
-            <a:r>
-              <a:rPr sz="4000">
-                <a:solidFill>
-                  <a:srgbClr val="000000"/>
-                </a:solidFill>
-                <a:latin typeface="Arial"/>
-                <a:ea typeface="Arial"/>
-                <a:cs typeface="Arial"/>
-              </a:rPr>
-              <a:t>Текущее время сборки: 186 мин + 74 мин правок</a:t>
-            </a:r>
-          </a:p>
-        </p:txBody>
-      </p:sp>
-      <p:graphicFrame>
-        <p:nvGraphicFramePr>
-          <p:cNvPr id="3" name="Chart 2"/>
-          <p:cNvGraphicFramePr>
-            <a:graphicFrameLocks noGrp="1"/>
-          </p:cNvGraphicFramePr>
-          <p:nvPr/>
-        </p:nvGraphicFramePr>
-        <p:xfrm>
-          <a:off x="677387" y="2277137"/>
-          <a:ext cx="10855878" cy="3923659"/>
-        </p:xfrm>
-        <a:graphic>
-          <a:graphicData uri="http://schemas.openxmlformats.org/drawingml/2006/chart">
-            <c:chart xmlns:c="http://schemas.openxmlformats.org/drawingml/2006/chart" r:id="rId2"/>
-          </a:graphicData>
-        </a:graphic>
-      </p:graphicFrame>
-    </p:spTree>
-  </p:cSld>
-  <p:clrMapOvr>
-    <a:masterClrMapping/>
-  </p:clrMapOvr>
-</p:sld>
-</file>
-
-<file path=ppt/slides/slide64.xml><?xml version="1.0" encoding="utf-8"?>
-<p:sld xmlns:a="http://schemas.openxmlformats.org/drawingml/2006/main" xmlns:p="http://schemas.openxmlformats.org/presentationml/2006/main" xmlns:r="http://schemas.openxmlformats.org/officeDocument/2006/relationships">
-  <p:cSld>
-    <p:bg>
-      <p:bgPr>
-        <a:solidFill>
-          <a:schemeClr val="lt2"/>
-        </a:solidFill>
-      </p:bgPr>
-    </p:bg>
-    <p:spTree>
-      <p:nvGrpSpPr>
-        <p:cNvPr id="1" name=""/>
-        <p:cNvGrpSpPr/>
-        <p:nvPr/>
-      </p:nvGrpSpPr>
-      <p:grpSpPr/>
-      <p:sp>
-        <p:nvSpPr>
-          <p:cNvPr id="2" name="title"/>
-          <p:cNvSpPr txBox="1"/>
-          <p:nvPr/>
-        </p:nvSpPr>
-        <p:spPr>
-          <a:xfrm>
-            <a:off x="677387" y="692177"/>
-            <a:ext cx="10855878" cy="1447800"/>
-          </a:xfrm>
-          <a:prstGeom prst="rect">
-            <a:avLst/>
-          </a:prstGeom>
-          <a:noFill/>
-        </p:spPr>
-        <p:txBody>
-          <a:bodyPr wrap="square" lIns="76200" rIns="76200" tIns="50800" bIns="50800">
-            <a:spAutoFit/>
-          </a:bodyPr>
-          <a:lstStyle/>
-          <a:p>
-            <a:pPr algn="l">
-              <a:spcAft>
-                <a:spcPts val="300"/>
-              </a:spcAft>
-              <a:defRPr sz="4000">
-                <a:solidFill>
-                  <a:srgbClr val="000000"/>
-                </a:solidFill>
-                <a:latin typeface="Arial"/>
-                <a:ea typeface="Arial"/>
-                <a:cs typeface="Arial"/>
-              </a:defRPr>
-            </a:pPr>
-            <a:r>
-              <a:rPr sz="4000">
-                <a:solidFill>
-                  <a:srgbClr val="000000"/>
-                </a:solidFill>
-                <a:latin typeface="Arial"/>
-                <a:ea typeface="Arial"/>
-                <a:cs typeface="Arial"/>
-              </a:rPr>
-              <a:t>Улучшения в пилоте: 4 мин сборки, 38 запросов</a:t>
-            </a:r>
-          </a:p>
-        </p:txBody>
-      </p:sp>
-      <p:graphicFrame>
-        <p:nvGraphicFramePr>
-          <p:cNvPr id="3" name="Chart 2"/>
-          <p:cNvGraphicFramePr>
-            <a:graphicFrameLocks noGrp="1"/>
-          </p:cNvGraphicFramePr>
-          <p:nvPr/>
-        </p:nvGraphicFramePr>
-        <p:xfrm>
-          <a:off x="677387" y="2277137"/>
-          <a:ext cx="10855878" cy="3923659"/>
-        </p:xfrm>
-        <a:graphic>
-          <a:graphicData uri="http://schemas.openxmlformats.org/drawingml/2006/chart">
-            <c:chart xmlns:c="http://schemas.openxmlformats.org/drawingml/2006/chart" r:id="rId2"/>
-          </a:graphicData>
-        </a:graphic>
-      </p:graphicFrame>
     </p:spTree>
   </p:cSld>
   <p:clrMapOvr>
@@ -10478,68 +10722,16 @@
         <p:nvPr/>
       </p:nvGrpSpPr>
       <p:grpSpPr/>
-      <p:cxnSp>
-        <p:nvCxnSpPr>
-          <p:cNvPr id="918" name="Google Shape;918;p74"/>
-          <p:cNvCxnSpPr/>
-          <p:nvPr/>
-        </p:nvCxnSpPr>
-        <p:spPr>
-          <a:xfrm rot="10800000">
-            <a:off x="658813" y="2199500"/>
-            <a:ext cx="11533187" cy="0"/>
-          </a:xfrm>
-          <a:prstGeom prst="straightConnector1">
-            <a:avLst/>
-          </a:prstGeom>
-          <a:noFill/>
-          <a:ln cap="flat" cmpd="sng" w="19050">
-            <a:solidFill>
-              <a:schemeClr val="accent4"/>
-            </a:solidFill>
-            <a:prstDash val="solid"/>
-            <a:miter lim="8000"/>
-            <a:headEnd len="sm" w="sm" type="none"/>
-            <a:tailEnd len="sm" w="sm" type="none"/>
-          </a:ln>
-        </p:spPr>
-      </p:cxnSp>
-      <p:cxnSp>
-        <p:nvCxnSpPr>
-          <p:cNvPr id="919" name="Google Shape;919;p74"/>
-          <p:cNvCxnSpPr/>
-          <p:nvPr/>
-        </p:nvCxnSpPr>
-        <p:spPr>
-          <a:xfrm flipH="1">
-            <a:off x="1" y="4351265"/>
-            <a:ext cx="8112124" cy="42098"/>
-          </a:xfrm>
-          <a:prstGeom prst="straightConnector1">
-            <a:avLst/>
-          </a:prstGeom>
-          <a:noFill/>
-          <a:ln cap="flat" cmpd="sng" w="19050">
-            <a:solidFill>
-              <a:schemeClr val="accent4"/>
-            </a:solidFill>
-            <a:prstDash val="solid"/>
-            <a:miter lim="8000"/>
-            <a:headEnd len="lg" w="lg" type="stealth"/>
-            <a:tailEnd len="sm" w="sm" type="none"/>
-          </a:ln>
-        </p:spPr>
-      </p:cxnSp>
       <p:sp>
         <p:nvSpPr>
-          <p:cNvPr id="920" name="title"/>
+          <p:cNvPr id="2" name="title"/>
           <p:cNvSpPr txBox="1"/>
           <p:nvPr/>
         </p:nvSpPr>
         <p:spPr>
           <a:xfrm>
-            <a:off x="677387" y="692177"/>
-            <a:ext cx="10855878" cy="1447800"/>
+            <a:off x="658855" y="692177"/>
+            <a:ext cx="5242438" cy="1447800"/>
           </a:xfrm>
           <a:prstGeom prst="rect">
             <a:avLst/>
@@ -10558,7 +10750,7 @@
               </a:spcAft>
               <a:defRPr sz="4000">
                 <a:solidFill>
-                  <a:srgbClr val="000000"/>
+                  <a:srgbClr val="FFFFFF"/>
                 </a:solidFill>
                 <a:latin typeface="Arial"/>
                 <a:ea typeface="Arial"/>
@@ -10568,13 +10760,114 @@
             <a:r>
               <a:rPr sz="4000">
                 <a:solidFill>
-                  <a:srgbClr val="000000"/>
+                  <a:srgbClr val="FFFFFF"/>
                 </a:solidFill>
                 <a:latin typeface="Arial"/>
                 <a:ea typeface="Arial"/>
                 <a:cs typeface="Arial"/>
               </a:rPr>
-              <a:t>Риски и меры: модель, шаблон, нагрузка</a:t>
+              <a:t>Следующие шаги после одобрения</a:t>
+            </a:r>
+          </a:p>
+        </p:txBody>
+      </p:sp>
+      <p:sp>
+        <p:nvSpPr>
+          <p:cNvPr id="3" name="body"/>
+          <p:cNvSpPr txBox="1"/>
+          <p:nvPr/>
+        </p:nvSpPr>
+        <p:spPr>
+          <a:xfrm>
+            <a:off x="658855" y="2380007"/>
+            <a:ext cx="5242438" cy="3262548"/>
+          </a:xfrm>
+          <a:prstGeom prst="rect">
+            <a:avLst/>
+          </a:prstGeom>
+          <a:noFill/>
+        </p:spPr>
+        <p:txBody>
+          <a:bodyPr wrap="square" lIns="76200" rIns="76200" tIns="50800" bIns="50800">
+            <a:spAutoFit/>
+          </a:bodyPr>
+          <a:lstStyle/>
+          <a:p>
+            <a:pPr algn="l">
+              <a:spcAft>
+                <a:spcPts val="300"/>
+              </a:spcAft>
+              <a:defRPr sz="2400">
+                <a:solidFill>
+                  <a:srgbClr val="FFFFFF"/>
+                </a:solidFill>
+                <a:latin typeface="Play"/>
+                <a:ea typeface="Play"/>
+                <a:cs typeface="Play"/>
+              </a:defRPr>
+            </a:pPr>
+            <a:r>
+              <a:rPr sz="2400">
+                <a:solidFill>
+                  <a:srgbClr val="FFFFFF"/>
+                </a:solidFill>
+                <a:latin typeface="Play"/>
+                <a:ea typeface="Play"/>
+                <a:cs typeface="Play"/>
+              </a:rPr>
+              <a:t>• После одобрения подключить 4 команды в Q3 2026</a:t>
+            </a:r>
+          </a:p>
+          <a:p>
+            <a:pPr algn="l">
+              <a:spcAft>
+                <a:spcPts val="300"/>
+              </a:spcAft>
+              <a:defRPr sz="2400">
+                <a:solidFill>
+                  <a:srgbClr val="FFFFFF"/>
+                </a:solidFill>
+                <a:latin typeface="Play"/>
+                <a:ea typeface="Play"/>
+                <a:cs typeface="Play"/>
+              </a:defRPr>
+            </a:pPr>
+            <a:r>
+              <a:rPr sz="2400">
+                <a:solidFill>
+                  <a:srgbClr val="FFFFFF"/>
+                </a:solidFill>
+                <a:latin typeface="Play"/>
+                <a:ea typeface="Play"/>
+                <a:cs typeface="Play"/>
+              </a:rPr>
+              <a:t>• В Q4 2026 обеспечить домен, HTTPS и доступ для всей компании</a:t>
+            </a:r>
+          </a:p>
+          <a:p>
+            <a:pPr algn="l">
+              <a:spcAft>
+                <a:spcPts val="300"/>
+              </a:spcAft>
+              <a:defRPr sz="2400">
+                <a:solidFill>
+                  <a:srgbClr val="FFFFFF"/>
+                </a:solidFill>
+                <a:latin typeface="Play"/>
+                <a:ea typeface="Play"/>
+                <a:cs typeface="Play"/>
+              </a:defRPr>
+            </a:pPr>
+            <a:r>
+              <a:rPr sz="2400">
+                <a:solidFill>
+                  <a:srgbClr val="FFFFFF"/>
+                </a:solidFill>
+                <a:latin typeface="Play"/>
+                <a:ea typeface="Play"/>
+                <a:cs typeface="Play"/>
+              </a:rPr>
+              <a:t>• В Q1 2027 добавить генерацию иллюстраций под стиль шаблона</a:t>
             </a:r>
           </a:p>
         </p:txBody>

--- a/samples/Шаблон_презентации_VK_Education__classic.pptx
+++ b/samples/Шаблон_презентации_VK_Education__classic.pptx
@@ -7566,7 +7566,7 @@
               <a:spcAft>
                 <a:spcPts val="300"/>
               </a:spcAft>
-              <a:defRPr sz="3200" b="0">
+              <a:defRPr sz="4000" b="0">
                 <a:solidFill>
                   <a:srgbClr val="000000"/>
                 </a:solidFill>
@@ -7576,7 +7576,7 @@
               </a:defRPr>
             </a:pPr>
             <a:r>
-              <a:rPr sz="3200" b="0">
+              <a:rPr sz="4000" b="0">
                 <a:solidFill>
                   <a:srgbClr val="000000"/>
                 </a:solidFill>
@@ -7584,7 +7584,7 @@
                 <a:ea typeface="Arial"/>
                 <a:cs typeface="Arial"/>
               </a:rPr>
-              <a:t>Защита инициативы: сервис автоматической вёрстки презентаций</a:t>
+              <a:t>Автоматическая вёрстка презентаций</a:t>
             </a:r>
           </a:p>
         </p:txBody>
@@ -7708,7 +7708,7 @@
               <a:spcAft>
                 <a:spcPts val="300"/>
               </a:spcAft>
-              <a:defRPr sz="1800">
+              <a:defRPr sz="2400">
                 <a:solidFill>
                   <a:srgbClr val="000000"/>
                 </a:solidFill>
@@ -7718,7 +7718,7 @@
               </a:defRPr>
             </a:pPr>
             <a:r>
-              <a:rPr sz="1800">
+              <a:rPr sz="2400">
                 <a:solidFill>
                   <a:srgbClr val="000000"/>
                 </a:solidFill>
@@ -7726,7 +7726,7 @@
                 <a:ea typeface="Play"/>
                 <a:cs typeface="Play"/>
               </a:rPr>
-              <a:t>• Отделы собирают презентации вручную, затрачивая 186 минут на 12-слайдовую колоду</a:t>
+              <a:t>• Сборка одной колоды 12 слайдов занимает 186 минут</a:t>
             </a:r>
           </a:p>
           <a:p>
@@ -7734,7 +7734,7 @@
               <a:spcAft>
                 <a:spcPts val="300"/>
               </a:spcAft>
-              <a:defRPr sz="1800">
+              <a:defRPr sz="2400">
                 <a:solidFill>
                   <a:srgbClr val="000000"/>
                 </a:solidFill>
@@ -7744,7 +7744,7 @@
               </a:defRPr>
             </a:pPr>
             <a:r>
-              <a:rPr sz="1800">
+              <a:rPr sz="2400">
                 <a:solidFill>
                   <a:srgbClr val="000000"/>
                 </a:solidFill>
@@ -7752,7 +7752,7 @@
                 <a:ea typeface="Play"/>
                 <a:cs typeface="Play"/>
               </a:rPr>
-              <a:t>• После ревью дизайнеров добавляется 74 минуты правок</a:t>
+              <a:t>• 74 минуты уходит на правки после ревью дизайнера</a:t>
             </a:r>
           </a:p>
           <a:p>
@@ -7760,7 +7760,7 @@
               <a:spcAft>
                 <a:spcPts val="300"/>
               </a:spcAft>
-              <a:defRPr sz="1800">
+              <a:defRPr sz="2400">
                 <a:solidFill>
                   <a:srgbClr val="000000"/>
                 </a:solidFill>
@@ -7770,7 +7770,7 @@
               </a:defRPr>
             </a:pPr>
             <a:r>
-              <a:rPr sz="1800">
+              <a:rPr sz="2400">
                 <a:solidFill>
                   <a:srgbClr val="000000"/>
                 </a:solidFill>
@@ -7778,7 +7778,7 @@
                 <a:ea typeface="Play"/>
                 <a:cs typeface="Play"/>
               </a:rPr>
-              <a:t>• 19 из 42 колод нарушают фирменный стиль: чужие гарнитуры и цвета</a:t>
+              <a:t>• 19 из 42 колод нарушают фирменный стиль</a:t>
             </a:r>
           </a:p>
           <a:p>
@@ -7786,7 +7786,7 @@
               <a:spcAft>
                 <a:spcPts val="300"/>
               </a:spcAft>
-              <a:defRPr sz="1800">
+              <a:defRPr sz="2400">
                 <a:solidFill>
                   <a:srgbClr val="000000"/>
                 </a:solidFill>
@@ -7796,7 +7796,7 @@
               </a:defRPr>
             </a:pPr>
             <a:r>
-              <a:rPr sz="1800">
+              <a:rPr sz="2400">
                 <a:solidFill>
                   <a:srgbClr val="000000"/>
                 </a:solidFill>
@@ -7804,7 +7804,7 @@
                 <a:ea typeface="Play"/>
                 <a:cs typeface="Play"/>
               </a:rPr>
-              <a:t>• Дизайнеры закрывают 11 запросов в неделю из 27 поступающих, ожидание 6 дней</a:t>
+              <a:t>• Дизайн-отдел из 4 человек закрывает 11 запросов в неделю из 27</a:t>
             </a:r>
           </a:p>
           <a:p>
@@ -7812,7 +7812,7 @@
               <a:spcAft>
                 <a:spcPts val="300"/>
               </a:spcAft>
-              <a:defRPr sz="1800">
+              <a:defRPr sz="2400">
                 <a:solidFill>
                   <a:srgbClr val="000000"/>
                 </a:solidFill>
@@ -7822,7 +7822,7 @@
               </a:defRPr>
             </a:pPr>
             <a:r>
-              <a:rPr sz="1800">
+              <a:rPr sz="2400">
                 <a:solidFill>
                   <a:srgbClr val="000000"/>
                 </a:solidFill>
@@ -7830,7 +7830,7 @@
                 <a:ea typeface="Play"/>
                 <a:cs typeface="Play"/>
               </a:rPr>
-              <a:t>• Время до первой версии колоды составляет 6 рабочих дней</a:t>
+              <a:t>• Средний срок ожидания в очереди — 6 рабочих дней</a:t>
             </a:r>
           </a:p>
         </p:txBody>
@@ -7911,141 +7911,14 @@
       </p:sp>
       <p:sp>
         <p:nvSpPr>
-          <p:cNvPr id="3" name="body"/>
-          <p:cNvSpPr txBox="1"/>
-          <p:nvPr/>
-        </p:nvSpPr>
-        <p:spPr>
-          <a:xfrm>
-            <a:off x="677387" y="1773204"/>
-            <a:ext cx="10855878" cy="1737360"/>
-          </a:xfrm>
-          <a:prstGeom prst="rect">
-            <a:avLst/>
-          </a:prstGeom>
-          <a:noFill/>
-        </p:spPr>
-        <p:txBody>
-          <a:bodyPr wrap="square" lIns="76200" rIns="76200" tIns="50800" bIns="50800">
-            <a:spAutoFit/>
-          </a:bodyPr>
-          <a:lstStyle/>
-          <a:p>
-            <a:pPr algn="l">
-              <a:spcAft>
-                <a:spcPts val="300"/>
-              </a:spcAft>
-              <a:defRPr sz="1800">
-                <a:solidFill>
-                  <a:srgbClr val="000000"/>
-                </a:solidFill>
-                <a:latin typeface="Play"/>
-                <a:ea typeface="Play"/>
-                <a:cs typeface="Play"/>
-              </a:defRPr>
-            </a:pPr>
-            <a:r>
-              <a:rPr sz="1800">
-                <a:solidFill>
-                  <a:srgbClr val="000000"/>
-                </a:solidFill>
-                <a:latin typeface="Play"/>
-                <a:ea typeface="Play"/>
-                <a:cs typeface="Play"/>
-              </a:rPr>
-              <a:t>• Сервис принимает pptx-шаблон, документы, таблицы, заметки.</a:t>
-            </a:r>
-          </a:p>
-          <a:p>
-            <a:pPr algn="l">
-              <a:spcAft>
-                <a:spcPts val="300"/>
-              </a:spcAft>
-              <a:defRPr sz="1800">
-                <a:solidFill>
-                  <a:srgbClr val="000000"/>
-                </a:solidFill>
-                <a:latin typeface="Play"/>
-                <a:ea typeface="Play"/>
-                <a:cs typeface="Play"/>
-              </a:defRPr>
-            </a:pPr>
-            <a:r>
-              <a:rPr sz="1800">
-                <a:solidFill>
-                  <a:srgbClr val="000000"/>
-                </a:solidFill>
-                <a:latin typeface="Play"/>
-                <a:ea typeface="Play"/>
-                <a:cs typeface="Play"/>
-              </a:rPr>
-              <a:t>• Шабл превращается:гарнитуры, шкала кеглей, палитра</a:t>
-            </a:r>
-          </a:p>
-          <a:p>
-            <a:pPr algn="l">
-              <a:spcAft>
-                <a:spcPts val="300"/>
-              </a:spcAft>
-              <a:defRPr sz="1800">
-                <a:solidFill>
-                  <a:srgbClr val="000000"/>
-                </a:solidFill>
-                <a:latin typeface="Play"/>
-                <a:ea typeface="Play"/>
-                <a:cs typeface="Play"/>
-              </a:defRPr>
-            </a:pPr>
-            <a:r>
-              <a:rPr sz="1800">
-                <a:solidFill>
-                  <a:srgbClr val="000000"/>
-                </a:solidFill>
-                <a:latin typeface="Play"/>
-                <a:ea typeface="Play"/>
-                <a:cs typeface="Play"/>
-              </a:rPr>
-              <a:t>• Бриф генерирует колоду, автоматическая вёрстка</a:t>
-            </a:r>
-          </a:p>
-          <a:p>
-            <a:pPr algn="l">
-              <a:spcAft>
-                <a:spcPts val="300"/>
-              </a:spcAft>
-              <a:defRPr sz="1800">
-                <a:solidFill>
-                  <a:srgbClr val="000000"/>
-                </a:solidFill>
-                <a:latin typeface="Play"/>
-                <a:ea typeface="Play"/>
-                <a:cs typeface="Play"/>
-              </a:defRPr>
-            </a:pPr>
-            <a:r>
-              <a:rPr sz="1800">
-                <a:solidFill>
-                  <a:srgbClr val="000000"/>
-                </a:solidFill>
-                <a:latin typeface="Play"/>
-                <a:ea typeface="Play"/>
-                <a:cs typeface="Play"/>
-              </a:rPr>
-              <a:t>• Экспорт в pptx, pdf, html; слайды редактируемы.</a:t>
-            </a:r>
-          </a:p>
-        </p:txBody>
-      </p:sp>
-      <p:sp>
-        <p:nvSpPr>
-          <p:cNvPr id="4" name="Pentagon 3"/>
+          <p:cNvPr id="3" name="Pentagon 2"/>
           <p:cNvSpPr/>
           <p:nvPr/>
         </p:nvSpPr>
         <p:spPr>
           <a:xfrm>
-            <a:off x="677387" y="4300648"/>
-            <a:ext cx="2066959" cy="1281514"/>
+            <a:off x="677387" y="1824859"/>
+            <a:ext cx="10855878" cy="634621"/>
           </a:xfrm>
           <a:prstGeom prst="homePlate">
             <a:avLst/>
@@ -8076,7 +7949,7 @@
           <a:lstStyle/>
           <a:p>
             <a:pPr algn="ctr">
-              <a:defRPr sz="1096" b="0">
+              <a:defRPr sz="1400" b="0">
                 <a:solidFill>
                   <a:srgbClr val="FFFFFF"/>
                 </a:solidFill>
@@ -8086,7 +7959,7 @@
               </a:defRPr>
             </a:pPr>
             <a:r>
-              <a:rPr sz="1096" b="0">
+              <a:rPr sz="1400" b="0">
                 <a:solidFill>
                   <a:srgbClr val="FFFFFF"/>
                 </a:solidFill>
@@ -8094,21 +7967,21 @@
                 <a:ea typeface="Play"/>
                 <a:cs typeface="Play"/>
               </a:rPr>
-              <a:t>Шаблон</a:t>
+              <a:t>Загрузка шаблона</a:t>
             </a:r>
           </a:p>
         </p:txBody>
       </p:sp>
       <p:sp>
         <p:nvSpPr>
-          <p:cNvPr id="5" name="Chevron 4"/>
+          <p:cNvPr id="4" name="Chevron 3"/>
           <p:cNvSpPr/>
           <p:nvPr/>
         </p:nvSpPr>
         <p:spPr>
           <a:xfrm>
-            <a:off x="2874616" y="4300648"/>
-            <a:ext cx="2066959" cy="1281514"/>
+            <a:off x="677387" y="2562791"/>
+            <a:ext cx="10855878" cy="634621"/>
           </a:xfrm>
           <a:prstGeom prst="chevron">
             <a:avLst/>
@@ -8139,7 +8012,7 @@
           <a:lstStyle/>
           <a:p>
             <a:pPr algn="ctr">
-              <a:defRPr sz="1096" b="0">
+              <a:defRPr sz="1400" b="0">
                 <a:solidFill>
                   <a:srgbClr val="FFFFFF"/>
                 </a:solidFill>
@@ -8149,7 +8022,7 @@
               </a:defRPr>
             </a:pPr>
             <a:r>
-              <a:rPr sz="1096" b="0">
+              <a:rPr sz="1400" b="0">
                 <a:solidFill>
                   <a:srgbClr val="FFFFFF"/>
                 </a:solidFill>
@@ -8157,21 +8030,21 @@
                 <a:ea typeface="Play"/>
                 <a:cs typeface="Play"/>
               </a:rPr>
-              <a:t>План</a:t>
+              <a:t>Анализ дизайна</a:t>
             </a:r>
           </a:p>
         </p:txBody>
       </p:sp>
       <p:sp>
         <p:nvSpPr>
-          <p:cNvPr id="6" name="Chevron 5"/>
+          <p:cNvPr id="5" name="Chevron 4"/>
           <p:cNvSpPr/>
           <p:nvPr/>
         </p:nvSpPr>
         <p:spPr>
           <a:xfrm>
-            <a:off x="5071846" y="4300648"/>
-            <a:ext cx="2066959" cy="1281514"/>
+            <a:off x="677387" y="3300723"/>
+            <a:ext cx="10855878" cy="634621"/>
           </a:xfrm>
           <a:prstGeom prst="chevron">
             <a:avLst/>
@@ -8202,7 +8075,7 @@
           <a:lstStyle/>
           <a:p>
             <a:pPr algn="ctr">
-              <a:defRPr sz="1096" b="0">
+              <a:defRPr sz="1400" b="0">
                 <a:solidFill>
                   <a:srgbClr val="FFFFFF"/>
                 </a:solidFill>
@@ -8212,7 +8085,7 @@
               </a:defRPr>
             </a:pPr>
             <a:r>
-              <a:rPr sz="1096" b="0">
+              <a:rPr sz="1400" b="0">
                 <a:solidFill>
                   <a:srgbClr val="FFFFFF"/>
                 </a:solidFill>
@@ -8220,21 +8093,21 @@
                 <a:ea typeface="Play"/>
                 <a:cs typeface="Play"/>
               </a:rPr>
-              <a:t>Вёрстка</a:t>
+              <a:t>План колоды</a:t>
             </a:r>
           </a:p>
         </p:txBody>
       </p:sp>
       <p:sp>
         <p:nvSpPr>
-          <p:cNvPr id="7" name="Chevron 6"/>
+          <p:cNvPr id="6" name="Chevron 5"/>
           <p:cNvSpPr/>
           <p:nvPr/>
         </p:nvSpPr>
         <p:spPr>
           <a:xfrm>
-            <a:off x="7269076" y="4300648"/>
-            <a:ext cx="2066959" cy="1281514"/>
+            <a:off x="677387" y="4038655"/>
+            <a:ext cx="10855878" cy="634621"/>
           </a:xfrm>
           <a:prstGeom prst="chevron">
             <a:avLst/>
@@ -8265,7 +8138,7 @@
           <a:lstStyle/>
           <a:p>
             <a:pPr algn="ctr">
-              <a:defRPr sz="1096" b="0">
+              <a:defRPr sz="1400" b="0">
                 <a:solidFill>
                   <a:srgbClr val="FFFFFF"/>
                 </a:solidFill>
@@ -8275,7 +8148,7 @@
               </a:defRPr>
             </a:pPr>
             <a:r>
-              <a:rPr sz="1096" b="0">
+              <a:rPr sz="1400" b="0">
                 <a:solidFill>
                   <a:srgbClr val="FFFFFF"/>
                 </a:solidFill>
@@ -8283,21 +8156,21 @@
                 <a:ea typeface="Play"/>
                 <a:cs typeface="Play"/>
               </a:rPr>
-              <a:t>Аудит</a:t>
+              <a:t>Авто-верстка</a:t>
             </a:r>
           </a:p>
         </p:txBody>
       </p:sp>
       <p:sp>
         <p:nvSpPr>
-          <p:cNvPr id="8" name="Chevron 7"/>
+          <p:cNvPr id="7" name="Chevron 6"/>
           <p:cNvSpPr/>
           <p:nvPr/>
         </p:nvSpPr>
         <p:spPr>
           <a:xfrm>
-            <a:off x="9466305" y="4300648"/>
-            <a:ext cx="2066959" cy="1281514"/>
+            <a:off x="677387" y="4776587"/>
+            <a:ext cx="10855878" cy="634621"/>
           </a:xfrm>
           <a:prstGeom prst="chevron">
             <a:avLst/>
@@ -8328,7 +8201,7 @@
           <a:lstStyle/>
           <a:p>
             <a:pPr algn="ctr">
-              <a:defRPr sz="1096" b="0">
+              <a:defRPr sz="1400" b="0">
                 <a:solidFill>
                   <a:srgbClr val="FFFFFF"/>
                 </a:solidFill>
@@ -8338,7 +8211,70 @@
               </a:defRPr>
             </a:pPr>
             <a:r>
-              <a:rPr sz="1096" b="0">
+              <a:rPr sz="1400" b="0">
+                <a:solidFill>
+                  <a:srgbClr val="FFFFFF"/>
+                </a:solidFill>
+                <a:latin typeface="Play"/>
+                <a:ea typeface="Play"/>
+                <a:cs typeface="Play"/>
+              </a:rPr>
+              <a:t>Аудит качества</a:t>
+            </a:r>
+          </a:p>
+        </p:txBody>
+      </p:sp>
+      <p:sp>
+        <p:nvSpPr>
+          <p:cNvPr id="8" name="Chevron 7"/>
+          <p:cNvSpPr/>
+          <p:nvPr/>
+        </p:nvSpPr>
+        <p:spPr>
+          <a:xfrm>
+            <a:off x="677387" y="5514520"/>
+            <a:ext cx="10855878" cy="634621"/>
+          </a:xfrm>
+          <a:prstGeom prst="chevron">
+            <a:avLst/>
+          </a:prstGeom>
+          <a:solidFill>
+            <a:srgbClr val="0077FF"/>
+          </a:solidFill>
+          <a:ln>
+            <a:noFill/>
+          </a:ln>
+        </p:spPr>
+        <p:style>
+          <a:lnRef idx="1">
+            <a:schemeClr val="accent1"/>
+          </a:lnRef>
+          <a:fillRef idx="3">
+            <a:schemeClr val="accent1"/>
+          </a:fillRef>
+          <a:effectRef idx="2">
+            <a:schemeClr val="accent1"/>
+          </a:effectRef>
+          <a:fontRef idx="minor">
+            <a:schemeClr val="lt1"/>
+          </a:fontRef>
+        </p:style>
+        <p:txBody>
+          <a:bodyPr rtlCol="0" anchor="ctr" wrap="square" lIns="12700" rIns="12700" tIns="12700" bIns="12700"/>
+          <a:lstStyle/>
+          <a:p>
+            <a:pPr algn="ctr">
+              <a:defRPr sz="1400" b="0">
+                <a:solidFill>
+                  <a:srgbClr val="FFFFFF"/>
+                </a:solidFill>
+                <a:latin typeface="Play"/>
+                <a:ea typeface="Play"/>
+                <a:cs typeface="Play"/>
+              </a:defRPr>
+            </a:pPr>
+            <a:r>
+              <a:rPr sz="1400" b="0">
                 <a:solidFill>
                   <a:srgbClr val="FFFFFF"/>
                 </a:solidFill>
@@ -8488,7 +8424,7 @@
                 <a:ea typeface="Play"/>
                 <a:cs typeface="Play"/>
               </a:rPr>
-              <a:t>• Время сборки колоды сократилось с 186 до 4 минут</a:t>
+              <a:t>• Средняя сборка колоды 12 слайдов — 4 минуты вместо 186</a:t>
             </a:r>
           </a:p>
           <a:p>
@@ -8514,7 +8450,7 @@
                 <a:ea typeface="Play"/>
                 <a:cs typeface="Play"/>
               </a:rPr>
-              <a:t>• Первая версия готова за 1 день вместо 6 рабочих дней</a:t>
+              <a:t>• Время до первой версии сократилось с 6 рабочих дней до 1</a:t>
             </a:r>
           </a:p>
           <a:p>
@@ -8540,7 +8476,7 @@
                 <a:ea typeface="Play"/>
                 <a:cs typeface="Play"/>
               </a:rPr>
-              <a:t>• Нарушений фирменного стиля в пилоте 2 из 68 колод, исправлены автоматически</a:t>
+              <a:t>• Нарушений фирменного стиля в пилоте — 2 из 68 колод</a:t>
             </a:r>
           </a:p>
           <a:p>
@@ -8566,7 +8502,7 @@
                 <a:ea typeface="Play"/>
                 <a:cs typeface="Play"/>
               </a:rPr>
-              <a:t>• Дизайнеры закрыли 38 запросов вместо 11 в неделю, рутина ушла в сервис</a:t>
+              <a:t>• Дизайнеры закрыли 38 запросов за 6 недель вместо 11 в неделю</a:t>
             </a:r>
           </a:p>
         </p:txBody>
@@ -8654,7 +8590,7 @@
         <p:spPr>
           <a:xfrm>
             <a:off x="677387" y="1773204"/>
-            <a:ext cx="10855878" cy="1737360"/>
+            <a:ext cx="10855878" cy="1771037"/>
           </a:xfrm>
           <a:prstGeom prst="rect">
             <a:avLst/>
@@ -8689,7 +8625,7 @@
                 <a:ea typeface="Play"/>
                 <a:cs typeface="Play"/>
               </a:rPr>
-              <a:t>• Сервис на машине 2 vCPU / 2 ГБ RAM</a:t>
+              <a:t>• Сервис на 1 машине: 2 vCPU / 2 ГБ RAM</a:t>
             </a:r>
           </a:p>
           <a:p>
@@ -8715,7 +8651,7 @@
                 <a:ea typeface="Play"/>
                 <a:cs typeface="Play"/>
               </a:rPr>
-              <a:t>• Модель gpt-oss-20b подключена через OpenAI-протокол</a:t>
+              <a:t>• Инференс 6 недель: 1 400 руб.</a:t>
             </a:r>
           </a:p>
           <a:p>
@@ -8741,7 +8677,7 @@
                 <a:ea typeface="Play"/>
                 <a:cs typeface="Play"/>
               </a:rPr>
-              <a:t>• Стоимость инференса за 6 недель 1 400 руб.</a:t>
+              <a:t>• Подключение 4 команд: 3й квартал 2026</a:t>
             </a:r>
           </a:p>
           <a:p>
@@ -8767,7 +8703,33 @@
                 <a:ea typeface="Play"/>
                 <a:cs typeface="Play"/>
               </a:rPr>
-              <a:t>• Нагрузка выше 20 задач требует внешней очереди.</a:t>
+              <a:t>• Доступ всей компании: 4й квартал 2026</a:t>
+            </a:r>
+          </a:p>
+          <a:p>
+            <a:pPr algn="l">
+              <a:spcAft>
+                <a:spcPts val="300"/>
+              </a:spcAft>
+              <a:defRPr sz="1600">
+                <a:solidFill>
+                  <a:srgbClr val="000000"/>
+                </a:solidFill>
+                <a:latin typeface="Play"/>
+                <a:ea typeface="Play"/>
+                <a:cs typeface="Play"/>
+              </a:defRPr>
+            </a:pPr>
+            <a:r>
+              <a:rPr sz="1600">
+                <a:solidFill>
+                  <a:srgbClr val="000000"/>
+                </a:solidFill>
+                <a:latin typeface="Play"/>
+                <a:ea typeface="Play"/>
+                <a:cs typeface="Play"/>
+              </a:rPr>
+              <a:t>• Иллюстрации в стиле шаблона: 1й квартал 2027</a:t>
             </a:r>
           </a:p>
         </p:txBody>
@@ -8780,8 +8742,8 @@
         </p:nvSpPr>
         <p:spPr>
           <a:xfrm>
-            <a:off x="677387" y="4840654"/>
-            <a:ext cx="10855878" cy="75563"/>
+            <a:off x="677387" y="4858839"/>
+            <a:ext cx="10855878" cy="74553"/>
           </a:xfrm>
           <a:prstGeom prst="rect">
             <a:avLst/>
@@ -8823,8 +8785,8 @@
         </p:nvSpPr>
         <p:spPr>
           <a:xfrm>
-            <a:off x="1757305" y="4601369"/>
-            <a:ext cx="554132" cy="554132"/>
+            <a:off x="2213338" y="4622754"/>
+            <a:ext cx="546723" cy="546723"/>
           </a:xfrm>
           <a:prstGeom prst="ellipse">
             <a:avLst/>
@@ -8866,8 +8828,8 @@
         </p:nvSpPr>
         <p:spPr>
           <a:xfrm>
-            <a:off x="677387" y="3682014"/>
-            <a:ext cx="4070954" cy="957137"/>
+            <a:off x="677387" y="3715691"/>
+            <a:ext cx="5427939" cy="944340"/>
           </a:xfrm>
           <a:prstGeom prst="rect">
             <a:avLst/>
@@ -8899,7 +8861,7 @@
                 <a:ea typeface="Play"/>
                 <a:cs typeface="Play"/>
               </a:rPr>
-              <a:t>Подключение 4 команд</a:t>
+              <a:t>Третий квартал 2026: подключение 4 команд</a:t>
             </a:r>
           </a:p>
         </p:txBody>
@@ -8912,8 +8874,8 @@
         </p:nvSpPr>
         <p:spPr>
           <a:xfrm>
-            <a:off x="4471275" y="4601369"/>
-            <a:ext cx="554132" cy="554132"/>
+            <a:off x="5831964" y="4622754"/>
+            <a:ext cx="546723" cy="546723"/>
           </a:xfrm>
           <a:prstGeom prst="ellipse">
             <a:avLst/>
@@ -8955,8 +8917,8 @@
         </p:nvSpPr>
         <p:spPr>
           <a:xfrm>
-            <a:off x="2712864" y="5394786"/>
-            <a:ext cx="4070954" cy="957137"/>
+            <a:off x="3391356" y="5405563"/>
+            <a:ext cx="5427939" cy="944340"/>
           </a:xfrm>
           <a:prstGeom prst="rect">
             <a:avLst/>
@@ -8988,7 +8950,7 @@
                 <a:ea typeface="Play"/>
                 <a:cs typeface="Play"/>
               </a:rPr>
-              <a:t>Домен и HTTPS</a:t>
+              <a:t>Четвёртый квартал 2026: доступ для всей компании</a:t>
             </a:r>
           </a:p>
         </p:txBody>
@@ -9001,8 +8963,8 @@
         </p:nvSpPr>
         <p:spPr>
           <a:xfrm>
-            <a:off x="7185244" y="4601369"/>
-            <a:ext cx="554132" cy="554132"/>
+            <a:off x="9450590" y="4622754"/>
+            <a:ext cx="546723" cy="546723"/>
           </a:xfrm>
           <a:prstGeom prst="ellipse">
             <a:avLst/>
@@ -9044,8 +9006,8 @@
         </p:nvSpPr>
         <p:spPr>
           <a:xfrm>
-            <a:off x="5426833" y="3682014"/>
-            <a:ext cx="4070954" cy="957137"/>
+            <a:off x="6105326" y="3715691"/>
+            <a:ext cx="5427939" cy="944340"/>
           </a:xfrm>
           <a:prstGeom prst="rect">
             <a:avLst/>
@@ -9077,96 +9039,7 @@
                 <a:ea typeface="Play"/>
                 <a:cs typeface="Play"/>
               </a:rPr>
-              <a:t>Доступ для всей компании</a:t>
-            </a:r>
-          </a:p>
-        </p:txBody>
-      </p:sp>
-      <p:sp>
-        <p:nvSpPr>
-          <p:cNvPr id="11" name="Oval 10"/>
-          <p:cNvSpPr/>
-          <p:nvPr/>
-        </p:nvSpPr>
-        <p:spPr>
-          <a:xfrm>
-            <a:off x="9899214" y="4601369"/>
-            <a:ext cx="554132" cy="554132"/>
-          </a:xfrm>
-          <a:prstGeom prst="ellipse">
-            <a:avLst/>
-          </a:prstGeom>
-          <a:solidFill>
-            <a:srgbClr val="0077FF"/>
-          </a:solidFill>
-          <a:ln>
-            <a:noFill/>
-          </a:ln>
-        </p:spPr>
-        <p:style>
-          <a:lnRef idx="1">
-            <a:schemeClr val="accent1"/>
-          </a:lnRef>
-          <a:fillRef idx="3">
-            <a:schemeClr val="accent1"/>
-          </a:fillRef>
-          <a:effectRef idx="2">
-            <a:schemeClr val="accent1"/>
-          </a:effectRef>
-          <a:fontRef idx="minor">
-            <a:schemeClr val="lt1"/>
-          </a:fontRef>
-        </p:style>
-        <p:txBody>
-          <a:bodyPr rtlCol="0" anchor="ctr"/>
-          <a:lstStyle/>
-          <a:p>
-            <a:pPr algn="ctr"/>
-          </a:p>
-        </p:txBody>
-      </p:sp>
-      <p:sp>
-        <p:nvSpPr>
-          <p:cNvPr id="12" name="TextBox 11"/>
-          <p:cNvSpPr txBox="1"/>
-          <p:nvPr/>
-        </p:nvSpPr>
-        <p:spPr>
-          <a:xfrm>
-            <a:off x="7462310" y="5394786"/>
-            <a:ext cx="4070954" cy="957137"/>
-          </a:xfrm>
-          <a:prstGeom prst="rect">
-            <a:avLst/>
-          </a:prstGeom>
-          <a:noFill/>
-        </p:spPr>
-        <p:txBody>
-          <a:bodyPr wrap="square" lIns="12700" rIns="12700" tIns="12700" bIns="12700">
-            <a:spAutoFit/>
-          </a:bodyPr>
-          <a:lstStyle/>
-          <a:p>
-            <a:pPr algn="ctr">
-              <a:defRPr sz="1400" b="0">
-                <a:solidFill>
-                  <a:srgbClr val="000000"/>
-                </a:solidFill>
-                <a:latin typeface="Play"/>
-                <a:ea typeface="Play"/>
-                <a:cs typeface="Play"/>
-              </a:defRPr>
-            </a:pPr>
-            <a:r>
-              <a:rPr sz="1400" b="0">
-                <a:solidFill>
-                  <a:srgbClr val="000000"/>
-                </a:solidFill>
-                <a:latin typeface="Play"/>
-                <a:ea typeface="Play"/>
-                <a:cs typeface="Play"/>
-              </a:rPr>
-              <a:t>Генерация иллюстраций</a:t>
+              <a:t>Первый квартал 2027: генерация иллюстраций</a:t>
             </a:r>
           </a:p>
         </p:txBody>
@@ -9180,276 +9053,6 @@
 </file>
 
 <file path=ppt/slides/slide61.xml><?xml version="1.0" encoding="utf-8"?>
-<p:sld xmlns:a="http://schemas.openxmlformats.org/drawingml/2006/main" xmlns:p="http://schemas.openxmlformats.org/presentationml/2006/main" xmlns:r="http://schemas.openxmlformats.org/officeDocument/2006/relationships">
-  <p:cSld>
-    <p:bg>
-      <p:bgPr>
-        <a:solidFill>
-          <a:schemeClr val="lt2"/>
-        </a:solidFill>
-      </p:bgPr>
-    </p:bg>
-    <p:spTree>
-      <p:nvGrpSpPr>
-        <p:cNvPr id="1" name=""/>
-        <p:cNvGrpSpPr/>
-        <p:nvPr/>
-      </p:nvGrpSpPr>
-      <p:grpSpPr/>
-      <p:sp>
-        <p:nvSpPr>
-          <p:cNvPr id="2" name="title"/>
-          <p:cNvSpPr txBox="1"/>
-          <p:nvPr/>
-        </p:nvSpPr>
-        <p:spPr>
-          <a:xfrm>
-            <a:off x="677387" y="692177"/>
-            <a:ext cx="10855878" cy="822960"/>
-          </a:xfrm>
-          <a:prstGeom prst="rect">
-            <a:avLst/>
-          </a:prstGeom>
-          <a:noFill/>
-        </p:spPr>
-        <p:txBody>
-          <a:bodyPr wrap="square" lIns="76200" rIns="76200" tIns="50800" bIns="50800">
-            <a:spAutoFit/>
-          </a:bodyPr>
-          <a:lstStyle/>
-          <a:p>
-            <a:pPr algn="l">
-              <a:spcAft>
-                <a:spcPts val="300"/>
-              </a:spcAft>
-              <a:defRPr sz="4000">
-                <a:solidFill>
-                  <a:srgbClr val="000000"/>
-                </a:solidFill>
-                <a:latin typeface="Arial"/>
-                <a:ea typeface="Arial"/>
-                <a:cs typeface="Arial"/>
-              </a:defRPr>
-            </a:pPr>
-            <a:r>
-              <a:rPr sz="4000">
-                <a:solidFill>
-                  <a:srgbClr val="000000"/>
-                </a:solidFill>
-                <a:latin typeface="Arial"/>
-                <a:ea typeface="Arial"/>
-                <a:cs typeface="Arial"/>
-              </a:rPr>
-              <a:t>План пилота</a:t>
-            </a:r>
-          </a:p>
-        </p:txBody>
-      </p:sp>
-      <p:sp>
-        <p:nvSpPr>
-          <p:cNvPr id="3" name="card_0"/>
-          <p:cNvSpPr txBox="1"/>
-          <p:nvPr/>
-        </p:nvSpPr>
-        <p:spPr>
-          <a:xfrm>
-            <a:off x="823935" y="1925604"/>
-            <a:ext cx="5060899" cy="1851698"/>
-          </a:xfrm>
-          <a:prstGeom prst="rect">
-            <a:avLst/>
-          </a:prstGeom>
-          <a:noFill/>
-        </p:spPr>
-        <p:txBody>
-          <a:bodyPr wrap="square" lIns="76200" rIns="76200" tIns="50800" bIns="50800">
-            <a:spAutoFit/>
-          </a:bodyPr>
-          <a:lstStyle/>
-          <a:p>
-            <a:pPr algn="l">
-              <a:spcAft>
-                <a:spcPts val="300"/>
-              </a:spcAft>
-              <a:defRPr sz="2400" b="0">
-                <a:solidFill>
-                  <a:srgbClr val="000000"/>
-                </a:solidFill>
-                <a:latin typeface="Play"/>
-                <a:ea typeface="Play"/>
-                <a:cs typeface="Play"/>
-              </a:defRPr>
-            </a:pPr>
-            <a:r>
-              <a:rPr sz="2400" b="0">
-                <a:solidFill>
-                  <a:srgbClr val="000000"/>
-                </a:solidFill>
-                <a:latin typeface="Play"/>
-                <a:ea typeface="Play"/>
-                <a:cs typeface="Play"/>
-              </a:rPr>
-              <a:t>Пилот длился 6 недель, включал 2 команды и 68 презентаций</a:t>
-            </a:r>
-          </a:p>
-        </p:txBody>
-      </p:sp>
-      <p:sp>
-        <p:nvSpPr>
-          <p:cNvPr id="4" name="card_1"/>
-          <p:cNvSpPr txBox="1"/>
-          <p:nvPr/>
-        </p:nvSpPr>
-        <p:spPr>
-          <a:xfrm>
-            <a:off x="6307165" y="1927936"/>
-            <a:ext cx="5086380" cy="1851698"/>
-          </a:xfrm>
-          <a:prstGeom prst="rect">
-            <a:avLst/>
-          </a:prstGeom>
-          <a:noFill/>
-        </p:spPr>
-        <p:txBody>
-          <a:bodyPr wrap="square" lIns="76200" rIns="76200" tIns="50800" bIns="50800">
-            <a:spAutoFit/>
-          </a:bodyPr>
-          <a:lstStyle/>
-          <a:p>
-            <a:pPr algn="l">
-              <a:spcAft>
-                <a:spcPts val="300"/>
-              </a:spcAft>
-              <a:defRPr sz="2400" b="0">
-                <a:solidFill>
-                  <a:srgbClr val="000000"/>
-                </a:solidFill>
-                <a:latin typeface="Play"/>
-                <a:ea typeface="Play"/>
-                <a:cs typeface="Play"/>
-              </a:defRPr>
-            </a:pPr>
-            <a:r>
-              <a:rPr sz="2400" b="0">
-                <a:solidFill>
-                  <a:srgbClr val="000000"/>
-                </a:solidFill>
-                <a:latin typeface="Play"/>
-                <a:ea typeface="Play"/>
-                <a:cs typeface="Play"/>
-              </a:rPr>
-              <a:t>Средняя сборка колоды 4 минуты вместо 186, первая версия 1 день вместо 6</a:t>
-            </a:r>
-          </a:p>
-        </p:txBody>
-      </p:sp>
-      <p:sp>
-        <p:nvSpPr>
-          <p:cNvPr id="5" name="card_2"/>
-          <p:cNvSpPr txBox="1"/>
-          <p:nvPr/>
-        </p:nvSpPr>
-        <p:spPr>
-          <a:xfrm>
-            <a:off x="823935" y="4196699"/>
-            <a:ext cx="5060899" cy="1851698"/>
-          </a:xfrm>
-          <a:prstGeom prst="rect">
-            <a:avLst/>
-          </a:prstGeom>
-          <a:noFill/>
-        </p:spPr>
-        <p:txBody>
-          <a:bodyPr wrap="square" lIns="76200" rIns="76200" tIns="50800" bIns="50800">
-            <a:spAutoFit/>
-          </a:bodyPr>
-          <a:lstStyle/>
-          <a:p>
-            <a:pPr algn="l">
-              <a:spcAft>
-                <a:spcPts val="300"/>
-              </a:spcAft>
-              <a:defRPr sz="2400" b="0">
-                <a:solidFill>
-                  <a:srgbClr val="000000"/>
-                </a:solidFill>
-                <a:latin typeface="Play"/>
-                <a:ea typeface="Play"/>
-                <a:cs typeface="Play"/>
-              </a:defRPr>
-            </a:pPr>
-            <a:r>
-              <a:rPr sz="2400" b="0">
-                <a:solidFill>
-                  <a:srgbClr val="000000"/>
-                </a:solidFill>
-                <a:latin typeface="Play"/>
-                <a:ea typeface="Play"/>
-                <a:cs typeface="Play"/>
-              </a:rPr>
-              <a:t>Нарушений стиля 2 из 68 колод, обе исправлены автоматическими правками</a:t>
-            </a:r>
-          </a:p>
-        </p:txBody>
-      </p:sp>
-      <p:sp>
-        <p:nvSpPr>
-          <p:cNvPr id="6" name="card_3"/>
-          <p:cNvSpPr txBox="1"/>
-          <p:nvPr/>
-        </p:nvSpPr>
-        <p:spPr>
-          <a:xfrm>
-            <a:off x="6307165" y="4196699"/>
-            <a:ext cx="5086380" cy="1851698"/>
-          </a:xfrm>
-          <a:prstGeom prst="rect">
-            <a:avLst/>
-          </a:prstGeom>
-          <a:noFill/>
-        </p:spPr>
-        <p:txBody>
-          <a:bodyPr wrap="square" lIns="76200" rIns="76200" tIns="50800" bIns="50800">
-            <a:spAutoFit/>
-          </a:bodyPr>
-          <a:lstStyle/>
-          <a:p>
-            <a:pPr algn="l">
-              <a:spcAft>
-                <a:spcPts val="300"/>
-              </a:spcAft>
-              <a:defRPr sz="2400" b="0">
-                <a:solidFill>
-                  <a:srgbClr val="000000"/>
-                </a:solidFill>
-                <a:latin typeface="Play"/>
-                <a:ea typeface="Play"/>
-                <a:cs typeface="Play"/>
-              </a:defRPr>
-            </a:pPr>
-            <a:r>
-              <a:rPr sz="2400" b="0">
-                <a:solidFill>
-                  <a:srgbClr val="000000"/>
-                </a:solidFill>
-                <a:latin typeface="Play"/>
-                <a:ea typeface="Play"/>
-                <a:cs typeface="Play"/>
-              </a:rPr>
-              <a:t>Дизайнеры закрыли 38 запросов вместо 11 в неделю, рутина ушла в сервис</a:t>
-            </a:r>
-          </a:p>
-        </p:txBody>
-      </p:sp>
-    </p:spTree>
-  </p:cSld>
-  <p:clrMapOvr>
-    <a:masterClrMapping/>
-  </p:clrMapOvr>
-</p:sld>
-</file>
-
-<file path=ppt/slides/slide62.xml><?xml version="1.0" encoding="utf-8"?>
 <p:sld xmlns:a="http://schemas.openxmlformats.org/drawingml/2006/main" xmlns:p="http://schemas.openxmlformats.org/presentationml/2006/main" xmlns:r="http://schemas.openxmlformats.org/officeDocument/2006/relationships">
   <p:cSld>
     <p:bg>
@@ -9523,90 +9126,9 @@
           </a:p>
         </p:txBody>
       </p:sp>
-      <p:pic>
-        <p:nvPicPr>
-          <p:cNvPr id="797" name="Google Shape;797;p60"/>
-          <p:cNvPicPr preferRelativeResize="0"/>
-          <p:nvPr/>
-        </p:nvPicPr>
-        <p:blipFill rotWithShape="1">
-          <a:blip r:embed="rId3">
-            <a:alphaModFix/>
-          </a:blip>
-          <a:srcRect b="0" l="0" r="0" t="0"/>
-          <a:stretch/>
-        </p:blipFill>
-        <p:spPr>
-          <a:xfrm>
-            <a:off x="669096" y="2601017"/>
-            <a:ext cx="450850" cy="450850"/>
-          </a:xfrm>
-          <a:prstGeom prst="rect">
-            <a:avLst/>
-          </a:prstGeom>
-          <a:noFill/>
-          <a:ln>
-            <a:noFill/>
-          </a:ln>
-        </p:spPr>
-      </p:pic>
-      <p:pic>
-        <p:nvPicPr>
-          <p:cNvPr id="798" name="Google Shape;798;p60"/>
-          <p:cNvPicPr preferRelativeResize="0"/>
-          <p:nvPr/>
-        </p:nvPicPr>
-        <p:blipFill rotWithShape="1">
-          <a:blip r:embed="rId4">
-            <a:alphaModFix/>
-          </a:blip>
-          <a:srcRect b="0" l="0" r="0" t="0"/>
-          <a:stretch/>
-        </p:blipFill>
-        <p:spPr>
-          <a:xfrm>
-            <a:off x="8097007" y="2603210"/>
-            <a:ext cx="450851" cy="450851"/>
-          </a:xfrm>
-          <a:prstGeom prst="rect">
-            <a:avLst/>
-          </a:prstGeom>
-          <a:noFill/>
-          <a:ln>
-            <a:noFill/>
-          </a:ln>
-        </p:spPr>
-      </p:pic>
-      <p:pic>
-        <p:nvPicPr>
-          <p:cNvPr id="799" name="Google Shape;799;p60"/>
-          <p:cNvPicPr preferRelativeResize="0"/>
-          <p:nvPr/>
-        </p:nvPicPr>
-        <p:blipFill rotWithShape="1">
-          <a:blip r:embed="rId5">
-            <a:alphaModFix/>
-          </a:blip>
-          <a:srcRect b="0" l="0" r="0" t="0"/>
-          <a:stretch/>
-        </p:blipFill>
-        <p:spPr>
-          <a:xfrm>
-            <a:off x="4383052" y="2601017"/>
-            <a:ext cx="450850" cy="450850"/>
-          </a:xfrm>
-          <a:prstGeom prst="rect">
-            <a:avLst/>
-          </a:prstGeom>
-          <a:noFill/>
-          <a:ln>
-            <a:noFill/>
-          </a:ln>
-        </p:spPr>
-      </p:pic>
       <p:sp>
         <p:nvSpPr>
-          <p:cNvPr id="800" name="title"/>
+          <p:cNvPr id="796" name="title"/>
           <p:cNvSpPr txBox="1"/>
           <p:nvPr/>
         </p:nvSpPr>
@@ -9648,158 +9170,438 @@
                 <a:ea typeface="Arial"/>
                 <a:cs typeface="Arial"/>
               </a:rPr>
-              <a:t>Что мы просим решить</a:t>
+              <a:t>План пилота</a:t>
             </a:r>
           </a:p>
         </p:txBody>
       </p:sp>
-      <p:sp>
-        <p:nvSpPr>
-          <p:cNvPr id="801" name="card_0"/>
-          <p:cNvSpPr txBox="1"/>
+      <p:graphicFrame>
+        <p:nvGraphicFramePr>
+          <p:cNvPr id="797" name="Table 796"/>
+          <p:cNvGraphicFramePr>
+            <a:graphicFrameLocks noGrp="1"/>
+          </p:cNvGraphicFramePr>
           <p:nvPr/>
-        </p:nvSpPr>
-        <p:spPr>
-          <a:xfrm>
-            <a:off x="806889" y="3427872"/>
-            <a:ext cx="2583926" cy="937548"/>
-          </a:xfrm>
-          <a:prstGeom prst="rect">
-            <a:avLst/>
-          </a:prstGeom>
-          <a:noFill/>
-        </p:spPr>
-        <p:txBody>
-          <a:bodyPr wrap="square" lIns="76200" rIns="76200" tIns="50800" bIns="50800">
-            <a:spAutoFit/>
-          </a:bodyPr>
-          <a:lstStyle/>
-          <a:p>
-            <a:pPr algn="l">
-              <a:spcAft>
-                <a:spcPts val="300"/>
-              </a:spcAft>
-              <a:defRPr sz="1600" b="0">
-                <a:solidFill>
-                  <a:srgbClr val="000000"/>
-                </a:solidFill>
-                <a:latin typeface="Play"/>
-                <a:ea typeface="Play"/>
-                <a:cs typeface="Play"/>
-              </a:defRPr>
-            </a:pPr>
-            <a:r>
-              <a:rPr sz="1600" b="0">
-                <a:solidFill>
-                  <a:srgbClr val="000000"/>
-                </a:solidFill>
-                <a:latin typeface="Play"/>
-                <a:ea typeface="Play"/>
-                <a:cs typeface="Play"/>
-              </a:rPr>
-              <a:t>Одобрить запуск сервиса на всю компанию</a:t>
-            </a:r>
-          </a:p>
-        </p:txBody>
-      </p:sp>
-      <p:sp>
-        <p:nvSpPr>
-          <p:cNvPr id="802" name="card_1"/>
-          <p:cNvSpPr txBox="1"/>
-          <p:nvPr/>
-        </p:nvSpPr>
-        <p:spPr>
-          <a:xfrm>
-            <a:off x="4533496" y="3421494"/>
-            <a:ext cx="2583926" cy="937548"/>
-          </a:xfrm>
-          <a:prstGeom prst="rect">
-            <a:avLst/>
-          </a:prstGeom>
-          <a:noFill/>
-        </p:spPr>
-        <p:txBody>
-          <a:bodyPr wrap="square" lIns="76200" rIns="76200" tIns="50800" bIns="50800">
-            <a:spAutoFit/>
-          </a:bodyPr>
-          <a:lstStyle/>
-          <a:p>
-            <a:pPr algn="l">
-              <a:spcAft>
-                <a:spcPts val="300"/>
-              </a:spcAft>
-              <a:defRPr sz="1600" b="0">
-                <a:solidFill>
-                  <a:srgbClr val="000000"/>
-                </a:solidFill>
-                <a:latin typeface="Play"/>
-                <a:ea typeface="Play"/>
-                <a:cs typeface="Play"/>
-              </a:defRPr>
-            </a:pPr>
-            <a:r>
-              <a:rPr sz="1600" b="0">
-                <a:solidFill>
-                  <a:srgbClr val="000000"/>
-                </a:solidFill>
-                <a:latin typeface="Play"/>
-                <a:ea typeface="Play"/>
-                <a:cs typeface="Play"/>
-              </a:rPr>
-              <a:t>Интеграция с корпоративным хранилищем документов</a:t>
-            </a:r>
-          </a:p>
-        </p:txBody>
-      </p:sp>
-      <p:sp>
-        <p:nvSpPr>
-          <p:cNvPr id="803" name="card_2"/>
-          <p:cNvSpPr txBox="1"/>
-          <p:nvPr/>
-        </p:nvSpPr>
-        <p:spPr>
-          <a:xfrm>
-            <a:off x="8264469" y="3425860"/>
-            <a:ext cx="2575194" cy="1160137"/>
-          </a:xfrm>
-          <a:prstGeom prst="rect">
-            <a:avLst/>
-          </a:prstGeom>
-          <a:noFill/>
-        </p:spPr>
-        <p:txBody>
-          <a:bodyPr wrap="square" lIns="76200" rIns="76200" tIns="50800" bIns="50800">
-            <a:spAutoFit/>
-          </a:bodyPr>
-          <a:lstStyle/>
-          <a:p>
-            <a:pPr algn="l">
-              <a:spcAft>
-                <a:spcPts val="300"/>
-              </a:spcAft>
-              <a:defRPr sz="1800" b="0">
-                <a:solidFill>
-                  <a:srgbClr val="000000"/>
-                </a:solidFill>
-                <a:latin typeface="Play"/>
-                <a:ea typeface="Play"/>
-                <a:cs typeface="Play"/>
-              </a:defRPr>
-            </a:pPr>
-            <a:r>
-              <a:rPr sz="1800" b="0">
-                <a:solidFill>
-                  <a:srgbClr val="000000"/>
-                </a:solidFill>
-                <a:latin typeface="Play"/>
-                <a:ea typeface="Play"/>
-                <a:cs typeface="Play"/>
-              </a:rPr>
-              <a:t>Обеспечить поддержку очереди для нагрузки более 20 задач</a:t>
-            </a:r>
-          </a:p>
-        </p:txBody>
-      </p:sp>
+        </p:nvGraphicFramePr>
+        <p:xfrm>
+          <a:off x="677387" y="2200937"/>
+          <a:ext cx="10855878" cy="4127761"/>
+        </p:xfrm>
+        <a:graphic>
+          <a:graphicData uri="http://schemas.openxmlformats.org/drawingml/2006/table">
+            <a:tbl>
+              <a:tblPr firstRow="1" bandRow="1">
+                <a:tableStyleId>{5C22544A-7EE6-4342-B048-85BDC9FD1C3A}</a:tableStyleId>
+              </a:tblPr>
+              <a:tblGrid>
+                <a:gridCol w="3618626"/>
+                <a:gridCol w="3618626"/>
+                <a:gridCol w="3618626"/>
+              </a:tblGrid>
+              <a:tr h="825552">
+                <a:tc>
+                  <a:txBody>
+                    <a:bodyPr/>
+                    <a:lstStyle/>
+                    <a:p>
+                      <a:pPr>
+                        <a:defRPr sz="1300" b="1">
+                          <a:solidFill>
+                            <a:srgbClr val="FFFFFF"/>
+                          </a:solidFill>
+                          <a:latin typeface="Play"/>
+                          <a:ea typeface="Play"/>
+                          <a:cs typeface="Play"/>
+                        </a:defRPr>
+                      </a:pPr>
+                      <a:r>
+                        <a:t>Метрика</a:t>
+                      </a:r>
+                    </a:p>
+                  </a:txBody>
+                  <a:tcPr>
+                    <a:solidFill>
+                      <a:srgbClr val="0077FF"/>
+                    </a:solidFill>
+                  </a:tcPr>
+                </a:tc>
+                <a:tc>
+                  <a:txBody>
+                    <a:bodyPr/>
+                    <a:lstStyle/>
+                    <a:p>
+                      <a:pPr>
+                        <a:defRPr sz="1300" b="1">
+                          <a:solidFill>
+                            <a:srgbClr val="FFFFFF"/>
+                          </a:solidFill>
+                          <a:latin typeface="Play"/>
+                          <a:ea typeface="Play"/>
+                          <a:cs typeface="Play"/>
+                        </a:defRPr>
+                      </a:pPr>
+                      <a:r>
+                        <a:t>До</a:t>
+                      </a:r>
+                    </a:p>
+                  </a:txBody>
+                  <a:tcPr>
+                    <a:solidFill>
+                      <a:srgbClr val="0077FF"/>
+                    </a:solidFill>
+                  </a:tcPr>
+                </a:tc>
+                <a:tc>
+                  <a:txBody>
+                    <a:bodyPr/>
+                    <a:lstStyle/>
+                    <a:p>
+                      <a:pPr>
+                        <a:defRPr sz="1300" b="1">
+                          <a:solidFill>
+                            <a:srgbClr val="FFFFFF"/>
+                          </a:solidFill>
+                          <a:latin typeface="Play"/>
+                          <a:ea typeface="Play"/>
+                          <a:cs typeface="Play"/>
+                        </a:defRPr>
+                      </a:pPr>
+                      <a:r>
+                        <a:t>После</a:t>
+                      </a:r>
+                    </a:p>
+                  </a:txBody>
+                  <a:tcPr>
+                    <a:solidFill>
+                      <a:srgbClr val="0077FF"/>
+                    </a:solidFill>
+                  </a:tcPr>
+                </a:tc>
+              </a:tr>
+              <a:tr h="825552">
+                <a:tc>
+                  <a:txBody>
+                    <a:bodyPr/>
+                    <a:lstStyle/>
+                    <a:p>
+                      <a:pPr>
+                        <a:defRPr sz="1300" b="0">
+                          <a:solidFill>
+                            <a:srgbClr val="000000"/>
+                          </a:solidFill>
+                          <a:latin typeface="Play"/>
+                          <a:ea typeface="Play"/>
+                          <a:cs typeface="Play"/>
+                        </a:defRPr>
+                      </a:pPr>
+                      <a:r>
+                        <a:t>Время сборки (мин)</a:t>
+                      </a:r>
+                    </a:p>
+                  </a:txBody>
+                  <a:tcPr>
+                    <a:solidFill>
+                      <a:srgbClr val="FFFFFF"/>
+                    </a:solidFill>
+                  </a:tcPr>
+                </a:tc>
+                <a:tc>
+                  <a:txBody>
+                    <a:bodyPr/>
+                    <a:lstStyle/>
+                    <a:p>
+                      <a:pPr>
+                        <a:defRPr sz="1300" b="0">
+                          <a:solidFill>
+                            <a:srgbClr val="000000"/>
+                          </a:solidFill>
+                          <a:latin typeface="Play"/>
+                          <a:ea typeface="Play"/>
+                          <a:cs typeface="Play"/>
+                        </a:defRPr>
+                      </a:pPr>
+                      <a:r>
+                        <a:t>186</a:t>
+                      </a:r>
+                    </a:p>
+                  </a:txBody>
+                  <a:tcPr>
+                    <a:solidFill>
+                      <a:srgbClr val="FFFFFF"/>
+                    </a:solidFill>
+                  </a:tcPr>
+                </a:tc>
+                <a:tc>
+                  <a:txBody>
+                    <a:bodyPr/>
+                    <a:lstStyle/>
+                    <a:p>
+                      <a:pPr>
+                        <a:defRPr sz="1300" b="0">
+                          <a:solidFill>
+                            <a:srgbClr val="000000"/>
+                          </a:solidFill>
+                          <a:latin typeface="Play"/>
+                          <a:ea typeface="Play"/>
+                          <a:cs typeface="Play"/>
+                        </a:defRPr>
+                      </a:pPr>
+                      <a:r>
+                        <a:t>4</a:t>
+                      </a:r>
+                    </a:p>
+                  </a:txBody>
+                  <a:tcPr>
+                    <a:solidFill>
+                      <a:srgbClr val="FFFFFF"/>
+                    </a:solidFill>
+                  </a:tcPr>
+                </a:tc>
+              </a:tr>
+              <a:tr h="825552">
+                <a:tc>
+                  <a:txBody>
+                    <a:bodyPr/>
+                    <a:lstStyle/>
+                    <a:p>
+                      <a:pPr>
+                        <a:defRPr sz="1300" b="0">
+                          <a:solidFill>
+                            <a:srgbClr val="000000"/>
+                          </a:solidFill>
+                          <a:latin typeface="Play"/>
+                          <a:ea typeface="Play"/>
+                          <a:cs typeface="Play"/>
+                        </a:defRPr>
+                      </a:pPr>
+                      <a:r>
+                        <a:t>Время первой версии (дней)</a:t>
+                      </a:r>
+                    </a:p>
+                  </a:txBody>
+                  <a:tcPr>
+                    <a:solidFill>
+                      <a:srgbClr val="FFFFFF"/>
+                    </a:solidFill>
+                  </a:tcPr>
+                </a:tc>
+                <a:tc>
+                  <a:txBody>
+                    <a:bodyPr/>
+                    <a:lstStyle/>
+                    <a:p>
+                      <a:pPr>
+                        <a:defRPr sz="1300" b="0">
+                          <a:solidFill>
+                            <a:srgbClr val="000000"/>
+                          </a:solidFill>
+                          <a:latin typeface="Play"/>
+                          <a:ea typeface="Play"/>
+                          <a:cs typeface="Play"/>
+                        </a:defRPr>
+                      </a:pPr>
+                      <a:r>
+                        <a:t>6</a:t>
+                      </a:r>
+                    </a:p>
+                  </a:txBody>
+                  <a:tcPr>
+                    <a:solidFill>
+                      <a:srgbClr val="FFFFFF"/>
+                    </a:solidFill>
+                  </a:tcPr>
+                </a:tc>
+                <a:tc>
+                  <a:txBody>
+                    <a:bodyPr/>
+                    <a:lstStyle/>
+                    <a:p>
+                      <a:pPr>
+                        <a:defRPr sz="1300" b="0">
+                          <a:solidFill>
+                            <a:srgbClr val="000000"/>
+                          </a:solidFill>
+                          <a:latin typeface="Play"/>
+                          <a:ea typeface="Play"/>
+                          <a:cs typeface="Play"/>
+                        </a:defRPr>
+                      </a:pPr>
+                      <a:r>
+                        <a:t>1</a:t>
+                      </a:r>
+                    </a:p>
+                  </a:txBody>
+                  <a:tcPr>
+                    <a:solidFill>
+                      <a:srgbClr val="FFFFFF"/>
+                    </a:solidFill>
+                  </a:tcPr>
+                </a:tc>
+              </a:tr>
+              <a:tr h="825552">
+                <a:tc>
+                  <a:txBody>
+                    <a:bodyPr/>
+                    <a:lstStyle/>
+                    <a:p>
+                      <a:pPr>
+                        <a:defRPr sz="1300" b="0">
+                          <a:solidFill>
+                            <a:srgbClr val="000000"/>
+                          </a:solidFill>
+                          <a:latin typeface="Play"/>
+                          <a:ea typeface="Play"/>
+                          <a:cs typeface="Play"/>
+                        </a:defRPr>
+                      </a:pPr>
+                      <a:r>
+                        <a:t>Нарушения стиля</a:t>
+                      </a:r>
+                    </a:p>
+                  </a:txBody>
+                  <a:tcPr>
+                    <a:solidFill>
+                      <a:srgbClr val="FFFFFF"/>
+                    </a:solidFill>
+                  </a:tcPr>
+                </a:tc>
+                <a:tc>
+                  <a:txBody>
+                    <a:bodyPr/>
+                    <a:lstStyle/>
+                    <a:p>
+                      <a:pPr>
+                        <a:defRPr sz="1300" b="0">
+                          <a:solidFill>
+                            <a:srgbClr val="000000"/>
+                          </a:solidFill>
+                          <a:latin typeface="Play"/>
+                          <a:ea typeface="Play"/>
+                          <a:cs typeface="Play"/>
+                        </a:defRPr>
+                      </a:pPr>
+                      <a:r>
+                        <a:t>19</a:t>
+                      </a:r>
+                    </a:p>
+                  </a:txBody>
+                  <a:tcPr>
+                    <a:solidFill>
+                      <a:srgbClr val="FFFFFF"/>
+                    </a:solidFill>
+                  </a:tcPr>
+                </a:tc>
+                <a:tc>
+                  <a:txBody>
+                    <a:bodyPr/>
+                    <a:lstStyle/>
+                    <a:p>
+                      <a:pPr>
+                        <a:defRPr sz="1300" b="0">
+                          <a:solidFill>
+                            <a:srgbClr val="000000"/>
+                          </a:solidFill>
+                          <a:latin typeface="Play"/>
+                          <a:ea typeface="Play"/>
+                          <a:cs typeface="Play"/>
+                        </a:defRPr>
+                      </a:pPr>
+                      <a:r>
+                        <a:t>2</a:t>
+                      </a:r>
+                    </a:p>
+                  </a:txBody>
+                  <a:tcPr>
+                    <a:solidFill>
+                      <a:srgbClr val="FFFFFF"/>
+                    </a:solidFill>
+                  </a:tcPr>
+                </a:tc>
+              </a:tr>
+              <a:tr h="825553">
+                <a:tc>
+                  <a:txBody>
+                    <a:bodyPr/>
+                    <a:lstStyle/>
+                    <a:p>
+                      <a:pPr>
+                        <a:defRPr sz="1300" b="0">
+                          <a:solidFill>
+                            <a:srgbClr val="000000"/>
+                          </a:solidFill>
+                          <a:latin typeface="Play"/>
+                          <a:ea typeface="Play"/>
+                          <a:cs typeface="Play"/>
+                        </a:defRPr>
+                      </a:pPr>
+                      <a:r>
+                        <a:t>Запросы закрыты в неделю</a:t>
+                      </a:r>
+                    </a:p>
+                  </a:txBody>
+                  <a:tcPr>
+                    <a:solidFill>
+                      <a:srgbClr val="FFFFFF"/>
+                    </a:solidFill>
+                  </a:tcPr>
+                </a:tc>
+                <a:tc>
+                  <a:txBody>
+                    <a:bodyPr/>
+                    <a:lstStyle/>
+                    <a:p>
+                      <a:pPr>
+                        <a:defRPr sz="1300" b="0">
+                          <a:solidFill>
+                            <a:srgbClr val="000000"/>
+                          </a:solidFill>
+                          <a:latin typeface="Play"/>
+                          <a:ea typeface="Play"/>
+                          <a:cs typeface="Play"/>
+                        </a:defRPr>
+                      </a:pPr>
+                      <a:r>
+                        <a:t>11</a:t>
+                      </a:r>
+                    </a:p>
+                  </a:txBody>
+                  <a:tcPr>
+                    <a:solidFill>
+                      <a:srgbClr val="FFFFFF"/>
+                    </a:solidFill>
+                  </a:tcPr>
+                </a:tc>
+                <a:tc>
+                  <a:txBody>
+                    <a:bodyPr/>
+                    <a:lstStyle/>
+                    <a:p>
+                      <a:pPr>
+                        <a:defRPr sz="1300" b="0">
+                          <a:solidFill>
+                            <a:srgbClr val="000000"/>
+                          </a:solidFill>
+                          <a:latin typeface="Play"/>
+                          <a:ea typeface="Play"/>
+                          <a:cs typeface="Play"/>
+                        </a:defRPr>
+                      </a:pPr>
+                      <a:r>
+                        <a:t>38</a:t>
+                      </a:r>
+                    </a:p>
+                  </a:txBody>
+                  <a:tcPr>
+                    <a:solidFill>
+                      <a:srgbClr val="FFFFFF"/>
+                    </a:solidFill>
+                  </a:tcPr>
+                </a:tc>
+              </a:tr>
+            </a:tbl>
+          </a:graphicData>
+        </a:graphic>
+      </p:graphicFrame>
     </p:spTree>
   </p:cSld>
   <p:clrMapOvr>
@@ -9808,7 +9610,7 @@
 </p:sld>
 </file>
 
-<file path=ppt/slides/slide63.xml><?xml version="1.0" encoding="utf-8"?>
+<file path=ppt/slides/slide62.xml><?xml version="1.0" encoding="utf-8"?>
 <p:sld xmlns:a="http://schemas.openxmlformats.org/drawingml/2006/main" xmlns:p="http://schemas.openxmlformats.org/presentationml/2006/main" xmlns:r="http://schemas.openxmlformats.org/officeDocument/2006/relationships">
   <p:cSld>
     <p:bg>
@@ -10112,7 +9914,7 @@
                 <a:ea typeface="Arial"/>
                 <a:cs typeface="Arial"/>
               </a:rPr>
-              <a:t>Риски</a:t>
+              <a:t>Что мы просим решить</a:t>
             </a:r>
           </a:p>
         </p:txBody>
@@ -10161,7 +9963,7 @@
                 <a:ea typeface="Play"/>
                 <a:cs typeface="Play"/>
               </a:rPr>
-              <a:t>Модель может выдумать цифры, которые отсутствуют в материалах</a:t>
+              <a:t>Запуск сервиса на всю компанию в четвертом квартале 2026</a:t>
             </a:r>
           </a:p>
         </p:txBody>
@@ -10192,7 +9994,7 @@
               <a:spcAft>
                 <a:spcPts val="300"/>
               </a:spcAft>
-              <a:defRPr sz="1400" b="0">
+              <a:defRPr sz="1600" b="0">
                 <a:solidFill>
                   <a:srgbClr val="000000"/>
                 </a:solidFill>
@@ -10202,7 +10004,7 @@
               </a:defRPr>
             </a:pPr>
             <a:r>
-              <a:rPr sz="1400" b="0">
+              <a:rPr sz="1600" b="0">
                 <a:solidFill>
                   <a:srgbClr val="000000"/>
                 </a:solidFill>
@@ -10210,7 +10012,7 @@
                 <a:ea typeface="Play"/>
                 <a:cs typeface="Play"/>
               </a:rPr>
-              <a:t>Неполный шаблон приводит к ошибкам, сервис использует рабочую область</a:t>
+              <a:t>Интеграция с хранилищем документов в четвертом квартале 2026</a:t>
             </a:r>
           </a:p>
         </p:txBody>
@@ -10259,7 +10061,7 @@
                 <a:ea typeface="Play"/>
                 <a:cs typeface="Play"/>
               </a:rPr>
-              <a:t>Нагрузка выше 20 задач требует внешней очереди</a:t>
+              <a:t>Подключение 4 команд в третьем квартале 2026</a:t>
             </a:r>
           </a:p>
         </p:txBody>
@@ -10272,7 +10074,7 @@
 </p:sld>
 </file>
 
-<file path=ppt/slides/slide64.xml><?xml version="1.0" encoding="utf-8"?>
+<file path=ppt/slides/slide63.xml><?xml version="1.0" encoding="utf-8"?>
 <p:sld xmlns:a="http://schemas.openxmlformats.org/drawingml/2006/main" xmlns:p="http://schemas.openxmlformats.org/presentationml/2006/main" xmlns:r="http://schemas.openxmlformats.org/officeDocument/2006/relationships">
   <p:cSld>
     <p:bg>
@@ -10552,7 +10354,7 @@
                 <a:ea typeface="Arial"/>
                 <a:cs typeface="Arial"/>
               </a:rPr>
-              <a:t>Вопросы к руководству</a:t>
+              <a:t>Риски</a:t>
             </a:r>
           </a:p>
         </p:txBody>
@@ -10601,7 +10403,7 @@
                 <a:ea typeface="Play"/>
                 <a:cs typeface="Play"/>
               </a:rPr>
-              <a:t>Какие ресурсы нужны для масштабирования сервиса</a:t>
+              <a:t>Модель может выдумать цифры, аудит проверяет</a:t>
             </a:r>
           </a:p>
         </p:txBody>
@@ -10650,7 +10452,7 @@
                 <a:ea typeface="Play"/>
                 <a:cs typeface="Play"/>
               </a:rPr>
-              <a:t>Как обеспечить качество и проверку данных</a:t>
+              <a:t>Неизвестный шаблон может быть плохо сделан</a:t>
             </a:r>
           </a:p>
         </p:txBody>
@@ -10699,7 +10501,277 @@
                 <a:ea typeface="Play"/>
                 <a:cs typeface="Play"/>
               </a:rPr>
-              <a:t>Как быстро интегрировать сервис в существующие процессы</a:t>
+              <a:t>Нагрузка выше 20 задач требует внешней очереди</a:t>
+            </a:r>
+          </a:p>
+        </p:txBody>
+      </p:sp>
+    </p:spTree>
+  </p:cSld>
+  <p:clrMapOvr>
+    <a:masterClrMapping/>
+  </p:clrMapOvr>
+</p:sld>
+</file>
+
+<file path=ppt/slides/slide64.xml><?xml version="1.0" encoding="utf-8"?>
+<p:sld xmlns:a="http://schemas.openxmlformats.org/drawingml/2006/main" xmlns:p="http://schemas.openxmlformats.org/presentationml/2006/main" xmlns:r="http://schemas.openxmlformats.org/officeDocument/2006/relationships">
+  <p:cSld>
+    <p:bg>
+      <p:bgPr>
+        <a:solidFill>
+          <a:schemeClr val="lt2"/>
+        </a:solidFill>
+      </p:bgPr>
+    </p:bg>
+    <p:spTree>
+      <p:nvGrpSpPr>
+        <p:cNvPr id="1" name=""/>
+        <p:cNvGrpSpPr/>
+        <p:nvPr/>
+      </p:nvGrpSpPr>
+      <p:grpSpPr/>
+      <p:sp>
+        <p:nvSpPr>
+          <p:cNvPr id="2" name="title"/>
+          <p:cNvSpPr txBox="1"/>
+          <p:nvPr/>
+        </p:nvSpPr>
+        <p:spPr>
+          <a:xfrm>
+            <a:off x="677387" y="692177"/>
+            <a:ext cx="10855878" cy="822960"/>
+          </a:xfrm>
+          <a:prstGeom prst="rect">
+            <a:avLst/>
+          </a:prstGeom>
+          <a:noFill/>
+        </p:spPr>
+        <p:txBody>
+          <a:bodyPr wrap="square" lIns="76200" rIns="76200" tIns="50800" bIns="50800">
+            <a:spAutoFit/>
+          </a:bodyPr>
+          <a:lstStyle/>
+          <a:p>
+            <a:pPr algn="l">
+              <a:spcAft>
+                <a:spcPts val="300"/>
+              </a:spcAft>
+              <a:defRPr sz="4000">
+                <a:solidFill>
+                  <a:srgbClr val="000000"/>
+                </a:solidFill>
+                <a:latin typeface="Arial"/>
+                <a:ea typeface="Arial"/>
+                <a:cs typeface="Arial"/>
+              </a:defRPr>
+            </a:pPr>
+            <a:r>
+              <a:rPr sz="4000">
+                <a:solidFill>
+                  <a:srgbClr val="000000"/>
+                </a:solidFill>
+                <a:latin typeface="Arial"/>
+                <a:ea typeface="Arial"/>
+                <a:cs typeface="Arial"/>
+              </a:rPr>
+              <a:t>Преимущества</a:t>
+            </a:r>
+          </a:p>
+        </p:txBody>
+      </p:sp>
+      <p:sp>
+        <p:nvSpPr>
+          <p:cNvPr id="3" name="card_0"/>
+          <p:cNvSpPr txBox="1"/>
+          <p:nvPr/>
+        </p:nvSpPr>
+        <p:spPr>
+          <a:xfrm>
+            <a:off x="823935" y="1925604"/>
+            <a:ext cx="5060899" cy="1851698"/>
+          </a:xfrm>
+          <a:prstGeom prst="rect">
+            <a:avLst/>
+          </a:prstGeom>
+          <a:noFill/>
+        </p:spPr>
+        <p:txBody>
+          <a:bodyPr wrap="square" lIns="76200" rIns="76200" tIns="50800" bIns="50800">
+            <a:spAutoFit/>
+          </a:bodyPr>
+          <a:lstStyle/>
+          <a:p>
+            <a:pPr algn="l">
+              <a:spcAft>
+                <a:spcPts val="300"/>
+              </a:spcAft>
+              <a:defRPr sz="2400" b="0">
+                <a:solidFill>
+                  <a:srgbClr val="000000"/>
+                </a:solidFill>
+                <a:latin typeface="Play"/>
+                <a:ea typeface="Play"/>
+                <a:cs typeface="Play"/>
+              </a:defRPr>
+            </a:pPr>
+            <a:r>
+              <a:rPr sz="2400" b="0">
+                <a:solidFill>
+                  <a:srgbClr val="000000"/>
+                </a:solidFill>
+                <a:latin typeface="Play"/>
+                <a:ea typeface="Play"/>
+                <a:cs typeface="Play"/>
+              </a:rPr>
+              <a:t>Сокращение времени сборки до 4 минут</a:t>
+            </a:r>
+          </a:p>
+        </p:txBody>
+      </p:sp>
+      <p:sp>
+        <p:nvSpPr>
+          <p:cNvPr id="4" name="card_1"/>
+          <p:cNvSpPr txBox="1"/>
+          <p:nvPr/>
+        </p:nvSpPr>
+        <p:spPr>
+          <a:xfrm>
+            <a:off x="6307165" y="1927936"/>
+            <a:ext cx="5086380" cy="1851698"/>
+          </a:xfrm>
+          <a:prstGeom prst="rect">
+            <a:avLst/>
+          </a:prstGeom>
+          <a:noFill/>
+        </p:spPr>
+        <p:txBody>
+          <a:bodyPr wrap="square" lIns="76200" rIns="76200" tIns="50800" bIns="50800">
+            <a:spAutoFit/>
+          </a:bodyPr>
+          <a:lstStyle/>
+          <a:p>
+            <a:pPr algn="l">
+              <a:spcAft>
+                <a:spcPts val="300"/>
+              </a:spcAft>
+              <a:defRPr sz="2400" b="0">
+                <a:solidFill>
+                  <a:srgbClr val="000000"/>
+                </a:solidFill>
+                <a:latin typeface="Play"/>
+                <a:ea typeface="Play"/>
+                <a:cs typeface="Play"/>
+              </a:defRPr>
+            </a:pPr>
+            <a:r>
+              <a:rPr sz="2400" b="0">
+                <a:solidFill>
+                  <a:srgbClr val="000000"/>
+                </a:solidFill>
+                <a:latin typeface="Play"/>
+                <a:ea typeface="Play"/>
+                <a:cs typeface="Play"/>
+              </a:rPr>
+              <a:t>Уменьшение нарушений фирменного стиля до 2 из 68</a:t>
+            </a:r>
+          </a:p>
+        </p:txBody>
+      </p:sp>
+      <p:sp>
+        <p:nvSpPr>
+          <p:cNvPr id="5" name="card_2"/>
+          <p:cNvSpPr txBox="1"/>
+          <p:nvPr/>
+        </p:nvSpPr>
+        <p:spPr>
+          <a:xfrm>
+            <a:off x="823935" y="4196699"/>
+            <a:ext cx="5060899" cy="1851698"/>
+          </a:xfrm>
+          <a:prstGeom prst="rect">
+            <a:avLst/>
+          </a:prstGeom>
+          <a:noFill/>
+        </p:spPr>
+        <p:txBody>
+          <a:bodyPr wrap="square" lIns="76200" rIns="76200" tIns="50800" bIns="50800">
+            <a:spAutoFit/>
+          </a:bodyPr>
+          <a:lstStyle/>
+          <a:p>
+            <a:pPr algn="l">
+              <a:spcAft>
+                <a:spcPts val="300"/>
+              </a:spcAft>
+              <a:defRPr sz="2400" b="0">
+                <a:solidFill>
+                  <a:srgbClr val="000000"/>
+                </a:solidFill>
+                <a:latin typeface="Play"/>
+                <a:ea typeface="Play"/>
+                <a:cs typeface="Play"/>
+              </a:defRPr>
+            </a:pPr>
+            <a:r>
+              <a:rPr sz="2400" b="0">
+                <a:solidFill>
+                  <a:srgbClr val="000000"/>
+                </a:solidFill>
+                <a:latin typeface="Play"/>
+                <a:ea typeface="Play"/>
+                <a:cs typeface="Play"/>
+              </a:rPr>
+              <a:t>Экономия 1 400 рублей за 6 недель пилота</a:t>
+            </a:r>
+          </a:p>
+        </p:txBody>
+      </p:sp>
+      <p:sp>
+        <p:nvSpPr>
+          <p:cNvPr id="6" name="card_3"/>
+          <p:cNvSpPr txBox="1"/>
+          <p:nvPr/>
+        </p:nvSpPr>
+        <p:spPr>
+          <a:xfrm>
+            <a:off x="6307165" y="4196699"/>
+            <a:ext cx="5086380" cy="1851698"/>
+          </a:xfrm>
+          <a:prstGeom prst="rect">
+            <a:avLst/>
+          </a:prstGeom>
+          <a:noFill/>
+        </p:spPr>
+        <p:txBody>
+          <a:bodyPr wrap="square" lIns="76200" rIns="76200" tIns="50800" bIns="50800">
+            <a:spAutoFit/>
+          </a:bodyPr>
+          <a:lstStyle/>
+          <a:p>
+            <a:pPr algn="l">
+              <a:spcAft>
+                <a:spcPts val="300"/>
+              </a:spcAft>
+              <a:defRPr sz="2400" b="0">
+                <a:solidFill>
+                  <a:srgbClr val="000000"/>
+                </a:solidFill>
+                <a:latin typeface="Play"/>
+                <a:ea typeface="Play"/>
+                <a:cs typeface="Play"/>
+              </a:defRPr>
+            </a:pPr>
+            <a:r>
+              <a:rPr sz="2400" b="0">
+                <a:solidFill>
+                  <a:srgbClr val="000000"/>
+                </a:solidFill>
+                <a:latin typeface="Play"/>
+                <a:ea typeface="Play"/>
+                <a:cs typeface="Play"/>
+              </a:rPr>
+              <a:t>Повышение производительности дизайнеров</a:t>
             </a:r>
           </a:p>
         </p:txBody>
@@ -10731,7 +10803,7 @@
         <p:spPr>
           <a:xfrm>
             <a:off x="658855" y="692177"/>
-            <a:ext cx="5242438" cy="1447800"/>
+            <a:ext cx="5242438" cy="822960"/>
           </a:xfrm>
           <a:prstGeom prst="rect">
             <a:avLst/>
@@ -10766,7 +10838,7 @@
                 <a:ea typeface="Arial"/>
                 <a:cs typeface="Arial"/>
               </a:rPr>
-              <a:t>Следующие шаги после одобрения</a:t>
+              <a:t>Следующие шаги</a:t>
             </a:r>
           </a:p>
         </p:txBody>
@@ -10779,8 +10851,8 @@
         </p:nvSpPr>
         <p:spPr>
           <a:xfrm>
-            <a:off x="658855" y="2380007"/>
-            <a:ext cx="5242438" cy="3262548"/>
+            <a:off x="658855" y="1783080"/>
+            <a:ext cx="5242438" cy="3859476"/>
           </a:xfrm>
           <a:prstGeom prst="rect">
             <a:avLst/>
@@ -10797,7 +10869,7 @@
               <a:spcAft>
                 <a:spcPts val="300"/>
               </a:spcAft>
-              <a:defRPr sz="2400">
+              <a:defRPr sz="2800">
                 <a:solidFill>
                   <a:srgbClr val="FFFFFF"/>
                 </a:solidFill>
@@ -10807,7 +10879,7 @@
               </a:defRPr>
             </a:pPr>
             <a:r>
-              <a:rPr sz="2400">
+              <a:rPr sz="2800">
                 <a:solidFill>
                   <a:srgbClr val="FFFFFF"/>
                 </a:solidFill>
@@ -10815,7 +10887,7 @@
                 <a:ea typeface="Play"/>
                 <a:cs typeface="Play"/>
               </a:rPr>
-              <a:t>• После одобрения подключить 4 команды в Q3 2026</a:t>
+              <a:t>• Сервис готов к масштабированию на всю компанию</a:t>
             </a:r>
           </a:p>
           <a:p>
@@ -10823,7 +10895,7 @@
               <a:spcAft>
                 <a:spcPts val="300"/>
               </a:spcAft>
-              <a:defRPr sz="2400">
+              <a:defRPr sz="2800">
                 <a:solidFill>
                   <a:srgbClr val="FFFFFF"/>
                 </a:solidFill>
@@ -10833,7 +10905,7 @@
               </a:defRPr>
             </a:pPr>
             <a:r>
-              <a:rPr sz="2400">
+              <a:rPr sz="2800">
                 <a:solidFill>
                   <a:srgbClr val="FFFFFF"/>
                 </a:solidFill>
@@ -10841,7 +10913,7 @@
                 <a:ea typeface="Play"/>
                 <a:cs typeface="Play"/>
               </a:rPr>
-              <a:t>• В Q4 2026 обеспечить домен, HTTPS и доступ для всей компании</a:t>
+              <a:t>• Ожидаем решение о запуске в четвертом квартале 2026</a:t>
             </a:r>
           </a:p>
           <a:p>
@@ -10849,7 +10921,7 @@
               <a:spcAft>
                 <a:spcPts val="300"/>
               </a:spcAft>
-              <a:defRPr sz="2400">
+              <a:defRPr sz="2800">
                 <a:solidFill>
                   <a:srgbClr val="FFFFFF"/>
                 </a:solidFill>
@@ -10859,7 +10931,7 @@
               </a:defRPr>
             </a:pPr>
             <a:r>
-              <a:rPr sz="2400">
+              <a:rPr sz="2800">
                 <a:solidFill>
                   <a:srgbClr val="FFFFFF"/>
                 </a:solidFill>
@@ -10867,7 +10939,7 @@
                 <a:ea typeface="Play"/>
                 <a:cs typeface="Play"/>
               </a:rPr>
-              <a:t>• В Q1 2027 добавить генерацию иллюстраций под стиль шаблона</a:t>
+              <a:t>• Планируем интеграцию с хранилищем документов</a:t>
             </a:r>
           </a:p>
         </p:txBody>

--- a/samples/Шаблон_презентации_VK_Education__classic.pptx
+++ b/samples/Шаблон_презентации_VK_Education__classic.pptx
@@ -19,6 +19,8 @@
     <p:sldId id="318" r:id="rId71"/>
     <p:sldId id="319" r:id="rId72"/>
     <p:sldId id="320" r:id="rId73"/>
+    <p:sldId id="321" r:id="rId74"/>
+    <p:sldId id="322" r:id="rId75"/>
   </p:sldIdLst>
   <p:sldSz cy="6858000" cx="12192000"/>
   <p:notesSz cx="6858000" cy="9144000"/>
@@ -259,6 +261,434 @@
     </a:lvl9pPr>
   </p:defaultTextStyle>
 </p:presentation>
+</file>
+
+<file path=ppt/charts/chart1.xml><?xml version="1.0" encoding="utf-8"?>
+<c:chartSpace xmlns:c="http://schemas.openxmlformats.org/drawingml/2006/chart" xmlns:a="http://schemas.openxmlformats.org/drawingml/2006/main" xmlns:r="http://schemas.openxmlformats.org/officeDocument/2006/relationships">
+  <c:date1904 val="0"/>
+  <c:chart>
+    <c:autoTitleDeleted val="1"/>
+    <c:plotArea>
+      <c:barChart>
+        <c:barDir val="col"/>
+        <c:grouping val="clustered"/>
+        <c:ser>
+          <c:idx val="0"/>
+          <c:order val="0"/>
+          <c:tx>
+            <c:strRef>
+              <c:f>Sheet1!$B$1</c:f>
+              <c:strCache>
+                <c:ptCount val="1"/>
+                <c:pt idx="0">
+                  <c:v>Время (мин)</c:v>
+                </c:pt>
+              </c:strCache>
+            </c:strRef>
+          </c:tx>
+          <c:spPr>
+            <a:solidFill>
+              <a:srgbClr val="0077FF"/>
+            </a:solidFill>
+            <a:ln>
+              <a:solidFill>
+                <a:srgbClr val="0077FF"/>
+              </a:solidFill>
+            </a:ln>
+          </c:spPr>
+          <c:cat>
+            <c:strRef>
+              <c:f>Sheet1!$A$2:$A$3</c:f>
+              <c:strCache>
+                <c:ptCount val="2"/>
+                <c:pt idx="0">
+                  <c:v>Текущий процесс</c:v>
+                </c:pt>
+                <c:pt idx="1">
+                  <c:v>Пилот</c:v>
+                </c:pt>
+              </c:strCache>
+            </c:strRef>
+          </c:cat>
+          <c:val>
+            <c:numRef>
+              <c:f>Sheet1!$B$2:$B$3</c:f>
+              <c:numCache>
+                <c:formatCode>General</c:formatCode>
+                <c:ptCount val="2"/>
+                <c:pt idx="0">
+                  <c:v>186.0</c:v>
+                </c:pt>
+                <c:pt idx="1">
+                  <c:v>4.0</c:v>
+                </c:pt>
+              </c:numCache>
+            </c:numRef>
+          </c:val>
+        </c:ser>
+        <c:dLbls>
+          <c:numFmt formatCode="0&quot; мин&quot;" sourceLinked="0"/>
+          <c:txPr>
+            <a:bodyPr wrap="none"/>
+            <a:lstStyle/>
+            <a:p>
+              <a:pPr>
+                <a:defRPr sz="1100" b="0">
+                  <a:solidFill>
+                    <a:srgbClr val="000000"/>
+                  </a:solidFill>
+                  <a:latin typeface="Play"/>
+                  <a:ea typeface="Play"/>
+                  <a:cs typeface="Play"/>
+                </a:defRPr>
+              </a:pPr>
+            </a:p>
+          </c:txPr>
+          <c:dLblPos val="outEnd"/>
+          <c:showLegendKey val="0"/>
+          <c:showVal val="1"/>
+          <c:showCatName val="0"/>
+          <c:showSerName val="0"/>
+          <c:showPercent val="0"/>
+          <c:showBubbleSize val="0"/>
+          <c:showLeaderLines val="1"/>
+        </c:dLbls>
+        <c:gapWidth val="60"/>
+        <c:axId val="-2068027336"/>
+        <c:axId val="-2113994440"/>
+      </c:barChart>
+      <c:catAx>
+        <c:axId val="-2068027336"/>
+        <c:scaling>
+          <c:orientation val="minMax"/>
+        </c:scaling>
+        <c:delete val="0"/>
+        <c:axPos val="b"/>
+        <c:majorTickMark val="out"/>
+        <c:minorTickMark val="none"/>
+        <c:tickLblPos val="nextTo"/>
+        <c:txPr>
+          <a:bodyPr/>
+          <a:lstStyle/>
+          <a:p>
+            <a:pPr>
+              <a:defRPr sz="1100" b="0">
+                <a:solidFill>
+                  <a:srgbClr val="000000"/>
+                </a:solidFill>
+                <a:latin typeface="Play"/>
+                <a:ea typeface="Play"/>
+                <a:cs typeface="Play"/>
+              </a:defRPr>
+            </a:pPr>
+          </a:p>
+        </c:txPr>
+        <c:crossAx val="-2113994440"/>
+        <c:crosses val="autoZero"/>
+        <c:auto val="1"/>
+        <c:lblAlgn val="ctr"/>
+        <c:lblOffset val="100"/>
+        <c:noMultiLvlLbl val="0"/>
+      </c:catAx>
+      <c:valAx>
+        <c:axId val="-2113994440"/>
+        <c:scaling/>
+        <c:delete val="0"/>
+        <c:axPos val="l"/>
+        <c:majorGridlines>
+          <c:spPr>
+            <a:ln w="9525">
+              <a:solidFill>
+                <a:srgbClr val="D1D1D1"/>
+              </a:solidFill>
+            </a:ln>
+          </c:spPr>
+        </c:majorGridlines>
+        <c:title>
+          <c:tx>
+            <c:rich>
+              <a:bodyPr rot="0" vert="horz"/>
+              <a:lstStyle/>
+              <a:p>
+                <a:pPr>
+                  <a:defRPr sz="1100" b="0">
+                    <a:solidFill>
+                      <a:srgbClr val="000000"/>
+                    </a:solidFill>
+                    <a:latin typeface="Play"/>
+                    <a:ea typeface="Play"/>
+                    <a:cs typeface="Play"/>
+                  </a:defRPr>
+                </a:pPr>
+                <a:r>
+                  <a:t>Время (мин), мин</a:t>
+                </a:r>
+              </a:p>
+            </c:rich>
+          </c:tx>
+          <c:layout/>
+          <c:overlay val="0"/>
+        </c:title>
+        <c:majorTickMark val="out"/>
+        <c:minorTickMark val="none"/>
+        <c:tickLblPos val="nextTo"/>
+        <c:txPr>
+          <a:bodyPr/>
+          <a:lstStyle/>
+          <a:p>
+            <a:pPr>
+              <a:defRPr sz="1100" b="0">
+                <a:solidFill>
+                  <a:srgbClr val="000000"/>
+                </a:solidFill>
+                <a:latin typeface="Play"/>
+                <a:ea typeface="Play"/>
+                <a:cs typeface="Play"/>
+              </a:defRPr>
+            </a:pPr>
+          </a:p>
+        </c:txPr>
+        <c:crossAx val="-2068027336"/>
+        <c:crosses val="autoZero"/>
+      </c:valAx>
+    </c:plotArea>
+    <c:dispBlanksAs val="gap"/>
+  </c:chart>
+  <c:txPr>
+    <a:bodyPr/>
+    <a:lstStyle/>
+    <a:p>
+      <a:pPr>
+        <a:defRPr sz="1200" b="0">
+          <a:solidFill>
+            <a:srgbClr val="000000"/>
+          </a:solidFill>
+          <a:latin typeface="Play"/>
+          <a:ea typeface="Play"/>
+          <a:cs typeface="Play"/>
+        </a:defRPr>
+      </a:pPr>
+      <a:endParaRPr lang="en-US"/>
+    </a:p>
+  </c:txPr>
+  <c:externalData r:id="rId1">
+    <c:autoUpdate val="0"/>
+  </c:externalData>
+</c:chartSpace>
+</file>
+
+<file path=ppt/charts/chart2.xml><?xml version="1.0" encoding="utf-8"?>
+<c:chartSpace xmlns:c="http://schemas.openxmlformats.org/drawingml/2006/chart" xmlns:a="http://schemas.openxmlformats.org/drawingml/2006/main" xmlns:r="http://schemas.openxmlformats.org/officeDocument/2006/relationships">
+  <c:date1904 val="0"/>
+  <c:chart>
+    <c:autoTitleDeleted val="1"/>
+    <c:plotArea>
+      <c:barChart>
+        <c:barDir val="col"/>
+        <c:grouping val="clustered"/>
+        <c:ser>
+          <c:idx val="0"/>
+          <c:order val="0"/>
+          <c:tx>
+            <c:strRef>
+              <c:f>Sheet1!$B$1</c:f>
+              <c:strCache>
+                <c:ptCount val="1"/>
+                <c:pt idx="0">
+                  <c:v>Запросы закрыты</c:v>
+                </c:pt>
+              </c:strCache>
+            </c:strRef>
+          </c:tx>
+          <c:spPr>
+            <a:solidFill>
+              <a:srgbClr val="0077FF"/>
+            </a:solidFill>
+            <a:ln>
+              <a:solidFill>
+                <a:srgbClr val="0077FF"/>
+              </a:solidFill>
+            </a:ln>
+          </c:spPr>
+          <c:cat>
+            <c:strRef>
+              <c:f>Sheet1!$A$2:$A$3</c:f>
+              <c:strCache>
+                <c:ptCount val="2"/>
+                <c:pt idx="0">
+                  <c:v>Текущий процесс</c:v>
+                </c:pt>
+                <c:pt idx="1">
+                  <c:v>Пилот</c:v>
+                </c:pt>
+              </c:strCache>
+            </c:strRef>
+          </c:cat>
+          <c:val>
+            <c:numRef>
+              <c:f>Sheet1!$B$2:$B$3</c:f>
+              <c:numCache>
+                <c:formatCode>General</c:formatCode>
+                <c:ptCount val="2"/>
+                <c:pt idx="0">
+                  <c:v>11.0</c:v>
+                </c:pt>
+                <c:pt idx="1">
+                  <c:v>38.0</c:v>
+                </c:pt>
+              </c:numCache>
+            </c:numRef>
+          </c:val>
+        </c:ser>
+        <c:dLbls>
+          <c:numFmt formatCode="0&quot; запросов&quot;" sourceLinked="0"/>
+          <c:txPr>
+            <a:bodyPr wrap="none"/>
+            <a:lstStyle/>
+            <a:p>
+              <a:pPr>
+                <a:defRPr sz="1100" b="0">
+                  <a:solidFill>
+                    <a:srgbClr val="000000"/>
+                  </a:solidFill>
+                  <a:latin typeface="Play"/>
+                  <a:ea typeface="Play"/>
+                  <a:cs typeface="Play"/>
+                </a:defRPr>
+              </a:pPr>
+            </a:p>
+          </c:txPr>
+          <c:dLblPos val="outEnd"/>
+          <c:showLegendKey val="0"/>
+          <c:showVal val="1"/>
+          <c:showCatName val="0"/>
+          <c:showSerName val="0"/>
+          <c:showPercent val="0"/>
+          <c:showBubbleSize val="0"/>
+          <c:showLeaderLines val="1"/>
+        </c:dLbls>
+        <c:gapWidth val="60"/>
+        <c:axId val="-2068027336"/>
+        <c:axId val="-2113994440"/>
+      </c:barChart>
+      <c:catAx>
+        <c:axId val="-2068027336"/>
+        <c:scaling>
+          <c:orientation val="minMax"/>
+        </c:scaling>
+        <c:delete val="0"/>
+        <c:axPos val="b"/>
+        <c:majorTickMark val="out"/>
+        <c:minorTickMark val="none"/>
+        <c:tickLblPos val="nextTo"/>
+        <c:txPr>
+          <a:bodyPr/>
+          <a:lstStyle/>
+          <a:p>
+            <a:pPr>
+              <a:defRPr sz="1100" b="0">
+                <a:solidFill>
+                  <a:srgbClr val="000000"/>
+                </a:solidFill>
+                <a:latin typeface="Play"/>
+                <a:ea typeface="Play"/>
+                <a:cs typeface="Play"/>
+              </a:defRPr>
+            </a:pPr>
+          </a:p>
+        </c:txPr>
+        <c:crossAx val="-2113994440"/>
+        <c:crosses val="autoZero"/>
+        <c:auto val="1"/>
+        <c:lblAlgn val="ctr"/>
+        <c:lblOffset val="100"/>
+        <c:noMultiLvlLbl val="0"/>
+      </c:catAx>
+      <c:valAx>
+        <c:axId val="-2113994440"/>
+        <c:scaling/>
+        <c:delete val="0"/>
+        <c:axPos val="l"/>
+        <c:majorGridlines>
+          <c:spPr>
+            <a:ln w="9525">
+              <a:solidFill>
+                <a:srgbClr val="D1D1D1"/>
+              </a:solidFill>
+            </a:ln>
+          </c:spPr>
+        </c:majorGridlines>
+        <c:title>
+          <c:tx>
+            <c:rich>
+              <a:bodyPr rot="0" vert="horz"/>
+              <a:lstStyle/>
+              <a:p>
+                <a:pPr>
+                  <a:defRPr sz="1100" b="0">
+                    <a:solidFill>
+                      <a:srgbClr val="000000"/>
+                    </a:solidFill>
+                    <a:latin typeface="Play"/>
+                    <a:ea typeface="Play"/>
+                    <a:cs typeface="Play"/>
+                  </a:defRPr>
+                </a:pPr>
+                <a:r>
+                  <a:t>Запросы закрыты, запросов</a:t>
+                </a:r>
+              </a:p>
+            </c:rich>
+          </c:tx>
+          <c:layout/>
+          <c:overlay val="0"/>
+        </c:title>
+        <c:majorTickMark val="out"/>
+        <c:minorTickMark val="none"/>
+        <c:tickLblPos val="nextTo"/>
+        <c:txPr>
+          <a:bodyPr/>
+          <a:lstStyle/>
+          <a:p>
+            <a:pPr>
+              <a:defRPr sz="1100" b="0">
+                <a:solidFill>
+                  <a:srgbClr val="000000"/>
+                </a:solidFill>
+                <a:latin typeface="Play"/>
+                <a:ea typeface="Play"/>
+                <a:cs typeface="Play"/>
+              </a:defRPr>
+            </a:pPr>
+          </a:p>
+        </c:txPr>
+        <c:crossAx val="-2068027336"/>
+        <c:crosses val="autoZero"/>
+      </c:valAx>
+    </c:plotArea>
+    <c:dispBlanksAs val="gap"/>
+  </c:chart>
+  <c:txPr>
+    <a:bodyPr/>
+    <a:lstStyle/>
+    <a:p>
+      <a:pPr>
+        <a:defRPr sz="1200" b="0">
+          <a:solidFill>
+            <a:srgbClr val="000000"/>
+          </a:solidFill>
+          <a:latin typeface="Play"/>
+          <a:ea typeface="Play"/>
+          <a:cs typeface="Play"/>
+        </a:defRPr>
+      </a:pPr>
+      <a:endParaRPr lang="en-US"/>
+    </a:p>
+  </c:txPr>
+  <c:externalData r:id="rId1">
+    <c:autoUpdate val="0"/>
+  </c:externalData>
+</c:chartSpace>
 </file>
 
 <file path=ppt/notesMasters/notesMaster1.xml><?xml version="1.0" encoding="utf-8"?>
@@ -2087,6 +2517,1982 @@
     <a:masterClrMapping/>
   </p:clrMapOvr>
 </p:notes>
+</file>
+
+<file path=ppt/notesSlides/notesSlide66.xml><?xml version="1.0" encoding="utf-8"?>
+<p:notes xmlns:a="http://schemas.openxmlformats.org/drawingml/2006/main" xmlns:p="http://schemas.openxmlformats.org/presentationml/2006/main" xmlns:r="http://schemas.openxmlformats.org/officeDocument/2006/relationships">
+  <p:cSld>
+    <p:spTree>
+      <p:nvGrpSpPr>
+        <p:cNvPr id="1" name=""/>
+        <p:cNvGrpSpPr/>
+        <p:nvPr/>
+      </p:nvGrpSpPr>
+      <p:grpSpPr>
+        <a:xfrm>
+          <a:off x="0" y="0"/>
+          <a:ext cx="0" cy="0"/>
+          <a:chOff x="0" y="0"/>
+          <a:chExt cx="0" cy="0"/>
+        </a:xfrm>
+      </p:grpSpPr>
+      <p:sp>
+        <p:nvSpPr>
+          <p:cNvPr id="2" name="Slide Image Placeholder 1"/>
+          <p:cNvSpPr>
+            <a:spLocks noGrp="1"/>
+          </p:cNvSpPr>
+          <p:nvPr>
+            <p:ph type="sldImg" idx="3"/>
+          </p:nvPr>
+        </p:nvSpPr>
+        <p:spPr/>
+      </p:sp>
+      <p:sp>
+        <p:nvSpPr>
+          <p:cNvPr id="3" name="Notes Placeholder 2"/>
+          <p:cNvSpPr>
+            <a:spLocks noGrp="1"/>
+          </p:cNvSpPr>
+          <p:nvPr>
+            <p:ph type="body" idx="1"/>
+          </p:nvPr>
+        </p:nvSpPr>
+        <p:spPr/>
+        <p:txBody>
+          <a:bodyPr/>
+          <a:lstStyle/>
+          <a:p/>
+        </p:txBody>
+      </p:sp>
+      <p:sp>
+        <p:nvSpPr>
+          <p:cNvPr id="4" name="Slide Number Placeholder 3"/>
+          <p:cNvSpPr>
+            <a:spLocks noGrp="1"/>
+          </p:cNvSpPr>
+          <p:nvPr>
+            <p:ph type="sldNum" idx="12"/>
+          </p:nvPr>
+        </p:nvSpPr>
+        <p:spPr/>
+      </p:sp>
+    </p:spTree>
+  </p:cSld>
+  <p:clrMapOvr>
+    <a:masterClrMapping/>
+  </p:clrMapOvr>
+</p:notes>
+</file>
+
+<file path=ppt/notesSlides/notesSlide67.xml><?xml version="1.0" encoding="utf-8"?>
+<p:notes xmlns:a="http://schemas.openxmlformats.org/drawingml/2006/main" xmlns:p="http://schemas.openxmlformats.org/presentationml/2006/main" xmlns:r="http://schemas.openxmlformats.org/officeDocument/2006/relationships">
+  <p:cSld>
+    <p:spTree>
+      <p:nvGrpSpPr>
+        <p:cNvPr id="1" name=""/>
+        <p:cNvGrpSpPr/>
+        <p:nvPr/>
+      </p:nvGrpSpPr>
+      <p:grpSpPr>
+        <a:xfrm>
+          <a:off x="0" y="0"/>
+          <a:ext cx="0" cy="0"/>
+          <a:chOff x="0" y="0"/>
+          <a:chExt cx="0" cy="0"/>
+        </a:xfrm>
+      </p:grpSpPr>
+      <p:sp>
+        <p:nvSpPr>
+          <p:cNvPr id="2" name="Slide Image Placeholder 1"/>
+          <p:cNvSpPr>
+            <a:spLocks noGrp="1"/>
+          </p:cNvSpPr>
+          <p:nvPr>
+            <p:ph type="sldImg" idx="3"/>
+          </p:nvPr>
+        </p:nvSpPr>
+        <p:spPr/>
+      </p:sp>
+      <p:sp>
+        <p:nvSpPr>
+          <p:cNvPr id="3" name="Notes Placeholder 2"/>
+          <p:cNvSpPr>
+            <a:spLocks noGrp="1"/>
+          </p:cNvSpPr>
+          <p:nvPr>
+            <p:ph type="body" idx="1"/>
+          </p:nvPr>
+        </p:nvSpPr>
+        <p:spPr/>
+        <p:txBody>
+          <a:bodyPr/>
+          <a:lstStyle/>
+          <a:p/>
+        </p:txBody>
+      </p:sp>
+      <p:sp>
+        <p:nvSpPr>
+          <p:cNvPr id="4" name="Slide Number Placeholder 3"/>
+          <p:cNvSpPr>
+            <a:spLocks noGrp="1"/>
+          </p:cNvSpPr>
+          <p:nvPr>
+            <p:ph type="sldNum" idx="12"/>
+          </p:nvPr>
+        </p:nvSpPr>
+        <p:spPr/>
+      </p:sp>
+    </p:spTree>
+  </p:cSld>
+  <p:clrMapOvr>
+    <a:masterClrMapping/>
+  </p:clrMapOvr>
+</p:notes>
+</file>
+
+<file path=ppt/slideLayouts/slideLayout10.xml><?xml version="1.0" encoding="utf-8"?>
+<p:sldLayout xmlns:a="http://schemas.openxmlformats.org/drawingml/2006/main" xmlns:r="http://schemas.openxmlformats.org/officeDocument/2006/relationships" xmlns:mc="http://schemas.openxmlformats.org/markup-compatibility/2006" xmlns:mv="urn:schemas-microsoft-com:mac:vml" xmlns:p="http://schemas.openxmlformats.org/presentationml/2006/main" xmlns:c="http://schemas.openxmlformats.org/drawingml/2006/chart" xmlns:dgm="http://schemas.openxmlformats.org/drawingml/2006/diagram" xmlns:o="urn:schemas-microsoft-com:office:office" xmlns:v="urn:schemas-microsoft-com:vml" xmlns:pvml="urn:schemas-microsoft-com:office:powerpoint" xmlns:com="http://schemas.openxmlformats.org/drawingml/2006/compatibility" xmlns:p14="http://schemas.microsoft.com/office/powerpoint/2010/main" xmlns:p15="http://schemas.microsoft.com/office/powerpoint/2012/main" xmlns:ahyp="http://schemas.microsoft.com/office/drawing/2018/hyperlinkcolor" matchingName="2 фактоида + текст">
+  <p:cSld name="2 фактоида + текст">
+    <p:spTree>
+      <p:nvGrpSpPr>
+        <p:cNvPr id="93" name="Shape 93"/>
+        <p:cNvGrpSpPr/>
+        <p:nvPr/>
+      </p:nvGrpSpPr>
+      <p:grpSpPr>
+        <a:xfrm>
+          <a:off x="0" y="0"/>
+          <a:ext cx="0" cy="0"/>
+          <a:chOff x="0" y="0"/>
+          <a:chExt cx="0" cy="0"/>
+        </a:xfrm>
+      </p:grpSpPr>
+      <p:sp>
+        <p:nvSpPr>
+          <p:cNvPr id="94" name="Google Shape;94;p11"/>
+          <p:cNvSpPr txBox="1"/>
+          <p:nvPr>
+            <p:ph idx="1" type="body"/>
+          </p:nvPr>
+        </p:nvSpPr>
+        <p:spPr>
+          <a:xfrm>
+            <a:off x="671514" y="1773238"/>
+            <a:ext cx="5135728" cy="4427537"/>
+          </a:xfrm>
+          <a:prstGeom prst="rect">
+            <a:avLst/>
+          </a:prstGeom>
+          <a:noFill/>
+          <a:ln>
+            <a:noFill/>
+          </a:ln>
+        </p:spPr>
+        <p:txBody>
+          <a:bodyPr anchorCtr="0" anchor="t" bIns="0" lIns="0" spcFirstLastPara="1" rIns="0" wrap="square" tIns="0">
+            <a:normAutofit/>
+          </a:bodyPr>
+          <a:lstStyle>
+            <a:lvl1pPr indent="-228600" lvl="0" marL="457200" algn="l">
+              <a:lnSpc>
+                <a:spcPct val="110000"/>
+              </a:lnSpc>
+              <a:spcBef>
+                <a:spcPts val="1000"/>
+              </a:spcBef>
+              <a:spcAft>
+                <a:spcPts val="0"/>
+              </a:spcAft>
+              <a:buClr>
+                <a:schemeClr val="dk1"/>
+              </a:buClr>
+              <a:buSzPts val="1800"/>
+              <a:buNone/>
+              <a:defRPr/>
+            </a:lvl1pPr>
+            <a:lvl2pPr indent="-342900" lvl="1" marL="914400" algn="l">
+              <a:lnSpc>
+                <a:spcPct val="110000"/>
+              </a:lnSpc>
+              <a:spcBef>
+                <a:spcPts val="500"/>
+              </a:spcBef>
+              <a:spcAft>
+                <a:spcPts val="0"/>
+              </a:spcAft>
+              <a:buSzPts val="1800"/>
+              <a:buChar char="•"/>
+              <a:defRPr/>
+            </a:lvl2pPr>
+            <a:lvl3pPr indent="-342900" lvl="2" marL="1371600" algn="l">
+              <a:lnSpc>
+                <a:spcPct val="110000"/>
+              </a:lnSpc>
+              <a:spcBef>
+                <a:spcPts val="500"/>
+              </a:spcBef>
+              <a:spcAft>
+                <a:spcPts val="0"/>
+              </a:spcAft>
+              <a:buClr>
+                <a:schemeClr val="dk1"/>
+              </a:buClr>
+              <a:buSzPts val="1800"/>
+              <a:buChar char="−"/>
+              <a:defRPr/>
+            </a:lvl3pPr>
+            <a:lvl4pPr indent="-342900" lvl="3" marL="1828800" algn="l">
+              <a:lnSpc>
+                <a:spcPct val="90000"/>
+              </a:lnSpc>
+              <a:spcBef>
+                <a:spcPts val="500"/>
+              </a:spcBef>
+              <a:spcAft>
+                <a:spcPts val="0"/>
+              </a:spcAft>
+              <a:buClr>
+                <a:schemeClr val="dk1"/>
+              </a:buClr>
+              <a:buSzPts val="1800"/>
+              <a:buChar char="•"/>
+              <a:defRPr/>
+            </a:lvl4pPr>
+            <a:lvl5pPr indent="-342900" lvl="4" marL="2286000" algn="l">
+              <a:lnSpc>
+                <a:spcPct val="90000"/>
+              </a:lnSpc>
+              <a:spcBef>
+                <a:spcPts val="500"/>
+              </a:spcBef>
+              <a:spcAft>
+                <a:spcPts val="0"/>
+              </a:spcAft>
+              <a:buClr>
+                <a:schemeClr val="dk1"/>
+              </a:buClr>
+              <a:buSzPts val="1800"/>
+              <a:buChar char="•"/>
+              <a:defRPr/>
+            </a:lvl5pPr>
+            <a:lvl6pPr indent="-342900" lvl="5" marL="2743200" algn="l">
+              <a:lnSpc>
+                <a:spcPct val="90000"/>
+              </a:lnSpc>
+              <a:spcBef>
+                <a:spcPts val="500"/>
+              </a:spcBef>
+              <a:spcAft>
+                <a:spcPts val="0"/>
+              </a:spcAft>
+              <a:buClr>
+                <a:schemeClr val="dk1"/>
+              </a:buClr>
+              <a:buSzPts val="1800"/>
+              <a:buChar char="•"/>
+              <a:defRPr/>
+            </a:lvl6pPr>
+            <a:lvl7pPr indent="-342900" lvl="6" marL="3200400" algn="l">
+              <a:lnSpc>
+                <a:spcPct val="90000"/>
+              </a:lnSpc>
+              <a:spcBef>
+                <a:spcPts val="500"/>
+              </a:spcBef>
+              <a:spcAft>
+                <a:spcPts val="0"/>
+              </a:spcAft>
+              <a:buClr>
+                <a:schemeClr val="dk1"/>
+              </a:buClr>
+              <a:buSzPts val="1800"/>
+              <a:buChar char="•"/>
+              <a:defRPr/>
+            </a:lvl7pPr>
+            <a:lvl8pPr indent="-342900" lvl="7" marL="3657600" algn="l">
+              <a:lnSpc>
+                <a:spcPct val="90000"/>
+              </a:lnSpc>
+              <a:spcBef>
+                <a:spcPts val="500"/>
+              </a:spcBef>
+              <a:spcAft>
+                <a:spcPts val="0"/>
+              </a:spcAft>
+              <a:buClr>
+                <a:schemeClr val="dk1"/>
+              </a:buClr>
+              <a:buSzPts val="1800"/>
+              <a:buChar char="•"/>
+              <a:defRPr/>
+            </a:lvl8pPr>
+            <a:lvl9pPr indent="-342900" lvl="8" marL="4114800" algn="l">
+              <a:lnSpc>
+                <a:spcPct val="90000"/>
+              </a:lnSpc>
+              <a:spcBef>
+                <a:spcPts val="500"/>
+              </a:spcBef>
+              <a:spcAft>
+                <a:spcPts val="0"/>
+              </a:spcAft>
+              <a:buClr>
+                <a:schemeClr val="dk1"/>
+              </a:buClr>
+              <a:buSzPts val="1800"/>
+              <a:buChar char="•"/>
+              <a:defRPr/>
+            </a:lvl9pPr>
+          </a:lstStyle>
+          <a:p/>
+        </p:txBody>
+      </p:sp>
+      <p:sp>
+        <p:nvSpPr>
+          <p:cNvPr id="95" name="Google Shape;95;p11"/>
+          <p:cNvSpPr txBox="1"/>
+          <p:nvPr>
+            <p:ph type="title"/>
+          </p:nvPr>
+        </p:nvSpPr>
+        <p:spPr>
+          <a:xfrm>
+            <a:off x="677334" y="692150"/>
+            <a:ext cx="10855854" cy="644241"/>
+          </a:xfrm>
+          <a:prstGeom prst="rect">
+            <a:avLst/>
+          </a:prstGeom>
+          <a:noFill/>
+          <a:ln>
+            <a:noFill/>
+          </a:ln>
+        </p:spPr>
+        <p:txBody>
+          <a:bodyPr anchorCtr="0" anchor="t" bIns="0" lIns="0" spcFirstLastPara="1" rIns="0" wrap="square" tIns="0">
+            <a:noAutofit/>
+          </a:bodyPr>
+          <a:lstStyle>
+            <a:lvl1pPr lvl="0" algn="l">
+              <a:lnSpc>
+                <a:spcPct val="90000"/>
+              </a:lnSpc>
+              <a:spcBef>
+                <a:spcPts val="0"/>
+              </a:spcBef>
+              <a:spcAft>
+                <a:spcPts val="0"/>
+              </a:spcAft>
+              <a:buClr>
+                <a:schemeClr val="accent1"/>
+              </a:buClr>
+              <a:buSzPts val="3600"/>
+              <a:buFont typeface="Play"/>
+              <a:buNone/>
+              <a:defRPr>
+                <a:solidFill>
+                  <a:schemeClr val="accent1"/>
+                </a:solidFill>
+              </a:defRPr>
+            </a:lvl1pPr>
+            <a:lvl2pPr lvl="1">
+              <a:spcBef>
+                <a:spcPts val="0"/>
+              </a:spcBef>
+              <a:spcAft>
+                <a:spcPts val="0"/>
+              </a:spcAft>
+              <a:buSzPts val="1400"/>
+              <a:buNone/>
+              <a:defRPr/>
+            </a:lvl2pPr>
+            <a:lvl3pPr lvl="2">
+              <a:spcBef>
+                <a:spcPts val="0"/>
+              </a:spcBef>
+              <a:spcAft>
+                <a:spcPts val="0"/>
+              </a:spcAft>
+              <a:buSzPts val="1400"/>
+              <a:buNone/>
+              <a:defRPr/>
+            </a:lvl3pPr>
+            <a:lvl4pPr lvl="3">
+              <a:spcBef>
+                <a:spcPts val="0"/>
+              </a:spcBef>
+              <a:spcAft>
+                <a:spcPts val="0"/>
+              </a:spcAft>
+              <a:buSzPts val="1400"/>
+              <a:buNone/>
+              <a:defRPr/>
+            </a:lvl4pPr>
+            <a:lvl5pPr lvl="4">
+              <a:spcBef>
+                <a:spcPts val="0"/>
+              </a:spcBef>
+              <a:spcAft>
+                <a:spcPts val="0"/>
+              </a:spcAft>
+              <a:buSzPts val="1400"/>
+              <a:buNone/>
+              <a:defRPr/>
+            </a:lvl5pPr>
+            <a:lvl6pPr lvl="5">
+              <a:spcBef>
+                <a:spcPts val="0"/>
+              </a:spcBef>
+              <a:spcAft>
+                <a:spcPts val="0"/>
+              </a:spcAft>
+              <a:buSzPts val="1400"/>
+              <a:buNone/>
+              <a:defRPr/>
+            </a:lvl6pPr>
+            <a:lvl7pPr lvl="6">
+              <a:spcBef>
+                <a:spcPts val="0"/>
+              </a:spcBef>
+              <a:spcAft>
+                <a:spcPts val="0"/>
+              </a:spcAft>
+              <a:buSzPts val="1400"/>
+              <a:buNone/>
+              <a:defRPr/>
+            </a:lvl7pPr>
+            <a:lvl8pPr lvl="7">
+              <a:spcBef>
+                <a:spcPts val="0"/>
+              </a:spcBef>
+              <a:spcAft>
+                <a:spcPts val="0"/>
+              </a:spcAft>
+              <a:buSzPts val="1400"/>
+              <a:buNone/>
+              <a:defRPr/>
+            </a:lvl8pPr>
+            <a:lvl9pPr lvl="8">
+              <a:spcBef>
+                <a:spcPts val="0"/>
+              </a:spcBef>
+              <a:spcAft>
+                <a:spcPts val="0"/>
+              </a:spcAft>
+              <a:buSzPts val="1400"/>
+              <a:buNone/>
+              <a:defRPr/>
+            </a:lvl9pPr>
+          </a:lstStyle>
+          <a:p/>
+        </p:txBody>
+      </p:sp>
+      <p:sp>
+        <p:nvSpPr>
+          <p:cNvPr id="96" name="Google Shape;96;p11"/>
+          <p:cNvSpPr txBox="1"/>
+          <p:nvPr>
+            <p:ph idx="11" type="ftr"/>
+          </p:nvPr>
+        </p:nvSpPr>
+        <p:spPr>
+          <a:xfrm>
+            <a:off x="671513" y="167981"/>
+            <a:ext cx="10874375" cy="241437"/>
+          </a:xfrm>
+          <a:prstGeom prst="rect">
+            <a:avLst/>
+          </a:prstGeom>
+          <a:noFill/>
+          <a:ln>
+            <a:noFill/>
+          </a:ln>
+        </p:spPr>
+        <p:txBody>
+          <a:bodyPr anchorCtr="0" anchor="t" bIns="45700" lIns="0" spcFirstLastPara="1" rIns="91425" wrap="square" tIns="45700">
+            <a:noAutofit/>
+          </a:bodyPr>
+          <a:lstStyle>
+            <a:lvl1pPr lvl="0" marR="0" rtl="0" algn="l">
+              <a:spcBef>
+                <a:spcPts val="0"/>
+              </a:spcBef>
+              <a:spcAft>
+                <a:spcPts val="0"/>
+              </a:spcAft>
+              <a:buSzPts val="1400"/>
+              <a:buNone/>
+              <a:defRPr b="0" i="0" sz="1800" u="none" cap="none" strike="noStrike">
+                <a:solidFill>
+                  <a:schemeClr val="dk1"/>
+                </a:solidFill>
+                <a:latin typeface="Arial"/>
+                <a:ea typeface="Arial"/>
+                <a:cs typeface="Arial"/>
+                <a:sym typeface="Arial"/>
+              </a:defRPr>
+            </a:lvl1pPr>
+            <a:lvl2pPr lvl="1" marR="0" rtl="0" algn="l">
+              <a:spcBef>
+                <a:spcPts val="0"/>
+              </a:spcBef>
+              <a:spcAft>
+                <a:spcPts val="0"/>
+              </a:spcAft>
+              <a:buSzPts val="1400"/>
+              <a:buNone/>
+              <a:defRPr b="0" i="0" sz="1800" u="none" cap="none" strike="noStrike">
+                <a:solidFill>
+                  <a:schemeClr val="dk1"/>
+                </a:solidFill>
+                <a:latin typeface="Arial"/>
+                <a:ea typeface="Arial"/>
+                <a:cs typeface="Arial"/>
+                <a:sym typeface="Arial"/>
+              </a:defRPr>
+            </a:lvl2pPr>
+            <a:lvl3pPr lvl="2" marR="0" rtl="0" algn="l">
+              <a:spcBef>
+                <a:spcPts val="0"/>
+              </a:spcBef>
+              <a:spcAft>
+                <a:spcPts val="0"/>
+              </a:spcAft>
+              <a:buSzPts val="1400"/>
+              <a:buNone/>
+              <a:defRPr b="0" i="0" sz="1800" u="none" cap="none" strike="noStrike">
+                <a:solidFill>
+                  <a:schemeClr val="dk1"/>
+                </a:solidFill>
+                <a:latin typeface="Arial"/>
+                <a:ea typeface="Arial"/>
+                <a:cs typeface="Arial"/>
+                <a:sym typeface="Arial"/>
+              </a:defRPr>
+            </a:lvl3pPr>
+            <a:lvl4pPr lvl="3" marR="0" rtl="0" algn="l">
+              <a:spcBef>
+                <a:spcPts val="0"/>
+              </a:spcBef>
+              <a:spcAft>
+                <a:spcPts val="0"/>
+              </a:spcAft>
+              <a:buSzPts val="1400"/>
+              <a:buNone/>
+              <a:defRPr b="0" i="0" sz="1800" u="none" cap="none" strike="noStrike">
+                <a:solidFill>
+                  <a:schemeClr val="dk1"/>
+                </a:solidFill>
+                <a:latin typeface="Arial"/>
+                <a:ea typeface="Arial"/>
+                <a:cs typeface="Arial"/>
+                <a:sym typeface="Arial"/>
+              </a:defRPr>
+            </a:lvl4pPr>
+            <a:lvl5pPr lvl="4" marR="0" rtl="0" algn="l">
+              <a:spcBef>
+                <a:spcPts val="0"/>
+              </a:spcBef>
+              <a:spcAft>
+                <a:spcPts val="0"/>
+              </a:spcAft>
+              <a:buSzPts val="1400"/>
+              <a:buNone/>
+              <a:defRPr b="0" i="0" sz="1800" u="none" cap="none" strike="noStrike">
+                <a:solidFill>
+                  <a:schemeClr val="dk1"/>
+                </a:solidFill>
+                <a:latin typeface="Arial"/>
+                <a:ea typeface="Arial"/>
+                <a:cs typeface="Arial"/>
+                <a:sym typeface="Arial"/>
+              </a:defRPr>
+            </a:lvl5pPr>
+            <a:lvl6pPr lvl="5" marR="0" rtl="0" algn="l">
+              <a:spcBef>
+                <a:spcPts val="0"/>
+              </a:spcBef>
+              <a:spcAft>
+                <a:spcPts val="0"/>
+              </a:spcAft>
+              <a:buSzPts val="1400"/>
+              <a:buNone/>
+              <a:defRPr b="0" i="0" sz="1800" u="none" cap="none" strike="noStrike">
+                <a:solidFill>
+                  <a:schemeClr val="dk1"/>
+                </a:solidFill>
+                <a:latin typeface="Arial"/>
+                <a:ea typeface="Arial"/>
+                <a:cs typeface="Arial"/>
+                <a:sym typeface="Arial"/>
+              </a:defRPr>
+            </a:lvl6pPr>
+            <a:lvl7pPr lvl="6" marR="0" rtl="0" algn="l">
+              <a:spcBef>
+                <a:spcPts val="0"/>
+              </a:spcBef>
+              <a:spcAft>
+                <a:spcPts val="0"/>
+              </a:spcAft>
+              <a:buSzPts val="1400"/>
+              <a:buNone/>
+              <a:defRPr b="0" i="0" sz="1800" u="none" cap="none" strike="noStrike">
+                <a:solidFill>
+                  <a:schemeClr val="dk1"/>
+                </a:solidFill>
+                <a:latin typeface="Arial"/>
+                <a:ea typeface="Arial"/>
+                <a:cs typeface="Arial"/>
+                <a:sym typeface="Arial"/>
+              </a:defRPr>
+            </a:lvl7pPr>
+            <a:lvl8pPr lvl="7" marR="0" rtl="0" algn="l">
+              <a:spcBef>
+                <a:spcPts val="0"/>
+              </a:spcBef>
+              <a:spcAft>
+                <a:spcPts val="0"/>
+              </a:spcAft>
+              <a:buSzPts val="1400"/>
+              <a:buNone/>
+              <a:defRPr b="0" i="0" sz="1800" u="none" cap="none" strike="noStrike">
+                <a:solidFill>
+                  <a:schemeClr val="dk1"/>
+                </a:solidFill>
+                <a:latin typeface="Arial"/>
+                <a:ea typeface="Arial"/>
+                <a:cs typeface="Arial"/>
+                <a:sym typeface="Arial"/>
+              </a:defRPr>
+            </a:lvl8pPr>
+            <a:lvl9pPr lvl="8" marR="0" rtl="0" algn="l">
+              <a:spcBef>
+                <a:spcPts val="0"/>
+              </a:spcBef>
+              <a:spcAft>
+                <a:spcPts val="0"/>
+              </a:spcAft>
+              <a:buSzPts val="1400"/>
+              <a:buNone/>
+              <a:defRPr b="0" i="0" sz="1800" u="none" cap="none" strike="noStrike">
+                <a:solidFill>
+                  <a:schemeClr val="dk1"/>
+                </a:solidFill>
+                <a:latin typeface="Arial"/>
+                <a:ea typeface="Arial"/>
+                <a:cs typeface="Arial"/>
+                <a:sym typeface="Arial"/>
+              </a:defRPr>
+            </a:lvl9pPr>
+          </a:lstStyle>
+          <a:p/>
+        </p:txBody>
+      </p:sp>
+      <p:sp>
+        <p:nvSpPr>
+          <p:cNvPr id="97" name="Google Shape;97;p11"/>
+          <p:cNvSpPr txBox="1"/>
+          <p:nvPr>
+            <p:ph idx="2" type="body"/>
+          </p:nvPr>
+        </p:nvSpPr>
+        <p:spPr>
+          <a:xfrm>
+            <a:off x="6097339" y="3864033"/>
+            <a:ext cx="5417327" cy="1080000"/>
+          </a:xfrm>
+          <a:prstGeom prst="rect">
+            <a:avLst/>
+          </a:prstGeom>
+          <a:noFill/>
+          <a:ln>
+            <a:noFill/>
+          </a:ln>
+        </p:spPr>
+        <p:txBody>
+          <a:bodyPr anchorCtr="0" anchor="b" bIns="0" lIns="0" spcFirstLastPara="1" rIns="0" wrap="square" tIns="0">
+            <a:noAutofit/>
+          </a:bodyPr>
+          <a:lstStyle>
+            <a:lvl1pPr indent="-228600" lvl="0" marL="457200" algn="l">
+              <a:lnSpc>
+                <a:spcPct val="100000"/>
+              </a:lnSpc>
+              <a:spcBef>
+                <a:spcPts val="1000"/>
+              </a:spcBef>
+              <a:spcAft>
+                <a:spcPts val="0"/>
+              </a:spcAft>
+              <a:buClr>
+                <a:schemeClr val="dk1"/>
+              </a:buClr>
+              <a:buSzPts val="8800"/>
+              <a:buNone/>
+              <a:defRPr b="1" i="0" sz="8800">
+                <a:solidFill>
+                  <a:schemeClr val="dk1"/>
+                </a:solidFill>
+                <a:latin typeface="Play"/>
+                <a:ea typeface="Play"/>
+                <a:cs typeface="Play"/>
+                <a:sym typeface="Play"/>
+              </a:defRPr>
+            </a:lvl1pPr>
+            <a:lvl2pPr indent="-342900" lvl="1" marL="914400" algn="l">
+              <a:lnSpc>
+                <a:spcPct val="110000"/>
+              </a:lnSpc>
+              <a:spcBef>
+                <a:spcPts val="500"/>
+              </a:spcBef>
+              <a:spcAft>
+                <a:spcPts val="0"/>
+              </a:spcAft>
+              <a:buSzPts val="1800"/>
+              <a:buChar char="•"/>
+              <a:defRPr/>
+            </a:lvl2pPr>
+            <a:lvl3pPr indent="-342900" lvl="2" marL="1371600" algn="l">
+              <a:lnSpc>
+                <a:spcPct val="110000"/>
+              </a:lnSpc>
+              <a:spcBef>
+                <a:spcPts val="500"/>
+              </a:spcBef>
+              <a:spcAft>
+                <a:spcPts val="0"/>
+              </a:spcAft>
+              <a:buClr>
+                <a:schemeClr val="dk1"/>
+              </a:buClr>
+              <a:buSzPts val="1800"/>
+              <a:buChar char="−"/>
+              <a:defRPr/>
+            </a:lvl3pPr>
+            <a:lvl4pPr indent="-342900" lvl="3" marL="1828800" algn="l">
+              <a:lnSpc>
+                <a:spcPct val="90000"/>
+              </a:lnSpc>
+              <a:spcBef>
+                <a:spcPts val="500"/>
+              </a:spcBef>
+              <a:spcAft>
+                <a:spcPts val="0"/>
+              </a:spcAft>
+              <a:buClr>
+                <a:schemeClr val="dk1"/>
+              </a:buClr>
+              <a:buSzPts val="1800"/>
+              <a:buChar char="•"/>
+              <a:defRPr/>
+            </a:lvl4pPr>
+            <a:lvl5pPr indent="-342900" lvl="4" marL="2286000" algn="l">
+              <a:lnSpc>
+                <a:spcPct val="90000"/>
+              </a:lnSpc>
+              <a:spcBef>
+                <a:spcPts val="500"/>
+              </a:spcBef>
+              <a:spcAft>
+                <a:spcPts val="0"/>
+              </a:spcAft>
+              <a:buClr>
+                <a:schemeClr val="dk1"/>
+              </a:buClr>
+              <a:buSzPts val="1800"/>
+              <a:buChar char="•"/>
+              <a:defRPr/>
+            </a:lvl5pPr>
+            <a:lvl6pPr indent="-342900" lvl="5" marL="2743200" algn="l">
+              <a:lnSpc>
+                <a:spcPct val="90000"/>
+              </a:lnSpc>
+              <a:spcBef>
+                <a:spcPts val="500"/>
+              </a:spcBef>
+              <a:spcAft>
+                <a:spcPts val="0"/>
+              </a:spcAft>
+              <a:buClr>
+                <a:schemeClr val="dk1"/>
+              </a:buClr>
+              <a:buSzPts val="1800"/>
+              <a:buChar char="•"/>
+              <a:defRPr/>
+            </a:lvl6pPr>
+            <a:lvl7pPr indent="-342900" lvl="6" marL="3200400" algn="l">
+              <a:lnSpc>
+                <a:spcPct val="90000"/>
+              </a:lnSpc>
+              <a:spcBef>
+                <a:spcPts val="500"/>
+              </a:spcBef>
+              <a:spcAft>
+                <a:spcPts val="0"/>
+              </a:spcAft>
+              <a:buClr>
+                <a:schemeClr val="dk1"/>
+              </a:buClr>
+              <a:buSzPts val="1800"/>
+              <a:buChar char="•"/>
+              <a:defRPr/>
+            </a:lvl7pPr>
+            <a:lvl8pPr indent="-342900" lvl="7" marL="3657600" algn="l">
+              <a:lnSpc>
+                <a:spcPct val="90000"/>
+              </a:lnSpc>
+              <a:spcBef>
+                <a:spcPts val="500"/>
+              </a:spcBef>
+              <a:spcAft>
+                <a:spcPts val="0"/>
+              </a:spcAft>
+              <a:buClr>
+                <a:schemeClr val="dk1"/>
+              </a:buClr>
+              <a:buSzPts val="1800"/>
+              <a:buChar char="•"/>
+              <a:defRPr/>
+            </a:lvl8pPr>
+            <a:lvl9pPr indent="-342900" lvl="8" marL="4114800" algn="l">
+              <a:lnSpc>
+                <a:spcPct val="90000"/>
+              </a:lnSpc>
+              <a:spcBef>
+                <a:spcPts val="500"/>
+              </a:spcBef>
+              <a:spcAft>
+                <a:spcPts val="0"/>
+              </a:spcAft>
+              <a:buClr>
+                <a:schemeClr val="dk1"/>
+              </a:buClr>
+              <a:buSzPts val="1800"/>
+              <a:buChar char="•"/>
+              <a:defRPr/>
+            </a:lvl9pPr>
+          </a:lstStyle>
+          <a:p/>
+        </p:txBody>
+      </p:sp>
+      <p:sp>
+        <p:nvSpPr>
+          <p:cNvPr id="98" name="Google Shape;98;p11"/>
+          <p:cNvSpPr txBox="1"/>
+          <p:nvPr>
+            <p:ph idx="3" type="body"/>
+          </p:nvPr>
+        </p:nvSpPr>
+        <p:spPr>
+          <a:xfrm>
+            <a:off x="6097338" y="5058095"/>
+            <a:ext cx="5417327" cy="356617"/>
+          </a:xfrm>
+          <a:prstGeom prst="rect">
+            <a:avLst/>
+          </a:prstGeom>
+          <a:noFill/>
+          <a:ln>
+            <a:noFill/>
+          </a:ln>
+        </p:spPr>
+        <p:txBody>
+          <a:bodyPr anchorCtr="0" anchor="t" bIns="0" lIns="0" spcFirstLastPara="1" rIns="0" wrap="square" tIns="0">
+            <a:normAutofit/>
+          </a:bodyPr>
+          <a:lstStyle>
+            <a:lvl1pPr indent="-228600" lvl="0" marL="457200" algn="l">
+              <a:lnSpc>
+                <a:spcPct val="110000"/>
+              </a:lnSpc>
+              <a:spcBef>
+                <a:spcPts val="1000"/>
+              </a:spcBef>
+              <a:spcAft>
+                <a:spcPts val="0"/>
+              </a:spcAft>
+              <a:buClr>
+                <a:schemeClr val="dk1"/>
+              </a:buClr>
+              <a:buSzPts val="1800"/>
+              <a:buNone/>
+              <a:defRPr sz="1800"/>
+            </a:lvl1pPr>
+            <a:lvl2pPr indent="-342900" lvl="1" marL="914400" algn="l">
+              <a:lnSpc>
+                <a:spcPct val="110000"/>
+              </a:lnSpc>
+              <a:spcBef>
+                <a:spcPts val="500"/>
+              </a:spcBef>
+              <a:spcAft>
+                <a:spcPts val="0"/>
+              </a:spcAft>
+              <a:buSzPts val="1800"/>
+              <a:buChar char="•"/>
+              <a:defRPr/>
+            </a:lvl2pPr>
+            <a:lvl3pPr indent="-342900" lvl="2" marL="1371600" algn="l">
+              <a:lnSpc>
+                <a:spcPct val="110000"/>
+              </a:lnSpc>
+              <a:spcBef>
+                <a:spcPts val="500"/>
+              </a:spcBef>
+              <a:spcAft>
+                <a:spcPts val="0"/>
+              </a:spcAft>
+              <a:buClr>
+                <a:schemeClr val="dk1"/>
+              </a:buClr>
+              <a:buSzPts val="1800"/>
+              <a:buChar char="−"/>
+              <a:defRPr/>
+            </a:lvl3pPr>
+            <a:lvl4pPr indent="-342900" lvl="3" marL="1828800" algn="l">
+              <a:lnSpc>
+                <a:spcPct val="90000"/>
+              </a:lnSpc>
+              <a:spcBef>
+                <a:spcPts val="500"/>
+              </a:spcBef>
+              <a:spcAft>
+                <a:spcPts val="0"/>
+              </a:spcAft>
+              <a:buClr>
+                <a:schemeClr val="dk1"/>
+              </a:buClr>
+              <a:buSzPts val="1800"/>
+              <a:buChar char="•"/>
+              <a:defRPr/>
+            </a:lvl4pPr>
+            <a:lvl5pPr indent="-342900" lvl="4" marL="2286000" algn="l">
+              <a:lnSpc>
+                <a:spcPct val="90000"/>
+              </a:lnSpc>
+              <a:spcBef>
+                <a:spcPts val="500"/>
+              </a:spcBef>
+              <a:spcAft>
+                <a:spcPts val="0"/>
+              </a:spcAft>
+              <a:buClr>
+                <a:schemeClr val="dk1"/>
+              </a:buClr>
+              <a:buSzPts val="1800"/>
+              <a:buChar char="•"/>
+              <a:defRPr/>
+            </a:lvl5pPr>
+            <a:lvl6pPr indent="-342900" lvl="5" marL="2743200" algn="l">
+              <a:lnSpc>
+                <a:spcPct val="90000"/>
+              </a:lnSpc>
+              <a:spcBef>
+                <a:spcPts val="500"/>
+              </a:spcBef>
+              <a:spcAft>
+                <a:spcPts val="0"/>
+              </a:spcAft>
+              <a:buClr>
+                <a:schemeClr val="dk1"/>
+              </a:buClr>
+              <a:buSzPts val="1800"/>
+              <a:buChar char="•"/>
+              <a:defRPr/>
+            </a:lvl6pPr>
+            <a:lvl7pPr indent="-342900" lvl="6" marL="3200400" algn="l">
+              <a:lnSpc>
+                <a:spcPct val="90000"/>
+              </a:lnSpc>
+              <a:spcBef>
+                <a:spcPts val="500"/>
+              </a:spcBef>
+              <a:spcAft>
+                <a:spcPts val="0"/>
+              </a:spcAft>
+              <a:buClr>
+                <a:schemeClr val="dk1"/>
+              </a:buClr>
+              <a:buSzPts val="1800"/>
+              <a:buChar char="•"/>
+              <a:defRPr/>
+            </a:lvl7pPr>
+            <a:lvl8pPr indent="-342900" lvl="7" marL="3657600" algn="l">
+              <a:lnSpc>
+                <a:spcPct val="90000"/>
+              </a:lnSpc>
+              <a:spcBef>
+                <a:spcPts val="500"/>
+              </a:spcBef>
+              <a:spcAft>
+                <a:spcPts val="0"/>
+              </a:spcAft>
+              <a:buClr>
+                <a:schemeClr val="dk1"/>
+              </a:buClr>
+              <a:buSzPts val="1800"/>
+              <a:buChar char="•"/>
+              <a:defRPr/>
+            </a:lvl8pPr>
+            <a:lvl9pPr indent="-342900" lvl="8" marL="4114800" algn="l">
+              <a:lnSpc>
+                <a:spcPct val="90000"/>
+              </a:lnSpc>
+              <a:spcBef>
+                <a:spcPts val="500"/>
+              </a:spcBef>
+              <a:spcAft>
+                <a:spcPts val="0"/>
+              </a:spcAft>
+              <a:buClr>
+                <a:schemeClr val="dk1"/>
+              </a:buClr>
+              <a:buSzPts val="1800"/>
+              <a:buChar char="•"/>
+              <a:defRPr/>
+            </a:lvl9pPr>
+          </a:lstStyle>
+          <a:p/>
+        </p:txBody>
+      </p:sp>
+      <p:sp>
+        <p:nvSpPr>
+          <p:cNvPr id="99" name="Google Shape;99;p11"/>
+          <p:cNvSpPr txBox="1"/>
+          <p:nvPr>
+            <p:ph idx="4" type="body"/>
+          </p:nvPr>
+        </p:nvSpPr>
+        <p:spPr>
+          <a:xfrm>
+            <a:off x="6096000" y="1773238"/>
+            <a:ext cx="5417327" cy="1080000"/>
+          </a:xfrm>
+          <a:prstGeom prst="rect">
+            <a:avLst/>
+          </a:prstGeom>
+          <a:noFill/>
+          <a:ln>
+            <a:noFill/>
+          </a:ln>
+        </p:spPr>
+        <p:txBody>
+          <a:bodyPr anchorCtr="0" anchor="b" bIns="0" lIns="0" spcFirstLastPara="1" rIns="0" wrap="square" tIns="0">
+            <a:noAutofit/>
+          </a:bodyPr>
+          <a:lstStyle>
+            <a:lvl1pPr indent="-228600" lvl="0" marL="457200" algn="l">
+              <a:lnSpc>
+                <a:spcPct val="100000"/>
+              </a:lnSpc>
+              <a:spcBef>
+                <a:spcPts val="1000"/>
+              </a:spcBef>
+              <a:spcAft>
+                <a:spcPts val="0"/>
+              </a:spcAft>
+              <a:buClr>
+                <a:schemeClr val="dk1"/>
+              </a:buClr>
+              <a:buSzPts val="8800"/>
+              <a:buNone/>
+              <a:defRPr b="1" i="0" sz="8800">
+                <a:solidFill>
+                  <a:schemeClr val="dk1"/>
+                </a:solidFill>
+                <a:latin typeface="Play"/>
+                <a:ea typeface="Play"/>
+                <a:cs typeface="Play"/>
+                <a:sym typeface="Play"/>
+              </a:defRPr>
+            </a:lvl1pPr>
+            <a:lvl2pPr indent="-342900" lvl="1" marL="914400" algn="l">
+              <a:lnSpc>
+                <a:spcPct val="110000"/>
+              </a:lnSpc>
+              <a:spcBef>
+                <a:spcPts val="500"/>
+              </a:spcBef>
+              <a:spcAft>
+                <a:spcPts val="0"/>
+              </a:spcAft>
+              <a:buSzPts val="1800"/>
+              <a:buChar char="•"/>
+              <a:defRPr/>
+            </a:lvl2pPr>
+            <a:lvl3pPr indent="-342900" lvl="2" marL="1371600" algn="l">
+              <a:lnSpc>
+                <a:spcPct val="110000"/>
+              </a:lnSpc>
+              <a:spcBef>
+                <a:spcPts val="500"/>
+              </a:spcBef>
+              <a:spcAft>
+                <a:spcPts val="0"/>
+              </a:spcAft>
+              <a:buClr>
+                <a:schemeClr val="dk1"/>
+              </a:buClr>
+              <a:buSzPts val="1800"/>
+              <a:buChar char="−"/>
+              <a:defRPr/>
+            </a:lvl3pPr>
+            <a:lvl4pPr indent="-342900" lvl="3" marL="1828800" algn="l">
+              <a:lnSpc>
+                <a:spcPct val="90000"/>
+              </a:lnSpc>
+              <a:spcBef>
+                <a:spcPts val="500"/>
+              </a:spcBef>
+              <a:spcAft>
+                <a:spcPts val="0"/>
+              </a:spcAft>
+              <a:buClr>
+                <a:schemeClr val="dk1"/>
+              </a:buClr>
+              <a:buSzPts val="1800"/>
+              <a:buChar char="•"/>
+              <a:defRPr/>
+            </a:lvl4pPr>
+            <a:lvl5pPr indent="-342900" lvl="4" marL="2286000" algn="l">
+              <a:lnSpc>
+                <a:spcPct val="90000"/>
+              </a:lnSpc>
+              <a:spcBef>
+                <a:spcPts val="500"/>
+              </a:spcBef>
+              <a:spcAft>
+                <a:spcPts val="0"/>
+              </a:spcAft>
+              <a:buClr>
+                <a:schemeClr val="dk1"/>
+              </a:buClr>
+              <a:buSzPts val="1800"/>
+              <a:buChar char="•"/>
+              <a:defRPr/>
+            </a:lvl5pPr>
+            <a:lvl6pPr indent="-342900" lvl="5" marL="2743200" algn="l">
+              <a:lnSpc>
+                <a:spcPct val="90000"/>
+              </a:lnSpc>
+              <a:spcBef>
+                <a:spcPts val="500"/>
+              </a:spcBef>
+              <a:spcAft>
+                <a:spcPts val="0"/>
+              </a:spcAft>
+              <a:buClr>
+                <a:schemeClr val="dk1"/>
+              </a:buClr>
+              <a:buSzPts val="1800"/>
+              <a:buChar char="•"/>
+              <a:defRPr/>
+            </a:lvl6pPr>
+            <a:lvl7pPr indent="-342900" lvl="6" marL="3200400" algn="l">
+              <a:lnSpc>
+                <a:spcPct val="90000"/>
+              </a:lnSpc>
+              <a:spcBef>
+                <a:spcPts val="500"/>
+              </a:spcBef>
+              <a:spcAft>
+                <a:spcPts val="0"/>
+              </a:spcAft>
+              <a:buClr>
+                <a:schemeClr val="dk1"/>
+              </a:buClr>
+              <a:buSzPts val="1800"/>
+              <a:buChar char="•"/>
+              <a:defRPr/>
+            </a:lvl7pPr>
+            <a:lvl8pPr indent="-342900" lvl="7" marL="3657600" algn="l">
+              <a:lnSpc>
+                <a:spcPct val="90000"/>
+              </a:lnSpc>
+              <a:spcBef>
+                <a:spcPts val="500"/>
+              </a:spcBef>
+              <a:spcAft>
+                <a:spcPts val="0"/>
+              </a:spcAft>
+              <a:buClr>
+                <a:schemeClr val="dk1"/>
+              </a:buClr>
+              <a:buSzPts val="1800"/>
+              <a:buChar char="•"/>
+              <a:defRPr/>
+            </a:lvl8pPr>
+            <a:lvl9pPr indent="-342900" lvl="8" marL="4114800" algn="l">
+              <a:lnSpc>
+                <a:spcPct val="90000"/>
+              </a:lnSpc>
+              <a:spcBef>
+                <a:spcPts val="500"/>
+              </a:spcBef>
+              <a:spcAft>
+                <a:spcPts val="0"/>
+              </a:spcAft>
+              <a:buClr>
+                <a:schemeClr val="dk1"/>
+              </a:buClr>
+              <a:buSzPts val="1800"/>
+              <a:buChar char="•"/>
+              <a:defRPr/>
+            </a:lvl9pPr>
+          </a:lstStyle>
+          <a:p/>
+        </p:txBody>
+      </p:sp>
+      <p:sp>
+        <p:nvSpPr>
+          <p:cNvPr id="100" name="Google Shape;100;p11"/>
+          <p:cNvSpPr txBox="1"/>
+          <p:nvPr>
+            <p:ph idx="5" type="body"/>
+          </p:nvPr>
+        </p:nvSpPr>
+        <p:spPr>
+          <a:xfrm>
+            <a:off x="6096000" y="2967300"/>
+            <a:ext cx="5417327" cy="356617"/>
+          </a:xfrm>
+          <a:prstGeom prst="rect">
+            <a:avLst/>
+          </a:prstGeom>
+          <a:noFill/>
+          <a:ln>
+            <a:noFill/>
+          </a:ln>
+        </p:spPr>
+        <p:txBody>
+          <a:bodyPr anchorCtr="0" anchor="t" bIns="0" lIns="0" spcFirstLastPara="1" rIns="0" wrap="square" tIns="0">
+            <a:normAutofit/>
+          </a:bodyPr>
+          <a:lstStyle>
+            <a:lvl1pPr indent="-228600" lvl="0" marL="457200" algn="l">
+              <a:lnSpc>
+                <a:spcPct val="110000"/>
+              </a:lnSpc>
+              <a:spcBef>
+                <a:spcPts val="1000"/>
+              </a:spcBef>
+              <a:spcAft>
+                <a:spcPts val="0"/>
+              </a:spcAft>
+              <a:buClr>
+                <a:schemeClr val="dk1"/>
+              </a:buClr>
+              <a:buSzPts val="1800"/>
+              <a:buNone/>
+              <a:defRPr sz="1800"/>
+            </a:lvl1pPr>
+            <a:lvl2pPr indent="-342900" lvl="1" marL="914400" algn="l">
+              <a:lnSpc>
+                <a:spcPct val="110000"/>
+              </a:lnSpc>
+              <a:spcBef>
+                <a:spcPts val="500"/>
+              </a:spcBef>
+              <a:spcAft>
+                <a:spcPts val="0"/>
+              </a:spcAft>
+              <a:buSzPts val="1800"/>
+              <a:buChar char="•"/>
+              <a:defRPr/>
+            </a:lvl2pPr>
+            <a:lvl3pPr indent="-342900" lvl="2" marL="1371600" algn="l">
+              <a:lnSpc>
+                <a:spcPct val="110000"/>
+              </a:lnSpc>
+              <a:spcBef>
+                <a:spcPts val="500"/>
+              </a:spcBef>
+              <a:spcAft>
+                <a:spcPts val="0"/>
+              </a:spcAft>
+              <a:buClr>
+                <a:schemeClr val="dk1"/>
+              </a:buClr>
+              <a:buSzPts val="1800"/>
+              <a:buChar char="−"/>
+              <a:defRPr/>
+            </a:lvl3pPr>
+            <a:lvl4pPr indent="-342900" lvl="3" marL="1828800" algn="l">
+              <a:lnSpc>
+                <a:spcPct val="90000"/>
+              </a:lnSpc>
+              <a:spcBef>
+                <a:spcPts val="500"/>
+              </a:spcBef>
+              <a:spcAft>
+                <a:spcPts val="0"/>
+              </a:spcAft>
+              <a:buClr>
+                <a:schemeClr val="dk1"/>
+              </a:buClr>
+              <a:buSzPts val="1800"/>
+              <a:buChar char="•"/>
+              <a:defRPr/>
+            </a:lvl4pPr>
+            <a:lvl5pPr indent="-342900" lvl="4" marL="2286000" algn="l">
+              <a:lnSpc>
+                <a:spcPct val="90000"/>
+              </a:lnSpc>
+              <a:spcBef>
+                <a:spcPts val="500"/>
+              </a:spcBef>
+              <a:spcAft>
+                <a:spcPts val="0"/>
+              </a:spcAft>
+              <a:buClr>
+                <a:schemeClr val="dk1"/>
+              </a:buClr>
+              <a:buSzPts val="1800"/>
+              <a:buChar char="•"/>
+              <a:defRPr/>
+            </a:lvl5pPr>
+            <a:lvl6pPr indent="-342900" lvl="5" marL="2743200" algn="l">
+              <a:lnSpc>
+                <a:spcPct val="90000"/>
+              </a:lnSpc>
+              <a:spcBef>
+                <a:spcPts val="500"/>
+              </a:spcBef>
+              <a:spcAft>
+                <a:spcPts val="0"/>
+              </a:spcAft>
+              <a:buClr>
+                <a:schemeClr val="dk1"/>
+              </a:buClr>
+              <a:buSzPts val="1800"/>
+              <a:buChar char="•"/>
+              <a:defRPr/>
+            </a:lvl6pPr>
+            <a:lvl7pPr indent="-342900" lvl="6" marL="3200400" algn="l">
+              <a:lnSpc>
+                <a:spcPct val="90000"/>
+              </a:lnSpc>
+              <a:spcBef>
+                <a:spcPts val="500"/>
+              </a:spcBef>
+              <a:spcAft>
+                <a:spcPts val="0"/>
+              </a:spcAft>
+              <a:buClr>
+                <a:schemeClr val="dk1"/>
+              </a:buClr>
+              <a:buSzPts val="1800"/>
+              <a:buChar char="•"/>
+              <a:defRPr/>
+            </a:lvl7pPr>
+            <a:lvl8pPr indent="-342900" lvl="7" marL="3657600" algn="l">
+              <a:lnSpc>
+                <a:spcPct val="90000"/>
+              </a:lnSpc>
+              <a:spcBef>
+                <a:spcPts val="500"/>
+              </a:spcBef>
+              <a:spcAft>
+                <a:spcPts val="0"/>
+              </a:spcAft>
+              <a:buClr>
+                <a:schemeClr val="dk1"/>
+              </a:buClr>
+              <a:buSzPts val="1800"/>
+              <a:buChar char="•"/>
+              <a:defRPr/>
+            </a:lvl8pPr>
+            <a:lvl9pPr indent="-342900" lvl="8" marL="4114800" algn="l">
+              <a:lnSpc>
+                <a:spcPct val="90000"/>
+              </a:lnSpc>
+              <a:spcBef>
+                <a:spcPts val="500"/>
+              </a:spcBef>
+              <a:spcAft>
+                <a:spcPts val="0"/>
+              </a:spcAft>
+              <a:buClr>
+                <a:schemeClr val="dk1"/>
+              </a:buClr>
+              <a:buSzPts val="1800"/>
+              <a:buChar char="•"/>
+              <a:defRPr/>
+            </a:lvl9pPr>
+          </a:lstStyle>
+          <a:p/>
+        </p:txBody>
+      </p:sp>
+    </p:spTree>
+  </p:cSld>
+  <p:clrMapOvr>
+    <a:masterClrMapping/>
+  </p:clrMapOvr>
+</p:sldLayout>
+</file>
+
+<file path=ppt/slideLayouts/slideLayout12.xml><?xml version="1.0" encoding="utf-8"?>
+<p:sldLayout xmlns:a="http://schemas.openxmlformats.org/drawingml/2006/main" xmlns:r="http://schemas.openxmlformats.org/officeDocument/2006/relationships" xmlns:mc="http://schemas.openxmlformats.org/markup-compatibility/2006" xmlns:mv="urn:schemas-microsoft-com:mac:vml" xmlns:p="http://schemas.openxmlformats.org/presentationml/2006/main" xmlns:c="http://schemas.openxmlformats.org/drawingml/2006/chart" xmlns:dgm="http://schemas.openxmlformats.org/drawingml/2006/diagram" xmlns:o="urn:schemas-microsoft-com:office:office" xmlns:v="urn:schemas-microsoft-com:vml" xmlns:pvml="urn:schemas-microsoft-com:office:powerpoint" xmlns:com="http://schemas.openxmlformats.org/drawingml/2006/compatibility" xmlns:p14="http://schemas.microsoft.com/office/powerpoint/2010/main" xmlns:p15="http://schemas.microsoft.com/office/powerpoint/2012/main" xmlns:ahyp="http://schemas.microsoft.com/office/drawing/2018/hyperlinkcolor" matchingName="2_Заголовок + текст в две колонки">
+  <p:cSld name="2_Заголовок + текст в две колонки">
+    <p:bg>
+      <p:bgPr>
+        <a:solidFill>
+          <a:schemeClr val="lt2"/>
+        </a:solidFill>
+      </p:bgPr>
+    </p:bg>
+    <p:spTree>
+      <p:nvGrpSpPr>
+        <p:cNvPr id="107" name="Shape 107"/>
+        <p:cNvGrpSpPr/>
+        <p:nvPr/>
+      </p:nvGrpSpPr>
+      <p:grpSpPr>
+        <a:xfrm>
+          <a:off x="0" y="0"/>
+          <a:ext cx="0" cy="0"/>
+          <a:chOff x="0" y="0"/>
+          <a:chExt cx="0" cy="0"/>
+        </a:xfrm>
+      </p:grpSpPr>
+      <p:sp>
+        <p:nvSpPr>
+          <p:cNvPr id="108" name="Google Shape;108;p13"/>
+          <p:cNvSpPr txBox="1"/>
+          <p:nvPr>
+            <p:ph idx="1" type="body"/>
+          </p:nvPr>
+        </p:nvSpPr>
+        <p:spPr>
+          <a:xfrm>
+            <a:off x="677334" y="1773238"/>
+            <a:ext cx="5304365" cy="4427537"/>
+          </a:xfrm>
+          <a:prstGeom prst="rect">
+            <a:avLst/>
+          </a:prstGeom>
+          <a:noFill/>
+          <a:ln>
+            <a:noFill/>
+          </a:ln>
+        </p:spPr>
+        <p:txBody>
+          <a:bodyPr anchorCtr="0" anchor="t" bIns="0" lIns="0" spcFirstLastPara="1" rIns="0" wrap="square" tIns="0">
+            <a:normAutofit/>
+          </a:bodyPr>
+          <a:lstStyle>
+            <a:lvl1pPr indent="-228600" lvl="0" marL="457200" algn="l">
+              <a:lnSpc>
+                <a:spcPct val="110000"/>
+              </a:lnSpc>
+              <a:spcBef>
+                <a:spcPts val="1000"/>
+              </a:spcBef>
+              <a:spcAft>
+                <a:spcPts val="0"/>
+              </a:spcAft>
+              <a:buClr>
+                <a:schemeClr val="dk1"/>
+              </a:buClr>
+              <a:buSzPts val="1600"/>
+              <a:buNone/>
+              <a:defRPr b="0" i="0">
+                <a:latin typeface="Play"/>
+                <a:ea typeface="Play"/>
+                <a:cs typeface="Play"/>
+                <a:sym typeface="Play"/>
+              </a:defRPr>
+            </a:lvl1pPr>
+            <a:lvl2pPr indent="-317500" lvl="1" marL="914400" algn="l">
+              <a:lnSpc>
+                <a:spcPct val="110000"/>
+              </a:lnSpc>
+              <a:spcBef>
+                <a:spcPts val="500"/>
+              </a:spcBef>
+              <a:spcAft>
+                <a:spcPts val="0"/>
+              </a:spcAft>
+              <a:buSzPts val="1400"/>
+              <a:buChar char="•"/>
+              <a:defRPr b="0" i="0">
+                <a:latin typeface="Play"/>
+                <a:ea typeface="Play"/>
+                <a:cs typeface="Play"/>
+                <a:sym typeface="Play"/>
+              </a:defRPr>
+            </a:lvl2pPr>
+            <a:lvl3pPr indent="-304800" lvl="2" marL="1371600" algn="l">
+              <a:lnSpc>
+                <a:spcPct val="110000"/>
+              </a:lnSpc>
+              <a:spcBef>
+                <a:spcPts val="500"/>
+              </a:spcBef>
+              <a:spcAft>
+                <a:spcPts val="0"/>
+              </a:spcAft>
+              <a:buClr>
+                <a:schemeClr val="dk1"/>
+              </a:buClr>
+              <a:buSzPts val="1200"/>
+              <a:buChar char="−"/>
+              <a:defRPr b="0" i="0">
+                <a:latin typeface="Play"/>
+                <a:ea typeface="Play"/>
+                <a:cs typeface="Play"/>
+                <a:sym typeface="Play"/>
+              </a:defRPr>
+            </a:lvl3pPr>
+            <a:lvl4pPr indent="-342900" lvl="3" marL="1828800" algn="l">
+              <a:lnSpc>
+                <a:spcPct val="90000"/>
+              </a:lnSpc>
+              <a:spcBef>
+                <a:spcPts val="500"/>
+              </a:spcBef>
+              <a:spcAft>
+                <a:spcPts val="0"/>
+              </a:spcAft>
+              <a:buClr>
+                <a:schemeClr val="dk1"/>
+              </a:buClr>
+              <a:buSzPts val="1800"/>
+              <a:buChar char="•"/>
+              <a:defRPr/>
+            </a:lvl4pPr>
+            <a:lvl5pPr indent="-342900" lvl="4" marL="2286000" algn="l">
+              <a:lnSpc>
+                <a:spcPct val="90000"/>
+              </a:lnSpc>
+              <a:spcBef>
+                <a:spcPts val="500"/>
+              </a:spcBef>
+              <a:spcAft>
+                <a:spcPts val="0"/>
+              </a:spcAft>
+              <a:buClr>
+                <a:schemeClr val="dk1"/>
+              </a:buClr>
+              <a:buSzPts val="1800"/>
+              <a:buChar char="•"/>
+              <a:defRPr/>
+            </a:lvl5pPr>
+            <a:lvl6pPr indent="-342900" lvl="5" marL="2743200" algn="l">
+              <a:lnSpc>
+                <a:spcPct val="90000"/>
+              </a:lnSpc>
+              <a:spcBef>
+                <a:spcPts val="500"/>
+              </a:spcBef>
+              <a:spcAft>
+                <a:spcPts val="0"/>
+              </a:spcAft>
+              <a:buClr>
+                <a:schemeClr val="dk1"/>
+              </a:buClr>
+              <a:buSzPts val="1800"/>
+              <a:buChar char="•"/>
+              <a:defRPr/>
+            </a:lvl6pPr>
+            <a:lvl7pPr indent="-342900" lvl="6" marL="3200400" algn="l">
+              <a:lnSpc>
+                <a:spcPct val="90000"/>
+              </a:lnSpc>
+              <a:spcBef>
+                <a:spcPts val="500"/>
+              </a:spcBef>
+              <a:spcAft>
+                <a:spcPts val="0"/>
+              </a:spcAft>
+              <a:buClr>
+                <a:schemeClr val="dk1"/>
+              </a:buClr>
+              <a:buSzPts val="1800"/>
+              <a:buChar char="•"/>
+              <a:defRPr/>
+            </a:lvl7pPr>
+            <a:lvl8pPr indent="-342900" lvl="7" marL="3657600" algn="l">
+              <a:lnSpc>
+                <a:spcPct val="90000"/>
+              </a:lnSpc>
+              <a:spcBef>
+                <a:spcPts val="500"/>
+              </a:spcBef>
+              <a:spcAft>
+                <a:spcPts val="0"/>
+              </a:spcAft>
+              <a:buClr>
+                <a:schemeClr val="dk1"/>
+              </a:buClr>
+              <a:buSzPts val="1800"/>
+              <a:buChar char="•"/>
+              <a:defRPr/>
+            </a:lvl8pPr>
+            <a:lvl9pPr indent="-342900" lvl="8" marL="4114800" algn="l">
+              <a:lnSpc>
+                <a:spcPct val="90000"/>
+              </a:lnSpc>
+              <a:spcBef>
+                <a:spcPts val="500"/>
+              </a:spcBef>
+              <a:spcAft>
+                <a:spcPts val="0"/>
+              </a:spcAft>
+              <a:buClr>
+                <a:schemeClr val="dk1"/>
+              </a:buClr>
+              <a:buSzPts val="1800"/>
+              <a:buChar char="•"/>
+              <a:defRPr/>
+            </a:lvl9pPr>
+          </a:lstStyle>
+          <a:p/>
+        </p:txBody>
+      </p:sp>
+      <p:sp>
+        <p:nvSpPr>
+          <p:cNvPr id="109" name="Google Shape;109;p13"/>
+          <p:cNvSpPr txBox="1"/>
+          <p:nvPr>
+            <p:ph idx="2" type="body"/>
+          </p:nvPr>
+        </p:nvSpPr>
+        <p:spPr>
+          <a:xfrm>
+            <a:off x="6228824" y="1773239"/>
+            <a:ext cx="5304364" cy="4427537"/>
+          </a:xfrm>
+          <a:prstGeom prst="rect">
+            <a:avLst/>
+          </a:prstGeom>
+          <a:noFill/>
+          <a:ln>
+            <a:noFill/>
+          </a:ln>
+        </p:spPr>
+        <p:txBody>
+          <a:bodyPr anchorCtr="0" anchor="t" bIns="0" lIns="0" spcFirstLastPara="1" rIns="0" wrap="square" tIns="0">
+            <a:normAutofit/>
+          </a:bodyPr>
+          <a:lstStyle>
+            <a:lvl1pPr indent="-228600" lvl="0" marL="457200" algn="l">
+              <a:lnSpc>
+                <a:spcPct val="110000"/>
+              </a:lnSpc>
+              <a:spcBef>
+                <a:spcPts val="1000"/>
+              </a:spcBef>
+              <a:spcAft>
+                <a:spcPts val="0"/>
+              </a:spcAft>
+              <a:buClr>
+                <a:schemeClr val="dk1"/>
+              </a:buClr>
+              <a:buSzPts val="1600"/>
+              <a:buNone/>
+              <a:defRPr b="0" i="0">
+                <a:latin typeface="Play"/>
+                <a:ea typeface="Play"/>
+                <a:cs typeface="Play"/>
+                <a:sym typeface="Play"/>
+              </a:defRPr>
+            </a:lvl1pPr>
+            <a:lvl2pPr indent="-317500" lvl="1" marL="914400" algn="l">
+              <a:lnSpc>
+                <a:spcPct val="110000"/>
+              </a:lnSpc>
+              <a:spcBef>
+                <a:spcPts val="500"/>
+              </a:spcBef>
+              <a:spcAft>
+                <a:spcPts val="0"/>
+              </a:spcAft>
+              <a:buSzPts val="1400"/>
+              <a:buChar char="•"/>
+              <a:defRPr b="0" i="0">
+                <a:latin typeface="Play"/>
+                <a:ea typeface="Play"/>
+                <a:cs typeface="Play"/>
+                <a:sym typeface="Play"/>
+              </a:defRPr>
+            </a:lvl2pPr>
+            <a:lvl3pPr indent="-304800" lvl="2" marL="1371600" algn="l">
+              <a:lnSpc>
+                <a:spcPct val="110000"/>
+              </a:lnSpc>
+              <a:spcBef>
+                <a:spcPts val="500"/>
+              </a:spcBef>
+              <a:spcAft>
+                <a:spcPts val="0"/>
+              </a:spcAft>
+              <a:buClr>
+                <a:schemeClr val="dk1"/>
+              </a:buClr>
+              <a:buSzPts val="1200"/>
+              <a:buChar char="−"/>
+              <a:defRPr b="0" i="0">
+                <a:latin typeface="Play"/>
+                <a:ea typeface="Play"/>
+                <a:cs typeface="Play"/>
+                <a:sym typeface="Play"/>
+              </a:defRPr>
+            </a:lvl3pPr>
+            <a:lvl4pPr indent="-342900" lvl="3" marL="1828800" algn="l">
+              <a:lnSpc>
+                <a:spcPct val="90000"/>
+              </a:lnSpc>
+              <a:spcBef>
+                <a:spcPts val="500"/>
+              </a:spcBef>
+              <a:spcAft>
+                <a:spcPts val="0"/>
+              </a:spcAft>
+              <a:buClr>
+                <a:schemeClr val="dk1"/>
+              </a:buClr>
+              <a:buSzPts val="1800"/>
+              <a:buChar char="•"/>
+              <a:defRPr/>
+            </a:lvl4pPr>
+            <a:lvl5pPr indent="-342900" lvl="4" marL="2286000" algn="l">
+              <a:lnSpc>
+                <a:spcPct val="90000"/>
+              </a:lnSpc>
+              <a:spcBef>
+                <a:spcPts val="500"/>
+              </a:spcBef>
+              <a:spcAft>
+                <a:spcPts val="0"/>
+              </a:spcAft>
+              <a:buClr>
+                <a:schemeClr val="dk1"/>
+              </a:buClr>
+              <a:buSzPts val="1800"/>
+              <a:buChar char="•"/>
+              <a:defRPr/>
+            </a:lvl5pPr>
+            <a:lvl6pPr indent="-342900" lvl="5" marL="2743200" algn="l">
+              <a:lnSpc>
+                <a:spcPct val="90000"/>
+              </a:lnSpc>
+              <a:spcBef>
+                <a:spcPts val="500"/>
+              </a:spcBef>
+              <a:spcAft>
+                <a:spcPts val="0"/>
+              </a:spcAft>
+              <a:buClr>
+                <a:schemeClr val="dk1"/>
+              </a:buClr>
+              <a:buSzPts val="1800"/>
+              <a:buChar char="•"/>
+              <a:defRPr/>
+            </a:lvl6pPr>
+            <a:lvl7pPr indent="-342900" lvl="6" marL="3200400" algn="l">
+              <a:lnSpc>
+                <a:spcPct val="90000"/>
+              </a:lnSpc>
+              <a:spcBef>
+                <a:spcPts val="500"/>
+              </a:spcBef>
+              <a:spcAft>
+                <a:spcPts val="0"/>
+              </a:spcAft>
+              <a:buClr>
+                <a:schemeClr val="dk1"/>
+              </a:buClr>
+              <a:buSzPts val="1800"/>
+              <a:buChar char="•"/>
+              <a:defRPr/>
+            </a:lvl7pPr>
+            <a:lvl8pPr indent="-342900" lvl="7" marL="3657600" algn="l">
+              <a:lnSpc>
+                <a:spcPct val="90000"/>
+              </a:lnSpc>
+              <a:spcBef>
+                <a:spcPts val="500"/>
+              </a:spcBef>
+              <a:spcAft>
+                <a:spcPts val="0"/>
+              </a:spcAft>
+              <a:buClr>
+                <a:schemeClr val="dk1"/>
+              </a:buClr>
+              <a:buSzPts val="1800"/>
+              <a:buChar char="•"/>
+              <a:defRPr/>
+            </a:lvl8pPr>
+            <a:lvl9pPr indent="-342900" lvl="8" marL="4114800" algn="l">
+              <a:lnSpc>
+                <a:spcPct val="90000"/>
+              </a:lnSpc>
+              <a:spcBef>
+                <a:spcPts val="500"/>
+              </a:spcBef>
+              <a:spcAft>
+                <a:spcPts val="0"/>
+              </a:spcAft>
+              <a:buClr>
+                <a:schemeClr val="dk1"/>
+              </a:buClr>
+              <a:buSzPts val="1800"/>
+              <a:buChar char="•"/>
+              <a:defRPr/>
+            </a:lvl9pPr>
+          </a:lstStyle>
+          <a:p/>
+        </p:txBody>
+      </p:sp>
+      <p:sp>
+        <p:nvSpPr>
+          <p:cNvPr id="110" name="Google Shape;110;p13"/>
+          <p:cNvSpPr txBox="1"/>
+          <p:nvPr>
+            <p:ph type="title"/>
+          </p:nvPr>
+        </p:nvSpPr>
+        <p:spPr>
+          <a:xfrm>
+            <a:off x="677334" y="692150"/>
+            <a:ext cx="10855854" cy="644241"/>
+          </a:xfrm>
+          <a:prstGeom prst="rect">
+            <a:avLst/>
+          </a:prstGeom>
+          <a:noFill/>
+          <a:ln>
+            <a:noFill/>
+          </a:ln>
+        </p:spPr>
+        <p:txBody>
+          <a:bodyPr anchorCtr="0" anchor="t" bIns="0" lIns="0" spcFirstLastPara="1" rIns="0" wrap="square" tIns="0">
+            <a:noAutofit/>
+          </a:bodyPr>
+          <a:lstStyle>
+            <a:lvl1pPr lvl="0" algn="l">
+              <a:lnSpc>
+                <a:spcPct val="90000"/>
+              </a:lnSpc>
+              <a:spcBef>
+                <a:spcPts val="0"/>
+              </a:spcBef>
+              <a:spcAft>
+                <a:spcPts val="0"/>
+              </a:spcAft>
+              <a:buClr>
+                <a:schemeClr val="accent1"/>
+              </a:buClr>
+              <a:buSzPts val="3600"/>
+              <a:buFont typeface="Play"/>
+              <a:buNone/>
+              <a:defRPr>
+                <a:solidFill>
+                  <a:schemeClr val="accent1"/>
+                </a:solidFill>
+              </a:defRPr>
+            </a:lvl1pPr>
+            <a:lvl2pPr lvl="1">
+              <a:spcBef>
+                <a:spcPts val="0"/>
+              </a:spcBef>
+              <a:spcAft>
+                <a:spcPts val="0"/>
+              </a:spcAft>
+              <a:buSzPts val="1400"/>
+              <a:buNone/>
+              <a:defRPr/>
+            </a:lvl2pPr>
+            <a:lvl3pPr lvl="2">
+              <a:spcBef>
+                <a:spcPts val="0"/>
+              </a:spcBef>
+              <a:spcAft>
+                <a:spcPts val="0"/>
+              </a:spcAft>
+              <a:buSzPts val="1400"/>
+              <a:buNone/>
+              <a:defRPr/>
+            </a:lvl3pPr>
+            <a:lvl4pPr lvl="3">
+              <a:spcBef>
+                <a:spcPts val="0"/>
+              </a:spcBef>
+              <a:spcAft>
+                <a:spcPts val="0"/>
+              </a:spcAft>
+              <a:buSzPts val="1400"/>
+              <a:buNone/>
+              <a:defRPr/>
+            </a:lvl4pPr>
+            <a:lvl5pPr lvl="4">
+              <a:spcBef>
+                <a:spcPts val="0"/>
+              </a:spcBef>
+              <a:spcAft>
+                <a:spcPts val="0"/>
+              </a:spcAft>
+              <a:buSzPts val="1400"/>
+              <a:buNone/>
+              <a:defRPr/>
+            </a:lvl5pPr>
+            <a:lvl6pPr lvl="5">
+              <a:spcBef>
+                <a:spcPts val="0"/>
+              </a:spcBef>
+              <a:spcAft>
+                <a:spcPts val="0"/>
+              </a:spcAft>
+              <a:buSzPts val="1400"/>
+              <a:buNone/>
+              <a:defRPr/>
+            </a:lvl6pPr>
+            <a:lvl7pPr lvl="6">
+              <a:spcBef>
+                <a:spcPts val="0"/>
+              </a:spcBef>
+              <a:spcAft>
+                <a:spcPts val="0"/>
+              </a:spcAft>
+              <a:buSzPts val="1400"/>
+              <a:buNone/>
+              <a:defRPr/>
+            </a:lvl7pPr>
+            <a:lvl8pPr lvl="7">
+              <a:spcBef>
+                <a:spcPts val="0"/>
+              </a:spcBef>
+              <a:spcAft>
+                <a:spcPts val="0"/>
+              </a:spcAft>
+              <a:buSzPts val="1400"/>
+              <a:buNone/>
+              <a:defRPr/>
+            </a:lvl8pPr>
+            <a:lvl9pPr lvl="8">
+              <a:spcBef>
+                <a:spcPts val="0"/>
+              </a:spcBef>
+              <a:spcAft>
+                <a:spcPts val="0"/>
+              </a:spcAft>
+              <a:buSzPts val="1400"/>
+              <a:buNone/>
+              <a:defRPr/>
+            </a:lvl9pPr>
+          </a:lstStyle>
+          <a:p/>
+        </p:txBody>
+      </p:sp>
+    </p:spTree>
+  </p:cSld>
+  <p:clrMapOvr>
+    <a:masterClrMapping/>
+  </p:clrMapOvr>
+</p:sldLayout>
 </file>
 
 <file path=ppt/slideLayouts/slideLayout18.xml><?xml version="1.0" encoding="utf-8"?>
@@ -4616,6 +7022,8 @@
   <p:sldLayoutIdLst>
     <p:sldLayoutId id="2147483649" r:id="rId2"/>
     <p:sldLayoutId id="2147483653" r:id="rId6"/>
+    <p:sldLayoutId id="2147483657" r:id="rId10"/>
+    <p:sldLayoutId id="2147483659" r:id="rId12"/>
     <p:sldLayoutId id="2147483665" r:id="rId18"/>
   </p:sldLayoutIdLst>
   <p:hf dt="0" ftr="0" hdr="0" sldNum="0"/>
@@ -7584,7 +9992,7 @@
                 <a:ea typeface="Arial"/>
                 <a:cs typeface="Arial"/>
               </a:rPr>
-              <a:t>Автоматическая вёрстка презентаций</a:t>
+              <a:t>Защита инициативы: сервис автоматической вёрстки</a:t>
             </a:r>
           </a:p>
         </p:txBody>
@@ -7607,35 +10015,9 @@
         <p:nvPr/>
       </p:nvGrpSpPr>
       <p:grpSpPr/>
-      <p:cxnSp>
-        <p:nvCxnSpPr>
-          <p:cNvPr id="986" name="Google Shape;986;p76"/>
-          <p:cNvCxnSpPr/>
-          <p:nvPr/>
-        </p:nvCxnSpPr>
-        <p:spPr>
-          <a:xfrm rot="10800000">
-            <a:off x="-42658" y="3591512"/>
-            <a:ext cx="12234658" cy="0"/>
-          </a:xfrm>
-          <a:prstGeom prst="straightConnector1">
-            <a:avLst/>
-          </a:prstGeom>
-          <a:noFill/>
-          <a:ln cap="flat" cmpd="sng" w="12700">
-            <a:solidFill>
-              <a:srgbClr val="E1E1E2"/>
-            </a:solidFill>
-            <a:prstDash val="solid"/>
-            <a:miter lim="8000"/>
-            <a:headEnd len="sm" w="sm" type="none"/>
-            <a:tailEnd len="sm" w="sm" type="none"/>
-          </a:ln>
-        </p:spPr>
-      </p:cxnSp>
       <p:sp>
         <p:nvSpPr>
-          <p:cNvPr id="987" name="title"/>
+          <p:cNvPr id="2" name="title"/>
           <p:cNvSpPr txBox="1"/>
           <p:nvPr/>
         </p:nvSpPr>
@@ -7684,14 +10066,14 @@
       </p:sp>
       <p:sp>
         <p:nvSpPr>
-          <p:cNvPr id="988" name="body"/>
+          <p:cNvPr id="3" name="body"/>
           <p:cNvSpPr txBox="1"/>
           <p:nvPr/>
         </p:nvSpPr>
         <p:spPr>
           <a:xfrm>
-            <a:off x="677387" y="2200937"/>
-            <a:ext cx="10855878" cy="2645542"/>
+            <a:off x="677387" y="1783080"/>
+            <a:ext cx="10855878" cy="1341120"/>
           </a:xfrm>
           <a:prstGeom prst="rect">
             <a:avLst/>
@@ -7726,7 +10108,7 @@
                 <a:ea typeface="Play"/>
                 <a:cs typeface="Play"/>
               </a:rPr>
-              <a:t>• Сборка одной колоды 12 слайдов занимает 186 минут</a:t>
+              <a:t>• Сборка одной презентации занимает 186 мин</a:t>
             </a:r>
           </a:p>
           <a:p>
@@ -7752,7 +10134,7 @@
                 <a:ea typeface="Play"/>
                 <a:cs typeface="Play"/>
               </a:rPr>
-              <a:t>• 74 минуты уходит на правки после ревью дизайнера</a:t>
+              <a:t>• 74 мин уходит на правки после ревью</a:t>
             </a:r>
           </a:p>
           <a:p>
@@ -7781,60 +10163,26 @@
               <a:t>• 19 из 42 колод нарушают фирменный стиль</a:t>
             </a:r>
           </a:p>
-          <a:p>
-            <a:pPr algn="l">
-              <a:spcAft>
-                <a:spcPts val="300"/>
-              </a:spcAft>
-              <a:defRPr sz="2400">
-                <a:solidFill>
-                  <a:srgbClr val="000000"/>
-                </a:solidFill>
-                <a:latin typeface="Play"/>
-                <a:ea typeface="Play"/>
-                <a:cs typeface="Play"/>
-              </a:defRPr>
-            </a:pPr>
-            <a:r>
-              <a:rPr sz="2400">
-                <a:solidFill>
-                  <a:srgbClr val="000000"/>
-                </a:solidFill>
-                <a:latin typeface="Play"/>
-                <a:ea typeface="Play"/>
-                <a:cs typeface="Play"/>
-              </a:rPr>
-              <a:t>• Дизайн-отдел из 4 человек закрывает 11 запросов в неделю из 27</a:t>
-            </a:r>
-          </a:p>
-          <a:p>
-            <a:pPr algn="l">
-              <a:spcAft>
-                <a:spcPts val="300"/>
-              </a:spcAft>
-              <a:defRPr sz="2400">
-                <a:solidFill>
-                  <a:srgbClr val="000000"/>
-                </a:solidFill>
-                <a:latin typeface="Play"/>
-                <a:ea typeface="Play"/>
-                <a:cs typeface="Play"/>
-              </a:defRPr>
-            </a:pPr>
-            <a:r>
-              <a:rPr sz="2400">
-                <a:solidFill>
-                  <a:srgbClr val="000000"/>
-                </a:solidFill>
-                <a:latin typeface="Play"/>
-                <a:ea typeface="Play"/>
-                <a:cs typeface="Play"/>
-              </a:rPr>
-              <a:t>• Средний срок ожидания в очереди — 6 рабочих дней</a:t>
-            </a:r>
-          </a:p>
         </p:txBody>
       </p:sp>
+      <p:graphicFrame>
+        <p:nvGraphicFramePr>
+          <p:cNvPr id="4" name="Chart 3"/>
+          <p:cNvGraphicFramePr>
+            <a:graphicFrameLocks noGrp="1"/>
+          </p:cNvGraphicFramePr>
+          <p:nvPr/>
+        </p:nvGraphicFramePr>
+        <p:xfrm>
+          <a:off x="677387" y="3295650"/>
+          <a:ext cx="10855878" cy="2905147"/>
+        </p:xfrm>
+        <a:graphic>
+          <a:graphicData uri="http://schemas.openxmlformats.org/drawingml/2006/chart">
+            <c:chart xmlns:c="http://schemas.openxmlformats.org/drawingml/2006/chart" r:id="rId2"/>
+          </a:graphicData>
+        </a:graphic>
+      </p:graphicFrame>
     </p:spTree>
   </p:cSld>
   <p:clrMapOvr>
@@ -7909,49 +10257,215 @@
           </a:p>
         </p:txBody>
       </p:sp>
+      <p:grpSp>
+        <p:nvGrpSpPr>
+          <p:cNvPr id="3" name="icon:builtin-layout"/>
+          <p:cNvGrpSpPr/>
+          <p:nvPr/>
+        </p:nvGrpSpPr>
+        <p:grpSpPr>
+          <a:xfrm>
+            <a:off x="750253" y="1855946"/>
+            <a:ext cx="437197" cy="437197"/>
+            <a:chOff x="750253" y="1855946"/>
+            <a:chExt cx="437197" cy="437197"/>
+          </a:xfrm>
+        </p:grpSpPr>
+        <p:sp>
+          <p:nvSpPr>
+            <p:cNvPr id="4" name="Rounded Rectangle 3"/>
+            <p:cNvSpPr/>
+            <p:nvPr/>
+          </p:nvSpPr>
+          <p:spPr>
+            <a:xfrm>
+              <a:off x="750253" y="1855946"/>
+              <a:ext cx="437197" cy="437197"/>
+            </a:xfrm>
+            <a:prstGeom prst="roundRect">
+              <a:avLst>
+                <a:gd name="adj" fmla="val 11111"/>
+              </a:avLst>
+            </a:prstGeom>
+            <a:noFill/>
+            <a:ln w="48577" cap="rnd">
+              <a:solidFill>
+                <a:srgbClr val="0077FF"/>
+              </a:solidFill>
+              <a:round/>
+            </a:ln>
+            <a:effectLst/>
+          </p:spPr>
+          <p:style>
+            <a:lnRef idx="1">
+              <a:schemeClr val="accent1"/>
+            </a:lnRef>
+            <a:fillRef idx="3">
+              <a:schemeClr val="accent1"/>
+            </a:fillRef>
+            <a:effectRef idx="2">
+              <a:schemeClr val="accent1"/>
+            </a:effectRef>
+            <a:fontRef idx="minor">
+              <a:schemeClr val="lt1"/>
+            </a:fontRef>
+          </p:style>
+          <p:txBody>
+            <a:bodyPr rtlCol="0" anchor="ctr"/>
+            <a:lstStyle/>
+            <a:p>
+              <a:pPr algn="ctr"/>
+            </a:p>
+          </p:txBody>
+        </p:sp>
+        <p:sp>
+          <p:nvSpPr>
+            <p:cNvPr id="5" name="Freeform 4"/>
+            <p:cNvSpPr/>
+            <p:nvPr/>
+          </p:nvSpPr>
+          <p:spPr>
+            <a:xfrm>
+              <a:off x="750253" y="2001678"/>
+              <a:ext cx="437197" cy="0"/>
+            </a:xfrm>
+            <a:custGeom>
+              <a:avLst/>
+              <a:gdLst/>
+              <a:ahLst/>
+              <a:cxnLst/>
+              <a:rect l="l" t="t" r="r" b="b"/>
+              <a:pathLst>
+                <a:path w="437197" h="0">
+                  <a:moveTo>
+                    <a:pt x="0" y="0"/>
+                  </a:moveTo>
+                  <a:lnTo>
+                    <a:pt x="437197" y="0"/>
+                  </a:lnTo>
+                </a:path>
+              </a:pathLst>
+            </a:custGeom>
+            <a:noFill/>
+            <a:ln w="48577" cap="rnd">
+              <a:solidFill>
+                <a:srgbClr val="0077FF"/>
+              </a:solidFill>
+              <a:round/>
+            </a:ln>
+            <a:effectLst/>
+          </p:spPr>
+          <p:style>
+            <a:lnRef idx="1">
+              <a:schemeClr val="accent1"/>
+            </a:lnRef>
+            <a:fillRef idx="3">
+              <a:schemeClr val="accent1"/>
+            </a:fillRef>
+            <a:effectRef idx="2">
+              <a:schemeClr val="accent1"/>
+            </a:effectRef>
+            <a:fontRef idx="minor">
+              <a:schemeClr val="lt1"/>
+            </a:fontRef>
+          </p:style>
+          <p:txBody>
+            <a:bodyPr rtlCol="0" anchor="ctr"/>
+            <a:lstStyle/>
+            <a:p>
+              <a:pPr algn="ctr"/>
+            </a:p>
+          </p:txBody>
+        </p:sp>
+        <p:sp>
+          <p:nvSpPr>
+            <p:cNvPr id="6" name="Freeform 5"/>
+            <p:cNvSpPr/>
+            <p:nvPr/>
+          </p:nvSpPr>
+          <p:spPr>
+            <a:xfrm>
+              <a:off x="895985" y="2001678"/>
+              <a:ext cx="0" cy="291465"/>
+            </a:xfrm>
+            <a:custGeom>
+              <a:avLst/>
+              <a:gdLst/>
+              <a:ahLst/>
+              <a:cxnLst/>
+              <a:rect l="l" t="t" r="r" b="b"/>
+              <a:pathLst>
+                <a:path w="0" h="291465">
+                  <a:moveTo>
+                    <a:pt x="0" y="0"/>
+                  </a:moveTo>
+                  <a:lnTo>
+                    <a:pt x="0" y="291465"/>
+                  </a:lnTo>
+                </a:path>
+              </a:pathLst>
+            </a:custGeom>
+            <a:noFill/>
+            <a:ln w="48577" cap="rnd">
+              <a:solidFill>
+                <a:srgbClr val="0077FF"/>
+              </a:solidFill>
+              <a:round/>
+            </a:ln>
+            <a:effectLst/>
+          </p:spPr>
+          <p:style>
+            <a:lnRef idx="1">
+              <a:schemeClr val="accent1"/>
+            </a:lnRef>
+            <a:fillRef idx="3">
+              <a:schemeClr val="accent1"/>
+            </a:fillRef>
+            <a:effectRef idx="2">
+              <a:schemeClr val="accent1"/>
+            </a:effectRef>
+            <a:fontRef idx="minor">
+              <a:schemeClr val="lt1"/>
+            </a:fontRef>
+          </p:style>
+          <p:txBody>
+            <a:bodyPr rtlCol="0" anchor="ctr"/>
+            <a:lstStyle/>
+            <a:p>
+              <a:pPr algn="ctr"/>
+            </a:p>
+          </p:txBody>
+        </p:sp>
+      </p:grpSp>
       <p:sp>
         <p:nvSpPr>
-          <p:cNvPr id="3" name="Pentagon 2"/>
-          <p:cNvSpPr/>
+          <p:cNvPr id="7" name="item_0"/>
+          <p:cNvSpPr txBox="1"/>
           <p:nvPr/>
         </p:nvSpPr>
         <p:spPr>
           <a:xfrm>
-            <a:off x="677387" y="1824859"/>
-            <a:ext cx="10855878" cy="634621"/>
+            <a:off x="1522636" y="1792605"/>
+            <a:ext cx="10010630" cy="1325887"/>
           </a:xfrm>
-          <a:prstGeom prst="homePlate">
+          <a:prstGeom prst="rect">
             <a:avLst/>
           </a:prstGeom>
-          <a:solidFill>
-            <a:srgbClr val="0077FF"/>
-          </a:solidFill>
-          <a:ln>
-            <a:noFill/>
-          </a:ln>
+          <a:noFill/>
         </p:spPr>
-        <p:style>
-          <a:lnRef idx="1">
-            <a:schemeClr val="accent1"/>
-          </a:lnRef>
-          <a:fillRef idx="3">
-            <a:schemeClr val="accent1"/>
-          </a:fillRef>
-          <a:effectRef idx="2">
-            <a:schemeClr val="accent1"/>
-          </a:effectRef>
-          <a:fontRef idx="minor">
-            <a:schemeClr val="lt1"/>
-          </a:fontRef>
-        </p:style>
         <p:txBody>
-          <a:bodyPr rtlCol="0" anchor="ctr" wrap="square" lIns="12700" rIns="12700" tIns="12700" bIns="12700"/>
+          <a:bodyPr wrap="square" lIns="76200" rIns="76200" tIns="50800" bIns="50800">
+            <a:spAutoFit/>
+          </a:bodyPr>
           <a:lstStyle/>
           <a:p>
-            <a:pPr algn="ctr">
-              <a:defRPr sz="1400" b="0">
-                <a:solidFill>
-                  <a:srgbClr val="FFFFFF"/>
+            <a:pPr algn="l">
+              <a:spcAft>
+                <a:spcPts val="300"/>
+              </a:spcAft>
+              <a:defRPr sz="2800">
+                <a:solidFill>
+                  <a:srgbClr val="000000"/>
                 </a:solidFill>
                 <a:latin typeface="Play"/>
                 <a:ea typeface="Play"/>
@@ -7959,62 +10473,293 @@
               </a:defRPr>
             </a:pPr>
             <a:r>
-              <a:rPr sz="1400" b="0">
-                <a:solidFill>
-                  <a:srgbClr val="FFFFFF"/>
+              <a:rPr sz="2800">
+                <a:solidFill>
+                  <a:srgbClr val="000000"/>
                 </a:solidFill>
                 <a:latin typeface="Play"/>
                 <a:ea typeface="Play"/>
                 <a:cs typeface="Play"/>
               </a:rPr>
-              <a:t>Загрузка шаблона</a:t>
+              <a:t>Сервис принимает шаблон pptx и материалы</a:t>
             </a:r>
           </a:p>
         </p:txBody>
       </p:sp>
+      <p:grpSp>
+        <p:nvGrpSpPr>
+          <p:cNvPr id="8" name="icon:builtin-presentation"/>
+          <p:cNvGrpSpPr/>
+          <p:nvPr/>
+        </p:nvGrpSpPr>
+        <p:grpSpPr>
+          <a:xfrm>
+            <a:off x="750253" y="3352807"/>
+            <a:ext cx="437197" cy="388620"/>
+            <a:chOff x="750253" y="3352807"/>
+            <a:chExt cx="437197" cy="388620"/>
+          </a:xfrm>
+        </p:grpSpPr>
+        <p:sp>
+          <p:nvSpPr>
+            <p:cNvPr id="9" name="Rounded Rectangle 8"/>
+            <p:cNvSpPr/>
+            <p:nvPr/>
+          </p:nvSpPr>
+          <p:spPr>
+            <a:xfrm>
+              <a:off x="750253" y="3352807"/>
+              <a:ext cx="437197" cy="291465"/>
+            </a:xfrm>
+            <a:prstGeom prst="roundRect">
+              <a:avLst>
+                <a:gd name="adj" fmla="val 12500"/>
+              </a:avLst>
+            </a:prstGeom>
+            <a:noFill/>
+            <a:ln w="48577" cap="rnd">
+              <a:solidFill>
+                <a:srgbClr val="0077FF"/>
+              </a:solidFill>
+              <a:round/>
+            </a:ln>
+            <a:effectLst/>
+          </p:spPr>
+          <p:style>
+            <a:lnRef idx="1">
+              <a:schemeClr val="accent1"/>
+            </a:lnRef>
+            <a:fillRef idx="3">
+              <a:schemeClr val="accent1"/>
+            </a:fillRef>
+            <a:effectRef idx="2">
+              <a:schemeClr val="accent1"/>
+            </a:effectRef>
+            <a:fontRef idx="minor">
+              <a:schemeClr val="lt1"/>
+            </a:fontRef>
+          </p:style>
+          <p:txBody>
+            <a:bodyPr rtlCol="0" anchor="ctr"/>
+            <a:lstStyle/>
+            <a:p>
+              <a:pPr algn="ctr"/>
+            </a:p>
+          </p:txBody>
+        </p:sp>
+        <p:sp>
+          <p:nvSpPr>
+            <p:cNvPr id="10" name="Freeform 9"/>
+            <p:cNvSpPr/>
+            <p:nvPr/>
+          </p:nvSpPr>
+          <p:spPr>
+            <a:xfrm>
+              <a:off x="968852" y="3644272"/>
+              <a:ext cx="0" cy="97155"/>
+            </a:xfrm>
+            <a:custGeom>
+              <a:avLst/>
+              <a:gdLst/>
+              <a:ahLst/>
+              <a:cxnLst/>
+              <a:rect l="l" t="t" r="r" b="b"/>
+              <a:pathLst>
+                <a:path w="0" h="97155">
+                  <a:moveTo>
+                    <a:pt x="0" y="0"/>
+                  </a:moveTo>
+                  <a:lnTo>
+                    <a:pt x="0" y="97155"/>
+                  </a:lnTo>
+                </a:path>
+              </a:pathLst>
+            </a:custGeom>
+            <a:noFill/>
+            <a:ln w="48577" cap="rnd">
+              <a:solidFill>
+                <a:srgbClr val="0077FF"/>
+              </a:solidFill>
+              <a:round/>
+            </a:ln>
+            <a:effectLst/>
+          </p:spPr>
+          <p:style>
+            <a:lnRef idx="1">
+              <a:schemeClr val="accent1"/>
+            </a:lnRef>
+            <a:fillRef idx="3">
+              <a:schemeClr val="accent1"/>
+            </a:fillRef>
+            <a:effectRef idx="2">
+              <a:schemeClr val="accent1"/>
+            </a:effectRef>
+            <a:fontRef idx="minor">
+              <a:schemeClr val="lt1"/>
+            </a:fontRef>
+          </p:style>
+          <p:txBody>
+            <a:bodyPr rtlCol="0" anchor="ctr"/>
+            <a:lstStyle/>
+            <a:p>
+              <a:pPr algn="ctr"/>
+            </a:p>
+          </p:txBody>
+        </p:sp>
+        <p:sp>
+          <p:nvSpPr>
+            <p:cNvPr id="11" name="Freeform 10"/>
+            <p:cNvSpPr/>
+            <p:nvPr/>
+          </p:nvSpPr>
+          <p:spPr>
+            <a:xfrm>
+              <a:off x="871697" y="3741427"/>
+              <a:ext cx="194310" cy="0"/>
+            </a:xfrm>
+            <a:custGeom>
+              <a:avLst/>
+              <a:gdLst/>
+              <a:ahLst/>
+              <a:cxnLst/>
+              <a:rect l="l" t="t" r="r" b="b"/>
+              <a:pathLst>
+                <a:path w="194310" h="0">
+                  <a:moveTo>
+                    <a:pt x="0" y="0"/>
+                  </a:moveTo>
+                  <a:lnTo>
+                    <a:pt x="194310" y="0"/>
+                  </a:lnTo>
+                </a:path>
+              </a:pathLst>
+            </a:custGeom>
+            <a:noFill/>
+            <a:ln w="48577" cap="rnd">
+              <a:solidFill>
+                <a:srgbClr val="0077FF"/>
+              </a:solidFill>
+              <a:round/>
+            </a:ln>
+            <a:effectLst/>
+          </p:spPr>
+          <p:style>
+            <a:lnRef idx="1">
+              <a:schemeClr val="accent1"/>
+            </a:lnRef>
+            <a:fillRef idx="3">
+              <a:schemeClr val="accent1"/>
+            </a:fillRef>
+            <a:effectRef idx="2">
+              <a:schemeClr val="accent1"/>
+            </a:effectRef>
+            <a:fontRef idx="minor">
+              <a:schemeClr val="lt1"/>
+            </a:fontRef>
+          </p:style>
+          <p:txBody>
+            <a:bodyPr rtlCol="0" anchor="ctr"/>
+            <a:lstStyle/>
+            <a:p>
+              <a:pPr algn="ctr"/>
+            </a:p>
+          </p:txBody>
+        </p:sp>
+        <p:sp>
+          <p:nvSpPr>
+            <p:cNvPr id="12" name="Freeform 11"/>
+            <p:cNvSpPr/>
+            <p:nvPr/>
+          </p:nvSpPr>
+          <p:spPr>
+            <a:xfrm>
+              <a:off x="847408" y="3425673"/>
+              <a:ext cx="242887" cy="121444"/>
+            </a:xfrm>
+            <a:custGeom>
+              <a:avLst/>
+              <a:gdLst/>
+              <a:ahLst/>
+              <a:cxnLst/>
+              <a:rect l="l" t="t" r="r" b="b"/>
+              <a:pathLst>
+                <a:path w="242887" h="121444">
+                  <a:moveTo>
+                    <a:pt x="0" y="121444"/>
+                  </a:moveTo>
+                  <a:lnTo>
+                    <a:pt x="72866" y="48577"/>
+                  </a:lnTo>
+                  <a:lnTo>
+                    <a:pt x="145732" y="97155"/>
+                  </a:lnTo>
+                  <a:lnTo>
+                    <a:pt x="242887" y="0"/>
+                  </a:lnTo>
+                </a:path>
+              </a:pathLst>
+            </a:custGeom>
+            <a:noFill/>
+            <a:ln w="48577" cap="rnd">
+              <a:solidFill>
+                <a:srgbClr val="0077FF"/>
+              </a:solidFill>
+              <a:round/>
+            </a:ln>
+            <a:effectLst/>
+          </p:spPr>
+          <p:style>
+            <a:lnRef idx="1">
+              <a:schemeClr val="accent1"/>
+            </a:lnRef>
+            <a:fillRef idx="3">
+              <a:schemeClr val="accent1"/>
+            </a:fillRef>
+            <a:effectRef idx="2">
+              <a:schemeClr val="accent1"/>
+            </a:effectRef>
+            <a:fontRef idx="minor">
+              <a:schemeClr val="lt1"/>
+            </a:fontRef>
+          </p:style>
+          <p:txBody>
+            <a:bodyPr rtlCol="0" anchor="ctr"/>
+            <a:lstStyle/>
+            <a:p>
+              <a:pPr algn="ctr"/>
+            </a:p>
+          </p:txBody>
+        </p:sp>
+      </p:grpSp>
       <p:sp>
         <p:nvSpPr>
-          <p:cNvPr id="4" name="Chevron 3"/>
-          <p:cNvSpPr/>
+          <p:cNvPr id="13" name="item_1"/>
+          <p:cNvSpPr txBox="1"/>
           <p:nvPr/>
         </p:nvSpPr>
         <p:spPr>
           <a:xfrm>
-            <a:off x="677387" y="2562791"/>
-            <a:ext cx="10855878" cy="634621"/>
+            <a:off x="1522636" y="3265177"/>
+            <a:ext cx="10010630" cy="1325887"/>
           </a:xfrm>
-          <a:prstGeom prst="chevron">
+          <a:prstGeom prst="rect">
             <a:avLst/>
           </a:prstGeom>
-          <a:solidFill>
-            <a:srgbClr val="0077FF"/>
-          </a:solidFill>
-          <a:ln>
-            <a:noFill/>
-          </a:ln>
+          <a:noFill/>
         </p:spPr>
-        <p:style>
-          <a:lnRef idx="1">
-            <a:schemeClr val="accent1"/>
-          </a:lnRef>
-          <a:fillRef idx="3">
-            <a:schemeClr val="accent1"/>
-          </a:fillRef>
-          <a:effectRef idx="2">
-            <a:schemeClr val="accent1"/>
-          </a:effectRef>
-          <a:fontRef idx="minor">
-            <a:schemeClr val="lt1"/>
-          </a:fontRef>
-        </p:style>
         <p:txBody>
-          <a:bodyPr rtlCol="0" anchor="ctr" wrap="square" lIns="12700" rIns="12700" tIns="12700" bIns="12700"/>
+          <a:bodyPr wrap="square" lIns="76200" rIns="76200" tIns="50800" bIns="50800">
+            <a:spAutoFit/>
+          </a:bodyPr>
           <a:lstStyle/>
           <a:p>
-            <a:pPr algn="ctr">
-              <a:defRPr sz="1400" b="0">
-                <a:solidFill>
-                  <a:srgbClr val="FFFFFF"/>
+            <a:pPr algn="l">
+              <a:spcAft>
+                <a:spcPts val="300"/>
+              </a:spcAft>
+              <a:defRPr sz="2800">
+                <a:solidFill>
+                  <a:srgbClr val="000000"/>
                 </a:solidFill>
                 <a:latin typeface="Play"/>
                 <a:ea typeface="Play"/>
@@ -8022,62 +10767,243 @@
               </a:defRPr>
             </a:pPr>
             <a:r>
-              <a:rPr sz="1400" b="0">
-                <a:solidFill>
-                  <a:srgbClr val="FFFFFF"/>
+              <a:rPr sz="2800">
+                <a:solidFill>
+                  <a:srgbClr val="000000"/>
                 </a:solidFill>
                 <a:latin typeface="Play"/>
                 <a:ea typeface="Play"/>
                 <a:cs typeface="Play"/>
               </a:rPr>
-              <a:t>Анализ дизайна</a:t>
+              <a:t>Генерирует колоду по дизайн-системе и аудиту</a:t>
             </a:r>
           </a:p>
         </p:txBody>
       </p:sp>
+      <p:grpSp>
+        <p:nvGrpSpPr>
+          <p:cNvPr id="14" name="icon:builtin-download"/>
+          <p:cNvGrpSpPr/>
+          <p:nvPr/>
+        </p:nvGrpSpPr>
+        <p:grpSpPr>
+          <a:xfrm>
+            <a:off x="798830" y="5022706"/>
+            <a:ext cx="340043" cy="437197"/>
+            <a:chOff x="798830" y="5022706"/>
+            <a:chExt cx="340043" cy="437197"/>
+          </a:xfrm>
+        </p:grpSpPr>
+        <p:sp>
+          <p:nvSpPr>
+            <p:cNvPr id="15" name="Freeform 14"/>
+            <p:cNvSpPr/>
+            <p:nvPr/>
+          </p:nvSpPr>
+          <p:spPr>
+            <a:xfrm>
+              <a:off x="968852" y="5022706"/>
+              <a:ext cx="0" cy="291465"/>
+            </a:xfrm>
+            <a:custGeom>
+              <a:avLst/>
+              <a:gdLst/>
+              <a:ahLst/>
+              <a:cxnLst/>
+              <a:rect l="l" t="t" r="r" b="b"/>
+              <a:pathLst>
+                <a:path w="0" h="291465">
+                  <a:moveTo>
+                    <a:pt x="0" y="0"/>
+                  </a:moveTo>
+                  <a:lnTo>
+                    <a:pt x="0" y="291465"/>
+                  </a:lnTo>
+                </a:path>
+              </a:pathLst>
+            </a:custGeom>
+            <a:noFill/>
+            <a:ln w="48577" cap="rnd">
+              <a:solidFill>
+                <a:srgbClr val="0077FF"/>
+              </a:solidFill>
+              <a:round/>
+            </a:ln>
+            <a:effectLst/>
+          </p:spPr>
+          <p:style>
+            <a:lnRef idx="1">
+              <a:schemeClr val="accent1"/>
+            </a:lnRef>
+            <a:fillRef idx="3">
+              <a:schemeClr val="accent1"/>
+            </a:fillRef>
+            <a:effectRef idx="2">
+              <a:schemeClr val="accent1"/>
+            </a:effectRef>
+            <a:fontRef idx="minor">
+              <a:schemeClr val="lt1"/>
+            </a:fontRef>
+          </p:style>
+          <p:txBody>
+            <a:bodyPr rtlCol="0" anchor="ctr"/>
+            <a:lstStyle/>
+            <a:p>
+              <a:pPr algn="ctr"/>
+            </a:p>
+          </p:txBody>
+        </p:sp>
+        <p:sp>
+          <p:nvSpPr>
+            <p:cNvPr id="16" name="Freeform 15"/>
+            <p:cNvSpPr/>
+            <p:nvPr/>
+          </p:nvSpPr>
+          <p:spPr>
+            <a:xfrm>
+              <a:off x="847408" y="5192727"/>
+              <a:ext cx="242887" cy="121444"/>
+            </a:xfrm>
+            <a:custGeom>
+              <a:avLst/>
+              <a:gdLst/>
+              <a:ahLst/>
+              <a:cxnLst/>
+              <a:rect l="l" t="t" r="r" b="b"/>
+              <a:pathLst>
+                <a:path w="242887" h="121444">
+                  <a:moveTo>
+                    <a:pt x="0" y="0"/>
+                  </a:moveTo>
+                  <a:lnTo>
+                    <a:pt x="121444" y="121444"/>
+                  </a:lnTo>
+                  <a:lnTo>
+                    <a:pt x="242887" y="0"/>
+                  </a:lnTo>
+                </a:path>
+              </a:pathLst>
+            </a:custGeom>
+            <a:noFill/>
+            <a:ln w="48577" cap="rnd">
+              <a:solidFill>
+                <a:srgbClr val="0077FF"/>
+              </a:solidFill>
+              <a:round/>
+            </a:ln>
+            <a:effectLst/>
+          </p:spPr>
+          <p:style>
+            <a:lnRef idx="1">
+              <a:schemeClr val="accent1"/>
+            </a:lnRef>
+            <a:fillRef idx="3">
+              <a:schemeClr val="accent1"/>
+            </a:fillRef>
+            <a:effectRef idx="2">
+              <a:schemeClr val="accent1"/>
+            </a:effectRef>
+            <a:fontRef idx="minor">
+              <a:schemeClr val="lt1"/>
+            </a:fontRef>
+          </p:style>
+          <p:txBody>
+            <a:bodyPr rtlCol="0" anchor="ctr"/>
+            <a:lstStyle/>
+            <a:p>
+              <a:pPr algn="ctr"/>
+            </a:p>
+          </p:txBody>
+        </p:sp>
+        <p:sp>
+          <p:nvSpPr>
+            <p:cNvPr id="17" name="Freeform 16"/>
+            <p:cNvSpPr/>
+            <p:nvPr/>
+          </p:nvSpPr>
+          <p:spPr>
+            <a:xfrm>
+              <a:off x="798830" y="5459903"/>
+              <a:ext cx="340043" cy="0"/>
+            </a:xfrm>
+            <a:custGeom>
+              <a:avLst/>
+              <a:gdLst/>
+              <a:ahLst/>
+              <a:cxnLst/>
+              <a:rect l="l" t="t" r="r" b="b"/>
+              <a:pathLst>
+                <a:path w="340043" h="0">
+                  <a:moveTo>
+                    <a:pt x="0" y="0"/>
+                  </a:moveTo>
+                  <a:lnTo>
+                    <a:pt x="340043" y="0"/>
+                  </a:lnTo>
+                </a:path>
+              </a:pathLst>
+            </a:custGeom>
+            <a:noFill/>
+            <a:ln w="48577" cap="rnd">
+              <a:solidFill>
+                <a:srgbClr val="0077FF"/>
+              </a:solidFill>
+              <a:round/>
+            </a:ln>
+            <a:effectLst/>
+          </p:spPr>
+          <p:style>
+            <a:lnRef idx="1">
+              <a:schemeClr val="accent1"/>
+            </a:lnRef>
+            <a:fillRef idx="3">
+              <a:schemeClr val="accent1"/>
+            </a:fillRef>
+            <a:effectRef idx="2">
+              <a:schemeClr val="accent1"/>
+            </a:effectRef>
+            <a:fontRef idx="minor">
+              <a:schemeClr val="lt1"/>
+            </a:fontRef>
+          </p:style>
+          <p:txBody>
+            <a:bodyPr rtlCol="0" anchor="ctr"/>
+            <a:lstStyle/>
+            <a:p>
+              <a:pPr algn="ctr"/>
+            </a:p>
+          </p:txBody>
+        </p:sp>
+      </p:grpSp>
       <p:sp>
         <p:nvSpPr>
-          <p:cNvPr id="5" name="Chevron 4"/>
-          <p:cNvSpPr/>
+          <p:cNvPr id="18" name="item_2"/>
+          <p:cNvSpPr txBox="1"/>
           <p:nvPr/>
         </p:nvSpPr>
         <p:spPr>
           <a:xfrm>
-            <a:off x="677387" y="3300723"/>
-            <a:ext cx="10855878" cy="634621"/>
+            <a:off x="1522636" y="4728225"/>
+            <a:ext cx="10010630" cy="1335412"/>
           </a:xfrm>
-          <a:prstGeom prst="chevron">
+          <a:prstGeom prst="rect">
             <a:avLst/>
           </a:prstGeom>
-          <a:solidFill>
-            <a:srgbClr val="0077FF"/>
-          </a:solidFill>
-          <a:ln>
-            <a:noFill/>
-          </a:ln>
+          <a:noFill/>
         </p:spPr>
-        <p:style>
-          <a:lnRef idx="1">
-            <a:schemeClr val="accent1"/>
-          </a:lnRef>
-          <a:fillRef idx="3">
-            <a:schemeClr val="accent1"/>
-          </a:fillRef>
-          <a:effectRef idx="2">
-            <a:schemeClr val="accent1"/>
-          </a:effectRef>
-          <a:fontRef idx="minor">
-            <a:schemeClr val="lt1"/>
-          </a:fontRef>
-        </p:style>
         <p:txBody>
-          <a:bodyPr rtlCol="0" anchor="ctr" wrap="square" lIns="12700" rIns="12700" tIns="12700" bIns="12700"/>
+          <a:bodyPr wrap="square" lIns="76200" rIns="76200" tIns="50800" bIns="50800">
+            <a:spAutoFit/>
+          </a:bodyPr>
           <a:lstStyle/>
           <a:p>
-            <a:pPr algn="ctr">
-              <a:defRPr sz="1400" b="0">
-                <a:solidFill>
-                  <a:srgbClr val="FFFFFF"/>
+            <a:pPr algn="l">
+              <a:spcAft>
+                <a:spcPts val="300"/>
+              </a:spcAft>
+              <a:defRPr sz="2800">
+                <a:solidFill>
+                  <a:srgbClr val="000000"/>
                 </a:solidFill>
                 <a:latin typeface="Play"/>
                 <a:ea typeface="Play"/>
@@ -8085,204 +11011,15 @@
               </a:defRPr>
             </a:pPr>
             <a:r>
-              <a:rPr sz="1400" b="0">
-                <a:solidFill>
-                  <a:srgbClr val="FFFFFF"/>
+              <a:rPr sz="2800">
+                <a:solidFill>
+                  <a:srgbClr val="000000"/>
                 </a:solidFill>
                 <a:latin typeface="Play"/>
                 <a:ea typeface="Play"/>
                 <a:cs typeface="Play"/>
               </a:rPr>
-              <a:t>План колоды</a:t>
-            </a:r>
-          </a:p>
-        </p:txBody>
-      </p:sp>
-      <p:sp>
-        <p:nvSpPr>
-          <p:cNvPr id="6" name="Chevron 5"/>
-          <p:cNvSpPr/>
-          <p:nvPr/>
-        </p:nvSpPr>
-        <p:spPr>
-          <a:xfrm>
-            <a:off x="677387" y="4038655"/>
-            <a:ext cx="10855878" cy="634621"/>
-          </a:xfrm>
-          <a:prstGeom prst="chevron">
-            <a:avLst/>
-          </a:prstGeom>
-          <a:solidFill>
-            <a:srgbClr val="0077FF"/>
-          </a:solidFill>
-          <a:ln>
-            <a:noFill/>
-          </a:ln>
-        </p:spPr>
-        <p:style>
-          <a:lnRef idx="1">
-            <a:schemeClr val="accent1"/>
-          </a:lnRef>
-          <a:fillRef idx="3">
-            <a:schemeClr val="accent1"/>
-          </a:fillRef>
-          <a:effectRef idx="2">
-            <a:schemeClr val="accent1"/>
-          </a:effectRef>
-          <a:fontRef idx="minor">
-            <a:schemeClr val="lt1"/>
-          </a:fontRef>
-        </p:style>
-        <p:txBody>
-          <a:bodyPr rtlCol="0" anchor="ctr" wrap="square" lIns="12700" rIns="12700" tIns="12700" bIns="12700"/>
-          <a:lstStyle/>
-          <a:p>
-            <a:pPr algn="ctr">
-              <a:defRPr sz="1400" b="0">
-                <a:solidFill>
-                  <a:srgbClr val="FFFFFF"/>
-                </a:solidFill>
-                <a:latin typeface="Play"/>
-                <a:ea typeface="Play"/>
-                <a:cs typeface="Play"/>
-              </a:defRPr>
-            </a:pPr>
-            <a:r>
-              <a:rPr sz="1400" b="0">
-                <a:solidFill>
-                  <a:srgbClr val="FFFFFF"/>
-                </a:solidFill>
-                <a:latin typeface="Play"/>
-                <a:ea typeface="Play"/>
-                <a:cs typeface="Play"/>
-              </a:rPr>
-              <a:t>Авто-верстка</a:t>
-            </a:r>
-          </a:p>
-        </p:txBody>
-      </p:sp>
-      <p:sp>
-        <p:nvSpPr>
-          <p:cNvPr id="7" name="Chevron 6"/>
-          <p:cNvSpPr/>
-          <p:nvPr/>
-        </p:nvSpPr>
-        <p:spPr>
-          <a:xfrm>
-            <a:off x="677387" y="4776587"/>
-            <a:ext cx="10855878" cy="634621"/>
-          </a:xfrm>
-          <a:prstGeom prst="chevron">
-            <a:avLst/>
-          </a:prstGeom>
-          <a:solidFill>
-            <a:srgbClr val="0077FF"/>
-          </a:solidFill>
-          <a:ln>
-            <a:noFill/>
-          </a:ln>
-        </p:spPr>
-        <p:style>
-          <a:lnRef idx="1">
-            <a:schemeClr val="accent1"/>
-          </a:lnRef>
-          <a:fillRef idx="3">
-            <a:schemeClr val="accent1"/>
-          </a:fillRef>
-          <a:effectRef idx="2">
-            <a:schemeClr val="accent1"/>
-          </a:effectRef>
-          <a:fontRef idx="minor">
-            <a:schemeClr val="lt1"/>
-          </a:fontRef>
-        </p:style>
-        <p:txBody>
-          <a:bodyPr rtlCol="0" anchor="ctr" wrap="square" lIns="12700" rIns="12700" tIns="12700" bIns="12700"/>
-          <a:lstStyle/>
-          <a:p>
-            <a:pPr algn="ctr">
-              <a:defRPr sz="1400" b="0">
-                <a:solidFill>
-                  <a:srgbClr val="FFFFFF"/>
-                </a:solidFill>
-                <a:latin typeface="Play"/>
-                <a:ea typeface="Play"/>
-                <a:cs typeface="Play"/>
-              </a:defRPr>
-            </a:pPr>
-            <a:r>
-              <a:rPr sz="1400" b="0">
-                <a:solidFill>
-                  <a:srgbClr val="FFFFFF"/>
-                </a:solidFill>
-                <a:latin typeface="Play"/>
-                <a:ea typeface="Play"/>
-                <a:cs typeface="Play"/>
-              </a:rPr>
-              <a:t>Аудит качества</a:t>
-            </a:r>
-          </a:p>
-        </p:txBody>
-      </p:sp>
-      <p:sp>
-        <p:nvSpPr>
-          <p:cNvPr id="8" name="Chevron 7"/>
-          <p:cNvSpPr/>
-          <p:nvPr/>
-        </p:nvSpPr>
-        <p:spPr>
-          <a:xfrm>
-            <a:off x="677387" y="5514520"/>
-            <a:ext cx="10855878" cy="634621"/>
-          </a:xfrm>
-          <a:prstGeom prst="chevron">
-            <a:avLst/>
-          </a:prstGeom>
-          <a:solidFill>
-            <a:srgbClr val="0077FF"/>
-          </a:solidFill>
-          <a:ln>
-            <a:noFill/>
-          </a:ln>
-        </p:spPr>
-        <p:style>
-          <a:lnRef idx="1">
-            <a:schemeClr val="accent1"/>
-          </a:lnRef>
-          <a:fillRef idx="3">
-            <a:schemeClr val="accent1"/>
-          </a:fillRef>
-          <a:effectRef idx="2">
-            <a:schemeClr val="accent1"/>
-          </a:effectRef>
-          <a:fontRef idx="minor">
-            <a:schemeClr val="lt1"/>
-          </a:fontRef>
-        </p:style>
-        <p:txBody>
-          <a:bodyPr rtlCol="0" anchor="ctr" wrap="square" lIns="12700" rIns="12700" tIns="12700" bIns="12700"/>
-          <a:lstStyle/>
-          <a:p>
-            <a:pPr algn="ctr">
-              <a:defRPr sz="1400" b="0">
-                <a:solidFill>
-                  <a:srgbClr val="FFFFFF"/>
-                </a:solidFill>
-                <a:latin typeface="Play"/>
-                <a:ea typeface="Play"/>
-                <a:cs typeface="Play"/>
-              </a:defRPr>
-            </a:pPr>
-            <a:r>
-              <a:rPr sz="1400" b="0">
-                <a:solidFill>
-                  <a:srgbClr val="FFFFFF"/>
-                </a:solidFill>
-                <a:latin typeface="Play"/>
-                <a:ea typeface="Play"/>
-                <a:cs typeface="Play"/>
-              </a:rPr>
-              <a:t>Экспорт</a:t>
+              <a:t>Экспорт в pptx, pdf, html с редактируемыми слайдами</a:t>
             </a:r>
           </a:p>
         </p:txBody>
@@ -8296,226 +11033,6 @@
 </file>
 
 <file path=ppt/slides/slide59.xml><?xml version="1.0" encoding="utf-8"?>
-<p:sld xmlns:a="http://schemas.openxmlformats.org/drawingml/2006/main" xmlns:p="http://schemas.openxmlformats.org/presentationml/2006/main" xmlns:r="http://schemas.openxmlformats.org/officeDocument/2006/relationships">
-  <p:cSld>
-    <p:spTree>
-      <p:nvGrpSpPr>
-        <p:cNvPr id="1" name=""/>
-        <p:cNvGrpSpPr/>
-        <p:nvPr/>
-      </p:nvGrpSpPr>
-      <p:grpSpPr/>
-      <p:cxnSp>
-        <p:nvCxnSpPr>
-          <p:cNvPr id="918" name="Google Shape;918;p74"/>
-          <p:cNvCxnSpPr/>
-          <p:nvPr/>
-        </p:nvCxnSpPr>
-        <p:spPr>
-          <a:xfrm rot="10800000">
-            <a:off x="658813" y="2199500"/>
-            <a:ext cx="11533187" cy="0"/>
-          </a:xfrm>
-          <a:prstGeom prst="straightConnector1">
-            <a:avLst/>
-          </a:prstGeom>
-          <a:noFill/>
-          <a:ln cap="flat" cmpd="sng" w="19050">
-            <a:solidFill>
-              <a:schemeClr val="accent4"/>
-            </a:solidFill>
-            <a:prstDash val="solid"/>
-            <a:miter lim="8000"/>
-            <a:headEnd len="sm" w="sm" type="none"/>
-            <a:tailEnd len="sm" w="sm" type="none"/>
-          </a:ln>
-        </p:spPr>
-      </p:cxnSp>
-      <p:sp>
-        <p:nvSpPr>
-          <p:cNvPr id="919" name="title"/>
-          <p:cNvSpPr txBox="1"/>
-          <p:nvPr/>
-        </p:nvSpPr>
-        <p:spPr>
-          <a:xfrm>
-            <a:off x="677387" y="692177"/>
-            <a:ext cx="10855878" cy="822960"/>
-          </a:xfrm>
-          <a:prstGeom prst="rect">
-            <a:avLst/>
-          </a:prstGeom>
-          <a:noFill/>
-        </p:spPr>
-        <p:txBody>
-          <a:bodyPr wrap="square" lIns="76200" rIns="76200" tIns="50800" bIns="50800">
-            <a:spAutoFit/>
-          </a:bodyPr>
-          <a:lstStyle/>
-          <a:p>
-            <a:pPr algn="l">
-              <a:spcAft>
-                <a:spcPts val="300"/>
-              </a:spcAft>
-              <a:defRPr sz="4000">
-                <a:solidFill>
-                  <a:srgbClr val="000000"/>
-                </a:solidFill>
-                <a:latin typeface="Arial"/>
-                <a:ea typeface="Arial"/>
-                <a:cs typeface="Arial"/>
-              </a:defRPr>
-            </a:pPr>
-            <a:r>
-              <a:rPr sz="4000">
-                <a:solidFill>
-                  <a:srgbClr val="000000"/>
-                </a:solidFill>
-                <a:latin typeface="Arial"/>
-                <a:ea typeface="Arial"/>
-                <a:cs typeface="Arial"/>
-              </a:rPr>
-              <a:t>Ожидаемый эффект</a:t>
-            </a:r>
-          </a:p>
-        </p:txBody>
-      </p:sp>
-      <p:sp>
-        <p:nvSpPr>
-          <p:cNvPr id="920" name="body"/>
-          <p:cNvSpPr txBox="1"/>
-          <p:nvPr/>
-        </p:nvSpPr>
-        <p:spPr>
-          <a:xfrm>
-            <a:off x="677387" y="2200937"/>
-            <a:ext cx="10855878" cy="3748651"/>
-          </a:xfrm>
-          <a:prstGeom prst="rect">
-            <a:avLst/>
-          </a:prstGeom>
-          <a:noFill/>
-        </p:spPr>
-        <p:txBody>
-          <a:bodyPr wrap="square" lIns="76200" rIns="76200" tIns="50800" bIns="50800">
-            <a:spAutoFit/>
-          </a:bodyPr>
-          <a:lstStyle/>
-          <a:p>
-            <a:pPr algn="l">
-              <a:spcAft>
-                <a:spcPts val="300"/>
-              </a:spcAft>
-              <a:defRPr sz="2800">
-                <a:solidFill>
-                  <a:srgbClr val="000000"/>
-                </a:solidFill>
-                <a:latin typeface="Play"/>
-                <a:ea typeface="Play"/>
-                <a:cs typeface="Play"/>
-              </a:defRPr>
-            </a:pPr>
-            <a:r>
-              <a:rPr sz="2800">
-                <a:solidFill>
-                  <a:srgbClr val="000000"/>
-                </a:solidFill>
-                <a:latin typeface="Play"/>
-                <a:ea typeface="Play"/>
-                <a:cs typeface="Play"/>
-              </a:rPr>
-              <a:t>• Средняя сборка колоды 12 слайдов — 4 минуты вместо 186</a:t>
-            </a:r>
-          </a:p>
-          <a:p>
-            <a:pPr algn="l">
-              <a:spcAft>
-                <a:spcPts val="300"/>
-              </a:spcAft>
-              <a:defRPr sz="2800">
-                <a:solidFill>
-                  <a:srgbClr val="000000"/>
-                </a:solidFill>
-                <a:latin typeface="Play"/>
-                <a:ea typeface="Play"/>
-                <a:cs typeface="Play"/>
-              </a:defRPr>
-            </a:pPr>
-            <a:r>
-              <a:rPr sz="2800">
-                <a:solidFill>
-                  <a:srgbClr val="000000"/>
-                </a:solidFill>
-                <a:latin typeface="Play"/>
-                <a:ea typeface="Play"/>
-                <a:cs typeface="Play"/>
-              </a:rPr>
-              <a:t>• Время до первой версии сократилось с 6 рабочих дней до 1</a:t>
-            </a:r>
-          </a:p>
-          <a:p>
-            <a:pPr algn="l">
-              <a:spcAft>
-                <a:spcPts val="300"/>
-              </a:spcAft>
-              <a:defRPr sz="2800">
-                <a:solidFill>
-                  <a:srgbClr val="000000"/>
-                </a:solidFill>
-                <a:latin typeface="Play"/>
-                <a:ea typeface="Play"/>
-                <a:cs typeface="Play"/>
-              </a:defRPr>
-            </a:pPr>
-            <a:r>
-              <a:rPr sz="2800">
-                <a:solidFill>
-                  <a:srgbClr val="000000"/>
-                </a:solidFill>
-                <a:latin typeface="Play"/>
-                <a:ea typeface="Play"/>
-                <a:cs typeface="Play"/>
-              </a:rPr>
-              <a:t>• Нарушений фирменного стиля в пилоте — 2 из 68 колод</a:t>
-            </a:r>
-          </a:p>
-          <a:p>
-            <a:pPr algn="l">
-              <a:spcAft>
-                <a:spcPts val="300"/>
-              </a:spcAft>
-              <a:defRPr sz="2800">
-                <a:solidFill>
-                  <a:srgbClr val="000000"/>
-                </a:solidFill>
-                <a:latin typeface="Play"/>
-                <a:ea typeface="Play"/>
-                <a:cs typeface="Play"/>
-              </a:defRPr>
-            </a:pPr>
-            <a:r>
-              <a:rPr sz="2800">
-                <a:solidFill>
-                  <a:srgbClr val="000000"/>
-                </a:solidFill>
-                <a:latin typeface="Play"/>
-                <a:ea typeface="Play"/>
-                <a:cs typeface="Play"/>
-              </a:rPr>
-              <a:t>• Дизайнеры закрыли 38 запросов за 6 недель вместо 11 в неделю</a:t>
-            </a:r>
-          </a:p>
-        </p:txBody>
-      </p:sp>
-    </p:spTree>
-  </p:cSld>
-  <p:clrMapOvr>
-    <a:masterClrMapping/>
-  </p:clrMapOvr>
-</p:sld>
-</file>
-
-<file path=ppt/slides/slide60.xml><?xml version="1.0" encoding="utf-8"?>
 <p:sld xmlns:a="http://schemas.openxmlformats.org/drawingml/2006/main" xmlns:p="http://schemas.openxmlformats.org/presentationml/2006/main" xmlns:r="http://schemas.openxmlformats.org/officeDocument/2006/relationships">
   <p:cSld>
     <p:bg>
@@ -8576,7 +11093,7 @@
                 <a:ea typeface="Arial"/>
                 <a:cs typeface="Arial"/>
               </a:rPr>
-              <a:t>Что потребуется: ресурсы и сроки</a:t>
+              <a:t>Ожидаемый эффект</a:t>
             </a:r>
           </a:p>
         </p:txBody>
@@ -8589,8 +11106,8 @@
         </p:nvSpPr>
         <p:spPr>
           <a:xfrm>
-            <a:off x="677387" y="1773204"/>
-            <a:ext cx="10855878" cy="1771037"/>
+            <a:off x="677387" y="1783080"/>
+            <a:ext cx="10855878" cy="1737360"/>
           </a:xfrm>
           <a:prstGeom prst="rect">
             <a:avLst/>
@@ -8625,7 +11142,7 @@
                 <a:ea typeface="Play"/>
                 <a:cs typeface="Play"/>
               </a:rPr>
-              <a:t>• Сервис на 1 машине: 2 vCPU / 2 ГБ RAM</a:t>
+              <a:t>• Сборка колоды 4 мин вместо 186</a:t>
             </a:r>
           </a:p>
           <a:p>
@@ -8651,7 +11168,7 @@
                 <a:ea typeface="Play"/>
                 <a:cs typeface="Play"/>
               </a:rPr>
-              <a:t>• Инференс 6 недель: 1 400 руб.</a:t>
+              <a:t>• Время до первой версии сократилось с 6 дней до 1</a:t>
             </a:r>
           </a:p>
           <a:p>
@@ -8677,7 +11194,7 @@
                 <a:ea typeface="Play"/>
                 <a:cs typeface="Play"/>
               </a:rPr>
-              <a:t>• Подключение 4 команд: 3й квартал 2026</a:t>
+              <a:t>• Нарушений стиля 2 из 68 колод</a:t>
             </a:r>
           </a:p>
           <a:p>
@@ -8703,47 +11220,106 @@
                 <a:ea typeface="Play"/>
                 <a:cs typeface="Play"/>
               </a:rPr>
-              <a:t>• Доступ всей компании: 4й квартал 2026</a:t>
+              <a:t>• Дизайнеры закрыли 38 запросов вместо 11 в неделю</a:t>
             </a:r>
           </a:p>
+        </p:txBody>
+      </p:sp>
+      <p:graphicFrame>
+        <p:nvGraphicFramePr>
+          <p:cNvPr id="4" name="Chart 3"/>
+          <p:cNvGraphicFramePr>
+            <a:graphicFrameLocks noGrp="1"/>
+          </p:cNvGraphicFramePr>
+          <p:nvPr/>
+        </p:nvGraphicFramePr>
+        <p:xfrm>
+          <a:off x="677387" y="3691890"/>
+          <a:ext cx="10855878" cy="2508907"/>
+        </p:xfrm>
+        <a:graphic>
+          <a:graphicData uri="http://schemas.openxmlformats.org/drawingml/2006/chart">
+            <c:chart xmlns:c="http://schemas.openxmlformats.org/drawingml/2006/chart" r:id="rId2"/>
+          </a:graphicData>
+        </a:graphic>
+      </p:graphicFrame>
+    </p:spTree>
+  </p:cSld>
+  <p:clrMapOvr>
+    <a:masterClrMapping/>
+  </p:clrMapOvr>
+</p:sld>
+</file>
+
+<file path=ppt/slides/slide60.xml><?xml version="1.0" encoding="utf-8"?>
+<p:sld xmlns:a="http://schemas.openxmlformats.org/drawingml/2006/main" xmlns:p="http://schemas.openxmlformats.org/presentationml/2006/main" xmlns:r="http://schemas.openxmlformats.org/officeDocument/2006/relationships">
+  <p:cSld>
+    <p:spTree>
+      <p:nvGrpSpPr>
+        <p:cNvPr id="1" name=""/>
+        <p:cNvGrpSpPr/>
+        <p:nvPr/>
+      </p:nvGrpSpPr>
+      <p:grpSpPr/>
+      <p:sp>
+        <p:nvSpPr>
+          <p:cNvPr id="2" name="title"/>
+          <p:cNvSpPr txBox="1"/>
+          <p:nvPr/>
+        </p:nvSpPr>
+        <p:spPr>
+          <a:xfrm>
+            <a:off x="677387" y="692177"/>
+            <a:ext cx="10855878" cy="822960"/>
+          </a:xfrm>
+          <a:prstGeom prst="rect">
+            <a:avLst/>
+          </a:prstGeom>
+          <a:noFill/>
+        </p:spPr>
+        <p:txBody>
+          <a:bodyPr wrap="square" lIns="76200" rIns="76200" tIns="50800" bIns="50800">
+            <a:spAutoFit/>
+          </a:bodyPr>
+          <a:lstStyle/>
           <a:p>
             <a:pPr algn="l">
               <a:spcAft>
                 <a:spcPts val="300"/>
               </a:spcAft>
-              <a:defRPr sz="1600">
+              <a:defRPr sz="4000">
                 <a:solidFill>
                   <a:srgbClr val="000000"/>
                 </a:solidFill>
-                <a:latin typeface="Play"/>
-                <a:ea typeface="Play"/>
-                <a:cs typeface="Play"/>
+                <a:latin typeface="Arial"/>
+                <a:ea typeface="Arial"/>
+                <a:cs typeface="Arial"/>
               </a:defRPr>
             </a:pPr>
             <a:r>
-              <a:rPr sz="1600">
+              <a:rPr sz="4000">
                 <a:solidFill>
                   <a:srgbClr val="000000"/>
                 </a:solidFill>
-                <a:latin typeface="Play"/>
-                <a:ea typeface="Play"/>
-                <a:cs typeface="Play"/>
+                <a:latin typeface="Arial"/>
+                <a:ea typeface="Arial"/>
+                <a:cs typeface="Arial"/>
               </a:rPr>
-              <a:t>• Иллюстрации в стиле шаблона: 1й квартал 2027</a:t>
+              <a:t>Что потребуется: ресурсы и сроки</a:t>
             </a:r>
           </a:p>
         </p:txBody>
       </p:sp>
       <p:sp>
         <p:nvSpPr>
-          <p:cNvPr id="4" name="Rectangle 3"/>
+          <p:cNvPr id="3" name="stat_0:bar"/>
           <p:cNvSpPr/>
           <p:nvPr/>
         </p:nvSpPr>
         <p:spPr>
           <a:xfrm>
-            <a:off x="677387" y="4858839"/>
-            <a:ext cx="10855878" cy="74553"/>
+            <a:off x="677387" y="1892808"/>
+            <a:ext cx="50800" cy="2338832"/>
           </a:xfrm>
           <a:prstGeom prst="rect">
             <a:avLst/>
@@ -8754,6 +11330,7 @@
           <a:ln>
             <a:noFill/>
           </a:ln>
+          <a:effectLst/>
         </p:spPr>
         <p:style>
           <a:lnRef idx="1">
@@ -8779,16 +11356,94 @@
       </p:sp>
       <p:sp>
         <p:nvSpPr>
-          <p:cNvPr id="5" name="Oval 4"/>
+          <p:cNvPr id="4" name="stat_0"/>
+          <p:cNvSpPr txBox="1"/>
+          <p:nvPr/>
+        </p:nvSpPr>
+        <p:spPr>
+          <a:xfrm>
+            <a:off x="855187" y="1783080"/>
+            <a:ext cx="3151336" cy="2448560"/>
+          </a:xfrm>
+          <a:prstGeom prst="rect">
+            <a:avLst/>
+          </a:prstGeom>
+          <a:noFill/>
+        </p:spPr>
+        <p:txBody>
+          <a:bodyPr wrap="square" lIns="76200" rIns="76200" tIns="0" bIns="0">
+            <a:spAutoFit/>
+          </a:bodyPr>
+          <a:lstStyle/>
+          <a:p>
+            <a:pPr>
+              <a:lnSpc>
+                <a:spcPct val="100000"/>
+              </a:lnSpc>
+              <a:spcAft>
+                <a:spcPts val="200"/>
+              </a:spcAft>
+              <a:defRPr sz="4800" b="1">
+                <a:solidFill>
+                  <a:srgbClr val="0077FF"/>
+                </a:solidFill>
+                <a:latin typeface="Play"/>
+                <a:ea typeface="Play"/>
+                <a:cs typeface="Play"/>
+              </a:defRPr>
+            </a:pPr>
+            <a:r>
+              <a:rPr sz="4800" b="1">
+                <a:solidFill>
+                  <a:srgbClr val="0077FF"/>
+                </a:solidFill>
+                <a:latin typeface="Play"/>
+                <a:ea typeface="Play"/>
+                <a:cs typeface="Play"/>
+              </a:rPr>
+              <a:t>2 vCPU</a:t>
+            </a:r>
+          </a:p>
+          <a:p>
+            <a:pPr>
+              <a:spcAft>
+                <a:spcPts val="300"/>
+              </a:spcAft>
+              <a:defRPr sz="3200" b="0">
+                <a:solidFill>
+                  <a:srgbClr val="000000"/>
+                </a:solidFill>
+                <a:latin typeface="Play"/>
+                <a:ea typeface="Play"/>
+                <a:cs typeface="Play"/>
+              </a:defRPr>
+            </a:pPr>
+            <a:r>
+              <a:rPr sz="3200" b="0">
+                <a:solidFill>
+                  <a:srgbClr val="000000"/>
+                </a:solidFill>
+                <a:latin typeface="Play"/>
+                <a:ea typeface="Play"/>
+                <a:cs typeface="Play"/>
+              </a:rPr>
+              <a:t>Сервис работает на 2 vCPU / 2 GB RAM</a:t>
+            </a:r>
+          </a:p>
+        </p:txBody>
+      </p:sp>
+      <p:sp>
+        <p:nvSpPr>
+          <p:cNvPr id="5" name="stat_1:bar"/>
           <p:cNvSpPr/>
           <p:nvPr/>
         </p:nvSpPr>
         <p:spPr>
           <a:xfrm>
-            <a:off x="2213338" y="4622754"/>
-            <a:ext cx="546723" cy="546723"/>
+            <a:off x="4440758" y="1892808"/>
+            <a:ext cx="50800" cy="2867152"/>
           </a:xfrm>
-          <a:prstGeom prst="ellipse">
+          <a:prstGeom prst="rect">
             <a:avLst/>
           </a:prstGeom>
           <a:solidFill>
@@ -8797,6 +11452,7 @@
           <a:ln>
             <a:noFill/>
           </a:ln>
+          <a:effectLst/>
         </p:spPr>
         <p:style>
           <a:lnRef idx="1">
@@ -8822,14 +11478,14 @@
       </p:sp>
       <p:sp>
         <p:nvSpPr>
-          <p:cNvPr id="6" name="TextBox 5"/>
+          <p:cNvPr id="6" name="stat_1"/>
           <p:cNvSpPr txBox="1"/>
           <p:nvPr/>
         </p:nvSpPr>
         <p:spPr>
           <a:xfrm>
-            <a:off x="677387" y="3715691"/>
-            <a:ext cx="5427939" cy="944340"/>
+            <a:off x="4618558" y="1783080"/>
+            <a:ext cx="3151336" cy="2976880"/>
           </a:xfrm>
           <a:prstGeom prst="rect">
             <a:avLst/>
@@ -8837,15 +11493,21 @@
           <a:noFill/>
         </p:spPr>
         <p:txBody>
-          <a:bodyPr wrap="square" lIns="12700" rIns="12700" tIns="12700" bIns="12700">
+          <a:bodyPr wrap="square" lIns="76200" rIns="76200" tIns="0" bIns="0">
             <a:spAutoFit/>
           </a:bodyPr>
           <a:lstStyle/>
           <a:p>
-            <a:pPr algn="ctr">
-              <a:defRPr sz="1400" b="0">
-                <a:solidFill>
-                  <a:srgbClr val="000000"/>
+            <a:pPr>
+              <a:lnSpc>
+                <a:spcPct val="100000"/>
+              </a:lnSpc>
+              <a:spcAft>
+                <a:spcPts val="200"/>
+              </a:spcAft>
+              <a:defRPr sz="4800" b="1">
+                <a:solidFill>
+                  <a:srgbClr val="0077FF"/>
                 </a:solidFill>
                 <a:latin typeface="Play"/>
                 <a:ea typeface="Play"/>
@@ -8853,31 +11515,57 @@
               </a:defRPr>
             </a:pPr>
             <a:r>
-              <a:rPr sz="1400" b="0">
-                <a:solidFill>
-                  <a:srgbClr val="000000"/>
+              <a:rPr sz="4800" b="1">
+                <a:solidFill>
+                  <a:srgbClr val="0077FF"/>
                 </a:solidFill>
                 <a:latin typeface="Play"/>
                 <a:ea typeface="Play"/>
                 <a:cs typeface="Play"/>
               </a:rPr>
-              <a:t>Третий квартал 2026: подключение 4 команд</a:t>
+              <a:t>6 нед.</a:t>
+            </a:r>
+          </a:p>
+          <a:p>
+            <a:pPr>
+              <a:spcAft>
+                <a:spcPts val="300"/>
+              </a:spcAft>
+              <a:defRPr sz="3200" b="0">
+                <a:solidFill>
+                  <a:srgbClr val="000000"/>
+                </a:solidFill>
+                <a:latin typeface="Play"/>
+                <a:ea typeface="Play"/>
+                <a:cs typeface="Play"/>
+              </a:defRPr>
+            </a:pPr>
+            <a:r>
+              <a:rPr sz="3200" b="0">
+                <a:solidFill>
+                  <a:srgbClr val="000000"/>
+                </a:solidFill>
+                <a:latin typeface="Play"/>
+                <a:ea typeface="Play"/>
+                <a:cs typeface="Play"/>
+              </a:rPr>
+              <a:t>Инференс за 6 недель пилота стоит 1 400 руб</a:t>
             </a:r>
           </a:p>
         </p:txBody>
       </p:sp>
       <p:sp>
         <p:nvSpPr>
-          <p:cNvPr id="7" name="Oval 6"/>
+          <p:cNvPr id="7" name="stat_2:bar"/>
           <p:cNvSpPr/>
           <p:nvPr/>
         </p:nvSpPr>
         <p:spPr>
           <a:xfrm>
-            <a:off x="5831964" y="4622754"/>
-            <a:ext cx="546723" cy="546723"/>
+            <a:off x="8204130" y="1892808"/>
+            <a:ext cx="50800" cy="2867152"/>
           </a:xfrm>
-          <a:prstGeom prst="ellipse">
+          <a:prstGeom prst="rect">
             <a:avLst/>
           </a:prstGeom>
           <a:solidFill>
@@ -8886,6 +11574,7 @@
           <a:ln>
             <a:noFill/>
           </a:ln>
+          <a:effectLst/>
         </p:spPr>
         <p:style>
           <a:lnRef idx="1">
@@ -8911,14 +11600,14 @@
       </p:sp>
       <p:sp>
         <p:nvSpPr>
-          <p:cNvPr id="8" name="TextBox 7"/>
+          <p:cNvPr id="8" name="stat_2"/>
           <p:cNvSpPr txBox="1"/>
           <p:nvPr/>
         </p:nvSpPr>
         <p:spPr>
           <a:xfrm>
-            <a:off x="3391356" y="5405563"/>
-            <a:ext cx="5427939" cy="944340"/>
+            <a:off x="8381930" y="1783080"/>
+            <a:ext cx="3151336" cy="2976880"/>
           </a:xfrm>
           <a:prstGeom prst="rect">
             <a:avLst/>
@@ -8926,15 +11615,21 @@
           <a:noFill/>
         </p:spPr>
         <p:txBody>
-          <a:bodyPr wrap="square" lIns="12700" rIns="12700" tIns="12700" bIns="12700">
+          <a:bodyPr wrap="square" lIns="76200" rIns="76200" tIns="0" bIns="0">
             <a:spAutoFit/>
           </a:bodyPr>
           <a:lstStyle/>
           <a:p>
-            <a:pPr algn="ctr">
-              <a:defRPr sz="1400" b="0">
-                <a:solidFill>
-                  <a:srgbClr val="000000"/>
+            <a:pPr>
+              <a:lnSpc>
+                <a:spcPct val="100000"/>
+              </a:lnSpc>
+              <a:spcAft>
+                <a:spcPts val="200"/>
+              </a:spcAft>
+              <a:defRPr sz="4800" b="1">
+                <a:solidFill>
+                  <a:srgbClr val="0077FF"/>
                 </a:solidFill>
                 <a:latin typeface="Play"/>
                 <a:ea typeface="Play"/>
@@ -8942,86 +11637,23 @@
               </a:defRPr>
             </a:pPr>
             <a:r>
-              <a:rPr sz="1400" b="0">
-                <a:solidFill>
-                  <a:srgbClr val="000000"/>
+              <a:rPr sz="4800" b="1">
+                <a:solidFill>
+                  <a:srgbClr val="0077FF"/>
                 </a:solidFill>
                 <a:latin typeface="Play"/>
                 <a:ea typeface="Play"/>
                 <a:cs typeface="Play"/>
               </a:rPr>
-              <a:t>Четвёртый квартал 2026: доступ для всей компании</a:t>
+              <a:t>20</a:t>
             </a:r>
           </a:p>
-        </p:txBody>
-      </p:sp>
-      <p:sp>
-        <p:nvSpPr>
-          <p:cNvPr id="9" name="Oval 8"/>
-          <p:cNvSpPr/>
-          <p:nvPr/>
-        </p:nvSpPr>
-        <p:spPr>
-          <a:xfrm>
-            <a:off x="9450590" y="4622754"/>
-            <a:ext cx="546723" cy="546723"/>
-          </a:xfrm>
-          <a:prstGeom prst="ellipse">
-            <a:avLst/>
-          </a:prstGeom>
-          <a:solidFill>
-            <a:srgbClr val="0077FF"/>
-          </a:solidFill>
-          <a:ln>
-            <a:noFill/>
-          </a:ln>
-        </p:spPr>
-        <p:style>
-          <a:lnRef idx="1">
-            <a:schemeClr val="accent1"/>
-          </a:lnRef>
-          <a:fillRef idx="3">
-            <a:schemeClr val="accent1"/>
-          </a:fillRef>
-          <a:effectRef idx="2">
-            <a:schemeClr val="accent1"/>
-          </a:effectRef>
-          <a:fontRef idx="minor">
-            <a:schemeClr val="lt1"/>
-          </a:fontRef>
-        </p:style>
-        <p:txBody>
-          <a:bodyPr rtlCol="0" anchor="ctr"/>
-          <a:lstStyle/>
           <a:p>
-            <a:pPr algn="ctr"/>
-          </a:p>
-        </p:txBody>
-      </p:sp>
-      <p:sp>
-        <p:nvSpPr>
-          <p:cNvPr id="10" name="TextBox 9"/>
-          <p:cNvSpPr txBox="1"/>
-          <p:nvPr/>
-        </p:nvSpPr>
-        <p:spPr>
-          <a:xfrm>
-            <a:off x="6105326" y="3715691"/>
-            <a:ext cx="5427939" cy="944340"/>
-          </a:xfrm>
-          <a:prstGeom prst="rect">
-            <a:avLst/>
-          </a:prstGeom>
-          <a:noFill/>
-        </p:spPr>
-        <p:txBody>
-          <a:bodyPr wrap="square" lIns="12700" rIns="12700" tIns="12700" bIns="12700">
-            <a:spAutoFit/>
-          </a:bodyPr>
-          <a:lstStyle/>
-          <a:p>
-            <a:pPr algn="ctr">
-              <a:defRPr sz="1400" b="0">
+            <a:pPr>
+              <a:spcAft>
+                <a:spcPts val="300"/>
+              </a:spcAft>
+              <a:defRPr sz="3200" b="0">
                 <a:solidFill>
                   <a:srgbClr val="000000"/>
                 </a:solidFill>
@@ -9031,7 +11663,7 @@
               </a:defRPr>
             </a:pPr>
             <a:r>
-              <a:rPr sz="1400" b="0">
+              <a:rPr sz="3200" b="0">
                 <a:solidFill>
                   <a:srgbClr val="000000"/>
                 </a:solidFill>
@@ -9039,7 +11671,7 @@
                 <a:ea typeface="Play"/>
                 <a:cs typeface="Play"/>
               </a:rPr>
-              <a:t>Первый квартал 2027: генерация иллюстраций</a:t>
+              <a:t>Нагрузка выше 20 задач требует внешней очереди</a:t>
             </a:r>
           </a:p>
         </p:txBody>
@@ -9175,17 +11807,92 @@
           </a:p>
         </p:txBody>
       </p:sp>
+      <p:sp>
+        <p:nvSpPr>
+          <p:cNvPr id="797" name="body"/>
+          <p:cNvSpPr txBox="1"/>
+          <p:nvPr/>
+        </p:nvSpPr>
+        <p:spPr>
+          <a:xfrm>
+            <a:off x="677387" y="1783080"/>
+            <a:ext cx="10855878" cy="944880"/>
+          </a:xfrm>
+          <a:prstGeom prst="rect">
+            <a:avLst/>
+          </a:prstGeom>
+          <a:noFill/>
+        </p:spPr>
+        <p:txBody>
+          <a:bodyPr wrap="square" lIns="76200" rIns="76200" tIns="50800" bIns="50800">
+            <a:spAutoFit/>
+          </a:bodyPr>
+          <a:lstStyle/>
+          <a:p>
+            <a:pPr algn="l">
+              <a:spcAft>
+                <a:spcPts val="300"/>
+              </a:spcAft>
+              <a:defRPr sz="1600">
+                <a:solidFill>
+                  <a:srgbClr val="000000"/>
+                </a:solidFill>
+                <a:latin typeface="Play"/>
+                <a:ea typeface="Play"/>
+                <a:cs typeface="Play"/>
+              </a:defRPr>
+            </a:pPr>
+            <a:r>
+              <a:rPr sz="1600">
+                <a:solidFill>
+                  <a:srgbClr val="000000"/>
+                </a:solidFill>
+                <a:latin typeface="Play"/>
+                <a:ea typeface="Play"/>
+                <a:cs typeface="Play"/>
+              </a:rPr>
+              <a:t>• Пилот 6 недель на двух командах, 68 презентаций</a:t>
+            </a:r>
+          </a:p>
+          <a:p>
+            <a:pPr algn="l">
+              <a:spcAft>
+                <a:spcPts val="300"/>
+              </a:spcAft>
+              <a:defRPr sz="1600">
+                <a:solidFill>
+                  <a:srgbClr val="000000"/>
+                </a:solidFill>
+                <a:latin typeface="Play"/>
+                <a:ea typeface="Play"/>
+                <a:cs typeface="Play"/>
+              </a:defRPr>
+            </a:pPr>
+            <a:r>
+              <a:rPr sz="1600">
+                <a:solidFill>
+                  <a:srgbClr val="000000"/>
+                </a:solidFill>
+                <a:latin typeface="Play"/>
+                <a:ea typeface="Play"/>
+                <a:cs typeface="Play"/>
+              </a:rPr>
+              <a:t>• Сборка 4 мин, 1 день до первой версии, 2 нарушения стиля</a:t>
+            </a:r>
+          </a:p>
+        </p:txBody>
+      </p:sp>
       <p:graphicFrame>
         <p:nvGraphicFramePr>
-          <p:cNvPr id="797" name="Table 796"/>
+          <p:cNvPr id="798" name="Table 797"/>
           <p:cNvGraphicFramePr>
             <a:graphicFrameLocks noGrp="1"/>
           </p:cNvGraphicFramePr>
           <p:nvPr/>
         </p:nvGraphicFramePr>
         <p:xfrm>
-          <a:off x="677387" y="2200937"/>
-          <a:ext cx="10855878" cy="4127761"/>
+          <a:off x="677387" y="2899410"/>
+          <a:ext cx="10855878" cy="3301387"/>
         </p:xfrm>
         <a:graphic>
           <a:graphicData uri="http://schemas.openxmlformats.org/drawingml/2006/table">
@@ -9198,7 +11905,7 @@
                 <a:gridCol w="3618626"/>
                 <a:gridCol w="3618626"/>
               </a:tblGrid>
-              <a:tr h="825552">
+              <a:tr h="660277">
                 <a:tc>
                   <a:txBody>
                     <a:bodyPr/>
@@ -9241,7 +11948,7 @@
                         </a:defRPr>
                       </a:pPr>
                       <a:r>
-                        <a:t>До</a:t>
+                        <a:t>Текущий процесс</a:t>
                       </a:r>
                     </a:p>
                   </a:txBody>
@@ -9267,7 +11974,7 @@
                         </a:defRPr>
                       </a:pPr>
                       <a:r>
-                        <a:t>После</a:t>
+                        <a:t>Пилот</a:t>
                       </a:r>
                     </a:p>
                   </a:txBody>
@@ -9278,7 +11985,7 @@
                   </a:tcPr>
                 </a:tc>
               </a:tr>
-              <a:tr h="825552">
+              <a:tr h="660277">
                 <a:tc>
                   <a:txBody>
                     <a:bodyPr/>
@@ -9358,7 +12065,7 @@
                   </a:tcPr>
                 </a:tc>
               </a:tr>
-              <a:tr h="825552">
+              <a:tr h="660277">
                 <a:tc>
                   <a:txBody>
                     <a:bodyPr/>
@@ -9375,7 +12082,7 @@
                         </a:defRPr>
                       </a:pPr>
                       <a:r>
-                        <a:t>Время первой версии (дней)</a:t>
+                        <a:t>Время до первой версии (дней)</a:t>
                       </a:r>
                     </a:p>
                   </a:txBody>
@@ -9438,7 +12145,7 @@
                   </a:tcPr>
                 </a:tc>
               </a:tr>
-              <a:tr h="825552">
+              <a:tr h="660277">
                 <a:tc>
                   <a:txBody>
                     <a:bodyPr/>
@@ -9481,7 +12188,7 @@
                         </a:defRPr>
                       </a:pPr>
                       <a:r>
-                        <a:t>19</a:t>
+                        <a:t>19/42</a:t>
                       </a:r>
                     </a:p>
                   </a:txBody>
@@ -9507,7 +12214,7 @@
                         </a:defRPr>
                       </a:pPr>
                       <a:r>
-                        <a:t>2</a:t>
+                        <a:t>2/68</a:t>
                       </a:r>
                     </a:p>
                   </a:txBody>
@@ -9518,7 +12225,7 @@
                   </a:tcPr>
                 </a:tc>
               </a:tr>
-              <a:tr h="825553">
+              <a:tr h="660279">
                 <a:tc>
                   <a:txBody>
                     <a:bodyPr/>
@@ -9535,7 +12242,7 @@
                         </a:defRPr>
                       </a:pPr>
                       <a:r>
-                        <a:t>Запросы закрыты в неделю</a:t>
+                        <a:t>Запросы закрыты</a:t>
                       </a:r>
                     </a:p>
                   </a:txBody>
@@ -9561,7 +12268,7 @@
                         </a:defRPr>
                       </a:pPr>
                       <a:r>
-                        <a:t>11</a:t>
+                        <a:t>11/нед</a:t>
                       </a:r>
                     </a:p>
                   </a:txBody>
@@ -9587,7 +12294,7 @@
                         </a:defRPr>
                       </a:pPr>
                       <a:r>
-                        <a:t>38</a:t>
+                        <a:t>38/нед</a:t>
                       </a:r>
                     </a:p>
                   </a:txBody>
@@ -9627,23 +12334,1291 @@
         <p:nvPr/>
       </p:nvGrpSpPr>
       <p:grpSpPr/>
-      <p:pic>
-        <p:nvPicPr>
-          <p:cNvPr id="762" name="Google Shape;762;p58"/>
-          <p:cNvPicPr preferRelativeResize="0"/>
+      <p:sp>
+        <p:nvSpPr>
+          <p:cNvPr id="2" name="title"/>
+          <p:cNvSpPr txBox="1"/>
           <p:nvPr/>
-        </p:nvPicPr>
-        <p:blipFill rotWithShape="1">
-          <a:blip r:embed="rId2">
-            <a:alphaModFix/>
-          </a:blip>
-          <a:srcRect b="0" l="0" r="0" t="0"/>
-          <a:stretch/>
-        </p:blipFill>
+        </p:nvSpPr>
         <p:spPr>
           <a:xfrm>
-            <a:off x="8105070" y="2562300"/>
-            <a:ext cx="866700" cy="866700"/>
+            <a:off x="677387" y="692177"/>
+            <a:ext cx="10855878" cy="822960"/>
+          </a:xfrm>
+          <a:prstGeom prst="rect">
+            <a:avLst/>
+          </a:prstGeom>
+          <a:noFill/>
+        </p:spPr>
+        <p:txBody>
+          <a:bodyPr wrap="square" lIns="76200" rIns="76200" tIns="50800" bIns="50800">
+            <a:spAutoFit/>
+          </a:bodyPr>
+          <a:lstStyle/>
+          <a:p>
+            <a:pPr algn="l">
+              <a:spcAft>
+                <a:spcPts val="300"/>
+              </a:spcAft>
+              <a:defRPr sz="4000">
+                <a:solidFill>
+                  <a:srgbClr val="000000"/>
+                </a:solidFill>
+                <a:latin typeface="Arial"/>
+                <a:ea typeface="Arial"/>
+                <a:cs typeface="Arial"/>
+              </a:defRPr>
+            </a:pPr>
+            <a:r>
+              <a:rPr sz="4000">
+                <a:solidFill>
+                  <a:srgbClr val="000000"/>
+                </a:solidFill>
+                <a:latin typeface="Arial"/>
+                <a:ea typeface="Arial"/>
+                <a:cs typeface="Arial"/>
+              </a:rPr>
+              <a:t>Риски</a:t>
+            </a:r>
+          </a:p>
+        </p:txBody>
+      </p:sp>
+      <p:grpSp>
+        <p:nvGrpSpPr>
+          <p:cNvPr id="3" name="icon:builtin-alert"/>
+          <p:cNvGrpSpPr/>
+          <p:nvPr/>
+        </p:nvGrpSpPr>
+        <p:grpSpPr>
+          <a:xfrm>
+            <a:off x="734076" y="2086353"/>
+            <a:ext cx="469551" cy="428405"/>
+            <a:chOff x="734076" y="2086353"/>
+            <a:chExt cx="469551" cy="428405"/>
+          </a:xfrm>
+        </p:grpSpPr>
+        <p:sp>
+          <p:nvSpPr>
+            <p:cNvPr id="4" name="Freeform 3"/>
+            <p:cNvSpPr/>
+            <p:nvPr/>
+          </p:nvSpPr>
+          <p:spPr>
+            <a:xfrm>
+              <a:off x="734076" y="2086353"/>
+              <a:ext cx="469551" cy="428405"/>
+            </a:xfrm>
+            <a:custGeom>
+              <a:avLst/>
+              <a:gdLst/>
+              <a:ahLst/>
+              <a:cxnLst/>
+              <a:rect l="l" t="t" r="r" b="b"/>
+              <a:pathLst>
+                <a:path w="469551" h="428405">
+                  <a:moveTo>
+                    <a:pt x="193485" y="22783"/>
+                  </a:moveTo>
+                  <a:lnTo>
+                    <a:pt x="6461" y="355539"/>
+                  </a:lnTo>
+                  <a:lnTo>
+                    <a:pt x="2648" y="363870"/>
+                  </a:lnTo>
+                  <a:lnTo>
+                    <a:pt x="462" y="372784"/>
+                  </a:lnTo>
+                  <a:lnTo>
+                    <a:pt x="0" y="381941"/>
+                  </a:lnTo>
+                  <a:lnTo>
+                    <a:pt x="1263" y="391001"/>
+                  </a:lnTo>
+                  <a:lnTo>
+                    <a:pt x="4202" y="399696"/>
+                  </a:lnTo>
+                  <a:lnTo>
+                    <a:pt x="8720" y="407663"/>
+                  </a:lnTo>
+                  <a:lnTo>
+                    <a:pt x="14647" y="414658"/>
+                  </a:lnTo>
+                  <a:lnTo>
+                    <a:pt x="21787" y="420390"/>
+                  </a:lnTo>
+                  <a:lnTo>
+                    <a:pt x="29876" y="424689"/>
+                  </a:lnTo>
+                  <a:lnTo>
+                    <a:pt x="38644" y="427385"/>
+                  </a:lnTo>
+                  <a:lnTo>
+                    <a:pt x="47752" y="428405"/>
+                  </a:lnTo>
+                  <a:lnTo>
+                    <a:pt x="421799" y="428405"/>
+                  </a:lnTo>
+                  <a:lnTo>
+                    <a:pt x="430907" y="427385"/>
+                  </a:lnTo>
+                  <a:lnTo>
+                    <a:pt x="439675" y="424689"/>
+                  </a:lnTo>
+                  <a:lnTo>
+                    <a:pt x="447764" y="420390"/>
+                  </a:lnTo>
+                  <a:lnTo>
+                    <a:pt x="454904" y="414658"/>
+                  </a:lnTo>
+                  <a:lnTo>
+                    <a:pt x="460831" y="407663"/>
+                  </a:lnTo>
+                  <a:lnTo>
+                    <a:pt x="465349" y="399696"/>
+                  </a:lnTo>
+                  <a:lnTo>
+                    <a:pt x="468288" y="391001"/>
+                  </a:lnTo>
+                  <a:lnTo>
+                    <a:pt x="469551" y="381941"/>
+                  </a:lnTo>
+                  <a:lnTo>
+                    <a:pt x="469089" y="372784"/>
+                  </a:lnTo>
+                  <a:lnTo>
+                    <a:pt x="466903" y="363870"/>
+                  </a:lnTo>
+                  <a:lnTo>
+                    <a:pt x="463090" y="355539"/>
+                  </a:lnTo>
+                  <a:lnTo>
+                    <a:pt x="276066" y="22783"/>
+                  </a:lnTo>
+                  <a:lnTo>
+                    <a:pt x="270674" y="15642"/>
+                  </a:lnTo>
+                  <a:lnTo>
+                    <a:pt x="264043" y="9594"/>
+                  </a:lnTo>
+                  <a:lnTo>
+                    <a:pt x="256417" y="4882"/>
+                  </a:lnTo>
+                  <a:lnTo>
+                    <a:pt x="248061" y="1652"/>
+                  </a:lnTo>
+                  <a:lnTo>
+                    <a:pt x="239245" y="0"/>
+                  </a:lnTo>
+                  <a:lnTo>
+                    <a:pt x="230306" y="0"/>
+                  </a:lnTo>
+                  <a:lnTo>
+                    <a:pt x="221490" y="1652"/>
+                  </a:lnTo>
+                  <a:lnTo>
+                    <a:pt x="213134" y="4882"/>
+                  </a:lnTo>
+                  <a:lnTo>
+                    <a:pt x="205508" y="9594"/>
+                  </a:lnTo>
+                  <a:lnTo>
+                    <a:pt x="198877" y="15642"/>
+                  </a:lnTo>
+                  <a:lnTo>
+                    <a:pt x="193485" y="22783"/>
+                  </a:lnTo>
+                  <a:close/>
+                </a:path>
+              </a:pathLst>
+            </a:custGeom>
+            <a:noFill/>
+            <a:ln w="48577" cap="rnd">
+              <a:solidFill>
+                <a:srgbClr val="0077FF"/>
+              </a:solidFill>
+              <a:round/>
+            </a:ln>
+            <a:effectLst/>
+          </p:spPr>
+          <p:style>
+            <a:lnRef idx="1">
+              <a:schemeClr val="accent1"/>
+            </a:lnRef>
+            <a:fillRef idx="3">
+              <a:schemeClr val="accent1"/>
+            </a:fillRef>
+            <a:effectRef idx="2">
+              <a:schemeClr val="accent1"/>
+            </a:effectRef>
+            <a:fontRef idx="minor">
+              <a:schemeClr val="lt1"/>
+            </a:fontRef>
+          </p:style>
+          <p:txBody>
+            <a:bodyPr rtlCol="0" anchor="ctr"/>
+            <a:lstStyle/>
+            <a:p>
+              <a:pPr algn="ctr"/>
+            </a:p>
+          </p:txBody>
+        </p:sp>
+        <p:sp>
+          <p:nvSpPr>
+            <p:cNvPr id="5" name="Freeform 4"/>
+            <p:cNvSpPr/>
+            <p:nvPr/>
+          </p:nvSpPr>
+          <p:spPr>
+            <a:xfrm>
+              <a:off x="968852" y="2235438"/>
+              <a:ext cx="0" cy="97155"/>
+            </a:xfrm>
+            <a:custGeom>
+              <a:avLst/>
+              <a:gdLst/>
+              <a:ahLst/>
+              <a:cxnLst/>
+              <a:rect l="l" t="t" r="r" b="b"/>
+              <a:pathLst>
+                <a:path w="0" h="97155">
+                  <a:moveTo>
+                    <a:pt x="0" y="0"/>
+                  </a:moveTo>
+                  <a:lnTo>
+                    <a:pt x="0" y="97155"/>
+                  </a:lnTo>
+                </a:path>
+              </a:pathLst>
+            </a:custGeom>
+            <a:noFill/>
+            <a:ln w="48577" cap="rnd">
+              <a:solidFill>
+                <a:srgbClr val="0077FF"/>
+              </a:solidFill>
+              <a:round/>
+            </a:ln>
+            <a:effectLst/>
+          </p:spPr>
+          <p:style>
+            <a:lnRef idx="1">
+              <a:schemeClr val="accent1"/>
+            </a:lnRef>
+            <a:fillRef idx="3">
+              <a:schemeClr val="accent1"/>
+            </a:fillRef>
+            <a:effectRef idx="2">
+              <a:schemeClr val="accent1"/>
+            </a:effectRef>
+            <a:fontRef idx="minor">
+              <a:schemeClr val="lt1"/>
+            </a:fontRef>
+          </p:style>
+          <p:txBody>
+            <a:bodyPr rtlCol="0" anchor="ctr"/>
+            <a:lstStyle/>
+            <a:p>
+              <a:pPr algn="ctr"/>
+            </a:p>
+          </p:txBody>
+        </p:sp>
+        <p:sp>
+          <p:nvSpPr>
+            <p:cNvPr id="6" name="Oval 5"/>
+            <p:cNvSpPr/>
+            <p:nvPr/>
+          </p:nvSpPr>
+          <p:spPr>
+            <a:xfrm>
+              <a:off x="942134" y="2390886"/>
+              <a:ext cx="53435" cy="53435"/>
+            </a:xfrm>
+            <a:prstGeom prst="ellipse">
+              <a:avLst/>
+            </a:prstGeom>
+            <a:solidFill>
+              <a:srgbClr val="0077FF"/>
+            </a:solidFill>
+            <a:ln>
+              <a:noFill/>
+            </a:ln>
+            <a:effectLst/>
+          </p:spPr>
+          <p:style>
+            <a:lnRef idx="1">
+              <a:schemeClr val="accent1"/>
+            </a:lnRef>
+            <a:fillRef idx="3">
+              <a:schemeClr val="accent1"/>
+            </a:fillRef>
+            <a:effectRef idx="2">
+              <a:schemeClr val="accent1"/>
+            </a:effectRef>
+            <a:fontRef idx="minor">
+              <a:schemeClr val="lt1"/>
+            </a:fontRef>
+          </p:style>
+          <p:txBody>
+            <a:bodyPr rtlCol="0" anchor="ctr"/>
+            <a:lstStyle/>
+            <a:p>
+              <a:pPr algn="ctr"/>
+            </a:p>
+          </p:txBody>
+        </p:sp>
+      </p:grpSp>
+      <p:sp>
+        <p:nvSpPr>
+          <p:cNvPr id="7" name="item_0"/>
+          <p:cNvSpPr txBox="1"/>
+          <p:nvPr/>
+        </p:nvSpPr>
+        <p:spPr>
+          <a:xfrm>
+            <a:off x="1522636" y="1783080"/>
+            <a:ext cx="10010630" cy="1335412"/>
+          </a:xfrm>
+          <a:prstGeom prst="rect">
+            <a:avLst/>
+          </a:prstGeom>
+          <a:noFill/>
+        </p:spPr>
+        <p:txBody>
+          <a:bodyPr wrap="square" lIns="76200" rIns="76200" tIns="50800" bIns="50800">
+            <a:spAutoFit/>
+          </a:bodyPr>
+          <a:lstStyle/>
+          <a:p>
+            <a:pPr algn="l">
+              <a:spcAft>
+                <a:spcPts val="300"/>
+              </a:spcAft>
+              <a:defRPr sz="2800">
+                <a:solidFill>
+                  <a:srgbClr val="000000"/>
+                </a:solidFill>
+                <a:latin typeface="Play"/>
+                <a:ea typeface="Play"/>
+                <a:cs typeface="Play"/>
+              </a:defRPr>
+            </a:pPr>
+            <a:r>
+              <a:rPr sz="2800">
+                <a:solidFill>
+                  <a:srgbClr val="000000"/>
+                </a:solidFill>
+                <a:latin typeface="Play"/>
+                <a:ea typeface="Play"/>
+                <a:cs typeface="Play"/>
+              </a:rPr>
+              <a:t>Слабая модель может выдумать неподтверждённые цифры</a:t>
+            </a:r>
+          </a:p>
+        </p:txBody>
+      </p:sp>
+      <p:grpSp>
+        <p:nvGrpSpPr>
+          <p:cNvPr id="8" name="icon:builtin-shield"/>
+          <p:cNvGrpSpPr/>
+          <p:nvPr/>
+        </p:nvGrpSpPr>
+        <p:grpSpPr>
+          <a:xfrm>
+            <a:off x="798830" y="3328518"/>
+            <a:ext cx="340043" cy="437197"/>
+            <a:chOff x="798830" y="3328518"/>
+            <a:chExt cx="340043" cy="437197"/>
+          </a:xfrm>
+        </p:grpSpPr>
+        <p:sp>
+          <p:nvSpPr>
+            <p:cNvPr id="9" name="Freeform 8"/>
+            <p:cNvSpPr/>
+            <p:nvPr/>
+          </p:nvSpPr>
+          <p:spPr>
+            <a:xfrm>
+              <a:off x="798830" y="3328518"/>
+              <a:ext cx="340043" cy="437197"/>
+            </a:xfrm>
+            <a:custGeom>
+              <a:avLst/>
+              <a:gdLst/>
+              <a:ahLst/>
+              <a:cxnLst/>
+              <a:rect l="l" t="t" r="r" b="b"/>
+              <a:pathLst>
+                <a:path w="340043" h="437197">
+                  <a:moveTo>
+                    <a:pt x="170022" y="0"/>
+                  </a:moveTo>
+                  <a:lnTo>
+                    <a:pt x="340043" y="72866"/>
+                  </a:lnTo>
+                  <a:lnTo>
+                    <a:pt x="340043" y="194310"/>
+                  </a:lnTo>
+                  <a:lnTo>
+                    <a:pt x="337905" y="226687"/>
+                  </a:lnTo>
+                  <a:lnTo>
+                    <a:pt x="331687" y="258043"/>
+                  </a:lnTo>
+                  <a:lnTo>
+                    <a:pt x="321680" y="288089"/>
+                  </a:lnTo>
+                  <a:lnTo>
+                    <a:pt x="308176" y="316531"/>
+                  </a:lnTo>
+                  <a:lnTo>
+                    <a:pt x="291465" y="343078"/>
+                  </a:lnTo>
+                  <a:lnTo>
+                    <a:pt x="271840" y="367440"/>
+                  </a:lnTo>
+                  <a:lnTo>
+                    <a:pt x="249591" y="389324"/>
+                  </a:lnTo>
+                  <a:lnTo>
+                    <a:pt x="225011" y="408439"/>
+                  </a:lnTo>
+                  <a:lnTo>
+                    <a:pt x="198391" y="424494"/>
+                  </a:lnTo>
+                  <a:lnTo>
+                    <a:pt x="170022" y="437197"/>
+                  </a:lnTo>
+                  <a:lnTo>
+                    <a:pt x="141652" y="424494"/>
+                  </a:lnTo>
+                  <a:lnTo>
+                    <a:pt x="115032" y="408439"/>
+                  </a:lnTo>
+                  <a:lnTo>
+                    <a:pt x="90452" y="389324"/>
+                  </a:lnTo>
+                  <a:lnTo>
+                    <a:pt x="68203" y="367440"/>
+                  </a:lnTo>
+                  <a:lnTo>
+                    <a:pt x="48578" y="343078"/>
+                  </a:lnTo>
+                  <a:lnTo>
+                    <a:pt x="31867" y="316531"/>
+                  </a:lnTo>
+                  <a:lnTo>
+                    <a:pt x="18363" y="288089"/>
+                  </a:lnTo>
+                  <a:lnTo>
+                    <a:pt x="8356" y="258043"/>
+                  </a:lnTo>
+                  <a:lnTo>
+                    <a:pt x="2138" y="226687"/>
+                  </a:lnTo>
+                  <a:lnTo>
+                    <a:pt x="0" y="194310"/>
+                  </a:lnTo>
+                  <a:lnTo>
+                    <a:pt x="0" y="72866"/>
+                  </a:lnTo>
+                  <a:close/>
+                </a:path>
+              </a:pathLst>
+            </a:custGeom>
+            <a:noFill/>
+            <a:ln w="48577" cap="rnd">
+              <a:solidFill>
+                <a:srgbClr val="0077FF"/>
+              </a:solidFill>
+              <a:round/>
+            </a:ln>
+            <a:effectLst/>
+          </p:spPr>
+          <p:style>
+            <a:lnRef idx="1">
+              <a:schemeClr val="accent1"/>
+            </a:lnRef>
+            <a:fillRef idx="3">
+              <a:schemeClr val="accent1"/>
+            </a:fillRef>
+            <a:effectRef idx="2">
+              <a:schemeClr val="accent1"/>
+            </a:effectRef>
+            <a:fontRef idx="minor">
+              <a:schemeClr val="lt1"/>
+            </a:fontRef>
+          </p:style>
+          <p:txBody>
+            <a:bodyPr rtlCol="0" anchor="ctr"/>
+            <a:lstStyle/>
+            <a:p>
+              <a:pPr algn="ctr"/>
+            </a:p>
+          </p:txBody>
+        </p:sp>
+        <p:sp>
+          <p:nvSpPr>
+            <p:cNvPr id="10" name="Freeform 9"/>
+            <p:cNvSpPr/>
+            <p:nvPr/>
+          </p:nvSpPr>
+          <p:spPr>
+            <a:xfrm>
+              <a:off x="895985" y="3498539"/>
+              <a:ext cx="145733" cy="97155"/>
+            </a:xfrm>
+            <a:custGeom>
+              <a:avLst/>
+              <a:gdLst/>
+              <a:ahLst/>
+              <a:cxnLst/>
+              <a:rect l="l" t="t" r="r" b="b"/>
+              <a:pathLst>
+                <a:path w="145733" h="97155">
+                  <a:moveTo>
+                    <a:pt x="0" y="48578"/>
+                  </a:moveTo>
+                  <a:lnTo>
+                    <a:pt x="48578" y="97155"/>
+                  </a:lnTo>
+                  <a:lnTo>
+                    <a:pt x="145733" y="0"/>
+                  </a:lnTo>
+                </a:path>
+              </a:pathLst>
+            </a:custGeom>
+            <a:noFill/>
+            <a:ln w="48577" cap="rnd">
+              <a:solidFill>
+                <a:srgbClr val="0077FF"/>
+              </a:solidFill>
+              <a:round/>
+            </a:ln>
+            <a:effectLst/>
+          </p:spPr>
+          <p:style>
+            <a:lnRef idx="1">
+              <a:schemeClr val="accent1"/>
+            </a:lnRef>
+            <a:fillRef idx="3">
+              <a:schemeClr val="accent1"/>
+            </a:fillRef>
+            <a:effectRef idx="2">
+              <a:schemeClr val="accent1"/>
+            </a:effectRef>
+            <a:fontRef idx="minor">
+              <a:schemeClr val="lt1"/>
+            </a:fontRef>
+          </p:style>
+          <p:txBody>
+            <a:bodyPr rtlCol="0" anchor="ctr"/>
+            <a:lstStyle/>
+            <a:p>
+              <a:pPr algn="ctr"/>
+            </a:p>
+          </p:txBody>
+        </p:sp>
+      </p:grpSp>
+      <p:sp>
+        <p:nvSpPr>
+          <p:cNvPr id="11" name="item_1"/>
+          <p:cNvSpPr txBox="1"/>
+          <p:nvPr/>
+        </p:nvSpPr>
+        <p:spPr>
+          <a:xfrm>
+            <a:off x="1522636" y="3265177"/>
+            <a:ext cx="10010630" cy="1325887"/>
+          </a:xfrm>
+          <a:prstGeom prst="rect">
+            <a:avLst/>
+          </a:prstGeom>
+          <a:noFill/>
+        </p:spPr>
+        <p:txBody>
+          <a:bodyPr wrap="square" lIns="76200" rIns="76200" tIns="50800" bIns="50800">
+            <a:spAutoFit/>
+          </a:bodyPr>
+          <a:lstStyle/>
+          <a:p>
+            <a:pPr algn="l">
+              <a:spcAft>
+                <a:spcPts val="300"/>
+              </a:spcAft>
+              <a:defRPr sz="2800">
+                <a:solidFill>
+                  <a:srgbClr val="000000"/>
+                </a:solidFill>
+                <a:latin typeface="Play"/>
+                <a:ea typeface="Play"/>
+                <a:cs typeface="Play"/>
+              </a:defRPr>
+            </a:pPr>
+            <a:r>
+              <a:rPr sz="2800">
+                <a:solidFill>
+                  <a:srgbClr val="000000"/>
+                </a:solidFill>
+                <a:latin typeface="Play"/>
+                <a:ea typeface="Play"/>
+                <a:cs typeface="Play"/>
+              </a:rPr>
+              <a:t>Некачественный шаблон приводит к ошибкам стиля</a:t>
+            </a:r>
+          </a:p>
+        </p:txBody>
+      </p:sp>
+      <p:grpSp>
+        <p:nvGrpSpPr>
+          <p:cNvPr id="12" name="icon:builtin-target"/>
+          <p:cNvGrpSpPr/>
+          <p:nvPr/>
+        </p:nvGrpSpPr>
+        <p:grpSpPr>
+          <a:xfrm>
+            <a:off x="750253" y="4801091"/>
+            <a:ext cx="437197" cy="437197"/>
+            <a:chOff x="750253" y="4801091"/>
+            <a:chExt cx="437197" cy="437197"/>
+          </a:xfrm>
+        </p:grpSpPr>
+        <p:sp>
+          <p:nvSpPr>
+            <p:cNvPr id="13" name="Oval 12"/>
+            <p:cNvSpPr/>
+            <p:nvPr/>
+          </p:nvSpPr>
+          <p:spPr>
+            <a:xfrm>
+              <a:off x="750253" y="4801091"/>
+              <a:ext cx="437197" cy="437197"/>
+            </a:xfrm>
+            <a:prstGeom prst="ellipse">
+              <a:avLst/>
+            </a:prstGeom>
+            <a:noFill/>
+            <a:ln w="48577" cap="rnd">
+              <a:solidFill>
+                <a:srgbClr val="0077FF"/>
+              </a:solidFill>
+              <a:round/>
+            </a:ln>
+            <a:effectLst/>
+          </p:spPr>
+          <p:style>
+            <a:lnRef idx="1">
+              <a:schemeClr val="accent1"/>
+            </a:lnRef>
+            <a:fillRef idx="3">
+              <a:schemeClr val="accent1"/>
+            </a:fillRef>
+            <a:effectRef idx="2">
+              <a:schemeClr val="accent1"/>
+            </a:effectRef>
+            <a:fontRef idx="minor">
+              <a:schemeClr val="lt1"/>
+            </a:fontRef>
+          </p:style>
+          <p:txBody>
+            <a:bodyPr rtlCol="0" anchor="ctr"/>
+            <a:lstStyle/>
+            <a:p>
+              <a:pPr algn="ctr"/>
+            </a:p>
+          </p:txBody>
+        </p:sp>
+        <p:sp>
+          <p:nvSpPr>
+            <p:cNvPr id="14" name="Oval 13"/>
+            <p:cNvSpPr/>
+            <p:nvPr/>
+          </p:nvSpPr>
+          <p:spPr>
+            <a:xfrm>
+              <a:off x="847408" y="4898246"/>
+              <a:ext cx="242887" cy="242887"/>
+            </a:xfrm>
+            <a:prstGeom prst="ellipse">
+              <a:avLst/>
+            </a:prstGeom>
+            <a:noFill/>
+            <a:ln w="48577" cap="rnd">
+              <a:solidFill>
+                <a:srgbClr val="0077FF"/>
+              </a:solidFill>
+              <a:round/>
+            </a:ln>
+            <a:effectLst/>
+          </p:spPr>
+          <p:style>
+            <a:lnRef idx="1">
+              <a:schemeClr val="accent1"/>
+            </a:lnRef>
+            <a:fillRef idx="3">
+              <a:schemeClr val="accent1"/>
+            </a:fillRef>
+            <a:effectRef idx="2">
+              <a:schemeClr val="accent1"/>
+            </a:effectRef>
+            <a:fontRef idx="minor">
+              <a:schemeClr val="lt1"/>
+            </a:fontRef>
+          </p:style>
+          <p:txBody>
+            <a:bodyPr rtlCol="0" anchor="ctr"/>
+            <a:lstStyle/>
+            <a:p>
+              <a:pPr algn="ctr"/>
+            </a:p>
+          </p:txBody>
+        </p:sp>
+        <p:sp>
+          <p:nvSpPr>
+            <p:cNvPr id="15" name="Oval 14"/>
+            <p:cNvSpPr/>
+            <p:nvPr/>
+          </p:nvSpPr>
+          <p:spPr>
+            <a:xfrm>
+              <a:off x="934847" y="4985685"/>
+              <a:ext cx="68008" cy="68008"/>
+            </a:xfrm>
+            <a:prstGeom prst="ellipse">
+              <a:avLst/>
+            </a:prstGeom>
+            <a:solidFill>
+              <a:srgbClr val="0077FF"/>
+            </a:solidFill>
+            <a:ln>
+              <a:noFill/>
+            </a:ln>
+            <a:effectLst/>
+          </p:spPr>
+          <p:style>
+            <a:lnRef idx="1">
+              <a:schemeClr val="accent1"/>
+            </a:lnRef>
+            <a:fillRef idx="3">
+              <a:schemeClr val="accent1"/>
+            </a:fillRef>
+            <a:effectRef idx="2">
+              <a:schemeClr val="accent1"/>
+            </a:effectRef>
+            <a:fontRef idx="minor">
+              <a:schemeClr val="lt1"/>
+            </a:fontRef>
+          </p:style>
+          <p:txBody>
+            <a:bodyPr rtlCol="0" anchor="ctr"/>
+            <a:lstStyle/>
+            <a:p>
+              <a:pPr algn="ctr"/>
+            </a:p>
+          </p:txBody>
+        </p:sp>
+      </p:grpSp>
+      <p:sp>
+        <p:nvSpPr>
+          <p:cNvPr id="16" name="item_2"/>
+          <p:cNvSpPr txBox="1"/>
+          <p:nvPr/>
+        </p:nvSpPr>
+        <p:spPr>
+          <a:xfrm>
+            <a:off x="1522636" y="4737750"/>
+            <a:ext cx="10010630" cy="1325887"/>
+          </a:xfrm>
+          <a:prstGeom prst="rect">
+            <a:avLst/>
+          </a:prstGeom>
+          <a:noFill/>
+        </p:spPr>
+        <p:txBody>
+          <a:bodyPr wrap="square" lIns="76200" rIns="76200" tIns="50800" bIns="50800">
+            <a:spAutoFit/>
+          </a:bodyPr>
+          <a:lstStyle/>
+          <a:p>
+            <a:pPr algn="l">
+              <a:spcAft>
+                <a:spcPts val="300"/>
+              </a:spcAft>
+              <a:defRPr sz="2800">
+                <a:solidFill>
+                  <a:srgbClr val="000000"/>
+                </a:solidFill>
+                <a:latin typeface="Play"/>
+                <a:ea typeface="Play"/>
+                <a:cs typeface="Play"/>
+              </a:defRPr>
+            </a:pPr>
+            <a:r>
+              <a:rPr sz="2800">
+                <a:solidFill>
+                  <a:srgbClr val="000000"/>
+                </a:solidFill>
+                <a:latin typeface="Play"/>
+                <a:ea typeface="Play"/>
+                <a:cs typeface="Play"/>
+              </a:rPr>
+              <a:t>Нагрузка &gt;20 задач требует внешней очереди</a:t>
+            </a:r>
+          </a:p>
+        </p:txBody>
+      </p:sp>
+    </p:spTree>
+  </p:cSld>
+  <p:clrMapOvr>
+    <a:masterClrMapping/>
+  </p:clrMapOvr>
+</p:sld>
+</file>
+
+<file path=ppt/slides/slide63.xml><?xml version="1.0" encoding="utf-8"?>
+<p:sld xmlns:a="http://schemas.openxmlformats.org/drawingml/2006/main" xmlns:p="http://schemas.openxmlformats.org/presentationml/2006/main" xmlns:r="http://schemas.openxmlformats.org/officeDocument/2006/relationships">
+  <p:cSld>
+    <p:bg>
+      <p:bgPr>
+        <a:solidFill>
+          <a:schemeClr val="lt2"/>
+        </a:solidFill>
+      </p:bgPr>
+    </p:bg>
+    <p:spTree>
+      <p:nvGrpSpPr>
+        <p:cNvPr id="1" name=""/>
+        <p:cNvGrpSpPr/>
+        <p:nvPr/>
+      </p:nvGrpSpPr>
+      <p:grpSpPr/>
+      <p:sp>
+        <p:nvSpPr>
+          <p:cNvPr id="2" name="title"/>
+          <p:cNvSpPr txBox="1"/>
+          <p:nvPr/>
+        </p:nvSpPr>
+        <p:spPr>
+          <a:xfrm>
+            <a:off x="677875" y="692177"/>
+            <a:ext cx="10855391" cy="822960"/>
+          </a:xfrm>
+          <a:prstGeom prst="rect">
+            <a:avLst/>
+          </a:prstGeom>
+          <a:noFill/>
+        </p:spPr>
+        <p:txBody>
+          <a:bodyPr wrap="square" lIns="76200" rIns="76200" tIns="50800" bIns="50800">
+            <a:spAutoFit/>
+          </a:bodyPr>
+          <a:lstStyle/>
+          <a:p>
+            <a:pPr algn="l">
+              <a:spcAft>
+                <a:spcPts val="300"/>
+              </a:spcAft>
+              <a:defRPr sz="4000">
+                <a:solidFill>
+                  <a:srgbClr val="000000"/>
+                </a:solidFill>
+                <a:latin typeface="Arial"/>
+                <a:ea typeface="Arial"/>
+                <a:cs typeface="Arial"/>
+              </a:defRPr>
+            </a:pPr>
+            <a:r>
+              <a:rPr sz="4000">
+                <a:solidFill>
+                  <a:srgbClr val="000000"/>
+                </a:solidFill>
+                <a:latin typeface="Arial"/>
+                <a:ea typeface="Arial"/>
+                <a:cs typeface="Arial"/>
+              </a:rPr>
+              <a:t>Стоимость и ресурсы</a:t>
+            </a:r>
+          </a:p>
+        </p:txBody>
+      </p:sp>
+      <p:sp>
+        <p:nvSpPr>
+          <p:cNvPr id="3" name="body"/>
+          <p:cNvSpPr txBox="1"/>
+          <p:nvPr/>
+        </p:nvSpPr>
+        <p:spPr>
+          <a:xfrm>
+            <a:off x="677875" y="1783080"/>
+            <a:ext cx="10855391" cy="1158240"/>
+          </a:xfrm>
+          <a:prstGeom prst="rect">
+            <a:avLst/>
+          </a:prstGeom>
+          <a:noFill/>
+        </p:spPr>
+        <p:txBody>
+          <a:bodyPr wrap="square" lIns="76200" rIns="76200" tIns="50800" bIns="50800">
+            <a:spAutoFit/>
+          </a:bodyPr>
+          <a:lstStyle/>
+          <a:p>
+            <a:pPr algn="l">
+              <a:spcAft>
+                <a:spcPts val="300"/>
+              </a:spcAft>
+              <a:defRPr sz="3200">
+                <a:solidFill>
+                  <a:srgbClr val="000000"/>
+                </a:solidFill>
+                <a:latin typeface="Play"/>
+                <a:ea typeface="Play"/>
+                <a:cs typeface="Play"/>
+              </a:defRPr>
+            </a:pPr>
+            <a:r>
+              <a:rPr sz="3200">
+                <a:solidFill>
+                  <a:srgbClr val="000000"/>
+                </a:solidFill>
+                <a:latin typeface="Play"/>
+                <a:ea typeface="Play"/>
+                <a:cs typeface="Play"/>
+              </a:rPr>
+              <a:t>Модель gpt-oss-20b подключается по OpenAI-совместимому протоколу</a:t>
+            </a:r>
+          </a:p>
+        </p:txBody>
+      </p:sp>
+      <p:sp>
+        <p:nvSpPr>
+          <p:cNvPr id="4" name="stat_0:bar"/>
+          <p:cNvSpPr/>
+          <p:nvPr/>
+        </p:nvSpPr>
+        <p:spPr>
+          <a:xfrm>
+            <a:off x="677875" y="3256788"/>
+            <a:ext cx="50800" cy="1810512"/>
+          </a:xfrm>
+          <a:prstGeom prst="rect">
+            <a:avLst/>
+          </a:prstGeom>
+          <a:solidFill>
+            <a:srgbClr val="0077FF"/>
+          </a:solidFill>
+          <a:ln>
+            <a:noFill/>
+          </a:ln>
+          <a:effectLst/>
+        </p:spPr>
+        <p:style>
+          <a:lnRef idx="1">
+            <a:schemeClr val="accent1"/>
+          </a:lnRef>
+          <a:fillRef idx="3">
+            <a:schemeClr val="accent1"/>
+          </a:fillRef>
+          <a:effectRef idx="2">
+            <a:schemeClr val="accent1"/>
+          </a:effectRef>
+          <a:fontRef idx="minor">
+            <a:schemeClr val="lt1"/>
+          </a:fontRef>
+        </p:style>
+        <p:txBody>
+          <a:bodyPr rtlCol="0" anchor="ctr"/>
+          <a:lstStyle/>
+          <a:p>
+            <a:pPr algn="ctr"/>
+          </a:p>
+        </p:txBody>
+      </p:sp>
+      <p:sp>
+        <p:nvSpPr>
+          <p:cNvPr id="5" name="stat_0"/>
+          <p:cNvSpPr txBox="1"/>
+          <p:nvPr/>
+        </p:nvSpPr>
+        <p:spPr>
+          <a:xfrm>
+            <a:off x="855675" y="3147060"/>
+            <a:ext cx="5032787" cy="1920239"/>
+          </a:xfrm>
+          <a:prstGeom prst="rect">
+            <a:avLst/>
+          </a:prstGeom>
+          <a:noFill/>
+        </p:spPr>
+        <p:txBody>
+          <a:bodyPr wrap="square" lIns="76200" rIns="76200" tIns="0" bIns="0">
+            <a:spAutoFit/>
+          </a:bodyPr>
+          <a:lstStyle/>
+          <a:p>
+            <a:pPr>
+              <a:lnSpc>
+                <a:spcPct val="100000"/>
+              </a:lnSpc>
+              <a:spcAft>
+                <a:spcPts val="200"/>
+              </a:spcAft>
+              <a:defRPr sz="4800" b="1">
+                <a:solidFill>
+                  <a:srgbClr val="0077FF"/>
+                </a:solidFill>
+                <a:latin typeface="Play"/>
+                <a:ea typeface="Play"/>
+                <a:cs typeface="Play"/>
+              </a:defRPr>
+            </a:pPr>
+            <a:r>
+              <a:rPr sz="4800" b="1">
+                <a:solidFill>
+                  <a:srgbClr val="0077FF"/>
+                </a:solidFill>
+                <a:latin typeface="Play"/>
+                <a:ea typeface="Play"/>
+                <a:cs typeface="Play"/>
+              </a:rPr>
+              <a:t>2 vCPU</a:t>
+            </a:r>
+          </a:p>
+          <a:p>
+            <a:pPr>
+              <a:spcAft>
+                <a:spcPts val="300"/>
+              </a:spcAft>
+              <a:defRPr sz="3200" b="0">
+                <a:solidFill>
+                  <a:srgbClr val="000000"/>
+                </a:solidFill>
+                <a:latin typeface="Play"/>
+                <a:ea typeface="Play"/>
+                <a:cs typeface="Play"/>
+              </a:defRPr>
+            </a:pPr>
+            <a:r>
+              <a:rPr sz="3200" b="0">
+                <a:solidFill>
+                  <a:srgbClr val="000000"/>
+                </a:solidFill>
+                <a:latin typeface="Play"/>
+                <a:ea typeface="Play"/>
+                <a:cs typeface="Play"/>
+              </a:rPr>
+              <a:t>Сервис использует 2 vCPU / 2 GB RAM</a:t>
+            </a:r>
+          </a:p>
+        </p:txBody>
+      </p:sp>
+      <p:sp>
+        <p:nvSpPr>
+          <p:cNvPr id="6" name="stat_1:bar"/>
+          <p:cNvSpPr/>
+          <p:nvPr/>
+        </p:nvSpPr>
+        <p:spPr>
+          <a:xfrm>
+            <a:off x="6322678" y="3256788"/>
+            <a:ext cx="50800" cy="1810512"/>
+          </a:xfrm>
+          <a:prstGeom prst="rect">
+            <a:avLst/>
+          </a:prstGeom>
+          <a:solidFill>
+            <a:srgbClr val="0077FF"/>
+          </a:solidFill>
+          <a:ln>
+            <a:noFill/>
+          </a:ln>
+          <a:effectLst/>
+        </p:spPr>
+        <p:style>
+          <a:lnRef idx="1">
+            <a:schemeClr val="accent1"/>
+          </a:lnRef>
+          <a:fillRef idx="3">
+            <a:schemeClr val="accent1"/>
+          </a:fillRef>
+          <a:effectRef idx="2">
+            <a:schemeClr val="accent1"/>
+          </a:effectRef>
+          <a:fontRef idx="minor">
+            <a:schemeClr val="lt1"/>
+          </a:fontRef>
+        </p:style>
+        <p:txBody>
+          <a:bodyPr rtlCol="0" anchor="ctr"/>
+          <a:lstStyle/>
+          <a:p>
+            <a:pPr algn="ctr"/>
+          </a:p>
+        </p:txBody>
+      </p:sp>
+      <p:sp>
+        <p:nvSpPr>
+          <p:cNvPr id="7" name="stat_1"/>
+          <p:cNvSpPr txBox="1"/>
+          <p:nvPr/>
+        </p:nvSpPr>
+        <p:spPr>
+          <a:xfrm>
+            <a:off x="6500478" y="3147060"/>
+            <a:ext cx="5032787" cy="1920239"/>
+          </a:xfrm>
+          <a:prstGeom prst="rect">
+            <a:avLst/>
+          </a:prstGeom>
+          <a:noFill/>
+        </p:spPr>
+        <p:txBody>
+          <a:bodyPr wrap="square" lIns="76200" rIns="76200" tIns="0" bIns="0">
+            <a:spAutoFit/>
+          </a:bodyPr>
+          <a:lstStyle/>
+          <a:p>
+            <a:pPr>
+              <a:lnSpc>
+                <a:spcPct val="100000"/>
+              </a:lnSpc>
+              <a:spcAft>
+                <a:spcPts val="200"/>
+              </a:spcAft>
+              <a:defRPr sz="4800" b="1">
+                <a:solidFill>
+                  <a:srgbClr val="0077FF"/>
+                </a:solidFill>
+                <a:latin typeface="Play"/>
+                <a:ea typeface="Play"/>
+                <a:cs typeface="Play"/>
+              </a:defRPr>
+            </a:pPr>
+            <a:r>
+              <a:rPr sz="4800" b="1">
+                <a:solidFill>
+                  <a:srgbClr val="0077FF"/>
+                </a:solidFill>
+                <a:latin typeface="Play"/>
+                <a:ea typeface="Play"/>
+                <a:cs typeface="Play"/>
+              </a:rPr>
+              <a:t>6 нед.</a:t>
+            </a:r>
+          </a:p>
+          <a:p>
+            <a:pPr>
+              <a:spcAft>
+                <a:spcPts val="300"/>
+              </a:spcAft>
+              <a:defRPr sz="3200" b="0">
+                <a:solidFill>
+                  <a:srgbClr val="000000"/>
+                </a:solidFill>
+                <a:latin typeface="Play"/>
+                <a:ea typeface="Play"/>
+                <a:cs typeface="Play"/>
+              </a:defRPr>
+            </a:pPr>
+            <a:r>
+              <a:rPr sz="3200" b="0">
+                <a:solidFill>
+                  <a:srgbClr val="000000"/>
+                </a:solidFill>
+                <a:latin typeface="Play"/>
+                <a:ea typeface="Play"/>
+                <a:cs typeface="Play"/>
+              </a:rPr>
+              <a:t>Инференс за 6 недель пилота 1 400 руб</a:t>
+            </a:r>
+          </a:p>
+        </p:txBody>
+      </p:sp>
+    </p:spTree>
+  </p:cSld>
+  <p:clrMapOvr>
+    <a:masterClrMapping/>
+  </p:clrMapOvr>
+</p:sld>
+</file>
+
+<file path=ppt/slides/slide64.xml><?xml version="1.0" encoding="utf-8"?>
+<p:sld xmlns:a="http://schemas.openxmlformats.org/drawingml/2006/main" xmlns:p="http://schemas.openxmlformats.org/presentationml/2006/main" xmlns:r="http://schemas.openxmlformats.org/officeDocument/2006/relationships">
+  <p:cSld>
+    <p:spTree>
+      <p:nvGrpSpPr>
+        <p:cNvPr id="1" name=""/>
+        <p:cNvGrpSpPr/>
+        <p:nvPr/>
+      </p:nvGrpSpPr>
+      <p:grpSpPr/>
+      <p:sp>
+        <p:nvSpPr>
+          <p:cNvPr id="443" name="Google Shape;443;p50"/>
+          <p:cNvSpPr/>
+          <p:nvPr/>
+        </p:nvSpPr>
+        <p:spPr>
+          <a:xfrm>
+            <a:off x="658813" y="1794065"/>
+            <a:ext cx="6130294" cy="4406709"/>
+          </a:xfrm>
+          <a:prstGeom prst="roundRect">
+            <a:avLst>
+              <a:gd fmla="val 4444" name="adj"/>
+            </a:avLst>
+          </a:prstGeom>
+          <a:solidFill>
+            <a:schemeClr val="lt2"/>
+          </a:solidFill>
+          <a:ln cap="flat" cmpd="sng" w="19050">
+            <a:solidFill>
+              <a:schemeClr val="dk2"/>
+            </a:solidFill>
+            <a:prstDash val="solid"/>
+            <a:miter lim="8000"/>
+            <a:headEnd len="sm" w="sm" type="none"/>
+            <a:tailEnd len="sm" w="sm" type="none"/>
+          </a:ln>
+        </p:spPr>
+        <p:txBody>
+          <a:bodyPr anchorCtr="0" anchor="ctr" bIns="45700" lIns="91425" spcFirstLastPara="1" rIns="91425" wrap="square" tIns="45700">
+            <a:noAutofit/>
+          </a:bodyPr>
+          <a:lstStyle/>
+          <a:p>
+            <a:pPr indent="0" lvl="0" marL="0" marR="0" rtl="0" algn="ctr">
+              <a:spcBef>
+                <a:spcPts val="0"/>
+              </a:spcBef>
+              <a:spcAft>
+                <a:spcPts val="0"/>
+              </a:spcAft>
+              <a:buNone/>
+            </a:pPr>
+            <a:r>
+              <a:t/>
+            </a:r>
+            <a:endParaRPr b="0" i="0" sz="1800" u="none" cap="none" strike="noStrike">
+              <a:solidFill>
+                <a:schemeClr val="lt1"/>
+              </a:solidFill>
+              <a:latin typeface="Arial"/>
+              <a:ea typeface="Arial"/>
+              <a:cs typeface="Arial"/>
+              <a:sym typeface="Arial"/>
+            </a:endParaRPr>
+          </a:p>
+        </p:txBody>
+      </p:sp>
+      <p:sp>
+        <p:nvSpPr>
+          <p:cNvPr id="449" name="Google Shape;449;p50"/>
+          <p:cNvSpPr txBox="1"/>
+          <p:nvPr/>
+        </p:nvSpPr>
+        <p:spPr>
+          <a:xfrm>
+            <a:off x="18692059" y="4674436"/>
+            <a:ext cx="4304330" cy="678198"/>
           </a:xfrm>
           <a:prstGeom prst="rect">
             <a:avLst/>
@@ -9653,7 +13628,428 @@
             <a:noFill/>
           </a:ln>
         </p:spPr>
-      </p:pic>
+        <p:txBody>
+          <a:bodyPr anchorCtr="0" anchor="t" bIns="45700" lIns="91425" spcFirstLastPara="1" rIns="91425" wrap="square" tIns="45700">
+            <a:noAutofit/>
+          </a:bodyPr>
+          <a:lstStyle/>
+          <a:p>
+            <a:pPr indent="0" lvl="0" marL="0" marR="0" rtl="0" algn="l">
+              <a:lnSpc>
+                <a:spcPct val="110000"/>
+              </a:lnSpc>
+              <a:spcBef>
+                <a:spcPts val="0"/>
+              </a:spcBef>
+              <a:spcAft>
+                <a:spcPts val="0"/>
+              </a:spcAft>
+              <a:buClr>
+                <a:schemeClr val="dk1"/>
+              </a:buClr>
+              <a:buSzPts val="1600"/>
+              <a:buFont typeface="Arial"/>
+              <a:buNone/>
+            </a:pPr>
+            <a:r>
+              <a:t/>
+            </a:r>
+            <a:endParaRPr b="0" i="0" sz="1600" u="none" cap="none" strike="noStrike">
+              <a:solidFill>
+                <a:schemeClr val="dk1"/>
+              </a:solidFill>
+              <a:latin typeface="Arial"/>
+              <a:ea typeface="Arial"/>
+              <a:cs typeface="Arial"/>
+              <a:sym typeface="Arial"/>
+            </a:endParaRPr>
+          </a:p>
+        </p:txBody>
+      </p:sp>
+      <p:sp>
+        <p:nvSpPr>
+          <p:cNvPr id="450" name="title"/>
+          <p:cNvSpPr txBox="1"/>
+          <p:nvPr/>
+        </p:nvSpPr>
+        <p:spPr>
+          <a:xfrm>
+            <a:off x="677387" y="692177"/>
+            <a:ext cx="10855878" cy="822960"/>
+          </a:xfrm>
+          <a:prstGeom prst="rect">
+            <a:avLst/>
+          </a:prstGeom>
+          <a:noFill/>
+        </p:spPr>
+        <p:txBody>
+          <a:bodyPr wrap="square" lIns="76200" rIns="76200" tIns="50800" bIns="50800">
+            <a:spAutoFit/>
+          </a:bodyPr>
+          <a:lstStyle/>
+          <a:p>
+            <a:pPr algn="l">
+              <a:spcAft>
+                <a:spcPts val="300"/>
+              </a:spcAft>
+              <a:defRPr sz="4000">
+                <a:solidFill>
+                  <a:srgbClr val="000000"/>
+                </a:solidFill>
+                <a:latin typeface="Arial"/>
+                <a:ea typeface="Arial"/>
+                <a:cs typeface="Arial"/>
+              </a:defRPr>
+            </a:pPr>
+            <a:r>
+              <a:rPr sz="4000">
+                <a:solidFill>
+                  <a:srgbClr val="000000"/>
+                </a:solidFill>
+                <a:latin typeface="Arial"/>
+                <a:ea typeface="Arial"/>
+                <a:cs typeface="Arial"/>
+              </a:rPr>
+              <a:t>План развития</a:t>
+            </a:r>
+          </a:p>
+        </p:txBody>
+      </p:sp>
+      <p:sp>
+        <p:nvSpPr>
+          <p:cNvPr id="451" name="Rectangle 450"/>
+          <p:cNvSpPr/>
+          <p:nvPr/>
+        </p:nvSpPr>
+        <p:spPr>
+          <a:xfrm>
+            <a:off x="677387" y="3815229"/>
+            <a:ext cx="10855878" cy="132531"/>
+          </a:xfrm>
+          <a:prstGeom prst="rect">
+            <a:avLst/>
+          </a:prstGeom>
+          <a:solidFill>
+            <a:srgbClr val="0077FF"/>
+          </a:solidFill>
+          <a:ln>
+            <a:noFill/>
+          </a:ln>
+        </p:spPr>
+        <p:style>
+          <a:lnRef idx="1">
+            <a:schemeClr val="accent1"/>
+          </a:lnRef>
+          <a:fillRef idx="3">
+            <a:schemeClr val="accent1"/>
+          </a:fillRef>
+          <a:effectRef idx="2">
+            <a:schemeClr val="accent1"/>
+          </a:effectRef>
+          <a:fontRef idx="minor">
+            <a:schemeClr val="lt1"/>
+          </a:fontRef>
+        </p:style>
+        <p:txBody>
+          <a:bodyPr rtlCol="0" anchor="ctr"/>
+          <a:lstStyle/>
+          <a:p>
+            <a:pPr algn="ctr"/>
+          </a:p>
+        </p:txBody>
+      </p:sp>
+      <p:sp>
+        <p:nvSpPr>
+          <p:cNvPr id="452" name="Oval 451"/>
+          <p:cNvSpPr/>
+          <p:nvPr/>
+        </p:nvSpPr>
+        <p:spPr>
+          <a:xfrm>
+            <a:off x="2000751" y="3395546"/>
+            <a:ext cx="971897" cy="971897"/>
+          </a:xfrm>
+          <a:prstGeom prst="ellipse">
+            <a:avLst/>
+          </a:prstGeom>
+          <a:solidFill>
+            <a:srgbClr val="0077FF"/>
+          </a:solidFill>
+          <a:ln>
+            <a:noFill/>
+          </a:ln>
+        </p:spPr>
+        <p:style>
+          <a:lnRef idx="1">
+            <a:schemeClr val="accent1"/>
+          </a:lnRef>
+          <a:fillRef idx="3">
+            <a:schemeClr val="accent1"/>
+          </a:fillRef>
+          <a:effectRef idx="2">
+            <a:schemeClr val="accent1"/>
+          </a:effectRef>
+          <a:fontRef idx="minor">
+            <a:schemeClr val="lt1"/>
+          </a:fontRef>
+        </p:style>
+        <p:txBody>
+          <a:bodyPr rtlCol="0" anchor="ctr"/>
+          <a:lstStyle/>
+          <a:p>
+            <a:pPr algn="ctr"/>
+          </a:p>
+        </p:txBody>
+      </p:sp>
+      <p:sp>
+        <p:nvSpPr>
+          <p:cNvPr id="453" name="TextBox 452"/>
+          <p:cNvSpPr txBox="1"/>
+          <p:nvPr/>
+        </p:nvSpPr>
+        <p:spPr>
+          <a:xfrm>
+            <a:off x="677387" y="1783080"/>
+            <a:ext cx="5427939" cy="1678732"/>
+          </a:xfrm>
+          <a:prstGeom prst="rect">
+            <a:avLst/>
+          </a:prstGeom>
+          <a:noFill/>
+        </p:spPr>
+        <p:txBody>
+          <a:bodyPr wrap="square" lIns="12700" rIns="12700" tIns="12700" bIns="12700">
+            <a:spAutoFit/>
+          </a:bodyPr>
+          <a:lstStyle/>
+          <a:p>
+            <a:pPr algn="ctr">
+              <a:defRPr sz="1400" b="0">
+                <a:solidFill>
+                  <a:srgbClr val="000000"/>
+                </a:solidFill>
+                <a:latin typeface="Play"/>
+                <a:ea typeface="Play"/>
+                <a:cs typeface="Play"/>
+              </a:defRPr>
+            </a:pPr>
+            <a:r>
+              <a:rPr sz="1400" b="0">
+                <a:solidFill>
+                  <a:srgbClr val="000000"/>
+                </a:solidFill>
+                <a:latin typeface="Play"/>
+                <a:ea typeface="Play"/>
+                <a:cs typeface="Play"/>
+              </a:rPr>
+              <a:t>Третий квартал 2026</a:t>
+            </a:r>
+          </a:p>
+        </p:txBody>
+      </p:sp>
+      <p:sp>
+        <p:nvSpPr>
+          <p:cNvPr id="454" name="Oval 453"/>
+          <p:cNvSpPr/>
+          <p:nvPr/>
+        </p:nvSpPr>
+        <p:spPr>
+          <a:xfrm>
+            <a:off x="5619377" y="3395546"/>
+            <a:ext cx="971897" cy="971897"/>
+          </a:xfrm>
+          <a:prstGeom prst="ellipse">
+            <a:avLst/>
+          </a:prstGeom>
+          <a:solidFill>
+            <a:srgbClr val="0077FF"/>
+          </a:solidFill>
+          <a:ln>
+            <a:noFill/>
+          </a:ln>
+        </p:spPr>
+        <p:style>
+          <a:lnRef idx="1">
+            <a:schemeClr val="accent1"/>
+          </a:lnRef>
+          <a:fillRef idx="3">
+            <a:schemeClr val="accent1"/>
+          </a:fillRef>
+          <a:effectRef idx="2">
+            <a:schemeClr val="accent1"/>
+          </a:effectRef>
+          <a:fontRef idx="minor">
+            <a:schemeClr val="lt1"/>
+          </a:fontRef>
+        </p:style>
+        <p:txBody>
+          <a:bodyPr rtlCol="0" anchor="ctr"/>
+          <a:lstStyle/>
+          <a:p>
+            <a:pPr algn="ctr"/>
+          </a:p>
+        </p:txBody>
+      </p:sp>
+      <p:sp>
+        <p:nvSpPr>
+          <p:cNvPr id="455" name="TextBox 454"/>
+          <p:cNvSpPr txBox="1"/>
+          <p:nvPr/>
+        </p:nvSpPr>
+        <p:spPr>
+          <a:xfrm>
+            <a:off x="3391356" y="4787127"/>
+            <a:ext cx="5427939" cy="1678732"/>
+          </a:xfrm>
+          <a:prstGeom prst="rect">
+            <a:avLst/>
+          </a:prstGeom>
+          <a:noFill/>
+        </p:spPr>
+        <p:txBody>
+          <a:bodyPr wrap="square" lIns="12700" rIns="12700" tIns="12700" bIns="12700">
+            <a:spAutoFit/>
+          </a:bodyPr>
+          <a:lstStyle/>
+          <a:p>
+            <a:pPr algn="ctr">
+              <a:defRPr sz="1400" b="0">
+                <a:solidFill>
+                  <a:srgbClr val="000000"/>
+                </a:solidFill>
+                <a:latin typeface="Play"/>
+                <a:ea typeface="Play"/>
+                <a:cs typeface="Play"/>
+              </a:defRPr>
+            </a:pPr>
+            <a:r>
+              <a:rPr sz="1400" b="0">
+                <a:solidFill>
+                  <a:srgbClr val="000000"/>
+                </a:solidFill>
+                <a:latin typeface="Play"/>
+                <a:ea typeface="Play"/>
+                <a:cs typeface="Play"/>
+              </a:rPr>
+              <a:t>Четвёртый квартал 2026</a:t>
+            </a:r>
+          </a:p>
+        </p:txBody>
+      </p:sp>
+      <p:sp>
+        <p:nvSpPr>
+          <p:cNvPr id="456" name="Oval 455"/>
+          <p:cNvSpPr/>
+          <p:nvPr/>
+        </p:nvSpPr>
+        <p:spPr>
+          <a:xfrm>
+            <a:off x="9238003" y="3395546"/>
+            <a:ext cx="971897" cy="971897"/>
+          </a:xfrm>
+          <a:prstGeom prst="ellipse">
+            <a:avLst/>
+          </a:prstGeom>
+          <a:solidFill>
+            <a:srgbClr val="0077FF"/>
+          </a:solidFill>
+          <a:ln>
+            <a:noFill/>
+          </a:ln>
+        </p:spPr>
+        <p:style>
+          <a:lnRef idx="1">
+            <a:schemeClr val="accent1"/>
+          </a:lnRef>
+          <a:fillRef idx="3">
+            <a:schemeClr val="accent1"/>
+          </a:fillRef>
+          <a:effectRef idx="2">
+            <a:schemeClr val="accent1"/>
+          </a:effectRef>
+          <a:fontRef idx="minor">
+            <a:schemeClr val="lt1"/>
+          </a:fontRef>
+        </p:style>
+        <p:txBody>
+          <a:bodyPr rtlCol="0" anchor="ctr"/>
+          <a:lstStyle/>
+          <a:p>
+            <a:pPr algn="ctr"/>
+          </a:p>
+        </p:txBody>
+      </p:sp>
+      <p:sp>
+        <p:nvSpPr>
+          <p:cNvPr id="457" name="TextBox 456"/>
+          <p:cNvSpPr txBox="1"/>
+          <p:nvPr/>
+        </p:nvSpPr>
+        <p:spPr>
+          <a:xfrm>
+            <a:off x="6105326" y="1783080"/>
+            <a:ext cx="5427939" cy="1678732"/>
+          </a:xfrm>
+          <a:prstGeom prst="rect">
+            <a:avLst/>
+          </a:prstGeom>
+          <a:noFill/>
+        </p:spPr>
+        <p:txBody>
+          <a:bodyPr wrap="square" lIns="12700" rIns="12700" tIns="12700" bIns="12700">
+            <a:spAutoFit/>
+          </a:bodyPr>
+          <a:lstStyle/>
+          <a:p>
+            <a:pPr algn="ctr">
+              <a:defRPr sz="1400" b="0">
+                <a:solidFill>
+                  <a:srgbClr val="000000"/>
+                </a:solidFill>
+                <a:latin typeface="Play"/>
+                <a:ea typeface="Play"/>
+                <a:cs typeface="Play"/>
+              </a:defRPr>
+            </a:pPr>
+            <a:r>
+              <a:rPr sz="1400" b="0">
+                <a:solidFill>
+                  <a:srgbClr val="000000"/>
+                </a:solidFill>
+                <a:latin typeface="Play"/>
+                <a:ea typeface="Play"/>
+                <a:cs typeface="Play"/>
+              </a:rPr>
+              <a:t>Первый квартал 2027</a:t>
+            </a:r>
+          </a:p>
+        </p:txBody>
+      </p:sp>
+    </p:spTree>
+  </p:cSld>
+  <p:clrMapOvr>
+    <a:masterClrMapping/>
+  </p:clrMapOvr>
+</p:sld>
+</file>
+
+<file path=ppt/slides/slide65.xml><?xml version="1.0" encoding="utf-8"?>
+<p:sld xmlns:a="http://schemas.openxmlformats.org/drawingml/2006/main" xmlns:p="http://schemas.openxmlformats.org/presentationml/2006/main" xmlns:r="http://schemas.openxmlformats.org/officeDocument/2006/relationships">
+  <p:cSld>
+    <p:bg>
+      <p:bgPr>
+        <a:solidFill>
+          <a:schemeClr val="lt2"/>
+        </a:solidFill>
+      </p:bgPr>
+    </p:bg>
+    <p:spTree>
+      <p:nvGrpSpPr>
+        <p:cNvPr id="1" name=""/>
+        <p:cNvGrpSpPr/>
+        <p:nvPr/>
+      </p:nvGrpSpPr>
+      <p:grpSpPr/>
       <p:sp>
         <p:nvSpPr>
           <p:cNvPr id="764" name="Google Shape;764;p58"/>
@@ -9713,166 +14109,7 @@
       </p:sp>
       <p:sp>
         <p:nvSpPr>
-          <p:cNvPr id="768" name="Google Shape;768;p58"/>
-          <p:cNvSpPr/>
-          <p:nvPr/>
-        </p:nvSpPr>
-        <p:spPr>
-          <a:xfrm>
-            <a:off x="671513" y="2562300"/>
-            <a:ext cx="866700" cy="866700"/>
-          </a:xfrm>
-          <a:prstGeom prst="ellipse">
-            <a:avLst/>
-          </a:prstGeom>
-          <a:solidFill>
-            <a:schemeClr val="accent1"/>
-          </a:solidFill>
-          <a:ln>
-            <a:noFill/>
-          </a:ln>
-        </p:spPr>
-        <p:txBody>
-          <a:bodyPr anchorCtr="0" anchor="ctr" bIns="45700" lIns="91425" spcFirstLastPara="1" rIns="91425" wrap="square" tIns="45700">
-            <a:noAutofit/>
-          </a:bodyPr>
-          <a:lstStyle/>
-          <a:p>
-            <a:pPr indent="0" lvl="0" marL="0" marR="0" rtl="0" algn="ctr">
-              <a:spcBef>
-                <a:spcPts val="0"/>
-              </a:spcBef>
-              <a:spcAft>
-                <a:spcPts val="0"/>
-              </a:spcAft>
-              <a:buNone/>
-            </a:pPr>
-            <a:r>
-              <a:t/>
-            </a:r>
-            <a:endParaRPr sz="3200">
-              <a:solidFill>
-                <a:schemeClr val="lt1"/>
-              </a:solidFill>
-              <a:latin typeface="Play"/>
-              <a:ea typeface="Play"/>
-              <a:cs typeface="Play"/>
-              <a:sym typeface="Play"/>
-            </a:endParaRPr>
-          </a:p>
-        </p:txBody>
-      </p:sp>
-      <p:pic>
-        <p:nvPicPr>
-          <p:cNvPr id="769" name="Google Shape;769;p58"/>
-          <p:cNvPicPr preferRelativeResize="0"/>
-          <p:nvPr/>
-        </p:nvPicPr>
-        <p:blipFill rotWithShape="1">
-          <a:blip r:embed="rId3">
-            <a:alphaModFix/>
-          </a:blip>
-          <a:srcRect b="0" l="0" r="0" t="0"/>
-          <a:stretch/>
-        </p:blipFill>
-        <p:spPr>
-          <a:xfrm>
-            <a:off x="879438" y="2770225"/>
-            <a:ext cx="450850" cy="450850"/>
-          </a:xfrm>
-          <a:prstGeom prst="rect">
-            <a:avLst/>
-          </a:prstGeom>
-          <a:noFill/>
-          <a:ln>
-            <a:noFill/>
-          </a:ln>
-        </p:spPr>
-      </p:pic>
-      <p:pic>
-        <p:nvPicPr>
-          <p:cNvPr id="770" name="Google Shape;770;p58"/>
-          <p:cNvPicPr preferRelativeResize="0"/>
-          <p:nvPr/>
-        </p:nvPicPr>
-        <p:blipFill rotWithShape="1">
-          <a:blip r:embed="rId4">
-            <a:alphaModFix/>
-          </a:blip>
-          <a:srcRect b="0" l="0" r="0" t="0"/>
-          <a:stretch/>
-        </p:blipFill>
-        <p:spPr>
-          <a:xfrm>
-            <a:off x="8307349" y="2772418"/>
-            <a:ext cx="450851" cy="450851"/>
-          </a:xfrm>
-          <a:prstGeom prst="rect">
-            <a:avLst/>
-          </a:prstGeom>
-          <a:noFill/>
-          <a:ln>
-            <a:noFill/>
-          </a:ln>
-        </p:spPr>
-      </p:pic>
-      <p:pic>
-        <p:nvPicPr>
-          <p:cNvPr id="771" name="Google Shape;771;p58"/>
-          <p:cNvPicPr preferRelativeResize="0"/>
-          <p:nvPr/>
-        </p:nvPicPr>
-        <p:blipFill rotWithShape="1">
-          <a:blip r:embed="rId5">
-            <a:alphaModFix/>
-          </a:blip>
-          <a:srcRect b="0" l="0" r="0" t="0"/>
-          <a:stretch/>
-        </p:blipFill>
-        <p:spPr>
-          <a:xfrm>
-            <a:off x="4385469" y="2562300"/>
-            <a:ext cx="866700" cy="866700"/>
-          </a:xfrm>
-          <a:prstGeom prst="rect">
-            <a:avLst/>
-          </a:prstGeom>
-          <a:noFill/>
-          <a:ln>
-            <a:noFill/>
-          </a:ln>
-        </p:spPr>
-      </p:pic>
-      <p:pic>
-        <p:nvPicPr>
-          <p:cNvPr id="772" name="Google Shape;772;p58"/>
-          <p:cNvPicPr preferRelativeResize="0"/>
-          <p:nvPr/>
-        </p:nvPicPr>
-        <p:blipFill rotWithShape="1">
-          <a:blip r:embed="rId6">
-            <a:alphaModFix/>
-          </a:blip>
-          <a:srcRect b="0" l="0" r="0" t="0"/>
-          <a:stretch/>
-        </p:blipFill>
-        <p:spPr>
-          <a:xfrm>
-            <a:off x="4593394" y="2770225"/>
-            <a:ext cx="450850" cy="450850"/>
-          </a:xfrm>
-          <a:prstGeom prst="rect">
-            <a:avLst/>
-          </a:prstGeom>
-          <a:noFill/>
-          <a:ln>
-            <a:noFill/>
-          </a:ln>
-        </p:spPr>
-      </p:pic>
-      <p:sp>
-        <p:nvSpPr>
-          <p:cNvPr id="773" name="title"/>
+          <p:cNvPr id="765" name="title"/>
           <p:cNvSpPr txBox="1"/>
           <p:nvPr/>
         </p:nvSpPr>
@@ -9914,21 +14151,108 @@
                 <a:ea typeface="Arial"/>
                 <a:cs typeface="Arial"/>
               </a:rPr>
-              <a:t>Что мы просим решить</a:t>
+              <a:t>Преимущества для компании</a:t>
             </a:r>
           </a:p>
         </p:txBody>
       </p:sp>
+      <p:grpSp>
+        <p:nvGrpSpPr>
+          <p:cNvPr id="2" name="icon:builtin-zap"/>
+          <p:cNvGrpSpPr/>
+          <p:nvPr/>
+        </p:nvGrpSpPr>
+        <p:grpSpPr>
+          <a:xfrm>
+            <a:off x="774542" y="1831657"/>
+            <a:ext cx="388620" cy="485775"/>
+            <a:chOff x="774542" y="1831657"/>
+            <a:chExt cx="388620" cy="485775"/>
+          </a:xfrm>
+        </p:grpSpPr>
+        <p:sp>
+          <p:nvSpPr>
+            <p:cNvPr id="3" name="Freeform 2"/>
+            <p:cNvSpPr/>
+            <p:nvPr/>
+          </p:nvSpPr>
+          <p:spPr>
+            <a:xfrm>
+              <a:off x="774542" y="1831657"/>
+              <a:ext cx="388620" cy="485775"/>
+            </a:xfrm>
+            <a:custGeom>
+              <a:avLst/>
+              <a:gdLst/>
+              <a:ahLst/>
+              <a:cxnLst/>
+              <a:rect l="l" t="t" r="r" b="b"/>
+              <a:pathLst>
+                <a:path w="388620" h="485775">
+                  <a:moveTo>
+                    <a:pt x="218598" y="0"/>
+                  </a:moveTo>
+                  <a:lnTo>
+                    <a:pt x="0" y="291465"/>
+                  </a:lnTo>
+                  <a:lnTo>
+                    <a:pt x="170021" y="291465"/>
+                  </a:lnTo>
+                  <a:lnTo>
+                    <a:pt x="145732" y="485775"/>
+                  </a:lnTo>
+                  <a:lnTo>
+                    <a:pt x="388620" y="170021"/>
+                  </a:lnTo>
+                  <a:lnTo>
+                    <a:pt x="218598" y="170021"/>
+                  </a:lnTo>
+                  <a:close/>
+                </a:path>
+              </a:pathLst>
+            </a:custGeom>
+            <a:noFill/>
+            <a:ln w="48577" cap="rnd">
+              <a:solidFill>
+                <a:srgbClr val="0077FF"/>
+              </a:solidFill>
+              <a:round/>
+            </a:ln>
+            <a:effectLst/>
+          </p:spPr>
+          <p:style>
+            <a:lnRef idx="1">
+              <a:schemeClr val="accent1"/>
+            </a:lnRef>
+            <a:fillRef idx="3">
+              <a:schemeClr val="accent1"/>
+            </a:fillRef>
+            <a:effectRef idx="2">
+              <a:schemeClr val="accent1"/>
+            </a:effectRef>
+            <a:fontRef idx="minor">
+              <a:schemeClr val="lt1"/>
+            </a:fontRef>
+          </p:style>
+          <p:txBody>
+            <a:bodyPr rtlCol="0" anchor="ctr"/>
+            <a:lstStyle/>
+            <a:p>
+              <a:pPr algn="ctr"/>
+            </a:p>
+          </p:txBody>
+        </p:sp>
+      </p:grpSp>
       <p:sp>
         <p:nvSpPr>
-          <p:cNvPr id="774" name="card_0"/>
+          <p:cNvPr id="766" name="item_0"/>
           <p:cNvSpPr txBox="1"/>
           <p:nvPr/>
         </p:nvSpPr>
         <p:spPr>
           <a:xfrm>
-            <a:off x="806889" y="3928712"/>
-            <a:ext cx="2583926" cy="937548"/>
+            <a:off x="1522636" y="1792605"/>
+            <a:ext cx="10010630" cy="957744"/>
           </a:xfrm>
           <a:prstGeom prst="rect">
             <a:avLst/>
@@ -9945,7 +14269,7 @@
               <a:spcAft>
                 <a:spcPts val="300"/>
               </a:spcAft>
-              <a:defRPr sz="1600" b="0">
+              <a:defRPr sz="2800">
                 <a:solidFill>
                   <a:srgbClr val="000000"/>
                 </a:solidFill>
@@ -9955,7 +14279,7 @@
               </a:defRPr>
             </a:pPr>
             <a:r>
-              <a:rPr sz="1600" b="0">
+              <a:rPr sz="2800">
                 <a:solidFill>
                   <a:srgbClr val="000000"/>
                 </a:solidFill>
@@ -9963,21 +14287,163 @@
                 <a:ea typeface="Play"/>
                 <a:cs typeface="Play"/>
               </a:rPr>
-              <a:t>Запуск сервиса на всю компанию в четвертом квартале 2026</a:t>
+              <a:t>Ускорение создания презентаций до 4 мин</a:t>
             </a:r>
           </a:p>
         </p:txBody>
       </p:sp>
+      <p:grpSp>
+        <p:nvGrpSpPr>
+          <p:cNvPr id="4" name="icon:builtin-decline"/>
+          <p:cNvGrpSpPr/>
+          <p:nvPr/>
+        </p:nvGrpSpPr>
+        <p:grpSpPr>
+          <a:xfrm>
+            <a:off x="750253" y="3057530"/>
+            <a:ext cx="437197" cy="242887"/>
+            <a:chOff x="750253" y="3057530"/>
+            <a:chExt cx="437197" cy="242887"/>
+          </a:xfrm>
+        </p:grpSpPr>
+        <p:sp>
+          <p:nvSpPr>
+            <p:cNvPr id="5" name="Freeform 4"/>
+            <p:cNvSpPr/>
+            <p:nvPr/>
+          </p:nvSpPr>
+          <p:spPr>
+            <a:xfrm>
+              <a:off x="750253" y="3057530"/>
+              <a:ext cx="437197" cy="242887"/>
+            </a:xfrm>
+            <a:custGeom>
+              <a:avLst/>
+              <a:gdLst/>
+              <a:ahLst/>
+              <a:cxnLst/>
+              <a:rect l="l" t="t" r="r" b="b"/>
+              <a:pathLst>
+                <a:path w="437197" h="242887">
+                  <a:moveTo>
+                    <a:pt x="0" y="0"/>
+                  </a:moveTo>
+                  <a:lnTo>
+                    <a:pt x="145732" y="145732"/>
+                  </a:lnTo>
+                  <a:lnTo>
+                    <a:pt x="242887" y="48577"/>
+                  </a:lnTo>
+                  <a:lnTo>
+                    <a:pt x="437197" y="242887"/>
+                  </a:lnTo>
+                </a:path>
+              </a:pathLst>
+            </a:custGeom>
+            <a:noFill/>
+            <a:ln w="48577" cap="rnd">
+              <a:solidFill>
+                <a:srgbClr val="0077FF"/>
+              </a:solidFill>
+              <a:round/>
+            </a:ln>
+            <a:effectLst/>
+          </p:spPr>
+          <p:style>
+            <a:lnRef idx="1">
+              <a:schemeClr val="accent1"/>
+            </a:lnRef>
+            <a:fillRef idx="3">
+              <a:schemeClr val="accent1"/>
+            </a:fillRef>
+            <a:effectRef idx="2">
+              <a:schemeClr val="accent1"/>
+            </a:effectRef>
+            <a:fontRef idx="minor">
+              <a:schemeClr val="lt1"/>
+            </a:fontRef>
+          </p:style>
+          <p:txBody>
+            <a:bodyPr rtlCol="0" anchor="ctr"/>
+            <a:lstStyle/>
+            <a:p>
+              <a:pPr algn="ctr"/>
+            </a:p>
+          </p:txBody>
+        </p:sp>
+        <p:sp>
+          <p:nvSpPr>
+            <p:cNvPr id="6" name="Freeform 5"/>
+            <p:cNvSpPr/>
+            <p:nvPr/>
+          </p:nvSpPr>
+          <p:spPr>
+            <a:xfrm>
+              <a:off x="1041718" y="3154685"/>
+              <a:ext cx="145732" cy="145732"/>
+            </a:xfrm>
+            <a:custGeom>
+              <a:avLst/>
+              <a:gdLst/>
+              <a:ahLst/>
+              <a:cxnLst/>
+              <a:rect l="l" t="t" r="r" b="b"/>
+              <a:pathLst>
+                <a:path w="145732" h="145732">
+                  <a:moveTo>
+                    <a:pt x="145732" y="0"/>
+                  </a:moveTo>
+                  <a:lnTo>
+                    <a:pt x="145732" y="145732"/>
+                  </a:lnTo>
+                  <a:lnTo>
+                    <a:pt x="0" y="145732"/>
+                  </a:lnTo>
+                </a:path>
+              </a:pathLst>
+            </a:custGeom>
+            <a:noFill/>
+            <a:ln w="48577" cap="rnd">
+              <a:solidFill>
+                <a:srgbClr val="0077FF"/>
+              </a:solidFill>
+              <a:round/>
+            </a:ln>
+            <a:effectLst/>
+          </p:spPr>
+          <p:style>
+            <a:lnRef idx="1">
+              <a:schemeClr val="accent1"/>
+            </a:lnRef>
+            <a:fillRef idx="3">
+              <a:schemeClr val="accent1"/>
+            </a:fillRef>
+            <a:effectRef idx="2">
+              <a:schemeClr val="accent1"/>
+            </a:effectRef>
+            <a:fontRef idx="minor">
+              <a:schemeClr val="lt1"/>
+            </a:fontRef>
+          </p:style>
+          <p:txBody>
+            <a:bodyPr rtlCol="0" anchor="ctr"/>
+            <a:lstStyle/>
+            <a:p>
+              <a:pPr algn="ctr"/>
+            </a:p>
+          </p:txBody>
+        </p:sp>
+      </p:grpSp>
       <p:sp>
         <p:nvSpPr>
-          <p:cNvPr id="775" name="card_1"/>
+          <p:cNvPr id="767" name="item_1"/>
           <p:cNvSpPr txBox="1"/>
           <p:nvPr/>
         </p:nvSpPr>
         <p:spPr>
           <a:xfrm>
-            <a:off x="4533496" y="3922334"/>
-            <a:ext cx="2583926" cy="937548"/>
+            <a:off x="1522636" y="2897034"/>
+            <a:ext cx="10010630" cy="957744"/>
           </a:xfrm>
           <a:prstGeom prst="rect">
             <a:avLst/>
@@ -9994,7 +14460,7 @@
               <a:spcAft>
                 <a:spcPts val="300"/>
               </a:spcAft>
-              <a:defRPr sz="1600" b="0">
+              <a:defRPr sz="2800">
                 <a:solidFill>
                   <a:srgbClr val="000000"/>
                 </a:solidFill>
@@ -10004,7 +14470,7 @@
               </a:defRPr>
             </a:pPr>
             <a:r>
-              <a:rPr sz="1600" b="0">
+              <a:rPr sz="2800">
                 <a:solidFill>
                   <a:srgbClr val="000000"/>
                 </a:solidFill>
@@ -10012,21 +14478,253 @@
                 <a:ea typeface="Play"/>
                 <a:cs typeface="Play"/>
               </a:rPr>
-              <a:t>Интеграция с хранилищем документов в четвертом квартале 2026</a:t>
+              <a:t>Снижение ошибок стиля до 2 из 68 колод</a:t>
             </a:r>
           </a:p>
         </p:txBody>
       </p:sp>
+      <p:grpSp>
+        <p:nvGrpSpPr>
+          <p:cNvPr id="7" name="icon:builtin-money"/>
+          <p:cNvGrpSpPr/>
+          <p:nvPr/>
+        </p:nvGrpSpPr>
+        <p:grpSpPr>
+          <a:xfrm>
+            <a:off x="750253" y="4064804"/>
+            <a:ext cx="437197" cy="437197"/>
+            <a:chOff x="750253" y="4064804"/>
+            <a:chExt cx="437197" cy="437197"/>
+          </a:xfrm>
+        </p:grpSpPr>
+        <p:sp>
+          <p:nvSpPr>
+            <p:cNvPr id="768" name="Oval 767"/>
+            <p:cNvSpPr/>
+            <p:nvPr/>
+          </p:nvSpPr>
+          <p:spPr>
+            <a:xfrm>
+              <a:off x="750253" y="4064804"/>
+              <a:ext cx="437197" cy="437197"/>
+            </a:xfrm>
+            <a:prstGeom prst="ellipse">
+              <a:avLst/>
+            </a:prstGeom>
+            <a:noFill/>
+            <a:ln w="48577" cap="rnd">
+              <a:solidFill>
+                <a:srgbClr val="0077FF"/>
+              </a:solidFill>
+              <a:round/>
+            </a:ln>
+            <a:effectLst/>
+          </p:spPr>
+          <p:style>
+            <a:lnRef idx="1">
+              <a:schemeClr val="accent1"/>
+            </a:lnRef>
+            <a:fillRef idx="3">
+              <a:schemeClr val="accent1"/>
+            </a:fillRef>
+            <a:effectRef idx="2">
+              <a:schemeClr val="accent1"/>
+            </a:effectRef>
+            <a:fontRef idx="minor">
+              <a:schemeClr val="lt1"/>
+            </a:fontRef>
+          </p:style>
+          <p:txBody>
+            <a:bodyPr rtlCol="0" anchor="ctr"/>
+            <a:lstStyle/>
+            <a:p>
+              <a:pPr algn="ctr"/>
+            </a:p>
+          </p:txBody>
+        </p:sp>
+        <p:sp>
+          <p:nvSpPr>
+            <p:cNvPr id="8" name="Freeform 7"/>
+            <p:cNvSpPr/>
+            <p:nvPr/>
+          </p:nvSpPr>
+          <p:spPr>
+            <a:xfrm>
+              <a:off x="871697" y="4161959"/>
+              <a:ext cx="194310" cy="242887"/>
+            </a:xfrm>
+            <a:custGeom>
+              <a:avLst/>
+              <a:gdLst/>
+              <a:ahLst/>
+              <a:cxnLst/>
+              <a:rect l="l" t="t" r="r" b="b"/>
+              <a:pathLst>
+                <a:path w="194310" h="242887">
+                  <a:moveTo>
+                    <a:pt x="48577" y="242887"/>
+                  </a:moveTo>
+                  <a:lnTo>
+                    <a:pt x="48577" y="0"/>
+                  </a:lnTo>
+                  <a:lnTo>
+                    <a:pt x="133588" y="0"/>
+                  </a:lnTo>
+                  <a:lnTo>
+                    <a:pt x="145441" y="1166"/>
+                  </a:lnTo>
+                  <a:lnTo>
+                    <a:pt x="156832" y="4615"/>
+                  </a:lnTo>
+                  <a:lnTo>
+                    <a:pt x="167325" y="10225"/>
+                  </a:lnTo>
+                  <a:lnTo>
+                    <a:pt x="176530" y="17779"/>
+                  </a:lnTo>
+                  <a:lnTo>
+                    <a:pt x="184084" y="26985"/>
+                  </a:lnTo>
+                  <a:lnTo>
+                    <a:pt x="189695" y="37477"/>
+                  </a:lnTo>
+                  <a:lnTo>
+                    <a:pt x="193144" y="48869"/>
+                  </a:lnTo>
+                  <a:lnTo>
+                    <a:pt x="194310" y="60722"/>
+                  </a:lnTo>
+                  <a:lnTo>
+                    <a:pt x="193144" y="72575"/>
+                  </a:lnTo>
+                  <a:lnTo>
+                    <a:pt x="189695" y="83966"/>
+                  </a:lnTo>
+                  <a:lnTo>
+                    <a:pt x="184084" y="94459"/>
+                  </a:lnTo>
+                  <a:lnTo>
+                    <a:pt x="176530" y="103664"/>
+                  </a:lnTo>
+                  <a:lnTo>
+                    <a:pt x="167325" y="111218"/>
+                  </a:lnTo>
+                  <a:lnTo>
+                    <a:pt x="156832" y="116829"/>
+                  </a:lnTo>
+                  <a:lnTo>
+                    <a:pt x="145441" y="120278"/>
+                  </a:lnTo>
+                  <a:lnTo>
+                    <a:pt x="133588" y="121444"/>
+                  </a:lnTo>
+                  <a:lnTo>
+                    <a:pt x="0" y="121444"/>
+                  </a:lnTo>
+                </a:path>
+              </a:pathLst>
+            </a:custGeom>
+            <a:noFill/>
+            <a:ln w="48577" cap="rnd">
+              <a:solidFill>
+                <a:srgbClr val="0077FF"/>
+              </a:solidFill>
+              <a:round/>
+            </a:ln>
+            <a:effectLst/>
+          </p:spPr>
+          <p:style>
+            <a:lnRef idx="1">
+              <a:schemeClr val="accent1"/>
+            </a:lnRef>
+            <a:fillRef idx="3">
+              <a:schemeClr val="accent1"/>
+            </a:fillRef>
+            <a:effectRef idx="2">
+              <a:schemeClr val="accent1"/>
+            </a:effectRef>
+            <a:fontRef idx="minor">
+              <a:schemeClr val="lt1"/>
+            </a:fontRef>
+          </p:style>
+          <p:txBody>
+            <a:bodyPr rtlCol="0" anchor="ctr"/>
+            <a:lstStyle/>
+            <a:p>
+              <a:pPr algn="ctr"/>
+            </a:p>
+          </p:txBody>
+        </p:sp>
+        <p:sp>
+          <p:nvSpPr>
+            <p:cNvPr id="9" name="Freeform 8"/>
+            <p:cNvSpPr/>
+            <p:nvPr/>
+          </p:nvSpPr>
+          <p:spPr>
+            <a:xfrm>
+              <a:off x="871697" y="4351411"/>
+              <a:ext cx="145732" cy="0"/>
+            </a:xfrm>
+            <a:custGeom>
+              <a:avLst/>
+              <a:gdLst/>
+              <a:ahLst/>
+              <a:cxnLst/>
+              <a:rect l="l" t="t" r="r" b="b"/>
+              <a:pathLst>
+                <a:path w="145732" h="0">
+                  <a:moveTo>
+                    <a:pt x="0" y="0"/>
+                  </a:moveTo>
+                  <a:lnTo>
+                    <a:pt x="145732" y="0"/>
+                  </a:lnTo>
+                </a:path>
+              </a:pathLst>
+            </a:custGeom>
+            <a:noFill/>
+            <a:ln w="48577" cap="rnd">
+              <a:solidFill>
+                <a:srgbClr val="0077FF"/>
+              </a:solidFill>
+              <a:round/>
+            </a:ln>
+            <a:effectLst/>
+          </p:spPr>
+          <p:style>
+            <a:lnRef idx="1">
+              <a:schemeClr val="accent1"/>
+            </a:lnRef>
+            <a:fillRef idx="3">
+              <a:schemeClr val="accent1"/>
+            </a:fillRef>
+            <a:effectRef idx="2">
+              <a:schemeClr val="accent1"/>
+            </a:effectRef>
+            <a:fontRef idx="minor">
+              <a:schemeClr val="lt1"/>
+            </a:fontRef>
+          </p:style>
+          <p:txBody>
+            <a:bodyPr rtlCol="0" anchor="ctr"/>
+            <a:lstStyle/>
+            <a:p>
+              <a:pPr algn="ctr"/>
+            </a:p>
+          </p:txBody>
+        </p:sp>
+      </p:grpSp>
       <p:sp>
         <p:nvSpPr>
-          <p:cNvPr id="776" name="card_2"/>
+          <p:cNvPr id="769" name="item_2"/>
           <p:cNvSpPr txBox="1"/>
           <p:nvPr/>
         </p:nvSpPr>
         <p:spPr>
           <a:xfrm>
-            <a:off x="8264469" y="3926700"/>
-            <a:ext cx="2575194" cy="1160137"/>
+            <a:off x="1522636" y="4001463"/>
+            <a:ext cx="10010630" cy="957744"/>
           </a:xfrm>
           <a:prstGeom prst="rect">
             <a:avLst/>
@@ -10043,7 +14741,7 @@
               <a:spcAft>
                 <a:spcPts val="300"/>
               </a:spcAft>
-              <a:defRPr sz="1800" b="0">
+              <a:defRPr sz="2800">
                 <a:solidFill>
                   <a:srgbClr val="000000"/>
                 </a:solidFill>
@@ -10053,7 +14751,7 @@
               </a:defRPr>
             </a:pPr>
             <a:r>
-              <a:rPr sz="1800" b="0">
+              <a:rPr sz="2800">
                 <a:solidFill>
                   <a:srgbClr val="000000"/>
                 </a:solidFill>
@@ -10061,7 +14759,313 @@
                 <a:ea typeface="Play"/>
                 <a:cs typeface="Play"/>
               </a:rPr>
-              <a:t>Подключение 4 команд в третьем квартале 2026</a:t>
+              <a:t>Экономия времени дизайнеров</a:t>
+            </a:r>
+          </a:p>
+        </p:txBody>
+      </p:sp>
+      <p:grpSp>
+        <p:nvGrpSpPr>
+          <p:cNvPr id="10" name="icon:builtin-expand"/>
+          <p:cNvGrpSpPr/>
+          <p:nvPr/>
+        </p:nvGrpSpPr>
+        <p:grpSpPr>
+          <a:xfrm>
+            <a:off x="750253" y="5169234"/>
+            <a:ext cx="437197" cy="437197"/>
+            <a:chOff x="750253" y="5169234"/>
+            <a:chExt cx="437197" cy="437197"/>
+          </a:xfrm>
+        </p:grpSpPr>
+        <p:sp>
+          <p:nvSpPr>
+            <p:cNvPr id="11" name="Freeform 10"/>
+            <p:cNvSpPr/>
+            <p:nvPr/>
+          </p:nvSpPr>
+          <p:spPr>
+            <a:xfrm>
+              <a:off x="1041718" y="5169234"/>
+              <a:ext cx="145732" cy="145732"/>
+            </a:xfrm>
+            <a:custGeom>
+              <a:avLst/>
+              <a:gdLst/>
+              <a:ahLst/>
+              <a:cxnLst/>
+              <a:rect l="l" t="t" r="r" b="b"/>
+              <a:pathLst>
+                <a:path w="145732" h="145732">
+                  <a:moveTo>
+                    <a:pt x="0" y="0"/>
+                  </a:moveTo>
+                  <a:lnTo>
+                    <a:pt x="145732" y="0"/>
+                  </a:lnTo>
+                  <a:lnTo>
+                    <a:pt x="145732" y="145732"/>
+                  </a:lnTo>
+                </a:path>
+              </a:pathLst>
+            </a:custGeom>
+            <a:noFill/>
+            <a:ln w="48577" cap="rnd">
+              <a:solidFill>
+                <a:srgbClr val="0077FF"/>
+              </a:solidFill>
+              <a:round/>
+            </a:ln>
+            <a:effectLst/>
+          </p:spPr>
+          <p:style>
+            <a:lnRef idx="1">
+              <a:schemeClr val="accent1"/>
+            </a:lnRef>
+            <a:fillRef idx="3">
+              <a:schemeClr val="accent1"/>
+            </a:fillRef>
+            <a:effectRef idx="2">
+              <a:schemeClr val="accent1"/>
+            </a:effectRef>
+            <a:fontRef idx="minor">
+              <a:schemeClr val="lt1"/>
+            </a:fontRef>
+          </p:style>
+          <p:txBody>
+            <a:bodyPr rtlCol="0" anchor="ctr"/>
+            <a:lstStyle/>
+            <a:p>
+              <a:pPr algn="ctr"/>
+            </a:p>
+          </p:txBody>
+        </p:sp>
+        <p:sp>
+          <p:nvSpPr>
+            <p:cNvPr id="12" name="Freeform 11"/>
+            <p:cNvSpPr/>
+            <p:nvPr/>
+          </p:nvSpPr>
+          <p:spPr>
+            <a:xfrm>
+              <a:off x="750253" y="5460699"/>
+              <a:ext cx="145732" cy="145732"/>
+            </a:xfrm>
+            <a:custGeom>
+              <a:avLst/>
+              <a:gdLst/>
+              <a:ahLst/>
+              <a:cxnLst/>
+              <a:rect l="l" t="t" r="r" b="b"/>
+              <a:pathLst>
+                <a:path w="145732" h="145732">
+                  <a:moveTo>
+                    <a:pt x="145732" y="145732"/>
+                  </a:moveTo>
+                  <a:lnTo>
+                    <a:pt x="0" y="145732"/>
+                  </a:lnTo>
+                  <a:lnTo>
+                    <a:pt x="0" y="0"/>
+                  </a:lnTo>
+                </a:path>
+              </a:pathLst>
+            </a:custGeom>
+            <a:noFill/>
+            <a:ln w="48577" cap="rnd">
+              <a:solidFill>
+                <a:srgbClr val="0077FF"/>
+              </a:solidFill>
+              <a:round/>
+            </a:ln>
+            <a:effectLst/>
+          </p:spPr>
+          <p:style>
+            <a:lnRef idx="1">
+              <a:schemeClr val="accent1"/>
+            </a:lnRef>
+            <a:fillRef idx="3">
+              <a:schemeClr val="accent1"/>
+            </a:fillRef>
+            <a:effectRef idx="2">
+              <a:schemeClr val="accent1"/>
+            </a:effectRef>
+            <a:fontRef idx="minor">
+              <a:schemeClr val="lt1"/>
+            </a:fontRef>
+          </p:style>
+          <p:txBody>
+            <a:bodyPr rtlCol="0" anchor="ctr"/>
+            <a:lstStyle/>
+            <a:p>
+              <a:pPr algn="ctr"/>
+            </a:p>
+          </p:txBody>
+        </p:sp>
+        <p:sp>
+          <p:nvSpPr>
+            <p:cNvPr id="13" name="Freeform 12"/>
+            <p:cNvSpPr/>
+            <p:nvPr/>
+          </p:nvSpPr>
+          <p:spPr>
+            <a:xfrm>
+              <a:off x="1017429" y="5169234"/>
+              <a:ext cx="170021" cy="170021"/>
+            </a:xfrm>
+            <a:custGeom>
+              <a:avLst/>
+              <a:gdLst/>
+              <a:ahLst/>
+              <a:cxnLst/>
+              <a:rect l="l" t="t" r="r" b="b"/>
+              <a:pathLst>
+                <a:path w="170021" h="170021">
+                  <a:moveTo>
+                    <a:pt x="170021" y="0"/>
+                  </a:moveTo>
+                  <a:lnTo>
+                    <a:pt x="0" y="170021"/>
+                  </a:lnTo>
+                </a:path>
+              </a:pathLst>
+            </a:custGeom>
+            <a:noFill/>
+            <a:ln w="48577" cap="rnd">
+              <a:solidFill>
+                <a:srgbClr val="0077FF"/>
+              </a:solidFill>
+              <a:round/>
+            </a:ln>
+            <a:effectLst/>
+          </p:spPr>
+          <p:style>
+            <a:lnRef idx="1">
+              <a:schemeClr val="accent1"/>
+            </a:lnRef>
+            <a:fillRef idx="3">
+              <a:schemeClr val="accent1"/>
+            </a:fillRef>
+            <a:effectRef idx="2">
+              <a:schemeClr val="accent1"/>
+            </a:effectRef>
+            <a:fontRef idx="minor">
+              <a:schemeClr val="lt1"/>
+            </a:fontRef>
+          </p:style>
+          <p:txBody>
+            <a:bodyPr rtlCol="0" anchor="ctr"/>
+            <a:lstStyle/>
+            <a:p>
+              <a:pPr algn="ctr"/>
+            </a:p>
+          </p:txBody>
+        </p:sp>
+        <p:sp>
+          <p:nvSpPr>
+            <p:cNvPr id="14" name="Freeform 13"/>
+            <p:cNvSpPr/>
+            <p:nvPr/>
+          </p:nvSpPr>
+          <p:spPr>
+            <a:xfrm>
+              <a:off x="750253" y="5436410"/>
+              <a:ext cx="170021" cy="170021"/>
+            </a:xfrm>
+            <a:custGeom>
+              <a:avLst/>
+              <a:gdLst/>
+              <a:ahLst/>
+              <a:cxnLst/>
+              <a:rect l="l" t="t" r="r" b="b"/>
+              <a:pathLst>
+                <a:path w="170021" h="170021">
+                  <a:moveTo>
+                    <a:pt x="0" y="170021"/>
+                  </a:moveTo>
+                  <a:lnTo>
+                    <a:pt x="170021" y="0"/>
+                  </a:lnTo>
+                </a:path>
+              </a:pathLst>
+            </a:custGeom>
+            <a:noFill/>
+            <a:ln w="48577" cap="rnd">
+              <a:solidFill>
+                <a:srgbClr val="0077FF"/>
+              </a:solidFill>
+              <a:round/>
+            </a:ln>
+            <a:effectLst/>
+          </p:spPr>
+          <p:style>
+            <a:lnRef idx="1">
+              <a:schemeClr val="accent1"/>
+            </a:lnRef>
+            <a:fillRef idx="3">
+              <a:schemeClr val="accent1"/>
+            </a:fillRef>
+            <a:effectRef idx="2">
+              <a:schemeClr val="accent1"/>
+            </a:effectRef>
+            <a:fontRef idx="minor">
+              <a:schemeClr val="lt1"/>
+            </a:fontRef>
+          </p:style>
+          <p:txBody>
+            <a:bodyPr rtlCol="0" anchor="ctr"/>
+            <a:lstStyle/>
+            <a:p>
+              <a:pPr algn="ctr"/>
+            </a:p>
+          </p:txBody>
+        </p:sp>
+      </p:grpSp>
+      <p:sp>
+        <p:nvSpPr>
+          <p:cNvPr id="770" name="item_3"/>
+          <p:cNvSpPr txBox="1"/>
+          <p:nvPr/>
+        </p:nvSpPr>
+        <p:spPr>
+          <a:xfrm>
+            <a:off x="1522636" y="5105893"/>
+            <a:ext cx="10010630" cy="957744"/>
+          </a:xfrm>
+          <a:prstGeom prst="rect">
+            <a:avLst/>
+          </a:prstGeom>
+          <a:noFill/>
+        </p:spPr>
+        <p:txBody>
+          <a:bodyPr wrap="square" lIns="76200" rIns="76200" tIns="50800" bIns="50800">
+            <a:spAutoFit/>
+          </a:bodyPr>
+          <a:lstStyle/>
+          <a:p>
+            <a:pPr algn="l">
+              <a:spcAft>
+                <a:spcPts val="300"/>
+              </a:spcAft>
+              <a:defRPr sz="2800">
+                <a:solidFill>
+                  <a:srgbClr val="000000"/>
+                </a:solidFill>
+                <a:latin typeface="Play"/>
+                <a:ea typeface="Play"/>
+                <a:cs typeface="Play"/>
+              </a:defRPr>
+            </a:pPr>
+            <a:r>
+              <a:rPr sz="2800">
+                <a:solidFill>
+                  <a:srgbClr val="000000"/>
+                </a:solidFill>
+                <a:latin typeface="Play"/>
+                <a:ea typeface="Play"/>
+                <a:cs typeface="Play"/>
+              </a:rPr>
+              <a:t>Масштабируемость без дополнительных сотрудников</a:t>
             </a:r>
           </a:p>
         </p:txBody>
@@ -10074,7 +15078,7 @@
 </p:sld>
 </file>
 
-<file path=ppt/slides/slide63.xml><?xml version="1.0" encoding="utf-8"?>
+<file path=ppt/slides/slide66.xml><?xml version="1.0" encoding="utf-8"?>
 <p:sld xmlns:a="http://schemas.openxmlformats.org/drawingml/2006/main" xmlns:p="http://schemas.openxmlformats.org/presentationml/2006/main" xmlns:r="http://schemas.openxmlformats.org/officeDocument/2006/relationships">
   <p:cSld>
     <p:bg>
@@ -10229,90 +15233,9 @@
           </a:p>
         </p:txBody>
       </p:sp>
-      <p:pic>
-        <p:nvPicPr>
-          <p:cNvPr id="783" name="Google Shape;783;p59"/>
-          <p:cNvPicPr preferRelativeResize="0"/>
-          <p:nvPr/>
-        </p:nvPicPr>
-        <p:blipFill rotWithShape="1">
-          <a:blip r:embed="rId6">
-            <a:alphaModFix/>
-          </a:blip>
-          <a:srcRect b="0" l="0" r="0" t="0"/>
-          <a:stretch/>
-        </p:blipFill>
-        <p:spPr>
-          <a:xfrm>
-            <a:off x="879438" y="2770225"/>
-            <a:ext cx="450850" cy="450850"/>
-          </a:xfrm>
-          <a:prstGeom prst="rect">
-            <a:avLst/>
-          </a:prstGeom>
-          <a:noFill/>
-          <a:ln>
-            <a:noFill/>
-          </a:ln>
-        </p:spPr>
-      </p:pic>
-      <p:pic>
-        <p:nvPicPr>
-          <p:cNvPr id="784" name="Google Shape;784;p59"/>
-          <p:cNvPicPr preferRelativeResize="0"/>
-          <p:nvPr/>
-        </p:nvPicPr>
-        <p:blipFill rotWithShape="1">
-          <a:blip r:embed="rId7">
-            <a:alphaModFix/>
-          </a:blip>
-          <a:srcRect b="0" l="0" r="0" t="0"/>
-          <a:stretch/>
-        </p:blipFill>
-        <p:spPr>
-          <a:xfrm>
-            <a:off x="8316973" y="2791669"/>
-            <a:ext cx="450851" cy="450851"/>
-          </a:xfrm>
-          <a:prstGeom prst="rect">
-            <a:avLst/>
-          </a:prstGeom>
-          <a:noFill/>
-          <a:ln>
-            <a:noFill/>
-          </a:ln>
-        </p:spPr>
-      </p:pic>
-      <p:pic>
-        <p:nvPicPr>
-          <p:cNvPr id="785" name="Google Shape;785;p59"/>
-          <p:cNvPicPr preferRelativeResize="0"/>
-          <p:nvPr/>
-        </p:nvPicPr>
-        <p:blipFill rotWithShape="1">
-          <a:blip r:embed="rId8">
-            <a:alphaModFix/>
-          </a:blip>
-          <a:srcRect b="0" l="0" r="0" t="0"/>
-          <a:stretch/>
-        </p:blipFill>
-        <p:spPr>
-          <a:xfrm>
-            <a:off x="4574144" y="2770225"/>
-            <a:ext cx="450850" cy="450850"/>
-          </a:xfrm>
-          <a:prstGeom prst="rect">
-            <a:avLst/>
-          </a:prstGeom>
-          <a:noFill/>
-          <a:ln>
-            <a:noFill/>
-          </a:ln>
-        </p:spPr>
-      </p:pic>
       <p:sp>
         <p:nvSpPr>
-          <p:cNvPr id="786" name="title"/>
+          <p:cNvPr id="783" name="title"/>
           <p:cNvSpPr txBox="1"/>
           <p:nvPr/>
         </p:nvSpPr>
@@ -10354,14 +15277,14 @@
                 <a:ea typeface="Arial"/>
                 <a:cs typeface="Arial"/>
               </a:rPr>
-              <a:t>Риски</a:t>
+              <a:t>Что мы просим решить</a:t>
             </a:r>
           </a:p>
         </p:txBody>
       </p:sp>
       <p:sp>
         <p:nvSpPr>
-          <p:cNvPr id="787" name="card_0"/>
+          <p:cNvPr id="784" name="card_0"/>
           <p:cNvSpPr txBox="1"/>
           <p:nvPr/>
         </p:nvSpPr>
@@ -10403,14 +15326,14 @@
                 <a:ea typeface="Play"/>
                 <a:cs typeface="Play"/>
               </a:rPr>
-              <a:t>Модель может выдумать цифры, аудит проверяет</a:t>
+              <a:t>Одобрить запуск сервиса на всю компанию</a:t>
             </a:r>
           </a:p>
         </p:txBody>
       </p:sp>
       <p:sp>
         <p:nvSpPr>
-          <p:cNvPr id="788" name="card_1"/>
+          <p:cNvPr id="785" name="card_1"/>
           <p:cNvSpPr txBox="1"/>
           <p:nvPr/>
         </p:nvSpPr>
@@ -10452,14 +15375,14 @@
                 <a:ea typeface="Play"/>
                 <a:cs typeface="Play"/>
               </a:rPr>
-              <a:t>Неизвестный шаблон может быть плохо сделан</a:t>
+              <a:t>Выделить бюджет на инфраструктуру и интеграцию</a:t>
             </a:r>
           </a:p>
         </p:txBody>
       </p:sp>
       <p:sp>
         <p:nvSpPr>
-          <p:cNvPr id="789" name="card_2"/>
+          <p:cNvPr id="786" name="card_2"/>
           <p:cNvSpPr txBox="1"/>
           <p:nvPr/>
         </p:nvSpPr>
@@ -10501,11 +15424,759 @@
                 <a:ea typeface="Play"/>
                 <a:cs typeface="Play"/>
               </a:rPr>
-              <a:t>Нагрузка выше 20 задач требует внешней очереди</a:t>
+              <a:t>Назначить ответственных за внедрение</a:t>
             </a:r>
           </a:p>
         </p:txBody>
       </p:sp>
+      <p:grpSp>
+        <p:nvGrpSpPr>
+          <p:cNvPr id="2" name="icon:builtin-check"/>
+          <p:cNvGrpSpPr/>
+          <p:nvPr/>
+        </p:nvGrpSpPr>
+        <p:grpSpPr>
+          <a:xfrm>
+            <a:off x="935771" y="2826575"/>
+            <a:ext cx="338133" cy="338133"/>
+            <a:chOff x="935771" y="2826575"/>
+            <a:chExt cx="338133" cy="338133"/>
+          </a:xfrm>
+        </p:grpSpPr>
+        <p:sp>
+          <p:nvSpPr>
+            <p:cNvPr id="787" name="Oval 786"/>
+            <p:cNvSpPr/>
+            <p:nvPr/>
+          </p:nvSpPr>
+          <p:spPr>
+            <a:xfrm>
+              <a:off x="935771" y="2826575"/>
+              <a:ext cx="338133" cy="338133"/>
+            </a:xfrm>
+            <a:prstGeom prst="ellipse">
+              <a:avLst/>
+            </a:prstGeom>
+            <a:noFill/>
+            <a:ln w="37570" cap="rnd">
+              <a:solidFill>
+                <a:srgbClr val="7CEDF8"/>
+              </a:solidFill>
+              <a:round/>
+            </a:ln>
+            <a:effectLst/>
+          </p:spPr>
+          <p:style>
+            <a:lnRef idx="1">
+              <a:schemeClr val="accent1"/>
+            </a:lnRef>
+            <a:fillRef idx="3">
+              <a:schemeClr val="accent1"/>
+            </a:fillRef>
+            <a:effectRef idx="2">
+              <a:schemeClr val="accent1"/>
+            </a:effectRef>
+            <a:fontRef idx="minor">
+              <a:schemeClr val="lt1"/>
+            </a:fontRef>
+          </p:style>
+          <p:txBody>
+            <a:bodyPr rtlCol="0" anchor="ctr"/>
+            <a:lstStyle/>
+            <a:p>
+              <a:pPr algn="ctr"/>
+            </a:p>
+          </p:txBody>
+        </p:sp>
+        <p:sp>
+          <p:nvSpPr>
+            <p:cNvPr id="3" name="Freeform 2"/>
+            <p:cNvSpPr/>
+            <p:nvPr/>
+          </p:nvSpPr>
+          <p:spPr>
+            <a:xfrm>
+              <a:off x="1029697" y="2939286"/>
+              <a:ext cx="150281" cy="112711"/>
+            </a:xfrm>
+            <a:custGeom>
+              <a:avLst/>
+              <a:gdLst/>
+              <a:ahLst/>
+              <a:cxnLst/>
+              <a:rect l="l" t="t" r="r" b="b"/>
+              <a:pathLst>
+                <a:path w="150281" h="112711">
+                  <a:moveTo>
+                    <a:pt x="0" y="56356"/>
+                  </a:moveTo>
+                  <a:lnTo>
+                    <a:pt x="56355" y="112711"/>
+                  </a:lnTo>
+                  <a:lnTo>
+                    <a:pt x="150281" y="0"/>
+                  </a:lnTo>
+                </a:path>
+              </a:pathLst>
+            </a:custGeom>
+            <a:noFill/>
+            <a:ln w="37570" cap="rnd">
+              <a:solidFill>
+                <a:srgbClr val="7CEDF8"/>
+              </a:solidFill>
+              <a:round/>
+            </a:ln>
+            <a:effectLst/>
+          </p:spPr>
+          <p:style>
+            <a:lnRef idx="1">
+              <a:schemeClr val="accent1"/>
+            </a:lnRef>
+            <a:fillRef idx="3">
+              <a:schemeClr val="accent1"/>
+            </a:fillRef>
+            <a:effectRef idx="2">
+              <a:schemeClr val="accent1"/>
+            </a:effectRef>
+            <a:fontRef idx="minor">
+              <a:schemeClr val="lt1"/>
+            </a:fontRef>
+          </p:style>
+          <p:txBody>
+            <a:bodyPr rtlCol="0" anchor="ctr"/>
+            <a:lstStyle/>
+            <a:p>
+              <a:pPr algn="ctr"/>
+            </a:p>
+          </p:txBody>
+        </p:sp>
+      </p:grpSp>
+      <p:grpSp>
+        <p:nvGrpSpPr>
+          <p:cNvPr id="4" name="icon:builtin-server"/>
+          <p:cNvGrpSpPr/>
+          <p:nvPr/>
+        </p:nvGrpSpPr>
+        <p:grpSpPr>
+          <a:xfrm>
+            <a:off x="4630557" y="2845360"/>
+            <a:ext cx="338133" cy="300563"/>
+            <a:chOff x="4630557" y="2845360"/>
+            <a:chExt cx="338133" cy="300563"/>
+          </a:xfrm>
+        </p:grpSpPr>
+        <p:sp>
+          <p:nvSpPr>
+            <p:cNvPr id="788" name="Rounded Rectangle 787"/>
+            <p:cNvSpPr/>
+            <p:nvPr/>
+          </p:nvSpPr>
+          <p:spPr>
+            <a:xfrm>
+              <a:off x="4630557" y="2845360"/>
+              <a:ext cx="338133" cy="131496"/>
+            </a:xfrm>
+            <a:prstGeom prst="roundRect">
+              <a:avLst>
+                <a:gd name="adj" fmla="val 28571"/>
+              </a:avLst>
+            </a:prstGeom>
+            <a:noFill/>
+            <a:ln w="37570" cap="rnd">
+              <a:solidFill>
+                <a:srgbClr val="FEFEFE"/>
+              </a:solidFill>
+              <a:round/>
+            </a:ln>
+            <a:effectLst/>
+          </p:spPr>
+          <p:style>
+            <a:lnRef idx="1">
+              <a:schemeClr val="accent1"/>
+            </a:lnRef>
+            <a:fillRef idx="3">
+              <a:schemeClr val="accent1"/>
+            </a:fillRef>
+            <a:effectRef idx="2">
+              <a:schemeClr val="accent1"/>
+            </a:effectRef>
+            <a:fontRef idx="minor">
+              <a:schemeClr val="lt1"/>
+            </a:fontRef>
+          </p:style>
+          <p:txBody>
+            <a:bodyPr rtlCol="0" anchor="ctr"/>
+            <a:lstStyle/>
+            <a:p>
+              <a:pPr algn="ctr"/>
+            </a:p>
+          </p:txBody>
+        </p:sp>
+        <p:sp>
+          <p:nvSpPr>
+            <p:cNvPr id="789" name="Rounded Rectangle 788"/>
+            <p:cNvSpPr/>
+            <p:nvPr/>
+          </p:nvSpPr>
+          <p:spPr>
+            <a:xfrm>
+              <a:off x="4630557" y="3014427"/>
+              <a:ext cx="338133" cy="131496"/>
+            </a:xfrm>
+            <a:prstGeom prst="roundRect">
+              <a:avLst>
+                <a:gd name="adj" fmla="val 28571"/>
+              </a:avLst>
+            </a:prstGeom>
+            <a:noFill/>
+            <a:ln w="37570" cap="rnd">
+              <a:solidFill>
+                <a:srgbClr val="FEFEFE"/>
+              </a:solidFill>
+              <a:round/>
+            </a:ln>
+            <a:effectLst/>
+          </p:spPr>
+          <p:style>
+            <a:lnRef idx="1">
+              <a:schemeClr val="accent1"/>
+            </a:lnRef>
+            <a:fillRef idx="3">
+              <a:schemeClr val="accent1"/>
+            </a:fillRef>
+            <a:effectRef idx="2">
+              <a:schemeClr val="accent1"/>
+            </a:effectRef>
+            <a:fontRef idx="minor">
+              <a:schemeClr val="lt1"/>
+            </a:fontRef>
+          </p:style>
+          <p:txBody>
+            <a:bodyPr rtlCol="0" anchor="ctr"/>
+            <a:lstStyle/>
+            <a:p>
+              <a:pPr algn="ctr"/>
+            </a:p>
+          </p:txBody>
+        </p:sp>
+        <p:sp>
+          <p:nvSpPr>
+            <p:cNvPr id="790" name="Oval 789"/>
+            <p:cNvSpPr/>
+            <p:nvPr/>
+          </p:nvSpPr>
+          <p:spPr>
+            <a:xfrm>
+              <a:off x="4685034" y="2890445"/>
+              <a:ext cx="41327" cy="41327"/>
+            </a:xfrm>
+            <a:prstGeom prst="ellipse">
+              <a:avLst/>
+            </a:prstGeom>
+            <a:solidFill>
+              <a:srgbClr val="FEFEFE"/>
+            </a:solidFill>
+            <a:ln>
+              <a:noFill/>
+            </a:ln>
+            <a:effectLst/>
+          </p:spPr>
+          <p:style>
+            <a:lnRef idx="1">
+              <a:schemeClr val="accent1"/>
+            </a:lnRef>
+            <a:fillRef idx="3">
+              <a:schemeClr val="accent1"/>
+            </a:fillRef>
+            <a:effectRef idx="2">
+              <a:schemeClr val="accent1"/>
+            </a:effectRef>
+            <a:fontRef idx="minor">
+              <a:schemeClr val="lt1"/>
+            </a:fontRef>
+          </p:style>
+          <p:txBody>
+            <a:bodyPr rtlCol="0" anchor="ctr"/>
+            <a:lstStyle/>
+            <a:p>
+              <a:pPr algn="ctr"/>
+            </a:p>
+          </p:txBody>
+        </p:sp>
+        <p:sp>
+          <p:nvSpPr>
+            <p:cNvPr id="791" name="Oval 790"/>
+            <p:cNvSpPr/>
+            <p:nvPr/>
+          </p:nvSpPr>
+          <p:spPr>
+            <a:xfrm>
+              <a:off x="4685034" y="3059511"/>
+              <a:ext cx="41327" cy="41327"/>
+            </a:xfrm>
+            <a:prstGeom prst="ellipse">
+              <a:avLst/>
+            </a:prstGeom>
+            <a:solidFill>
+              <a:srgbClr val="FEFEFE"/>
+            </a:solidFill>
+            <a:ln>
+              <a:noFill/>
+            </a:ln>
+            <a:effectLst/>
+          </p:spPr>
+          <p:style>
+            <a:lnRef idx="1">
+              <a:schemeClr val="accent1"/>
+            </a:lnRef>
+            <a:fillRef idx="3">
+              <a:schemeClr val="accent1"/>
+            </a:fillRef>
+            <a:effectRef idx="2">
+              <a:schemeClr val="accent1"/>
+            </a:effectRef>
+            <a:fontRef idx="minor">
+              <a:schemeClr val="lt1"/>
+            </a:fontRef>
+          </p:style>
+          <p:txBody>
+            <a:bodyPr rtlCol="0" anchor="ctr"/>
+            <a:lstStyle/>
+            <a:p>
+              <a:pPr algn="ctr"/>
+            </a:p>
+          </p:txBody>
+        </p:sp>
+      </p:grpSp>
+      <p:grpSp>
+        <p:nvGrpSpPr>
+          <p:cNvPr id="5" name="icon:builtin-rocket"/>
+          <p:cNvGrpSpPr/>
+          <p:nvPr/>
+        </p:nvGrpSpPr>
+        <p:grpSpPr>
+          <a:xfrm>
+            <a:off x="8392164" y="2845186"/>
+            <a:ext cx="303418" cy="322203"/>
+            <a:chOff x="8392164" y="2845186"/>
+            <a:chExt cx="303418" cy="322203"/>
+          </a:xfrm>
+        </p:grpSpPr>
+        <p:sp>
+          <p:nvSpPr>
+            <p:cNvPr id="6" name="Freeform 5"/>
+            <p:cNvSpPr/>
+            <p:nvPr/>
+          </p:nvSpPr>
+          <p:spPr>
+            <a:xfrm>
+              <a:off x="8467305" y="2845186"/>
+              <a:ext cx="228277" cy="247062"/>
+            </a:xfrm>
+            <a:custGeom>
+              <a:avLst/>
+              <a:gdLst/>
+              <a:ahLst/>
+              <a:cxnLst/>
+              <a:rect l="l" t="t" r="r" b="b"/>
+              <a:pathLst>
+                <a:path w="228277" h="247062">
+                  <a:moveTo>
+                    <a:pt x="112711" y="21640"/>
+                  </a:moveTo>
+                  <a:lnTo>
+                    <a:pt x="129261" y="13769"/>
+                  </a:lnTo>
+                  <a:lnTo>
+                    <a:pt x="144984" y="7965"/>
+                  </a:lnTo>
+                  <a:lnTo>
+                    <a:pt x="159786" y="3963"/>
+                  </a:lnTo>
+                  <a:lnTo>
+                    <a:pt x="173481" y="1502"/>
+                  </a:lnTo>
+                  <a:lnTo>
+                    <a:pt x="185973" y="263"/>
+                  </a:lnTo>
+                  <a:lnTo>
+                    <a:pt x="197113" y="0"/>
+                  </a:lnTo>
+                  <a:lnTo>
+                    <a:pt x="206749" y="394"/>
+                  </a:lnTo>
+                  <a:lnTo>
+                    <a:pt x="214789" y="1202"/>
+                  </a:lnTo>
+                  <a:lnTo>
+                    <a:pt x="221045" y="2122"/>
+                  </a:lnTo>
+                  <a:lnTo>
+                    <a:pt x="225422" y="2855"/>
+                  </a:lnTo>
+                  <a:lnTo>
+                    <a:pt x="226173" y="7232"/>
+                  </a:lnTo>
+                  <a:lnTo>
+                    <a:pt x="227075" y="13487"/>
+                  </a:lnTo>
+                  <a:lnTo>
+                    <a:pt x="227864" y="21527"/>
+                  </a:lnTo>
+                  <a:lnTo>
+                    <a:pt x="228277" y="31164"/>
+                  </a:lnTo>
+                  <a:lnTo>
+                    <a:pt x="228014" y="42304"/>
+                  </a:lnTo>
+                  <a:lnTo>
+                    <a:pt x="226774" y="54796"/>
+                  </a:lnTo>
+                  <a:lnTo>
+                    <a:pt x="224314" y="68490"/>
+                  </a:lnTo>
+                  <a:lnTo>
+                    <a:pt x="220312" y="83293"/>
+                  </a:lnTo>
+                  <a:lnTo>
+                    <a:pt x="214526" y="99016"/>
+                  </a:lnTo>
+                  <a:lnTo>
+                    <a:pt x="206637" y="115566"/>
+                  </a:lnTo>
+                  <a:lnTo>
+                    <a:pt x="75141" y="247062"/>
+                  </a:lnTo>
+                  <a:lnTo>
+                    <a:pt x="0" y="171922"/>
+                  </a:lnTo>
+                  <a:close/>
+                </a:path>
+              </a:pathLst>
+            </a:custGeom>
+            <a:noFill/>
+            <a:ln w="37570" cap="rnd">
+              <a:solidFill>
+                <a:srgbClr val="FF3885"/>
+              </a:solidFill>
+              <a:round/>
+            </a:ln>
+            <a:effectLst/>
+          </p:spPr>
+          <p:style>
+            <a:lnRef idx="1">
+              <a:schemeClr val="accent1"/>
+            </a:lnRef>
+            <a:fillRef idx="3">
+              <a:schemeClr val="accent1"/>
+            </a:fillRef>
+            <a:effectRef idx="2">
+              <a:schemeClr val="accent1"/>
+            </a:effectRef>
+            <a:fontRef idx="minor">
+              <a:schemeClr val="lt1"/>
+            </a:fontRef>
+          </p:style>
+          <p:txBody>
+            <a:bodyPr rtlCol="0" anchor="ctr"/>
+            <a:lstStyle/>
+            <a:p>
+              <a:pPr algn="ctr"/>
+            </a:p>
+          </p:txBody>
+        </p:sp>
+        <p:sp>
+          <p:nvSpPr>
+            <p:cNvPr id="7" name="Freeform 6"/>
+            <p:cNvSpPr/>
+            <p:nvPr/>
+          </p:nvSpPr>
+          <p:spPr>
+            <a:xfrm>
+              <a:off x="8410949" y="2941967"/>
+              <a:ext cx="131497" cy="75141"/>
+            </a:xfrm>
+            <a:custGeom>
+              <a:avLst/>
+              <a:gdLst/>
+              <a:ahLst/>
+              <a:cxnLst/>
+              <a:rect l="l" t="t" r="r" b="b"/>
+              <a:pathLst>
+                <a:path w="131497" h="75141">
+                  <a:moveTo>
+                    <a:pt x="56356" y="75141"/>
+                  </a:moveTo>
+                  <a:lnTo>
+                    <a:pt x="0" y="75141"/>
+                  </a:lnTo>
+                  <a:lnTo>
+                    <a:pt x="56356" y="0"/>
+                  </a:lnTo>
+                  <a:lnTo>
+                    <a:pt x="131497" y="0"/>
+                  </a:lnTo>
+                </a:path>
+              </a:pathLst>
+            </a:custGeom>
+            <a:noFill/>
+            <a:ln w="37570" cap="rnd">
+              <a:solidFill>
+                <a:srgbClr val="FF3885"/>
+              </a:solidFill>
+              <a:round/>
+            </a:ln>
+            <a:effectLst/>
+          </p:spPr>
+          <p:style>
+            <a:lnRef idx="1">
+              <a:schemeClr val="accent1"/>
+            </a:lnRef>
+            <a:fillRef idx="3">
+              <a:schemeClr val="accent1"/>
+            </a:fillRef>
+            <a:effectRef idx="2">
+              <a:schemeClr val="accent1"/>
+            </a:effectRef>
+            <a:fontRef idx="minor">
+              <a:schemeClr val="lt1"/>
+            </a:fontRef>
+          </p:style>
+          <p:txBody>
+            <a:bodyPr rtlCol="0" anchor="ctr"/>
+            <a:lstStyle/>
+            <a:p>
+              <a:pPr algn="ctr"/>
+            </a:p>
+          </p:txBody>
+        </p:sp>
+        <p:sp>
+          <p:nvSpPr>
+            <p:cNvPr id="8" name="Freeform 7"/>
+            <p:cNvSpPr/>
+            <p:nvPr/>
+          </p:nvSpPr>
+          <p:spPr>
+            <a:xfrm>
+              <a:off x="8542446" y="3017108"/>
+              <a:ext cx="75140" cy="131496"/>
+            </a:xfrm>
+            <a:custGeom>
+              <a:avLst/>
+              <a:gdLst/>
+              <a:ahLst/>
+              <a:cxnLst/>
+              <a:rect l="l" t="t" r="r" b="b"/>
+              <a:pathLst>
+                <a:path w="75140" h="131496">
+                  <a:moveTo>
+                    <a:pt x="0" y="75140"/>
+                  </a:moveTo>
+                  <a:lnTo>
+                    <a:pt x="0" y="131496"/>
+                  </a:lnTo>
+                  <a:lnTo>
+                    <a:pt x="75140" y="75140"/>
+                  </a:lnTo>
+                  <a:lnTo>
+                    <a:pt x="75140" y="0"/>
+                  </a:lnTo>
+                </a:path>
+              </a:pathLst>
+            </a:custGeom>
+            <a:noFill/>
+            <a:ln w="37570" cap="rnd">
+              <a:solidFill>
+                <a:srgbClr val="FF3885"/>
+              </a:solidFill>
+              <a:round/>
+            </a:ln>
+            <a:effectLst/>
+          </p:spPr>
+          <p:style>
+            <a:lnRef idx="1">
+              <a:schemeClr val="accent1"/>
+            </a:lnRef>
+            <a:fillRef idx="3">
+              <a:schemeClr val="accent1"/>
+            </a:fillRef>
+            <a:effectRef idx="2">
+              <a:schemeClr val="accent1"/>
+            </a:effectRef>
+            <a:fontRef idx="minor">
+              <a:schemeClr val="lt1"/>
+            </a:fontRef>
+          </p:style>
+          <p:txBody>
+            <a:bodyPr rtlCol="0" anchor="ctr"/>
+            <a:lstStyle/>
+            <a:p>
+              <a:pPr algn="ctr"/>
+            </a:p>
+          </p:txBody>
+        </p:sp>
+        <p:sp>
+          <p:nvSpPr>
+            <p:cNvPr id="792" name="Oval 791"/>
+            <p:cNvSpPr/>
+            <p:nvPr/>
+          </p:nvSpPr>
+          <p:spPr>
+            <a:xfrm>
+              <a:off x="8581894" y="2925060"/>
+              <a:ext cx="52598" cy="52598"/>
+            </a:xfrm>
+            <a:prstGeom prst="ellipse">
+              <a:avLst/>
+            </a:prstGeom>
+            <a:noFill/>
+            <a:ln w="37570" cap="rnd">
+              <a:solidFill>
+                <a:srgbClr val="FF3885"/>
+              </a:solidFill>
+              <a:round/>
+            </a:ln>
+            <a:effectLst/>
+          </p:spPr>
+          <p:style>
+            <a:lnRef idx="1">
+              <a:schemeClr val="accent1"/>
+            </a:lnRef>
+            <a:fillRef idx="3">
+              <a:schemeClr val="accent1"/>
+            </a:fillRef>
+            <a:effectRef idx="2">
+              <a:schemeClr val="accent1"/>
+            </a:effectRef>
+            <a:fontRef idx="minor">
+              <a:schemeClr val="lt1"/>
+            </a:fontRef>
+          </p:style>
+          <p:txBody>
+            <a:bodyPr rtlCol="0" anchor="ctr"/>
+            <a:lstStyle/>
+            <a:p>
+              <a:pPr algn="ctr"/>
+            </a:p>
+          </p:txBody>
+        </p:sp>
+        <p:sp>
+          <p:nvSpPr>
+            <p:cNvPr id="9" name="Freeform 8"/>
+            <p:cNvSpPr/>
+            <p:nvPr/>
+          </p:nvSpPr>
+          <p:spPr>
+            <a:xfrm>
+              <a:off x="8392164" y="3101641"/>
+              <a:ext cx="65748" cy="65748"/>
+            </a:xfrm>
+            <a:custGeom>
+              <a:avLst/>
+              <a:gdLst/>
+              <a:ahLst/>
+              <a:cxnLst/>
+              <a:rect l="l" t="t" r="r" b="b"/>
+              <a:pathLst>
+                <a:path w="65748" h="65748">
+                  <a:moveTo>
+                    <a:pt x="46963" y="0"/>
+                  </a:moveTo>
+                  <a:lnTo>
+                    <a:pt x="38792" y="3362"/>
+                  </a:lnTo>
+                  <a:lnTo>
+                    <a:pt x="31259" y="7739"/>
+                  </a:lnTo>
+                  <a:lnTo>
+                    <a:pt x="24383" y="13018"/>
+                  </a:lnTo>
+                  <a:lnTo>
+                    <a:pt x="18259" y="19085"/>
+                  </a:lnTo>
+                  <a:lnTo>
+                    <a:pt x="12924" y="25829"/>
+                  </a:lnTo>
+                  <a:lnTo>
+                    <a:pt x="8416" y="33137"/>
+                  </a:lnTo>
+                  <a:lnTo>
+                    <a:pt x="4809" y="40895"/>
+                  </a:lnTo>
+                  <a:lnTo>
+                    <a:pt x="2179" y="48991"/>
+                  </a:lnTo>
+                  <a:lnTo>
+                    <a:pt x="564" y="57313"/>
+                  </a:lnTo>
+                  <a:lnTo>
+                    <a:pt x="0" y="65748"/>
+                  </a:lnTo>
+                  <a:lnTo>
+                    <a:pt x="8435" y="65203"/>
+                  </a:lnTo>
+                  <a:lnTo>
+                    <a:pt x="16757" y="63569"/>
+                  </a:lnTo>
+                  <a:lnTo>
+                    <a:pt x="24853" y="60920"/>
+                  </a:lnTo>
+                  <a:lnTo>
+                    <a:pt x="32611" y="57332"/>
+                  </a:lnTo>
+                  <a:lnTo>
+                    <a:pt x="39919" y="52824"/>
+                  </a:lnTo>
+                  <a:lnTo>
+                    <a:pt x="46663" y="47489"/>
+                  </a:lnTo>
+                  <a:lnTo>
+                    <a:pt x="52730" y="41346"/>
+                  </a:lnTo>
+                  <a:lnTo>
+                    <a:pt x="58009" y="34489"/>
+                  </a:lnTo>
+                  <a:lnTo>
+                    <a:pt x="62386" y="26938"/>
+                  </a:lnTo>
+                  <a:lnTo>
+                    <a:pt x="65748" y="18785"/>
+                  </a:lnTo>
+                </a:path>
+              </a:pathLst>
+            </a:custGeom>
+            <a:noFill/>
+            <a:ln w="37570" cap="rnd">
+              <a:solidFill>
+                <a:srgbClr val="FF3885"/>
+              </a:solidFill>
+              <a:round/>
+            </a:ln>
+            <a:effectLst/>
+          </p:spPr>
+          <p:style>
+            <a:lnRef idx="1">
+              <a:schemeClr val="accent1"/>
+            </a:lnRef>
+            <a:fillRef idx="3">
+              <a:schemeClr val="accent1"/>
+            </a:fillRef>
+            <a:effectRef idx="2">
+              <a:schemeClr val="accent1"/>
+            </a:effectRef>
+            <a:fontRef idx="minor">
+              <a:schemeClr val="lt1"/>
+            </a:fontRef>
+          </p:style>
+          <p:txBody>
+            <a:bodyPr rtlCol="0" anchor="ctr"/>
+            <a:lstStyle/>
+            <a:p>
+              <a:pPr algn="ctr"/>
+            </a:p>
+          </p:txBody>
+        </p:sp>
+      </p:grpSp>
     </p:spTree>
   </p:cSld>
   <p:clrMapOvr>
@@ -10514,277 +16185,7 @@
 </p:sld>
 </file>
 
-<file path=ppt/slides/slide64.xml><?xml version="1.0" encoding="utf-8"?>
-<p:sld xmlns:a="http://schemas.openxmlformats.org/drawingml/2006/main" xmlns:p="http://schemas.openxmlformats.org/presentationml/2006/main" xmlns:r="http://schemas.openxmlformats.org/officeDocument/2006/relationships">
-  <p:cSld>
-    <p:bg>
-      <p:bgPr>
-        <a:solidFill>
-          <a:schemeClr val="lt2"/>
-        </a:solidFill>
-      </p:bgPr>
-    </p:bg>
-    <p:spTree>
-      <p:nvGrpSpPr>
-        <p:cNvPr id="1" name=""/>
-        <p:cNvGrpSpPr/>
-        <p:nvPr/>
-      </p:nvGrpSpPr>
-      <p:grpSpPr/>
-      <p:sp>
-        <p:nvSpPr>
-          <p:cNvPr id="2" name="title"/>
-          <p:cNvSpPr txBox="1"/>
-          <p:nvPr/>
-        </p:nvSpPr>
-        <p:spPr>
-          <a:xfrm>
-            <a:off x="677387" y="692177"/>
-            <a:ext cx="10855878" cy="822960"/>
-          </a:xfrm>
-          <a:prstGeom prst="rect">
-            <a:avLst/>
-          </a:prstGeom>
-          <a:noFill/>
-        </p:spPr>
-        <p:txBody>
-          <a:bodyPr wrap="square" lIns="76200" rIns="76200" tIns="50800" bIns="50800">
-            <a:spAutoFit/>
-          </a:bodyPr>
-          <a:lstStyle/>
-          <a:p>
-            <a:pPr algn="l">
-              <a:spcAft>
-                <a:spcPts val="300"/>
-              </a:spcAft>
-              <a:defRPr sz="4000">
-                <a:solidFill>
-                  <a:srgbClr val="000000"/>
-                </a:solidFill>
-                <a:latin typeface="Arial"/>
-                <a:ea typeface="Arial"/>
-                <a:cs typeface="Arial"/>
-              </a:defRPr>
-            </a:pPr>
-            <a:r>
-              <a:rPr sz="4000">
-                <a:solidFill>
-                  <a:srgbClr val="000000"/>
-                </a:solidFill>
-                <a:latin typeface="Arial"/>
-                <a:ea typeface="Arial"/>
-                <a:cs typeface="Arial"/>
-              </a:rPr>
-              <a:t>Преимущества</a:t>
-            </a:r>
-          </a:p>
-        </p:txBody>
-      </p:sp>
-      <p:sp>
-        <p:nvSpPr>
-          <p:cNvPr id="3" name="card_0"/>
-          <p:cNvSpPr txBox="1"/>
-          <p:nvPr/>
-        </p:nvSpPr>
-        <p:spPr>
-          <a:xfrm>
-            <a:off x="823935" y="1925604"/>
-            <a:ext cx="5060899" cy="1851698"/>
-          </a:xfrm>
-          <a:prstGeom prst="rect">
-            <a:avLst/>
-          </a:prstGeom>
-          <a:noFill/>
-        </p:spPr>
-        <p:txBody>
-          <a:bodyPr wrap="square" lIns="76200" rIns="76200" tIns="50800" bIns="50800">
-            <a:spAutoFit/>
-          </a:bodyPr>
-          <a:lstStyle/>
-          <a:p>
-            <a:pPr algn="l">
-              <a:spcAft>
-                <a:spcPts val="300"/>
-              </a:spcAft>
-              <a:defRPr sz="2400" b="0">
-                <a:solidFill>
-                  <a:srgbClr val="000000"/>
-                </a:solidFill>
-                <a:latin typeface="Play"/>
-                <a:ea typeface="Play"/>
-                <a:cs typeface="Play"/>
-              </a:defRPr>
-            </a:pPr>
-            <a:r>
-              <a:rPr sz="2400" b="0">
-                <a:solidFill>
-                  <a:srgbClr val="000000"/>
-                </a:solidFill>
-                <a:latin typeface="Play"/>
-                <a:ea typeface="Play"/>
-                <a:cs typeface="Play"/>
-              </a:rPr>
-              <a:t>Сокращение времени сборки до 4 минут</a:t>
-            </a:r>
-          </a:p>
-        </p:txBody>
-      </p:sp>
-      <p:sp>
-        <p:nvSpPr>
-          <p:cNvPr id="4" name="card_1"/>
-          <p:cNvSpPr txBox="1"/>
-          <p:nvPr/>
-        </p:nvSpPr>
-        <p:spPr>
-          <a:xfrm>
-            <a:off x="6307165" y="1927936"/>
-            <a:ext cx="5086380" cy="1851698"/>
-          </a:xfrm>
-          <a:prstGeom prst="rect">
-            <a:avLst/>
-          </a:prstGeom>
-          <a:noFill/>
-        </p:spPr>
-        <p:txBody>
-          <a:bodyPr wrap="square" lIns="76200" rIns="76200" tIns="50800" bIns="50800">
-            <a:spAutoFit/>
-          </a:bodyPr>
-          <a:lstStyle/>
-          <a:p>
-            <a:pPr algn="l">
-              <a:spcAft>
-                <a:spcPts val="300"/>
-              </a:spcAft>
-              <a:defRPr sz="2400" b="0">
-                <a:solidFill>
-                  <a:srgbClr val="000000"/>
-                </a:solidFill>
-                <a:latin typeface="Play"/>
-                <a:ea typeface="Play"/>
-                <a:cs typeface="Play"/>
-              </a:defRPr>
-            </a:pPr>
-            <a:r>
-              <a:rPr sz="2400" b="0">
-                <a:solidFill>
-                  <a:srgbClr val="000000"/>
-                </a:solidFill>
-                <a:latin typeface="Play"/>
-                <a:ea typeface="Play"/>
-                <a:cs typeface="Play"/>
-              </a:rPr>
-              <a:t>Уменьшение нарушений фирменного стиля до 2 из 68</a:t>
-            </a:r>
-          </a:p>
-        </p:txBody>
-      </p:sp>
-      <p:sp>
-        <p:nvSpPr>
-          <p:cNvPr id="5" name="card_2"/>
-          <p:cNvSpPr txBox="1"/>
-          <p:nvPr/>
-        </p:nvSpPr>
-        <p:spPr>
-          <a:xfrm>
-            <a:off x="823935" y="4196699"/>
-            <a:ext cx="5060899" cy="1851698"/>
-          </a:xfrm>
-          <a:prstGeom prst="rect">
-            <a:avLst/>
-          </a:prstGeom>
-          <a:noFill/>
-        </p:spPr>
-        <p:txBody>
-          <a:bodyPr wrap="square" lIns="76200" rIns="76200" tIns="50800" bIns="50800">
-            <a:spAutoFit/>
-          </a:bodyPr>
-          <a:lstStyle/>
-          <a:p>
-            <a:pPr algn="l">
-              <a:spcAft>
-                <a:spcPts val="300"/>
-              </a:spcAft>
-              <a:defRPr sz="2400" b="0">
-                <a:solidFill>
-                  <a:srgbClr val="000000"/>
-                </a:solidFill>
-                <a:latin typeface="Play"/>
-                <a:ea typeface="Play"/>
-                <a:cs typeface="Play"/>
-              </a:defRPr>
-            </a:pPr>
-            <a:r>
-              <a:rPr sz="2400" b="0">
-                <a:solidFill>
-                  <a:srgbClr val="000000"/>
-                </a:solidFill>
-                <a:latin typeface="Play"/>
-                <a:ea typeface="Play"/>
-                <a:cs typeface="Play"/>
-              </a:rPr>
-              <a:t>Экономия 1 400 рублей за 6 недель пилота</a:t>
-            </a:r>
-          </a:p>
-        </p:txBody>
-      </p:sp>
-      <p:sp>
-        <p:nvSpPr>
-          <p:cNvPr id="6" name="card_3"/>
-          <p:cNvSpPr txBox="1"/>
-          <p:nvPr/>
-        </p:nvSpPr>
-        <p:spPr>
-          <a:xfrm>
-            <a:off x="6307165" y="4196699"/>
-            <a:ext cx="5086380" cy="1851698"/>
-          </a:xfrm>
-          <a:prstGeom prst="rect">
-            <a:avLst/>
-          </a:prstGeom>
-          <a:noFill/>
-        </p:spPr>
-        <p:txBody>
-          <a:bodyPr wrap="square" lIns="76200" rIns="76200" tIns="50800" bIns="50800">
-            <a:spAutoFit/>
-          </a:bodyPr>
-          <a:lstStyle/>
-          <a:p>
-            <a:pPr algn="l">
-              <a:spcAft>
-                <a:spcPts val="300"/>
-              </a:spcAft>
-              <a:defRPr sz="2400" b="0">
-                <a:solidFill>
-                  <a:srgbClr val="000000"/>
-                </a:solidFill>
-                <a:latin typeface="Play"/>
-                <a:ea typeface="Play"/>
-                <a:cs typeface="Play"/>
-              </a:defRPr>
-            </a:pPr>
-            <a:r>
-              <a:rPr sz="2400" b="0">
-                <a:solidFill>
-                  <a:srgbClr val="000000"/>
-                </a:solidFill>
-                <a:latin typeface="Play"/>
-                <a:ea typeface="Play"/>
-                <a:cs typeface="Play"/>
-              </a:rPr>
-              <a:t>Повышение производительности дизайнеров</a:t>
-            </a:r>
-          </a:p>
-        </p:txBody>
-      </p:sp>
-    </p:spTree>
-  </p:cSld>
-  <p:clrMapOvr>
-    <a:masterClrMapping/>
-  </p:clrMapOvr>
-</p:sld>
-</file>
-
-<file path=ppt/slides/slide65.xml><?xml version="1.0" encoding="utf-8"?>
+<file path=ppt/slides/slide67.xml><?xml version="1.0" encoding="utf-8"?>
 <p:sld xmlns:a="http://schemas.openxmlformats.org/drawingml/2006/main" xmlns:p="http://schemas.openxmlformats.org/presentationml/2006/main" xmlns:r="http://schemas.openxmlformats.org/officeDocument/2006/relationships">
   <p:cSld>
     <p:spTree>
@@ -10803,7 +16204,7 @@
         <p:spPr>
           <a:xfrm>
             <a:off x="658855" y="692177"/>
-            <a:ext cx="5242438" cy="822960"/>
+            <a:ext cx="5242438" cy="919480"/>
           </a:xfrm>
           <a:prstGeom prst="rect">
             <a:avLst/>
@@ -10820,7 +16221,7 @@
               <a:spcAft>
                 <a:spcPts val="300"/>
               </a:spcAft>
-              <a:defRPr sz="4000">
+              <a:defRPr sz="4800">
                 <a:solidFill>
                   <a:srgbClr val="FFFFFF"/>
                 </a:solidFill>
@@ -10830,7 +16231,7 @@
               </a:defRPr>
             </a:pPr>
             <a:r>
-              <a:rPr sz="4000">
+              <a:rPr sz="4800">
                 <a:solidFill>
                   <a:srgbClr val="FFFFFF"/>
                 </a:solidFill>
@@ -10838,7 +16239,7 @@
                 <a:ea typeface="Arial"/>
                 <a:cs typeface="Arial"/>
               </a:rPr>
-              <a:t>Следующие шаги</a:t>
+              <a:t>Заключение</a:t>
             </a:r>
           </a:p>
         </p:txBody>
@@ -10851,8 +16252,8 @@
         </p:nvSpPr>
         <p:spPr>
           <a:xfrm>
-            <a:off x="658855" y="1783080"/>
-            <a:ext cx="5242438" cy="3859476"/>
+            <a:off x="658855" y="2465070"/>
+            <a:ext cx="5242438" cy="1950720"/>
           </a:xfrm>
           <a:prstGeom prst="rect">
             <a:avLst/>
@@ -10887,7 +16288,7 @@
                 <a:ea typeface="Play"/>
                 <a:cs typeface="Play"/>
               </a:rPr>
-              <a:t>• Сервис готов к масштабированию на всю компанию</a:t>
+              <a:t>• Одобрить запуск сервиса на всю компанию</a:t>
             </a:r>
           </a:p>
           <a:p>
@@ -10913,33 +16314,7 @@
                 <a:ea typeface="Play"/>
                 <a:cs typeface="Play"/>
               </a:rPr>
-              <a:t>• Ожидаем решение о запуске в четвертом квартале 2026</a:t>
-            </a:r>
-          </a:p>
-          <a:p>
-            <a:pPr algn="l">
-              <a:spcAft>
-                <a:spcPts val="300"/>
-              </a:spcAft>
-              <a:defRPr sz="2800">
-                <a:solidFill>
-                  <a:srgbClr val="FFFFFF"/>
-                </a:solidFill>
-                <a:latin typeface="Play"/>
-                <a:ea typeface="Play"/>
-                <a:cs typeface="Play"/>
-              </a:defRPr>
-            </a:pPr>
-            <a:r>
-              <a:rPr sz="2800">
-                <a:solidFill>
-                  <a:srgbClr val="FFFFFF"/>
-                </a:solidFill>
-                <a:latin typeface="Play"/>
-                <a:ea typeface="Play"/>
-                <a:cs typeface="Play"/>
-              </a:rPr>
-              <a:t>• Планируем интеграцию с хранилищем документов</a:t>
+              <a:t>• Назначить ответственных и выделить бюджет</a:t>
             </a:r>
           </a:p>
         </p:txBody>

--- a/samples/Шаблон_презентации_VK_Education__classic.pptx
+++ b/samples/Шаблон_презентации_VK_Education__classic.pptx
@@ -261,434 +261,6 @@
     </a:lvl9pPr>
   </p:defaultTextStyle>
 </p:presentation>
-</file>
-
-<file path=ppt/charts/chart1.xml><?xml version="1.0" encoding="utf-8"?>
-<c:chartSpace xmlns:c="http://schemas.openxmlformats.org/drawingml/2006/chart" xmlns:a="http://schemas.openxmlformats.org/drawingml/2006/main" xmlns:r="http://schemas.openxmlformats.org/officeDocument/2006/relationships">
-  <c:date1904 val="0"/>
-  <c:chart>
-    <c:autoTitleDeleted val="1"/>
-    <c:plotArea>
-      <c:barChart>
-        <c:barDir val="col"/>
-        <c:grouping val="clustered"/>
-        <c:ser>
-          <c:idx val="0"/>
-          <c:order val="0"/>
-          <c:tx>
-            <c:strRef>
-              <c:f>Sheet1!$B$1</c:f>
-              <c:strCache>
-                <c:ptCount val="1"/>
-                <c:pt idx="0">
-                  <c:v>Время (мин)</c:v>
-                </c:pt>
-              </c:strCache>
-            </c:strRef>
-          </c:tx>
-          <c:spPr>
-            <a:solidFill>
-              <a:srgbClr val="0077FF"/>
-            </a:solidFill>
-            <a:ln>
-              <a:solidFill>
-                <a:srgbClr val="0077FF"/>
-              </a:solidFill>
-            </a:ln>
-          </c:spPr>
-          <c:cat>
-            <c:strRef>
-              <c:f>Sheet1!$A$2:$A$3</c:f>
-              <c:strCache>
-                <c:ptCount val="2"/>
-                <c:pt idx="0">
-                  <c:v>Текущий процесс</c:v>
-                </c:pt>
-                <c:pt idx="1">
-                  <c:v>Пилот</c:v>
-                </c:pt>
-              </c:strCache>
-            </c:strRef>
-          </c:cat>
-          <c:val>
-            <c:numRef>
-              <c:f>Sheet1!$B$2:$B$3</c:f>
-              <c:numCache>
-                <c:formatCode>General</c:formatCode>
-                <c:ptCount val="2"/>
-                <c:pt idx="0">
-                  <c:v>186.0</c:v>
-                </c:pt>
-                <c:pt idx="1">
-                  <c:v>4.0</c:v>
-                </c:pt>
-              </c:numCache>
-            </c:numRef>
-          </c:val>
-        </c:ser>
-        <c:dLbls>
-          <c:numFmt formatCode="0&quot; мин&quot;" sourceLinked="0"/>
-          <c:txPr>
-            <a:bodyPr wrap="none"/>
-            <a:lstStyle/>
-            <a:p>
-              <a:pPr>
-                <a:defRPr sz="1100" b="0">
-                  <a:solidFill>
-                    <a:srgbClr val="000000"/>
-                  </a:solidFill>
-                  <a:latin typeface="Play"/>
-                  <a:ea typeface="Play"/>
-                  <a:cs typeface="Play"/>
-                </a:defRPr>
-              </a:pPr>
-            </a:p>
-          </c:txPr>
-          <c:dLblPos val="outEnd"/>
-          <c:showLegendKey val="0"/>
-          <c:showVal val="1"/>
-          <c:showCatName val="0"/>
-          <c:showSerName val="0"/>
-          <c:showPercent val="0"/>
-          <c:showBubbleSize val="0"/>
-          <c:showLeaderLines val="1"/>
-        </c:dLbls>
-        <c:gapWidth val="60"/>
-        <c:axId val="-2068027336"/>
-        <c:axId val="-2113994440"/>
-      </c:barChart>
-      <c:catAx>
-        <c:axId val="-2068027336"/>
-        <c:scaling>
-          <c:orientation val="minMax"/>
-        </c:scaling>
-        <c:delete val="0"/>
-        <c:axPos val="b"/>
-        <c:majorTickMark val="out"/>
-        <c:minorTickMark val="none"/>
-        <c:tickLblPos val="nextTo"/>
-        <c:txPr>
-          <a:bodyPr/>
-          <a:lstStyle/>
-          <a:p>
-            <a:pPr>
-              <a:defRPr sz="1100" b="0">
-                <a:solidFill>
-                  <a:srgbClr val="000000"/>
-                </a:solidFill>
-                <a:latin typeface="Play"/>
-                <a:ea typeface="Play"/>
-                <a:cs typeface="Play"/>
-              </a:defRPr>
-            </a:pPr>
-          </a:p>
-        </c:txPr>
-        <c:crossAx val="-2113994440"/>
-        <c:crosses val="autoZero"/>
-        <c:auto val="1"/>
-        <c:lblAlgn val="ctr"/>
-        <c:lblOffset val="100"/>
-        <c:noMultiLvlLbl val="0"/>
-      </c:catAx>
-      <c:valAx>
-        <c:axId val="-2113994440"/>
-        <c:scaling/>
-        <c:delete val="0"/>
-        <c:axPos val="l"/>
-        <c:majorGridlines>
-          <c:spPr>
-            <a:ln w="9525">
-              <a:solidFill>
-                <a:srgbClr val="D1D1D1"/>
-              </a:solidFill>
-            </a:ln>
-          </c:spPr>
-        </c:majorGridlines>
-        <c:title>
-          <c:tx>
-            <c:rich>
-              <a:bodyPr rot="0" vert="horz"/>
-              <a:lstStyle/>
-              <a:p>
-                <a:pPr>
-                  <a:defRPr sz="1100" b="0">
-                    <a:solidFill>
-                      <a:srgbClr val="000000"/>
-                    </a:solidFill>
-                    <a:latin typeface="Play"/>
-                    <a:ea typeface="Play"/>
-                    <a:cs typeface="Play"/>
-                  </a:defRPr>
-                </a:pPr>
-                <a:r>
-                  <a:t>Время (мин), мин</a:t>
-                </a:r>
-              </a:p>
-            </c:rich>
-          </c:tx>
-          <c:layout/>
-          <c:overlay val="0"/>
-        </c:title>
-        <c:majorTickMark val="out"/>
-        <c:minorTickMark val="none"/>
-        <c:tickLblPos val="nextTo"/>
-        <c:txPr>
-          <a:bodyPr/>
-          <a:lstStyle/>
-          <a:p>
-            <a:pPr>
-              <a:defRPr sz="1100" b="0">
-                <a:solidFill>
-                  <a:srgbClr val="000000"/>
-                </a:solidFill>
-                <a:latin typeface="Play"/>
-                <a:ea typeface="Play"/>
-                <a:cs typeface="Play"/>
-              </a:defRPr>
-            </a:pPr>
-          </a:p>
-        </c:txPr>
-        <c:crossAx val="-2068027336"/>
-        <c:crosses val="autoZero"/>
-      </c:valAx>
-    </c:plotArea>
-    <c:dispBlanksAs val="gap"/>
-  </c:chart>
-  <c:txPr>
-    <a:bodyPr/>
-    <a:lstStyle/>
-    <a:p>
-      <a:pPr>
-        <a:defRPr sz="1200" b="0">
-          <a:solidFill>
-            <a:srgbClr val="000000"/>
-          </a:solidFill>
-          <a:latin typeface="Play"/>
-          <a:ea typeface="Play"/>
-          <a:cs typeface="Play"/>
-        </a:defRPr>
-      </a:pPr>
-      <a:endParaRPr lang="en-US"/>
-    </a:p>
-  </c:txPr>
-  <c:externalData r:id="rId1">
-    <c:autoUpdate val="0"/>
-  </c:externalData>
-</c:chartSpace>
-</file>
-
-<file path=ppt/charts/chart2.xml><?xml version="1.0" encoding="utf-8"?>
-<c:chartSpace xmlns:c="http://schemas.openxmlformats.org/drawingml/2006/chart" xmlns:a="http://schemas.openxmlformats.org/drawingml/2006/main" xmlns:r="http://schemas.openxmlformats.org/officeDocument/2006/relationships">
-  <c:date1904 val="0"/>
-  <c:chart>
-    <c:autoTitleDeleted val="1"/>
-    <c:plotArea>
-      <c:barChart>
-        <c:barDir val="col"/>
-        <c:grouping val="clustered"/>
-        <c:ser>
-          <c:idx val="0"/>
-          <c:order val="0"/>
-          <c:tx>
-            <c:strRef>
-              <c:f>Sheet1!$B$1</c:f>
-              <c:strCache>
-                <c:ptCount val="1"/>
-                <c:pt idx="0">
-                  <c:v>Запросы закрыты</c:v>
-                </c:pt>
-              </c:strCache>
-            </c:strRef>
-          </c:tx>
-          <c:spPr>
-            <a:solidFill>
-              <a:srgbClr val="0077FF"/>
-            </a:solidFill>
-            <a:ln>
-              <a:solidFill>
-                <a:srgbClr val="0077FF"/>
-              </a:solidFill>
-            </a:ln>
-          </c:spPr>
-          <c:cat>
-            <c:strRef>
-              <c:f>Sheet1!$A$2:$A$3</c:f>
-              <c:strCache>
-                <c:ptCount val="2"/>
-                <c:pt idx="0">
-                  <c:v>Текущий процесс</c:v>
-                </c:pt>
-                <c:pt idx="1">
-                  <c:v>Пилот</c:v>
-                </c:pt>
-              </c:strCache>
-            </c:strRef>
-          </c:cat>
-          <c:val>
-            <c:numRef>
-              <c:f>Sheet1!$B$2:$B$3</c:f>
-              <c:numCache>
-                <c:formatCode>General</c:formatCode>
-                <c:ptCount val="2"/>
-                <c:pt idx="0">
-                  <c:v>11.0</c:v>
-                </c:pt>
-                <c:pt idx="1">
-                  <c:v>38.0</c:v>
-                </c:pt>
-              </c:numCache>
-            </c:numRef>
-          </c:val>
-        </c:ser>
-        <c:dLbls>
-          <c:numFmt formatCode="0&quot; запросов&quot;" sourceLinked="0"/>
-          <c:txPr>
-            <a:bodyPr wrap="none"/>
-            <a:lstStyle/>
-            <a:p>
-              <a:pPr>
-                <a:defRPr sz="1100" b="0">
-                  <a:solidFill>
-                    <a:srgbClr val="000000"/>
-                  </a:solidFill>
-                  <a:latin typeface="Play"/>
-                  <a:ea typeface="Play"/>
-                  <a:cs typeface="Play"/>
-                </a:defRPr>
-              </a:pPr>
-            </a:p>
-          </c:txPr>
-          <c:dLblPos val="outEnd"/>
-          <c:showLegendKey val="0"/>
-          <c:showVal val="1"/>
-          <c:showCatName val="0"/>
-          <c:showSerName val="0"/>
-          <c:showPercent val="0"/>
-          <c:showBubbleSize val="0"/>
-          <c:showLeaderLines val="1"/>
-        </c:dLbls>
-        <c:gapWidth val="60"/>
-        <c:axId val="-2068027336"/>
-        <c:axId val="-2113994440"/>
-      </c:barChart>
-      <c:catAx>
-        <c:axId val="-2068027336"/>
-        <c:scaling>
-          <c:orientation val="minMax"/>
-        </c:scaling>
-        <c:delete val="0"/>
-        <c:axPos val="b"/>
-        <c:majorTickMark val="out"/>
-        <c:minorTickMark val="none"/>
-        <c:tickLblPos val="nextTo"/>
-        <c:txPr>
-          <a:bodyPr/>
-          <a:lstStyle/>
-          <a:p>
-            <a:pPr>
-              <a:defRPr sz="1100" b="0">
-                <a:solidFill>
-                  <a:srgbClr val="000000"/>
-                </a:solidFill>
-                <a:latin typeface="Play"/>
-                <a:ea typeface="Play"/>
-                <a:cs typeface="Play"/>
-              </a:defRPr>
-            </a:pPr>
-          </a:p>
-        </c:txPr>
-        <c:crossAx val="-2113994440"/>
-        <c:crosses val="autoZero"/>
-        <c:auto val="1"/>
-        <c:lblAlgn val="ctr"/>
-        <c:lblOffset val="100"/>
-        <c:noMultiLvlLbl val="0"/>
-      </c:catAx>
-      <c:valAx>
-        <c:axId val="-2113994440"/>
-        <c:scaling/>
-        <c:delete val="0"/>
-        <c:axPos val="l"/>
-        <c:majorGridlines>
-          <c:spPr>
-            <a:ln w="9525">
-              <a:solidFill>
-                <a:srgbClr val="D1D1D1"/>
-              </a:solidFill>
-            </a:ln>
-          </c:spPr>
-        </c:majorGridlines>
-        <c:title>
-          <c:tx>
-            <c:rich>
-              <a:bodyPr rot="0" vert="horz"/>
-              <a:lstStyle/>
-              <a:p>
-                <a:pPr>
-                  <a:defRPr sz="1100" b="0">
-                    <a:solidFill>
-                      <a:srgbClr val="000000"/>
-                    </a:solidFill>
-                    <a:latin typeface="Play"/>
-                    <a:ea typeface="Play"/>
-                    <a:cs typeface="Play"/>
-                  </a:defRPr>
-                </a:pPr>
-                <a:r>
-                  <a:t>Запросы закрыты, запросов</a:t>
-                </a:r>
-              </a:p>
-            </c:rich>
-          </c:tx>
-          <c:layout/>
-          <c:overlay val="0"/>
-        </c:title>
-        <c:majorTickMark val="out"/>
-        <c:minorTickMark val="none"/>
-        <c:tickLblPos val="nextTo"/>
-        <c:txPr>
-          <a:bodyPr/>
-          <a:lstStyle/>
-          <a:p>
-            <a:pPr>
-              <a:defRPr sz="1100" b="0">
-                <a:solidFill>
-                  <a:srgbClr val="000000"/>
-                </a:solidFill>
-                <a:latin typeface="Play"/>
-                <a:ea typeface="Play"/>
-                <a:cs typeface="Play"/>
-              </a:defRPr>
-            </a:pPr>
-          </a:p>
-        </c:txPr>
-        <c:crossAx val="-2068027336"/>
-        <c:crosses val="autoZero"/>
-      </c:valAx>
-    </c:plotArea>
-    <c:dispBlanksAs val="gap"/>
-  </c:chart>
-  <c:txPr>
-    <a:bodyPr/>
-    <a:lstStyle/>
-    <a:p>
-      <a:pPr>
-        <a:defRPr sz="1200" b="0">
-          <a:solidFill>
-            <a:srgbClr val="000000"/>
-          </a:solidFill>
-          <a:latin typeface="Play"/>
-          <a:ea typeface="Play"/>
-          <a:cs typeface="Play"/>
-        </a:defRPr>
-      </a:pPr>
-      <a:endParaRPr lang="en-US"/>
-    </a:p>
-  </c:txPr>
-  <c:externalData r:id="rId1">
-    <c:autoUpdate val="0"/>
-  </c:externalData>
-</c:chartSpace>
 </file>
 
 <file path=ppt/notesMasters/notesMaster1.xml><?xml version="1.0" encoding="utf-8"?>
@@ -9957,7 +9529,7 @@
         <p:spPr>
           <a:xfrm>
             <a:off x="622279" y="2598016"/>
-            <a:ext cx="7535387" cy="1661967"/>
+            <a:ext cx="7535387" cy="1686560"/>
           </a:xfrm>
           <a:prstGeom prst="rect">
             <a:avLst/>
@@ -9974,7 +9546,7 @@
               <a:spcAft>
                 <a:spcPts val="300"/>
               </a:spcAft>
-              <a:defRPr sz="4000" b="0">
+              <a:defRPr sz="4800" b="0">
                 <a:solidFill>
                   <a:srgbClr val="000000"/>
                 </a:solidFill>
@@ -9984,7 +9556,7 @@
               </a:defRPr>
             </a:pPr>
             <a:r>
-              <a:rPr sz="4000" b="0">
+              <a:rPr sz="4800" b="0">
                 <a:solidFill>
                   <a:srgbClr val="000000"/>
                 </a:solidFill>
@@ -9992,7 +9564,7 @@
                 <a:ea typeface="Arial"/>
                 <a:cs typeface="Arial"/>
               </a:rPr>
-              <a:t>Защита инициативы: сервис автоматической вёрстки</a:t>
+              <a:t>Автоматическая вёрстка презентаций</a:t>
             </a:r>
           </a:p>
         </p:txBody>
@@ -10024,7 +9596,7 @@
         <p:spPr>
           <a:xfrm>
             <a:off x="677387" y="692177"/>
-            <a:ext cx="10855878" cy="822960"/>
+            <a:ext cx="10855878" cy="1447800"/>
           </a:xfrm>
           <a:prstGeom prst="rect">
             <a:avLst/>
@@ -10059,21 +9631,65 @@
                 <a:ea typeface="Arial"/>
                 <a:cs typeface="Arial"/>
               </a:rPr>
-              <a:t>Контекст и возможность</a:t>
+              <a:t>42 колоды за квартал 2026: 186 минут на сборку</a:t>
             </a:r>
           </a:p>
         </p:txBody>
       </p:sp>
       <p:sp>
         <p:nvSpPr>
-          <p:cNvPr id="3" name="body"/>
+          <p:cNvPr id="3" name="stat_0:bar"/>
+          <p:cNvSpPr/>
+          <p:nvPr/>
+        </p:nvSpPr>
+        <p:spPr>
+          <a:xfrm>
+            <a:off x="677387" y="2453159"/>
+            <a:ext cx="50800" cy="2121408"/>
+          </a:xfrm>
+          <a:prstGeom prst="rect">
+            <a:avLst/>
+          </a:prstGeom>
+          <a:solidFill>
+            <a:srgbClr val="0077FF"/>
+          </a:solidFill>
+          <a:ln>
+            <a:noFill/>
+          </a:ln>
+          <a:effectLst/>
+        </p:spPr>
+        <p:style>
+          <a:lnRef idx="1">
+            <a:schemeClr val="accent1"/>
+          </a:lnRef>
+          <a:fillRef idx="3">
+            <a:schemeClr val="accent1"/>
+          </a:fillRef>
+          <a:effectRef idx="2">
+            <a:schemeClr val="accent1"/>
+          </a:effectRef>
+          <a:fontRef idx="minor">
+            <a:schemeClr val="lt1"/>
+          </a:fontRef>
+        </p:style>
+        <p:txBody>
+          <a:bodyPr rtlCol="0" anchor="ctr"/>
+          <a:lstStyle/>
+          <a:p>
+            <a:pPr algn="ctr"/>
+          </a:p>
+        </p:txBody>
+      </p:sp>
+      <p:sp>
+        <p:nvSpPr>
+          <p:cNvPr id="4" name="stat_0"/>
           <p:cNvSpPr txBox="1"/>
           <p:nvPr/>
         </p:nvSpPr>
         <p:spPr>
           <a:xfrm>
-            <a:off x="677387" y="1783080"/>
-            <a:ext cx="10855878" cy="1341120"/>
+            <a:off x="855187" y="2380007"/>
+            <a:ext cx="2210493" cy="2194560"/>
           </a:xfrm>
           <a:prstGeom prst="rect">
             <a:avLst/>
@@ -10081,18 +9697,21 @@
           <a:noFill/>
         </p:spPr>
         <p:txBody>
-          <a:bodyPr wrap="square" lIns="76200" rIns="76200" tIns="50800" bIns="50800">
+          <a:bodyPr wrap="square" lIns="76200" rIns="76200" tIns="0" bIns="0">
             <a:spAutoFit/>
           </a:bodyPr>
           <a:lstStyle/>
           <a:p>
-            <a:pPr algn="l">
-              <a:spcAft>
-                <a:spcPts val="300"/>
-              </a:spcAft>
-              <a:defRPr sz="2400">
-                <a:solidFill>
-                  <a:srgbClr val="000000"/>
+            <a:pPr>
+              <a:lnSpc>
+                <a:spcPct val="100000"/>
+              </a:lnSpc>
+              <a:spcAft>
+                <a:spcPts val="200"/>
+              </a:spcAft>
+              <a:defRPr sz="3200" b="1">
+                <a:solidFill>
+                  <a:srgbClr val="0077FF"/>
                 </a:solidFill>
                 <a:latin typeface="Play"/>
                 <a:ea typeface="Play"/>
@@ -10100,23 +9719,23 @@
               </a:defRPr>
             </a:pPr>
             <a:r>
-              <a:rPr sz="2400">
-                <a:solidFill>
-                  <a:srgbClr val="000000"/>
+              <a:rPr sz="3200" b="1">
+                <a:solidFill>
+                  <a:srgbClr val="0077FF"/>
                 </a:solidFill>
                 <a:latin typeface="Play"/>
                 <a:ea typeface="Play"/>
                 <a:cs typeface="Play"/>
               </a:rPr>
-              <a:t>• Сборка одной презентации занимает 186 мин</a:t>
+              <a:t>12</a:t>
             </a:r>
           </a:p>
           <a:p>
-            <a:pPr algn="l">
+            <a:pPr>
               <a:spcAft>
                 <a:spcPts val="300"/>
               </a:spcAft>
-              <a:defRPr sz="2400">
+              <a:defRPr sz="3200" b="0">
                 <a:solidFill>
                   <a:srgbClr val="000000"/>
                 </a:solidFill>
@@ -10126,7 +9745,7 @@
               </a:defRPr>
             </a:pPr>
             <a:r>
-              <a:rPr sz="2400">
+              <a:rPr sz="3200" b="0">
                 <a:solidFill>
                   <a:srgbClr val="000000"/>
                 </a:solidFill>
@@ -10134,17 +9753,87 @@
                 <a:ea typeface="Play"/>
                 <a:cs typeface="Play"/>
               </a:rPr>
-              <a:t>• 74 мин уходит на правки после ревью</a:t>
+              <a:t>12 слайдов в каждой колоде</a:t>
             </a:r>
           </a:p>
+        </p:txBody>
+      </p:sp>
+      <p:sp>
+        <p:nvSpPr>
+          <p:cNvPr id="5" name="stat_1:bar"/>
+          <p:cNvSpPr/>
+          <p:nvPr/>
+        </p:nvSpPr>
+        <p:spPr>
+          <a:xfrm>
+            <a:off x="3499915" y="2453159"/>
+            <a:ext cx="50800" cy="2121408"/>
+          </a:xfrm>
+          <a:prstGeom prst="rect">
+            <a:avLst/>
+          </a:prstGeom>
+          <a:solidFill>
+            <a:srgbClr val="0077FF"/>
+          </a:solidFill>
+          <a:ln>
+            <a:noFill/>
+          </a:ln>
+          <a:effectLst/>
+        </p:spPr>
+        <p:style>
+          <a:lnRef idx="1">
+            <a:schemeClr val="accent1"/>
+          </a:lnRef>
+          <a:fillRef idx="3">
+            <a:schemeClr val="accent1"/>
+          </a:fillRef>
+          <a:effectRef idx="2">
+            <a:schemeClr val="accent1"/>
+          </a:effectRef>
+          <a:fontRef idx="minor">
+            <a:schemeClr val="lt1"/>
+          </a:fontRef>
+        </p:style>
+        <p:txBody>
+          <a:bodyPr rtlCol="0" anchor="ctr"/>
+          <a:lstStyle/>
           <a:p>
-            <a:pPr algn="l">
-              <a:spcAft>
-                <a:spcPts val="300"/>
-              </a:spcAft>
-              <a:defRPr sz="2400">
-                <a:solidFill>
-                  <a:srgbClr val="000000"/>
+            <a:pPr algn="ctr"/>
+          </a:p>
+        </p:txBody>
+      </p:sp>
+      <p:sp>
+        <p:nvSpPr>
+          <p:cNvPr id="6" name="stat_1"/>
+          <p:cNvSpPr txBox="1"/>
+          <p:nvPr/>
+        </p:nvSpPr>
+        <p:spPr>
+          <a:xfrm>
+            <a:off x="3677715" y="2380007"/>
+            <a:ext cx="2210493" cy="2194560"/>
+          </a:xfrm>
+          <a:prstGeom prst="rect">
+            <a:avLst/>
+          </a:prstGeom>
+          <a:noFill/>
+        </p:spPr>
+        <p:txBody>
+          <a:bodyPr wrap="square" lIns="76200" rIns="76200" tIns="0" bIns="0">
+            <a:spAutoFit/>
+          </a:bodyPr>
+          <a:lstStyle/>
+          <a:p>
+            <a:pPr>
+              <a:lnSpc>
+                <a:spcPct val="100000"/>
+              </a:lnSpc>
+              <a:spcAft>
+                <a:spcPts val="200"/>
+              </a:spcAft>
+              <a:defRPr sz="3200" b="1">
+                <a:solidFill>
+                  <a:srgbClr val="0077FF"/>
                 </a:solidFill>
                 <a:latin typeface="Play"/>
                 <a:ea typeface="Play"/>
@@ -10152,37 +9841,289 @@
               </a:defRPr>
             </a:pPr>
             <a:r>
-              <a:rPr sz="2400">
-                <a:solidFill>
-                  <a:srgbClr val="000000"/>
+              <a:rPr sz="3200" b="1">
+                <a:solidFill>
+                  <a:srgbClr val="0077FF"/>
                 </a:solidFill>
                 <a:latin typeface="Play"/>
                 <a:ea typeface="Play"/>
                 <a:cs typeface="Play"/>
               </a:rPr>
-              <a:t>• 19 из 42 колод нарушают фирменный стиль</a:t>
+              <a:t>74 мин</a:t>
+            </a:r>
+          </a:p>
+          <a:p>
+            <a:pPr>
+              <a:spcAft>
+                <a:spcPts val="300"/>
+              </a:spcAft>
+              <a:defRPr sz="3200" b="0">
+                <a:solidFill>
+                  <a:srgbClr val="000000"/>
+                </a:solidFill>
+                <a:latin typeface="Play"/>
+                <a:ea typeface="Play"/>
+                <a:cs typeface="Play"/>
+              </a:defRPr>
+            </a:pPr>
+            <a:r>
+              <a:rPr sz="3200" b="0">
+                <a:solidFill>
+                  <a:srgbClr val="000000"/>
+                </a:solidFill>
+                <a:latin typeface="Play"/>
+                <a:ea typeface="Play"/>
+                <a:cs typeface="Play"/>
+              </a:rPr>
+              <a:t>74 минуты на правки</a:t>
             </a:r>
           </a:p>
         </p:txBody>
       </p:sp>
-      <p:graphicFrame>
-        <p:nvGraphicFramePr>
-          <p:cNvPr id="4" name="Chart 3"/>
-          <p:cNvGraphicFramePr>
-            <a:graphicFrameLocks noGrp="1"/>
-          </p:cNvGraphicFramePr>
+      <p:sp>
+        <p:nvSpPr>
+          <p:cNvPr id="7" name="stat_2:bar"/>
+          <p:cNvSpPr/>
           <p:nvPr/>
-        </p:nvGraphicFramePr>
-        <p:xfrm>
-          <a:off x="677387" y="3295650"/>
-          <a:ext cx="10855878" cy="2905147"/>
-        </p:xfrm>
-        <a:graphic>
-          <a:graphicData uri="http://schemas.openxmlformats.org/drawingml/2006/chart">
-            <c:chart xmlns:c="http://schemas.openxmlformats.org/drawingml/2006/chart" r:id="rId2"/>
-          </a:graphicData>
-        </a:graphic>
-      </p:graphicFrame>
+        </p:nvSpPr>
+        <p:spPr>
+          <a:xfrm>
+            <a:off x="6322444" y="2453159"/>
+            <a:ext cx="50800" cy="2121408"/>
+          </a:xfrm>
+          <a:prstGeom prst="rect">
+            <a:avLst/>
+          </a:prstGeom>
+          <a:solidFill>
+            <a:srgbClr val="0077FF"/>
+          </a:solidFill>
+          <a:ln>
+            <a:noFill/>
+          </a:ln>
+          <a:effectLst/>
+        </p:spPr>
+        <p:style>
+          <a:lnRef idx="1">
+            <a:schemeClr val="accent1"/>
+          </a:lnRef>
+          <a:fillRef idx="3">
+            <a:schemeClr val="accent1"/>
+          </a:fillRef>
+          <a:effectRef idx="2">
+            <a:schemeClr val="accent1"/>
+          </a:effectRef>
+          <a:fontRef idx="minor">
+            <a:schemeClr val="lt1"/>
+          </a:fontRef>
+        </p:style>
+        <p:txBody>
+          <a:bodyPr rtlCol="0" anchor="ctr"/>
+          <a:lstStyle/>
+          <a:p>
+            <a:pPr algn="ctr"/>
+          </a:p>
+        </p:txBody>
+      </p:sp>
+      <p:sp>
+        <p:nvSpPr>
+          <p:cNvPr id="8" name="stat_2"/>
+          <p:cNvSpPr txBox="1"/>
+          <p:nvPr/>
+        </p:nvSpPr>
+        <p:spPr>
+          <a:xfrm>
+            <a:off x="6500244" y="2380007"/>
+            <a:ext cx="2210493" cy="2194560"/>
+          </a:xfrm>
+          <a:prstGeom prst="rect">
+            <a:avLst/>
+          </a:prstGeom>
+          <a:noFill/>
+        </p:spPr>
+        <p:txBody>
+          <a:bodyPr wrap="square" lIns="76200" rIns="76200" tIns="0" bIns="0">
+            <a:spAutoFit/>
+          </a:bodyPr>
+          <a:lstStyle/>
+          <a:p>
+            <a:pPr>
+              <a:lnSpc>
+                <a:spcPct val="100000"/>
+              </a:lnSpc>
+              <a:spcAft>
+                <a:spcPts val="200"/>
+              </a:spcAft>
+              <a:defRPr sz="3200" b="1">
+                <a:solidFill>
+                  <a:srgbClr val="0077FF"/>
+                </a:solidFill>
+                <a:latin typeface="Play"/>
+                <a:ea typeface="Play"/>
+                <a:cs typeface="Play"/>
+              </a:defRPr>
+            </a:pPr>
+            <a:r>
+              <a:rPr sz="3200" b="1">
+                <a:solidFill>
+                  <a:srgbClr val="0077FF"/>
+                </a:solidFill>
+                <a:latin typeface="Play"/>
+                <a:ea typeface="Play"/>
+                <a:cs typeface="Play"/>
+              </a:rPr>
+              <a:t>19 из 42</a:t>
+            </a:r>
+          </a:p>
+          <a:p>
+            <a:pPr>
+              <a:spcAft>
+                <a:spcPts val="300"/>
+              </a:spcAft>
+              <a:defRPr sz="3200" b="0">
+                <a:solidFill>
+                  <a:srgbClr val="000000"/>
+                </a:solidFill>
+                <a:latin typeface="Play"/>
+                <a:ea typeface="Play"/>
+                <a:cs typeface="Play"/>
+              </a:defRPr>
+            </a:pPr>
+            <a:r>
+              <a:rPr sz="3200" b="0">
+                <a:solidFill>
+                  <a:srgbClr val="000000"/>
+                </a:solidFill>
+                <a:latin typeface="Play"/>
+                <a:ea typeface="Play"/>
+                <a:cs typeface="Play"/>
+              </a:rPr>
+              <a:t>19 из 42 нарушили стиль</a:t>
+            </a:r>
+          </a:p>
+        </p:txBody>
+      </p:sp>
+      <p:sp>
+        <p:nvSpPr>
+          <p:cNvPr id="9" name="stat_3:bar"/>
+          <p:cNvSpPr/>
+          <p:nvPr/>
+        </p:nvSpPr>
+        <p:spPr>
+          <a:xfrm>
+            <a:off x="9144972" y="2453159"/>
+            <a:ext cx="50800" cy="1593087"/>
+          </a:xfrm>
+          <a:prstGeom prst="rect">
+            <a:avLst/>
+          </a:prstGeom>
+          <a:solidFill>
+            <a:srgbClr val="0077FF"/>
+          </a:solidFill>
+          <a:ln>
+            <a:noFill/>
+          </a:ln>
+          <a:effectLst/>
+        </p:spPr>
+        <p:style>
+          <a:lnRef idx="1">
+            <a:schemeClr val="accent1"/>
+          </a:lnRef>
+          <a:fillRef idx="3">
+            <a:schemeClr val="accent1"/>
+          </a:fillRef>
+          <a:effectRef idx="2">
+            <a:schemeClr val="accent1"/>
+          </a:effectRef>
+          <a:fontRef idx="minor">
+            <a:schemeClr val="lt1"/>
+          </a:fontRef>
+        </p:style>
+        <p:txBody>
+          <a:bodyPr rtlCol="0" anchor="ctr"/>
+          <a:lstStyle/>
+          <a:p>
+            <a:pPr algn="ctr"/>
+          </a:p>
+        </p:txBody>
+      </p:sp>
+      <p:sp>
+        <p:nvSpPr>
+          <p:cNvPr id="10" name="stat_3"/>
+          <p:cNvSpPr txBox="1"/>
+          <p:nvPr/>
+        </p:nvSpPr>
+        <p:spPr>
+          <a:xfrm>
+            <a:off x="9322772" y="2380007"/>
+            <a:ext cx="2210493" cy="1666239"/>
+          </a:xfrm>
+          <a:prstGeom prst="rect">
+            <a:avLst/>
+          </a:prstGeom>
+          <a:noFill/>
+        </p:spPr>
+        <p:txBody>
+          <a:bodyPr wrap="square" lIns="76200" rIns="76200" tIns="0" bIns="0">
+            <a:spAutoFit/>
+          </a:bodyPr>
+          <a:lstStyle/>
+          <a:p>
+            <a:pPr>
+              <a:lnSpc>
+                <a:spcPct val="100000"/>
+              </a:lnSpc>
+              <a:spcAft>
+                <a:spcPts val="200"/>
+              </a:spcAft>
+              <a:defRPr sz="3200" b="1">
+                <a:solidFill>
+                  <a:srgbClr val="0077FF"/>
+                </a:solidFill>
+                <a:latin typeface="Play"/>
+                <a:ea typeface="Play"/>
+                <a:cs typeface="Play"/>
+              </a:defRPr>
+            </a:pPr>
+            <a:r>
+              <a:rPr sz="3200" b="1">
+                <a:solidFill>
+                  <a:srgbClr val="0077FF"/>
+                </a:solidFill>
+                <a:latin typeface="Play"/>
+                <a:ea typeface="Play"/>
+                <a:cs typeface="Play"/>
+              </a:rPr>
+              <a:t>186 мин</a:t>
+            </a:r>
+          </a:p>
+          <a:p>
+            <a:pPr>
+              <a:spcAft>
+                <a:spcPts val="300"/>
+              </a:spcAft>
+              <a:defRPr sz="3200" b="0">
+                <a:solidFill>
+                  <a:srgbClr val="000000"/>
+                </a:solidFill>
+                <a:latin typeface="Play"/>
+                <a:ea typeface="Play"/>
+                <a:cs typeface="Play"/>
+              </a:defRPr>
+            </a:pPr>
+            <a:r>
+              <a:rPr sz="3200" b="0">
+                <a:solidFill>
+                  <a:srgbClr val="000000"/>
+                </a:solidFill>
+                <a:latin typeface="Play"/>
+                <a:ea typeface="Play"/>
+                <a:cs typeface="Play"/>
+              </a:rPr>
+              <a:t>Сборка 186 минут</a:t>
+            </a:r>
+          </a:p>
+        </p:txBody>
+      </p:sp>
     </p:spTree>
   </p:cSld>
   <p:clrMapOvr>
@@ -10217,7 +10158,7 @@
         <p:spPr>
           <a:xfrm>
             <a:off x="677387" y="692177"/>
-            <a:ext cx="10855878" cy="822960"/>
+            <a:ext cx="10855878" cy="1447800"/>
           </a:xfrm>
           <a:prstGeom prst="rect">
             <a:avLst/>
@@ -10252,7 +10193,447 @@
                 <a:ea typeface="Arial"/>
                 <a:cs typeface="Arial"/>
               </a:rPr>
-              <a:t>Предложение</a:t>
+              <a:t>Дизайн-отдел из 4 человек обслуживает 11 запросов в неделю</a:t>
+            </a:r>
+          </a:p>
+        </p:txBody>
+      </p:sp>
+      <p:sp>
+        <p:nvSpPr>
+          <p:cNvPr id="3" name="stat_0:bar"/>
+          <p:cNvSpPr/>
+          <p:nvPr/>
+        </p:nvSpPr>
+        <p:spPr>
+          <a:xfrm>
+            <a:off x="677387" y="3079225"/>
+            <a:ext cx="50800" cy="1942592"/>
+          </a:xfrm>
+          <a:prstGeom prst="rect">
+            <a:avLst/>
+          </a:prstGeom>
+          <a:solidFill>
+            <a:srgbClr val="0077FF"/>
+          </a:solidFill>
+          <a:ln>
+            <a:noFill/>
+          </a:ln>
+          <a:effectLst/>
+        </p:spPr>
+        <p:style>
+          <a:lnRef idx="1">
+            <a:schemeClr val="accent1"/>
+          </a:lnRef>
+          <a:fillRef idx="3">
+            <a:schemeClr val="accent1"/>
+          </a:fillRef>
+          <a:effectRef idx="2">
+            <a:schemeClr val="accent1"/>
+          </a:effectRef>
+          <a:fontRef idx="minor">
+            <a:schemeClr val="lt1"/>
+          </a:fontRef>
+        </p:style>
+        <p:txBody>
+          <a:bodyPr rtlCol="0" anchor="ctr"/>
+          <a:lstStyle/>
+          <a:p>
+            <a:pPr algn="ctr"/>
+          </a:p>
+        </p:txBody>
+      </p:sp>
+      <p:sp>
+        <p:nvSpPr>
+          <p:cNvPr id="4" name="stat_0"/>
+          <p:cNvSpPr txBox="1"/>
+          <p:nvPr/>
+        </p:nvSpPr>
+        <p:spPr>
+          <a:xfrm>
+            <a:off x="855187" y="2969497"/>
+            <a:ext cx="3151336" cy="2052320"/>
+          </a:xfrm>
+          <a:prstGeom prst="rect">
+            <a:avLst/>
+          </a:prstGeom>
+          <a:noFill/>
+        </p:spPr>
+        <p:txBody>
+          <a:bodyPr wrap="square" lIns="76200" rIns="76200" tIns="0" bIns="0">
+            <a:spAutoFit/>
+          </a:bodyPr>
+          <a:lstStyle/>
+          <a:p>
+            <a:pPr>
+              <a:lnSpc>
+                <a:spcPct val="100000"/>
+              </a:lnSpc>
+              <a:spcAft>
+                <a:spcPts val="200"/>
+              </a:spcAft>
+              <a:defRPr sz="4800" b="1">
+                <a:solidFill>
+                  <a:srgbClr val="0077FF"/>
+                </a:solidFill>
+                <a:latin typeface="Play"/>
+                <a:ea typeface="Play"/>
+                <a:cs typeface="Play"/>
+              </a:defRPr>
+            </a:pPr>
+            <a:r>
+              <a:rPr sz="4800" b="1">
+                <a:solidFill>
+                  <a:srgbClr val="0077FF"/>
+                </a:solidFill>
+                <a:latin typeface="Play"/>
+                <a:ea typeface="Play"/>
+                <a:cs typeface="Play"/>
+              </a:rPr>
+              <a:t>11</a:t>
+            </a:r>
+          </a:p>
+          <a:p>
+            <a:pPr>
+              <a:spcAft>
+                <a:spcPts val="300"/>
+              </a:spcAft>
+              <a:defRPr sz="2400" b="0">
+                <a:solidFill>
+                  <a:srgbClr val="000000"/>
+                </a:solidFill>
+                <a:latin typeface="Play"/>
+                <a:ea typeface="Play"/>
+                <a:cs typeface="Play"/>
+              </a:defRPr>
+            </a:pPr>
+            <a:r>
+              <a:rPr sz="2400" b="0">
+                <a:solidFill>
+                  <a:srgbClr val="000000"/>
+                </a:solidFill>
+                <a:latin typeface="Play"/>
+                <a:ea typeface="Play"/>
+                <a:cs typeface="Play"/>
+              </a:rPr>
+              <a:t>4 человека обслуживают 11 запросов в неделю</a:t>
+            </a:r>
+          </a:p>
+        </p:txBody>
+      </p:sp>
+      <p:sp>
+        <p:nvSpPr>
+          <p:cNvPr id="5" name="stat_1:bar"/>
+          <p:cNvSpPr/>
+          <p:nvPr/>
+        </p:nvSpPr>
+        <p:spPr>
+          <a:xfrm>
+            <a:off x="4440758" y="3079225"/>
+            <a:ext cx="50800" cy="1546352"/>
+          </a:xfrm>
+          <a:prstGeom prst="rect">
+            <a:avLst/>
+          </a:prstGeom>
+          <a:solidFill>
+            <a:srgbClr val="0077FF"/>
+          </a:solidFill>
+          <a:ln>
+            <a:noFill/>
+          </a:ln>
+          <a:effectLst/>
+        </p:spPr>
+        <p:style>
+          <a:lnRef idx="1">
+            <a:schemeClr val="accent1"/>
+          </a:lnRef>
+          <a:fillRef idx="3">
+            <a:schemeClr val="accent1"/>
+          </a:fillRef>
+          <a:effectRef idx="2">
+            <a:schemeClr val="accent1"/>
+          </a:effectRef>
+          <a:fontRef idx="minor">
+            <a:schemeClr val="lt1"/>
+          </a:fontRef>
+        </p:style>
+        <p:txBody>
+          <a:bodyPr rtlCol="0" anchor="ctr"/>
+          <a:lstStyle/>
+          <a:p>
+            <a:pPr algn="ctr"/>
+          </a:p>
+        </p:txBody>
+      </p:sp>
+      <p:sp>
+        <p:nvSpPr>
+          <p:cNvPr id="6" name="stat_1"/>
+          <p:cNvSpPr txBox="1"/>
+          <p:nvPr/>
+        </p:nvSpPr>
+        <p:spPr>
+          <a:xfrm>
+            <a:off x="4618558" y="2969497"/>
+            <a:ext cx="3151336" cy="1656080"/>
+          </a:xfrm>
+          <a:prstGeom prst="rect">
+            <a:avLst/>
+          </a:prstGeom>
+          <a:noFill/>
+        </p:spPr>
+        <p:txBody>
+          <a:bodyPr wrap="square" lIns="76200" rIns="76200" tIns="0" bIns="0">
+            <a:spAutoFit/>
+          </a:bodyPr>
+          <a:lstStyle/>
+          <a:p>
+            <a:pPr>
+              <a:lnSpc>
+                <a:spcPct val="100000"/>
+              </a:lnSpc>
+              <a:spcAft>
+                <a:spcPts val="200"/>
+              </a:spcAft>
+              <a:defRPr sz="4800" b="1">
+                <a:solidFill>
+                  <a:srgbClr val="0077FF"/>
+                </a:solidFill>
+                <a:latin typeface="Play"/>
+                <a:ea typeface="Play"/>
+                <a:cs typeface="Play"/>
+              </a:defRPr>
+            </a:pPr>
+            <a:r>
+              <a:rPr sz="4800" b="1">
+                <a:solidFill>
+                  <a:srgbClr val="0077FF"/>
+                </a:solidFill>
+                <a:latin typeface="Play"/>
+                <a:ea typeface="Play"/>
+                <a:cs typeface="Play"/>
+              </a:rPr>
+              <a:t>27</a:t>
+            </a:r>
+          </a:p>
+          <a:p>
+            <a:pPr>
+              <a:spcAft>
+                <a:spcPts val="300"/>
+              </a:spcAft>
+              <a:defRPr sz="2400" b="0">
+                <a:solidFill>
+                  <a:srgbClr val="000000"/>
+                </a:solidFill>
+                <a:latin typeface="Play"/>
+                <a:ea typeface="Play"/>
+                <a:cs typeface="Play"/>
+              </a:defRPr>
+            </a:pPr>
+            <a:r>
+              <a:rPr sz="2400" b="0">
+                <a:solidFill>
+                  <a:srgbClr val="000000"/>
+                </a:solidFill>
+                <a:latin typeface="Play"/>
+                <a:ea typeface="Play"/>
+                <a:cs typeface="Play"/>
+              </a:rPr>
+              <a:t>27 поступающих запросов</a:t>
+            </a:r>
+          </a:p>
+        </p:txBody>
+      </p:sp>
+      <p:sp>
+        <p:nvSpPr>
+          <p:cNvPr id="7" name="stat_2:bar"/>
+          <p:cNvSpPr/>
+          <p:nvPr/>
+        </p:nvSpPr>
+        <p:spPr>
+          <a:xfrm>
+            <a:off x="8204130" y="3079225"/>
+            <a:ext cx="50800" cy="1546352"/>
+          </a:xfrm>
+          <a:prstGeom prst="rect">
+            <a:avLst/>
+          </a:prstGeom>
+          <a:solidFill>
+            <a:srgbClr val="0077FF"/>
+          </a:solidFill>
+          <a:ln>
+            <a:noFill/>
+          </a:ln>
+          <a:effectLst/>
+        </p:spPr>
+        <p:style>
+          <a:lnRef idx="1">
+            <a:schemeClr val="accent1"/>
+          </a:lnRef>
+          <a:fillRef idx="3">
+            <a:schemeClr val="accent1"/>
+          </a:fillRef>
+          <a:effectRef idx="2">
+            <a:schemeClr val="accent1"/>
+          </a:effectRef>
+          <a:fontRef idx="minor">
+            <a:schemeClr val="lt1"/>
+          </a:fontRef>
+        </p:style>
+        <p:txBody>
+          <a:bodyPr rtlCol="0" anchor="ctr"/>
+          <a:lstStyle/>
+          <a:p>
+            <a:pPr algn="ctr"/>
+          </a:p>
+        </p:txBody>
+      </p:sp>
+      <p:sp>
+        <p:nvSpPr>
+          <p:cNvPr id="8" name="stat_2"/>
+          <p:cNvSpPr txBox="1"/>
+          <p:nvPr/>
+        </p:nvSpPr>
+        <p:spPr>
+          <a:xfrm>
+            <a:off x="8381930" y="2969497"/>
+            <a:ext cx="3151336" cy="1656080"/>
+          </a:xfrm>
+          <a:prstGeom prst="rect">
+            <a:avLst/>
+          </a:prstGeom>
+          <a:noFill/>
+        </p:spPr>
+        <p:txBody>
+          <a:bodyPr wrap="square" lIns="76200" rIns="76200" tIns="0" bIns="0">
+            <a:spAutoFit/>
+          </a:bodyPr>
+          <a:lstStyle/>
+          <a:p>
+            <a:pPr>
+              <a:lnSpc>
+                <a:spcPct val="100000"/>
+              </a:lnSpc>
+              <a:spcAft>
+                <a:spcPts val="200"/>
+              </a:spcAft>
+              <a:defRPr sz="4800" b="1">
+                <a:solidFill>
+                  <a:srgbClr val="0077FF"/>
+                </a:solidFill>
+                <a:latin typeface="Play"/>
+                <a:ea typeface="Play"/>
+                <a:cs typeface="Play"/>
+              </a:defRPr>
+            </a:pPr>
+            <a:r>
+              <a:rPr sz="4800" b="1">
+                <a:solidFill>
+                  <a:srgbClr val="0077FF"/>
+                </a:solidFill>
+                <a:latin typeface="Play"/>
+                <a:ea typeface="Play"/>
+                <a:cs typeface="Play"/>
+              </a:rPr>
+              <a:t>6 дней</a:t>
+            </a:r>
+          </a:p>
+          <a:p>
+            <a:pPr>
+              <a:spcAft>
+                <a:spcPts val="300"/>
+              </a:spcAft>
+              <a:defRPr sz="2400" b="0">
+                <a:solidFill>
+                  <a:srgbClr val="000000"/>
+                </a:solidFill>
+                <a:latin typeface="Play"/>
+                <a:ea typeface="Play"/>
+                <a:cs typeface="Play"/>
+              </a:defRPr>
+            </a:pPr>
+            <a:r>
+              <a:rPr sz="2400" b="0">
+                <a:solidFill>
+                  <a:srgbClr val="000000"/>
+                </a:solidFill>
+                <a:latin typeface="Play"/>
+                <a:ea typeface="Play"/>
+                <a:cs typeface="Play"/>
+              </a:rPr>
+              <a:t>Средний срок ожидания 6 дней</a:t>
+            </a:r>
+          </a:p>
+        </p:txBody>
+      </p:sp>
+    </p:spTree>
+  </p:cSld>
+  <p:clrMapOvr>
+    <a:masterClrMapping/>
+  </p:clrMapOvr>
+</p:sld>
+</file>
+
+<file path=ppt/slides/slide59.xml><?xml version="1.0" encoding="utf-8"?>
+<p:sld xmlns:a="http://schemas.openxmlformats.org/drawingml/2006/main" xmlns:p="http://schemas.openxmlformats.org/presentationml/2006/main" xmlns:r="http://schemas.openxmlformats.org/officeDocument/2006/relationships">
+  <p:cSld>
+    <p:bg>
+      <p:bgPr>
+        <a:solidFill>
+          <a:schemeClr val="lt2"/>
+        </a:solidFill>
+      </p:bgPr>
+    </p:bg>
+    <p:spTree>
+      <p:nvGrpSpPr>
+        <p:cNvPr id="1" name=""/>
+        <p:cNvGrpSpPr/>
+        <p:nvPr/>
+      </p:nvGrpSpPr>
+      <p:grpSpPr/>
+      <p:sp>
+        <p:nvSpPr>
+          <p:cNvPr id="2" name="title"/>
+          <p:cNvSpPr txBox="1"/>
+          <p:nvPr/>
+        </p:nvSpPr>
+        <p:spPr>
+          <a:xfrm>
+            <a:off x="677387" y="692177"/>
+            <a:ext cx="10855878" cy="1447800"/>
+          </a:xfrm>
+          <a:prstGeom prst="rect">
+            <a:avLst/>
+          </a:prstGeom>
+          <a:noFill/>
+        </p:spPr>
+        <p:txBody>
+          <a:bodyPr wrap="square" lIns="76200" rIns="76200" tIns="50800" bIns="50800">
+            <a:spAutoFit/>
+          </a:bodyPr>
+          <a:lstStyle/>
+          <a:p>
+            <a:pPr algn="l">
+              <a:spcAft>
+                <a:spcPts val="300"/>
+              </a:spcAft>
+              <a:defRPr sz="4000">
+                <a:solidFill>
+                  <a:srgbClr val="000000"/>
+                </a:solidFill>
+                <a:latin typeface="Arial"/>
+                <a:ea typeface="Arial"/>
+                <a:cs typeface="Arial"/>
+              </a:defRPr>
+            </a:pPr>
+            <a:r>
+              <a:rPr sz="4000">
+                <a:solidFill>
+                  <a:srgbClr val="000000"/>
+                </a:solidFill>
+                <a:latin typeface="Arial"/>
+                <a:ea typeface="Arial"/>
+                <a:cs typeface="Arial"/>
+              </a:rPr>
+              <a:t>Сервис автоматической вёрстки: 4 минуты вместо 186</a:t>
             </a:r>
           </a:p>
         </p:txBody>
@@ -10265,9 +10646,9 @@
         </p:nvGrpSpPr>
         <p:grpSpPr>
           <a:xfrm>
-            <a:off x="750253" y="1855946"/>
+            <a:off x="750253" y="2452873"/>
             <a:ext cx="437197" cy="437197"/>
-            <a:chOff x="750253" y="1855946"/>
+            <a:chOff x="750253" y="2452873"/>
             <a:chExt cx="437197" cy="437197"/>
           </a:xfrm>
         </p:grpSpPr>
@@ -10279,7 +10660,7 @@
           </p:nvSpPr>
           <p:spPr>
             <a:xfrm>
-              <a:off x="750253" y="1855946"/>
+              <a:off x="750253" y="2452873"/>
               <a:ext cx="437197" cy="437197"/>
             </a:xfrm>
             <a:prstGeom prst="roundRect">
@@ -10326,7 +10707,7 @@
           </p:nvSpPr>
           <p:spPr>
             <a:xfrm>
-              <a:off x="750253" y="2001678"/>
+              <a:off x="750253" y="2598605"/>
               <a:ext cx="437197" cy="0"/>
             </a:xfrm>
             <a:custGeom>
@@ -10385,7 +10766,7 @@
           </p:nvSpPr>
           <p:spPr>
             <a:xfrm>
-              <a:off x="895985" y="2001678"/>
+              <a:off x="895985" y="2598605"/>
               <a:ext cx="0" cy="291465"/>
             </a:xfrm>
             <a:custGeom>
@@ -10445,8 +10826,8 @@
         </p:nvSpPr>
         <p:spPr>
           <a:xfrm>
-            <a:off x="1522636" y="1792605"/>
-            <a:ext cx="10010630" cy="1325887"/>
+            <a:off x="1522636" y="2422552"/>
+            <a:ext cx="10010630" cy="775492"/>
           </a:xfrm>
           <a:prstGeom prst="rect">
             <a:avLst/>
@@ -10463,7 +10844,7 @@
               <a:spcAft>
                 <a:spcPts val="300"/>
               </a:spcAft>
-              <a:defRPr sz="2800">
+              <a:defRPr sz="2400">
                 <a:solidFill>
                   <a:srgbClr val="000000"/>
                 </a:solidFill>
@@ -10473,7 +10854,7 @@
               </a:defRPr>
             </a:pPr>
             <a:r>
-              <a:rPr sz="2800">
+              <a:rPr sz="2400">
                 <a:solidFill>
                   <a:srgbClr val="000000"/>
                 </a:solidFill>
@@ -10481,41 +10862,120 @@
                 <a:ea typeface="Play"/>
                 <a:cs typeface="Play"/>
               </a:rPr>
-              <a:t>Сервис принимает шаблон pptx и материалы</a:t>
+              <a:t>Принимает шаблон pptx и материалы</a:t>
             </a:r>
           </a:p>
         </p:txBody>
       </p:sp>
       <p:grpSp>
         <p:nvGrpSpPr>
-          <p:cNvPr id="8" name="icon:builtin-presentation"/>
+          <p:cNvPr id="8" name="icon:builtin-gears"/>
           <p:cNvGrpSpPr/>
           <p:nvPr/>
         </p:nvGrpSpPr>
         <p:grpSpPr>
           <a:xfrm>
-            <a:off x="750253" y="3352807"/>
-            <a:ext cx="437197" cy="388620"/>
-            <a:chOff x="750253" y="3352807"/>
-            <a:chExt cx="437197" cy="388620"/>
+            <a:off x="761183" y="3430416"/>
+            <a:ext cx="444484" cy="433312"/>
+            <a:chOff x="761183" y="3430416"/>
+            <a:chExt cx="444484" cy="433312"/>
           </a:xfrm>
         </p:grpSpPr>
         <p:sp>
           <p:nvSpPr>
-            <p:cNvPr id="9" name="Rounded Rectangle 8"/>
+            <p:cNvPr id="9" name="Freeform 8"/>
             <p:cNvSpPr/>
             <p:nvPr/>
           </p:nvSpPr>
           <p:spPr>
             <a:xfrm>
-              <a:off x="750253" y="3352807"/>
-              <a:ext cx="437197" cy="291465"/>
+              <a:off x="761183" y="3430416"/>
+              <a:ext cx="318182" cy="295352"/>
             </a:xfrm>
-            <a:prstGeom prst="roundRect">
-              <a:avLst>
-                <a:gd name="adj" fmla="val 12500"/>
-              </a:avLst>
-            </a:prstGeom>
+            <a:custGeom>
+              <a:avLst/>
+              <a:gdLst/>
+              <a:ahLst/>
+              <a:cxnLst/>
+              <a:rect l="l" t="t" r="r" b="b"/>
+              <a:pathLst>
+                <a:path w="318182" h="295352">
+                  <a:moveTo>
+                    <a:pt x="267905" y="122173"/>
+                  </a:moveTo>
+                  <a:lnTo>
+                    <a:pt x="318182" y="127516"/>
+                  </a:lnTo>
+                  <a:lnTo>
+                    <a:pt x="318182" y="167836"/>
+                  </a:lnTo>
+                  <a:lnTo>
+                    <a:pt x="267905" y="173179"/>
+                  </a:lnTo>
+                  <a:lnTo>
+                    <a:pt x="235601" y="229043"/>
+                  </a:lnTo>
+                  <a:lnTo>
+                    <a:pt x="256003" y="275435"/>
+                  </a:lnTo>
+                  <a:lnTo>
+                    <a:pt x="221270" y="295352"/>
+                  </a:lnTo>
+                  <a:lnTo>
+                    <a:pt x="191395" y="254547"/>
+                  </a:lnTo>
+                  <a:lnTo>
+                    <a:pt x="126787" y="254547"/>
+                  </a:lnTo>
+                  <a:lnTo>
+                    <a:pt x="96912" y="295352"/>
+                  </a:lnTo>
+                  <a:lnTo>
+                    <a:pt x="62179" y="275435"/>
+                  </a:lnTo>
+                  <a:lnTo>
+                    <a:pt x="82581" y="229043"/>
+                  </a:lnTo>
+                  <a:lnTo>
+                    <a:pt x="50277" y="173179"/>
+                  </a:lnTo>
+                  <a:lnTo>
+                    <a:pt x="0" y="167836"/>
+                  </a:lnTo>
+                  <a:lnTo>
+                    <a:pt x="0" y="127516"/>
+                  </a:lnTo>
+                  <a:lnTo>
+                    <a:pt x="50277" y="122173"/>
+                  </a:lnTo>
+                  <a:lnTo>
+                    <a:pt x="82581" y="66309"/>
+                  </a:lnTo>
+                  <a:lnTo>
+                    <a:pt x="62179" y="19917"/>
+                  </a:lnTo>
+                  <a:lnTo>
+                    <a:pt x="96912" y="0"/>
+                  </a:lnTo>
+                  <a:lnTo>
+                    <a:pt x="126787" y="40806"/>
+                  </a:lnTo>
+                  <a:lnTo>
+                    <a:pt x="191395" y="40806"/>
+                  </a:lnTo>
+                  <a:lnTo>
+                    <a:pt x="221270" y="0"/>
+                  </a:lnTo>
+                  <a:lnTo>
+                    <a:pt x="256003" y="19917"/>
+                  </a:lnTo>
+                  <a:lnTo>
+                    <a:pt x="235601" y="66309"/>
+                  </a:lnTo>
+                  <a:close/>
+                </a:path>
+              </a:pathLst>
+            </a:custGeom>
             <a:noFill/>
             <a:ln w="48577" cap="rnd">
               <a:solidFill>
@@ -10549,32 +11009,18 @@
         </p:sp>
         <p:sp>
           <p:nvSpPr>
-            <p:cNvPr id="10" name="Freeform 9"/>
+            <p:cNvPr id="10" name="Oval 9"/>
             <p:cNvSpPr/>
             <p:nvPr/>
           </p:nvSpPr>
           <p:spPr>
             <a:xfrm>
-              <a:off x="968852" y="3644272"/>
-              <a:ext cx="0" cy="97155"/>
+              <a:off x="871697" y="3529515"/>
+              <a:ext cx="97155" cy="97155"/>
             </a:xfrm>
-            <a:custGeom>
+            <a:prstGeom prst="ellipse">
               <a:avLst/>
-              <a:gdLst/>
-              <a:ahLst/>
-              <a:cxnLst/>
-              <a:rect l="l" t="t" r="r" b="b"/>
-              <a:pathLst>
-                <a:path w="0" h="97155">
-                  <a:moveTo>
-                    <a:pt x="0" y="0"/>
-                  </a:moveTo>
-                  <a:lnTo>
-                    <a:pt x="0" y="97155"/>
-                  </a:lnTo>
-                </a:path>
-              </a:pathLst>
-            </a:custGeom>
+            </a:prstGeom>
             <a:noFill/>
             <a:ln w="48577" cap="rnd">
               <a:solidFill>
@@ -10614,8 +11060,8 @@
           </p:nvSpPr>
           <p:spPr>
             <a:xfrm>
-              <a:off x="871697" y="3741427"/>
-              <a:ext cx="194310" cy="0"/>
+              <a:off x="999698" y="3666746"/>
+              <a:ext cx="205969" cy="196982"/>
             </a:xfrm>
             <a:custGeom>
               <a:avLst/>
@@ -10624,78 +11070,68 @@
               <a:cxnLst/>
               <a:rect l="l" t="t" r="r" b="b"/>
               <a:pathLst>
-                <a:path w="194310" h="0">
+                <a:path w="205969" h="196982">
                   <a:moveTo>
-                    <a:pt x="0" y="0"/>
+                    <a:pt x="173179" y="95212"/>
                   </a:moveTo>
                   <a:lnTo>
-                    <a:pt x="194310" y="0"/>
-                  </a:lnTo>
-                </a:path>
-              </a:pathLst>
-            </a:custGeom>
-            <a:noFill/>
-            <a:ln w="48577" cap="rnd">
-              <a:solidFill>
-                <a:srgbClr val="0077FF"/>
-              </a:solidFill>
-              <a:round/>
-            </a:ln>
-            <a:effectLst/>
-          </p:spPr>
-          <p:style>
-            <a:lnRef idx="1">
-              <a:schemeClr val="accent1"/>
-            </a:lnRef>
-            <a:fillRef idx="3">
-              <a:schemeClr val="accent1"/>
-            </a:fillRef>
-            <a:effectRef idx="2">
-              <a:schemeClr val="accent1"/>
-            </a:effectRef>
-            <a:fontRef idx="minor">
-              <a:schemeClr val="lt1"/>
-            </a:fontRef>
-          </p:style>
-          <p:txBody>
-            <a:bodyPr rtlCol="0" anchor="ctr"/>
-            <a:lstStyle/>
-            <a:p>
-              <a:pPr algn="ctr"/>
-            </a:p>
-          </p:txBody>
-        </p:sp>
-        <p:sp>
-          <p:nvSpPr>
-            <p:cNvPr id="12" name="Freeform 11"/>
-            <p:cNvSpPr/>
-            <p:nvPr/>
-          </p:nvSpPr>
-          <p:spPr>
-            <a:xfrm>
-              <a:off x="847408" y="3425673"/>
-              <a:ext cx="242887" cy="121444"/>
-            </a:xfrm>
-            <a:custGeom>
-              <a:avLst/>
-              <a:gdLst/>
-              <a:ahLst/>
-              <a:cxnLst/>
-              <a:rect l="l" t="t" r="r" b="b"/>
-              <a:pathLst>
-                <a:path w="242887" h="121444">
-                  <a:moveTo>
-                    <a:pt x="0" y="121444"/>
-                  </a:moveTo>
-                  <a:lnTo>
-                    <a:pt x="72866" y="48577"/>
-                  </a:lnTo>
-                  <a:lnTo>
-                    <a:pt x="145732" y="97155"/>
-                  </a:lnTo>
-                  <a:lnTo>
-                    <a:pt x="242887" y="0"/>
-                  </a:lnTo>
+                    <a:pt x="205969" y="109056"/>
+                  </a:lnTo>
+                  <a:lnTo>
+                    <a:pt x="196739" y="138932"/>
+                  </a:lnTo>
+                  <a:lnTo>
+                    <a:pt x="161763" y="131888"/>
+                  </a:lnTo>
+                  <a:lnTo>
+                    <a:pt x="122901" y="161034"/>
+                  </a:lnTo>
+                  <a:lnTo>
+                    <a:pt x="119987" y="196496"/>
+                  </a:lnTo>
+                  <a:lnTo>
+                    <a:pt x="88411" y="196982"/>
+                  </a:lnTo>
+                  <a:lnTo>
+                    <a:pt x="84525" y="161520"/>
+                  </a:lnTo>
+                  <a:lnTo>
+                    <a:pt x="44692" y="133588"/>
+                  </a:lnTo>
+                  <a:lnTo>
+                    <a:pt x="9959" y="141603"/>
+                  </a:lnTo>
+                  <a:lnTo>
+                    <a:pt x="0" y="111971"/>
+                  </a:lnTo>
+                  <a:lnTo>
+                    <a:pt x="32304" y="97155"/>
+                  </a:lnTo>
+                  <a:lnTo>
+                    <a:pt x="46635" y="50763"/>
+                  </a:lnTo>
+                  <a:lnTo>
+                    <a:pt x="28418" y="20160"/>
+                  </a:lnTo>
+                  <a:lnTo>
+                    <a:pt x="53435" y="1457"/>
+                  </a:lnTo>
+                  <a:lnTo>
+                    <a:pt x="77481" y="27689"/>
+                  </a:lnTo>
+                  <a:lnTo>
+                    <a:pt x="126059" y="26960"/>
+                  </a:lnTo>
+                  <a:lnTo>
+                    <a:pt x="149376" y="0"/>
+                  </a:lnTo>
+                  <a:lnTo>
+                    <a:pt x="175122" y="18217"/>
+                  </a:lnTo>
+                  <a:lnTo>
+                    <a:pt x="157391" y="49306"/>
+                  </a:lnTo>
+                  <a:close/>
                 </a:path>
               </a:pathLst>
             </a:custGeom>
@@ -10733,14 +11169,14 @@
       </p:grpSp>
       <p:sp>
         <p:nvSpPr>
-          <p:cNvPr id="13" name="item_1"/>
+          <p:cNvPr id="12" name="item_1"/>
           <p:cNvSpPr txBox="1"/>
           <p:nvPr/>
         </p:nvSpPr>
         <p:spPr>
           <a:xfrm>
-            <a:off x="1522636" y="3265177"/>
-            <a:ext cx="10010630" cy="1325887"/>
+            <a:off x="1522636" y="3377750"/>
+            <a:ext cx="10010630" cy="775492"/>
           </a:xfrm>
           <a:prstGeom prst="rect">
             <a:avLst/>
@@ -10757,7 +11193,7 @@
               <a:spcAft>
                 <a:spcPts val="300"/>
               </a:spcAft>
-              <a:defRPr sz="2800">
+              <a:defRPr sz="2400">
                 <a:solidFill>
                   <a:srgbClr val="000000"/>
                 </a:solidFill>
@@ -10767,7 +11203,7 @@
               </a:defRPr>
             </a:pPr>
             <a:r>
-              <a:rPr sz="2800">
+              <a:rPr sz="2400">
                 <a:solidFill>
                   <a:srgbClr val="000000"/>
                 </a:solidFill>
@@ -10775,53 +11211,39 @@
                 <a:ea typeface="Play"/>
                 <a:cs typeface="Play"/>
               </a:rPr>
-              <a:t>Генерирует колоду по дизайн-системе и аудиту</a:t>
+              <a:t>Автоматически строит план колоды</a:t>
             </a:r>
           </a:p>
         </p:txBody>
       </p:sp>
       <p:grpSp>
         <p:nvGrpSpPr>
-          <p:cNvPr id="14" name="icon:builtin-download"/>
+          <p:cNvPr id="13" name="icon:builtin-search"/>
           <p:cNvGrpSpPr/>
           <p:nvPr/>
         </p:nvGrpSpPr>
         <p:grpSpPr>
           <a:xfrm>
-            <a:off x="798830" y="5022706"/>
-            <a:ext cx="340043" cy="437197"/>
-            <a:chOff x="798830" y="5022706"/>
-            <a:chExt cx="340043" cy="437197"/>
+            <a:off x="774542" y="4387557"/>
+            <a:ext cx="412908" cy="412908"/>
+            <a:chOff x="774542" y="4387557"/>
+            <a:chExt cx="412908" cy="412908"/>
           </a:xfrm>
         </p:grpSpPr>
         <p:sp>
           <p:nvSpPr>
-            <p:cNvPr id="15" name="Freeform 14"/>
+            <p:cNvPr id="14" name="Oval 13"/>
             <p:cNvSpPr/>
             <p:nvPr/>
           </p:nvSpPr>
           <p:spPr>
             <a:xfrm>
-              <a:off x="968852" y="5022706"/>
-              <a:ext cx="0" cy="291465"/>
+              <a:off x="774542" y="4387557"/>
+              <a:ext cx="340042" cy="340042"/>
             </a:xfrm>
-            <a:custGeom>
+            <a:prstGeom prst="ellipse">
               <a:avLst/>
-              <a:gdLst/>
-              <a:ahLst/>
-              <a:cxnLst/>
-              <a:rect l="l" t="t" r="r" b="b"/>
-              <a:pathLst>
-                <a:path w="0" h="291465">
-                  <a:moveTo>
-                    <a:pt x="0" y="0"/>
-                  </a:moveTo>
-                  <a:lnTo>
-                    <a:pt x="0" y="291465"/>
-                  </a:lnTo>
-                </a:path>
-              </a:pathLst>
-            </a:custGeom>
+            </a:prstGeom>
             <a:noFill/>
             <a:ln w="48577" cap="rnd">
               <a:solidFill>
@@ -10855,14 +11277,14 @@
         </p:sp>
         <p:sp>
           <p:nvSpPr>
-            <p:cNvPr id="16" name="Freeform 15"/>
+            <p:cNvPr id="15" name="Freeform 14"/>
             <p:cNvSpPr/>
             <p:nvPr/>
           </p:nvSpPr>
           <p:spPr>
             <a:xfrm>
-              <a:off x="847408" y="5192727"/>
-              <a:ext cx="242887" cy="121444"/>
+              <a:off x="1070864" y="4683879"/>
+              <a:ext cx="116586" cy="116586"/>
             </a:xfrm>
             <a:custGeom>
               <a:avLst/>
@@ -10871,74 +11293,12 @@
               <a:cxnLst/>
               <a:rect l="l" t="t" r="r" b="b"/>
               <a:pathLst>
-                <a:path w="242887" h="121444">
+                <a:path w="116586" h="116586">
                   <a:moveTo>
                     <a:pt x="0" y="0"/>
                   </a:moveTo>
                   <a:lnTo>
-                    <a:pt x="121444" y="121444"/>
-                  </a:lnTo>
-                  <a:lnTo>
-                    <a:pt x="242887" y="0"/>
-                  </a:lnTo>
-                </a:path>
-              </a:pathLst>
-            </a:custGeom>
-            <a:noFill/>
-            <a:ln w="48577" cap="rnd">
-              <a:solidFill>
-                <a:srgbClr val="0077FF"/>
-              </a:solidFill>
-              <a:round/>
-            </a:ln>
-            <a:effectLst/>
-          </p:spPr>
-          <p:style>
-            <a:lnRef idx="1">
-              <a:schemeClr val="accent1"/>
-            </a:lnRef>
-            <a:fillRef idx="3">
-              <a:schemeClr val="accent1"/>
-            </a:fillRef>
-            <a:effectRef idx="2">
-              <a:schemeClr val="accent1"/>
-            </a:effectRef>
-            <a:fontRef idx="minor">
-              <a:schemeClr val="lt1"/>
-            </a:fontRef>
-          </p:style>
-          <p:txBody>
-            <a:bodyPr rtlCol="0" anchor="ctr"/>
-            <a:lstStyle/>
-            <a:p>
-              <a:pPr algn="ctr"/>
-            </a:p>
-          </p:txBody>
-        </p:sp>
-        <p:sp>
-          <p:nvSpPr>
-            <p:cNvPr id="17" name="Freeform 16"/>
-            <p:cNvSpPr/>
-            <p:nvPr/>
-          </p:nvSpPr>
-          <p:spPr>
-            <a:xfrm>
-              <a:off x="798830" y="5459903"/>
-              <a:ext cx="340043" cy="0"/>
-            </a:xfrm>
-            <a:custGeom>
-              <a:avLst/>
-              <a:gdLst/>
-              <a:ahLst/>
-              <a:cxnLst/>
-              <a:rect l="l" t="t" r="r" b="b"/>
-              <a:pathLst>
-                <a:path w="340043" h="0">
-                  <a:moveTo>
-                    <a:pt x="0" y="0"/>
-                  </a:moveTo>
-                  <a:lnTo>
-                    <a:pt x="340043" y="0"/>
+                    <a:pt x="116586" y="116586"/>
                   </a:lnTo>
                 </a:path>
               </a:pathLst>
@@ -10977,14 +11337,14 @@
       </p:grpSp>
       <p:sp>
         <p:nvSpPr>
-          <p:cNvPr id="18" name="item_2"/>
+          <p:cNvPr id="16" name="item_2"/>
           <p:cNvSpPr txBox="1"/>
           <p:nvPr/>
         </p:nvSpPr>
         <p:spPr>
           <a:xfrm>
-            <a:off x="1522636" y="4728225"/>
-            <a:ext cx="10010630" cy="1335412"/>
+            <a:off x="1522636" y="4332947"/>
+            <a:ext cx="10010630" cy="775492"/>
           </a:xfrm>
           <a:prstGeom prst="rect">
             <a:avLst/>
@@ -11001,7 +11361,7 @@
               <a:spcAft>
                 <a:spcPts val="300"/>
               </a:spcAft>
-              <a:defRPr sz="2800">
+              <a:defRPr sz="2400">
                 <a:solidFill>
                   <a:srgbClr val="000000"/>
                 </a:solidFill>
@@ -11011,7 +11371,7 @@
               </a:defRPr>
             </a:pPr>
             <a:r>
-              <a:rPr sz="2800">
+              <a:rPr sz="2400">
                 <a:solidFill>
                   <a:srgbClr val="000000"/>
                 </a:solidFill>
@@ -11019,46 +11379,216 @@
                 <a:ea typeface="Play"/>
                 <a:cs typeface="Play"/>
               </a:rPr>
-              <a:t>Экспорт в pptx, pdf, html с редактируемыми слайдами</a:t>
+              <a:t>Встроенный аудит качества</a:t>
             </a:r>
           </a:p>
         </p:txBody>
       </p:sp>
-    </p:spTree>
-  </p:cSld>
-  <p:clrMapOvr>
-    <a:masterClrMapping/>
-  </p:clrMapOvr>
-</p:sld>
-</file>
-
-<file path=ppt/slides/slide59.xml><?xml version="1.0" encoding="utf-8"?>
-<p:sld xmlns:a="http://schemas.openxmlformats.org/drawingml/2006/main" xmlns:p="http://schemas.openxmlformats.org/presentationml/2006/main" xmlns:r="http://schemas.openxmlformats.org/officeDocument/2006/relationships">
-  <p:cSld>
-    <p:bg>
-      <p:bgPr>
-        <a:solidFill>
-          <a:schemeClr val="lt2"/>
-        </a:solidFill>
-      </p:bgPr>
-    </p:bg>
-    <p:spTree>
-      <p:nvGrpSpPr>
-        <p:cNvPr id="1" name=""/>
-        <p:cNvGrpSpPr/>
-        <p:nvPr/>
-      </p:nvGrpSpPr>
-      <p:grpSpPr/>
+      <p:grpSp>
+        <p:nvGrpSpPr>
+          <p:cNvPr id="17" name="icon:builtin-download"/>
+          <p:cNvGrpSpPr/>
+          <p:nvPr/>
+        </p:nvGrpSpPr>
+        <p:grpSpPr>
+          <a:xfrm>
+            <a:off x="798830" y="5318466"/>
+            <a:ext cx="340043" cy="437197"/>
+            <a:chOff x="798830" y="5318466"/>
+            <a:chExt cx="340043" cy="437197"/>
+          </a:xfrm>
+        </p:grpSpPr>
+        <p:sp>
+          <p:nvSpPr>
+            <p:cNvPr id="18" name="Freeform 17"/>
+            <p:cNvSpPr/>
+            <p:nvPr/>
+          </p:nvSpPr>
+          <p:spPr>
+            <a:xfrm>
+              <a:off x="968852" y="5318466"/>
+              <a:ext cx="0" cy="291465"/>
+            </a:xfrm>
+            <a:custGeom>
+              <a:avLst/>
+              <a:gdLst/>
+              <a:ahLst/>
+              <a:cxnLst/>
+              <a:rect l="l" t="t" r="r" b="b"/>
+              <a:pathLst>
+                <a:path w="0" h="291465">
+                  <a:moveTo>
+                    <a:pt x="0" y="0"/>
+                  </a:moveTo>
+                  <a:lnTo>
+                    <a:pt x="0" y="291465"/>
+                  </a:lnTo>
+                </a:path>
+              </a:pathLst>
+            </a:custGeom>
+            <a:noFill/>
+            <a:ln w="48577" cap="rnd">
+              <a:solidFill>
+                <a:srgbClr val="0077FF"/>
+              </a:solidFill>
+              <a:round/>
+            </a:ln>
+            <a:effectLst/>
+          </p:spPr>
+          <p:style>
+            <a:lnRef idx="1">
+              <a:schemeClr val="accent1"/>
+            </a:lnRef>
+            <a:fillRef idx="3">
+              <a:schemeClr val="accent1"/>
+            </a:fillRef>
+            <a:effectRef idx="2">
+              <a:schemeClr val="accent1"/>
+            </a:effectRef>
+            <a:fontRef idx="minor">
+              <a:schemeClr val="lt1"/>
+            </a:fontRef>
+          </p:style>
+          <p:txBody>
+            <a:bodyPr rtlCol="0" anchor="ctr"/>
+            <a:lstStyle/>
+            <a:p>
+              <a:pPr algn="ctr"/>
+            </a:p>
+          </p:txBody>
+        </p:sp>
+        <p:sp>
+          <p:nvSpPr>
+            <p:cNvPr id="19" name="Freeform 18"/>
+            <p:cNvSpPr/>
+            <p:nvPr/>
+          </p:nvSpPr>
+          <p:spPr>
+            <a:xfrm>
+              <a:off x="847408" y="5488487"/>
+              <a:ext cx="242887" cy="121444"/>
+            </a:xfrm>
+            <a:custGeom>
+              <a:avLst/>
+              <a:gdLst/>
+              <a:ahLst/>
+              <a:cxnLst/>
+              <a:rect l="l" t="t" r="r" b="b"/>
+              <a:pathLst>
+                <a:path w="242887" h="121444">
+                  <a:moveTo>
+                    <a:pt x="0" y="0"/>
+                  </a:moveTo>
+                  <a:lnTo>
+                    <a:pt x="121444" y="121444"/>
+                  </a:lnTo>
+                  <a:lnTo>
+                    <a:pt x="242887" y="0"/>
+                  </a:lnTo>
+                </a:path>
+              </a:pathLst>
+            </a:custGeom>
+            <a:noFill/>
+            <a:ln w="48577" cap="rnd">
+              <a:solidFill>
+                <a:srgbClr val="0077FF"/>
+              </a:solidFill>
+              <a:round/>
+            </a:ln>
+            <a:effectLst/>
+          </p:spPr>
+          <p:style>
+            <a:lnRef idx="1">
+              <a:schemeClr val="accent1"/>
+            </a:lnRef>
+            <a:fillRef idx="3">
+              <a:schemeClr val="accent1"/>
+            </a:fillRef>
+            <a:effectRef idx="2">
+              <a:schemeClr val="accent1"/>
+            </a:effectRef>
+            <a:fontRef idx="minor">
+              <a:schemeClr val="lt1"/>
+            </a:fontRef>
+          </p:style>
+          <p:txBody>
+            <a:bodyPr rtlCol="0" anchor="ctr"/>
+            <a:lstStyle/>
+            <a:p>
+              <a:pPr algn="ctr"/>
+            </a:p>
+          </p:txBody>
+        </p:sp>
+        <p:sp>
+          <p:nvSpPr>
+            <p:cNvPr id="20" name="Freeform 19"/>
+            <p:cNvSpPr/>
+            <p:nvPr/>
+          </p:nvSpPr>
+          <p:spPr>
+            <a:xfrm>
+              <a:off x="798830" y="5755663"/>
+              <a:ext cx="340043" cy="0"/>
+            </a:xfrm>
+            <a:custGeom>
+              <a:avLst/>
+              <a:gdLst/>
+              <a:ahLst/>
+              <a:cxnLst/>
+              <a:rect l="l" t="t" r="r" b="b"/>
+              <a:pathLst>
+                <a:path w="340043" h="0">
+                  <a:moveTo>
+                    <a:pt x="0" y="0"/>
+                  </a:moveTo>
+                  <a:lnTo>
+                    <a:pt x="340043" y="0"/>
+                  </a:lnTo>
+                </a:path>
+              </a:pathLst>
+            </a:custGeom>
+            <a:noFill/>
+            <a:ln w="48577" cap="rnd">
+              <a:solidFill>
+                <a:srgbClr val="0077FF"/>
+              </a:solidFill>
+              <a:round/>
+            </a:ln>
+            <a:effectLst/>
+          </p:spPr>
+          <p:style>
+            <a:lnRef idx="1">
+              <a:schemeClr val="accent1"/>
+            </a:lnRef>
+            <a:fillRef idx="3">
+              <a:schemeClr val="accent1"/>
+            </a:fillRef>
+            <a:effectRef idx="2">
+              <a:schemeClr val="accent1"/>
+            </a:effectRef>
+            <a:fontRef idx="minor">
+              <a:schemeClr val="lt1"/>
+            </a:fontRef>
+          </p:style>
+          <p:txBody>
+            <a:bodyPr rtlCol="0" anchor="ctr"/>
+            <a:lstStyle/>
+            <a:p>
+              <a:pPr algn="ctr"/>
+            </a:p>
+          </p:txBody>
+        </p:sp>
+      </p:grpSp>
       <p:sp>
         <p:nvSpPr>
-          <p:cNvPr id="2" name="title"/>
+          <p:cNvPr id="21" name="item_3"/>
           <p:cNvSpPr txBox="1"/>
           <p:nvPr/>
         </p:nvSpPr>
         <p:spPr>
           <a:xfrm>
-            <a:off x="677387" y="692177"/>
-            <a:ext cx="10855878" cy="822960"/>
+            <a:off x="1522636" y="5288145"/>
+            <a:ext cx="10010630" cy="775492"/>
           </a:xfrm>
           <a:prstGeom prst="rect">
             <a:avLst/>
@@ -11075,56 +11605,7 @@
               <a:spcAft>
                 <a:spcPts val="300"/>
               </a:spcAft>
-              <a:defRPr sz="4000">
-                <a:solidFill>
-                  <a:srgbClr val="000000"/>
-                </a:solidFill>
-                <a:latin typeface="Arial"/>
-                <a:ea typeface="Arial"/>
-                <a:cs typeface="Arial"/>
-              </a:defRPr>
-            </a:pPr>
-            <a:r>
-              <a:rPr sz="4000">
-                <a:solidFill>
-                  <a:srgbClr val="000000"/>
-                </a:solidFill>
-                <a:latin typeface="Arial"/>
-                <a:ea typeface="Arial"/>
-                <a:cs typeface="Arial"/>
-              </a:rPr>
-              <a:t>Ожидаемый эффект</a:t>
-            </a:r>
-          </a:p>
-        </p:txBody>
-      </p:sp>
-      <p:sp>
-        <p:nvSpPr>
-          <p:cNvPr id="3" name="body"/>
-          <p:cNvSpPr txBox="1"/>
-          <p:nvPr/>
-        </p:nvSpPr>
-        <p:spPr>
-          <a:xfrm>
-            <a:off x="677387" y="1783080"/>
-            <a:ext cx="10855878" cy="1737360"/>
-          </a:xfrm>
-          <a:prstGeom prst="rect">
-            <a:avLst/>
-          </a:prstGeom>
-          <a:noFill/>
-        </p:spPr>
-        <p:txBody>
-          <a:bodyPr wrap="square" lIns="76200" rIns="76200" tIns="50800" bIns="50800">
-            <a:spAutoFit/>
-          </a:bodyPr>
-          <a:lstStyle/>
-          <a:p>
-            <a:pPr algn="l">
-              <a:spcAft>
-                <a:spcPts val="300"/>
-              </a:spcAft>
-              <a:defRPr sz="1600">
+              <a:defRPr sz="2400">
                 <a:solidFill>
                   <a:srgbClr val="000000"/>
                 </a:solidFill>
@@ -11134,7 +11615,7 @@
               </a:defRPr>
             </a:pPr>
             <a:r>
-              <a:rPr sz="1600">
+              <a:rPr sz="2400">
                 <a:solidFill>
                   <a:srgbClr val="000000"/>
                 </a:solidFill>
@@ -11142,536 +11623,7 @@
                 <a:ea typeface="Play"/>
                 <a:cs typeface="Play"/>
               </a:rPr>
-              <a:t>• Сборка колоды 4 мин вместо 186</a:t>
-            </a:r>
-          </a:p>
-          <a:p>
-            <a:pPr algn="l">
-              <a:spcAft>
-                <a:spcPts val="300"/>
-              </a:spcAft>
-              <a:defRPr sz="1600">
-                <a:solidFill>
-                  <a:srgbClr val="000000"/>
-                </a:solidFill>
-                <a:latin typeface="Play"/>
-                <a:ea typeface="Play"/>
-                <a:cs typeface="Play"/>
-              </a:defRPr>
-            </a:pPr>
-            <a:r>
-              <a:rPr sz="1600">
-                <a:solidFill>
-                  <a:srgbClr val="000000"/>
-                </a:solidFill>
-                <a:latin typeface="Play"/>
-                <a:ea typeface="Play"/>
-                <a:cs typeface="Play"/>
-              </a:rPr>
-              <a:t>• Время до первой версии сократилось с 6 дней до 1</a:t>
-            </a:r>
-          </a:p>
-          <a:p>
-            <a:pPr algn="l">
-              <a:spcAft>
-                <a:spcPts val="300"/>
-              </a:spcAft>
-              <a:defRPr sz="1600">
-                <a:solidFill>
-                  <a:srgbClr val="000000"/>
-                </a:solidFill>
-                <a:latin typeface="Play"/>
-                <a:ea typeface="Play"/>
-                <a:cs typeface="Play"/>
-              </a:defRPr>
-            </a:pPr>
-            <a:r>
-              <a:rPr sz="1600">
-                <a:solidFill>
-                  <a:srgbClr val="000000"/>
-                </a:solidFill>
-                <a:latin typeface="Play"/>
-                <a:ea typeface="Play"/>
-                <a:cs typeface="Play"/>
-              </a:rPr>
-              <a:t>• Нарушений стиля 2 из 68 колод</a:t>
-            </a:r>
-          </a:p>
-          <a:p>
-            <a:pPr algn="l">
-              <a:spcAft>
-                <a:spcPts val="300"/>
-              </a:spcAft>
-              <a:defRPr sz="1600">
-                <a:solidFill>
-                  <a:srgbClr val="000000"/>
-                </a:solidFill>
-                <a:latin typeface="Play"/>
-                <a:ea typeface="Play"/>
-                <a:cs typeface="Play"/>
-              </a:defRPr>
-            </a:pPr>
-            <a:r>
-              <a:rPr sz="1600">
-                <a:solidFill>
-                  <a:srgbClr val="000000"/>
-                </a:solidFill>
-                <a:latin typeface="Play"/>
-                <a:ea typeface="Play"/>
-                <a:cs typeface="Play"/>
-              </a:rPr>
-              <a:t>• Дизайнеры закрыли 38 запросов вместо 11 в неделю</a:t>
-            </a:r>
-          </a:p>
-        </p:txBody>
-      </p:sp>
-      <p:graphicFrame>
-        <p:nvGraphicFramePr>
-          <p:cNvPr id="4" name="Chart 3"/>
-          <p:cNvGraphicFramePr>
-            <a:graphicFrameLocks noGrp="1"/>
-          </p:cNvGraphicFramePr>
-          <p:nvPr/>
-        </p:nvGraphicFramePr>
-        <p:xfrm>
-          <a:off x="677387" y="3691890"/>
-          <a:ext cx="10855878" cy="2508907"/>
-        </p:xfrm>
-        <a:graphic>
-          <a:graphicData uri="http://schemas.openxmlformats.org/drawingml/2006/chart">
-            <c:chart xmlns:c="http://schemas.openxmlformats.org/drawingml/2006/chart" r:id="rId2"/>
-          </a:graphicData>
-        </a:graphic>
-      </p:graphicFrame>
-    </p:spTree>
-  </p:cSld>
-  <p:clrMapOvr>
-    <a:masterClrMapping/>
-  </p:clrMapOvr>
-</p:sld>
-</file>
-
-<file path=ppt/slides/slide60.xml><?xml version="1.0" encoding="utf-8"?>
-<p:sld xmlns:a="http://schemas.openxmlformats.org/drawingml/2006/main" xmlns:p="http://schemas.openxmlformats.org/presentationml/2006/main" xmlns:r="http://schemas.openxmlformats.org/officeDocument/2006/relationships">
-  <p:cSld>
-    <p:spTree>
-      <p:nvGrpSpPr>
-        <p:cNvPr id="1" name=""/>
-        <p:cNvGrpSpPr/>
-        <p:nvPr/>
-      </p:nvGrpSpPr>
-      <p:grpSpPr/>
-      <p:sp>
-        <p:nvSpPr>
-          <p:cNvPr id="2" name="title"/>
-          <p:cNvSpPr txBox="1"/>
-          <p:nvPr/>
-        </p:nvSpPr>
-        <p:spPr>
-          <a:xfrm>
-            <a:off x="677387" y="692177"/>
-            <a:ext cx="10855878" cy="822960"/>
-          </a:xfrm>
-          <a:prstGeom prst="rect">
-            <a:avLst/>
-          </a:prstGeom>
-          <a:noFill/>
-        </p:spPr>
-        <p:txBody>
-          <a:bodyPr wrap="square" lIns="76200" rIns="76200" tIns="50800" bIns="50800">
-            <a:spAutoFit/>
-          </a:bodyPr>
-          <a:lstStyle/>
-          <a:p>
-            <a:pPr algn="l">
-              <a:spcAft>
-                <a:spcPts val="300"/>
-              </a:spcAft>
-              <a:defRPr sz="4000">
-                <a:solidFill>
-                  <a:srgbClr val="000000"/>
-                </a:solidFill>
-                <a:latin typeface="Arial"/>
-                <a:ea typeface="Arial"/>
-                <a:cs typeface="Arial"/>
-              </a:defRPr>
-            </a:pPr>
-            <a:r>
-              <a:rPr sz="4000">
-                <a:solidFill>
-                  <a:srgbClr val="000000"/>
-                </a:solidFill>
-                <a:latin typeface="Arial"/>
-                <a:ea typeface="Arial"/>
-                <a:cs typeface="Arial"/>
-              </a:rPr>
-              <a:t>Что потребуется: ресурсы и сроки</a:t>
-            </a:r>
-          </a:p>
-        </p:txBody>
-      </p:sp>
-      <p:sp>
-        <p:nvSpPr>
-          <p:cNvPr id="3" name="stat_0:bar"/>
-          <p:cNvSpPr/>
-          <p:nvPr/>
-        </p:nvSpPr>
-        <p:spPr>
-          <a:xfrm>
-            <a:off x="677387" y="1892808"/>
-            <a:ext cx="50800" cy="2338832"/>
-          </a:xfrm>
-          <a:prstGeom prst="rect">
-            <a:avLst/>
-          </a:prstGeom>
-          <a:solidFill>
-            <a:srgbClr val="0077FF"/>
-          </a:solidFill>
-          <a:ln>
-            <a:noFill/>
-          </a:ln>
-          <a:effectLst/>
-        </p:spPr>
-        <p:style>
-          <a:lnRef idx="1">
-            <a:schemeClr val="accent1"/>
-          </a:lnRef>
-          <a:fillRef idx="3">
-            <a:schemeClr val="accent1"/>
-          </a:fillRef>
-          <a:effectRef idx="2">
-            <a:schemeClr val="accent1"/>
-          </a:effectRef>
-          <a:fontRef idx="minor">
-            <a:schemeClr val="lt1"/>
-          </a:fontRef>
-        </p:style>
-        <p:txBody>
-          <a:bodyPr rtlCol="0" anchor="ctr"/>
-          <a:lstStyle/>
-          <a:p>
-            <a:pPr algn="ctr"/>
-          </a:p>
-        </p:txBody>
-      </p:sp>
-      <p:sp>
-        <p:nvSpPr>
-          <p:cNvPr id="4" name="stat_0"/>
-          <p:cNvSpPr txBox="1"/>
-          <p:nvPr/>
-        </p:nvSpPr>
-        <p:spPr>
-          <a:xfrm>
-            <a:off x="855187" y="1783080"/>
-            <a:ext cx="3151336" cy="2448560"/>
-          </a:xfrm>
-          <a:prstGeom prst="rect">
-            <a:avLst/>
-          </a:prstGeom>
-          <a:noFill/>
-        </p:spPr>
-        <p:txBody>
-          <a:bodyPr wrap="square" lIns="76200" rIns="76200" tIns="0" bIns="0">
-            <a:spAutoFit/>
-          </a:bodyPr>
-          <a:lstStyle/>
-          <a:p>
-            <a:pPr>
-              <a:lnSpc>
-                <a:spcPct val="100000"/>
-              </a:lnSpc>
-              <a:spcAft>
-                <a:spcPts val="200"/>
-              </a:spcAft>
-              <a:defRPr sz="4800" b="1">
-                <a:solidFill>
-                  <a:srgbClr val="0077FF"/>
-                </a:solidFill>
-                <a:latin typeface="Play"/>
-                <a:ea typeface="Play"/>
-                <a:cs typeface="Play"/>
-              </a:defRPr>
-            </a:pPr>
-            <a:r>
-              <a:rPr sz="4800" b="1">
-                <a:solidFill>
-                  <a:srgbClr val="0077FF"/>
-                </a:solidFill>
-                <a:latin typeface="Play"/>
-                <a:ea typeface="Play"/>
-                <a:cs typeface="Play"/>
-              </a:rPr>
-              <a:t>2 vCPU</a:t>
-            </a:r>
-          </a:p>
-          <a:p>
-            <a:pPr>
-              <a:spcAft>
-                <a:spcPts val="300"/>
-              </a:spcAft>
-              <a:defRPr sz="3200" b="0">
-                <a:solidFill>
-                  <a:srgbClr val="000000"/>
-                </a:solidFill>
-                <a:latin typeface="Play"/>
-                <a:ea typeface="Play"/>
-                <a:cs typeface="Play"/>
-              </a:defRPr>
-            </a:pPr>
-            <a:r>
-              <a:rPr sz="3200" b="0">
-                <a:solidFill>
-                  <a:srgbClr val="000000"/>
-                </a:solidFill>
-                <a:latin typeface="Play"/>
-                <a:ea typeface="Play"/>
-                <a:cs typeface="Play"/>
-              </a:rPr>
-              <a:t>Сервис работает на 2 vCPU / 2 GB RAM</a:t>
-            </a:r>
-          </a:p>
-        </p:txBody>
-      </p:sp>
-      <p:sp>
-        <p:nvSpPr>
-          <p:cNvPr id="5" name="stat_1:bar"/>
-          <p:cNvSpPr/>
-          <p:nvPr/>
-        </p:nvSpPr>
-        <p:spPr>
-          <a:xfrm>
-            <a:off x="4440758" y="1892808"/>
-            <a:ext cx="50800" cy="2867152"/>
-          </a:xfrm>
-          <a:prstGeom prst="rect">
-            <a:avLst/>
-          </a:prstGeom>
-          <a:solidFill>
-            <a:srgbClr val="0077FF"/>
-          </a:solidFill>
-          <a:ln>
-            <a:noFill/>
-          </a:ln>
-          <a:effectLst/>
-        </p:spPr>
-        <p:style>
-          <a:lnRef idx="1">
-            <a:schemeClr val="accent1"/>
-          </a:lnRef>
-          <a:fillRef idx="3">
-            <a:schemeClr val="accent1"/>
-          </a:fillRef>
-          <a:effectRef idx="2">
-            <a:schemeClr val="accent1"/>
-          </a:effectRef>
-          <a:fontRef idx="minor">
-            <a:schemeClr val="lt1"/>
-          </a:fontRef>
-        </p:style>
-        <p:txBody>
-          <a:bodyPr rtlCol="0" anchor="ctr"/>
-          <a:lstStyle/>
-          <a:p>
-            <a:pPr algn="ctr"/>
-          </a:p>
-        </p:txBody>
-      </p:sp>
-      <p:sp>
-        <p:nvSpPr>
-          <p:cNvPr id="6" name="stat_1"/>
-          <p:cNvSpPr txBox="1"/>
-          <p:nvPr/>
-        </p:nvSpPr>
-        <p:spPr>
-          <a:xfrm>
-            <a:off x="4618558" y="1783080"/>
-            <a:ext cx="3151336" cy="2976880"/>
-          </a:xfrm>
-          <a:prstGeom prst="rect">
-            <a:avLst/>
-          </a:prstGeom>
-          <a:noFill/>
-        </p:spPr>
-        <p:txBody>
-          <a:bodyPr wrap="square" lIns="76200" rIns="76200" tIns="0" bIns="0">
-            <a:spAutoFit/>
-          </a:bodyPr>
-          <a:lstStyle/>
-          <a:p>
-            <a:pPr>
-              <a:lnSpc>
-                <a:spcPct val="100000"/>
-              </a:lnSpc>
-              <a:spcAft>
-                <a:spcPts val="200"/>
-              </a:spcAft>
-              <a:defRPr sz="4800" b="1">
-                <a:solidFill>
-                  <a:srgbClr val="0077FF"/>
-                </a:solidFill>
-                <a:latin typeface="Play"/>
-                <a:ea typeface="Play"/>
-                <a:cs typeface="Play"/>
-              </a:defRPr>
-            </a:pPr>
-            <a:r>
-              <a:rPr sz="4800" b="1">
-                <a:solidFill>
-                  <a:srgbClr val="0077FF"/>
-                </a:solidFill>
-                <a:latin typeface="Play"/>
-                <a:ea typeface="Play"/>
-                <a:cs typeface="Play"/>
-              </a:rPr>
-              <a:t>6 нед.</a:t>
-            </a:r>
-          </a:p>
-          <a:p>
-            <a:pPr>
-              <a:spcAft>
-                <a:spcPts val="300"/>
-              </a:spcAft>
-              <a:defRPr sz="3200" b="0">
-                <a:solidFill>
-                  <a:srgbClr val="000000"/>
-                </a:solidFill>
-                <a:latin typeface="Play"/>
-                <a:ea typeface="Play"/>
-                <a:cs typeface="Play"/>
-              </a:defRPr>
-            </a:pPr>
-            <a:r>
-              <a:rPr sz="3200" b="0">
-                <a:solidFill>
-                  <a:srgbClr val="000000"/>
-                </a:solidFill>
-                <a:latin typeface="Play"/>
-                <a:ea typeface="Play"/>
-                <a:cs typeface="Play"/>
-              </a:rPr>
-              <a:t>Инференс за 6 недель пилота стоит 1 400 руб</a:t>
-            </a:r>
-          </a:p>
-        </p:txBody>
-      </p:sp>
-      <p:sp>
-        <p:nvSpPr>
-          <p:cNvPr id="7" name="stat_2:bar"/>
-          <p:cNvSpPr/>
-          <p:nvPr/>
-        </p:nvSpPr>
-        <p:spPr>
-          <a:xfrm>
-            <a:off x="8204130" y="1892808"/>
-            <a:ext cx="50800" cy="2867152"/>
-          </a:xfrm>
-          <a:prstGeom prst="rect">
-            <a:avLst/>
-          </a:prstGeom>
-          <a:solidFill>
-            <a:srgbClr val="0077FF"/>
-          </a:solidFill>
-          <a:ln>
-            <a:noFill/>
-          </a:ln>
-          <a:effectLst/>
-        </p:spPr>
-        <p:style>
-          <a:lnRef idx="1">
-            <a:schemeClr val="accent1"/>
-          </a:lnRef>
-          <a:fillRef idx="3">
-            <a:schemeClr val="accent1"/>
-          </a:fillRef>
-          <a:effectRef idx="2">
-            <a:schemeClr val="accent1"/>
-          </a:effectRef>
-          <a:fontRef idx="minor">
-            <a:schemeClr val="lt1"/>
-          </a:fontRef>
-        </p:style>
-        <p:txBody>
-          <a:bodyPr rtlCol="0" anchor="ctr"/>
-          <a:lstStyle/>
-          <a:p>
-            <a:pPr algn="ctr"/>
-          </a:p>
-        </p:txBody>
-      </p:sp>
-      <p:sp>
-        <p:nvSpPr>
-          <p:cNvPr id="8" name="stat_2"/>
-          <p:cNvSpPr txBox="1"/>
-          <p:nvPr/>
-        </p:nvSpPr>
-        <p:spPr>
-          <a:xfrm>
-            <a:off x="8381930" y="1783080"/>
-            <a:ext cx="3151336" cy="2976880"/>
-          </a:xfrm>
-          <a:prstGeom prst="rect">
-            <a:avLst/>
-          </a:prstGeom>
-          <a:noFill/>
-        </p:spPr>
-        <p:txBody>
-          <a:bodyPr wrap="square" lIns="76200" rIns="76200" tIns="0" bIns="0">
-            <a:spAutoFit/>
-          </a:bodyPr>
-          <a:lstStyle/>
-          <a:p>
-            <a:pPr>
-              <a:lnSpc>
-                <a:spcPct val="100000"/>
-              </a:lnSpc>
-              <a:spcAft>
-                <a:spcPts val="200"/>
-              </a:spcAft>
-              <a:defRPr sz="4800" b="1">
-                <a:solidFill>
-                  <a:srgbClr val="0077FF"/>
-                </a:solidFill>
-                <a:latin typeface="Play"/>
-                <a:ea typeface="Play"/>
-                <a:cs typeface="Play"/>
-              </a:defRPr>
-            </a:pPr>
-            <a:r>
-              <a:rPr sz="4800" b="1">
-                <a:solidFill>
-                  <a:srgbClr val="0077FF"/>
-                </a:solidFill>
-                <a:latin typeface="Play"/>
-                <a:ea typeface="Play"/>
-                <a:cs typeface="Play"/>
-              </a:rPr>
-              <a:t>20</a:t>
-            </a:r>
-          </a:p>
-          <a:p>
-            <a:pPr>
-              <a:spcAft>
-                <a:spcPts val="300"/>
-              </a:spcAft>
-              <a:defRPr sz="3200" b="0">
-                <a:solidFill>
-                  <a:srgbClr val="000000"/>
-                </a:solidFill>
-                <a:latin typeface="Play"/>
-                <a:ea typeface="Play"/>
-                <a:cs typeface="Play"/>
-              </a:defRPr>
-            </a:pPr>
-            <a:r>
-              <a:rPr sz="3200" b="0">
-                <a:solidFill>
-                  <a:srgbClr val="000000"/>
-                </a:solidFill>
-                <a:latin typeface="Play"/>
-                <a:ea typeface="Play"/>
-                <a:cs typeface="Play"/>
-              </a:rPr>
-              <a:t>Нагрузка выше 20 задач требует внешней очереди</a:t>
+              <a:t>Экспорт в pptx, pdf, html</a:t>
             </a:r>
           </a:p>
         </p:txBody>
@@ -11684,7 +11636,7 @@
 </p:sld>
 </file>
 
-<file path=ppt/slides/slide61.xml><?xml version="1.0" encoding="utf-8"?>
+<file path=ppt/slides/slide60.xml><?xml version="1.0" encoding="utf-8"?>
 <p:sld xmlns:a="http://schemas.openxmlformats.org/drawingml/2006/main" xmlns:p="http://schemas.openxmlformats.org/presentationml/2006/main" xmlns:r="http://schemas.openxmlformats.org/officeDocument/2006/relationships">
   <p:cSld>
     <p:bg>
@@ -11767,7 +11719,7 @@
         <p:spPr>
           <a:xfrm>
             <a:off x="677387" y="692177"/>
-            <a:ext cx="10855878" cy="822960"/>
+            <a:ext cx="10855878" cy="1447800"/>
           </a:xfrm>
           <a:prstGeom prst="rect">
             <a:avLst/>
@@ -11802,21 +11754,125 @@
                 <a:ea typeface="Arial"/>
                 <a:cs typeface="Arial"/>
               </a:rPr>
-              <a:t>План пилота</a:t>
+              <a:t>Слайды остаются редактируемыми без картинок</a:t>
             </a:r>
           </a:p>
         </p:txBody>
       </p:sp>
+      <p:grpSp>
+        <p:nvGrpSpPr>
+          <p:cNvPr id="2" name="icon:builtin-dot"/>
+          <p:cNvGrpSpPr/>
+          <p:nvPr/>
+        </p:nvGrpSpPr>
+        <p:grpSpPr>
+          <a:xfrm>
+            <a:off x="750253" y="2452873"/>
+            <a:ext cx="437197" cy="437197"/>
+            <a:chOff x="750253" y="2452873"/>
+            <a:chExt cx="437197" cy="437197"/>
+          </a:xfrm>
+        </p:grpSpPr>
+        <p:sp>
+          <p:nvSpPr>
+            <p:cNvPr id="797" name="Oval 796"/>
+            <p:cNvSpPr/>
+            <p:nvPr/>
+          </p:nvSpPr>
+          <p:spPr>
+            <a:xfrm>
+              <a:off x="750253" y="2452873"/>
+              <a:ext cx="437197" cy="437197"/>
+            </a:xfrm>
+            <a:prstGeom prst="ellipse">
+              <a:avLst/>
+            </a:prstGeom>
+            <a:noFill/>
+            <a:ln w="48577" cap="rnd">
+              <a:solidFill>
+                <a:srgbClr val="0077FF"/>
+              </a:solidFill>
+              <a:round/>
+            </a:ln>
+            <a:effectLst/>
+          </p:spPr>
+          <p:style>
+            <a:lnRef idx="1">
+              <a:schemeClr val="accent1"/>
+            </a:lnRef>
+            <a:fillRef idx="3">
+              <a:schemeClr val="accent1"/>
+            </a:fillRef>
+            <a:effectRef idx="2">
+              <a:schemeClr val="accent1"/>
+            </a:effectRef>
+            <a:fontRef idx="minor">
+              <a:schemeClr val="lt1"/>
+            </a:fontRef>
+          </p:style>
+          <p:txBody>
+            <a:bodyPr rtlCol="0" anchor="ctr"/>
+            <a:lstStyle/>
+            <a:p>
+              <a:pPr algn="ctr"/>
+            </a:p>
+          </p:txBody>
+        </p:sp>
+        <p:sp>
+          <p:nvSpPr>
+            <p:cNvPr id="798" name="Oval 797"/>
+            <p:cNvSpPr/>
+            <p:nvPr/>
+          </p:nvSpPr>
+          <p:spPr>
+            <a:xfrm>
+              <a:off x="891128" y="2593748"/>
+              <a:ext cx="155447" cy="155447"/>
+            </a:xfrm>
+            <a:prstGeom prst="ellipse">
+              <a:avLst/>
+            </a:prstGeom>
+            <a:solidFill>
+              <a:srgbClr val="0077FF"/>
+            </a:solidFill>
+            <a:ln>
+              <a:noFill/>
+            </a:ln>
+            <a:effectLst/>
+          </p:spPr>
+          <p:style>
+            <a:lnRef idx="1">
+              <a:schemeClr val="accent1"/>
+            </a:lnRef>
+            <a:fillRef idx="3">
+              <a:schemeClr val="accent1"/>
+            </a:fillRef>
+            <a:effectRef idx="2">
+              <a:schemeClr val="accent1"/>
+            </a:effectRef>
+            <a:fontRef idx="minor">
+              <a:schemeClr val="lt1"/>
+            </a:fontRef>
+          </p:style>
+          <p:txBody>
+            <a:bodyPr rtlCol="0" anchor="ctr"/>
+            <a:lstStyle/>
+            <a:p>
+              <a:pPr algn="ctr"/>
+            </a:p>
+          </p:txBody>
+        </p:sp>
+      </p:grpSp>
       <p:sp>
         <p:nvSpPr>
-          <p:cNvPr id="797" name="body"/>
+          <p:cNvPr id="799" name="item_0"/>
           <p:cNvSpPr txBox="1"/>
           <p:nvPr/>
         </p:nvSpPr>
         <p:spPr>
           <a:xfrm>
-            <a:off x="677387" y="1783080"/>
-            <a:ext cx="10855878" cy="944880"/>
+            <a:off x="1522636" y="2389532"/>
+            <a:ext cx="10010630" cy="1763709"/>
           </a:xfrm>
           <a:prstGeom prst="rect">
             <a:avLst/>
@@ -11833,7 +11889,7 @@
               <a:spcAft>
                 <a:spcPts val="300"/>
               </a:spcAft>
-              <a:defRPr sz="1600">
+              <a:defRPr sz="2800">
                 <a:solidFill>
                   <a:srgbClr val="000000"/>
                 </a:solidFill>
@@ -11843,7 +11899,7 @@
               </a:defRPr>
             </a:pPr>
             <a:r>
-              <a:rPr sz="1600">
+              <a:rPr sz="2800">
                 <a:solidFill>
                   <a:srgbClr val="000000"/>
                 </a:solidFill>
@@ -11851,15 +11907,160 @@
                 <a:ea typeface="Play"/>
                 <a:cs typeface="Play"/>
               </a:rPr>
-              <a:t>• Пилот 6 недель на двух командах, 68 презентаций</a:t>
+              <a:t>Нативные объекты, таблицы, диаграммы, фигуры</a:t>
             </a:r>
           </a:p>
+        </p:txBody>
+      </p:sp>
+      <p:grpSp>
+        <p:nvGrpSpPr>
+          <p:cNvPr id="3" name="icon:builtin-check"/>
+          <p:cNvGrpSpPr/>
+          <p:nvPr/>
+        </p:nvGrpSpPr>
+        <p:grpSpPr>
+          <a:xfrm>
+            <a:off x="750253" y="4363268"/>
+            <a:ext cx="437197" cy="437197"/>
+            <a:chOff x="750253" y="4363268"/>
+            <a:chExt cx="437197" cy="437197"/>
+          </a:xfrm>
+        </p:grpSpPr>
+        <p:sp>
+          <p:nvSpPr>
+            <p:cNvPr id="800" name="Oval 799"/>
+            <p:cNvSpPr/>
+            <p:nvPr/>
+          </p:nvSpPr>
+          <p:spPr>
+            <a:xfrm>
+              <a:off x="750253" y="4363268"/>
+              <a:ext cx="437197" cy="437197"/>
+            </a:xfrm>
+            <a:prstGeom prst="ellipse">
+              <a:avLst/>
+            </a:prstGeom>
+            <a:noFill/>
+            <a:ln w="48577" cap="rnd">
+              <a:solidFill>
+                <a:srgbClr val="0077FF"/>
+              </a:solidFill>
+              <a:round/>
+            </a:ln>
+            <a:effectLst/>
+          </p:spPr>
+          <p:style>
+            <a:lnRef idx="1">
+              <a:schemeClr val="accent1"/>
+            </a:lnRef>
+            <a:fillRef idx="3">
+              <a:schemeClr val="accent1"/>
+            </a:fillRef>
+            <a:effectRef idx="2">
+              <a:schemeClr val="accent1"/>
+            </a:effectRef>
+            <a:fontRef idx="minor">
+              <a:schemeClr val="lt1"/>
+            </a:fontRef>
+          </p:style>
+          <p:txBody>
+            <a:bodyPr rtlCol="0" anchor="ctr"/>
+            <a:lstStyle/>
+            <a:p>
+              <a:pPr algn="ctr"/>
+            </a:p>
+          </p:txBody>
+        </p:sp>
+        <p:sp>
+          <p:nvSpPr>
+            <p:cNvPr id="4" name="Freeform 3"/>
+            <p:cNvSpPr/>
+            <p:nvPr/>
+          </p:nvSpPr>
+          <p:spPr>
+            <a:xfrm>
+              <a:off x="871697" y="4509000"/>
+              <a:ext cx="194310" cy="145733"/>
+            </a:xfrm>
+            <a:custGeom>
+              <a:avLst/>
+              <a:gdLst/>
+              <a:ahLst/>
+              <a:cxnLst/>
+              <a:rect l="l" t="t" r="r" b="b"/>
+              <a:pathLst>
+                <a:path w="194310" h="145733">
+                  <a:moveTo>
+                    <a:pt x="0" y="72867"/>
+                  </a:moveTo>
+                  <a:lnTo>
+                    <a:pt x="72866" y="145733"/>
+                  </a:lnTo>
+                  <a:lnTo>
+                    <a:pt x="194310" y="0"/>
+                  </a:lnTo>
+                </a:path>
+              </a:pathLst>
+            </a:custGeom>
+            <a:noFill/>
+            <a:ln w="48577" cap="rnd">
+              <a:solidFill>
+                <a:srgbClr val="0077FF"/>
+              </a:solidFill>
+              <a:round/>
+            </a:ln>
+            <a:effectLst/>
+          </p:spPr>
+          <p:style>
+            <a:lnRef idx="1">
+              <a:schemeClr val="accent1"/>
+            </a:lnRef>
+            <a:fillRef idx="3">
+              <a:schemeClr val="accent1"/>
+            </a:fillRef>
+            <a:effectRef idx="2">
+              <a:schemeClr val="accent1"/>
+            </a:effectRef>
+            <a:fontRef idx="minor">
+              <a:schemeClr val="lt1"/>
+            </a:fontRef>
+          </p:style>
+          <p:txBody>
+            <a:bodyPr rtlCol="0" anchor="ctr"/>
+            <a:lstStyle/>
+            <a:p>
+              <a:pPr algn="ctr"/>
+            </a:p>
+          </p:txBody>
+        </p:sp>
+      </p:grpSp>
+      <p:sp>
+        <p:nvSpPr>
+          <p:cNvPr id="801" name="item_1"/>
+          <p:cNvSpPr txBox="1"/>
+          <p:nvPr/>
+        </p:nvSpPr>
+        <p:spPr>
+          <a:xfrm>
+            <a:off x="1522636" y="4299927"/>
+            <a:ext cx="10010630" cy="1763709"/>
+          </a:xfrm>
+          <a:prstGeom prst="rect">
+            <a:avLst/>
+          </a:prstGeom>
+          <a:noFill/>
+        </p:spPr>
+        <p:txBody>
+          <a:bodyPr wrap="square" lIns="76200" rIns="76200" tIns="50800" bIns="50800">
+            <a:spAutoFit/>
+          </a:bodyPr>
+          <a:lstStyle/>
           <a:p>
             <a:pPr algn="l">
               <a:spcAft>
                 <a:spcPts val="300"/>
               </a:spcAft>
-              <a:defRPr sz="1600">
+              <a:defRPr sz="2800">
                 <a:solidFill>
                   <a:srgbClr val="000000"/>
                 </a:solidFill>
@@ -11869,7 +12070,7 @@
               </a:defRPr>
             </a:pPr>
             <a:r>
-              <a:rPr sz="1600">
+              <a:rPr sz="2800">
                 <a:solidFill>
                   <a:srgbClr val="000000"/>
                 </a:solidFill>
@@ -11877,438 +12078,566 @@
                 <a:ea typeface="Play"/>
                 <a:cs typeface="Play"/>
               </a:rPr>
-              <a:t>• Сборка 4 мин, 1 день до первой версии, 2 нарушения стиля</a:t>
+              <a:t>Готовые страницы с ролями</a:t>
             </a:r>
           </a:p>
         </p:txBody>
       </p:sp>
-      <p:graphicFrame>
-        <p:nvGraphicFramePr>
-          <p:cNvPr id="798" name="Table 797"/>
-          <p:cNvGraphicFramePr>
-            <a:graphicFrameLocks noGrp="1"/>
-          </p:cNvGraphicFramePr>
+    </p:spTree>
+  </p:cSld>
+  <p:clrMapOvr>
+    <a:masterClrMapping/>
+  </p:clrMapOvr>
+</p:sld>
+</file>
+
+<file path=ppt/slides/slide61.xml><?xml version="1.0" encoding="utf-8"?>
+<p:sld xmlns:a="http://schemas.openxmlformats.org/drawingml/2006/main" xmlns:p="http://schemas.openxmlformats.org/presentationml/2006/main" xmlns:r="http://schemas.openxmlformats.org/officeDocument/2006/relationships">
+  <p:cSld>
+    <p:spTree>
+      <p:nvGrpSpPr>
+        <p:cNvPr id="1" name=""/>
+        <p:cNvGrpSpPr/>
+        <p:nvPr/>
+      </p:nvGrpSpPr>
+      <p:grpSpPr/>
+      <p:sp>
+        <p:nvSpPr>
+          <p:cNvPr id="2" name="title"/>
+          <p:cNvSpPr txBox="1"/>
           <p:nvPr/>
-        </p:nvGraphicFramePr>
-        <p:xfrm>
-          <a:off x="677387" y="2899410"/>
-          <a:ext cx="10855878" cy="3301387"/>
-        </p:xfrm>
-        <a:graphic>
-          <a:graphicData uri="http://schemas.openxmlformats.org/drawingml/2006/table">
-            <a:tbl>
-              <a:tblPr firstRow="1" bandRow="1">
-                <a:tableStyleId>{5C22544A-7EE6-4342-B048-85BDC9FD1C3A}</a:tableStyleId>
-              </a:tblPr>
-              <a:tblGrid>
-                <a:gridCol w="3618626"/>
-                <a:gridCol w="3618626"/>
-                <a:gridCol w="3618626"/>
-              </a:tblGrid>
-              <a:tr h="660277">
-                <a:tc>
-                  <a:txBody>
-                    <a:bodyPr/>
-                    <a:lstStyle/>
-                    <a:p>
-                      <a:pPr>
-                        <a:defRPr sz="1300" b="1">
-                          <a:solidFill>
-                            <a:srgbClr val="FFFFFF"/>
-                          </a:solidFill>
-                          <a:latin typeface="Play"/>
-                          <a:ea typeface="Play"/>
-                          <a:cs typeface="Play"/>
-                        </a:defRPr>
-                      </a:pPr>
-                      <a:r>
-                        <a:t>Метрика</a:t>
-                      </a:r>
-                    </a:p>
-                  </a:txBody>
-                  <a:tcPr>
-                    <a:solidFill>
-                      <a:srgbClr val="0077FF"/>
-                    </a:solidFill>
-                  </a:tcPr>
-                </a:tc>
-                <a:tc>
-                  <a:txBody>
-                    <a:bodyPr/>
-                    <a:lstStyle/>
-                    <a:p>
-                      <a:pPr>
-                        <a:defRPr sz="1300" b="1">
-                          <a:solidFill>
-                            <a:srgbClr val="FFFFFF"/>
-                          </a:solidFill>
-                          <a:latin typeface="Play"/>
-                          <a:ea typeface="Play"/>
-                          <a:cs typeface="Play"/>
-                        </a:defRPr>
-                      </a:pPr>
-                      <a:r>
-                        <a:t>Текущий процесс</a:t>
-                      </a:r>
-                    </a:p>
-                  </a:txBody>
-                  <a:tcPr>
-                    <a:solidFill>
-                      <a:srgbClr val="0077FF"/>
-                    </a:solidFill>
-                  </a:tcPr>
-                </a:tc>
-                <a:tc>
-                  <a:txBody>
-                    <a:bodyPr/>
-                    <a:lstStyle/>
-                    <a:p>
-                      <a:pPr>
-                        <a:defRPr sz="1300" b="1">
-                          <a:solidFill>
-                            <a:srgbClr val="FFFFFF"/>
-                          </a:solidFill>
-                          <a:latin typeface="Play"/>
-                          <a:ea typeface="Play"/>
-                          <a:cs typeface="Play"/>
-                        </a:defRPr>
-                      </a:pPr>
-                      <a:r>
-                        <a:t>Пилот</a:t>
-                      </a:r>
-                    </a:p>
-                  </a:txBody>
-                  <a:tcPr>
-                    <a:solidFill>
-                      <a:srgbClr val="0077FF"/>
-                    </a:solidFill>
-                  </a:tcPr>
-                </a:tc>
-              </a:tr>
-              <a:tr h="660277">
-                <a:tc>
-                  <a:txBody>
-                    <a:bodyPr/>
-                    <a:lstStyle/>
-                    <a:p>
-                      <a:pPr>
-                        <a:defRPr sz="1300" b="0">
-                          <a:solidFill>
-                            <a:srgbClr val="000000"/>
-                          </a:solidFill>
-                          <a:latin typeface="Play"/>
-                          <a:ea typeface="Play"/>
-                          <a:cs typeface="Play"/>
-                        </a:defRPr>
-                      </a:pPr>
-                      <a:r>
-                        <a:t>Время сборки (мин)</a:t>
-                      </a:r>
-                    </a:p>
-                  </a:txBody>
-                  <a:tcPr>
-                    <a:solidFill>
-                      <a:srgbClr val="FFFFFF"/>
-                    </a:solidFill>
-                  </a:tcPr>
-                </a:tc>
-                <a:tc>
-                  <a:txBody>
-                    <a:bodyPr/>
-                    <a:lstStyle/>
-                    <a:p>
-                      <a:pPr>
-                        <a:defRPr sz="1300" b="0">
-                          <a:solidFill>
-                            <a:srgbClr val="000000"/>
-                          </a:solidFill>
-                          <a:latin typeface="Play"/>
-                          <a:ea typeface="Play"/>
-                          <a:cs typeface="Play"/>
-                        </a:defRPr>
-                      </a:pPr>
-                      <a:r>
-                        <a:t>186</a:t>
-                      </a:r>
-                    </a:p>
-                  </a:txBody>
-                  <a:tcPr>
-                    <a:solidFill>
-                      <a:srgbClr val="FFFFFF"/>
-                    </a:solidFill>
-                  </a:tcPr>
-                </a:tc>
-                <a:tc>
-                  <a:txBody>
-                    <a:bodyPr/>
-                    <a:lstStyle/>
-                    <a:p>
-                      <a:pPr>
-                        <a:defRPr sz="1300" b="0">
-                          <a:solidFill>
-                            <a:srgbClr val="000000"/>
-                          </a:solidFill>
-                          <a:latin typeface="Play"/>
-                          <a:ea typeface="Play"/>
-                          <a:cs typeface="Play"/>
-                        </a:defRPr>
-                      </a:pPr>
-                      <a:r>
-                        <a:t>4</a:t>
-                      </a:r>
-                    </a:p>
-                  </a:txBody>
-                  <a:tcPr>
-                    <a:solidFill>
-                      <a:srgbClr val="FFFFFF"/>
-                    </a:solidFill>
-                  </a:tcPr>
-                </a:tc>
-              </a:tr>
-              <a:tr h="660277">
-                <a:tc>
-                  <a:txBody>
-                    <a:bodyPr/>
-                    <a:lstStyle/>
-                    <a:p>
-                      <a:pPr>
-                        <a:defRPr sz="1300" b="0">
-                          <a:solidFill>
-                            <a:srgbClr val="000000"/>
-                          </a:solidFill>
-                          <a:latin typeface="Play"/>
-                          <a:ea typeface="Play"/>
-                          <a:cs typeface="Play"/>
-                        </a:defRPr>
-                      </a:pPr>
-                      <a:r>
-                        <a:t>Время до первой версии (дней)</a:t>
-                      </a:r>
-                    </a:p>
-                  </a:txBody>
-                  <a:tcPr>
-                    <a:solidFill>
-                      <a:srgbClr val="FFFFFF"/>
-                    </a:solidFill>
-                  </a:tcPr>
-                </a:tc>
-                <a:tc>
-                  <a:txBody>
-                    <a:bodyPr/>
-                    <a:lstStyle/>
-                    <a:p>
-                      <a:pPr>
-                        <a:defRPr sz="1300" b="0">
-                          <a:solidFill>
-                            <a:srgbClr val="000000"/>
-                          </a:solidFill>
-                          <a:latin typeface="Play"/>
-                          <a:ea typeface="Play"/>
-                          <a:cs typeface="Play"/>
-                        </a:defRPr>
-                      </a:pPr>
-                      <a:r>
-                        <a:t>6</a:t>
-                      </a:r>
-                    </a:p>
-                  </a:txBody>
-                  <a:tcPr>
-                    <a:solidFill>
-                      <a:srgbClr val="FFFFFF"/>
-                    </a:solidFill>
-                  </a:tcPr>
-                </a:tc>
-                <a:tc>
-                  <a:txBody>
-                    <a:bodyPr/>
-                    <a:lstStyle/>
-                    <a:p>
-                      <a:pPr>
-                        <a:defRPr sz="1300" b="0">
-                          <a:solidFill>
-                            <a:srgbClr val="000000"/>
-                          </a:solidFill>
-                          <a:latin typeface="Play"/>
-                          <a:ea typeface="Play"/>
-                          <a:cs typeface="Play"/>
-                        </a:defRPr>
-                      </a:pPr>
-                      <a:r>
-                        <a:t>1</a:t>
-                      </a:r>
-                    </a:p>
-                  </a:txBody>
-                  <a:tcPr>
-                    <a:solidFill>
-                      <a:srgbClr val="FFFFFF"/>
-                    </a:solidFill>
-                  </a:tcPr>
-                </a:tc>
-              </a:tr>
-              <a:tr h="660277">
-                <a:tc>
-                  <a:txBody>
-                    <a:bodyPr/>
-                    <a:lstStyle/>
-                    <a:p>
-                      <a:pPr>
-                        <a:defRPr sz="1300" b="0">
-                          <a:solidFill>
-                            <a:srgbClr val="000000"/>
-                          </a:solidFill>
-                          <a:latin typeface="Play"/>
-                          <a:ea typeface="Play"/>
-                          <a:cs typeface="Play"/>
-                        </a:defRPr>
-                      </a:pPr>
-                      <a:r>
-                        <a:t>Нарушения стиля</a:t>
-                      </a:r>
-                    </a:p>
-                  </a:txBody>
-                  <a:tcPr>
-                    <a:solidFill>
-                      <a:srgbClr val="FFFFFF"/>
-                    </a:solidFill>
-                  </a:tcPr>
-                </a:tc>
-                <a:tc>
-                  <a:txBody>
-                    <a:bodyPr/>
-                    <a:lstStyle/>
-                    <a:p>
-                      <a:pPr>
-                        <a:defRPr sz="1300" b="0">
-                          <a:solidFill>
-                            <a:srgbClr val="000000"/>
-                          </a:solidFill>
-                          <a:latin typeface="Play"/>
-                          <a:ea typeface="Play"/>
-                          <a:cs typeface="Play"/>
-                        </a:defRPr>
-                      </a:pPr>
-                      <a:r>
-                        <a:t>19/42</a:t>
-                      </a:r>
-                    </a:p>
-                  </a:txBody>
-                  <a:tcPr>
-                    <a:solidFill>
-                      <a:srgbClr val="FFFFFF"/>
-                    </a:solidFill>
-                  </a:tcPr>
-                </a:tc>
-                <a:tc>
-                  <a:txBody>
-                    <a:bodyPr/>
-                    <a:lstStyle/>
-                    <a:p>
-                      <a:pPr>
-                        <a:defRPr sz="1300" b="0">
-                          <a:solidFill>
-                            <a:srgbClr val="000000"/>
-                          </a:solidFill>
-                          <a:latin typeface="Play"/>
-                          <a:ea typeface="Play"/>
-                          <a:cs typeface="Play"/>
-                        </a:defRPr>
-                      </a:pPr>
-                      <a:r>
-                        <a:t>2/68</a:t>
-                      </a:r>
-                    </a:p>
-                  </a:txBody>
-                  <a:tcPr>
-                    <a:solidFill>
-                      <a:srgbClr val="FFFFFF"/>
-                    </a:solidFill>
-                  </a:tcPr>
-                </a:tc>
-              </a:tr>
-              <a:tr h="660279">
-                <a:tc>
-                  <a:txBody>
-                    <a:bodyPr/>
-                    <a:lstStyle/>
-                    <a:p>
-                      <a:pPr>
-                        <a:defRPr sz="1300" b="0">
-                          <a:solidFill>
-                            <a:srgbClr val="000000"/>
-                          </a:solidFill>
-                          <a:latin typeface="Play"/>
-                          <a:ea typeface="Play"/>
-                          <a:cs typeface="Play"/>
-                        </a:defRPr>
-                      </a:pPr>
-                      <a:r>
-                        <a:t>Запросы закрыты</a:t>
-                      </a:r>
-                    </a:p>
-                  </a:txBody>
-                  <a:tcPr>
-                    <a:solidFill>
-                      <a:srgbClr val="FFFFFF"/>
-                    </a:solidFill>
-                  </a:tcPr>
-                </a:tc>
-                <a:tc>
-                  <a:txBody>
-                    <a:bodyPr/>
-                    <a:lstStyle/>
-                    <a:p>
-                      <a:pPr>
-                        <a:defRPr sz="1300" b="0">
-                          <a:solidFill>
-                            <a:srgbClr val="000000"/>
-                          </a:solidFill>
-                          <a:latin typeface="Play"/>
-                          <a:ea typeface="Play"/>
-                          <a:cs typeface="Play"/>
-                        </a:defRPr>
-                      </a:pPr>
-                      <a:r>
-                        <a:t>11/нед</a:t>
-                      </a:r>
-                    </a:p>
-                  </a:txBody>
-                  <a:tcPr>
-                    <a:solidFill>
-                      <a:srgbClr val="FFFFFF"/>
-                    </a:solidFill>
-                  </a:tcPr>
-                </a:tc>
-                <a:tc>
-                  <a:txBody>
-                    <a:bodyPr/>
-                    <a:lstStyle/>
-                    <a:p>
-                      <a:pPr>
-                        <a:defRPr sz="1300" b="0">
-                          <a:solidFill>
-                            <a:srgbClr val="000000"/>
-                          </a:solidFill>
-                          <a:latin typeface="Play"/>
-                          <a:ea typeface="Play"/>
-                          <a:cs typeface="Play"/>
-                        </a:defRPr>
-                      </a:pPr>
-                      <a:r>
-                        <a:t>38/нед</a:t>
-                      </a:r>
-                    </a:p>
-                  </a:txBody>
-                  <a:tcPr>
-                    <a:solidFill>
-                      <a:srgbClr val="FFFFFF"/>
-                    </a:solidFill>
-                  </a:tcPr>
-                </a:tc>
-              </a:tr>
-            </a:tbl>
-          </a:graphicData>
-        </a:graphic>
-      </p:graphicFrame>
+        </p:nvSpPr>
+        <p:spPr>
+          <a:xfrm>
+            <a:off x="677387" y="692177"/>
+            <a:ext cx="10855878" cy="1447800"/>
+          </a:xfrm>
+          <a:prstGeom prst="rect">
+            <a:avLst/>
+          </a:prstGeom>
+          <a:noFill/>
+        </p:spPr>
+        <p:txBody>
+          <a:bodyPr wrap="square" lIns="76200" rIns="76200" tIns="50800" bIns="50800">
+            <a:spAutoFit/>
+          </a:bodyPr>
+          <a:lstStyle/>
+          <a:p>
+            <a:pPr algn="l">
+              <a:spcAft>
+                <a:spcPts val="300"/>
+              </a:spcAft>
+              <a:defRPr sz="4000">
+                <a:solidFill>
+                  <a:srgbClr val="000000"/>
+                </a:solidFill>
+                <a:latin typeface="Arial"/>
+                <a:ea typeface="Arial"/>
+                <a:cs typeface="Arial"/>
+              </a:defRPr>
+            </a:pPr>
+            <a:r>
+              <a:rPr sz="4000">
+                <a:solidFill>
+                  <a:srgbClr val="000000"/>
+                </a:solidFill>
+                <a:latin typeface="Arial"/>
+                <a:ea typeface="Arial"/>
+                <a:cs typeface="Arial"/>
+              </a:rPr>
+              <a:t>68 презентаций за 6 недель: 4 минуты на сборку</a:t>
+            </a:r>
+          </a:p>
+        </p:txBody>
+      </p:sp>
+      <p:sp>
+        <p:nvSpPr>
+          <p:cNvPr id="3" name="stat_0:bar"/>
+          <p:cNvSpPr/>
+          <p:nvPr/>
+        </p:nvSpPr>
+        <p:spPr>
+          <a:xfrm>
+            <a:off x="677387" y="2471447"/>
+            <a:ext cx="50800" cy="1701800"/>
+          </a:xfrm>
+          <a:prstGeom prst="rect">
+            <a:avLst/>
+          </a:prstGeom>
+          <a:solidFill>
+            <a:srgbClr val="0077FF"/>
+          </a:solidFill>
+          <a:ln>
+            <a:noFill/>
+          </a:ln>
+          <a:effectLst/>
+        </p:spPr>
+        <p:style>
+          <a:lnRef idx="1">
+            <a:schemeClr val="accent1"/>
+          </a:lnRef>
+          <a:fillRef idx="3">
+            <a:schemeClr val="accent1"/>
+          </a:fillRef>
+          <a:effectRef idx="2">
+            <a:schemeClr val="accent1"/>
+          </a:effectRef>
+          <a:fontRef idx="minor">
+            <a:schemeClr val="lt1"/>
+          </a:fontRef>
+        </p:style>
+        <p:txBody>
+          <a:bodyPr rtlCol="0" anchor="ctr"/>
+          <a:lstStyle/>
+          <a:p>
+            <a:pPr algn="ctr"/>
+          </a:p>
+        </p:txBody>
+      </p:sp>
+      <p:sp>
+        <p:nvSpPr>
+          <p:cNvPr id="4" name="stat_0"/>
+          <p:cNvSpPr txBox="1"/>
+          <p:nvPr/>
+        </p:nvSpPr>
+        <p:spPr>
+          <a:xfrm>
+            <a:off x="855187" y="2380007"/>
+            <a:ext cx="2210493" cy="1793239"/>
+          </a:xfrm>
+          <a:prstGeom prst="rect">
+            <a:avLst/>
+          </a:prstGeom>
+          <a:noFill/>
+        </p:spPr>
+        <p:txBody>
+          <a:bodyPr wrap="square" lIns="76200" rIns="76200" tIns="0" bIns="0">
+            <a:spAutoFit/>
+          </a:bodyPr>
+          <a:lstStyle/>
+          <a:p>
+            <a:pPr>
+              <a:lnSpc>
+                <a:spcPct val="100000"/>
+              </a:lnSpc>
+              <a:spcAft>
+                <a:spcPts val="200"/>
+              </a:spcAft>
+              <a:defRPr sz="4000" b="1">
+                <a:solidFill>
+                  <a:srgbClr val="0077FF"/>
+                </a:solidFill>
+                <a:latin typeface="Play"/>
+                <a:ea typeface="Play"/>
+                <a:cs typeface="Play"/>
+              </a:defRPr>
+            </a:pPr>
+            <a:r>
+              <a:rPr sz="4000" b="1">
+                <a:solidFill>
+                  <a:srgbClr val="0077FF"/>
+                </a:solidFill>
+                <a:latin typeface="Play"/>
+                <a:ea typeface="Play"/>
+                <a:cs typeface="Play"/>
+              </a:rPr>
+              <a:t>4 мин</a:t>
+            </a:r>
+          </a:p>
+          <a:p>
+            <a:pPr>
+              <a:spcAft>
+                <a:spcPts val="300"/>
+              </a:spcAft>
+              <a:defRPr sz="3200" b="0">
+                <a:solidFill>
+                  <a:srgbClr val="000000"/>
+                </a:solidFill>
+                <a:latin typeface="Play"/>
+                <a:ea typeface="Play"/>
+                <a:cs typeface="Play"/>
+              </a:defRPr>
+            </a:pPr>
+            <a:r>
+              <a:rPr sz="3200" b="0">
+                <a:solidFill>
+                  <a:srgbClr val="000000"/>
+                </a:solidFill>
+                <a:latin typeface="Play"/>
+                <a:ea typeface="Play"/>
+                <a:cs typeface="Play"/>
+              </a:rPr>
+              <a:t>4 минуты на сборку</a:t>
+            </a:r>
+          </a:p>
+        </p:txBody>
+      </p:sp>
+      <p:sp>
+        <p:nvSpPr>
+          <p:cNvPr id="5" name="stat_1:bar"/>
+          <p:cNvSpPr/>
+          <p:nvPr/>
+        </p:nvSpPr>
+        <p:spPr>
+          <a:xfrm>
+            <a:off x="3499915" y="2471447"/>
+            <a:ext cx="50800" cy="2758440"/>
+          </a:xfrm>
+          <a:prstGeom prst="rect">
+            <a:avLst/>
+          </a:prstGeom>
+          <a:solidFill>
+            <a:srgbClr val="0077FF"/>
+          </a:solidFill>
+          <a:ln>
+            <a:noFill/>
+          </a:ln>
+          <a:effectLst/>
+        </p:spPr>
+        <p:style>
+          <a:lnRef idx="1">
+            <a:schemeClr val="accent1"/>
+          </a:lnRef>
+          <a:fillRef idx="3">
+            <a:schemeClr val="accent1"/>
+          </a:fillRef>
+          <a:effectRef idx="2">
+            <a:schemeClr val="accent1"/>
+          </a:effectRef>
+          <a:fontRef idx="minor">
+            <a:schemeClr val="lt1"/>
+          </a:fontRef>
+        </p:style>
+        <p:txBody>
+          <a:bodyPr rtlCol="0" anchor="ctr"/>
+          <a:lstStyle/>
+          <a:p>
+            <a:pPr algn="ctr"/>
+          </a:p>
+        </p:txBody>
+      </p:sp>
+      <p:sp>
+        <p:nvSpPr>
+          <p:cNvPr id="6" name="stat_1"/>
+          <p:cNvSpPr txBox="1"/>
+          <p:nvPr/>
+        </p:nvSpPr>
+        <p:spPr>
+          <a:xfrm>
+            <a:off x="3677715" y="2380007"/>
+            <a:ext cx="2210493" cy="2849880"/>
+          </a:xfrm>
+          <a:prstGeom prst="rect">
+            <a:avLst/>
+          </a:prstGeom>
+          <a:noFill/>
+        </p:spPr>
+        <p:txBody>
+          <a:bodyPr wrap="square" lIns="76200" rIns="76200" tIns="0" bIns="0">
+            <a:spAutoFit/>
+          </a:bodyPr>
+          <a:lstStyle/>
+          <a:p>
+            <a:pPr>
+              <a:lnSpc>
+                <a:spcPct val="100000"/>
+              </a:lnSpc>
+              <a:spcAft>
+                <a:spcPts val="200"/>
+              </a:spcAft>
+              <a:defRPr sz="4000" b="1">
+                <a:solidFill>
+                  <a:srgbClr val="0077FF"/>
+                </a:solidFill>
+                <a:latin typeface="Play"/>
+                <a:ea typeface="Play"/>
+                <a:cs typeface="Play"/>
+              </a:defRPr>
+            </a:pPr>
+            <a:r>
+              <a:rPr sz="4000" b="1">
+                <a:solidFill>
+                  <a:srgbClr val="0077FF"/>
+                </a:solidFill>
+                <a:latin typeface="Play"/>
+                <a:ea typeface="Play"/>
+                <a:cs typeface="Play"/>
+              </a:rPr>
+              <a:t>1 день</a:t>
+            </a:r>
+          </a:p>
+          <a:p>
+            <a:pPr>
+              <a:spcAft>
+                <a:spcPts val="300"/>
+              </a:spcAft>
+              <a:defRPr sz="3200" b="0">
+                <a:solidFill>
+                  <a:srgbClr val="000000"/>
+                </a:solidFill>
+                <a:latin typeface="Play"/>
+                <a:ea typeface="Play"/>
+                <a:cs typeface="Play"/>
+              </a:defRPr>
+            </a:pPr>
+            <a:r>
+              <a:rPr sz="3200" b="0">
+                <a:solidFill>
+                  <a:srgbClr val="000000"/>
+                </a:solidFill>
+                <a:latin typeface="Play"/>
+                <a:ea typeface="Play"/>
+                <a:cs typeface="Play"/>
+              </a:rPr>
+              <a:t>Время до первой версии 1 день</a:t>
+            </a:r>
+          </a:p>
+        </p:txBody>
+      </p:sp>
+      <p:sp>
+        <p:nvSpPr>
+          <p:cNvPr id="7" name="stat_2:bar"/>
+          <p:cNvSpPr/>
+          <p:nvPr/>
+        </p:nvSpPr>
+        <p:spPr>
+          <a:xfrm>
+            <a:off x="6322444" y="2471447"/>
+            <a:ext cx="50800" cy="2230120"/>
+          </a:xfrm>
+          <a:prstGeom prst="rect">
+            <a:avLst/>
+          </a:prstGeom>
+          <a:solidFill>
+            <a:srgbClr val="0077FF"/>
+          </a:solidFill>
+          <a:ln>
+            <a:noFill/>
+          </a:ln>
+          <a:effectLst/>
+        </p:spPr>
+        <p:style>
+          <a:lnRef idx="1">
+            <a:schemeClr val="accent1"/>
+          </a:lnRef>
+          <a:fillRef idx="3">
+            <a:schemeClr val="accent1"/>
+          </a:fillRef>
+          <a:effectRef idx="2">
+            <a:schemeClr val="accent1"/>
+          </a:effectRef>
+          <a:fontRef idx="minor">
+            <a:schemeClr val="lt1"/>
+          </a:fontRef>
+        </p:style>
+        <p:txBody>
+          <a:bodyPr rtlCol="0" anchor="ctr"/>
+          <a:lstStyle/>
+          <a:p>
+            <a:pPr algn="ctr"/>
+          </a:p>
+        </p:txBody>
+      </p:sp>
+      <p:sp>
+        <p:nvSpPr>
+          <p:cNvPr id="8" name="stat_2"/>
+          <p:cNvSpPr txBox="1"/>
+          <p:nvPr/>
+        </p:nvSpPr>
+        <p:spPr>
+          <a:xfrm>
+            <a:off x="6500244" y="2380007"/>
+            <a:ext cx="2210493" cy="2321560"/>
+          </a:xfrm>
+          <a:prstGeom prst="rect">
+            <a:avLst/>
+          </a:prstGeom>
+          <a:noFill/>
+        </p:spPr>
+        <p:txBody>
+          <a:bodyPr wrap="square" lIns="76200" rIns="76200" tIns="0" bIns="0">
+            <a:spAutoFit/>
+          </a:bodyPr>
+          <a:lstStyle/>
+          <a:p>
+            <a:pPr>
+              <a:lnSpc>
+                <a:spcPct val="100000"/>
+              </a:lnSpc>
+              <a:spcAft>
+                <a:spcPts val="200"/>
+              </a:spcAft>
+              <a:defRPr sz="4000" b="1">
+                <a:solidFill>
+                  <a:srgbClr val="0077FF"/>
+                </a:solidFill>
+                <a:latin typeface="Play"/>
+                <a:ea typeface="Play"/>
+                <a:cs typeface="Play"/>
+              </a:defRPr>
+            </a:pPr>
+            <a:r>
+              <a:rPr sz="4000" b="1">
+                <a:solidFill>
+                  <a:srgbClr val="0077FF"/>
+                </a:solidFill>
+                <a:latin typeface="Play"/>
+                <a:ea typeface="Play"/>
+                <a:cs typeface="Play"/>
+              </a:rPr>
+              <a:t>2 из 68</a:t>
+            </a:r>
+          </a:p>
+          <a:p>
+            <a:pPr>
+              <a:spcAft>
+                <a:spcPts val="300"/>
+              </a:spcAft>
+              <a:defRPr sz="3200" b="0">
+                <a:solidFill>
+                  <a:srgbClr val="000000"/>
+                </a:solidFill>
+                <a:latin typeface="Play"/>
+                <a:ea typeface="Play"/>
+                <a:cs typeface="Play"/>
+              </a:defRPr>
+            </a:pPr>
+            <a:r>
+              <a:rPr sz="3200" b="0">
+                <a:solidFill>
+                  <a:srgbClr val="000000"/>
+                </a:solidFill>
+                <a:latin typeface="Play"/>
+                <a:ea typeface="Play"/>
+                <a:cs typeface="Play"/>
+              </a:rPr>
+              <a:t>Нарушений стиля 2 из 68</a:t>
+            </a:r>
+          </a:p>
+        </p:txBody>
+      </p:sp>
+      <p:sp>
+        <p:nvSpPr>
+          <p:cNvPr id="9" name="stat_3:bar"/>
+          <p:cNvSpPr/>
+          <p:nvPr/>
+        </p:nvSpPr>
+        <p:spPr>
+          <a:xfrm>
+            <a:off x="9144972" y="2471447"/>
+            <a:ext cx="50800" cy="2758440"/>
+          </a:xfrm>
+          <a:prstGeom prst="rect">
+            <a:avLst/>
+          </a:prstGeom>
+          <a:solidFill>
+            <a:srgbClr val="0077FF"/>
+          </a:solidFill>
+          <a:ln>
+            <a:noFill/>
+          </a:ln>
+          <a:effectLst/>
+        </p:spPr>
+        <p:style>
+          <a:lnRef idx="1">
+            <a:schemeClr val="accent1"/>
+          </a:lnRef>
+          <a:fillRef idx="3">
+            <a:schemeClr val="accent1"/>
+          </a:fillRef>
+          <a:effectRef idx="2">
+            <a:schemeClr val="accent1"/>
+          </a:effectRef>
+          <a:fontRef idx="minor">
+            <a:schemeClr val="lt1"/>
+          </a:fontRef>
+        </p:style>
+        <p:txBody>
+          <a:bodyPr rtlCol="0" anchor="ctr"/>
+          <a:lstStyle/>
+          <a:p>
+            <a:pPr algn="ctr"/>
+          </a:p>
+        </p:txBody>
+      </p:sp>
+      <p:sp>
+        <p:nvSpPr>
+          <p:cNvPr id="10" name="stat_3"/>
+          <p:cNvSpPr txBox="1"/>
+          <p:nvPr/>
+        </p:nvSpPr>
+        <p:spPr>
+          <a:xfrm>
+            <a:off x="9322772" y="2380007"/>
+            <a:ext cx="2210493" cy="2849880"/>
+          </a:xfrm>
+          <a:prstGeom prst="rect">
+            <a:avLst/>
+          </a:prstGeom>
+          <a:noFill/>
+        </p:spPr>
+        <p:txBody>
+          <a:bodyPr wrap="square" lIns="76200" rIns="76200" tIns="0" bIns="0">
+            <a:spAutoFit/>
+          </a:bodyPr>
+          <a:lstStyle/>
+          <a:p>
+            <a:pPr>
+              <a:lnSpc>
+                <a:spcPct val="100000"/>
+              </a:lnSpc>
+              <a:spcAft>
+                <a:spcPts val="200"/>
+              </a:spcAft>
+              <a:defRPr sz="4000" b="1">
+                <a:solidFill>
+                  <a:srgbClr val="0077FF"/>
+                </a:solidFill>
+                <a:latin typeface="Play"/>
+                <a:ea typeface="Play"/>
+                <a:cs typeface="Play"/>
+              </a:defRPr>
+            </a:pPr>
+            <a:r>
+              <a:rPr sz="4000" b="1">
+                <a:solidFill>
+                  <a:srgbClr val="0077FF"/>
+                </a:solidFill>
+                <a:latin typeface="Play"/>
+                <a:ea typeface="Play"/>
+                <a:cs typeface="Play"/>
+              </a:rPr>
+              <a:t>38</a:t>
+            </a:r>
+          </a:p>
+          <a:p>
+            <a:pPr>
+              <a:spcAft>
+                <a:spcPts val="300"/>
+              </a:spcAft>
+              <a:defRPr sz="3200" b="0">
+                <a:solidFill>
+                  <a:srgbClr val="000000"/>
+                </a:solidFill>
+                <a:latin typeface="Play"/>
+                <a:ea typeface="Play"/>
+                <a:cs typeface="Play"/>
+              </a:defRPr>
+            </a:pPr>
+            <a:r>
+              <a:rPr sz="3200" b="0">
+                <a:solidFill>
+                  <a:srgbClr val="000000"/>
+                </a:solidFill>
+                <a:latin typeface="Play"/>
+                <a:ea typeface="Play"/>
+                <a:cs typeface="Play"/>
+              </a:rPr>
+              <a:t>Дизайнеры закрыли 38 запросов</a:t>
+            </a:r>
+          </a:p>
+        </p:txBody>
+      </p:sp>
     </p:spTree>
   </p:cSld>
   <p:clrMapOvr>
@@ -12343,7 +12672,7 @@
         <p:spPr>
           <a:xfrm>
             <a:off x="677387" y="692177"/>
-            <a:ext cx="10855878" cy="822960"/>
+            <a:ext cx="10855878" cy="919480"/>
           </a:xfrm>
           <a:prstGeom prst="rect">
             <a:avLst/>
@@ -12360,6 +12689,226 @@
               <a:spcAft>
                 <a:spcPts val="300"/>
               </a:spcAft>
+              <a:defRPr sz="4800">
+                <a:solidFill>
+                  <a:srgbClr val="000000"/>
+                </a:solidFill>
+                <a:latin typeface="Arial"/>
+                <a:ea typeface="Arial"/>
+                <a:cs typeface="Arial"/>
+              </a:defRPr>
+            </a:pPr>
+            <a:r>
+              <a:rPr sz="4800">
+                <a:solidFill>
+                  <a:srgbClr val="000000"/>
+                </a:solidFill>
+                <a:latin typeface="Arial"/>
+                <a:ea typeface="Arial"/>
+                <a:cs typeface="Arial"/>
+              </a:rPr>
+              <a:t>Рутина ушла в сервис</a:t>
+            </a:r>
+          </a:p>
+        </p:txBody>
+      </p:sp>
+      <p:pic>
+        <p:nvPicPr>
+          <p:cNvPr id="3" name="icon:3c3121bc83b8f3be382505ad" descr="image.png"/>
+          <p:cNvPicPr>
+            <a:picLocks noChangeAspect="1"/>
+          </p:cNvPicPr>
+          <p:nvPr/>
+        </p:nvPicPr>
+        <p:blipFill>
+          <a:blip r:embed="rId2"/>
+          <a:stretch>
+            <a:fillRect/>
+          </a:stretch>
+        </p:blipFill>
+        <p:spPr>
+          <a:xfrm>
+            <a:off x="677387" y="1851687"/>
+            <a:ext cx="582930" cy="582930"/>
+          </a:xfrm>
+          <a:prstGeom prst="rect">
+            <a:avLst/>
+          </a:prstGeom>
+        </p:spPr>
+      </p:pic>
+      <p:sp>
+        <p:nvSpPr>
+          <p:cNvPr id="4" name="item_0"/>
+          <p:cNvSpPr txBox="1"/>
+          <p:nvPr/>
+        </p:nvSpPr>
+        <p:spPr>
+          <a:xfrm>
+            <a:off x="1522636" y="1861212"/>
+            <a:ext cx="10010630" cy="2027869"/>
+          </a:xfrm>
+          <a:prstGeom prst="rect">
+            <a:avLst/>
+          </a:prstGeom>
+          <a:noFill/>
+        </p:spPr>
+        <p:txBody>
+          <a:bodyPr wrap="square" lIns="76200" rIns="76200" tIns="50800" bIns="50800">
+            <a:spAutoFit/>
+          </a:bodyPr>
+          <a:lstStyle/>
+          <a:p>
+            <a:pPr algn="l">
+              <a:spcAft>
+                <a:spcPts val="300"/>
+              </a:spcAft>
+              <a:defRPr sz="2800">
+                <a:solidFill>
+                  <a:srgbClr val="000000"/>
+                </a:solidFill>
+                <a:latin typeface="Play"/>
+                <a:ea typeface="Play"/>
+                <a:cs typeface="Play"/>
+              </a:defRPr>
+            </a:pPr>
+            <a:r>
+              <a:rPr sz="2800">
+                <a:solidFill>
+                  <a:srgbClr val="000000"/>
+                </a:solidFill>
+                <a:latin typeface="Play"/>
+                <a:ea typeface="Play"/>
+                <a:cs typeface="Play"/>
+              </a:rPr>
+              <a:t>Дизайнеры сосредоточились на сложных задачах</a:t>
+            </a:r>
+          </a:p>
+        </p:txBody>
+      </p:sp>
+      <p:pic>
+        <p:nvPicPr>
+          <p:cNvPr id="5" name="icon:a0e28e5aaf62a386d312b672" descr="image.png"/>
+          <p:cNvPicPr>
+            <a:picLocks noChangeAspect="1"/>
+          </p:cNvPicPr>
+          <p:nvPr/>
+        </p:nvPicPr>
+        <p:blipFill>
+          <a:blip r:embed="rId3"/>
+          <a:stretch>
+            <a:fillRect/>
+          </a:stretch>
+        </p:blipFill>
+        <p:spPr>
+          <a:xfrm>
+            <a:off x="677387" y="4026242"/>
+            <a:ext cx="582930" cy="582930"/>
+          </a:xfrm>
+          <a:prstGeom prst="rect">
+            <a:avLst/>
+          </a:prstGeom>
+        </p:spPr>
+      </p:pic>
+      <p:sp>
+        <p:nvSpPr>
+          <p:cNvPr id="6" name="item_1"/>
+          <p:cNvSpPr txBox="1"/>
+          <p:nvPr/>
+        </p:nvSpPr>
+        <p:spPr>
+          <a:xfrm>
+            <a:off x="1522636" y="4035767"/>
+            <a:ext cx="10010630" cy="2027869"/>
+          </a:xfrm>
+          <a:prstGeom prst="rect">
+            <a:avLst/>
+          </a:prstGeom>
+          <a:noFill/>
+        </p:spPr>
+        <p:txBody>
+          <a:bodyPr wrap="square" lIns="76200" rIns="76200" tIns="50800" bIns="50800">
+            <a:spAutoFit/>
+          </a:bodyPr>
+          <a:lstStyle/>
+          <a:p>
+            <a:pPr algn="l">
+              <a:spcAft>
+                <a:spcPts val="300"/>
+              </a:spcAft>
+              <a:defRPr sz="2800">
+                <a:solidFill>
+                  <a:srgbClr val="000000"/>
+                </a:solidFill>
+                <a:latin typeface="Play"/>
+                <a:ea typeface="Play"/>
+                <a:cs typeface="Play"/>
+              </a:defRPr>
+            </a:pPr>
+            <a:r>
+              <a:rPr sz="2800">
+                <a:solidFill>
+                  <a:srgbClr val="000000"/>
+                </a:solidFill>
+                <a:latin typeface="Play"/>
+                <a:ea typeface="Play"/>
+                <a:cs typeface="Play"/>
+              </a:rPr>
+              <a:t>Время на правки сократилось</a:t>
+            </a:r>
+          </a:p>
+        </p:txBody>
+      </p:sp>
+    </p:spTree>
+  </p:cSld>
+  <p:clrMapOvr>
+    <a:masterClrMapping/>
+  </p:clrMapOvr>
+</p:sld>
+</file>
+
+<file path=ppt/slides/slide63.xml><?xml version="1.0" encoding="utf-8"?>
+<p:sld xmlns:a="http://schemas.openxmlformats.org/drawingml/2006/main" xmlns:p="http://schemas.openxmlformats.org/presentationml/2006/main" xmlns:r="http://schemas.openxmlformats.org/officeDocument/2006/relationships">
+  <p:cSld>
+    <p:bg>
+      <p:bgPr>
+        <a:solidFill>
+          <a:schemeClr val="lt2"/>
+        </a:solidFill>
+      </p:bgPr>
+    </p:bg>
+    <p:spTree>
+      <p:nvGrpSpPr>
+        <p:cNvPr id="1" name=""/>
+        <p:cNvGrpSpPr/>
+        <p:nvPr/>
+      </p:nvGrpSpPr>
+      <p:grpSpPr/>
+      <p:sp>
+        <p:nvSpPr>
+          <p:cNvPr id="2" name="title"/>
+          <p:cNvSpPr txBox="1"/>
+          <p:nvPr/>
+        </p:nvSpPr>
+        <p:spPr>
+          <a:xfrm>
+            <a:off x="677875" y="692177"/>
+            <a:ext cx="10855391" cy="1447800"/>
+          </a:xfrm>
+          <a:prstGeom prst="rect">
+            <a:avLst/>
+          </a:prstGeom>
+          <a:noFill/>
+        </p:spPr>
+        <p:txBody>
+          <a:bodyPr wrap="square" lIns="76200" rIns="76200" tIns="50800" bIns="50800">
+            <a:spAutoFit/>
+          </a:bodyPr>
+          <a:lstStyle/>
+          <a:p>
+            <a:pPr algn="l">
+              <a:spcAft>
+                <a:spcPts val="300"/>
+              </a:spcAft>
               <a:defRPr sz="4000">
                 <a:solidFill>
                   <a:srgbClr val="000000"/>
@@ -12378,159 +12927,41 @@
                 <a:ea typeface="Arial"/>
                 <a:cs typeface="Arial"/>
               </a:rPr>
-              <a:t>Риски</a:t>
+              <a:t>Инференс за 6 недель стоит 1 400 рублей</a:t>
             </a:r>
           </a:p>
         </p:txBody>
       </p:sp>
       <p:grpSp>
         <p:nvGrpSpPr>
-          <p:cNvPr id="3" name="icon:builtin-alert"/>
+          <p:cNvPr id="3" name="icon:builtin-server"/>
           <p:cNvGrpSpPr/>
           <p:nvPr/>
         </p:nvGrpSpPr>
         <p:grpSpPr>
           <a:xfrm>
-            <a:off x="734076" y="2086353"/>
-            <a:ext cx="469551" cy="428405"/>
-            <a:chOff x="734076" y="2086353"/>
-            <a:chExt cx="469551" cy="428405"/>
+            <a:off x="750741" y="2500657"/>
+            <a:ext cx="437197" cy="388619"/>
+            <a:chOff x="750741" y="2500657"/>
+            <a:chExt cx="437197" cy="388619"/>
           </a:xfrm>
         </p:grpSpPr>
         <p:sp>
           <p:nvSpPr>
-            <p:cNvPr id="4" name="Freeform 3"/>
+            <p:cNvPr id="4" name="Rounded Rectangle 3"/>
             <p:cNvSpPr/>
             <p:nvPr/>
           </p:nvSpPr>
           <p:spPr>
             <a:xfrm>
-              <a:off x="734076" y="2086353"/>
-              <a:ext cx="469551" cy="428405"/>
+              <a:off x="750741" y="2500657"/>
+              <a:ext cx="437197" cy="170021"/>
             </a:xfrm>
-            <a:custGeom>
-              <a:avLst/>
-              <a:gdLst/>
-              <a:ahLst/>
-              <a:cxnLst/>
-              <a:rect l="l" t="t" r="r" b="b"/>
-              <a:pathLst>
-                <a:path w="469551" h="428405">
-                  <a:moveTo>
-                    <a:pt x="193485" y="22783"/>
-                  </a:moveTo>
-                  <a:lnTo>
-                    <a:pt x="6461" y="355539"/>
-                  </a:lnTo>
-                  <a:lnTo>
-                    <a:pt x="2648" y="363870"/>
-                  </a:lnTo>
-                  <a:lnTo>
-                    <a:pt x="462" y="372784"/>
-                  </a:lnTo>
-                  <a:lnTo>
-                    <a:pt x="0" y="381941"/>
-                  </a:lnTo>
-                  <a:lnTo>
-                    <a:pt x="1263" y="391001"/>
-                  </a:lnTo>
-                  <a:lnTo>
-                    <a:pt x="4202" y="399696"/>
-                  </a:lnTo>
-                  <a:lnTo>
-                    <a:pt x="8720" y="407663"/>
-                  </a:lnTo>
-                  <a:lnTo>
-                    <a:pt x="14647" y="414658"/>
-                  </a:lnTo>
-                  <a:lnTo>
-                    <a:pt x="21787" y="420390"/>
-                  </a:lnTo>
-                  <a:lnTo>
-                    <a:pt x="29876" y="424689"/>
-                  </a:lnTo>
-                  <a:lnTo>
-                    <a:pt x="38644" y="427385"/>
-                  </a:lnTo>
-                  <a:lnTo>
-                    <a:pt x="47752" y="428405"/>
-                  </a:lnTo>
-                  <a:lnTo>
-                    <a:pt x="421799" y="428405"/>
-                  </a:lnTo>
-                  <a:lnTo>
-                    <a:pt x="430907" y="427385"/>
-                  </a:lnTo>
-                  <a:lnTo>
-                    <a:pt x="439675" y="424689"/>
-                  </a:lnTo>
-                  <a:lnTo>
-                    <a:pt x="447764" y="420390"/>
-                  </a:lnTo>
-                  <a:lnTo>
-                    <a:pt x="454904" y="414658"/>
-                  </a:lnTo>
-                  <a:lnTo>
-                    <a:pt x="460831" y="407663"/>
-                  </a:lnTo>
-                  <a:lnTo>
-                    <a:pt x="465349" y="399696"/>
-                  </a:lnTo>
-                  <a:lnTo>
-                    <a:pt x="468288" y="391001"/>
-                  </a:lnTo>
-                  <a:lnTo>
-                    <a:pt x="469551" y="381941"/>
-                  </a:lnTo>
-                  <a:lnTo>
-                    <a:pt x="469089" y="372784"/>
-                  </a:lnTo>
-                  <a:lnTo>
-                    <a:pt x="466903" y="363870"/>
-                  </a:lnTo>
-                  <a:lnTo>
-                    <a:pt x="463090" y="355539"/>
-                  </a:lnTo>
-                  <a:lnTo>
-                    <a:pt x="276066" y="22783"/>
-                  </a:lnTo>
-                  <a:lnTo>
-                    <a:pt x="270674" y="15642"/>
-                  </a:lnTo>
-                  <a:lnTo>
-                    <a:pt x="264043" y="9594"/>
-                  </a:lnTo>
-                  <a:lnTo>
-                    <a:pt x="256417" y="4882"/>
-                  </a:lnTo>
-                  <a:lnTo>
-                    <a:pt x="248061" y="1652"/>
-                  </a:lnTo>
-                  <a:lnTo>
-                    <a:pt x="239245" y="0"/>
-                  </a:lnTo>
-                  <a:lnTo>
-                    <a:pt x="230306" y="0"/>
-                  </a:lnTo>
-                  <a:lnTo>
-                    <a:pt x="221490" y="1652"/>
-                  </a:lnTo>
-                  <a:lnTo>
-                    <a:pt x="213134" y="4882"/>
-                  </a:lnTo>
-                  <a:lnTo>
-                    <a:pt x="205508" y="9594"/>
-                  </a:lnTo>
-                  <a:lnTo>
-                    <a:pt x="198877" y="15642"/>
-                  </a:lnTo>
-                  <a:lnTo>
-                    <a:pt x="193485" y="22783"/>
-                  </a:lnTo>
-                  <a:close/>
-                </a:path>
-              </a:pathLst>
-            </a:custGeom>
+            <a:prstGeom prst="roundRect">
+              <a:avLst>
+                <a:gd name="adj" fmla="val 28571"/>
+              </a:avLst>
+            </a:prstGeom>
             <a:noFill/>
             <a:ln w="48577" cap="rnd">
               <a:solidFill>
@@ -12564,32 +12995,20 @@
         </p:sp>
         <p:sp>
           <p:nvSpPr>
-            <p:cNvPr id="5" name="Freeform 4"/>
+            <p:cNvPr id="5" name="Rounded Rectangle 4"/>
             <p:cNvSpPr/>
             <p:nvPr/>
           </p:nvSpPr>
           <p:spPr>
             <a:xfrm>
-              <a:off x="968852" y="2235438"/>
-              <a:ext cx="0" cy="97155"/>
+              <a:off x="750741" y="2719255"/>
+              <a:ext cx="437197" cy="170021"/>
             </a:xfrm>
-            <a:custGeom>
-              <a:avLst/>
-              <a:gdLst/>
-              <a:ahLst/>
-              <a:cxnLst/>
-              <a:rect l="l" t="t" r="r" b="b"/>
-              <a:pathLst>
-                <a:path w="0" h="97155">
-                  <a:moveTo>
-                    <a:pt x="0" y="0"/>
-                  </a:moveTo>
-                  <a:lnTo>
-                    <a:pt x="0" y="97155"/>
-                  </a:lnTo>
-                </a:path>
-              </a:pathLst>
-            </a:custGeom>
+            <a:prstGeom prst="roundRect">
+              <a:avLst>
+                <a:gd name="adj" fmla="val 28571"/>
+              </a:avLst>
+            </a:prstGeom>
             <a:noFill/>
             <a:ln w="48577" cap="rnd">
               <a:solidFill>
@@ -12629,7 +13048,51 @@
           </p:nvSpPr>
           <p:spPr>
             <a:xfrm>
-              <a:off x="942134" y="2390886"/>
+              <a:off x="821178" y="2558950"/>
+              <a:ext cx="53435" cy="53435"/>
+            </a:xfrm>
+            <a:prstGeom prst="ellipse">
+              <a:avLst/>
+            </a:prstGeom>
+            <a:solidFill>
+              <a:srgbClr val="0077FF"/>
+            </a:solidFill>
+            <a:ln>
+              <a:noFill/>
+            </a:ln>
+            <a:effectLst/>
+          </p:spPr>
+          <p:style>
+            <a:lnRef idx="1">
+              <a:schemeClr val="accent1"/>
+            </a:lnRef>
+            <a:fillRef idx="3">
+              <a:schemeClr val="accent1"/>
+            </a:fillRef>
+            <a:effectRef idx="2">
+              <a:schemeClr val="accent1"/>
+            </a:effectRef>
+            <a:fontRef idx="minor">
+              <a:schemeClr val="lt1"/>
+            </a:fontRef>
+          </p:style>
+          <p:txBody>
+            <a:bodyPr rtlCol="0" anchor="ctr"/>
+            <a:lstStyle/>
+            <a:p>
+              <a:pPr algn="ctr"/>
+            </a:p>
+          </p:txBody>
+        </p:sp>
+        <p:sp>
+          <p:nvSpPr>
+            <p:cNvPr id="7" name="Oval 6"/>
+            <p:cNvSpPr/>
+            <p:nvPr/>
+          </p:nvSpPr>
+          <p:spPr>
+            <a:xfrm>
+              <a:off x="821178" y="2777548"/>
               <a:ext cx="53435" cy="53435"/>
             </a:xfrm>
             <a:prstGeom prst="ellipse">
@@ -12668,14 +13131,14 @@
       </p:grpSp>
       <p:sp>
         <p:nvSpPr>
-          <p:cNvPr id="7" name="item_0"/>
+          <p:cNvPr id="8" name="item_0"/>
           <p:cNvSpPr txBox="1"/>
           <p:nvPr/>
         </p:nvSpPr>
         <p:spPr>
           <a:xfrm>
-            <a:off x="1522636" y="1783080"/>
-            <a:ext cx="10010630" cy="1335412"/>
+            <a:off x="1523123" y="2380007"/>
+            <a:ext cx="10010142" cy="1773234"/>
           </a:xfrm>
           <a:prstGeom prst="rect">
             <a:avLst/>
@@ -12692,7 +13155,7 @@
               <a:spcAft>
                 <a:spcPts val="300"/>
               </a:spcAft>
-              <a:defRPr sz="2800">
+              <a:defRPr sz="3200">
                 <a:solidFill>
                   <a:srgbClr val="000000"/>
                 </a:solidFill>
@@ -12702,7 +13165,7 @@
               </a:defRPr>
             </a:pPr>
             <a:r>
-              <a:rPr sz="2800">
+              <a:rPr sz="3200">
                 <a:solidFill>
                   <a:srgbClr val="000000"/>
                 </a:solidFill>
@@ -12710,35 +13173,35 @@
                 <a:ea typeface="Play"/>
                 <a:cs typeface="Play"/>
               </a:rPr>
-              <a:t>Слабая модель может выдумать неподтверждённые цифры</a:t>
+              <a:t>Сервис на 2 vCPU / 2 GB RAM</a:t>
             </a:r>
           </a:p>
         </p:txBody>
       </p:sp>
       <p:grpSp>
         <p:nvGrpSpPr>
-          <p:cNvPr id="8" name="icon:builtin-shield"/>
+          <p:cNvPr id="9" name="icon:builtin-sparkles"/>
           <p:cNvGrpSpPr/>
           <p:nvPr/>
         </p:nvGrpSpPr>
         <p:grpSpPr>
           <a:xfrm>
-            <a:off x="798830" y="3328518"/>
-            <a:ext cx="340043" cy="437197"/>
-            <a:chOff x="798830" y="3328518"/>
-            <a:chExt cx="340043" cy="437197"/>
+            <a:off x="799318" y="4386763"/>
+            <a:ext cx="393478" cy="376475"/>
+            <a:chOff x="799318" y="4386763"/>
+            <a:chExt cx="393478" cy="376475"/>
           </a:xfrm>
         </p:grpSpPr>
         <p:sp>
           <p:nvSpPr>
-            <p:cNvPr id="9" name="Freeform 8"/>
+            <p:cNvPr id="10" name="Freeform 9"/>
             <p:cNvSpPr/>
             <p:nvPr/>
           </p:nvSpPr>
           <p:spPr>
             <a:xfrm>
-              <a:off x="798830" y="3328518"/>
-              <a:ext cx="340043" cy="437197"/>
+              <a:off x="799318" y="4386763"/>
+              <a:ext cx="291465" cy="291465"/>
             </a:xfrm>
             <a:custGeom>
               <a:avLst/>
@@ -12747,78 +13210,129 @@
               <a:cxnLst/>
               <a:rect l="l" t="t" r="r" b="b"/>
               <a:pathLst>
-                <a:path w="340043" h="437197">
+                <a:path w="291465" h="291465">
                   <a:moveTo>
-                    <a:pt x="170022" y="0"/>
+                    <a:pt x="145733" y="0"/>
                   </a:moveTo>
                   <a:lnTo>
-                    <a:pt x="340043" y="72866"/>
-                  </a:lnTo>
-                  <a:lnTo>
-                    <a:pt x="340043" y="194310"/>
-                  </a:lnTo>
-                  <a:lnTo>
-                    <a:pt x="337905" y="226687"/>
-                  </a:lnTo>
-                  <a:lnTo>
-                    <a:pt x="331687" y="258043"/>
-                  </a:lnTo>
-                  <a:lnTo>
-                    <a:pt x="321680" y="288089"/>
-                  </a:lnTo>
-                  <a:lnTo>
-                    <a:pt x="308176" y="316531"/>
-                  </a:lnTo>
-                  <a:lnTo>
-                    <a:pt x="291465" y="343078"/>
-                  </a:lnTo>
-                  <a:lnTo>
-                    <a:pt x="271840" y="367440"/>
-                  </a:lnTo>
-                  <a:lnTo>
-                    <a:pt x="249591" y="389324"/>
-                  </a:lnTo>
-                  <a:lnTo>
-                    <a:pt x="225011" y="408439"/>
-                  </a:lnTo>
-                  <a:lnTo>
-                    <a:pt x="198391" y="424494"/>
-                  </a:lnTo>
-                  <a:lnTo>
-                    <a:pt x="170022" y="437197"/>
-                  </a:lnTo>
-                  <a:lnTo>
-                    <a:pt x="141652" y="424494"/>
-                  </a:lnTo>
-                  <a:lnTo>
-                    <a:pt x="115032" y="408439"/>
-                  </a:lnTo>
-                  <a:lnTo>
-                    <a:pt x="90452" y="389324"/>
-                  </a:lnTo>
-                  <a:lnTo>
-                    <a:pt x="68203" y="367440"/>
-                  </a:lnTo>
-                  <a:lnTo>
-                    <a:pt x="48578" y="343078"/>
-                  </a:lnTo>
-                  <a:lnTo>
-                    <a:pt x="31867" y="316531"/>
-                  </a:lnTo>
-                  <a:lnTo>
-                    <a:pt x="18363" y="288089"/>
-                  </a:lnTo>
-                  <a:lnTo>
-                    <a:pt x="8356" y="258043"/>
-                  </a:lnTo>
-                  <a:lnTo>
-                    <a:pt x="2138" y="226687"/>
-                  </a:lnTo>
-                  <a:lnTo>
-                    <a:pt x="0" y="194310"/>
-                  </a:lnTo>
-                  <a:lnTo>
-                    <a:pt x="0" y="72866"/>
+                    <a:pt x="150153" y="27373"/>
+                  </a:lnTo>
+                  <a:lnTo>
+                    <a:pt x="156225" y="51298"/>
+                  </a:lnTo>
+                  <a:lnTo>
+                    <a:pt x="164192" y="72016"/>
+                  </a:lnTo>
+                  <a:lnTo>
+                    <a:pt x="174296" y="89771"/>
+                  </a:lnTo>
+                  <a:lnTo>
+                    <a:pt x="186732" y="104733"/>
+                  </a:lnTo>
+                  <a:lnTo>
+                    <a:pt x="201694" y="117169"/>
+                  </a:lnTo>
+                  <a:lnTo>
+                    <a:pt x="219425" y="127249"/>
+                  </a:lnTo>
+                  <a:lnTo>
+                    <a:pt x="240167" y="135240"/>
+                  </a:lnTo>
+                  <a:lnTo>
+                    <a:pt x="264092" y="141336"/>
+                  </a:lnTo>
+                  <a:lnTo>
+                    <a:pt x="291465" y="145732"/>
+                  </a:lnTo>
+                  <a:lnTo>
+                    <a:pt x="264092" y="150153"/>
+                  </a:lnTo>
+                  <a:lnTo>
+                    <a:pt x="240167" y="156225"/>
+                  </a:lnTo>
+                  <a:lnTo>
+                    <a:pt x="219425" y="164192"/>
+                  </a:lnTo>
+                  <a:lnTo>
+                    <a:pt x="201694" y="174296"/>
+                  </a:lnTo>
+                  <a:lnTo>
+                    <a:pt x="186732" y="186732"/>
+                  </a:lnTo>
+                  <a:lnTo>
+                    <a:pt x="174296" y="201694"/>
+                  </a:lnTo>
+                  <a:lnTo>
+                    <a:pt x="164192" y="219424"/>
+                  </a:lnTo>
+                  <a:lnTo>
+                    <a:pt x="156225" y="240167"/>
+                  </a:lnTo>
+                  <a:lnTo>
+                    <a:pt x="150153" y="264116"/>
+                  </a:lnTo>
+                  <a:lnTo>
+                    <a:pt x="145733" y="291465"/>
+                  </a:lnTo>
+                  <a:lnTo>
+                    <a:pt x="141336" y="264116"/>
+                  </a:lnTo>
+                  <a:lnTo>
+                    <a:pt x="135240" y="240167"/>
+                  </a:lnTo>
+                  <a:lnTo>
+                    <a:pt x="127249" y="219424"/>
+                  </a:lnTo>
+                  <a:lnTo>
+                    <a:pt x="117169" y="201694"/>
+                  </a:lnTo>
+                  <a:lnTo>
+                    <a:pt x="104733" y="186732"/>
+                  </a:lnTo>
+                  <a:lnTo>
+                    <a:pt x="89771" y="174296"/>
+                  </a:lnTo>
+                  <a:lnTo>
+                    <a:pt x="72016" y="164216"/>
+                  </a:lnTo>
+                  <a:lnTo>
+                    <a:pt x="51298" y="156225"/>
+                  </a:lnTo>
+                  <a:lnTo>
+                    <a:pt x="27374" y="150129"/>
+                  </a:lnTo>
+                  <a:lnTo>
+                    <a:pt x="0" y="145732"/>
+                  </a:lnTo>
+                  <a:lnTo>
+                    <a:pt x="27374" y="141336"/>
+                  </a:lnTo>
+                  <a:lnTo>
+                    <a:pt x="51298" y="135240"/>
+                  </a:lnTo>
+                  <a:lnTo>
+                    <a:pt x="72016" y="127249"/>
+                  </a:lnTo>
+                  <a:lnTo>
+                    <a:pt x="89771" y="117169"/>
+                  </a:lnTo>
+                  <a:lnTo>
+                    <a:pt x="104733" y="104733"/>
+                  </a:lnTo>
+                  <a:lnTo>
+                    <a:pt x="117169" y="89771"/>
+                  </a:lnTo>
+                  <a:lnTo>
+                    <a:pt x="127249" y="72040"/>
+                  </a:lnTo>
+                  <a:lnTo>
+                    <a:pt x="135240" y="51298"/>
+                  </a:lnTo>
+                  <a:lnTo>
+                    <a:pt x="141336" y="27373"/>
+                  </a:lnTo>
+                  <a:lnTo>
+                    <a:pt x="145733" y="0"/>
                   </a:lnTo>
                   <a:close/>
                 </a:path>
@@ -12857,14 +13371,14 @@
         </p:sp>
         <p:sp>
           <p:nvSpPr>
-            <p:cNvPr id="10" name="Freeform 9"/>
+            <p:cNvPr id="11" name="Freeform 10"/>
             <p:cNvSpPr/>
             <p:nvPr/>
           </p:nvSpPr>
           <p:spPr>
             <a:xfrm>
-              <a:off x="895985" y="3498539"/>
-              <a:ext cx="145733" cy="97155"/>
+              <a:off x="1085926" y="4653939"/>
+              <a:ext cx="106870" cy="109299"/>
             </a:xfrm>
             <a:custGeom>
               <a:avLst/>
@@ -12873,16 +13387,131 @@
               <a:cxnLst/>
               <a:rect l="l" t="t" r="r" b="b"/>
               <a:pathLst>
-                <a:path w="145733" h="97155">
+                <a:path w="106870" h="109299">
                   <a:moveTo>
-                    <a:pt x="0" y="48578"/>
+                    <a:pt x="53435" y="0"/>
                   </a:moveTo>
                   <a:lnTo>
-                    <a:pt x="48578" y="97155"/>
-                  </a:lnTo>
-                  <a:lnTo>
-                    <a:pt x="145733" y="0"/>
-                  </a:lnTo>
+                    <a:pt x="55184" y="10298"/>
+                  </a:lnTo>
+                  <a:lnTo>
+                    <a:pt x="57588" y="19334"/>
+                  </a:lnTo>
+                  <a:lnTo>
+                    <a:pt x="60697" y="27203"/>
+                  </a:lnTo>
+                  <a:lnTo>
+                    <a:pt x="64559" y="34004"/>
+                  </a:lnTo>
+                  <a:lnTo>
+                    <a:pt x="69222" y="39785"/>
+                  </a:lnTo>
+                  <a:lnTo>
+                    <a:pt x="74760" y="44594"/>
+                  </a:lnTo>
+                  <a:lnTo>
+                    <a:pt x="81245" y="48529"/>
+                  </a:lnTo>
+                  <a:lnTo>
+                    <a:pt x="88726" y="51686"/>
+                  </a:lnTo>
+                  <a:lnTo>
+                    <a:pt x="97252" y="54091"/>
+                  </a:lnTo>
+                  <a:lnTo>
+                    <a:pt x="106870" y="55864"/>
+                  </a:lnTo>
+                  <a:lnTo>
+                    <a:pt x="97252" y="57613"/>
+                  </a:lnTo>
+                  <a:lnTo>
+                    <a:pt x="88726" y="60018"/>
+                  </a:lnTo>
+                  <a:lnTo>
+                    <a:pt x="81245" y="63126"/>
+                  </a:lnTo>
+                  <a:lnTo>
+                    <a:pt x="74760" y="66988"/>
+                  </a:lnTo>
+                  <a:lnTo>
+                    <a:pt x="69222" y="71652"/>
+                  </a:lnTo>
+                  <a:lnTo>
+                    <a:pt x="64559" y="77190"/>
+                  </a:lnTo>
+                  <a:lnTo>
+                    <a:pt x="60697" y="83675"/>
+                  </a:lnTo>
+                  <a:lnTo>
+                    <a:pt x="57588" y="91156"/>
+                  </a:lnTo>
+                  <a:lnTo>
+                    <a:pt x="55184" y="99681"/>
+                  </a:lnTo>
+                  <a:lnTo>
+                    <a:pt x="53435" y="109299"/>
+                  </a:lnTo>
+                  <a:lnTo>
+                    <a:pt x="51686" y="99681"/>
+                  </a:lnTo>
+                  <a:lnTo>
+                    <a:pt x="49281" y="91156"/>
+                  </a:lnTo>
+                  <a:lnTo>
+                    <a:pt x="46172" y="83675"/>
+                  </a:lnTo>
+                  <a:lnTo>
+                    <a:pt x="42311" y="77190"/>
+                  </a:lnTo>
+                  <a:lnTo>
+                    <a:pt x="37647" y="71652"/>
+                  </a:lnTo>
+                  <a:lnTo>
+                    <a:pt x="32109" y="66988"/>
+                  </a:lnTo>
+                  <a:lnTo>
+                    <a:pt x="25624" y="63126"/>
+                  </a:lnTo>
+                  <a:lnTo>
+                    <a:pt x="18143" y="60018"/>
+                  </a:lnTo>
+                  <a:lnTo>
+                    <a:pt x="9618" y="57613"/>
+                  </a:lnTo>
+                  <a:lnTo>
+                    <a:pt x="0" y="55864"/>
+                  </a:lnTo>
+                  <a:lnTo>
+                    <a:pt x="9618" y="54115"/>
+                  </a:lnTo>
+                  <a:lnTo>
+                    <a:pt x="18143" y="51686"/>
+                  </a:lnTo>
+                  <a:lnTo>
+                    <a:pt x="25624" y="48529"/>
+                  </a:lnTo>
+                  <a:lnTo>
+                    <a:pt x="32109" y="44594"/>
+                  </a:lnTo>
+                  <a:lnTo>
+                    <a:pt x="37647" y="39785"/>
+                  </a:lnTo>
+                  <a:lnTo>
+                    <a:pt x="42311" y="34004"/>
+                  </a:lnTo>
+                  <a:lnTo>
+                    <a:pt x="46172" y="27203"/>
+                  </a:lnTo>
+                  <a:lnTo>
+                    <a:pt x="49281" y="19334"/>
+                  </a:lnTo>
+                  <a:lnTo>
+                    <a:pt x="51686" y="10298"/>
+                  </a:lnTo>
+                  <a:lnTo>
+                    <a:pt x="53435" y="0"/>
+                  </a:lnTo>
+                  <a:close/>
                 </a:path>
               </a:pathLst>
             </a:custGeom>
@@ -12920,14 +13549,14 @@
       </p:grpSp>
       <p:sp>
         <p:nvSpPr>
-          <p:cNvPr id="11" name="item_1"/>
+          <p:cNvPr id="12" name="item_1"/>
           <p:cNvSpPr txBox="1"/>
           <p:nvPr/>
         </p:nvSpPr>
         <p:spPr>
           <a:xfrm>
-            <a:off x="1522636" y="3265177"/>
-            <a:ext cx="10010630" cy="1325887"/>
+            <a:off x="1523123" y="4290402"/>
+            <a:ext cx="10010142" cy="1773234"/>
           </a:xfrm>
           <a:prstGeom prst="rect">
             <a:avLst/>
@@ -12944,327 +13573,6 @@
               <a:spcAft>
                 <a:spcPts val="300"/>
               </a:spcAft>
-              <a:defRPr sz="2800">
-                <a:solidFill>
-                  <a:srgbClr val="000000"/>
-                </a:solidFill>
-                <a:latin typeface="Play"/>
-                <a:ea typeface="Play"/>
-                <a:cs typeface="Play"/>
-              </a:defRPr>
-            </a:pPr>
-            <a:r>
-              <a:rPr sz="2800">
-                <a:solidFill>
-                  <a:srgbClr val="000000"/>
-                </a:solidFill>
-                <a:latin typeface="Play"/>
-                <a:ea typeface="Play"/>
-                <a:cs typeface="Play"/>
-              </a:rPr>
-              <a:t>Некачественный шаблон приводит к ошибкам стиля</a:t>
-            </a:r>
-          </a:p>
-        </p:txBody>
-      </p:sp>
-      <p:grpSp>
-        <p:nvGrpSpPr>
-          <p:cNvPr id="12" name="icon:builtin-target"/>
-          <p:cNvGrpSpPr/>
-          <p:nvPr/>
-        </p:nvGrpSpPr>
-        <p:grpSpPr>
-          <a:xfrm>
-            <a:off x="750253" y="4801091"/>
-            <a:ext cx="437197" cy="437197"/>
-            <a:chOff x="750253" y="4801091"/>
-            <a:chExt cx="437197" cy="437197"/>
-          </a:xfrm>
-        </p:grpSpPr>
-        <p:sp>
-          <p:nvSpPr>
-            <p:cNvPr id="13" name="Oval 12"/>
-            <p:cNvSpPr/>
-            <p:nvPr/>
-          </p:nvSpPr>
-          <p:spPr>
-            <a:xfrm>
-              <a:off x="750253" y="4801091"/>
-              <a:ext cx="437197" cy="437197"/>
-            </a:xfrm>
-            <a:prstGeom prst="ellipse">
-              <a:avLst/>
-            </a:prstGeom>
-            <a:noFill/>
-            <a:ln w="48577" cap="rnd">
-              <a:solidFill>
-                <a:srgbClr val="0077FF"/>
-              </a:solidFill>
-              <a:round/>
-            </a:ln>
-            <a:effectLst/>
-          </p:spPr>
-          <p:style>
-            <a:lnRef idx="1">
-              <a:schemeClr val="accent1"/>
-            </a:lnRef>
-            <a:fillRef idx="3">
-              <a:schemeClr val="accent1"/>
-            </a:fillRef>
-            <a:effectRef idx="2">
-              <a:schemeClr val="accent1"/>
-            </a:effectRef>
-            <a:fontRef idx="minor">
-              <a:schemeClr val="lt1"/>
-            </a:fontRef>
-          </p:style>
-          <p:txBody>
-            <a:bodyPr rtlCol="0" anchor="ctr"/>
-            <a:lstStyle/>
-            <a:p>
-              <a:pPr algn="ctr"/>
-            </a:p>
-          </p:txBody>
-        </p:sp>
-        <p:sp>
-          <p:nvSpPr>
-            <p:cNvPr id="14" name="Oval 13"/>
-            <p:cNvSpPr/>
-            <p:nvPr/>
-          </p:nvSpPr>
-          <p:spPr>
-            <a:xfrm>
-              <a:off x="847408" y="4898246"/>
-              <a:ext cx="242887" cy="242887"/>
-            </a:xfrm>
-            <a:prstGeom prst="ellipse">
-              <a:avLst/>
-            </a:prstGeom>
-            <a:noFill/>
-            <a:ln w="48577" cap="rnd">
-              <a:solidFill>
-                <a:srgbClr val="0077FF"/>
-              </a:solidFill>
-              <a:round/>
-            </a:ln>
-            <a:effectLst/>
-          </p:spPr>
-          <p:style>
-            <a:lnRef idx="1">
-              <a:schemeClr val="accent1"/>
-            </a:lnRef>
-            <a:fillRef idx="3">
-              <a:schemeClr val="accent1"/>
-            </a:fillRef>
-            <a:effectRef idx="2">
-              <a:schemeClr val="accent1"/>
-            </a:effectRef>
-            <a:fontRef idx="minor">
-              <a:schemeClr val="lt1"/>
-            </a:fontRef>
-          </p:style>
-          <p:txBody>
-            <a:bodyPr rtlCol="0" anchor="ctr"/>
-            <a:lstStyle/>
-            <a:p>
-              <a:pPr algn="ctr"/>
-            </a:p>
-          </p:txBody>
-        </p:sp>
-        <p:sp>
-          <p:nvSpPr>
-            <p:cNvPr id="15" name="Oval 14"/>
-            <p:cNvSpPr/>
-            <p:nvPr/>
-          </p:nvSpPr>
-          <p:spPr>
-            <a:xfrm>
-              <a:off x="934847" y="4985685"/>
-              <a:ext cx="68008" cy="68008"/>
-            </a:xfrm>
-            <a:prstGeom prst="ellipse">
-              <a:avLst/>
-            </a:prstGeom>
-            <a:solidFill>
-              <a:srgbClr val="0077FF"/>
-            </a:solidFill>
-            <a:ln>
-              <a:noFill/>
-            </a:ln>
-            <a:effectLst/>
-          </p:spPr>
-          <p:style>
-            <a:lnRef idx="1">
-              <a:schemeClr val="accent1"/>
-            </a:lnRef>
-            <a:fillRef idx="3">
-              <a:schemeClr val="accent1"/>
-            </a:fillRef>
-            <a:effectRef idx="2">
-              <a:schemeClr val="accent1"/>
-            </a:effectRef>
-            <a:fontRef idx="minor">
-              <a:schemeClr val="lt1"/>
-            </a:fontRef>
-          </p:style>
-          <p:txBody>
-            <a:bodyPr rtlCol="0" anchor="ctr"/>
-            <a:lstStyle/>
-            <a:p>
-              <a:pPr algn="ctr"/>
-            </a:p>
-          </p:txBody>
-        </p:sp>
-      </p:grpSp>
-      <p:sp>
-        <p:nvSpPr>
-          <p:cNvPr id="16" name="item_2"/>
-          <p:cNvSpPr txBox="1"/>
-          <p:nvPr/>
-        </p:nvSpPr>
-        <p:spPr>
-          <a:xfrm>
-            <a:off x="1522636" y="4737750"/>
-            <a:ext cx="10010630" cy="1325887"/>
-          </a:xfrm>
-          <a:prstGeom prst="rect">
-            <a:avLst/>
-          </a:prstGeom>
-          <a:noFill/>
-        </p:spPr>
-        <p:txBody>
-          <a:bodyPr wrap="square" lIns="76200" rIns="76200" tIns="50800" bIns="50800">
-            <a:spAutoFit/>
-          </a:bodyPr>
-          <a:lstStyle/>
-          <a:p>
-            <a:pPr algn="l">
-              <a:spcAft>
-                <a:spcPts val="300"/>
-              </a:spcAft>
-              <a:defRPr sz="2800">
-                <a:solidFill>
-                  <a:srgbClr val="000000"/>
-                </a:solidFill>
-                <a:latin typeface="Play"/>
-                <a:ea typeface="Play"/>
-                <a:cs typeface="Play"/>
-              </a:defRPr>
-            </a:pPr>
-            <a:r>
-              <a:rPr sz="2800">
-                <a:solidFill>
-                  <a:srgbClr val="000000"/>
-                </a:solidFill>
-                <a:latin typeface="Play"/>
-                <a:ea typeface="Play"/>
-                <a:cs typeface="Play"/>
-              </a:rPr>
-              <a:t>Нагрузка &gt;20 задач требует внешней очереди</a:t>
-            </a:r>
-          </a:p>
-        </p:txBody>
-      </p:sp>
-    </p:spTree>
-  </p:cSld>
-  <p:clrMapOvr>
-    <a:masterClrMapping/>
-  </p:clrMapOvr>
-</p:sld>
-</file>
-
-<file path=ppt/slides/slide63.xml><?xml version="1.0" encoding="utf-8"?>
-<p:sld xmlns:a="http://schemas.openxmlformats.org/drawingml/2006/main" xmlns:p="http://schemas.openxmlformats.org/presentationml/2006/main" xmlns:r="http://schemas.openxmlformats.org/officeDocument/2006/relationships">
-  <p:cSld>
-    <p:bg>
-      <p:bgPr>
-        <a:solidFill>
-          <a:schemeClr val="lt2"/>
-        </a:solidFill>
-      </p:bgPr>
-    </p:bg>
-    <p:spTree>
-      <p:nvGrpSpPr>
-        <p:cNvPr id="1" name=""/>
-        <p:cNvGrpSpPr/>
-        <p:nvPr/>
-      </p:nvGrpSpPr>
-      <p:grpSpPr/>
-      <p:sp>
-        <p:nvSpPr>
-          <p:cNvPr id="2" name="title"/>
-          <p:cNvSpPr txBox="1"/>
-          <p:nvPr/>
-        </p:nvSpPr>
-        <p:spPr>
-          <a:xfrm>
-            <a:off x="677875" y="692177"/>
-            <a:ext cx="10855391" cy="822960"/>
-          </a:xfrm>
-          <a:prstGeom prst="rect">
-            <a:avLst/>
-          </a:prstGeom>
-          <a:noFill/>
-        </p:spPr>
-        <p:txBody>
-          <a:bodyPr wrap="square" lIns="76200" rIns="76200" tIns="50800" bIns="50800">
-            <a:spAutoFit/>
-          </a:bodyPr>
-          <a:lstStyle/>
-          <a:p>
-            <a:pPr algn="l">
-              <a:spcAft>
-                <a:spcPts val="300"/>
-              </a:spcAft>
-              <a:defRPr sz="4000">
-                <a:solidFill>
-                  <a:srgbClr val="000000"/>
-                </a:solidFill>
-                <a:latin typeface="Arial"/>
-                <a:ea typeface="Arial"/>
-                <a:cs typeface="Arial"/>
-              </a:defRPr>
-            </a:pPr>
-            <a:r>
-              <a:rPr sz="4000">
-                <a:solidFill>
-                  <a:srgbClr val="000000"/>
-                </a:solidFill>
-                <a:latin typeface="Arial"/>
-                <a:ea typeface="Arial"/>
-                <a:cs typeface="Arial"/>
-              </a:rPr>
-              <a:t>Стоимость и ресурсы</a:t>
-            </a:r>
-          </a:p>
-        </p:txBody>
-      </p:sp>
-      <p:sp>
-        <p:nvSpPr>
-          <p:cNvPr id="3" name="body"/>
-          <p:cNvSpPr txBox="1"/>
-          <p:nvPr/>
-        </p:nvSpPr>
-        <p:spPr>
-          <a:xfrm>
-            <a:off x="677875" y="1783080"/>
-            <a:ext cx="10855391" cy="1158240"/>
-          </a:xfrm>
-          <a:prstGeom prst="rect">
-            <a:avLst/>
-          </a:prstGeom>
-          <a:noFill/>
-        </p:spPr>
-        <p:txBody>
-          <a:bodyPr wrap="square" lIns="76200" rIns="76200" tIns="50800" bIns="50800">
-            <a:spAutoFit/>
-          </a:bodyPr>
-          <a:lstStyle/>
-          <a:p>
-            <a:pPr algn="l">
-              <a:spcAft>
-                <a:spcPts val="300"/>
-              </a:spcAft>
               <a:defRPr sz="3200">
                 <a:solidFill>
                   <a:srgbClr val="000000"/>
@@ -13283,251 +13591,7 @@
                 <a:ea typeface="Play"/>
                 <a:cs typeface="Play"/>
               </a:rPr>
-              <a:t>Модель gpt-oss-20b подключается по OpenAI-совместимому протоколу</a:t>
-            </a:r>
-          </a:p>
-        </p:txBody>
-      </p:sp>
-      <p:sp>
-        <p:nvSpPr>
-          <p:cNvPr id="4" name="stat_0:bar"/>
-          <p:cNvSpPr/>
-          <p:nvPr/>
-        </p:nvSpPr>
-        <p:spPr>
-          <a:xfrm>
-            <a:off x="677875" y="3256788"/>
-            <a:ext cx="50800" cy="1810512"/>
-          </a:xfrm>
-          <a:prstGeom prst="rect">
-            <a:avLst/>
-          </a:prstGeom>
-          <a:solidFill>
-            <a:srgbClr val="0077FF"/>
-          </a:solidFill>
-          <a:ln>
-            <a:noFill/>
-          </a:ln>
-          <a:effectLst/>
-        </p:spPr>
-        <p:style>
-          <a:lnRef idx="1">
-            <a:schemeClr val="accent1"/>
-          </a:lnRef>
-          <a:fillRef idx="3">
-            <a:schemeClr val="accent1"/>
-          </a:fillRef>
-          <a:effectRef idx="2">
-            <a:schemeClr val="accent1"/>
-          </a:effectRef>
-          <a:fontRef idx="minor">
-            <a:schemeClr val="lt1"/>
-          </a:fontRef>
-        </p:style>
-        <p:txBody>
-          <a:bodyPr rtlCol="0" anchor="ctr"/>
-          <a:lstStyle/>
-          <a:p>
-            <a:pPr algn="ctr"/>
-          </a:p>
-        </p:txBody>
-      </p:sp>
-      <p:sp>
-        <p:nvSpPr>
-          <p:cNvPr id="5" name="stat_0"/>
-          <p:cNvSpPr txBox="1"/>
-          <p:nvPr/>
-        </p:nvSpPr>
-        <p:spPr>
-          <a:xfrm>
-            <a:off x="855675" y="3147060"/>
-            <a:ext cx="5032787" cy="1920239"/>
-          </a:xfrm>
-          <a:prstGeom prst="rect">
-            <a:avLst/>
-          </a:prstGeom>
-          <a:noFill/>
-        </p:spPr>
-        <p:txBody>
-          <a:bodyPr wrap="square" lIns="76200" rIns="76200" tIns="0" bIns="0">
-            <a:spAutoFit/>
-          </a:bodyPr>
-          <a:lstStyle/>
-          <a:p>
-            <a:pPr>
-              <a:lnSpc>
-                <a:spcPct val="100000"/>
-              </a:lnSpc>
-              <a:spcAft>
-                <a:spcPts val="200"/>
-              </a:spcAft>
-              <a:defRPr sz="4800" b="1">
-                <a:solidFill>
-                  <a:srgbClr val="0077FF"/>
-                </a:solidFill>
-                <a:latin typeface="Play"/>
-                <a:ea typeface="Play"/>
-                <a:cs typeface="Play"/>
-              </a:defRPr>
-            </a:pPr>
-            <a:r>
-              <a:rPr sz="4800" b="1">
-                <a:solidFill>
-                  <a:srgbClr val="0077FF"/>
-                </a:solidFill>
-                <a:latin typeface="Play"/>
-                <a:ea typeface="Play"/>
-                <a:cs typeface="Play"/>
-              </a:rPr>
-              <a:t>2 vCPU</a:t>
-            </a:r>
-          </a:p>
-          <a:p>
-            <a:pPr>
-              <a:spcAft>
-                <a:spcPts val="300"/>
-              </a:spcAft>
-              <a:defRPr sz="3200" b="0">
-                <a:solidFill>
-                  <a:srgbClr val="000000"/>
-                </a:solidFill>
-                <a:latin typeface="Play"/>
-                <a:ea typeface="Play"/>
-                <a:cs typeface="Play"/>
-              </a:defRPr>
-            </a:pPr>
-            <a:r>
-              <a:rPr sz="3200" b="0">
-                <a:solidFill>
-                  <a:srgbClr val="000000"/>
-                </a:solidFill>
-                <a:latin typeface="Play"/>
-                <a:ea typeface="Play"/>
-                <a:cs typeface="Play"/>
-              </a:rPr>
-              <a:t>Сервис использует 2 vCPU / 2 GB RAM</a:t>
-            </a:r>
-          </a:p>
-        </p:txBody>
-      </p:sp>
-      <p:sp>
-        <p:nvSpPr>
-          <p:cNvPr id="6" name="stat_1:bar"/>
-          <p:cNvSpPr/>
-          <p:nvPr/>
-        </p:nvSpPr>
-        <p:spPr>
-          <a:xfrm>
-            <a:off x="6322678" y="3256788"/>
-            <a:ext cx="50800" cy="1810512"/>
-          </a:xfrm>
-          <a:prstGeom prst="rect">
-            <a:avLst/>
-          </a:prstGeom>
-          <a:solidFill>
-            <a:srgbClr val="0077FF"/>
-          </a:solidFill>
-          <a:ln>
-            <a:noFill/>
-          </a:ln>
-          <a:effectLst/>
-        </p:spPr>
-        <p:style>
-          <a:lnRef idx="1">
-            <a:schemeClr val="accent1"/>
-          </a:lnRef>
-          <a:fillRef idx="3">
-            <a:schemeClr val="accent1"/>
-          </a:fillRef>
-          <a:effectRef idx="2">
-            <a:schemeClr val="accent1"/>
-          </a:effectRef>
-          <a:fontRef idx="minor">
-            <a:schemeClr val="lt1"/>
-          </a:fontRef>
-        </p:style>
-        <p:txBody>
-          <a:bodyPr rtlCol="0" anchor="ctr"/>
-          <a:lstStyle/>
-          <a:p>
-            <a:pPr algn="ctr"/>
-          </a:p>
-        </p:txBody>
-      </p:sp>
-      <p:sp>
-        <p:nvSpPr>
-          <p:cNvPr id="7" name="stat_1"/>
-          <p:cNvSpPr txBox="1"/>
-          <p:nvPr/>
-        </p:nvSpPr>
-        <p:spPr>
-          <a:xfrm>
-            <a:off x="6500478" y="3147060"/>
-            <a:ext cx="5032787" cy="1920239"/>
-          </a:xfrm>
-          <a:prstGeom prst="rect">
-            <a:avLst/>
-          </a:prstGeom>
-          <a:noFill/>
-        </p:spPr>
-        <p:txBody>
-          <a:bodyPr wrap="square" lIns="76200" rIns="76200" tIns="0" bIns="0">
-            <a:spAutoFit/>
-          </a:bodyPr>
-          <a:lstStyle/>
-          <a:p>
-            <a:pPr>
-              <a:lnSpc>
-                <a:spcPct val="100000"/>
-              </a:lnSpc>
-              <a:spcAft>
-                <a:spcPts val="200"/>
-              </a:spcAft>
-              <a:defRPr sz="4800" b="1">
-                <a:solidFill>
-                  <a:srgbClr val="0077FF"/>
-                </a:solidFill>
-                <a:latin typeface="Play"/>
-                <a:ea typeface="Play"/>
-                <a:cs typeface="Play"/>
-              </a:defRPr>
-            </a:pPr>
-            <a:r>
-              <a:rPr sz="4800" b="1">
-                <a:solidFill>
-                  <a:srgbClr val="0077FF"/>
-                </a:solidFill>
-                <a:latin typeface="Play"/>
-                <a:ea typeface="Play"/>
-                <a:cs typeface="Play"/>
-              </a:rPr>
-              <a:t>6 нед.</a:t>
-            </a:r>
-          </a:p>
-          <a:p>
-            <a:pPr>
-              <a:spcAft>
-                <a:spcPts val="300"/>
-              </a:spcAft>
-              <a:defRPr sz="3200" b="0">
-                <a:solidFill>
-                  <a:srgbClr val="000000"/>
-                </a:solidFill>
-                <a:latin typeface="Play"/>
-                <a:ea typeface="Play"/>
-                <a:cs typeface="Play"/>
-              </a:defRPr>
-            </a:pPr>
-            <a:r>
-              <a:rPr sz="3200" b="0">
-                <a:solidFill>
-                  <a:srgbClr val="000000"/>
-                </a:solidFill>
-                <a:latin typeface="Play"/>
-                <a:ea typeface="Play"/>
-                <a:cs typeface="Play"/>
-              </a:rPr>
-              <a:t>Инференс за 6 недель пилота 1 400 руб</a:t>
+              <a:t>Модель gpt-oss-20b</a:t>
             </a:r>
           </a:p>
         </p:txBody>
@@ -13675,7 +13739,7 @@
         <p:spPr>
           <a:xfrm>
             <a:off x="677387" y="692177"/>
-            <a:ext cx="10855878" cy="822960"/>
+            <a:ext cx="10855878" cy="1447800"/>
           </a:xfrm>
           <a:prstGeom prst="rect">
             <a:avLst/>
@@ -13710,466 +13774,70 @@
                 <a:ea typeface="Arial"/>
                 <a:cs typeface="Arial"/>
               </a:rPr>
-              <a:t>План развития</a:t>
-            </a:r>
-          </a:p>
-        </p:txBody>
-      </p:sp>
-      <p:sp>
-        <p:nvSpPr>
-          <p:cNvPr id="451" name="Rectangle 450"/>
-          <p:cNvSpPr/>
-          <p:nvPr/>
-        </p:nvSpPr>
-        <p:spPr>
-          <a:xfrm>
-            <a:off x="677387" y="3815229"/>
-            <a:ext cx="10855878" cy="132531"/>
-          </a:xfrm>
-          <a:prstGeom prst="rect">
-            <a:avLst/>
-          </a:prstGeom>
-          <a:solidFill>
-            <a:srgbClr val="0077FF"/>
-          </a:solidFill>
-          <a:ln>
-            <a:noFill/>
-          </a:ln>
-        </p:spPr>
-        <p:style>
-          <a:lnRef idx="1">
-            <a:schemeClr val="accent1"/>
-          </a:lnRef>
-          <a:fillRef idx="3">
-            <a:schemeClr val="accent1"/>
-          </a:fillRef>
-          <a:effectRef idx="2">
-            <a:schemeClr val="accent1"/>
-          </a:effectRef>
-          <a:fontRef idx="minor">
-            <a:schemeClr val="lt1"/>
-          </a:fontRef>
-        </p:style>
-        <p:txBody>
-          <a:bodyPr rtlCol="0" anchor="ctr"/>
-          <a:lstStyle/>
-          <a:p>
-            <a:pPr algn="ctr"/>
-          </a:p>
-        </p:txBody>
-      </p:sp>
-      <p:sp>
-        <p:nvSpPr>
-          <p:cNvPr id="452" name="Oval 451"/>
-          <p:cNvSpPr/>
-          <p:nvPr/>
-        </p:nvSpPr>
-        <p:spPr>
-          <a:xfrm>
-            <a:off x="2000751" y="3395546"/>
-            <a:ext cx="971897" cy="971897"/>
-          </a:xfrm>
-          <a:prstGeom prst="ellipse">
-            <a:avLst/>
-          </a:prstGeom>
-          <a:solidFill>
-            <a:srgbClr val="0077FF"/>
-          </a:solidFill>
-          <a:ln>
-            <a:noFill/>
-          </a:ln>
-        </p:spPr>
-        <p:style>
-          <a:lnRef idx="1">
-            <a:schemeClr val="accent1"/>
-          </a:lnRef>
-          <a:fillRef idx="3">
-            <a:schemeClr val="accent1"/>
-          </a:fillRef>
-          <a:effectRef idx="2">
-            <a:schemeClr val="accent1"/>
-          </a:effectRef>
-          <a:fontRef idx="minor">
-            <a:schemeClr val="lt1"/>
-          </a:fontRef>
-        </p:style>
-        <p:txBody>
-          <a:bodyPr rtlCol="0" anchor="ctr"/>
-          <a:lstStyle/>
-          <a:p>
-            <a:pPr algn="ctr"/>
-          </a:p>
-        </p:txBody>
-      </p:sp>
-      <p:sp>
-        <p:nvSpPr>
-          <p:cNvPr id="453" name="TextBox 452"/>
-          <p:cNvSpPr txBox="1"/>
-          <p:nvPr/>
-        </p:nvSpPr>
-        <p:spPr>
-          <a:xfrm>
-            <a:off x="677387" y="1783080"/>
-            <a:ext cx="5427939" cy="1678732"/>
-          </a:xfrm>
-          <a:prstGeom prst="rect">
-            <a:avLst/>
-          </a:prstGeom>
-          <a:noFill/>
-        </p:spPr>
-        <p:txBody>
-          <a:bodyPr wrap="square" lIns="12700" rIns="12700" tIns="12700" bIns="12700">
-            <a:spAutoFit/>
-          </a:bodyPr>
-          <a:lstStyle/>
-          <a:p>
-            <a:pPr algn="ctr">
-              <a:defRPr sz="1400" b="0">
-                <a:solidFill>
-                  <a:srgbClr val="000000"/>
-                </a:solidFill>
-                <a:latin typeface="Play"/>
-                <a:ea typeface="Play"/>
-                <a:cs typeface="Play"/>
-              </a:defRPr>
-            </a:pPr>
-            <a:r>
-              <a:rPr sz="1400" b="0">
-                <a:solidFill>
-                  <a:srgbClr val="000000"/>
-                </a:solidFill>
-                <a:latin typeface="Play"/>
-                <a:ea typeface="Play"/>
-                <a:cs typeface="Play"/>
-              </a:rPr>
-              <a:t>Третий квартал 2026</a:t>
-            </a:r>
-          </a:p>
-        </p:txBody>
-      </p:sp>
-      <p:sp>
-        <p:nvSpPr>
-          <p:cNvPr id="454" name="Oval 453"/>
-          <p:cNvSpPr/>
-          <p:nvPr/>
-        </p:nvSpPr>
-        <p:spPr>
-          <a:xfrm>
-            <a:off x="5619377" y="3395546"/>
-            <a:ext cx="971897" cy="971897"/>
-          </a:xfrm>
-          <a:prstGeom prst="ellipse">
-            <a:avLst/>
-          </a:prstGeom>
-          <a:solidFill>
-            <a:srgbClr val="0077FF"/>
-          </a:solidFill>
-          <a:ln>
-            <a:noFill/>
-          </a:ln>
-        </p:spPr>
-        <p:style>
-          <a:lnRef idx="1">
-            <a:schemeClr val="accent1"/>
-          </a:lnRef>
-          <a:fillRef idx="3">
-            <a:schemeClr val="accent1"/>
-          </a:fillRef>
-          <a:effectRef idx="2">
-            <a:schemeClr val="accent1"/>
-          </a:effectRef>
-          <a:fontRef idx="minor">
-            <a:schemeClr val="lt1"/>
-          </a:fontRef>
-        </p:style>
-        <p:txBody>
-          <a:bodyPr rtlCol="0" anchor="ctr"/>
-          <a:lstStyle/>
-          <a:p>
-            <a:pPr algn="ctr"/>
-          </a:p>
-        </p:txBody>
-      </p:sp>
-      <p:sp>
-        <p:nvSpPr>
-          <p:cNvPr id="455" name="TextBox 454"/>
-          <p:cNvSpPr txBox="1"/>
-          <p:nvPr/>
-        </p:nvSpPr>
-        <p:spPr>
-          <a:xfrm>
-            <a:off x="3391356" y="4787127"/>
-            <a:ext cx="5427939" cy="1678732"/>
-          </a:xfrm>
-          <a:prstGeom prst="rect">
-            <a:avLst/>
-          </a:prstGeom>
-          <a:noFill/>
-        </p:spPr>
-        <p:txBody>
-          <a:bodyPr wrap="square" lIns="12700" rIns="12700" tIns="12700" bIns="12700">
-            <a:spAutoFit/>
-          </a:bodyPr>
-          <a:lstStyle/>
-          <a:p>
-            <a:pPr algn="ctr">
-              <a:defRPr sz="1400" b="0">
-                <a:solidFill>
-                  <a:srgbClr val="000000"/>
-                </a:solidFill>
-                <a:latin typeface="Play"/>
-                <a:ea typeface="Play"/>
-                <a:cs typeface="Play"/>
-              </a:defRPr>
-            </a:pPr>
-            <a:r>
-              <a:rPr sz="1400" b="0">
-                <a:solidFill>
-                  <a:srgbClr val="000000"/>
-                </a:solidFill>
-                <a:latin typeface="Play"/>
-                <a:ea typeface="Play"/>
-                <a:cs typeface="Play"/>
-              </a:rPr>
-              <a:t>Четвёртый квартал 2026</a:t>
-            </a:r>
-          </a:p>
-        </p:txBody>
-      </p:sp>
-      <p:sp>
-        <p:nvSpPr>
-          <p:cNvPr id="456" name="Oval 455"/>
-          <p:cNvSpPr/>
-          <p:nvPr/>
-        </p:nvSpPr>
-        <p:spPr>
-          <a:xfrm>
-            <a:off x="9238003" y="3395546"/>
-            <a:ext cx="971897" cy="971897"/>
-          </a:xfrm>
-          <a:prstGeom prst="ellipse">
-            <a:avLst/>
-          </a:prstGeom>
-          <a:solidFill>
-            <a:srgbClr val="0077FF"/>
-          </a:solidFill>
-          <a:ln>
-            <a:noFill/>
-          </a:ln>
-        </p:spPr>
-        <p:style>
-          <a:lnRef idx="1">
-            <a:schemeClr val="accent1"/>
-          </a:lnRef>
-          <a:fillRef idx="3">
-            <a:schemeClr val="accent1"/>
-          </a:fillRef>
-          <a:effectRef idx="2">
-            <a:schemeClr val="accent1"/>
-          </a:effectRef>
-          <a:fontRef idx="minor">
-            <a:schemeClr val="lt1"/>
-          </a:fontRef>
-        </p:style>
-        <p:txBody>
-          <a:bodyPr rtlCol="0" anchor="ctr"/>
-          <a:lstStyle/>
-          <a:p>
-            <a:pPr algn="ctr"/>
-          </a:p>
-        </p:txBody>
-      </p:sp>
-      <p:sp>
-        <p:nvSpPr>
-          <p:cNvPr id="457" name="TextBox 456"/>
-          <p:cNvSpPr txBox="1"/>
-          <p:nvPr/>
-        </p:nvSpPr>
-        <p:spPr>
-          <a:xfrm>
-            <a:off x="6105326" y="1783080"/>
-            <a:ext cx="5427939" cy="1678732"/>
-          </a:xfrm>
-          <a:prstGeom prst="rect">
-            <a:avLst/>
-          </a:prstGeom>
-          <a:noFill/>
-        </p:spPr>
-        <p:txBody>
-          <a:bodyPr wrap="square" lIns="12700" rIns="12700" tIns="12700" bIns="12700">
-            <a:spAutoFit/>
-          </a:bodyPr>
-          <a:lstStyle/>
-          <a:p>
-            <a:pPr algn="ctr">
-              <a:defRPr sz="1400" b="0">
-                <a:solidFill>
-                  <a:srgbClr val="000000"/>
-                </a:solidFill>
-                <a:latin typeface="Play"/>
-                <a:ea typeface="Play"/>
-                <a:cs typeface="Play"/>
-              </a:defRPr>
-            </a:pPr>
-            <a:r>
-              <a:rPr sz="1400" b="0">
-                <a:solidFill>
-                  <a:srgbClr val="000000"/>
-                </a:solidFill>
-                <a:latin typeface="Play"/>
-                <a:ea typeface="Play"/>
-                <a:cs typeface="Play"/>
-              </a:rPr>
-              <a:t>Первый квартал 2027</a:t>
-            </a:r>
-          </a:p>
-        </p:txBody>
-      </p:sp>
-    </p:spTree>
-  </p:cSld>
-  <p:clrMapOvr>
-    <a:masterClrMapping/>
-  </p:clrMapOvr>
-</p:sld>
-</file>
-
-<file path=ppt/slides/slide65.xml><?xml version="1.0" encoding="utf-8"?>
-<p:sld xmlns:a="http://schemas.openxmlformats.org/drawingml/2006/main" xmlns:p="http://schemas.openxmlformats.org/presentationml/2006/main" xmlns:r="http://schemas.openxmlformats.org/officeDocument/2006/relationships">
-  <p:cSld>
-    <p:bg>
-      <p:bgPr>
-        <a:solidFill>
-          <a:schemeClr val="lt2"/>
-        </a:solidFill>
-      </p:bgPr>
-    </p:bg>
-    <p:spTree>
-      <p:nvGrpSpPr>
-        <p:cNvPr id="1" name=""/>
-        <p:cNvGrpSpPr/>
-        <p:nvPr/>
-      </p:nvGrpSpPr>
-      <p:grpSpPr/>
-      <p:sp>
-        <p:nvSpPr>
-          <p:cNvPr id="764" name="Google Shape;764;p58"/>
-          <p:cNvSpPr txBox="1"/>
-          <p:nvPr/>
-        </p:nvSpPr>
-        <p:spPr>
-          <a:xfrm>
-            <a:off x="18692059" y="4674436"/>
-            <a:ext cx="4304330" cy="678198"/>
-          </a:xfrm>
-          <a:prstGeom prst="rect">
-            <a:avLst/>
-          </a:prstGeom>
-          <a:noFill/>
-          <a:ln>
-            <a:noFill/>
-          </a:ln>
-        </p:spPr>
-        <p:txBody>
-          <a:bodyPr anchorCtr="0" anchor="t" bIns="45700" lIns="91425" spcFirstLastPara="1" rIns="91425" wrap="square" tIns="45700">
-            <a:noAutofit/>
-          </a:bodyPr>
-          <a:lstStyle/>
-          <a:p>
-            <a:pPr indent="0" lvl="0" marL="0" marR="0" rtl="0" algn="l">
-              <a:lnSpc>
-                <a:spcPct val="110000"/>
-              </a:lnSpc>
-              <a:spcBef>
-                <a:spcPts val="0"/>
-              </a:spcBef>
-              <a:spcAft>
-                <a:spcPts val="0"/>
-              </a:spcAft>
-              <a:buClr>
-                <a:schemeClr val="dk1"/>
-              </a:buClr>
-              <a:buSzPts val="1600"/>
-              <a:buFont typeface="Arial"/>
-              <a:buNone/>
-            </a:pPr>
-            <a:r>
-              <a:t/>
-            </a:r>
-            <a:endParaRPr sz="1600">
-              <a:solidFill>
-                <a:schemeClr val="dk1"/>
-              </a:solidFill>
-              <a:latin typeface="Arial"/>
-              <a:ea typeface="Arial"/>
-              <a:cs typeface="Arial"/>
-              <a:sym typeface="Arial"/>
-            </a:endParaRPr>
-          </a:p>
-        </p:txBody>
-      </p:sp>
-      <p:sp>
-        <p:nvSpPr>
-          <p:cNvPr id="765" name="title"/>
-          <p:cNvSpPr txBox="1"/>
-          <p:nvPr/>
-        </p:nvSpPr>
-        <p:spPr>
-          <a:xfrm>
-            <a:off x="677387" y="692177"/>
-            <a:ext cx="10855878" cy="822960"/>
-          </a:xfrm>
-          <a:prstGeom prst="rect">
-            <a:avLst/>
-          </a:prstGeom>
-          <a:noFill/>
-        </p:spPr>
-        <p:txBody>
-          <a:bodyPr wrap="square" lIns="76200" rIns="76200" tIns="50800" bIns="50800">
-            <a:spAutoFit/>
-          </a:bodyPr>
-          <a:lstStyle/>
-          <a:p>
-            <a:pPr algn="l">
-              <a:spcAft>
-                <a:spcPts val="300"/>
-              </a:spcAft>
-              <a:defRPr sz="4000">
-                <a:solidFill>
-                  <a:srgbClr val="000000"/>
-                </a:solidFill>
-                <a:latin typeface="Arial"/>
-                <a:ea typeface="Arial"/>
-                <a:cs typeface="Arial"/>
-              </a:defRPr>
-            </a:pPr>
-            <a:r>
-              <a:rPr sz="4000">
-                <a:solidFill>
-                  <a:srgbClr val="000000"/>
-                </a:solidFill>
-                <a:latin typeface="Arial"/>
-                <a:ea typeface="Arial"/>
-                <a:cs typeface="Arial"/>
-              </a:rPr>
-              <a:t>Преимущества для компании</a:t>
+              <a:t>Главный риск — нагрузка выше 20 задач</a:t>
             </a:r>
           </a:p>
         </p:txBody>
       </p:sp>
       <p:grpSp>
         <p:nvGrpSpPr>
-          <p:cNvPr id="2" name="icon:builtin-zap"/>
+          <p:cNvPr id="2" name="icon:builtin-search"/>
           <p:cNvGrpSpPr/>
           <p:nvPr/>
         </p:nvGrpSpPr>
         <p:grpSpPr>
           <a:xfrm>
-            <a:off x="774542" y="1831657"/>
-            <a:ext cx="388620" cy="485775"/>
-            <a:chOff x="774542" y="1831657"/>
-            <a:chExt cx="388620" cy="485775"/>
+            <a:off x="774542" y="2477162"/>
+            <a:ext cx="412908" cy="412908"/>
+            <a:chOff x="774542" y="2477162"/>
+            <a:chExt cx="412908" cy="412908"/>
           </a:xfrm>
         </p:grpSpPr>
+        <p:sp>
+          <p:nvSpPr>
+            <p:cNvPr id="451" name="Oval 450"/>
+            <p:cNvSpPr/>
+            <p:nvPr/>
+          </p:nvSpPr>
+          <p:spPr>
+            <a:xfrm>
+              <a:off x="774542" y="2477162"/>
+              <a:ext cx="340042" cy="340042"/>
+            </a:xfrm>
+            <a:prstGeom prst="ellipse">
+              <a:avLst/>
+            </a:prstGeom>
+            <a:noFill/>
+            <a:ln w="48577" cap="rnd">
+              <a:solidFill>
+                <a:srgbClr val="0077FF"/>
+              </a:solidFill>
+              <a:round/>
+            </a:ln>
+            <a:effectLst/>
+          </p:spPr>
+          <p:style>
+            <a:lnRef idx="1">
+              <a:schemeClr val="accent1"/>
+            </a:lnRef>
+            <a:fillRef idx="3">
+              <a:schemeClr val="accent1"/>
+            </a:fillRef>
+            <a:effectRef idx="2">
+              <a:schemeClr val="accent1"/>
+            </a:effectRef>
+            <a:fontRef idx="minor">
+              <a:schemeClr val="lt1"/>
+            </a:fontRef>
+          </p:style>
+          <p:txBody>
+            <a:bodyPr rtlCol="0" anchor="ctr"/>
+            <a:lstStyle/>
+            <a:p>
+              <a:pPr algn="ctr"/>
+            </a:p>
+          </p:txBody>
+        </p:sp>
         <p:sp>
           <p:nvSpPr>
             <p:cNvPr id="3" name="Freeform 2"/>
@@ -14178,8 +13846,8 @@
           </p:nvSpPr>
           <p:spPr>
             <a:xfrm>
-              <a:off x="774542" y="1831657"/>
-              <a:ext cx="388620" cy="485775"/>
+              <a:off x="1070864" y="2773484"/>
+              <a:ext cx="116586" cy="116586"/>
             </a:xfrm>
             <a:custGeom>
               <a:avLst/>
@@ -14188,26 +13856,13 @@
               <a:cxnLst/>
               <a:rect l="l" t="t" r="r" b="b"/>
               <a:pathLst>
-                <a:path w="388620" h="485775">
+                <a:path w="116586" h="116586">
                   <a:moveTo>
-                    <a:pt x="218598" y="0"/>
+                    <a:pt x="0" y="0"/>
                   </a:moveTo>
                   <a:lnTo>
-                    <a:pt x="0" y="291465"/>
-                  </a:lnTo>
-                  <a:lnTo>
-                    <a:pt x="170021" y="291465"/>
-                  </a:lnTo>
-                  <a:lnTo>
-                    <a:pt x="145732" y="485775"/>
-                  </a:lnTo>
-                  <a:lnTo>
-                    <a:pt x="388620" y="170021"/>
-                  </a:lnTo>
-                  <a:lnTo>
-                    <a:pt x="218598" y="170021"/>
-                  </a:lnTo>
-                  <a:close/>
+                    <a:pt x="116586" y="116586"/>
+                  </a:lnTo>
                 </a:path>
               </a:pathLst>
             </a:custGeom>
@@ -14245,14 +13900,14 @@
       </p:grpSp>
       <p:sp>
         <p:nvSpPr>
-          <p:cNvPr id="766" name="item_0"/>
+          <p:cNvPr id="452" name="item_0"/>
           <p:cNvSpPr txBox="1"/>
           <p:nvPr/>
         </p:nvSpPr>
         <p:spPr>
           <a:xfrm>
-            <a:off x="1522636" y="1792605"/>
-            <a:ext cx="10010630" cy="957744"/>
+            <a:off x="1522636" y="2389532"/>
+            <a:ext cx="10010630" cy="1126911"/>
           </a:xfrm>
           <a:prstGeom prst="rect">
             <a:avLst/>
@@ -14287,225 +13942,34 @@
                 <a:ea typeface="Play"/>
                 <a:cs typeface="Play"/>
               </a:rPr>
-              <a:t>Ускорение создания презентаций до 4 мин</a:t>
+              <a:t>Модель может выдумать цифры, аудит проверяет</a:t>
             </a:r>
           </a:p>
         </p:txBody>
       </p:sp>
       <p:grpSp>
         <p:nvGrpSpPr>
-          <p:cNvPr id="4" name="icon:builtin-decline"/>
+          <p:cNvPr id="4" name="icon:builtin-question"/>
           <p:cNvGrpSpPr/>
           <p:nvPr/>
         </p:nvGrpSpPr>
         <p:grpSpPr>
           <a:xfrm>
-            <a:off x="750253" y="3057530"/>
-            <a:ext cx="437197" cy="242887"/>
-            <a:chOff x="750253" y="3057530"/>
-            <a:chExt cx="437197" cy="242887"/>
+            <a:off x="750253" y="3948085"/>
+            <a:ext cx="437197" cy="437197"/>
+            <a:chOff x="750253" y="3948085"/>
+            <a:chExt cx="437197" cy="437197"/>
           </a:xfrm>
         </p:grpSpPr>
         <p:sp>
           <p:nvSpPr>
-            <p:cNvPr id="5" name="Freeform 4"/>
+            <p:cNvPr id="453" name="Oval 452"/>
             <p:cNvSpPr/>
             <p:nvPr/>
           </p:nvSpPr>
           <p:spPr>
             <a:xfrm>
-              <a:off x="750253" y="3057530"/>
-              <a:ext cx="437197" cy="242887"/>
-            </a:xfrm>
-            <a:custGeom>
-              <a:avLst/>
-              <a:gdLst/>
-              <a:ahLst/>
-              <a:cxnLst/>
-              <a:rect l="l" t="t" r="r" b="b"/>
-              <a:pathLst>
-                <a:path w="437197" h="242887">
-                  <a:moveTo>
-                    <a:pt x="0" y="0"/>
-                  </a:moveTo>
-                  <a:lnTo>
-                    <a:pt x="145732" y="145732"/>
-                  </a:lnTo>
-                  <a:lnTo>
-                    <a:pt x="242887" y="48577"/>
-                  </a:lnTo>
-                  <a:lnTo>
-                    <a:pt x="437197" y="242887"/>
-                  </a:lnTo>
-                </a:path>
-              </a:pathLst>
-            </a:custGeom>
-            <a:noFill/>
-            <a:ln w="48577" cap="rnd">
-              <a:solidFill>
-                <a:srgbClr val="0077FF"/>
-              </a:solidFill>
-              <a:round/>
-            </a:ln>
-            <a:effectLst/>
-          </p:spPr>
-          <p:style>
-            <a:lnRef idx="1">
-              <a:schemeClr val="accent1"/>
-            </a:lnRef>
-            <a:fillRef idx="3">
-              <a:schemeClr val="accent1"/>
-            </a:fillRef>
-            <a:effectRef idx="2">
-              <a:schemeClr val="accent1"/>
-            </a:effectRef>
-            <a:fontRef idx="minor">
-              <a:schemeClr val="lt1"/>
-            </a:fontRef>
-          </p:style>
-          <p:txBody>
-            <a:bodyPr rtlCol="0" anchor="ctr"/>
-            <a:lstStyle/>
-            <a:p>
-              <a:pPr algn="ctr"/>
-            </a:p>
-          </p:txBody>
-        </p:sp>
-        <p:sp>
-          <p:nvSpPr>
-            <p:cNvPr id="6" name="Freeform 5"/>
-            <p:cNvSpPr/>
-            <p:nvPr/>
-          </p:nvSpPr>
-          <p:spPr>
-            <a:xfrm>
-              <a:off x="1041718" y="3154685"/>
-              <a:ext cx="145732" cy="145732"/>
-            </a:xfrm>
-            <a:custGeom>
-              <a:avLst/>
-              <a:gdLst/>
-              <a:ahLst/>
-              <a:cxnLst/>
-              <a:rect l="l" t="t" r="r" b="b"/>
-              <a:pathLst>
-                <a:path w="145732" h="145732">
-                  <a:moveTo>
-                    <a:pt x="145732" y="0"/>
-                  </a:moveTo>
-                  <a:lnTo>
-                    <a:pt x="145732" y="145732"/>
-                  </a:lnTo>
-                  <a:lnTo>
-                    <a:pt x="0" y="145732"/>
-                  </a:lnTo>
-                </a:path>
-              </a:pathLst>
-            </a:custGeom>
-            <a:noFill/>
-            <a:ln w="48577" cap="rnd">
-              <a:solidFill>
-                <a:srgbClr val="0077FF"/>
-              </a:solidFill>
-              <a:round/>
-            </a:ln>
-            <a:effectLst/>
-          </p:spPr>
-          <p:style>
-            <a:lnRef idx="1">
-              <a:schemeClr val="accent1"/>
-            </a:lnRef>
-            <a:fillRef idx="3">
-              <a:schemeClr val="accent1"/>
-            </a:fillRef>
-            <a:effectRef idx="2">
-              <a:schemeClr val="accent1"/>
-            </a:effectRef>
-            <a:fontRef idx="minor">
-              <a:schemeClr val="lt1"/>
-            </a:fontRef>
-          </p:style>
-          <p:txBody>
-            <a:bodyPr rtlCol="0" anchor="ctr"/>
-            <a:lstStyle/>
-            <a:p>
-              <a:pPr algn="ctr"/>
-            </a:p>
-          </p:txBody>
-        </p:sp>
-      </p:grpSp>
-      <p:sp>
-        <p:nvSpPr>
-          <p:cNvPr id="767" name="item_1"/>
-          <p:cNvSpPr txBox="1"/>
-          <p:nvPr/>
-        </p:nvSpPr>
-        <p:spPr>
-          <a:xfrm>
-            <a:off x="1522636" y="2897034"/>
-            <a:ext cx="10010630" cy="957744"/>
-          </a:xfrm>
-          <a:prstGeom prst="rect">
-            <a:avLst/>
-          </a:prstGeom>
-          <a:noFill/>
-        </p:spPr>
-        <p:txBody>
-          <a:bodyPr wrap="square" lIns="76200" rIns="76200" tIns="50800" bIns="50800">
-            <a:spAutoFit/>
-          </a:bodyPr>
-          <a:lstStyle/>
-          <a:p>
-            <a:pPr algn="l">
-              <a:spcAft>
-                <a:spcPts val="300"/>
-              </a:spcAft>
-              <a:defRPr sz="2800">
-                <a:solidFill>
-                  <a:srgbClr val="000000"/>
-                </a:solidFill>
-                <a:latin typeface="Play"/>
-                <a:ea typeface="Play"/>
-                <a:cs typeface="Play"/>
-              </a:defRPr>
-            </a:pPr>
-            <a:r>
-              <a:rPr sz="2800">
-                <a:solidFill>
-                  <a:srgbClr val="000000"/>
-                </a:solidFill>
-                <a:latin typeface="Play"/>
-                <a:ea typeface="Play"/>
-                <a:cs typeface="Play"/>
-              </a:rPr>
-              <a:t>Снижение ошибок стиля до 2 из 68 колод</a:t>
-            </a:r>
-          </a:p>
-        </p:txBody>
-      </p:sp>
-      <p:grpSp>
-        <p:nvGrpSpPr>
-          <p:cNvPr id="7" name="icon:builtin-money"/>
-          <p:cNvGrpSpPr/>
-          <p:nvPr/>
-        </p:nvGrpSpPr>
-        <p:grpSpPr>
-          <a:xfrm>
-            <a:off x="750253" y="4064804"/>
-            <a:ext cx="437197" cy="437197"/>
-            <a:chOff x="750253" y="4064804"/>
-            <a:chExt cx="437197" cy="437197"/>
-          </a:xfrm>
-        </p:grpSpPr>
-        <p:sp>
-          <p:nvSpPr>
-            <p:cNvPr id="768" name="Oval 767"/>
-            <p:cNvSpPr/>
-            <p:nvPr/>
-          </p:nvSpPr>
-          <p:spPr>
-            <a:xfrm>
-              <a:off x="750253" y="4064804"/>
+              <a:off x="750253" y="3948085"/>
               <a:ext cx="437197" cy="437197"/>
             </a:xfrm>
             <a:prstGeom prst="ellipse">
@@ -14544,14 +14008,14 @@
         </p:sp>
         <p:sp>
           <p:nvSpPr>
-            <p:cNvPr id="8" name="Freeform 7"/>
+            <p:cNvPr id="5" name="Freeform 4"/>
             <p:cNvSpPr/>
             <p:nvPr/>
           </p:nvSpPr>
           <p:spPr>
             <a:xfrm>
-              <a:off x="871697" y="4161959"/>
-              <a:ext cx="194310" cy="242887"/>
+              <a:off x="908130" y="4044195"/>
+              <a:ext cx="121346" cy="158922"/>
             </a:xfrm>
             <a:custGeom>
               <a:avLst/>
@@ -14560,66 +14024,105 @@
               <a:cxnLst/>
               <a:rect l="l" t="t" r="r" b="b"/>
               <a:pathLst>
-                <a:path w="194310" h="242887">
+                <a:path w="121346" h="158922">
                   <a:moveTo>
-                    <a:pt x="48577" y="242887"/>
+                    <a:pt x="0" y="61767"/>
                   </a:moveTo>
                   <a:lnTo>
-                    <a:pt x="48577" y="0"/>
-                  </a:lnTo>
-                  <a:lnTo>
-                    <a:pt x="133588" y="0"/>
-                  </a:lnTo>
-                  <a:lnTo>
-                    <a:pt x="145441" y="1166"/>
-                  </a:lnTo>
-                  <a:lnTo>
-                    <a:pt x="156832" y="4615"/>
-                  </a:lnTo>
-                  <a:lnTo>
-                    <a:pt x="167325" y="10225"/>
-                  </a:lnTo>
-                  <a:lnTo>
-                    <a:pt x="176530" y="17779"/>
-                  </a:lnTo>
-                  <a:lnTo>
-                    <a:pt x="184084" y="26985"/>
-                  </a:lnTo>
-                  <a:lnTo>
-                    <a:pt x="189695" y="37477"/>
-                  </a:lnTo>
-                  <a:lnTo>
-                    <a:pt x="193144" y="48869"/>
-                  </a:lnTo>
-                  <a:lnTo>
-                    <a:pt x="194310" y="60722"/>
-                  </a:lnTo>
-                  <a:lnTo>
-                    <a:pt x="193144" y="72575"/>
-                  </a:lnTo>
-                  <a:lnTo>
-                    <a:pt x="189695" y="83966"/>
-                  </a:lnTo>
-                  <a:lnTo>
-                    <a:pt x="184084" y="94459"/>
-                  </a:lnTo>
-                  <a:lnTo>
-                    <a:pt x="176530" y="103664"/>
-                  </a:lnTo>
-                  <a:lnTo>
-                    <a:pt x="167325" y="111218"/>
-                  </a:lnTo>
-                  <a:lnTo>
-                    <a:pt x="156832" y="116829"/>
-                  </a:lnTo>
-                  <a:lnTo>
-                    <a:pt x="145441" y="120278"/>
-                  </a:lnTo>
-                  <a:lnTo>
-                    <a:pt x="133588" y="121444"/>
-                  </a:lnTo>
-                  <a:lnTo>
-                    <a:pt x="0" y="121444"/>
+                    <a:pt x="923" y="50035"/>
+                  </a:lnTo>
+                  <a:lnTo>
+                    <a:pt x="4104" y="38692"/>
+                  </a:lnTo>
+                  <a:lnTo>
+                    <a:pt x="9424" y="28175"/>
+                  </a:lnTo>
+                  <a:lnTo>
+                    <a:pt x="16662" y="18873"/>
+                  </a:lnTo>
+                  <a:lnTo>
+                    <a:pt x="25576" y="11149"/>
+                  </a:lnTo>
+                  <a:lnTo>
+                    <a:pt x="35801" y="5295"/>
+                  </a:lnTo>
+                  <a:lnTo>
+                    <a:pt x="46950" y="1531"/>
+                  </a:lnTo>
+                  <a:lnTo>
+                    <a:pt x="58633" y="0"/>
+                  </a:lnTo>
+                  <a:lnTo>
+                    <a:pt x="70388" y="729"/>
+                  </a:lnTo>
+                  <a:lnTo>
+                    <a:pt x="81780" y="3717"/>
+                  </a:lnTo>
+                  <a:lnTo>
+                    <a:pt x="92370" y="8866"/>
+                  </a:lnTo>
+                  <a:lnTo>
+                    <a:pt x="101794" y="15958"/>
+                  </a:lnTo>
+                  <a:lnTo>
+                    <a:pt x="109639" y="24726"/>
+                  </a:lnTo>
+                  <a:lnTo>
+                    <a:pt x="115663" y="34855"/>
+                  </a:lnTo>
+                  <a:lnTo>
+                    <a:pt x="119622" y="45955"/>
+                  </a:lnTo>
+                  <a:lnTo>
+                    <a:pt x="121346" y="57589"/>
+                  </a:lnTo>
+                  <a:lnTo>
+                    <a:pt x="120812" y="69369"/>
+                  </a:lnTo>
+                  <a:lnTo>
+                    <a:pt x="117994" y="80809"/>
+                  </a:lnTo>
+                  <a:lnTo>
+                    <a:pt x="113039" y="91496"/>
+                  </a:lnTo>
+                  <a:lnTo>
+                    <a:pt x="106093" y="101017"/>
+                  </a:lnTo>
+                  <a:lnTo>
+                    <a:pt x="97470" y="109008"/>
+                  </a:lnTo>
+                  <a:lnTo>
+                    <a:pt x="87439" y="115202"/>
+                  </a:lnTo>
+                  <a:lnTo>
+                    <a:pt x="82557" y="118262"/>
+                  </a:lnTo>
+                  <a:lnTo>
+                    <a:pt x="78137" y="121614"/>
+                  </a:lnTo>
+                  <a:lnTo>
+                    <a:pt x="74177" y="125257"/>
+                  </a:lnTo>
+                  <a:lnTo>
+                    <a:pt x="70680" y="129192"/>
+                  </a:lnTo>
+                  <a:lnTo>
+                    <a:pt x="67717" y="133418"/>
+                  </a:lnTo>
+                  <a:lnTo>
+                    <a:pt x="65239" y="137936"/>
+                  </a:lnTo>
+                  <a:lnTo>
+                    <a:pt x="63272" y="142745"/>
+                  </a:lnTo>
+                  <a:lnTo>
+                    <a:pt x="61863" y="147846"/>
+                  </a:lnTo>
+                  <a:lnTo>
+                    <a:pt x="61013" y="153238"/>
+                  </a:lnTo>
+                  <a:lnTo>
+                    <a:pt x="60722" y="158922"/>
                   </a:lnTo>
                 </a:path>
               </a:pathLst>
@@ -14657,38 +14160,23 @@
         </p:sp>
         <p:sp>
           <p:nvSpPr>
-            <p:cNvPr id="9" name="Freeform 8"/>
+            <p:cNvPr id="454" name="Oval 453"/>
             <p:cNvSpPr/>
             <p:nvPr/>
           </p:nvSpPr>
           <p:spPr>
             <a:xfrm>
-              <a:off x="871697" y="4351411"/>
-              <a:ext cx="145732" cy="0"/>
+              <a:off x="942134" y="4261410"/>
+              <a:ext cx="53435" cy="53435"/>
             </a:xfrm>
-            <a:custGeom>
+            <a:prstGeom prst="ellipse">
               <a:avLst/>
-              <a:gdLst/>
-              <a:ahLst/>
-              <a:cxnLst/>
-              <a:rect l="l" t="t" r="r" b="b"/>
-              <a:pathLst>
-                <a:path w="145732" h="0">
-                  <a:moveTo>
-                    <a:pt x="0" y="0"/>
-                  </a:moveTo>
-                  <a:lnTo>
-                    <a:pt x="145732" y="0"/>
-                  </a:lnTo>
-                </a:path>
-              </a:pathLst>
-            </a:custGeom>
-            <a:noFill/>
-            <a:ln w="48577" cap="rnd">
-              <a:solidFill>
-                <a:srgbClr val="0077FF"/>
-              </a:solidFill>
-              <a:round/>
+            </a:prstGeom>
+            <a:solidFill>
+              <a:srgbClr val="0077FF"/>
+            </a:solidFill>
+            <a:ln>
+              <a:noFill/>
             </a:ln>
             <a:effectLst/>
           </p:spPr>
@@ -14717,14 +14205,14 @@
       </p:grpSp>
       <p:sp>
         <p:nvSpPr>
-          <p:cNvPr id="769" name="item_2"/>
+          <p:cNvPr id="455" name="item_1"/>
           <p:cNvSpPr txBox="1"/>
           <p:nvPr/>
         </p:nvSpPr>
         <p:spPr>
           <a:xfrm>
-            <a:off x="1522636" y="4001463"/>
-            <a:ext cx="10010630" cy="957744"/>
+            <a:off x="1522636" y="3653604"/>
+            <a:ext cx="10010630" cy="1136436"/>
           </a:xfrm>
           <a:prstGeom prst="rect">
             <a:avLst/>
@@ -14759,56 +14247,39 @@
                 <a:ea typeface="Play"/>
                 <a:cs typeface="Play"/>
               </a:rPr>
-              <a:t>Экономия времени дизайнеров</a:t>
+              <a:t>Неизвестный шаблон может быть плохо сделан, сервис использует рабочую область</a:t>
             </a:r>
           </a:p>
         </p:txBody>
       </p:sp>
       <p:grpSp>
         <p:nvGrpSpPr>
-          <p:cNvPr id="10" name="icon:builtin-expand"/>
+          <p:cNvPr id="6" name="icon:builtin-target"/>
           <p:cNvGrpSpPr/>
           <p:nvPr/>
         </p:nvGrpSpPr>
         <p:grpSpPr>
           <a:xfrm>
-            <a:off x="750253" y="5169234"/>
+            <a:off x="750253" y="5000067"/>
             <a:ext cx="437197" cy="437197"/>
-            <a:chOff x="750253" y="5169234"/>
+            <a:chOff x="750253" y="5000067"/>
             <a:chExt cx="437197" cy="437197"/>
           </a:xfrm>
         </p:grpSpPr>
         <p:sp>
           <p:nvSpPr>
-            <p:cNvPr id="11" name="Freeform 10"/>
+            <p:cNvPr id="456" name="Oval 455"/>
             <p:cNvSpPr/>
             <p:nvPr/>
           </p:nvSpPr>
           <p:spPr>
             <a:xfrm>
-              <a:off x="1041718" y="5169234"/>
-              <a:ext cx="145732" cy="145732"/>
+              <a:off x="750253" y="5000067"/>
+              <a:ext cx="437197" cy="437197"/>
             </a:xfrm>
-            <a:custGeom>
+            <a:prstGeom prst="ellipse">
               <a:avLst/>
-              <a:gdLst/>
-              <a:ahLst/>
-              <a:cxnLst/>
-              <a:rect l="l" t="t" r="r" b="b"/>
-              <a:pathLst>
-                <a:path w="145732" h="145732">
-                  <a:moveTo>
-                    <a:pt x="0" y="0"/>
-                  </a:moveTo>
-                  <a:lnTo>
-                    <a:pt x="145732" y="0"/>
-                  </a:lnTo>
-                  <a:lnTo>
-                    <a:pt x="145732" y="145732"/>
-                  </a:lnTo>
-                </a:path>
-              </a:pathLst>
-            </a:custGeom>
+            </a:prstGeom>
             <a:noFill/>
             <a:ln w="48577" cap="rnd">
               <a:solidFill>
@@ -14842,35 +14313,18 @@
         </p:sp>
         <p:sp>
           <p:nvSpPr>
-            <p:cNvPr id="12" name="Freeform 11"/>
+            <p:cNvPr id="457" name="Oval 456"/>
             <p:cNvSpPr/>
             <p:nvPr/>
           </p:nvSpPr>
           <p:spPr>
             <a:xfrm>
-              <a:off x="750253" y="5460699"/>
-              <a:ext cx="145732" cy="145732"/>
+              <a:off x="847408" y="5097222"/>
+              <a:ext cx="242887" cy="242887"/>
             </a:xfrm>
-            <a:custGeom>
+            <a:prstGeom prst="ellipse">
               <a:avLst/>
-              <a:gdLst/>
-              <a:ahLst/>
-              <a:cxnLst/>
-              <a:rect l="l" t="t" r="r" b="b"/>
-              <a:pathLst>
-                <a:path w="145732" h="145732">
-                  <a:moveTo>
-                    <a:pt x="145732" y="145732"/>
-                  </a:moveTo>
-                  <a:lnTo>
-                    <a:pt x="0" y="145732"/>
-                  </a:lnTo>
-                  <a:lnTo>
-                    <a:pt x="0" y="0"/>
-                  </a:lnTo>
-                </a:path>
-              </a:pathLst>
-            </a:custGeom>
+            </a:prstGeom>
             <a:noFill/>
             <a:ln w="48577" cap="rnd">
               <a:solidFill>
@@ -14904,97 +14358,23 @@
         </p:sp>
         <p:sp>
           <p:nvSpPr>
-            <p:cNvPr id="13" name="Freeform 12"/>
+            <p:cNvPr id="458" name="Oval 457"/>
             <p:cNvSpPr/>
             <p:nvPr/>
           </p:nvSpPr>
           <p:spPr>
             <a:xfrm>
-              <a:off x="1017429" y="5169234"/>
-              <a:ext cx="170021" cy="170021"/>
+              <a:off x="934847" y="5184661"/>
+              <a:ext cx="68008" cy="68008"/>
             </a:xfrm>
-            <a:custGeom>
+            <a:prstGeom prst="ellipse">
               <a:avLst/>
-              <a:gdLst/>
-              <a:ahLst/>
-              <a:cxnLst/>
-              <a:rect l="l" t="t" r="r" b="b"/>
-              <a:pathLst>
-                <a:path w="170021" h="170021">
-                  <a:moveTo>
-                    <a:pt x="170021" y="0"/>
-                  </a:moveTo>
-                  <a:lnTo>
-                    <a:pt x="0" y="170021"/>
-                  </a:lnTo>
-                </a:path>
-              </a:pathLst>
-            </a:custGeom>
-            <a:noFill/>
-            <a:ln w="48577" cap="rnd">
-              <a:solidFill>
-                <a:srgbClr val="0077FF"/>
-              </a:solidFill>
-              <a:round/>
-            </a:ln>
-            <a:effectLst/>
-          </p:spPr>
-          <p:style>
-            <a:lnRef idx="1">
-              <a:schemeClr val="accent1"/>
-            </a:lnRef>
-            <a:fillRef idx="3">
-              <a:schemeClr val="accent1"/>
-            </a:fillRef>
-            <a:effectRef idx="2">
-              <a:schemeClr val="accent1"/>
-            </a:effectRef>
-            <a:fontRef idx="minor">
-              <a:schemeClr val="lt1"/>
-            </a:fontRef>
-          </p:style>
-          <p:txBody>
-            <a:bodyPr rtlCol="0" anchor="ctr"/>
-            <a:lstStyle/>
-            <a:p>
-              <a:pPr algn="ctr"/>
-            </a:p>
-          </p:txBody>
-        </p:sp>
-        <p:sp>
-          <p:nvSpPr>
-            <p:cNvPr id="14" name="Freeform 13"/>
-            <p:cNvSpPr/>
-            <p:nvPr/>
-          </p:nvSpPr>
-          <p:spPr>
-            <a:xfrm>
-              <a:off x="750253" y="5436410"/>
-              <a:ext cx="170021" cy="170021"/>
-            </a:xfrm>
-            <a:custGeom>
-              <a:avLst/>
-              <a:gdLst/>
-              <a:ahLst/>
-              <a:cxnLst/>
-              <a:rect l="l" t="t" r="r" b="b"/>
-              <a:pathLst>
-                <a:path w="170021" h="170021">
-                  <a:moveTo>
-                    <a:pt x="0" y="170021"/>
-                  </a:moveTo>
-                  <a:lnTo>
-                    <a:pt x="170021" y="0"/>
-                  </a:lnTo>
-                </a:path>
-              </a:pathLst>
-            </a:custGeom>
-            <a:noFill/>
-            <a:ln w="48577" cap="rnd">
-              <a:solidFill>
-                <a:srgbClr val="0077FF"/>
-              </a:solidFill>
-              <a:round/>
+            </a:prstGeom>
+            <a:solidFill>
+              <a:srgbClr val="0077FF"/>
+            </a:solidFill>
+            <a:ln>
+              <a:noFill/>
             </a:ln>
             <a:effectLst/>
           </p:spPr>
@@ -15023,14 +14403,14 @@
       </p:grpSp>
       <p:sp>
         <p:nvSpPr>
-          <p:cNvPr id="770" name="item_3"/>
+          <p:cNvPr id="459" name="item_2"/>
           <p:cNvSpPr txBox="1"/>
           <p:nvPr/>
         </p:nvSpPr>
         <p:spPr>
           <a:xfrm>
-            <a:off x="1522636" y="5105893"/>
-            <a:ext cx="10010630" cy="957744"/>
+            <a:off x="1522636" y="4936726"/>
+            <a:ext cx="10010630" cy="1126911"/>
           </a:xfrm>
           <a:prstGeom prst="rect">
             <a:avLst/>
@@ -15065,7 +14445,440 @@
                 <a:ea typeface="Play"/>
                 <a:cs typeface="Play"/>
               </a:rPr>
-              <a:t>Масштабируемость без дополнительных сотрудников</a:t>
+              <a:t>Нагрузка выше 20 задач требует внешней очереди</a:t>
+            </a:r>
+          </a:p>
+        </p:txBody>
+      </p:sp>
+    </p:spTree>
+  </p:cSld>
+  <p:clrMapOvr>
+    <a:masterClrMapping/>
+  </p:clrMapOvr>
+</p:sld>
+</file>
+
+<file path=ppt/slides/slide65.xml><?xml version="1.0" encoding="utf-8"?>
+<p:sld xmlns:a="http://schemas.openxmlformats.org/drawingml/2006/main" xmlns:p="http://schemas.openxmlformats.org/presentationml/2006/main" xmlns:r="http://schemas.openxmlformats.org/officeDocument/2006/relationships">
+  <p:cSld>
+    <p:spTree>
+      <p:nvGrpSpPr>
+        <p:cNvPr id="1" name=""/>
+        <p:cNvGrpSpPr/>
+        <p:nvPr/>
+      </p:nvGrpSpPr>
+      <p:grpSpPr/>
+      <p:sp>
+        <p:nvSpPr>
+          <p:cNvPr id="2" name="title"/>
+          <p:cNvSpPr txBox="1"/>
+          <p:nvPr/>
+        </p:nvSpPr>
+        <p:spPr>
+          <a:xfrm>
+            <a:off x="677387" y="692177"/>
+            <a:ext cx="10855878" cy="919480"/>
+          </a:xfrm>
+          <a:prstGeom prst="rect">
+            <a:avLst/>
+          </a:prstGeom>
+          <a:noFill/>
+        </p:spPr>
+        <p:txBody>
+          <a:bodyPr wrap="square" lIns="76200" rIns="76200" tIns="50800" bIns="50800">
+            <a:spAutoFit/>
+          </a:bodyPr>
+          <a:lstStyle/>
+          <a:p>
+            <a:pPr algn="l">
+              <a:spcAft>
+                <a:spcPts val="300"/>
+              </a:spcAft>
+              <a:defRPr sz="4800">
+                <a:solidFill>
+                  <a:srgbClr val="000000"/>
+                </a:solidFill>
+                <a:latin typeface="Arial"/>
+                <a:ea typeface="Arial"/>
+                <a:cs typeface="Arial"/>
+              </a:defRPr>
+            </a:pPr>
+            <a:r>
+              <a:rPr sz="4800">
+                <a:solidFill>
+                  <a:srgbClr val="000000"/>
+                </a:solidFill>
+                <a:latin typeface="Arial"/>
+                <a:ea typeface="Arial"/>
+                <a:cs typeface="Arial"/>
+              </a:rPr>
+              <a:t>3Q 2026 – 4Q 2026 – 1Q 2027</a:t>
+            </a:r>
+          </a:p>
+        </p:txBody>
+      </p:sp>
+      <p:sp>
+        <p:nvSpPr>
+          <p:cNvPr id="3" name="stat_0:bar"/>
+          <p:cNvSpPr/>
+          <p:nvPr/>
+        </p:nvSpPr>
+        <p:spPr>
+          <a:xfrm>
+            <a:off x="677387" y="1961415"/>
+            <a:ext cx="50800" cy="2338832"/>
+          </a:xfrm>
+          <a:prstGeom prst="rect">
+            <a:avLst/>
+          </a:prstGeom>
+          <a:solidFill>
+            <a:srgbClr val="0077FF"/>
+          </a:solidFill>
+          <a:ln>
+            <a:noFill/>
+          </a:ln>
+          <a:effectLst/>
+        </p:spPr>
+        <p:style>
+          <a:lnRef idx="1">
+            <a:schemeClr val="accent1"/>
+          </a:lnRef>
+          <a:fillRef idx="3">
+            <a:schemeClr val="accent1"/>
+          </a:fillRef>
+          <a:effectRef idx="2">
+            <a:schemeClr val="accent1"/>
+          </a:effectRef>
+          <a:fontRef idx="minor">
+            <a:schemeClr val="lt1"/>
+          </a:fontRef>
+        </p:style>
+        <p:txBody>
+          <a:bodyPr rtlCol="0" anchor="ctr"/>
+          <a:lstStyle/>
+          <a:p>
+            <a:pPr algn="ctr"/>
+          </a:p>
+        </p:txBody>
+      </p:sp>
+      <p:sp>
+        <p:nvSpPr>
+          <p:cNvPr id="4" name="stat_0"/>
+          <p:cNvSpPr txBox="1"/>
+          <p:nvPr/>
+        </p:nvSpPr>
+        <p:spPr>
+          <a:xfrm>
+            <a:off x="855187" y="1851687"/>
+            <a:ext cx="3151336" cy="2448560"/>
+          </a:xfrm>
+          <a:prstGeom prst="rect">
+            <a:avLst/>
+          </a:prstGeom>
+          <a:noFill/>
+        </p:spPr>
+        <p:txBody>
+          <a:bodyPr wrap="square" lIns="76200" rIns="76200" tIns="0" bIns="0">
+            <a:spAutoFit/>
+          </a:bodyPr>
+          <a:lstStyle/>
+          <a:p>
+            <a:pPr>
+              <a:lnSpc>
+                <a:spcPct val="100000"/>
+              </a:lnSpc>
+              <a:spcAft>
+                <a:spcPts val="200"/>
+              </a:spcAft>
+              <a:defRPr sz="4800" b="1">
+                <a:solidFill>
+                  <a:srgbClr val="0077FF"/>
+                </a:solidFill>
+                <a:latin typeface="Play"/>
+                <a:ea typeface="Play"/>
+                <a:cs typeface="Play"/>
+              </a:defRPr>
+            </a:pPr>
+            <a:r>
+              <a:rPr sz="4800" b="1">
+                <a:solidFill>
+                  <a:srgbClr val="0077FF"/>
+                </a:solidFill>
+                <a:latin typeface="Play"/>
+                <a:ea typeface="Play"/>
+                <a:cs typeface="Play"/>
+              </a:rPr>
+              <a:t>2026</a:t>
+            </a:r>
+          </a:p>
+          <a:p>
+            <a:pPr>
+              <a:spcAft>
+                <a:spcPts val="300"/>
+              </a:spcAft>
+              <a:defRPr sz="2400" b="0">
+                <a:solidFill>
+                  <a:srgbClr val="000000"/>
+                </a:solidFill>
+                <a:latin typeface="Play"/>
+                <a:ea typeface="Play"/>
+                <a:cs typeface="Play"/>
+              </a:defRPr>
+            </a:pPr>
+            <a:r>
+              <a:rPr sz="2400" b="0">
+                <a:solidFill>
+                  <a:srgbClr val="000000"/>
+                </a:solidFill>
+                <a:latin typeface="Play"/>
+                <a:ea typeface="Play"/>
+                <a:cs typeface="Play"/>
+              </a:rPr>
+              <a:t>Третий квартал 2026: подключение 4 команд, домен и HTTPS</a:t>
+            </a:r>
+          </a:p>
+        </p:txBody>
+      </p:sp>
+      <p:sp>
+        <p:nvSpPr>
+          <p:cNvPr id="5" name="stat_1:bar"/>
+          <p:cNvSpPr/>
+          <p:nvPr/>
+        </p:nvSpPr>
+        <p:spPr>
+          <a:xfrm>
+            <a:off x="4440758" y="1961415"/>
+            <a:ext cx="50800" cy="2735072"/>
+          </a:xfrm>
+          <a:prstGeom prst="rect">
+            <a:avLst/>
+          </a:prstGeom>
+          <a:solidFill>
+            <a:srgbClr val="0077FF"/>
+          </a:solidFill>
+          <a:ln>
+            <a:noFill/>
+          </a:ln>
+          <a:effectLst/>
+        </p:spPr>
+        <p:style>
+          <a:lnRef idx="1">
+            <a:schemeClr val="accent1"/>
+          </a:lnRef>
+          <a:fillRef idx="3">
+            <a:schemeClr val="accent1"/>
+          </a:fillRef>
+          <a:effectRef idx="2">
+            <a:schemeClr val="accent1"/>
+          </a:effectRef>
+          <a:fontRef idx="minor">
+            <a:schemeClr val="lt1"/>
+          </a:fontRef>
+        </p:style>
+        <p:txBody>
+          <a:bodyPr rtlCol="0" anchor="ctr"/>
+          <a:lstStyle/>
+          <a:p>
+            <a:pPr algn="ctr"/>
+          </a:p>
+        </p:txBody>
+      </p:sp>
+      <p:sp>
+        <p:nvSpPr>
+          <p:cNvPr id="6" name="stat_1"/>
+          <p:cNvSpPr txBox="1"/>
+          <p:nvPr/>
+        </p:nvSpPr>
+        <p:spPr>
+          <a:xfrm>
+            <a:off x="4618558" y="1851687"/>
+            <a:ext cx="3151336" cy="2844800"/>
+          </a:xfrm>
+          <a:prstGeom prst="rect">
+            <a:avLst/>
+          </a:prstGeom>
+          <a:noFill/>
+        </p:spPr>
+        <p:txBody>
+          <a:bodyPr wrap="square" lIns="76200" rIns="76200" tIns="0" bIns="0">
+            <a:spAutoFit/>
+          </a:bodyPr>
+          <a:lstStyle/>
+          <a:p>
+            <a:pPr>
+              <a:lnSpc>
+                <a:spcPct val="100000"/>
+              </a:lnSpc>
+              <a:spcAft>
+                <a:spcPts val="200"/>
+              </a:spcAft>
+              <a:defRPr sz="4800" b="1">
+                <a:solidFill>
+                  <a:srgbClr val="0077FF"/>
+                </a:solidFill>
+                <a:latin typeface="Play"/>
+                <a:ea typeface="Play"/>
+                <a:cs typeface="Play"/>
+              </a:defRPr>
+            </a:pPr>
+            <a:r>
+              <a:rPr sz="4800" b="1">
+                <a:solidFill>
+                  <a:srgbClr val="0077FF"/>
+                </a:solidFill>
+                <a:latin typeface="Play"/>
+                <a:ea typeface="Play"/>
+                <a:cs typeface="Play"/>
+              </a:rPr>
+              <a:t>2026</a:t>
+            </a:r>
+          </a:p>
+          <a:p>
+            <a:pPr>
+              <a:spcAft>
+                <a:spcPts val="300"/>
+              </a:spcAft>
+              <a:defRPr sz="2400" b="0">
+                <a:solidFill>
+                  <a:srgbClr val="000000"/>
+                </a:solidFill>
+                <a:latin typeface="Play"/>
+                <a:ea typeface="Play"/>
+                <a:cs typeface="Play"/>
+              </a:defRPr>
+            </a:pPr>
+            <a:r>
+              <a:rPr sz="2400" b="0">
+                <a:solidFill>
+                  <a:srgbClr val="000000"/>
+                </a:solidFill>
+                <a:latin typeface="Play"/>
+                <a:ea typeface="Play"/>
+                <a:cs typeface="Play"/>
+              </a:rPr>
+              <a:t>Четвёртый квартал 2026: доступ для всей компании, интеграция с хранилищем</a:t>
+            </a:r>
+          </a:p>
+        </p:txBody>
+      </p:sp>
+      <p:sp>
+        <p:nvSpPr>
+          <p:cNvPr id="7" name="stat_2:bar"/>
+          <p:cNvSpPr/>
+          <p:nvPr/>
+        </p:nvSpPr>
+        <p:spPr>
+          <a:xfrm>
+            <a:off x="8204130" y="1961415"/>
+            <a:ext cx="50800" cy="2338832"/>
+          </a:xfrm>
+          <a:prstGeom prst="rect">
+            <a:avLst/>
+          </a:prstGeom>
+          <a:solidFill>
+            <a:srgbClr val="0077FF"/>
+          </a:solidFill>
+          <a:ln>
+            <a:noFill/>
+          </a:ln>
+          <a:effectLst/>
+        </p:spPr>
+        <p:style>
+          <a:lnRef idx="1">
+            <a:schemeClr val="accent1"/>
+          </a:lnRef>
+          <a:fillRef idx="3">
+            <a:schemeClr val="accent1"/>
+          </a:fillRef>
+          <a:effectRef idx="2">
+            <a:schemeClr val="accent1"/>
+          </a:effectRef>
+          <a:fontRef idx="minor">
+            <a:schemeClr val="lt1"/>
+          </a:fontRef>
+        </p:style>
+        <p:txBody>
+          <a:bodyPr rtlCol="0" anchor="ctr"/>
+          <a:lstStyle/>
+          <a:p>
+            <a:pPr algn="ctr"/>
+          </a:p>
+        </p:txBody>
+      </p:sp>
+      <p:sp>
+        <p:nvSpPr>
+          <p:cNvPr id="8" name="stat_2"/>
+          <p:cNvSpPr txBox="1"/>
+          <p:nvPr/>
+        </p:nvSpPr>
+        <p:spPr>
+          <a:xfrm>
+            <a:off x="8381930" y="1851687"/>
+            <a:ext cx="3151336" cy="2448560"/>
+          </a:xfrm>
+          <a:prstGeom prst="rect">
+            <a:avLst/>
+          </a:prstGeom>
+          <a:noFill/>
+        </p:spPr>
+        <p:txBody>
+          <a:bodyPr wrap="square" lIns="76200" rIns="76200" tIns="0" bIns="0">
+            <a:spAutoFit/>
+          </a:bodyPr>
+          <a:lstStyle/>
+          <a:p>
+            <a:pPr>
+              <a:lnSpc>
+                <a:spcPct val="100000"/>
+              </a:lnSpc>
+              <a:spcAft>
+                <a:spcPts val="200"/>
+              </a:spcAft>
+              <a:defRPr sz="4800" b="1">
+                <a:solidFill>
+                  <a:srgbClr val="0077FF"/>
+                </a:solidFill>
+                <a:latin typeface="Play"/>
+                <a:ea typeface="Play"/>
+                <a:cs typeface="Play"/>
+              </a:defRPr>
+            </a:pPr>
+            <a:r>
+              <a:rPr sz="4800" b="1">
+                <a:solidFill>
+                  <a:srgbClr val="0077FF"/>
+                </a:solidFill>
+                <a:latin typeface="Play"/>
+                <a:ea typeface="Play"/>
+                <a:cs typeface="Play"/>
+              </a:rPr>
+              <a:t>2027</a:t>
+            </a:r>
+          </a:p>
+          <a:p>
+            <a:pPr>
+              <a:spcAft>
+                <a:spcPts val="300"/>
+              </a:spcAft>
+              <a:defRPr sz="2400" b="0">
+                <a:solidFill>
+                  <a:srgbClr val="000000"/>
+                </a:solidFill>
+                <a:latin typeface="Play"/>
+                <a:ea typeface="Play"/>
+                <a:cs typeface="Play"/>
+              </a:defRPr>
+            </a:pPr>
+            <a:r>
+              <a:rPr sz="2400" b="0">
+                <a:solidFill>
+                  <a:srgbClr val="000000"/>
+                </a:solidFill>
+                <a:latin typeface="Play"/>
+                <a:ea typeface="Play"/>
+                <a:cs typeface="Play"/>
+              </a:rPr>
+              <a:t>Первый квартал 2027: генерация иллюстраций под стиль шаблона</a:t>
             </a:r>
           </a:p>
         </p:txBody>
@@ -15097,7 +14910,7 @@
       <p:grpSpPr/>
       <p:pic>
         <p:nvPicPr>
-          <p:cNvPr id="778" name="Google Shape;778;p59"/>
+          <p:cNvPr id="762" name="Google Shape;762;p58"/>
           <p:cNvPicPr preferRelativeResize="0"/>
           <p:nvPr/>
         </p:nvPicPr>
@@ -15110,61 +14923,7 @@
         </p:blipFill>
         <p:spPr>
           <a:xfrm>
-            <a:off x="8099424" y="2562300"/>
-            <a:ext cx="866700" cy="866700"/>
-          </a:xfrm>
-          <a:prstGeom prst="rect">
-            <a:avLst/>
-          </a:prstGeom>
-          <a:noFill/>
-          <a:ln>
-            <a:noFill/>
-          </a:ln>
-        </p:spPr>
-      </p:pic>
-      <p:pic>
-        <p:nvPicPr>
-          <p:cNvPr id="779" name="Google Shape;779;p59"/>
-          <p:cNvPicPr preferRelativeResize="0"/>
-          <p:nvPr/>
-        </p:nvPicPr>
-        <p:blipFill rotWithShape="1">
-          <a:blip r:embed="rId3">
-            <a:alphaModFix/>
-          </a:blip>
-          <a:srcRect b="0" l="0" r="0" t="0"/>
-          <a:stretch/>
-        </p:blipFill>
-        <p:spPr>
-          <a:xfrm>
-            <a:off x="4385469" y="2562300"/>
-            <a:ext cx="866700" cy="866700"/>
-          </a:xfrm>
-          <a:prstGeom prst="rect">
-            <a:avLst/>
-          </a:prstGeom>
-          <a:noFill/>
-          <a:ln>
-            <a:noFill/>
-          </a:ln>
-        </p:spPr>
-      </p:pic>
-      <p:pic>
-        <p:nvPicPr>
-          <p:cNvPr id="780" name="Google Shape;780;p59"/>
-          <p:cNvPicPr preferRelativeResize="0"/>
-          <p:nvPr/>
-        </p:nvPicPr>
-        <p:blipFill rotWithShape="1">
-          <a:blip r:embed="rId5">
-            <a:alphaModFix/>
-          </a:blip>
-          <a:srcRect b="0" l="0" r="0" t="0"/>
-          <a:stretch/>
-        </p:blipFill>
-        <p:spPr>
-          <a:xfrm>
-            <a:off x="671513" y="2562300"/>
+            <a:off x="8105070" y="2562300"/>
             <a:ext cx="866700" cy="866700"/>
           </a:xfrm>
           <a:prstGeom prst="rect">
@@ -15178,7 +14937,7 @@
       </p:pic>
       <p:sp>
         <p:nvSpPr>
-          <p:cNvPr id="782" name="Google Shape;782;p59"/>
+          <p:cNvPr id="764" name="Google Shape;764;p58"/>
           <p:cNvSpPr txBox="1"/>
           <p:nvPr/>
         </p:nvSpPr>
@@ -15235,14 +14994,92 @@
       </p:sp>
       <p:sp>
         <p:nvSpPr>
-          <p:cNvPr id="783" name="title"/>
+          <p:cNvPr id="768" name="Google Shape;768;p58"/>
+          <p:cNvSpPr/>
+          <p:nvPr/>
+        </p:nvSpPr>
+        <p:spPr>
+          <a:xfrm>
+            <a:off x="671513" y="2562300"/>
+            <a:ext cx="866700" cy="866700"/>
+          </a:xfrm>
+          <a:prstGeom prst="ellipse">
+            <a:avLst/>
+          </a:prstGeom>
+          <a:solidFill>
+            <a:schemeClr val="accent1"/>
+          </a:solidFill>
+          <a:ln>
+            <a:noFill/>
+          </a:ln>
+        </p:spPr>
+        <p:txBody>
+          <a:bodyPr anchorCtr="0" anchor="ctr" bIns="45700" lIns="91425" spcFirstLastPara="1" rIns="91425" wrap="square" tIns="45700">
+            <a:noAutofit/>
+          </a:bodyPr>
+          <a:lstStyle/>
+          <a:p>
+            <a:pPr indent="0" lvl="0" marL="0" marR="0" rtl="0" algn="ctr">
+              <a:spcBef>
+                <a:spcPts val="0"/>
+              </a:spcBef>
+              <a:spcAft>
+                <a:spcPts val="0"/>
+              </a:spcAft>
+              <a:buNone/>
+            </a:pPr>
+            <a:r>
+              <a:t/>
+            </a:r>
+            <a:endParaRPr sz="3200">
+              <a:solidFill>
+                <a:schemeClr val="lt1"/>
+              </a:solidFill>
+              <a:latin typeface="Play"/>
+              <a:ea typeface="Play"/>
+              <a:cs typeface="Play"/>
+              <a:sym typeface="Play"/>
+            </a:endParaRPr>
+          </a:p>
+        </p:txBody>
+      </p:sp>
+      <p:pic>
+        <p:nvPicPr>
+          <p:cNvPr id="771" name="Google Shape;771;p58"/>
+          <p:cNvPicPr preferRelativeResize="0"/>
+          <p:nvPr/>
+        </p:nvPicPr>
+        <p:blipFill rotWithShape="1">
+          <a:blip r:embed="rId5">
+            <a:alphaModFix/>
+          </a:blip>
+          <a:srcRect b="0" l="0" r="0" t="0"/>
+          <a:stretch/>
+        </p:blipFill>
+        <p:spPr>
+          <a:xfrm>
+            <a:off x="4385469" y="2562300"/>
+            <a:ext cx="866700" cy="866700"/>
+          </a:xfrm>
+          <a:prstGeom prst="rect">
+            <a:avLst/>
+          </a:prstGeom>
+          <a:noFill/>
+          <a:ln>
+            <a:noFill/>
+          </a:ln>
+        </p:spPr>
+      </p:pic>
+      <p:sp>
+        <p:nvSpPr>
+          <p:cNvPr id="772" name="title"/>
           <p:cNvSpPr txBox="1"/>
           <p:nvPr/>
         </p:nvSpPr>
         <p:spPr>
           <a:xfrm>
             <a:off x="677387" y="692177"/>
-            <a:ext cx="10855878" cy="822960"/>
+            <a:ext cx="10855878" cy="1447800"/>
           </a:xfrm>
           <a:prstGeom prst="rect">
             <a:avLst/>
@@ -15277,21 +15114,21 @@
                 <a:ea typeface="Arial"/>
                 <a:cs typeface="Arial"/>
               </a:rPr>
-              <a:t>Что мы просим решить</a:t>
+              <a:t>Запрос решения о запуске сервиса на всю компанию</a:t>
             </a:r>
           </a:p>
         </p:txBody>
       </p:sp>
       <p:sp>
         <p:nvSpPr>
-          <p:cNvPr id="784" name="card_0"/>
+          <p:cNvPr id="773" name="card_0"/>
           <p:cNvSpPr txBox="1"/>
           <p:nvPr/>
         </p:nvSpPr>
         <p:spPr>
           <a:xfrm>
             <a:off x="806889" y="3928712"/>
-            <a:ext cx="2583926" cy="937548"/>
+            <a:ext cx="2583926" cy="2251953"/>
           </a:xfrm>
           <a:prstGeom prst="rect">
             <a:avLst/>
@@ -15308,7 +15145,7 @@
               <a:spcAft>
                 <a:spcPts val="300"/>
               </a:spcAft>
-              <a:defRPr sz="1600" b="0">
+              <a:defRPr sz="1800" b="0">
                 <a:solidFill>
                   <a:srgbClr val="000000"/>
                 </a:solidFill>
@@ -15318,7 +15155,7 @@
               </a:defRPr>
             </a:pPr>
             <a:r>
-              <a:rPr sz="1600" b="0">
+              <a:rPr sz="1800" b="0">
                 <a:solidFill>
                   <a:srgbClr val="000000"/>
                 </a:solidFill>
@@ -15326,21 +15163,21 @@
                 <a:ea typeface="Play"/>
                 <a:cs typeface="Play"/>
               </a:rPr>
-              <a:t>Одобрить запуск сервиса на всю компанию</a:t>
+              <a:t>Решить о полном запуске сервиса</a:t>
             </a:r>
           </a:p>
         </p:txBody>
       </p:sp>
       <p:sp>
         <p:nvSpPr>
-          <p:cNvPr id="785" name="card_1"/>
+          <p:cNvPr id="774" name="card_1"/>
           <p:cNvSpPr txBox="1"/>
           <p:nvPr/>
         </p:nvSpPr>
         <p:spPr>
           <a:xfrm>
             <a:off x="4533496" y="3922334"/>
-            <a:ext cx="2583926" cy="937548"/>
+            <a:ext cx="2583926" cy="2258331"/>
           </a:xfrm>
           <a:prstGeom prst="rect">
             <a:avLst/>
@@ -15357,7 +15194,7 @@
               <a:spcAft>
                 <a:spcPts val="300"/>
               </a:spcAft>
-              <a:defRPr sz="1600" b="0">
+              <a:defRPr sz="1800" b="0">
                 <a:solidFill>
                   <a:srgbClr val="000000"/>
                 </a:solidFill>
@@ -15367,7 +15204,7 @@
               </a:defRPr>
             </a:pPr>
             <a:r>
-              <a:rPr sz="1600" b="0">
+              <a:rPr sz="1800" b="0">
                 <a:solidFill>
                   <a:srgbClr val="000000"/>
                 </a:solidFill>
@@ -15375,21 +15212,21 @@
                 <a:ea typeface="Play"/>
                 <a:cs typeface="Play"/>
               </a:rPr>
-              <a:t>Выделить бюджет на инфраструктуру и интеграцию</a:t>
+              <a:t>Подтвердить план по генерации иллюстраций в 1Q 2027</a:t>
             </a:r>
           </a:p>
         </p:txBody>
       </p:sp>
       <p:sp>
         <p:nvSpPr>
-          <p:cNvPr id="786" name="card_2"/>
+          <p:cNvPr id="775" name="card_2"/>
           <p:cNvSpPr txBox="1"/>
           <p:nvPr/>
         </p:nvSpPr>
         <p:spPr>
           <a:xfrm>
             <a:off x="8264469" y="3926700"/>
-            <a:ext cx="2575194" cy="1160137"/>
+            <a:ext cx="2575194" cy="2249599"/>
           </a:xfrm>
           <a:prstGeom prst="rect">
             <a:avLst/>
@@ -15424,43 +15261,121 @@
                 <a:ea typeface="Play"/>
                 <a:cs typeface="Play"/>
               </a:rPr>
-              <a:t>Назначить ответственных за внедрение</a:t>
+              <a:t>Обеспечить доступ для всех команд</a:t>
             </a:r>
           </a:p>
         </p:txBody>
       </p:sp>
       <p:grpSp>
         <p:nvGrpSpPr>
-          <p:cNvPr id="2" name="icon:builtin-check"/>
+          <p:cNvPr id="2" name="icon:builtin-rocket"/>
           <p:cNvGrpSpPr/>
           <p:nvPr/>
         </p:nvGrpSpPr>
         <p:grpSpPr>
           <a:xfrm>
-            <a:off x="935771" y="2826575"/>
-            <a:ext cx="338133" cy="338133"/>
-            <a:chOff x="935771" y="2826575"/>
-            <a:chExt cx="338133" cy="338133"/>
+            <a:off x="954556" y="2823720"/>
+            <a:ext cx="303418" cy="322203"/>
+            <a:chOff x="954556" y="2823720"/>
+            <a:chExt cx="303418" cy="322203"/>
           </a:xfrm>
         </p:grpSpPr>
         <p:sp>
           <p:nvSpPr>
-            <p:cNvPr id="787" name="Oval 786"/>
+            <p:cNvPr id="3" name="Freeform 2"/>
             <p:cNvSpPr/>
             <p:nvPr/>
           </p:nvSpPr>
           <p:spPr>
             <a:xfrm>
-              <a:off x="935771" y="2826575"/>
-              <a:ext cx="338133" cy="338133"/>
+              <a:off x="1029697" y="2823720"/>
+              <a:ext cx="228277" cy="247062"/>
             </a:xfrm>
-            <a:prstGeom prst="ellipse">
+            <a:custGeom>
               <a:avLst/>
-            </a:prstGeom>
+              <a:gdLst/>
+              <a:ahLst/>
+              <a:cxnLst/>
+              <a:rect l="l" t="t" r="r" b="b"/>
+              <a:pathLst>
+                <a:path w="228277" h="247062">
+                  <a:moveTo>
+                    <a:pt x="112711" y="21640"/>
+                  </a:moveTo>
+                  <a:lnTo>
+                    <a:pt x="129261" y="13769"/>
+                  </a:lnTo>
+                  <a:lnTo>
+                    <a:pt x="144984" y="7965"/>
+                  </a:lnTo>
+                  <a:lnTo>
+                    <a:pt x="159786" y="3963"/>
+                  </a:lnTo>
+                  <a:lnTo>
+                    <a:pt x="173481" y="1502"/>
+                  </a:lnTo>
+                  <a:lnTo>
+                    <a:pt x="185973" y="263"/>
+                  </a:lnTo>
+                  <a:lnTo>
+                    <a:pt x="197113" y="0"/>
+                  </a:lnTo>
+                  <a:lnTo>
+                    <a:pt x="206749" y="394"/>
+                  </a:lnTo>
+                  <a:lnTo>
+                    <a:pt x="214789" y="1202"/>
+                  </a:lnTo>
+                  <a:lnTo>
+                    <a:pt x="221045" y="2122"/>
+                  </a:lnTo>
+                  <a:lnTo>
+                    <a:pt x="225422" y="2855"/>
+                  </a:lnTo>
+                  <a:lnTo>
+                    <a:pt x="226173" y="7232"/>
+                  </a:lnTo>
+                  <a:lnTo>
+                    <a:pt x="227075" y="13487"/>
+                  </a:lnTo>
+                  <a:lnTo>
+                    <a:pt x="227864" y="21527"/>
+                  </a:lnTo>
+                  <a:lnTo>
+                    <a:pt x="228277" y="31164"/>
+                  </a:lnTo>
+                  <a:lnTo>
+                    <a:pt x="228014" y="42304"/>
+                  </a:lnTo>
+                  <a:lnTo>
+                    <a:pt x="226774" y="54796"/>
+                  </a:lnTo>
+                  <a:lnTo>
+                    <a:pt x="224314" y="68490"/>
+                  </a:lnTo>
+                  <a:lnTo>
+                    <a:pt x="220312" y="83293"/>
+                  </a:lnTo>
+                  <a:lnTo>
+                    <a:pt x="214526" y="99016"/>
+                  </a:lnTo>
+                  <a:lnTo>
+                    <a:pt x="206637" y="115566"/>
+                  </a:lnTo>
+                  <a:lnTo>
+                    <a:pt x="75141" y="247062"/>
+                  </a:lnTo>
+                  <a:lnTo>
+                    <a:pt x="0" y="171922"/>
+                  </a:lnTo>
+                  <a:close/>
+                </a:path>
+              </a:pathLst>
+            </a:custGeom>
             <a:noFill/>
             <a:ln w="37570" cap="rnd">
               <a:solidFill>
-                <a:srgbClr val="7CEDF8"/>
+                <a:srgbClr val="FFFFFF"/>
               </a:solidFill>
               <a:round/>
             </a:ln>
@@ -15490,14 +15405,14 @@
         </p:sp>
         <p:sp>
           <p:nvSpPr>
-            <p:cNvPr id="3" name="Freeform 2"/>
+            <p:cNvPr id="4" name="Freeform 3"/>
             <p:cNvSpPr/>
             <p:nvPr/>
           </p:nvSpPr>
           <p:spPr>
             <a:xfrm>
-              <a:off x="1029697" y="2939286"/>
-              <a:ext cx="150281" cy="112711"/>
+              <a:off x="973341" y="2920501"/>
+              <a:ext cx="131497" cy="75141"/>
             </a:xfrm>
             <a:custGeom>
               <a:avLst/>
@@ -15506,15 +15421,18 @@
               <a:cxnLst/>
               <a:rect l="l" t="t" r="r" b="b"/>
               <a:pathLst>
-                <a:path w="150281" h="112711">
+                <a:path w="131497" h="75141">
                   <a:moveTo>
-                    <a:pt x="0" y="56356"/>
+                    <a:pt x="56356" y="75141"/>
                   </a:moveTo>
                   <a:lnTo>
-                    <a:pt x="56355" y="112711"/>
-                  </a:lnTo>
-                  <a:lnTo>
-                    <a:pt x="150281" y="0"/>
+                    <a:pt x="0" y="75141"/>
+                  </a:lnTo>
+                  <a:lnTo>
+                    <a:pt x="56356" y="0"/>
+                  </a:lnTo>
+                  <a:lnTo>
+                    <a:pt x="131497" y="0"/>
                   </a:lnTo>
                 </a:path>
               </a:pathLst>
@@ -15522,7 +15440,233 @@
             <a:noFill/>
             <a:ln w="37570" cap="rnd">
               <a:solidFill>
-                <a:srgbClr val="7CEDF8"/>
+                <a:srgbClr val="FFFFFF"/>
+              </a:solidFill>
+              <a:round/>
+            </a:ln>
+            <a:effectLst/>
+          </p:spPr>
+          <p:style>
+            <a:lnRef idx="1">
+              <a:schemeClr val="accent1"/>
+            </a:lnRef>
+            <a:fillRef idx="3">
+              <a:schemeClr val="accent1"/>
+            </a:fillRef>
+            <a:effectRef idx="2">
+              <a:schemeClr val="accent1"/>
+            </a:effectRef>
+            <a:fontRef idx="minor">
+              <a:schemeClr val="lt1"/>
+            </a:fontRef>
+          </p:style>
+          <p:txBody>
+            <a:bodyPr rtlCol="0" anchor="ctr"/>
+            <a:lstStyle/>
+            <a:p>
+              <a:pPr algn="ctr"/>
+            </a:p>
+          </p:txBody>
+        </p:sp>
+        <p:sp>
+          <p:nvSpPr>
+            <p:cNvPr id="5" name="Freeform 4"/>
+            <p:cNvSpPr/>
+            <p:nvPr/>
+          </p:nvSpPr>
+          <p:spPr>
+            <a:xfrm>
+              <a:off x="1104838" y="2995642"/>
+              <a:ext cx="75140" cy="131496"/>
+            </a:xfrm>
+            <a:custGeom>
+              <a:avLst/>
+              <a:gdLst/>
+              <a:ahLst/>
+              <a:cxnLst/>
+              <a:rect l="l" t="t" r="r" b="b"/>
+              <a:pathLst>
+                <a:path w="75140" h="131496">
+                  <a:moveTo>
+                    <a:pt x="0" y="75140"/>
+                  </a:moveTo>
+                  <a:lnTo>
+                    <a:pt x="0" y="131496"/>
+                  </a:lnTo>
+                  <a:lnTo>
+                    <a:pt x="75140" y="75140"/>
+                  </a:lnTo>
+                  <a:lnTo>
+                    <a:pt x="75140" y="0"/>
+                  </a:lnTo>
+                </a:path>
+              </a:pathLst>
+            </a:custGeom>
+            <a:noFill/>
+            <a:ln w="37570" cap="rnd">
+              <a:solidFill>
+                <a:srgbClr val="FFFFFF"/>
+              </a:solidFill>
+              <a:round/>
+            </a:ln>
+            <a:effectLst/>
+          </p:spPr>
+          <p:style>
+            <a:lnRef idx="1">
+              <a:schemeClr val="accent1"/>
+            </a:lnRef>
+            <a:fillRef idx="3">
+              <a:schemeClr val="accent1"/>
+            </a:fillRef>
+            <a:effectRef idx="2">
+              <a:schemeClr val="accent1"/>
+            </a:effectRef>
+            <a:fontRef idx="minor">
+              <a:schemeClr val="lt1"/>
+            </a:fontRef>
+          </p:style>
+          <p:txBody>
+            <a:bodyPr rtlCol="0" anchor="ctr"/>
+            <a:lstStyle/>
+            <a:p>
+              <a:pPr algn="ctr"/>
+            </a:p>
+          </p:txBody>
+        </p:sp>
+        <p:sp>
+          <p:nvSpPr>
+            <p:cNvPr id="776" name="Oval 775"/>
+            <p:cNvSpPr/>
+            <p:nvPr/>
+          </p:nvSpPr>
+          <p:spPr>
+            <a:xfrm>
+              <a:off x="1144286" y="2903594"/>
+              <a:ext cx="52598" cy="52598"/>
+            </a:xfrm>
+            <a:prstGeom prst="ellipse">
+              <a:avLst/>
+            </a:prstGeom>
+            <a:noFill/>
+            <a:ln w="37570" cap="rnd">
+              <a:solidFill>
+                <a:srgbClr val="FFFFFF"/>
+              </a:solidFill>
+              <a:round/>
+            </a:ln>
+            <a:effectLst/>
+          </p:spPr>
+          <p:style>
+            <a:lnRef idx="1">
+              <a:schemeClr val="accent1"/>
+            </a:lnRef>
+            <a:fillRef idx="3">
+              <a:schemeClr val="accent1"/>
+            </a:fillRef>
+            <a:effectRef idx="2">
+              <a:schemeClr val="accent1"/>
+            </a:effectRef>
+            <a:fontRef idx="minor">
+              <a:schemeClr val="lt1"/>
+            </a:fontRef>
+          </p:style>
+          <p:txBody>
+            <a:bodyPr rtlCol="0" anchor="ctr"/>
+            <a:lstStyle/>
+            <a:p>
+              <a:pPr algn="ctr"/>
+            </a:p>
+          </p:txBody>
+        </p:sp>
+        <p:sp>
+          <p:nvSpPr>
+            <p:cNvPr id="6" name="Freeform 5"/>
+            <p:cNvSpPr/>
+            <p:nvPr/>
+          </p:nvSpPr>
+          <p:spPr>
+            <a:xfrm>
+              <a:off x="954556" y="3080175"/>
+              <a:ext cx="65748" cy="65748"/>
+            </a:xfrm>
+            <a:custGeom>
+              <a:avLst/>
+              <a:gdLst/>
+              <a:ahLst/>
+              <a:cxnLst/>
+              <a:rect l="l" t="t" r="r" b="b"/>
+              <a:pathLst>
+                <a:path w="65748" h="65748">
+                  <a:moveTo>
+                    <a:pt x="46963" y="0"/>
+                  </a:moveTo>
+                  <a:lnTo>
+                    <a:pt x="38792" y="3362"/>
+                  </a:lnTo>
+                  <a:lnTo>
+                    <a:pt x="31259" y="7739"/>
+                  </a:lnTo>
+                  <a:lnTo>
+                    <a:pt x="24383" y="13018"/>
+                  </a:lnTo>
+                  <a:lnTo>
+                    <a:pt x="18259" y="19085"/>
+                  </a:lnTo>
+                  <a:lnTo>
+                    <a:pt x="12924" y="25829"/>
+                  </a:lnTo>
+                  <a:lnTo>
+                    <a:pt x="8416" y="33137"/>
+                  </a:lnTo>
+                  <a:lnTo>
+                    <a:pt x="4809" y="40895"/>
+                  </a:lnTo>
+                  <a:lnTo>
+                    <a:pt x="2179" y="48991"/>
+                  </a:lnTo>
+                  <a:lnTo>
+                    <a:pt x="564" y="57313"/>
+                  </a:lnTo>
+                  <a:lnTo>
+                    <a:pt x="0" y="65748"/>
+                  </a:lnTo>
+                  <a:lnTo>
+                    <a:pt x="8435" y="65203"/>
+                  </a:lnTo>
+                  <a:lnTo>
+                    <a:pt x="16757" y="63569"/>
+                  </a:lnTo>
+                  <a:lnTo>
+                    <a:pt x="24853" y="60920"/>
+                  </a:lnTo>
+                  <a:lnTo>
+                    <a:pt x="32611" y="57332"/>
+                  </a:lnTo>
+                  <a:lnTo>
+                    <a:pt x="39919" y="52824"/>
+                  </a:lnTo>
+                  <a:lnTo>
+                    <a:pt x="46663" y="47489"/>
+                  </a:lnTo>
+                  <a:lnTo>
+                    <a:pt x="52730" y="41346"/>
+                  </a:lnTo>
+                  <a:lnTo>
+                    <a:pt x="58009" y="34489"/>
+                  </a:lnTo>
+                  <a:lnTo>
+                    <a:pt x="62386" y="26938"/>
+                  </a:lnTo>
+                  <a:lnTo>
+                    <a:pt x="65748" y="18785"/>
+                  </a:lnTo>
+                </a:path>
+              </a:pathLst>
+            </a:custGeom>
+            <a:noFill/>
+            <a:ln w="37570" cap="rnd">
+              <a:solidFill>
+                <a:srgbClr val="FFFFFF"/>
               </a:solidFill>
               <a:round/>
             </a:ln>
@@ -15553,376 +15697,36 @@
       </p:grpSp>
       <p:grpSp>
         <p:nvGrpSpPr>
-          <p:cNvPr id="4" name="icon:builtin-server"/>
+          <p:cNvPr id="7" name="icon:builtin-next"/>
           <p:cNvGrpSpPr/>
           <p:nvPr/>
         </p:nvGrpSpPr>
         <p:grpSpPr>
           <a:xfrm>
-            <a:off x="4630557" y="2845360"/>
-            <a:ext cx="338133" cy="300563"/>
-            <a:chOff x="4630557" y="2845360"/>
-            <a:chExt cx="338133" cy="300563"/>
+            <a:off x="4649698" y="2826575"/>
+            <a:ext cx="338133" cy="338133"/>
+            <a:chOff x="4649698" y="2826575"/>
+            <a:chExt cx="338133" cy="338133"/>
           </a:xfrm>
         </p:grpSpPr>
         <p:sp>
           <p:nvSpPr>
-            <p:cNvPr id="788" name="Rounded Rectangle 787"/>
+            <p:cNvPr id="777" name="Oval 776"/>
             <p:cNvSpPr/>
             <p:nvPr/>
           </p:nvSpPr>
           <p:spPr>
             <a:xfrm>
-              <a:off x="4630557" y="2845360"/>
-              <a:ext cx="338133" cy="131496"/>
+              <a:off x="4649698" y="2826575"/>
+              <a:ext cx="338133" cy="338133"/>
             </a:xfrm>
-            <a:prstGeom prst="roundRect">
-              <a:avLst>
-                <a:gd name="adj" fmla="val 28571"/>
-              </a:avLst>
+            <a:prstGeom prst="ellipse">
+              <a:avLst/>
             </a:prstGeom>
             <a:noFill/>
             <a:ln w="37570" cap="rnd">
               <a:solidFill>
                 <a:srgbClr val="FEFEFE"/>
-              </a:solidFill>
-              <a:round/>
-            </a:ln>
-            <a:effectLst/>
-          </p:spPr>
-          <p:style>
-            <a:lnRef idx="1">
-              <a:schemeClr val="accent1"/>
-            </a:lnRef>
-            <a:fillRef idx="3">
-              <a:schemeClr val="accent1"/>
-            </a:fillRef>
-            <a:effectRef idx="2">
-              <a:schemeClr val="accent1"/>
-            </a:effectRef>
-            <a:fontRef idx="minor">
-              <a:schemeClr val="lt1"/>
-            </a:fontRef>
-          </p:style>
-          <p:txBody>
-            <a:bodyPr rtlCol="0" anchor="ctr"/>
-            <a:lstStyle/>
-            <a:p>
-              <a:pPr algn="ctr"/>
-            </a:p>
-          </p:txBody>
-        </p:sp>
-        <p:sp>
-          <p:nvSpPr>
-            <p:cNvPr id="789" name="Rounded Rectangle 788"/>
-            <p:cNvSpPr/>
-            <p:nvPr/>
-          </p:nvSpPr>
-          <p:spPr>
-            <a:xfrm>
-              <a:off x="4630557" y="3014427"/>
-              <a:ext cx="338133" cy="131496"/>
-            </a:xfrm>
-            <a:prstGeom prst="roundRect">
-              <a:avLst>
-                <a:gd name="adj" fmla="val 28571"/>
-              </a:avLst>
-            </a:prstGeom>
-            <a:noFill/>
-            <a:ln w="37570" cap="rnd">
-              <a:solidFill>
-                <a:srgbClr val="FEFEFE"/>
-              </a:solidFill>
-              <a:round/>
-            </a:ln>
-            <a:effectLst/>
-          </p:spPr>
-          <p:style>
-            <a:lnRef idx="1">
-              <a:schemeClr val="accent1"/>
-            </a:lnRef>
-            <a:fillRef idx="3">
-              <a:schemeClr val="accent1"/>
-            </a:fillRef>
-            <a:effectRef idx="2">
-              <a:schemeClr val="accent1"/>
-            </a:effectRef>
-            <a:fontRef idx="minor">
-              <a:schemeClr val="lt1"/>
-            </a:fontRef>
-          </p:style>
-          <p:txBody>
-            <a:bodyPr rtlCol="0" anchor="ctr"/>
-            <a:lstStyle/>
-            <a:p>
-              <a:pPr algn="ctr"/>
-            </a:p>
-          </p:txBody>
-        </p:sp>
-        <p:sp>
-          <p:nvSpPr>
-            <p:cNvPr id="790" name="Oval 789"/>
-            <p:cNvSpPr/>
-            <p:nvPr/>
-          </p:nvSpPr>
-          <p:spPr>
-            <a:xfrm>
-              <a:off x="4685034" y="2890445"/>
-              <a:ext cx="41327" cy="41327"/>
-            </a:xfrm>
-            <a:prstGeom prst="ellipse">
-              <a:avLst/>
-            </a:prstGeom>
-            <a:solidFill>
-              <a:srgbClr val="FEFEFE"/>
-            </a:solidFill>
-            <a:ln>
-              <a:noFill/>
-            </a:ln>
-            <a:effectLst/>
-          </p:spPr>
-          <p:style>
-            <a:lnRef idx="1">
-              <a:schemeClr val="accent1"/>
-            </a:lnRef>
-            <a:fillRef idx="3">
-              <a:schemeClr val="accent1"/>
-            </a:fillRef>
-            <a:effectRef idx="2">
-              <a:schemeClr val="accent1"/>
-            </a:effectRef>
-            <a:fontRef idx="minor">
-              <a:schemeClr val="lt1"/>
-            </a:fontRef>
-          </p:style>
-          <p:txBody>
-            <a:bodyPr rtlCol="0" anchor="ctr"/>
-            <a:lstStyle/>
-            <a:p>
-              <a:pPr algn="ctr"/>
-            </a:p>
-          </p:txBody>
-        </p:sp>
-        <p:sp>
-          <p:nvSpPr>
-            <p:cNvPr id="791" name="Oval 790"/>
-            <p:cNvSpPr/>
-            <p:nvPr/>
-          </p:nvSpPr>
-          <p:spPr>
-            <a:xfrm>
-              <a:off x="4685034" y="3059511"/>
-              <a:ext cx="41327" cy="41327"/>
-            </a:xfrm>
-            <a:prstGeom prst="ellipse">
-              <a:avLst/>
-            </a:prstGeom>
-            <a:solidFill>
-              <a:srgbClr val="FEFEFE"/>
-            </a:solidFill>
-            <a:ln>
-              <a:noFill/>
-            </a:ln>
-            <a:effectLst/>
-          </p:spPr>
-          <p:style>
-            <a:lnRef idx="1">
-              <a:schemeClr val="accent1"/>
-            </a:lnRef>
-            <a:fillRef idx="3">
-              <a:schemeClr val="accent1"/>
-            </a:fillRef>
-            <a:effectRef idx="2">
-              <a:schemeClr val="accent1"/>
-            </a:effectRef>
-            <a:fontRef idx="minor">
-              <a:schemeClr val="lt1"/>
-            </a:fontRef>
-          </p:style>
-          <p:txBody>
-            <a:bodyPr rtlCol="0" anchor="ctr"/>
-            <a:lstStyle/>
-            <a:p>
-              <a:pPr algn="ctr"/>
-            </a:p>
-          </p:txBody>
-        </p:sp>
-      </p:grpSp>
-      <p:grpSp>
-        <p:nvGrpSpPr>
-          <p:cNvPr id="5" name="icon:builtin-rocket"/>
-          <p:cNvGrpSpPr/>
-          <p:nvPr/>
-        </p:nvGrpSpPr>
-        <p:grpSpPr>
-          <a:xfrm>
-            <a:off x="8392164" y="2845186"/>
-            <a:ext cx="303418" cy="322203"/>
-            <a:chOff x="8392164" y="2845186"/>
-            <a:chExt cx="303418" cy="322203"/>
-          </a:xfrm>
-        </p:grpSpPr>
-        <p:sp>
-          <p:nvSpPr>
-            <p:cNvPr id="6" name="Freeform 5"/>
-            <p:cNvSpPr/>
-            <p:nvPr/>
-          </p:nvSpPr>
-          <p:spPr>
-            <a:xfrm>
-              <a:off x="8467305" y="2845186"/>
-              <a:ext cx="228277" cy="247062"/>
-            </a:xfrm>
-            <a:custGeom>
-              <a:avLst/>
-              <a:gdLst/>
-              <a:ahLst/>
-              <a:cxnLst/>
-              <a:rect l="l" t="t" r="r" b="b"/>
-              <a:pathLst>
-                <a:path w="228277" h="247062">
-                  <a:moveTo>
-                    <a:pt x="112711" y="21640"/>
-                  </a:moveTo>
-                  <a:lnTo>
-                    <a:pt x="129261" y="13769"/>
-                  </a:lnTo>
-                  <a:lnTo>
-                    <a:pt x="144984" y="7965"/>
-                  </a:lnTo>
-                  <a:lnTo>
-                    <a:pt x="159786" y="3963"/>
-                  </a:lnTo>
-                  <a:lnTo>
-                    <a:pt x="173481" y="1502"/>
-                  </a:lnTo>
-                  <a:lnTo>
-                    <a:pt x="185973" y="263"/>
-                  </a:lnTo>
-                  <a:lnTo>
-                    <a:pt x="197113" y="0"/>
-                  </a:lnTo>
-                  <a:lnTo>
-                    <a:pt x="206749" y="394"/>
-                  </a:lnTo>
-                  <a:lnTo>
-                    <a:pt x="214789" y="1202"/>
-                  </a:lnTo>
-                  <a:lnTo>
-                    <a:pt x="221045" y="2122"/>
-                  </a:lnTo>
-                  <a:lnTo>
-                    <a:pt x="225422" y="2855"/>
-                  </a:lnTo>
-                  <a:lnTo>
-                    <a:pt x="226173" y="7232"/>
-                  </a:lnTo>
-                  <a:lnTo>
-                    <a:pt x="227075" y="13487"/>
-                  </a:lnTo>
-                  <a:lnTo>
-                    <a:pt x="227864" y="21527"/>
-                  </a:lnTo>
-                  <a:lnTo>
-                    <a:pt x="228277" y="31164"/>
-                  </a:lnTo>
-                  <a:lnTo>
-                    <a:pt x="228014" y="42304"/>
-                  </a:lnTo>
-                  <a:lnTo>
-                    <a:pt x="226774" y="54796"/>
-                  </a:lnTo>
-                  <a:lnTo>
-                    <a:pt x="224314" y="68490"/>
-                  </a:lnTo>
-                  <a:lnTo>
-                    <a:pt x="220312" y="83293"/>
-                  </a:lnTo>
-                  <a:lnTo>
-                    <a:pt x="214526" y="99016"/>
-                  </a:lnTo>
-                  <a:lnTo>
-                    <a:pt x="206637" y="115566"/>
-                  </a:lnTo>
-                  <a:lnTo>
-                    <a:pt x="75141" y="247062"/>
-                  </a:lnTo>
-                  <a:lnTo>
-                    <a:pt x="0" y="171922"/>
-                  </a:lnTo>
-                  <a:close/>
-                </a:path>
-              </a:pathLst>
-            </a:custGeom>
-            <a:noFill/>
-            <a:ln w="37570" cap="rnd">
-              <a:solidFill>
-                <a:srgbClr val="FF3885"/>
-              </a:solidFill>
-              <a:round/>
-            </a:ln>
-            <a:effectLst/>
-          </p:spPr>
-          <p:style>
-            <a:lnRef idx="1">
-              <a:schemeClr val="accent1"/>
-            </a:lnRef>
-            <a:fillRef idx="3">
-              <a:schemeClr val="accent1"/>
-            </a:fillRef>
-            <a:effectRef idx="2">
-              <a:schemeClr val="accent1"/>
-            </a:effectRef>
-            <a:fontRef idx="minor">
-              <a:schemeClr val="lt1"/>
-            </a:fontRef>
-          </p:style>
-          <p:txBody>
-            <a:bodyPr rtlCol="0" anchor="ctr"/>
-            <a:lstStyle/>
-            <a:p>
-              <a:pPr algn="ctr"/>
-            </a:p>
-          </p:txBody>
-        </p:sp>
-        <p:sp>
-          <p:nvSpPr>
-            <p:cNvPr id="7" name="Freeform 6"/>
-            <p:cNvSpPr/>
-            <p:nvPr/>
-          </p:nvSpPr>
-          <p:spPr>
-            <a:xfrm>
-              <a:off x="8410949" y="2941967"/>
-              <a:ext cx="131497" cy="75141"/>
-            </a:xfrm>
-            <a:custGeom>
-              <a:avLst/>
-              <a:gdLst/>
-              <a:ahLst/>
-              <a:cxnLst/>
-              <a:rect l="l" t="t" r="r" b="b"/>
-              <a:pathLst>
-                <a:path w="131497" h="75141">
-                  <a:moveTo>
-                    <a:pt x="56356" y="75141"/>
-                  </a:moveTo>
-                  <a:lnTo>
-                    <a:pt x="0" y="75141"/>
-                  </a:lnTo>
-                  <a:lnTo>
-                    <a:pt x="56356" y="0"/>
-                  </a:lnTo>
-                  <a:lnTo>
-                    <a:pt x="131497" y="0"/>
-                  </a:lnTo>
-                </a:path>
-              </a:pathLst>
-            </a:custGeom>
-            <a:noFill/>
-            <a:ln w="37570" cap="rnd">
-              <a:solidFill>
-                <a:srgbClr val="FF3885"/>
               </a:solidFill>
               <a:round/>
             </a:ln>
@@ -15958,8 +15762,8 @@
           </p:nvSpPr>
           <p:spPr>
             <a:xfrm>
-              <a:off x="8542446" y="3017108"/>
-              <a:ext cx="75140" cy="131496"/>
+              <a:off x="4743624" y="2995642"/>
+              <a:ext cx="150281" cy="0"/>
             </a:xfrm>
             <a:custGeom>
               <a:avLst/>
@@ -15968,18 +15772,12 @@
               <a:cxnLst/>
               <a:rect l="l" t="t" r="r" b="b"/>
               <a:pathLst>
-                <a:path w="75140" h="131496">
+                <a:path w="150281" h="0">
                   <a:moveTo>
-                    <a:pt x="0" y="75140"/>
+                    <a:pt x="0" y="0"/>
                   </a:moveTo>
                   <a:lnTo>
-                    <a:pt x="0" y="131496"/>
-                  </a:lnTo>
-                  <a:lnTo>
-                    <a:pt x="75140" y="75140"/>
-                  </a:lnTo>
-                  <a:lnTo>
-                    <a:pt x="75140" y="0"/>
+                    <a:pt x="150281" y="0"/>
                   </a:lnTo>
                 </a:path>
               </a:pathLst>
@@ -15987,52 +15785,7 @@
             <a:noFill/>
             <a:ln w="37570" cap="rnd">
               <a:solidFill>
-                <a:srgbClr val="FF3885"/>
-              </a:solidFill>
-              <a:round/>
-            </a:ln>
-            <a:effectLst/>
-          </p:spPr>
-          <p:style>
-            <a:lnRef idx="1">
-              <a:schemeClr val="accent1"/>
-            </a:lnRef>
-            <a:fillRef idx="3">
-              <a:schemeClr val="accent1"/>
-            </a:fillRef>
-            <a:effectRef idx="2">
-              <a:schemeClr val="accent1"/>
-            </a:effectRef>
-            <a:fontRef idx="minor">
-              <a:schemeClr val="lt1"/>
-            </a:fontRef>
-          </p:style>
-          <p:txBody>
-            <a:bodyPr rtlCol="0" anchor="ctr"/>
-            <a:lstStyle/>
-            <a:p>
-              <a:pPr algn="ctr"/>
-            </a:p>
-          </p:txBody>
-        </p:sp>
-        <p:sp>
-          <p:nvSpPr>
-            <p:cNvPr id="792" name="Oval 791"/>
-            <p:cNvSpPr/>
-            <p:nvPr/>
-          </p:nvSpPr>
-          <p:spPr>
-            <a:xfrm>
-              <a:off x="8581894" y="2925060"/>
-              <a:ext cx="52598" cy="52598"/>
-            </a:xfrm>
-            <a:prstGeom prst="ellipse">
-              <a:avLst/>
-            </a:prstGeom>
-            <a:noFill/>
-            <a:ln w="37570" cap="rnd">
-              <a:solidFill>
-                <a:srgbClr val="FF3885"/>
+                <a:srgbClr val="FEFEFE"/>
               </a:solidFill>
               <a:round/>
             </a:ln>
@@ -16068,8 +15821,8 @@
           </p:nvSpPr>
           <p:spPr>
             <a:xfrm>
-              <a:off x="8392164" y="3101641"/>
-              <a:ext cx="65748" cy="65748"/>
+              <a:off x="4818765" y="2920501"/>
+              <a:ext cx="75140" cy="150281"/>
             </a:xfrm>
             <a:custGeom>
               <a:avLst/>
@@ -16078,69 +15831,15 @@
               <a:cxnLst/>
               <a:rect l="l" t="t" r="r" b="b"/>
               <a:pathLst>
-                <a:path w="65748" h="65748">
+                <a:path w="75140" h="150281">
                   <a:moveTo>
-                    <a:pt x="46963" y="0"/>
+                    <a:pt x="0" y="0"/>
                   </a:moveTo>
                   <a:lnTo>
-                    <a:pt x="38792" y="3362"/>
-                  </a:lnTo>
-                  <a:lnTo>
-                    <a:pt x="31259" y="7739"/>
-                  </a:lnTo>
-                  <a:lnTo>
-                    <a:pt x="24383" y="13018"/>
-                  </a:lnTo>
-                  <a:lnTo>
-                    <a:pt x="18259" y="19085"/>
-                  </a:lnTo>
-                  <a:lnTo>
-                    <a:pt x="12924" y="25829"/>
-                  </a:lnTo>
-                  <a:lnTo>
-                    <a:pt x="8416" y="33137"/>
-                  </a:lnTo>
-                  <a:lnTo>
-                    <a:pt x="4809" y="40895"/>
-                  </a:lnTo>
-                  <a:lnTo>
-                    <a:pt x="2179" y="48991"/>
-                  </a:lnTo>
-                  <a:lnTo>
-                    <a:pt x="564" y="57313"/>
-                  </a:lnTo>
-                  <a:lnTo>
-                    <a:pt x="0" y="65748"/>
-                  </a:lnTo>
-                  <a:lnTo>
-                    <a:pt x="8435" y="65203"/>
-                  </a:lnTo>
-                  <a:lnTo>
-                    <a:pt x="16757" y="63569"/>
-                  </a:lnTo>
-                  <a:lnTo>
-                    <a:pt x="24853" y="60920"/>
-                  </a:lnTo>
-                  <a:lnTo>
-                    <a:pt x="32611" y="57332"/>
-                  </a:lnTo>
-                  <a:lnTo>
-                    <a:pt x="39919" y="52824"/>
-                  </a:lnTo>
-                  <a:lnTo>
-                    <a:pt x="46663" y="47489"/>
-                  </a:lnTo>
-                  <a:lnTo>
-                    <a:pt x="52730" y="41346"/>
-                  </a:lnTo>
-                  <a:lnTo>
-                    <a:pt x="58009" y="34489"/>
-                  </a:lnTo>
-                  <a:lnTo>
-                    <a:pt x="62386" y="26938"/>
-                  </a:lnTo>
-                  <a:lnTo>
-                    <a:pt x="65748" y="18785"/>
+                    <a:pt x="75140" y="75141"/>
+                  </a:lnTo>
+                  <a:lnTo>
+                    <a:pt x="0" y="150281"/>
                   </a:lnTo>
                 </a:path>
               </a:pathLst>
@@ -16148,7 +15847,179 @@
             <a:noFill/>
             <a:ln w="37570" cap="rnd">
               <a:solidFill>
-                <a:srgbClr val="FF3885"/>
+                <a:srgbClr val="FEFEFE"/>
+              </a:solidFill>
+              <a:round/>
+            </a:ln>
+            <a:effectLst/>
+          </p:spPr>
+          <p:style>
+            <a:lnRef idx="1">
+              <a:schemeClr val="accent1"/>
+            </a:lnRef>
+            <a:fillRef idx="3">
+              <a:schemeClr val="accent1"/>
+            </a:fillRef>
+            <a:effectRef idx="2">
+              <a:schemeClr val="accent1"/>
+            </a:effectRef>
+            <a:fontRef idx="minor">
+              <a:schemeClr val="lt1"/>
+            </a:fontRef>
+          </p:style>
+          <p:txBody>
+            <a:bodyPr rtlCol="0" anchor="ctr"/>
+            <a:lstStyle/>
+            <a:p>
+              <a:pPr algn="ctr"/>
+            </a:p>
+          </p:txBody>
+        </p:sp>
+      </p:grpSp>
+      <p:grpSp>
+        <p:nvGrpSpPr>
+          <p:cNvPr id="10" name="icon:builtin-lock"/>
+          <p:cNvGrpSpPr/>
+          <p:nvPr/>
+        </p:nvGrpSpPr>
+        <p:grpSpPr>
+          <a:xfrm>
+            <a:off x="8401317" y="2828770"/>
+            <a:ext cx="262992" cy="338132"/>
+            <a:chOff x="8401317" y="2828770"/>
+            <a:chExt cx="262992" cy="338132"/>
+          </a:xfrm>
+        </p:grpSpPr>
+        <p:sp>
+          <p:nvSpPr>
+            <p:cNvPr id="778" name="Rounded Rectangle 777"/>
+            <p:cNvSpPr/>
+            <p:nvPr/>
+          </p:nvSpPr>
+          <p:spPr>
+            <a:xfrm>
+              <a:off x="8401317" y="2979051"/>
+              <a:ext cx="262992" cy="187851"/>
+            </a:xfrm>
+            <a:prstGeom prst="roundRect">
+              <a:avLst>
+                <a:gd name="adj" fmla="val 20000"/>
+              </a:avLst>
+            </a:prstGeom>
+            <a:noFill/>
+            <a:ln w="37570" cap="rnd">
+              <a:solidFill>
+                <a:srgbClr val="0077FF"/>
+              </a:solidFill>
+              <a:round/>
+            </a:ln>
+            <a:effectLst/>
+          </p:spPr>
+          <p:style>
+            <a:lnRef idx="1">
+              <a:schemeClr val="accent1"/>
+            </a:lnRef>
+            <a:fillRef idx="3">
+              <a:schemeClr val="accent1"/>
+            </a:fillRef>
+            <a:effectRef idx="2">
+              <a:schemeClr val="accent1"/>
+            </a:effectRef>
+            <a:fontRef idx="minor">
+              <a:schemeClr val="lt1"/>
+            </a:fontRef>
+          </p:style>
+          <p:txBody>
+            <a:bodyPr rtlCol="0" anchor="ctr"/>
+            <a:lstStyle/>
+            <a:p>
+              <a:pPr algn="ctr"/>
+            </a:p>
+          </p:txBody>
+        </p:sp>
+        <p:sp>
+          <p:nvSpPr>
+            <p:cNvPr id="11" name="Freeform 10"/>
+            <p:cNvSpPr/>
+            <p:nvPr/>
+          </p:nvSpPr>
+          <p:spPr>
+            <a:xfrm>
+              <a:off x="8457673" y="2828770"/>
+              <a:ext cx="150281" cy="150281"/>
+            </a:xfrm>
+            <a:custGeom>
+              <a:avLst/>
+              <a:gdLst/>
+              <a:ahLst/>
+              <a:cxnLst/>
+              <a:rect l="l" t="t" r="r" b="b"/>
+              <a:pathLst>
+                <a:path w="150281" h="150281">
+                  <a:moveTo>
+                    <a:pt x="0" y="150281"/>
+                  </a:moveTo>
+                  <a:lnTo>
+                    <a:pt x="0" y="75141"/>
+                  </a:lnTo>
+                  <a:lnTo>
+                    <a:pt x="1446" y="60488"/>
+                  </a:lnTo>
+                  <a:lnTo>
+                    <a:pt x="5711" y="46381"/>
+                  </a:lnTo>
+                  <a:lnTo>
+                    <a:pt x="12661" y="33400"/>
+                  </a:lnTo>
+                  <a:lnTo>
+                    <a:pt x="22016" y="22016"/>
+                  </a:lnTo>
+                  <a:lnTo>
+                    <a:pt x="33400" y="12661"/>
+                  </a:lnTo>
+                  <a:lnTo>
+                    <a:pt x="46380" y="5711"/>
+                  </a:lnTo>
+                  <a:lnTo>
+                    <a:pt x="60488" y="1446"/>
+                  </a:lnTo>
+                  <a:lnTo>
+                    <a:pt x="75141" y="0"/>
+                  </a:lnTo>
+                  <a:lnTo>
+                    <a:pt x="89793" y="1446"/>
+                  </a:lnTo>
+                  <a:lnTo>
+                    <a:pt x="103901" y="5711"/>
+                  </a:lnTo>
+                  <a:lnTo>
+                    <a:pt x="116881" y="12661"/>
+                  </a:lnTo>
+                  <a:lnTo>
+                    <a:pt x="128265" y="22016"/>
+                  </a:lnTo>
+                  <a:lnTo>
+                    <a:pt x="137620" y="33400"/>
+                  </a:lnTo>
+                  <a:lnTo>
+                    <a:pt x="144570" y="46381"/>
+                  </a:lnTo>
+                  <a:lnTo>
+                    <a:pt x="148835" y="60488"/>
+                  </a:lnTo>
+                  <a:lnTo>
+                    <a:pt x="150281" y="75141"/>
+                  </a:lnTo>
+                  <a:lnTo>
+                    <a:pt x="150281" y="150281"/>
+                  </a:lnTo>
+                </a:path>
+              </a:pathLst>
+            </a:custGeom>
+            <a:noFill/>
+            <a:ln w="37570" cap="rnd">
+              <a:solidFill>
+                <a:srgbClr val="0077FF"/>
               </a:solidFill>
               <a:round/>
             </a:ln>
@@ -16204,7 +16075,7 @@
         <p:spPr>
           <a:xfrm>
             <a:off x="658855" y="692177"/>
-            <a:ext cx="5242438" cy="919480"/>
+            <a:ext cx="5242438" cy="1183640"/>
           </a:xfrm>
           <a:prstGeom prst="rect">
             <a:avLst/>
@@ -16221,7 +16092,7 @@
               <a:spcAft>
                 <a:spcPts val="300"/>
               </a:spcAft>
-              <a:defRPr sz="4800">
+              <a:defRPr sz="3200">
                 <a:solidFill>
                   <a:srgbClr val="FFFFFF"/>
                 </a:solidFill>
@@ -16231,7 +16102,7 @@
               </a:defRPr>
             </a:pPr>
             <a:r>
-              <a:rPr sz="4800">
+              <a:rPr sz="3200">
                 <a:solidFill>
                   <a:srgbClr val="FFFFFF"/>
                 </a:solidFill>
@@ -16239,7 +16110,7 @@
                 <a:ea typeface="Arial"/>
                 <a:cs typeface="Arial"/>
               </a:rPr>
-              <a:t>Заключение</a:t>
+              <a:t>Сервис повышает эффективность компании</a:t>
             </a:r>
           </a:p>
         </p:txBody>
@@ -16252,8 +16123,8 @@
         </p:nvSpPr>
         <p:spPr>
           <a:xfrm>
-            <a:off x="658855" y="2465070"/>
-            <a:ext cx="5242438" cy="1950720"/>
+            <a:off x="658855" y="2115847"/>
+            <a:ext cx="5242438" cy="3526708"/>
           </a:xfrm>
           <a:prstGeom prst="rect">
             <a:avLst/>
@@ -16288,7 +16159,7 @@
                 <a:ea typeface="Play"/>
                 <a:cs typeface="Play"/>
               </a:rPr>
-              <a:t>• Одобрить запуск сервиса на всю компанию</a:t>
+              <a:t>• Сервис повышает эффективность дизайнеров</a:t>
             </a:r>
           </a:p>
           <a:p>
@@ -16314,7 +16185,33 @@
                 <a:ea typeface="Play"/>
                 <a:cs typeface="Play"/>
               </a:rPr>
-              <a:t>• Назначить ответственных и выделить бюджет</a:t>
+              <a:t>• Сокращение времени сборки ускоряет коммуникацию</a:t>
+            </a:r>
+          </a:p>
+          <a:p>
+            <a:pPr algn="l">
+              <a:spcAft>
+                <a:spcPts val="300"/>
+              </a:spcAft>
+              <a:defRPr sz="2800">
+                <a:solidFill>
+                  <a:srgbClr val="FFFFFF"/>
+                </a:solidFill>
+                <a:latin typeface="Play"/>
+                <a:ea typeface="Play"/>
+                <a:cs typeface="Play"/>
+              </a:defRPr>
+            </a:pPr>
+            <a:r>
+              <a:rPr sz="2800">
+                <a:solidFill>
+                  <a:srgbClr val="FFFFFF"/>
+                </a:solidFill>
+                <a:latin typeface="Play"/>
+                <a:ea typeface="Play"/>
+                <a:cs typeface="Play"/>
+              </a:rPr>
+              <a:t>• Уменьшение ошибок стиля снижает риск недовольства заказчиков</a:t>
             </a:r>
           </a:p>
         </p:txBody>
